--- a/Bases de Datos II/Clases/Clase 6 - Optimizacion de consultas/Presentacion.pptx
+++ b/Bases de Datos II/Clases/Clase 6 - Optimizacion de consultas/Presentacion.pptx
@@ -11,51 +11,43 @@
     <p:sldId id="259" r:id="rId10"/>
     <p:sldId id="260" r:id="rId11"/>
     <p:sldId id="261" r:id="rId12"/>
-    <p:sldId id="262" r:id="rId13"/>
-    <p:sldId id="263" r:id="rId14"/>
-    <p:sldId id="264" r:id="rId15"/>
-    <p:sldId id="265" r:id="rId16"/>
-    <p:sldId id="266" r:id="rId17"/>
-    <p:sldId id="267" r:id="rId18"/>
-    <p:sldId id="268" r:id="rId19"/>
-    <p:sldId id="269" r:id="rId20"/>
-    <p:sldId id="270" r:id="rId21"/>
-    <p:sldId id="271" r:id="rId22"/>
-    <p:sldId id="272" r:id="rId23"/>
-    <p:sldId id="273" r:id="rId24"/>
-    <p:sldId id="274" r:id="rId25"/>
-    <p:sldId id="275" r:id="rId26"/>
-    <p:sldId id="276" r:id="rId27"/>
-    <p:sldId id="277" r:id="rId28"/>
-    <p:sldId id="278" r:id="rId29"/>
-    <p:sldId id="279" r:id="rId30"/>
-    <p:sldId id="280" r:id="rId31"/>
-    <p:sldId id="281" r:id="rId32"/>
-    <p:sldId id="282" r:id="rId33"/>
-    <p:sldId id="283" r:id="rId34"/>
-    <p:sldId id="284" r:id="rId35"/>
-    <p:sldId id="285" r:id="rId36"/>
-    <p:sldId id="286" r:id="rId37"/>
-    <p:sldId id="287" r:id="rId38"/>
-    <p:sldId id="288" r:id="rId39"/>
-    <p:sldId id="289" r:id="rId40"/>
-    <p:sldId id="290" r:id="rId41"/>
-    <p:sldId id="291" r:id="rId42"/>
-    <p:sldId id="292" r:id="rId43"/>
-    <p:sldId id="293" r:id="rId44"/>
-    <p:sldId id="294" r:id="rId45"/>
-    <p:sldId id="295" r:id="rId46"/>
-    <p:sldId id="296" r:id="rId47"/>
-    <p:sldId id="297" r:id="rId48"/>
-    <p:sldId id="298" r:id="rId49"/>
-    <p:sldId id="299" r:id="rId50"/>
-    <p:sldId id="300" r:id="rId51"/>
-    <p:sldId id="301" r:id="rId52"/>
-    <p:sldId id="302" r:id="rId53"/>
-    <p:sldId id="303" r:id="rId54"/>
-    <p:sldId id="304" r:id="rId55"/>
-    <p:sldId id="305" r:id="rId56"/>
-    <p:sldId id="306" r:id="rId57"/>
+    <p:sldId id="262" r:id="rId14"/>
+    <p:sldId id="263" r:id="rId15"/>
+    <p:sldId id="264" r:id="rId16"/>
+    <p:sldId id="265" r:id="rId17"/>
+    <p:sldId id="266" r:id="rId18"/>
+    <p:sldId id="267" r:id="rId19"/>
+    <p:sldId id="268" r:id="rId20"/>
+    <p:sldId id="269" r:id="rId21"/>
+    <p:sldId id="270" r:id="rId22"/>
+    <p:sldId id="271" r:id="rId23"/>
+    <p:sldId id="272" r:id="rId24"/>
+    <p:sldId id="273" r:id="rId25"/>
+    <p:sldId id="274" r:id="rId26"/>
+    <p:sldId id="275" r:id="rId27"/>
+    <p:sldId id="276" r:id="rId28"/>
+    <p:sldId id="277" r:id="rId29"/>
+    <p:sldId id="278" r:id="rId30"/>
+    <p:sldId id="279" r:id="rId31"/>
+    <p:sldId id="280" r:id="rId32"/>
+    <p:sldId id="281" r:id="rId33"/>
+    <p:sldId id="282" r:id="rId34"/>
+    <p:sldId id="283" r:id="rId35"/>
+    <p:sldId id="284" r:id="rId36"/>
+    <p:sldId id="285" r:id="rId37"/>
+    <p:sldId id="286" r:id="rId38"/>
+    <p:sldId id="287" r:id="rId39"/>
+    <p:sldId id="288" r:id="rId40"/>
+    <p:sldId id="289" r:id="rId41"/>
+    <p:sldId id="290" r:id="rId42"/>
+    <p:sldId id="291" r:id="rId43"/>
+    <p:sldId id="292" r:id="rId44"/>
+    <p:sldId id="293" r:id="rId45"/>
+    <p:sldId id="294" r:id="rId46"/>
+    <p:sldId id="295" r:id="rId47"/>
+    <p:sldId id="296" r:id="rId48"/>
+    <p:sldId id="297" r:id="rId49"/>
+    <p:sldId id="298" r:id="rId50"/>
   </p:sldIdLst>
   <p:sldSz cx="12191695" cy="6858000" type="screen4x3"/>
   <p:notesSz cx="6858000" cy="9144000"/>
@@ -155,6 +147,1046 @@
     </a:lvl9pPr>
   </p:defaultTextStyle>
 </p:presentation>
+</file>
+
+<file path=ppt/notesMasters/notesMaster1.xml><?xml version="1.0" encoding="utf-8"?>
+<p:notesMaster xmlns:a="http://schemas.openxmlformats.org/drawingml/2006/main" xmlns:p="http://schemas.openxmlformats.org/presentationml/2006/main" xmlns:r="http://schemas.openxmlformats.org/officeDocument/2006/relationships">
+  <p:cSld>
+    <p:bg>
+      <p:bgRef idx="1001">
+        <a:schemeClr val="bg1"/>
+      </p:bgRef>
+    </p:bg>
+    <p:spTree>
+      <p:nvGrpSpPr>
+        <p:cNvPr id="1" name=""/>
+        <p:cNvGrpSpPr/>
+        <p:nvPr/>
+      </p:nvGrpSpPr>
+      <p:grpSpPr>
+        <a:xfrm>
+          <a:off x="0" y="0"/>
+          <a:ext cx="0" cy="0"/>
+          <a:chOff x="0" y="0"/>
+          <a:chExt cx="0" cy="0"/>
+        </a:xfrm>
+      </p:grpSpPr>
+      <p:sp>
+        <p:nvSpPr>
+          <p:cNvPr id="2" name="Header Placeholder 1"/>
+          <p:cNvSpPr>
+            <a:spLocks noGrp="1"/>
+          </p:cNvSpPr>
+          <p:nvPr>
+            <p:ph type="hdr" sz="quarter"/>
+          </p:nvPr>
+        </p:nvSpPr>
+        <p:spPr>
+          <a:xfrm>
+            <a:off x="0" y="0"/>
+            <a:ext cx="2971800" cy="457200"/>
+          </a:xfrm>
+          <a:prstGeom prst="rect">
+            <a:avLst/>
+          </a:prstGeom>
+        </p:spPr>
+        <p:txBody>
+          <a:bodyPr vert="horz" lIns="91440" tIns="45720" rIns="91440" bIns="45720" rtlCol="0"/>
+          <a:lstStyle>
+            <a:lvl1pPr algn="l">
+              <a:defRPr sz="1200"/>
+            </a:lvl1pPr>
+          </a:lstStyle>
+          <a:p>
+            <a:endParaRPr lang="en-US"/>
+          </a:p>
+        </p:txBody>
+      </p:sp>
+      <p:sp>
+        <p:nvSpPr>
+          <p:cNvPr id="3" name="Date Placeholder 2"/>
+          <p:cNvSpPr>
+            <a:spLocks noGrp="1"/>
+          </p:cNvSpPr>
+          <p:nvPr>
+            <p:ph type="dt" idx="1"/>
+          </p:nvPr>
+        </p:nvSpPr>
+        <p:spPr>
+          <a:xfrm>
+            <a:off x="3884613" y="0"/>
+            <a:ext cx="2971800" cy="457200"/>
+          </a:xfrm>
+          <a:prstGeom prst="rect">
+            <a:avLst/>
+          </a:prstGeom>
+        </p:spPr>
+        <p:txBody>
+          <a:bodyPr vert="horz" lIns="91440" tIns="45720" rIns="91440" bIns="45720" rtlCol="0"/>
+          <a:lstStyle>
+            <a:lvl1pPr algn="r">
+              <a:defRPr sz="1200"/>
+            </a:lvl1pPr>
+          </a:lstStyle>
+          <a:p>
+            <a:fld id="{0F89C1C7-3DCD-1040-A9CF-14679D8B5DDD}" type="datetimeFigureOut">
+              <a:rPr lang="en-US" smtClean="0"/>
+              <a:t>10/17/16</a:t>
+            </a:fld>
+            <a:endParaRPr lang="en-US"/>
+          </a:p>
+        </p:txBody>
+      </p:sp>
+      <p:sp>
+        <p:nvSpPr>
+          <p:cNvPr id="4" name="Slide Image Placeholder 3"/>
+          <p:cNvSpPr>
+            <a:spLocks noGrp="1" noRot="1" noChangeAspect="1"/>
+          </p:cNvSpPr>
+          <p:nvPr>
+            <p:ph type="sldImg" idx="2"/>
+          </p:nvPr>
+        </p:nvSpPr>
+        <p:spPr>
+          <a:xfrm>
+            <a:off x="1143000" y="685800"/>
+            <a:ext cx="4572000" cy="3429000"/>
+          </a:xfrm>
+          <a:prstGeom prst="rect">
+            <a:avLst/>
+          </a:prstGeom>
+          <a:noFill/>
+          <a:ln w="12700">
+            <a:solidFill>
+              <a:prstClr val="black"/>
+            </a:solidFill>
+          </a:ln>
+        </p:spPr>
+        <p:txBody>
+          <a:bodyPr vert="horz" lIns="91440" tIns="45720" rIns="91440" bIns="45720" rtlCol="0" anchor="ctr"/>
+          <a:lstStyle/>
+          <a:p>
+            <a:endParaRPr lang="en-US"/>
+          </a:p>
+        </p:txBody>
+      </p:sp>
+      <p:sp>
+        <p:nvSpPr>
+          <p:cNvPr id="5" name="Notes Placeholder 4"/>
+          <p:cNvSpPr>
+            <a:spLocks noGrp="1"/>
+          </p:cNvSpPr>
+          <p:nvPr>
+            <p:ph type="body" sz="quarter" idx="3"/>
+          </p:nvPr>
+        </p:nvSpPr>
+        <p:spPr>
+          <a:xfrm>
+            <a:off x="685800" y="4343400"/>
+            <a:ext cx="5486400" cy="4114800"/>
+          </a:xfrm>
+          <a:prstGeom prst="rect">
+            <a:avLst/>
+          </a:prstGeom>
+        </p:spPr>
+        <p:txBody>
+          <a:bodyPr vert="horz" lIns="91440" tIns="45720" rIns="91440" bIns="45720" rtlCol="0"/>
+          <a:lstStyle/>
+          <a:p>
+            <a:pPr lvl="0"/>
+            <a:r>
+              <a:rPr lang="en-US" smtClean="0"/>
+              <a:t>Click to edit Master text styles</a:t>
+            </a:r>
+          </a:p>
+          <a:p>
+            <a:pPr lvl="1"/>
+            <a:r>
+              <a:rPr lang="en-US" smtClean="0"/>
+              <a:t>Second level</a:t>
+            </a:r>
+          </a:p>
+          <a:p>
+            <a:pPr lvl="2"/>
+            <a:r>
+              <a:rPr lang="en-US" smtClean="0"/>
+              <a:t>Third level</a:t>
+            </a:r>
+          </a:p>
+          <a:p>
+            <a:pPr lvl="3"/>
+            <a:r>
+              <a:rPr lang="en-US" smtClean="0"/>
+              <a:t>Fourth level</a:t>
+            </a:r>
+          </a:p>
+          <a:p>
+            <a:pPr lvl="4"/>
+            <a:r>
+              <a:rPr lang="en-US" smtClean="0"/>
+              <a:t>Fifth level</a:t>
+            </a:r>
+            <a:endParaRPr lang="en-US"/>
+          </a:p>
+        </p:txBody>
+      </p:sp>
+      <p:sp>
+        <p:nvSpPr>
+          <p:cNvPr id="6" name="Footer Placeholder 5"/>
+          <p:cNvSpPr>
+            <a:spLocks noGrp="1"/>
+          </p:cNvSpPr>
+          <p:nvPr>
+            <p:ph type="ftr" sz="quarter" idx="4"/>
+          </p:nvPr>
+        </p:nvSpPr>
+        <p:spPr>
+          <a:xfrm>
+            <a:off x="0" y="8685213"/>
+            <a:ext cx="2971800" cy="457200"/>
+          </a:xfrm>
+          <a:prstGeom prst="rect">
+            <a:avLst/>
+          </a:prstGeom>
+        </p:spPr>
+        <p:txBody>
+          <a:bodyPr vert="horz" lIns="91440" tIns="45720" rIns="91440" bIns="45720" rtlCol="0" anchor="b"/>
+          <a:lstStyle>
+            <a:lvl1pPr algn="l">
+              <a:defRPr sz="1200"/>
+            </a:lvl1pPr>
+          </a:lstStyle>
+          <a:p>
+            <a:endParaRPr lang="en-US"/>
+          </a:p>
+        </p:txBody>
+      </p:sp>
+      <p:sp>
+        <p:nvSpPr>
+          <p:cNvPr id="7" name="Slide Number Placeholder 6"/>
+          <p:cNvSpPr>
+            <a:spLocks noGrp="1"/>
+          </p:cNvSpPr>
+          <p:nvPr>
+            <p:ph type="sldNum" sz="quarter" idx="5"/>
+          </p:nvPr>
+        </p:nvSpPr>
+        <p:spPr>
+          <a:xfrm>
+            <a:off x="3884613" y="8685213"/>
+            <a:ext cx="2971800" cy="457200"/>
+          </a:xfrm>
+          <a:prstGeom prst="rect">
+            <a:avLst/>
+          </a:prstGeom>
+        </p:spPr>
+        <p:txBody>
+          <a:bodyPr vert="horz" lIns="91440" tIns="45720" rIns="91440" bIns="45720" rtlCol="0" anchor="b"/>
+          <a:lstStyle>
+            <a:lvl1pPr algn="r">
+              <a:defRPr sz="1200"/>
+            </a:lvl1pPr>
+          </a:lstStyle>
+          <a:p>
+            <a:fld id="{BB5E49A5-4136-284D-997B-48E1D791AD67}" type="slidenum">
+              <a:rPr lang="en-US" smtClean="0"/>
+              <a:t>‹#›</a:t>
+            </a:fld>
+            <a:endParaRPr lang="en-US"/>
+          </a:p>
+        </p:txBody>
+      </p:sp>
+    </p:spTree>
+    <p:extLst>
+      <p:ext uri="{BB962C8B-B14F-4D97-AF65-F5344CB8AC3E}">
+        <p14:creationId xmlns:p14="http://schemas.microsoft.com/office/powerpoint/2010/main" val="2623252185"/>
+      </p:ext>
+    </p:extLst>
+  </p:cSld>
+  <p:clrMap bg1="lt1" tx1="dk1" bg2="lt2" tx2="dk2" accent1="accent1" accent2="accent2" accent3="accent3" accent4="accent4" accent5="accent5" accent6="accent6" hlink="hlink" folHlink="folHlink"/>
+  <p:notesStyle>
+    <a:lvl1pPr marL="0" algn="l" defTabSz="457200" rtl="0" eaLnBrk="1" latinLnBrk="0" hangingPunct="1">
+      <a:defRPr sz="1200" kern="1200">
+        <a:solidFill>
+          <a:schemeClr val="tx1"/>
+        </a:solidFill>
+        <a:latin typeface="+mn-lt"/>
+        <a:ea typeface="+mn-ea"/>
+        <a:cs typeface="+mn-cs"/>
+      </a:defRPr>
+    </a:lvl1pPr>
+    <a:lvl2pPr marL="457200" algn="l" defTabSz="457200" rtl="0" eaLnBrk="1" latinLnBrk="0" hangingPunct="1">
+      <a:defRPr sz="1200" kern="1200">
+        <a:solidFill>
+          <a:schemeClr val="tx1"/>
+        </a:solidFill>
+        <a:latin typeface="+mn-lt"/>
+        <a:ea typeface="+mn-ea"/>
+        <a:cs typeface="+mn-cs"/>
+      </a:defRPr>
+    </a:lvl2pPr>
+    <a:lvl3pPr marL="914400" algn="l" defTabSz="457200" rtl="0" eaLnBrk="1" latinLnBrk="0" hangingPunct="1">
+      <a:defRPr sz="1200" kern="1200">
+        <a:solidFill>
+          <a:schemeClr val="tx1"/>
+        </a:solidFill>
+        <a:latin typeface="+mn-lt"/>
+        <a:ea typeface="+mn-ea"/>
+        <a:cs typeface="+mn-cs"/>
+      </a:defRPr>
+    </a:lvl3pPr>
+    <a:lvl4pPr marL="1371600" algn="l" defTabSz="457200" rtl="0" eaLnBrk="1" latinLnBrk="0" hangingPunct="1">
+      <a:defRPr sz="1200" kern="1200">
+        <a:solidFill>
+          <a:schemeClr val="tx1"/>
+        </a:solidFill>
+        <a:latin typeface="+mn-lt"/>
+        <a:ea typeface="+mn-ea"/>
+        <a:cs typeface="+mn-cs"/>
+      </a:defRPr>
+    </a:lvl4pPr>
+    <a:lvl5pPr marL="1828800" algn="l" defTabSz="457200" rtl="0" eaLnBrk="1" latinLnBrk="0" hangingPunct="1">
+      <a:defRPr sz="1200" kern="1200">
+        <a:solidFill>
+          <a:schemeClr val="tx1"/>
+        </a:solidFill>
+        <a:latin typeface="+mn-lt"/>
+        <a:ea typeface="+mn-ea"/>
+        <a:cs typeface="+mn-cs"/>
+      </a:defRPr>
+    </a:lvl5pPr>
+    <a:lvl6pPr marL="2286000" algn="l" defTabSz="457200" rtl="0" eaLnBrk="1" latinLnBrk="0" hangingPunct="1">
+      <a:defRPr sz="1200" kern="1200">
+        <a:solidFill>
+          <a:schemeClr val="tx1"/>
+        </a:solidFill>
+        <a:latin typeface="+mn-lt"/>
+        <a:ea typeface="+mn-ea"/>
+        <a:cs typeface="+mn-cs"/>
+      </a:defRPr>
+    </a:lvl6pPr>
+    <a:lvl7pPr marL="2743200" algn="l" defTabSz="457200" rtl="0" eaLnBrk="1" latinLnBrk="0" hangingPunct="1">
+      <a:defRPr sz="1200" kern="1200">
+        <a:solidFill>
+          <a:schemeClr val="tx1"/>
+        </a:solidFill>
+        <a:latin typeface="+mn-lt"/>
+        <a:ea typeface="+mn-ea"/>
+        <a:cs typeface="+mn-cs"/>
+      </a:defRPr>
+    </a:lvl7pPr>
+    <a:lvl8pPr marL="3200400" algn="l" defTabSz="457200" rtl="0" eaLnBrk="1" latinLnBrk="0" hangingPunct="1">
+      <a:defRPr sz="1200" kern="1200">
+        <a:solidFill>
+          <a:schemeClr val="tx1"/>
+        </a:solidFill>
+        <a:latin typeface="+mn-lt"/>
+        <a:ea typeface="+mn-ea"/>
+        <a:cs typeface="+mn-cs"/>
+      </a:defRPr>
+    </a:lvl8pPr>
+    <a:lvl9pPr marL="3657600" algn="l" defTabSz="457200" rtl="0" eaLnBrk="1" latinLnBrk="0" hangingPunct="1">
+      <a:defRPr sz="1200" kern="1200">
+        <a:solidFill>
+          <a:schemeClr val="tx1"/>
+        </a:solidFill>
+        <a:latin typeface="+mn-lt"/>
+        <a:ea typeface="+mn-ea"/>
+        <a:cs typeface="+mn-cs"/>
+      </a:defRPr>
+    </a:lvl9pPr>
+  </p:notesStyle>
+</p:notesMaster>
+</file>
+
+<file path=ppt/notesSlides/notesSlide1.xml><?xml version="1.0" encoding="utf-8"?>
+<p:notes xmlns:a="http://schemas.openxmlformats.org/drawingml/2006/main" xmlns:p="http://schemas.openxmlformats.org/presentationml/2006/main" xmlns:r="http://schemas.openxmlformats.org/officeDocument/2006/relationships">
+  <p:cSld>
+    <p:spTree>
+      <p:nvGrpSpPr>
+        <p:cNvPr id="1" name=""/>
+        <p:cNvGrpSpPr/>
+        <p:nvPr/>
+      </p:nvGrpSpPr>
+      <p:grpSpPr>
+        <a:xfrm>
+          <a:off x="0" y="0"/>
+          <a:ext cx="0" cy="0"/>
+          <a:chOff x="0" y="0"/>
+          <a:chExt cx="0" cy="0"/>
+        </a:xfrm>
+      </p:grpSpPr>
+      <p:sp>
+        <p:nvSpPr>
+          <p:cNvPr id="2" name="Slide Image Placeholder 1"/>
+          <p:cNvSpPr>
+            <a:spLocks noGrp="1"/>
+          </p:cNvSpPr>
+          <p:nvPr>
+            <p:ph type="sldImg" idx="2"/>
+          </p:nvPr>
+        </p:nvSpPr>
+        <p:spPr/>
+      </p:sp>
+      <p:sp>
+        <p:nvSpPr>
+          <p:cNvPr id="3" name="Notes Placeholder 2"/>
+          <p:cNvSpPr>
+            <a:spLocks noGrp="1"/>
+          </p:cNvSpPr>
+          <p:nvPr>
+            <p:ph type="body" idx="3" sz="quarter"/>
+          </p:nvPr>
+        </p:nvSpPr>
+        <p:spPr/>
+        <p:txBody>
+          <a:bodyPr/>
+          <a:lstStyle/>
+          <a:p>
+            <a:r>
+              <a:t>Y hay dos trampas al senalar el nodo mas costoso, que el docente tiene que conocer antes de calificar: el tiempo que muestra un nodo INCLUYE el de sus hijos, de modo que la primera linea siempre parece la mas cara sin serlo, y actual time es POR VUELTA, asi que el costo real de un nodo es su tiempo multiplicado por loops.</a:t>
+            </a:r>
+          </a:p>
+        </p:txBody>
+      </p:sp>
+      <p:sp>
+        <p:nvSpPr>
+          <p:cNvPr id="4" name="Slide Number Placeholder 3"/>
+          <p:cNvSpPr>
+            <a:spLocks noGrp="1"/>
+          </p:cNvSpPr>
+          <p:nvPr>
+            <p:ph type="sldNum" idx="5" sz="quarter"/>
+          </p:nvPr>
+        </p:nvSpPr>
+        <p:spPr/>
+      </p:sp>
+    </p:spTree>
+  </p:cSld>
+  <p:clrMapOvr>
+    <a:masterClrMapping/>
+  </p:clrMapOvr>
+</p:notes>
+</file>
+
+<file path=ppt/notesSlides/notesSlide2.xml><?xml version="1.0" encoding="utf-8"?>
+<p:notes xmlns:a="http://schemas.openxmlformats.org/drawingml/2006/main" xmlns:p="http://schemas.openxmlformats.org/presentationml/2006/main" xmlns:r="http://schemas.openxmlformats.org/officeDocument/2006/relationships">
+  <p:cSld>
+    <p:spTree>
+      <p:nvGrpSpPr>
+        <p:cNvPr id="1" name=""/>
+        <p:cNvGrpSpPr/>
+        <p:nvPr/>
+      </p:nvGrpSpPr>
+      <p:grpSpPr>
+        <a:xfrm>
+          <a:off x="0" y="0"/>
+          <a:ext cx="0" cy="0"/>
+          <a:chOff x="0" y="0"/>
+          <a:chExt cx="0" cy="0"/>
+        </a:xfrm>
+      </p:grpSpPr>
+      <p:sp>
+        <p:nvSpPr>
+          <p:cNvPr id="2" name="Slide Image Placeholder 1"/>
+          <p:cNvSpPr>
+            <a:spLocks noGrp="1"/>
+          </p:cNvSpPr>
+          <p:nvPr>
+            <p:ph type="sldImg" idx="2"/>
+          </p:nvPr>
+        </p:nvSpPr>
+        <p:spPr/>
+      </p:sp>
+      <p:sp>
+        <p:nvSpPr>
+          <p:cNvPr id="3" name="Notes Placeholder 2"/>
+          <p:cNvSpPr>
+            <a:spLocks noGrp="1"/>
+          </p:cNvSpPr>
+          <p:nvPr>
+            <p:ph type="body" idx="3" sz="quarter"/>
+          </p:nvPr>
+        </p:nvSpPr>
+        <p:spPr/>
+        <p:txBody>
+          <a:bodyPr/>
+          <a:lstStyle/>
+          <a:p>
+            <a:r>
+              <a:t>De ahi que se comparen rows estimadas contra actual rows, que es literalmente una de las tres columnas que pide la pregunta 2: una divergencia de 2 veces es normal, una de 10 veces o mas es la senal clasica de estadisticas viejas o de predicados correlacionados, y esa es tambien la sexta afirmacion de la pregunta 4, que es correcta.</a:t>
+            </a:r>
+          </a:p>
+          <a:p>
+            <a:r>
+              <a:t>Conviene marcar la diferencia de palabras en voz alta, porque van a aparecer las dos hoy: predicados correlacionados es esto, un asunto de estimacion; subconsulta correlacionada, la de la pregunta 3, es otra cosa completamente distinta y es un asunto de numero de ejecuciones.</a:t>
+            </a:r>
+          </a:p>
+        </p:txBody>
+      </p:sp>
+      <p:sp>
+        <p:nvSpPr>
+          <p:cNvPr id="4" name="Slide Number Placeholder 3"/>
+          <p:cNvSpPr>
+            <a:spLocks noGrp="1"/>
+          </p:cNvSpPr>
+          <p:nvPr>
+            <p:ph type="sldNum" idx="5" sz="quarter"/>
+          </p:nvPr>
+        </p:nvSpPr>
+        <p:spPr/>
+      </p:sp>
+    </p:spTree>
+  </p:cSld>
+  <p:clrMapOvr>
+    <a:masterClrMapping/>
+  </p:clrMapOvr>
+</p:notes>
+</file>
+
+<file path=ppt/notesSlides/notesSlide3.xml><?xml version="1.0" encoding="utf-8"?>
+<p:notes xmlns:a="http://schemas.openxmlformats.org/drawingml/2006/main" xmlns:p="http://schemas.openxmlformats.org/presentationml/2006/main" xmlns:r="http://schemas.openxmlformats.org/officeDocument/2006/relationships">
+  <p:cSld>
+    <p:spTree>
+      <p:nvGrpSpPr>
+        <p:cNvPr id="1" name=""/>
+        <p:cNvGrpSpPr/>
+        <p:nvPr/>
+      </p:nvGrpSpPr>
+      <p:grpSpPr>
+        <a:xfrm>
+          <a:off x="0" y="0"/>
+          <a:ext cx="0" cy="0"/>
+          <a:chOff x="0" y="0"/>
+          <a:chExt cx="0" cy="0"/>
+        </a:xfrm>
+      </p:grpSpPr>
+      <p:sp>
+        <p:nvSpPr>
+          <p:cNvPr id="2" name="Slide Image Placeholder 1"/>
+          <p:cNvSpPr>
+            <a:spLocks noGrp="1"/>
+          </p:cNvSpPr>
+          <p:nvPr>
+            <p:ph type="sldImg" idx="2"/>
+          </p:nvPr>
+        </p:nvSpPr>
+        <p:spPr/>
+      </p:sp>
+      <p:sp>
+        <p:nvSpPr>
+          <p:cNvPr id="3" name="Notes Placeholder 2"/>
+          <p:cNvSpPr>
+            <a:spLocks noGrp="1"/>
+          </p:cNvSpPr>
+          <p:nvPr>
+            <p:ph type="body" idx="3" sz="quarter"/>
+          </p:nvPr>
+        </p:nvSpPr>
+        <p:spPr/>
+        <p:txBody>
+          <a:bodyPr/>
+          <a:lstStyle/>
+          <a:p>
+            <a:r>
+              <a:t>Dos terminos explican por que el motor decide lo que decide.</a:t>
+            </a:r>
+          </a:p>
+        </p:txBody>
+      </p:sp>
+      <p:sp>
+        <p:nvSpPr>
+          <p:cNvPr id="4" name="Slide Number Placeholder 3"/>
+          <p:cNvSpPr>
+            <a:spLocks noGrp="1"/>
+          </p:cNvSpPr>
+          <p:nvPr>
+            <p:ph type="sldNum" idx="5" sz="quarter"/>
+          </p:nvPr>
+        </p:nvSpPr>
+        <p:spPr/>
+      </p:sp>
+    </p:spTree>
+  </p:cSld>
+  <p:clrMapOvr>
+    <a:masterClrMapping/>
+  </p:clrMapOvr>
+</p:notes>
+</file>
+
+<file path=ppt/notesSlides/notesSlide4.xml><?xml version="1.0" encoding="utf-8"?>
+<p:notes xmlns:a="http://schemas.openxmlformats.org/drawingml/2006/main" xmlns:p="http://schemas.openxmlformats.org/presentationml/2006/main" xmlns:r="http://schemas.openxmlformats.org/officeDocument/2006/relationships">
+  <p:cSld>
+    <p:spTree>
+      <p:nvGrpSpPr>
+        <p:cNvPr id="1" name=""/>
+        <p:cNvGrpSpPr/>
+        <p:nvPr/>
+      </p:nvGrpSpPr>
+      <p:grpSpPr>
+        <a:xfrm>
+          <a:off x="0" y="0"/>
+          <a:ext cx="0" cy="0"/>
+          <a:chOff x="0" y="0"/>
+          <a:chExt cx="0" cy="0"/>
+        </a:xfrm>
+      </p:grpSpPr>
+      <p:sp>
+        <p:nvSpPr>
+          <p:cNvPr id="2" name="Slide Image Placeholder 1"/>
+          <p:cNvSpPr>
+            <a:spLocks noGrp="1"/>
+          </p:cNvSpPr>
+          <p:nvPr>
+            <p:ph type="sldImg" idx="2"/>
+          </p:nvPr>
+        </p:nvSpPr>
+        <p:spPr/>
+      </p:sp>
+      <p:sp>
+        <p:nvSpPr>
+          <p:cNvPr id="3" name="Notes Placeholder 2"/>
+          <p:cNvSpPr>
+            <a:spLocks noGrp="1"/>
+          </p:cNvSpPr>
+          <p:nvPr>
+            <p:ph type="body" idx="3" sz="quarter"/>
+          </p:nvPr>
+        </p:nvSpPr>
+        <p:spPr/>
+        <p:txBody>
+          <a:bodyPr/>
+          <a:lstStyle/>
+          <a:p>
+            <a:r>
+              <a:t>Con eso se explica full table scan contra index scan sin caricaturas.</a:t>
+            </a:r>
+          </a:p>
+          <a:p>
+            <a:r>
+              <a:t>Por eso la Clase 7 tiene que MEDIRLO y no suponerlo.</a:t>
+            </a:r>
+          </a:p>
+        </p:txBody>
+      </p:sp>
+      <p:sp>
+        <p:nvSpPr>
+          <p:cNvPr id="4" name="Slide Number Placeholder 3"/>
+          <p:cNvSpPr>
+            <a:spLocks noGrp="1"/>
+          </p:cNvSpPr>
+          <p:nvPr>
+            <p:ph type="sldNum" idx="5" sz="quarter"/>
+          </p:nvPr>
+        </p:nvSpPr>
+        <p:spPr/>
+      </p:sp>
+    </p:spTree>
+  </p:cSld>
+  <p:clrMapOvr>
+    <a:masterClrMapping/>
+  </p:clrMapOvr>
+</p:notes>
+</file>
+
+<file path=ppt/notesSlides/notesSlide5.xml><?xml version="1.0" encoding="utf-8"?>
+<p:notes xmlns:a="http://schemas.openxmlformats.org/drawingml/2006/main" xmlns:p="http://schemas.openxmlformats.org/presentationml/2006/main" xmlns:r="http://schemas.openxmlformats.org/officeDocument/2006/relationships">
+  <p:cSld>
+    <p:spTree>
+      <p:nvGrpSpPr>
+        <p:cNvPr id="1" name=""/>
+        <p:cNvGrpSpPr/>
+        <p:nvPr/>
+      </p:nvGrpSpPr>
+      <p:grpSpPr>
+        <a:xfrm>
+          <a:off x="0" y="0"/>
+          <a:ext cx="0" cy="0"/>
+          <a:chOff x="0" y="0"/>
+          <a:chExt cx="0" cy="0"/>
+        </a:xfrm>
+      </p:grpSpPr>
+      <p:sp>
+        <p:nvSpPr>
+          <p:cNvPr id="2" name="Slide Image Placeholder 1"/>
+          <p:cNvSpPr>
+            <a:spLocks noGrp="1"/>
+          </p:cNvSpPr>
+          <p:nvPr>
+            <p:ph type="sldImg" idx="2"/>
+          </p:nvPr>
+        </p:nvSpPr>
+        <p:spPr/>
+      </p:sp>
+      <p:sp>
+        <p:nvSpPr>
+          <p:cNvPr id="3" name="Notes Placeholder 2"/>
+          <p:cNvSpPr>
+            <a:spLocks noGrp="1"/>
+          </p:cNvSpPr>
+          <p:nvPr>
+            <p:ph type="body" idx="3" sz="quarter"/>
+          </p:nvPr>
+        </p:nvSpPr>
+        <p:spPr/>
+        <p:txBody>
+          <a:bodyPr/>
+          <a:lstStyle/>
+          <a:p>
+            <a:r>
+              <a:t>Dos detalles que valen puntos y que el docente tiene que poder justificar en el momento.</a:t>
+            </a:r>
+          </a:p>
+          <a:p>
+            <a:r>
+              <a:t>No esta colgada.</a:t>
+            </a:r>
+          </a:p>
+        </p:txBody>
+      </p:sp>
+      <p:sp>
+        <p:nvSpPr>
+          <p:cNvPr id="4" name="Slide Number Placeholder 3"/>
+          <p:cNvSpPr>
+            <a:spLocks noGrp="1"/>
+          </p:cNvSpPr>
+          <p:nvPr>
+            <p:ph type="sldNum" idx="5" sz="quarter"/>
+          </p:nvPr>
+        </p:nvSpPr>
+        <p:spPr/>
+      </p:sp>
+    </p:spTree>
+  </p:cSld>
+  <p:clrMapOvr>
+    <a:masterClrMapping/>
+  </p:clrMapOvr>
+</p:notes>
+</file>
+
+<file path=ppt/notesSlides/notesSlide6.xml><?xml version="1.0" encoding="utf-8"?>
+<p:notes xmlns:a="http://schemas.openxmlformats.org/drawingml/2006/main" xmlns:p="http://schemas.openxmlformats.org/presentationml/2006/main" xmlns:r="http://schemas.openxmlformats.org/officeDocument/2006/relationships">
+  <p:cSld>
+    <p:spTree>
+      <p:nvGrpSpPr>
+        <p:cNvPr id="1" name=""/>
+        <p:cNvGrpSpPr/>
+        <p:nvPr/>
+      </p:nvGrpSpPr>
+      <p:grpSpPr>
+        <a:xfrm>
+          <a:off x="0" y="0"/>
+          <a:ext cx="0" cy="0"/>
+          <a:chOff x="0" y="0"/>
+          <a:chExt cx="0" cy="0"/>
+        </a:xfrm>
+      </p:grpSpPr>
+      <p:sp>
+        <p:nvSpPr>
+          <p:cNvPr id="2" name="Slide Image Placeholder 1"/>
+          <p:cNvSpPr>
+            <a:spLocks noGrp="1"/>
+          </p:cNvSpPr>
+          <p:nvPr>
+            <p:ph type="sldImg" idx="2"/>
+          </p:nvPr>
+        </p:nvSpPr>
+        <p:spPr/>
+      </p:sp>
+      <p:sp>
+        <p:nvSpPr>
+          <p:cNvPr id="3" name="Notes Placeholder 2"/>
+          <p:cNvSpPr>
+            <a:spLocks noGrp="1"/>
+          </p:cNvSpPr>
+          <p:nvPr>
+            <p:ph type="body" idx="3" sz="quarter"/>
+          </p:nvPr>
+        </p:nvSpPr>
+        <p:spPr/>
+        <p:txBody>
+          <a:bodyPr/>
+          <a:lstStyle/>
+          <a:p>
+            <a:r>
+              <a:t>Y se rompe sin avisar, porque ningun motor va a lanzar un error por eso.</a:t>
+            </a:r>
+          </a:p>
+          <a:p>
+            <a:r>
+              <a:t>Por eso el taller cobra la prueba dos veces, unos 6 de los 100 puntos, y hay dos formas segun lo que se compare.</a:t>
+            </a:r>
+          </a:p>
+          <a:p>
+            <a:r>
+              <a:t>Para conjuntos completos, donde el conteo puede coincidir con filas distintas, se usa EXCEPT en los DOS sentidos, y el docente tiene que saber por que son dos: A EXCEPT B devuelve lo que esta en A y no esta en B, asi que si sale vacio todavia puede haber filas de mas en B; se corren las dos direcciones unidas con UNION ALL y se exige cero filas en total.</a:t>
+            </a:r>
+          </a:p>
+          <a:p>
+            <a:r>
+              <a:t>Tres advertencias al calificar.</a:t>
+            </a:r>
+          </a:p>
+        </p:txBody>
+      </p:sp>
+      <p:sp>
+        <p:nvSpPr>
+          <p:cNvPr id="4" name="Slide Number Placeholder 3"/>
+          <p:cNvSpPr>
+            <a:spLocks noGrp="1"/>
+          </p:cNvSpPr>
+          <p:nvPr>
+            <p:ph type="sldNum" idx="5" sz="quarter"/>
+          </p:nvPr>
+        </p:nvSpPr>
+        <p:spPr/>
+      </p:sp>
+    </p:spTree>
+  </p:cSld>
+  <p:clrMapOvr>
+    <a:masterClrMapping/>
+  </p:clrMapOvr>
+</p:notes>
+</file>
+
+<file path=ppt/notesSlides/notesSlide7.xml><?xml version="1.0" encoding="utf-8"?>
+<p:notes xmlns:a="http://schemas.openxmlformats.org/drawingml/2006/main" xmlns:p="http://schemas.openxmlformats.org/presentationml/2006/main" xmlns:r="http://schemas.openxmlformats.org/officeDocument/2006/relationships">
+  <p:cSld>
+    <p:spTree>
+      <p:nvGrpSpPr>
+        <p:cNvPr id="1" name=""/>
+        <p:cNvGrpSpPr/>
+        <p:nvPr/>
+      </p:nvGrpSpPr>
+      <p:grpSpPr>
+        <a:xfrm>
+          <a:off x="0" y="0"/>
+          <a:ext cx="0" cy="0"/>
+          <a:chOff x="0" y="0"/>
+          <a:chExt cx="0" cy="0"/>
+        </a:xfrm>
+      </p:grpSpPr>
+      <p:sp>
+        <p:nvSpPr>
+          <p:cNvPr id="2" name="Slide Image Placeholder 1"/>
+          <p:cNvSpPr>
+            <a:spLocks noGrp="1"/>
+          </p:cNvSpPr>
+          <p:nvPr>
+            <p:ph type="sldImg" idx="2"/>
+          </p:nvPr>
+        </p:nvSpPr>
+        <p:spPr/>
+      </p:sp>
+      <p:sp>
+        <p:nvSpPr>
+          <p:cNvPr id="3" name="Notes Placeholder 2"/>
+          <p:cNvSpPr>
+            <a:spLocks noGrp="1"/>
+          </p:cNvSpPr>
+          <p:nvPr>
+            <p:ph type="body" idx="3" sz="quarter"/>
+          </p:nvPr>
+        </p:nvSpPr>
+        <p:spPr/>
+        <p:txBody>
+          <a:bodyPr/>
+          <a:lstStyle/>
+          <a:p>
+            <a:r>
+              <a:t>La version ANTES es SELECT * FROM cita c, mascota m, dueno d, veterinario v con las cuatro condiciones de union en el WHERE, to_char sobre la fecha y UPPER sobre el estado, y el docente debe saber que esta mal en cada linea.</a:t>
+            </a:r>
+          </a:p>
+          <a:p>
+            <a:r>
+              <a:t>SELECT * arrastra todas las columnas de las cuatro tablas cuando la pantalla de agenda necesita seis, lo cual multiplica el ancho de la fila y con el la memoria de trabajo del ordenamiento.</a:t>
+            </a:r>
+          </a:p>
+          <a:p>
+            <a:r>
+              <a:t>Las dos funciones sobre columnas se explicaron en el parrafo del predicado sargable.</a:t>
+            </a:r>
+          </a:p>
+          <a:p>
+            <a:r>
+              <a:t>Hay que decir aqui, y no despues, lo que la quinta afirmacion de la pregunta 4 castiga: cambiar la coma por JOIN...</a:t>
+            </a:r>
+          </a:p>
+          <a:p>
+            <a:r>
+              <a:t>ON no acelera nada, porque PostgreSQL normaliza las dos formas al mismo plan interno; se gana legibilidad y se gana que un ON faltante salte a la vista, o sea seguridad, no milisegundos.</a:t>
+            </a:r>
+          </a:p>
+          <a:p>
+            <a:r>
+              <a:t>Si el docente lo presenta como una mejora de rendimiento, esta ensenando justo la opcion por la que va a descontar.</a:t>
+            </a:r>
+          </a:p>
+          <a:p>
+            <a:r>
+              <a:t>La version DESPUES proyecta las seis columnas, escribe los tres JOIN...</a:t>
+            </a:r>
+          </a:p>
+        </p:txBody>
+      </p:sp>
+      <p:sp>
+        <p:nvSpPr>
+          <p:cNvPr id="4" name="Slide Number Placeholder 3"/>
+          <p:cNvSpPr>
+            <a:spLocks noGrp="1"/>
+          </p:cNvSpPr>
+          <p:nvPr>
+            <p:ph type="sldNum" idx="5" sz="quarter"/>
+          </p:nvPr>
+        </p:nvSpPr>
+        <p:spPr/>
+      </p:sp>
+    </p:spTree>
+  </p:cSld>
+  <p:clrMapOvr>
+    <a:masterClrMapping/>
+  </p:clrMapOvr>
+</p:notes>
+</file>
+
+<file path=ppt/notesSlides/notesSlide8.xml><?xml version="1.0" encoding="utf-8"?>
+<p:notes xmlns:a="http://schemas.openxmlformats.org/drawingml/2006/main" xmlns:p="http://schemas.openxmlformats.org/presentationml/2006/main" xmlns:r="http://schemas.openxmlformats.org/officeDocument/2006/relationships">
+  <p:cSld>
+    <p:spTree>
+      <p:nvGrpSpPr>
+        <p:cNvPr id="1" name=""/>
+        <p:cNvGrpSpPr/>
+        <p:nvPr/>
+      </p:nvGrpSpPr>
+      <p:grpSpPr>
+        <a:xfrm>
+          <a:off x="0" y="0"/>
+          <a:ext cx="0" cy="0"/>
+          <a:chOff x="0" y="0"/>
+          <a:chExt cx="0" cy="0"/>
+        </a:xfrm>
+      </p:grpSpPr>
+      <p:sp>
+        <p:nvSpPr>
+          <p:cNvPr id="2" name="Slide Image Placeholder 1"/>
+          <p:cNvSpPr>
+            <a:spLocks noGrp="1"/>
+          </p:cNvSpPr>
+          <p:nvPr>
+            <p:ph type="sldImg" idx="2"/>
+          </p:nvPr>
+        </p:nvSpPr>
+        <p:spPr/>
+      </p:sp>
+      <p:sp>
+        <p:nvSpPr>
+          <p:cNvPr id="3" name="Notes Placeholder 2"/>
+          <p:cNvSpPr>
+            <a:spLocks noGrp="1"/>
+          </p:cNvSpPr>
+          <p:nvPr>
+            <p:ph type="body" idx="3" sz="quarter"/>
+          </p:nvPr>
+        </p:nvSpPr>
+        <p:spPr/>
+        <p:txBody>
+          <a:bodyPr/>
+          <a:lstStyle/>
+          <a:p>
+            <a:r>
+              <a:t>Lo que hay que documentar en papel, porque el entorno no lo permite y es literalmente la seccion 5 de la pregunta 5: los tiempos con la memoria intermedia vacia, ya que vaciarla exige privilegios de administrador; el comportamiento con varias sesiones compitiendo, que es la Clase 10; y cualquier comparacion por encima de unos cientos de miles de filas.</a:t>
+            </a:r>
+          </a:p>
+        </p:txBody>
+      </p:sp>
+      <p:sp>
+        <p:nvSpPr>
+          <p:cNvPr id="4" name="Slide Number Placeholder 3"/>
+          <p:cNvSpPr>
+            <a:spLocks noGrp="1"/>
+          </p:cNvSpPr>
+          <p:nvPr>
+            <p:ph type="sldNum" idx="5" sz="quarter"/>
+          </p:nvPr>
+        </p:nvSpPr>
+        <p:spPr/>
+      </p:sp>
+    </p:spTree>
+  </p:cSld>
+  <p:clrMapOvr>
+    <a:masterClrMapping/>
+  </p:clrMapOvr>
+</p:notes>
+</file>
+
+<file path=ppt/notesSlides/notesSlide9.xml><?xml version="1.0" encoding="utf-8"?>
+<p:notes xmlns:a="http://schemas.openxmlformats.org/drawingml/2006/main" xmlns:p="http://schemas.openxmlformats.org/presentationml/2006/main" xmlns:r="http://schemas.openxmlformats.org/officeDocument/2006/relationships">
+  <p:cSld>
+    <p:spTree>
+      <p:nvGrpSpPr>
+        <p:cNvPr id="1" name=""/>
+        <p:cNvGrpSpPr/>
+        <p:nvPr/>
+      </p:nvGrpSpPr>
+      <p:grpSpPr>
+        <a:xfrm>
+          <a:off x="0" y="0"/>
+          <a:ext cx="0" cy="0"/>
+          <a:chOff x="0" y="0"/>
+          <a:chExt cx="0" cy="0"/>
+        </a:xfrm>
+      </p:grpSpPr>
+      <p:sp>
+        <p:nvSpPr>
+          <p:cNvPr id="2" name="Slide Image Placeholder 1"/>
+          <p:cNvSpPr>
+            <a:spLocks noGrp="1"/>
+          </p:cNvSpPr>
+          <p:nvPr>
+            <p:ph type="sldImg" idx="2"/>
+          </p:nvPr>
+        </p:nvSpPr>
+        <p:spPr/>
+      </p:sp>
+      <p:sp>
+        <p:nvSpPr>
+          <p:cNvPr id="3" name="Notes Placeholder 2"/>
+          <p:cNvSpPr>
+            <a:spLocks noGrp="1"/>
+          </p:cNvSpPr>
+          <p:nvPr>
+            <p:ph type="body" idx="3" sz="quarter"/>
+          </p:nvPr>
+        </p:nvSpPr>
+        <p:spPr/>
+        <p:txBody>
+          <a:bodyPr/>
+          <a:lstStyle/>
+          <a:p>
+            <a:r>
+              <a:t>Cuatro preguntas aparecen siempre.</a:t>
+            </a:r>
+          </a:p>
+        </p:txBody>
+      </p:sp>
+      <p:sp>
+        <p:nvSpPr>
+          <p:cNvPr id="4" name="Slide Number Placeholder 3"/>
+          <p:cNvSpPr>
+            <a:spLocks noGrp="1"/>
+          </p:cNvSpPr>
+          <p:nvPr>
+            <p:ph type="sldNum" idx="5" sz="quarter"/>
+          </p:nvPr>
+        </p:nvSpPr>
+        <p:spPr/>
+      </p:sp>
+    </p:spTree>
+  </p:cSld>
+  <p:clrMapOvr>
+    <a:masterClrMapping/>
+  </p:clrMapOvr>
+</p:notes>
 </file>
 
 <file path=ppt/slideLayouts/slideLayout1.xml><?xml version="1.0" encoding="utf-8"?>
@@ -6352,7 +7384,7 @@
                 </a:solidFill>
                 <a:latin typeface="Calibri"/>
               </a:rPr>
-              <a:t>Encuadre de hoy · Objetivo PI</a:t>
+              <a:t>Encuadre de hoy · Tema y objetivo</a:t>
             </a:r>
           </a:p>
         </p:txBody>
@@ -6400,7 +7432,7 @@
                 </a:solidFill>
                 <a:latin typeface="Calibri"/>
               </a:rPr>
-              <a:t>Hoy avanzamos el PI en:</a:t>
+              <a:t>Tema de hoy:</a:t>
             </a:r>
             <a:r>
               <a:rPr sz="2000" b="0" i="0">
@@ -6409,7 +7441,7 @@
                 </a:solidFill>
                 <a:latin typeface="Calibri"/>
               </a:rPr>
-              <a:t> Primera pareja de consultas antes/despues del PI</a:t>
+              <a:t> Optimizacion de consultas · VetCare</a:t>
             </a:r>
           </a:p>
           <a:p>
@@ -6454,15 +7486,6 @@
               </a:rPr>
               <a:t>120 min</a:t>
             </a:r>
-            <a:r>
-              <a:rPr sz="2000" b="0" i="0">
-                <a:solidFill>
-                  <a:srgbClr val="333333"/>
-                </a:solidFill>
-                <a:latin typeface="Calibri"/>
-              </a:rPr>
-              <a:t> · Teoría breve · Taller PI</a:t>
-            </a:r>
           </a:p>
           <a:p>
             <a:pPr>
@@ -6477,25 +7500,7 @@
                 </a:solidFill>
                 <a:latin typeface="Calibri"/>
               </a:rPr>
-              <a:t>–   </a:t>
-            </a:r>
-            <a:r>
-              <a:rPr sz="2000" b="1" i="0">
-                <a:solidFill>
-                  <a:srgbClr val="333333"/>
-                </a:solidFill>
-                <a:latin typeface="Calibri"/>
-              </a:rPr>
-              <a:t>Entregable de hoy:</a:t>
-            </a:r>
-            <a:r>
-              <a:rPr sz="2000" b="0" i="0">
-                <a:solidFill>
-                  <a:srgbClr val="333333"/>
-                </a:solidFill>
-                <a:latin typeface="Calibri"/>
-              </a:rPr>
-              <a:t> 2 consultas (antes/despues) + justificacion (media pag.)</a:t>
+              <a:t>–   Gratis + navegador · free tier · sin software de pago obligatorio.</a:t>
             </a:r>
           </a:p>
           <a:p>
@@ -6511,7 +7516,7 @@
                 </a:solidFill>
                 <a:latin typeface="Calibri"/>
               </a:rPr>
-              <a:t>–   Gratis + navegador · free tier · sin software de pago obligatorio.</a:t>
+              <a:t>–   Recorrido: teoría del tema, una lámina por concepto, y demo del docente sobre VetCare DB.</a:t>
             </a:r>
           </a:p>
           <a:p>
@@ -6527,23 +7532,7 @@
                 </a:solidFill>
                 <a:latin typeface="Calibri"/>
               </a:rPr>
-              <a:t>–   La teoría no es un tema aislado: alimenta evidencias de la rúbrica del PI.</a:t>
-            </a:r>
-          </a:p>
-          <a:p>
-            <a:pPr>
-              <a:spcAft>
-                <a:spcPts val="800"/>
-              </a:spcAft>
-            </a:pPr>
-            <a:r>
-              <a:rPr sz="2000" b="0" i="0">
-                <a:solidFill>
-                  <a:srgbClr val="333333"/>
-                </a:solidFill>
-                <a:latin typeface="Calibri"/>
-              </a:rPr>
-              <a:t>–   Al salir: avance concreto en su paquete VetCare.</a:t>
+              <a:t>–   Cada lámina se sostiene sola: sirve para repasar aunque hayas faltado.</a:t>
             </a:r>
           </a:p>
         </p:txBody>
@@ -9915,7 +10904,7 @@
                 </a:solidFill>
                 <a:latin typeface="Calibri"/>
               </a:rPr>
-              <a:t>Taller guiado = tarea del PI</a:t>
+              <a:t>Práctica (opcional, guía en la carpeta)</a:t>
             </a:r>
           </a:p>
         </p:txBody>
@@ -10030,7 +11019,7 @@
                 </a:solidFill>
                 <a:latin typeface="Calibri"/>
               </a:rPr>
-              <a:t>Criterios de exito · cierre · dudas del PI</a:t>
+              <a:t>Cierre conceptual · dudas</a:t>
             </a:r>
           </a:p>
         </p:txBody>
@@ -16022,13 +17011,13 @@
         <p:spPr>
           <a:xfrm>
             <a:off x="0" y="0"/>
-            <a:ext cx="12191695" cy="1170432"/>
+            <a:ext cx="12191695" cy="164592"/>
           </a:xfrm>
           <a:prstGeom prst="rect">
             <a:avLst/>
           </a:prstGeom>
           <a:solidFill>
-            <a:srgbClr val="095292"/>
+            <a:srgbClr val="269CCB"/>
           </a:solidFill>
           <a:ln>
             <a:noFill/>
@@ -16056,251 +17045,9 @@
           </a:p>
         </p:txBody>
       </p:sp>
-      <p:sp>
-        <p:nvSpPr>
-          <p:cNvPr id="3" name="Rectangle 2"/>
-          <p:cNvSpPr/>
-          <p:nvPr/>
-        </p:nvSpPr>
-        <p:spPr>
-          <a:xfrm>
-            <a:off x="0" y="1170432"/>
-            <a:ext cx="12191695" cy="41148"/>
-          </a:xfrm>
-          <a:prstGeom prst="rect">
-            <a:avLst/>
-          </a:prstGeom>
-          <a:solidFill>
-            <a:srgbClr val="FFD000"/>
-          </a:solidFill>
-          <a:ln>
-            <a:noFill/>
-          </a:ln>
-        </p:spPr>
-        <p:style>
-          <a:lnRef idx="1">
-            <a:schemeClr val="accent1"/>
-          </a:lnRef>
-          <a:fillRef idx="3">
-            <a:schemeClr val="accent1"/>
-          </a:fillRef>
-          <a:effectRef idx="2">
-            <a:schemeClr val="accent1"/>
-          </a:effectRef>
-          <a:fontRef idx="minor">
-            <a:schemeClr val="lt1"/>
-          </a:fontRef>
-        </p:style>
-        <p:txBody>
-          <a:bodyPr rtlCol="0" anchor="ctr"/>
-          <a:lstStyle/>
-          <a:p>
-            <a:pPr algn="ctr"/>
-          </a:p>
-        </p:txBody>
-      </p:sp>
-      <p:sp>
-        <p:nvSpPr>
-          <p:cNvPr id="4" name="TextBox 3"/>
-          <p:cNvSpPr txBox="1"/>
-          <p:nvPr/>
-        </p:nvSpPr>
-        <p:spPr>
-          <a:xfrm>
-            <a:off x="457200" y="164592"/>
-            <a:ext cx="11277295" cy="384048"/>
-          </a:xfrm>
-          <a:prstGeom prst="rect">
-            <a:avLst/>
-          </a:prstGeom>
-          <a:noFill/>
-        </p:spPr>
-        <p:txBody>
-          <a:bodyPr wrap="square">
-            <a:spAutoFit/>
-          </a:bodyPr>
-          <a:lstStyle/>
-          <a:p>
-            <a:r>
-              <a:rPr sz="2600" b="1" i="0">
-                <a:solidFill>
-                  <a:srgbClr val="FFFFFF"/>
-                </a:solidFill>
-                <a:latin typeface="Calibri"/>
-              </a:rPr>
-              <a:t>Herramientas de hoy</a:t>
-            </a:r>
-          </a:p>
-        </p:txBody>
-      </p:sp>
-      <p:sp>
-        <p:nvSpPr>
-          <p:cNvPr id="5" name="TextBox 4"/>
-          <p:cNvSpPr txBox="1"/>
-          <p:nvPr/>
-        </p:nvSpPr>
-        <p:spPr>
-          <a:xfrm>
-            <a:off x="457200" y="566928"/>
-            <a:ext cx="11277295" cy="411480"/>
-          </a:xfrm>
-          <a:prstGeom prst="rect">
-            <a:avLst/>
-          </a:prstGeom>
-          <a:noFill/>
-        </p:spPr>
-        <p:txBody>
-          <a:bodyPr wrap="square">
-            <a:spAutoFit/>
-          </a:bodyPr>
-          <a:lstStyle/>
-          <a:p>
-            <a:r>
-              <a:rPr sz="1400" b="0" i="0">
-                <a:solidFill>
-                  <a:srgbClr val="B8D8EE"/>
-                </a:solidFill>
-                <a:latin typeface="Calibri"/>
-              </a:rPr>
-              <a:t>Gratis · navegador o free tier</a:t>
-            </a:r>
-          </a:p>
-        </p:txBody>
-      </p:sp>
-      <p:sp>
-        <p:nvSpPr>
-          <p:cNvPr id="6" name="Rounded Rectangle 5"/>
-          <p:cNvSpPr/>
-          <p:nvPr/>
-        </p:nvSpPr>
-        <p:spPr>
-          <a:xfrm>
-            <a:off x="457200" y="1591056"/>
-            <a:ext cx="5538063" cy="2331720"/>
-          </a:xfrm>
-          <a:prstGeom prst="roundRect">
-            <a:avLst>
-              <a:gd name="adj" fmla="val 12000"/>
-            </a:avLst>
-          </a:prstGeom>
-          <a:solidFill>
-            <a:srgbClr val="F2F2F2"/>
-          </a:solidFill>
-          <a:ln>
-            <a:noFill/>
-          </a:ln>
-        </p:spPr>
-        <p:style>
-          <a:lnRef idx="1">
-            <a:schemeClr val="accent1"/>
-          </a:lnRef>
-          <a:fillRef idx="3">
-            <a:schemeClr val="accent1"/>
-          </a:fillRef>
-          <a:effectRef idx="2">
-            <a:schemeClr val="accent1"/>
-          </a:effectRef>
-          <a:fontRef idx="minor">
-            <a:schemeClr val="lt1"/>
-          </a:fontRef>
-        </p:style>
-        <p:txBody>
-          <a:bodyPr rtlCol="0" anchor="ctr"/>
-          <a:lstStyle/>
-          <a:p>
-            <a:pPr algn="ctr"/>
-          </a:p>
-        </p:txBody>
-      </p:sp>
-      <p:sp>
-        <p:nvSpPr>
-          <p:cNvPr id="7" name="Rectangle 6"/>
-          <p:cNvSpPr/>
-          <p:nvPr/>
-        </p:nvSpPr>
-        <p:spPr>
-          <a:xfrm>
-            <a:off x="457200" y="1591056"/>
-            <a:ext cx="5538063" cy="64008"/>
-          </a:xfrm>
-          <a:prstGeom prst="rect">
-            <a:avLst/>
-          </a:prstGeom>
-          <a:solidFill>
-            <a:srgbClr val="095292"/>
-          </a:solidFill>
-          <a:ln>
-            <a:noFill/>
-          </a:ln>
-        </p:spPr>
-        <p:style>
-          <a:lnRef idx="1">
-            <a:schemeClr val="accent1"/>
-          </a:lnRef>
-          <a:fillRef idx="3">
-            <a:schemeClr val="accent1"/>
-          </a:fillRef>
-          <a:effectRef idx="2">
-            <a:schemeClr val="accent1"/>
-          </a:effectRef>
-          <a:fontRef idx="minor">
-            <a:schemeClr val="lt1"/>
-          </a:fontRef>
-        </p:style>
-        <p:txBody>
-          <a:bodyPr rtlCol="0" anchor="ctr"/>
-          <a:lstStyle/>
-          <a:p>
-            <a:pPr algn="ctr"/>
-          </a:p>
-        </p:txBody>
-      </p:sp>
-      <p:sp>
-        <p:nvSpPr>
-          <p:cNvPr id="8" name="Rectangle 7"/>
-          <p:cNvSpPr/>
-          <p:nvPr/>
-        </p:nvSpPr>
-        <p:spPr>
-          <a:xfrm>
-            <a:off x="457200" y="1655064"/>
-            <a:ext cx="5538063" cy="27432"/>
-          </a:xfrm>
-          <a:prstGeom prst="rect">
-            <a:avLst/>
-          </a:prstGeom>
-          <a:solidFill>
-            <a:srgbClr val="FFD000"/>
-          </a:solidFill>
-          <a:ln>
-            <a:noFill/>
-          </a:ln>
-        </p:spPr>
-        <p:style>
-          <a:lnRef idx="1">
-            <a:schemeClr val="accent1"/>
-          </a:lnRef>
-          <a:fillRef idx="3">
-            <a:schemeClr val="accent1"/>
-          </a:fillRef>
-          <a:effectRef idx="2">
-            <a:schemeClr val="accent1"/>
-          </a:effectRef>
-          <a:fontRef idx="minor">
-            <a:schemeClr val="lt1"/>
-          </a:fontRef>
-        </p:style>
-        <p:txBody>
-          <a:bodyPr rtlCol="0" anchor="ctr"/>
-          <a:lstStyle/>
-          <a:p>
-            <a:pPr algn="ctr"/>
-          </a:p>
-        </p:txBody>
-      </p:sp>
       <p:pic>
         <p:nvPicPr>
-          <p:cNvPr id="9" name="Picture 8" descr="examlab.png"/>
+          <p:cNvPr id="3" name="Picture 2" descr="logo_uniajc_color.png"/>
           <p:cNvPicPr>
             <a:picLocks noChangeAspect="1"/>
           </p:cNvPicPr>
@@ -16314,8 +17061,8 @@
         </p:blipFill>
         <p:spPr>
           <a:xfrm>
-            <a:off x="2599867" y="1847087"/>
-            <a:ext cx="1252728" cy="1252728"/>
+            <a:off x="10271455" y="5998464"/>
+            <a:ext cx="1463040" cy="643233"/>
           </a:xfrm>
           <a:prstGeom prst="rect">
             <a:avLst/>
@@ -16324,14 +17071,14 @@
       </p:pic>
       <p:sp>
         <p:nvSpPr>
-          <p:cNvPr id="10" name="TextBox 9"/>
+          <p:cNvPr id="4" name="TextBox 3"/>
           <p:cNvSpPr txBox="1"/>
           <p:nvPr/>
         </p:nvSpPr>
         <p:spPr>
           <a:xfrm>
-            <a:off x="530352" y="3191256"/>
-            <a:ext cx="5391759" cy="621792"/>
+            <a:off x="457200" y="1737360"/>
+            <a:ext cx="11277295" cy="1097280"/>
           </a:xfrm>
           <a:prstGeom prst="rect">
             <a:avLst/>
@@ -16339,252 +17086,32 @@
           <a:noFill/>
         </p:spPr>
         <p:txBody>
-          <a:bodyPr wrap="square" anchor="t"/>
+          <a:bodyPr wrap="square" anchor="ctr"/>
           <a:lstStyle/>
           <a:p>
             <a:pPr algn="ctr"/>
             <a:r>
-              <a:rPr sz="1300" b="1" i="0">
+              <a:rPr sz="3400" b="1" i="0">
                 <a:solidFill>
                   <a:srgbClr val="095292"/>
                 </a:solidFill>
                 <a:latin typeface="Calibri"/>
               </a:rPr>
-              <a:t>la plataforma del curso</a:t>
-            </a:r>
-          </a:p>
-          <a:p>
-            <a:pPr algn="ctr">
-              <a:spcBef>
-                <a:spcPts val="200"/>
-              </a:spcBef>
-            </a:pPr>
-            <a:r>
-              <a:rPr sz="1000" b="0" i="0">
-                <a:solidFill>
-                  <a:srgbClr val="666666"/>
-                </a:solidFill>
-                <a:latin typeface="Calibri"/>
-              </a:rPr>
-              <a:t>PostgreSQL con volumen</a:t>
-            </a:r>
-          </a:p>
-        </p:txBody>
-      </p:sp>
-      <p:sp>
-        <p:nvSpPr>
-          <p:cNvPr id="11" name="Rounded Rectangle 10"/>
-          <p:cNvSpPr/>
-          <p:nvPr/>
-        </p:nvSpPr>
-        <p:spPr>
-          <a:xfrm>
-            <a:off x="6196431" y="1591056"/>
-            <a:ext cx="5538063" cy="2331720"/>
-          </a:xfrm>
-          <a:prstGeom prst="roundRect">
-            <a:avLst>
-              <a:gd name="adj" fmla="val 12000"/>
-            </a:avLst>
-          </a:prstGeom>
-          <a:solidFill>
-            <a:srgbClr val="F2F2F2"/>
-          </a:solidFill>
-          <a:ln>
-            <a:noFill/>
-          </a:ln>
-        </p:spPr>
-        <p:style>
-          <a:lnRef idx="1">
-            <a:schemeClr val="accent1"/>
-          </a:lnRef>
-          <a:fillRef idx="3">
-            <a:schemeClr val="accent1"/>
-          </a:fillRef>
-          <a:effectRef idx="2">
-            <a:schemeClr val="accent1"/>
-          </a:effectRef>
-          <a:fontRef idx="minor">
-            <a:schemeClr val="lt1"/>
-          </a:fontRef>
-        </p:style>
-        <p:txBody>
-          <a:bodyPr rtlCol="0" anchor="ctr"/>
-          <a:lstStyle/>
-          <a:p>
-            <a:pPr algn="ctr"/>
-          </a:p>
-        </p:txBody>
-      </p:sp>
-      <p:sp>
-        <p:nvSpPr>
-          <p:cNvPr id="12" name="Rectangle 11"/>
-          <p:cNvSpPr/>
-          <p:nvPr/>
-        </p:nvSpPr>
-        <p:spPr>
-          <a:xfrm>
-            <a:off x="6196431" y="1591056"/>
-            <a:ext cx="5538063" cy="64008"/>
-          </a:xfrm>
-          <a:prstGeom prst="rect">
-            <a:avLst/>
-          </a:prstGeom>
-          <a:solidFill>
-            <a:srgbClr val="095292"/>
-          </a:solidFill>
-          <a:ln>
-            <a:noFill/>
-          </a:ln>
-        </p:spPr>
-        <p:style>
-          <a:lnRef idx="1">
-            <a:schemeClr val="accent1"/>
-          </a:lnRef>
-          <a:fillRef idx="3">
-            <a:schemeClr val="accent1"/>
-          </a:fillRef>
-          <a:effectRef idx="2">
-            <a:schemeClr val="accent1"/>
-          </a:effectRef>
-          <a:fontRef idx="minor">
-            <a:schemeClr val="lt1"/>
-          </a:fontRef>
-        </p:style>
-        <p:txBody>
-          <a:bodyPr rtlCol="0" anchor="ctr"/>
-          <a:lstStyle/>
-          <a:p>
-            <a:pPr algn="ctr"/>
-          </a:p>
-        </p:txBody>
-      </p:sp>
-      <p:sp>
-        <p:nvSpPr>
-          <p:cNvPr id="13" name="Rectangle 12"/>
-          <p:cNvSpPr/>
-          <p:nvPr/>
-        </p:nvSpPr>
-        <p:spPr>
-          <a:xfrm>
-            <a:off x="6196431" y="1655064"/>
-            <a:ext cx="5538063" cy="27432"/>
-          </a:xfrm>
-          <a:prstGeom prst="rect">
-            <a:avLst/>
-          </a:prstGeom>
-          <a:solidFill>
-            <a:srgbClr val="FFD000"/>
-          </a:solidFill>
-          <a:ln>
-            <a:noFill/>
-          </a:ln>
-        </p:spPr>
-        <p:style>
-          <a:lnRef idx="1">
-            <a:schemeClr val="accent1"/>
-          </a:lnRef>
-          <a:fillRef idx="3">
-            <a:schemeClr val="accent1"/>
-          </a:fillRef>
-          <a:effectRef idx="2">
-            <a:schemeClr val="accent1"/>
-          </a:effectRef>
-          <a:fontRef idx="minor">
-            <a:schemeClr val="lt1"/>
-          </a:fontRef>
-        </p:style>
-        <p:txBody>
-          <a:bodyPr rtlCol="0" anchor="ctr"/>
-          <a:lstStyle/>
-          <a:p>
-            <a:pPr algn="ctr"/>
-          </a:p>
-        </p:txBody>
-      </p:sp>
-      <p:pic>
-        <p:nvPicPr>
-          <p:cNvPr id="14" name="Picture 13" descr="google_docs.png"/>
-          <p:cNvPicPr>
-            <a:picLocks noChangeAspect="1"/>
-          </p:cNvPicPr>
-          <p:nvPr/>
-        </p:nvPicPr>
-        <p:blipFill>
-          <a:blip r:embed="rId3"/>
-          <a:stretch>
-            <a:fillRect/>
-          </a:stretch>
-        </p:blipFill>
-        <p:spPr>
-          <a:xfrm>
-            <a:off x="8339099" y="1847087"/>
-            <a:ext cx="1252728" cy="1252728"/>
-          </a:xfrm>
-          <a:prstGeom prst="rect">
-            <a:avLst/>
-          </a:prstGeom>
-        </p:spPr>
-      </p:pic>
-      <p:sp>
-        <p:nvSpPr>
-          <p:cNvPr id="15" name="TextBox 14"/>
+              <a:t>Clase 6 · Optimizacion de consultas · VetCare</a:t>
+            </a:r>
+          </a:p>
+        </p:txBody>
+      </p:sp>
+      <p:sp>
+        <p:nvSpPr>
+          <p:cNvPr id="5" name="TextBox 4"/>
           <p:cNvSpPr txBox="1"/>
           <p:nvPr/>
         </p:nvSpPr>
         <p:spPr>
           <a:xfrm>
-            <a:off x="6269583" y="3191256"/>
-            <a:ext cx="5391759" cy="621792"/>
-          </a:xfrm>
-          <a:prstGeom prst="rect">
-            <a:avLst/>
-          </a:prstGeom>
-          <a:noFill/>
-        </p:spPr>
-        <p:txBody>
-          <a:bodyPr wrap="square" anchor="t"/>
-          <a:lstStyle/>
-          <a:p>
-            <a:pPr algn="ctr"/>
-            <a:r>
-              <a:rPr sz="1300" b="1" i="0">
-                <a:solidFill>
-                  <a:srgbClr val="095292"/>
-                </a:solidFill>
-                <a:latin typeface="Calibri"/>
-              </a:rPr>
-              <a:t>Google Docs</a:t>
-            </a:r>
-          </a:p>
-          <a:p>
-            <a:pPr algn="ctr">
-              <a:spcBef>
-                <a:spcPts val="200"/>
-              </a:spcBef>
-            </a:pPr>
-            <a:r>
-              <a:rPr sz="1000" b="0" i="0">
-                <a:solidFill>
-                  <a:srgbClr val="666666"/>
-                </a:solidFill>
-                <a:latin typeface="Calibri"/>
-              </a:rPr>
-              <a:t>Justificacion</a:t>
-            </a:r>
-          </a:p>
-        </p:txBody>
-      </p:sp>
-      <p:sp>
-        <p:nvSpPr>
-          <p:cNvPr id="16" name="TextBox 15"/>
-          <p:cNvSpPr txBox="1"/>
-          <p:nvPr/>
-        </p:nvSpPr>
-        <p:spPr>
-          <a:xfrm>
-            <a:off x="11185855" y="6473952"/>
-            <a:ext cx="640080" cy="274320"/>
+            <a:off x="457200" y="3017520"/>
+            <a:ext cx="11277295" cy="1645920"/>
           </a:xfrm>
           <a:prstGeom prst="rect">
             <a:avLst/>
@@ -16597,141 +17124,65 @@
           </a:bodyPr>
           <a:lstStyle/>
           <a:p>
-            <a:pPr algn="r"/>
-            <a:r>
-              <a:rPr sz="1100" b="0" i="0">
-                <a:solidFill>
-                  <a:srgbClr val="666666"/>
-                </a:solidFill>
-                <a:latin typeface="Calibri"/>
-              </a:rPr>
-              <a:t>43</a:t>
-            </a:r>
-          </a:p>
-        </p:txBody>
-      </p:sp>
-    </p:spTree>
-  </p:cSld>
-  <p:clrMapOvr>
-    <a:masterClrMapping/>
-  </p:clrMapOvr>
-</p:sld>
-</file>
-
-<file path=ppt/slides/slide44.xml><?xml version="1.0" encoding="utf-8"?>
-<p:sld xmlns:a="http://schemas.openxmlformats.org/drawingml/2006/main" xmlns:p="http://schemas.openxmlformats.org/presentationml/2006/main" xmlns:r="http://schemas.openxmlformats.org/officeDocument/2006/relationships">
-  <p:cSld>
-    <p:bg>
-      <p:bgPr>
-        <a:solidFill>
-          <a:srgbClr val="FFFFFF"/>
-        </a:solidFill>
-        <a:effectLst/>
-      </p:bgPr>
-    </p:bg>
-    <p:spTree>
-      <p:nvGrpSpPr>
-        <p:cNvPr id="1" name=""/>
-        <p:cNvGrpSpPr/>
-        <p:nvPr/>
-      </p:nvGrpSpPr>
-      <p:grpSpPr/>
-      <p:sp>
-        <p:nvSpPr>
-          <p:cNvPr id="2" name="Rectangle 1"/>
-          <p:cNvSpPr/>
-          <p:nvPr/>
-        </p:nvSpPr>
-        <p:spPr>
-          <a:xfrm>
-            <a:off x="0" y="0"/>
-            <a:ext cx="12191695" cy="960120"/>
-          </a:xfrm>
-          <a:prstGeom prst="rect">
-            <a:avLst/>
-          </a:prstGeom>
-          <a:solidFill>
-            <a:srgbClr val="095292"/>
-          </a:solidFill>
-          <a:ln>
-            <a:noFill/>
-          </a:ln>
-        </p:spPr>
-        <p:style>
-          <a:lnRef idx="1">
-            <a:schemeClr val="accent1"/>
-          </a:lnRef>
-          <a:fillRef idx="3">
-            <a:schemeClr val="accent1"/>
-          </a:fillRef>
-          <a:effectRef idx="2">
-            <a:schemeClr val="accent1"/>
-          </a:effectRef>
-          <a:fontRef idx="minor">
-            <a:schemeClr val="lt1"/>
-          </a:fontRef>
-        </p:style>
-        <p:txBody>
-          <a:bodyPr rtlCol="0" anchor="ctr"/>
-          <a:lstStyle/>
-          <a:p>
-            <a:pPr algn="ctr"/>
-          </a:p>
-        </p:txBody>
-      </p:sp>
-      <p:sp>
-        <p:nvSpPr>
-          <p:cNvPr id="3" name="Rectangle 2"/>
-          <p:cNvSpPr/>
-          <p:nvPr/>
-        </p:nvSpPr>
-        <p:spPr>
-          <a:xfrm>
-            <a:off x="0" y="960120"/>
-            <a:ext cx="12191695" cy="41148"/>
-          </a:xfrm>
-          <a:prstGeom prst="rect">
-            <a:avLst/>
-          </a:prstGeom>
-          <a:solidFill>
-            <a:srgbClr val="FFD000"/>
-          </a:solidFill>
-          <a:ln>
-            <a:noFill/>
-          </a:ln>
-        </p:spPr>
-        <p:style>
-          <a:lnRef idx="1">
-            <a:schemeClr val="accent1"/>
-          </a:lnRef>
-          <a:fillRef idx="3">
-            <a:schemeClr val="accent1"/>
-          </a:fillRef>
-          <a:effectRef idx="2">
-            <a:schemeClr val="accent1"/>
-          </a:effectRef>
-          <a:fontRef idx="minor">
-            <a:schemeClr val="lt1"/>
-          </a:fontRef>
-        </p:style>
-        <p:txBody>
-          <a:bodyPr rtlCol="0" anchor="ctr"/>
-          <a:lstStyle/>
-          <a:p>
-            <a:pPr algn="ctr"/>
-          </a:p>
-        </p:txBody>
-      </p:sp>
-      <p:sp>
-        <p:nvSpPr>
-          <p:cNvPr id="4" name="TextBox 3"/>
+            <a:pPr algn="ctr">
+              <a:spcAft>
+                <a:spcPts val="600"/>
+              </a:spcAft>
+            </a:pPr>
+            <a:r>
+              <a:rPr sz="1600" b="0" i="0">
+                <a:solidFill>
+                  <a:srgbClr val="333333"/>
+                </a:solidFill>
+                <a:latin typeface="Calibri"/>
+              </a:rPr>
+              <a:t>SQL es declarativo</a:t>
+            </a:r>
+          </a:p>
+          <a:p>
+            <a:pPr algn="ctr">
+              <a:spcAft>
+                <a:spcPts val="600"/>
+              </a:spcAft>
+            </a:pPr>
+            <a:r>
+              <a:rPr sz="1600" b="0" i="0">
+                <a:solidFill>
+                  <a:srgbClr val="333333"/>
+                </a:solidFill>
+                <a:latin typeface="Calibri"/>
+              </a:rPr>
+              <a:t>Leer un plan</a:t>
+            </a:r>
+          </a:p>
+          <a:p>
+            <a:pPr algn="ctr">
+              <a:spcAft>
+                <a:spcPts val="600"/>
+              </a:spcAft>
+            </a:pPr>
+            <a:r>
+              <a:rPr sz="1600" b="0" i="0">
+                <a:solidFill>
+                  <a:srgbClr val="333333"/>
+                </a:solidFill>
+                <a:latin typeface="Calibri"/>
+              </a:rPr>
+              <a:t>Las estadisticas</a:t>
+            </a:r>
+          </a:p>
+        </p:txBody>
+      </p:sp>
+      <p:sp>
+        <p:nvSpPr>
+          <p:cNvPr id="6" name="TextBox 5"/>
           <p:cNvSpPr txBox="1"/>
           <p:nvPr/>
         </p:nvSpPr>
         <p:spPr>
           <a:xfrm>
-            <a:off x="457200" y="164592"/>
-            <a:ext cx="11277295" cy="502920"/>
+            <a:off x="457200" y="4754880"/>
+            <a:ext cx="11277295" cy="640080"/>
           </a:xfrm>
           <a:prstGeom prst="rect">
             <a:avLst/>
@@ -16744,4170 +17195,15 @@
           </a:bodyPr>
           <a:lstStyle/>
           <a:p>
-            <a:r>
-              <a:rPr sz="2600" b="1" i="0">
-                <a:solidFill>
-                  <a:srgbClr val="FFFFFF"/>
-                </a:solidFill>
-                <a:latin typeface="Calibri"/>
-              </a:rPr>
-              <a:t>Taller PI VetCare — contexto / por que importa</a:t>
-            </a:r>
-          </a:p>
-        </p:txBody>
-      </p:sp>
-      <p:sp>
-        <p:nvSpPr>
-          <p:cNvPr id="5" name="TextBox 4"/>
-          <p:cNvSpPr txBox="1"/>
-          <p:nvPr/>
-        </p:nvSpPr>
-        <p:spPr>
-          <a:xfrm>
-            <a:off x="457200" y="1170432"/>
-            <a:ext cx="11277295" cy="5230368"/>
-          </a:xfrm>
-          <a:prstGeom prst="rect">
-            <a:avLst/>
-          </a:prstGeom>
-          <a:noFill/>
-        </p:spPr>
-        <p:txBody>
-          <a:bodyPr wrap="square">
-            <a:spAutoFit/>
-          </a:bodyPr>
-          <a:lstStyle/>
-          <a:p>
-            <a:pPr>
-              <a:spcAft>
-                <a:spcPts val="800"/>
-              </a:spcAft>
-            </a:pPr>
-            <a:r>
-              <a:rPr sz="2000" b="0" i="0">
-                <a:solidFill>
-                  <a:srgbClr val="333333"/>
-                </a:solidFill>
-                <a:latin typeface="Calibri"/>
-              </a:rPr>
-              <a:t>–   </a:t>
-            </a:r>
+            <a:pPr algn="ctr"/>
             <a:r>
               <a:rPr sz="2000" b="1" i="0">
                 <a:solidFill>
-                  <a:srgbClr val="333333"/>
-                </a:solidFill>
-                <a:latin typeface="Calibri"/>
-              </a:rPr>
-              <a:t>Por qué importa al PI:</a:t>
-            </a:r>
-            <a:r>
-              <a:rPr sz="2000" b="0" i="0">
-                <a:solidFill>
-                  <a:srgbClr val="333333"/>
-                </a:solidFill>
-                <a:latin typeface="Calibri"/>
-              </a:rPr>
-              <a:t> la rúbrica pide un análisis de plan de ejecución, y un análisis es un </a:t>
-            </a:r>
-            <a:r>
-              <a:rPr sz="2000" b="1" i="0">
-                <a:solidFill>
-                  <a:srgbClr val="333333"/>
-                </a:solidFill>
-                <a:latin typeface="Calibri"/>
-              </a:rPr>
-              <a:t>antes y un después medidos</a:t>
-            </a:r>
-            <a:r>
-              <a:rPr sz="2000" b="0" i="0">
-                <a:solidFill>
-                  <a:srgbClr val="333333"/>
-                </a:solidFill>
-                <a:latin typeface="Calibri"/>
-              </a:rPr>
-              <a:t> — no la frase «la optimicé».</a:t>
-            </a:r>
-          </a:p>
-          <a:p>
-            <a:pPr>
-              <a:spcAft>
-                <a:spcPts val="800"/>
-              </a:spcAft>
-            </a:pPr>
-            <a:r>
-              <a:rPr sz="2000" b="0" i="0">
-                <a:solidFill>
-                  <a:srgbClr val="333333"/>
-                </a:solidFill>
-                <a:latin typeface="Calibri"/>
-              </a:rPr>
-              <a:t>–   La pantalla de agenda de Huellitas se abre </a:t>
-            </a:r>
-            <a:r>
-              <a:rPr sz="2000" b="1" i="0">
-                <a:solidFill>
-                  <a:srgbClr val="333333"/>
-                </a:solidFill>
-                <a:latin typeface="Calibri"/>
-              </a:rPr>
-              <a:t>decenas de veces al día</a:t>
-            </a:r>
-            <a:r>
-              <a:rPr sz="2000" b="0" i="0">
-                <a:solidFill>
-                  <a:srgbClr val="333333"/>
-                </a:solidFill>
-                <a:latin typeface="Calibri"/>
-              </a:rPr>
-              <a:t>: es la consulta que más veces paga cualquier descuido.</a:t>
-            </a:r>
-          </a:p>
-          <a:p>
-            <a:pPr>
-              <a:spcAft>
-                <a:spcPts val="800"/>
-              </a:spcAft>
-            </a:pPr>
-            <a:r>
-              <a:rPr sz="2000" b="0" i="0">
-                <a:solidFill>
-                  <a:srgbClr val="333333"/>
-                </a:solidFill>
-                <a:latin typeface="Calibri"/>
-              </a:rPr>
-              <a:t>–   Optimizar y </a:t>
-            </a:r>
-            <a:r>
-              <a:rPr sz="2000" b="1" i="0">
-                <a:solidFill>
-                  <a:srgbClr val="333333"/>
-                </a:solidFill>
-                <a:latin typeface="Calibri"/>
-              </a:rPr>
-              <a:t>romper</a:t>
-            </a:r>
-            <a:r>
-              <a:rPr sz="2000" b="0" i="0">
-                <a:solidFill>
-                  <a:srgbClr val="333333"/>
-                </a:solidFill>
-                <a:latin typeface="Calibri"/>
-              </a:rPr>
-              <a:t> se parecen mucho: las dos versiones se ven bien y una devuelve otra cosa. Por eso hoy la </a:t>
-            </a:r>
-            <a:r>
-              <a:rPr sz="2000" b="1" i="0">
-                <a:solidFill>
-                  <a:srgbClr val="333333"/>
-                </a:solidFill>
-                <a:latin typeface="Calibri"/>
-              </a:rPr>
-              <a:t>prueba de equivalencia</a:t>
-            </a:r>
-            <a:r>
-              <a:rPr sz="2000" b="0" i="0">
-                <a:solidFill>
-                  <a:srgbClr val="333333"/>
-                </a:solidFill>
-                <a:latin typeface="Calibri"/>
-              </a:rPr>
-              <a:t> también vale puntos.</a:t>
-            </a:r>
-          </a:p>
-        </p:txBody>
-      </p:sp>
-      <p:sp>
-        <p:nvSpPr>
-          <p:cNvPr id="6" name="TextBox 5"/>
-          <p:cNvSpPr txBox="1"/>
-          <p:nvPr/>
-        </p:nvSpPr>
-        <p:spPr>
-          <a:xfrm>
-            <a:off x="11185855" y="6473952"/>
-            <a:ext cx="640080" cy="274320"/>
-          </a:xfrm>
-          <a:prstGeom prst="rect">
-            <a:avLst/>
-          </a:prstGeom>
-          <a:noFill/>
-        </p:spPr>
-        <p:txBody>
-          <a:bodyPr wrap="square">
-            <a:spAutoFit/>
-          </a:bodyPr>
-          <a:lstStyle/>
-          <a:p>
-            <a:pPr algn="r"/>
-            <a:r>
-              <a:rPr sz="1100" b="0" i="0">
-                <a:solidFill>
-                  <a:srgbClr val="666666"/>
-                </a:solidFill>
-                <a:latin typeface="Calibri"/>
-              </a:rPr>
-              <a:t>44</a:t>
-            </a:r>
-          </a:p>
-        </p:txBody>
-      </p:sp>
-    </p:spTree>
-  </p:cSld>
-  <p:clrMapOvr>
-    <a:masterClrMapping/>
-  </p:clrMapOvr>
-</p:sld>
-</file>
-
-<file path=ppt/slides/slide45.xml><?xml version="1.0" encoding="utf-8"?>
-<p:sld xmlns:a="http://schemas.openxmlformats.org/drawingml/2006/main" xmlns:p="http://schemas.openxmlformats.org/presentationml/2006/main" xmlns:r="http://schemas.openxmlformats.org/officeDocument/2006/relationships">
-  <p:cSld>
-    <p:bg>
-      <p:bgPr>
-        <a:solidFill>
-          <a:srgbClr val="FFFFFF"/>
-        </a:solidFill>
-        <a:effectLst/>
-      </p:bgPr>
-    </p:bg>
-    <p:spTree>
-      <p:nvGrpSpPr>
-        <p:cNvPr id="1" name=""/>
-        <p:cNvGrpSpPr/>
-        <p:nvPr/>
-      </p:nvGrpSpPr>
-      <p:grpSpPr/>
-      <p:sp>
-        <p:nvSpPr>
-          <p:cNvPr id="2" name="Rectangle 1"/>
-          <p:cNvSpPr/>
-          <p:nvPr/>
-        </p:nvSpPr>
-        <p:spPr>
-          <a:xfrm>
-            <a:off x="0" y="0"/>
-            <a:ext cx="12191695" cy="960120"/>
-          </a:xfrm>
-          <a:prstGeom prst="rect">
-            <a:avLst/>
-          </a:prstGeom>
-          <a:solidFill>
-            <a:srgbClr val="095292"/>
-          </a:solidFill>
-          <a:ln>
-            <a:noFill/>
-          </a:ln>
-        </p:spPr>
-        <p:style>
-          <a:lnRef idx="1">
-            <a:schemeClr val="accent1"/>
-          </a:lnRef>
-          <a:fillRef idx="3">
-            <a:schemeClr val="accent1"/>
-          </a:fillRef>
-          <a:effectRef idx="2">
-            <a:schemeClr val="accent1"/>
-          </a:effectRef>
-          <a:fontRef idx="minor">
-            <a:schemeClr val="lt1"/>
-          </a:fontRef>
-        </p:style>
-        <p:txBody>
-          <a:bodyPr rtlCol="0" anchor="ctr"/>
-          <a:lstStyle/>
-          <a:p>
-            <a:pPr algn="ctr"/>
-          </a:p>
-        </p:txBody>
-      </p:sp>
-      <p:sp>
-        <p:nvSpPr>
-          <p:cNvPr id="3" name="Rectangle 2"/>
-          <p:cNvSpPr/>
-          <p:nvPr/>
-        </p:nvSpPr>
-        <p:spPr>
-          <a:xfrm>
-            <a:off x="0" y="960120"/>
-            <a:ext cx="12191695" cy="41148"/>
-          </a:xfrm>
-          <a:prstGeom prst="rect">
-            <a:avLst/>
-          </a:prstGeom>
-          <a:solidFill>
-            <a:srgbClr val="FFD000"/>
-          </a:solidFill>
-          <a:ln>
-            <a:noFill/>
-          </a:ln>
-        </p:spPr>
-        <p:style>
-          <a:lnRef idx="1">
-            <a:schemeClr val="accent1"/>
-          </a:lnRef>
-          <a:fillRef idx="3">
-            <a:schemeClr val="accent1"/>
-          </a:fillRef>
-          <a:effectRef idx="2">
-            <a:schemeClr val="accent1"/>
-          </a:effectRef>
-          <a:fontRef idx="minor">
-            <a:schemeClr val="lt1"/>
-          </a:fontRef>
-        </p:style>
-        <p:txBody>
-          <a:bodyPr rtlCol="0" anchor="ctr"/>
-          <a:lstStyle/>
-          <a:p>
-            <a:pPr algn="ctr"/>
-          </a:p>
-        </p:txBody>
-      </p:sp>
-      <p:sp>
-        <p:nvSpPr>
-          <p:cNvPr id="4" name="TextBox 3"/>
-          <p:cNvSpPr txBox="1"/>
-          <p:nvPr/>
-        </p:nvSpPr>
-        <p:spPr>
-          <a:xfrm>
-            <a:off x="457200" y="164592"/>
-            <a:ext cx="11277295" cy="502920"/>
-          </a:xfrm>
-          <a:prstGeom prst="rect">
-            <a:avLst/>
-          </a:prstGeom>
-          <a:noFill/>
-        </p:spPr>
-        <p:txBody>
-          <a:bodyPr wrap="square">
-            <a:spAutoFit/>
-          </a:bodyPr>
-          <a:lstStyle/>
-          <a:p>
-            <a:r>
-              <a:rPr sz="2600" b="1" i="0">
-                <a:solidFill>
-                  <a:srgbClr val="FFFFFF"/>
-                </a:solidFill>
-                <a:latin typeface="Calibri"/>
-              </a:rPr>
-              <a:t>Taller PI VetCare — objetivo y criterios</a:t>
-            </a:r>
-          </a:p>
-        </p:txBody>
-      </p:sp>
-      <p:sp>
-        <p:nvSpPr>
-          <p:cNvPr id="5" name="TextBox 4"/>
-          <p:cNvSpPr txBox="1"/>
-          <p:nvPr/>
-        </p:nvSpPr>
-        <p:spPr>
-          <a:xfrm>
-            <a:off x="457200" y="1170432"/>
-            <a:ext cx="11277295" cy="5230368"/>
-          </a:xfrm>
-          <a:prstGeom prst="rect">
-            <a:avLst/>
-          </a:prstGeom>
-          <a:noFill/>
-        </p:spPr>
-        <p:txBody>
-          <a:bodyPr wrap="square">
-            <a:spAutoFit/>
-          </a:bodyPr>
-          <a:lstStyle/>
-          <a:p>
-            <a:pPr>
-              <a:spcAft>
-                <a:spcPts val="800"/>
-              </a:spcAft>
-            </a:pPr>
-            <a:r>
-              <a:rPr sz="1900" b="0" i="0">
-                <a:solidFill>
-                  <a:srgbClr val="333333"/>
-                </a:solidFill>
-                <a:latin typeface="Calibri"/>
-              </a:rPr>
-              <a:t>–   </a:t>
-            </a:r>
-            <a:r>
-              <a:rPr sz="1900" b="1" i="0">
-                <a:solidFill>
-                  <a:srgbClr val="333333"/>
-                </a:solidFill>
-                <a:latin typeface="Calibri"/>
-              </a:rPr>
-              <a:t>Objetivo:</a:t>
-            </a:r>
-            <a:r>
-              <a:rPr sz="1900" b="0" i="0">
-                <a:solidFill>
-                  <a:srgbClr val="333333"/>
-                </a:solidFill>
-                <a:latin typeface="Calibri"/>
-              </a:rPr>
-              <a:t> Dos consultas del PI reescritas y medidas con EXPLAIN ANALYZE sobre una base con volumen, con la prueba de que el resultado no cambió, y la justificación técnica que va al informe.</a:t>
-            </a:r>
-          </a:p>
-          <a:p>
-            <a:pPr>
-              <a:spcAft>
-                <a:spcPts val="800"/>
-              </a:spcAft>
-            </a:pPr>
-            <a:r>
-              <a:rPr sz="1900" b="0" i="0">
-                <a:solidFill>
-                  <a:srgbClr val="333333"/>
-                </a:solidFill>
-                <a:latin typeface="Calibri"/>
-              </a:rPr>
-              <a:t>–   </a:t>
-            </a:r>
-            <a:r>
-              <a:rPr sz="1900" b="1" i="0">
-                <a:solidFill>
-                  <a:srgbClr val="333333"/>
-                </a:solidFill>
-                <a:latin typeface="Calibri"/>
-              </a:rPr>
-              <a:t>Exito:</a:t>
-            </a:r>
-            <a:r>
-              <a:rPr sz="1900" b="0" i="0">
-                <a:solidFill>
-                  <a:srgbClr val="333333"/>
-                </a:solidFill>
-                <a:latin typeface="Calibri"/>
-              </a:rPr>
-              <a:t> La agenda del día con sus </a:t>
-            </a:r>
-            <a:r>
-              <a:rPr sz="1900" b="1" i="0">
-                <a:solidFill>
-                  <a:srgbClr val="333333"/>
-                </a:solidFill>
-                <a:latin typeface="Calibri"/>
-              </a:rPr>
-              <a:t>4 antipatrones</a:t>
-            </a:r>
-            <a:r>
-              <a:rPr sz="1900" b="0" i="0">
-                <a:solidFill>
-                  <a:srgbClr val="333333"/>
-                </a:solidFill>
-                <a:latin typeface="Calibri"/>
-              </a:rPr>
-              <a:t> corregidos: proyección, «JOIN … ON», predicado de rango sargable y comparación directa del estado.</a:t>
-            </a:r>
-          </a:p>
-          <a:p>
-            <a:pPr>
-              <a:spcAft>
-                <a:spcPts val="800"/>
-              </a:spcAft>
-            </a:pPr>
-            <a:r>
-              <a:rPr sz="1900" b="0" i="0">
-                <a:solidFill>
-                  <a:srgbClr val="333333"/>
-                </a:solidFill>
-                <a:latin typeface="Calibri"/>
-              </a:rPr>
-              <a:t>–   </a:t>
-            </a:r>
-            <a:r>
-              <a:rPr sz="1900" b="1" i="0">
-                <a:solidFill>
-                  <a:srgbClr val="333333"/>
-                </a:solidFill>
-                <a:latin typeface="Calibri"/>
-              </a:rPr>
-              <a:t>Exito:</a:t>
-            </a:r>
-            <a:r>
-              <a:rPr sz="1900" b="0" i="0">
-                <a:solidFill>
-                  <a:srgbClr val="333333"/>
-                </a:solidFill>
-                <a:latin typeface="Calibri"/>
-              </a:rPr>
-              <a:t> Las dos versiones devuelven las mismas </a:t>
-            </a:r>
-            <a:r>
-              <a:rPr sz="1900" b="1" i="0">
-                <a:solidFill>
-                  <a:srgbClr val="333333"/>
-                </a:solidFill>
-                <a:latin typeface="Calibri"/>
-              </a:rPr>
-              <a:t>91 filas</a:t>
-            </a:r>
-            <a:r>
-              <a:rPr sz="1900" b="0" i="0">
-                <a:solidFill>
-                  <a:srgbClr val="333333"/>
-                </a:solidFill>
-                <a:latin typeface="Calibri"/>
-              </a:rPr>
-              <a:t>, probado con «COUNT(*)» de cada una en la misma corrida.</a:t>
-            </a:r>
-          </a:p>
-          <a:p>
-            <a:pPr>
-              <a:spcAft>
-                <a:spcPts val="800"/>
-              </a:spcAft>
-            </a:pPr>
-            <a:r>
-              <a:rPr sz="1900" b="0" i="0">
-                <a:solidFill>
-                  <a:srgbClr val="333333"/>
-                </a:solidFill>
-                <a:latin typeface="Calibri"/>
-              </a:rPr>
-              <a:t>–   </a:t>
-            </a:r>
-            <a:r>
-              <a:rPr sz="1900" b="1" i="0">
-                <a:solidFill>
-                  <a:srgbClr val="333333"/>
-                </a:solidFill>
-                <a:latin typeface="Calibri"/>
-              </a:rPr>
-              <a:t>Exito:</a:t>
-            </a:r>
-            <a:r>
-              <a:rPr sz="1900" b="0" i="0">
-                <a:solidFill>
-                  <a:srgbClr val="333333"/>
-                </a:solidFill>
-                <a:latin typeface="Calibri"/>
-              </a:rPr>
-              <a:t> Tres planes leídos: «EXPLAIN (ANALYZE, BUFFERS)» del antes y del después, y «EXPLAIN ANALYZE» del después con «LIMIT 50». Las </a:t>
-            </a:r>
-            <a:r>
-              <a:rPr sz="1900" b="1" i="0">
-                <a:solidFill>
-                  <a:srgbClr val="333333"/>
-                </a:solidFill>
-                <a:latin typeface="Calibri"/>
-              </a:rPr>
-              <a:t>tres</a:t>
-            </a:r>
-            <a:r>
-              <a:rPr sz="1900" b="0" i="0">
-                <a:solidFill>
-                  <a:srgbClr val="333333"/>
-                </a:solidFill>
-                <a:latin typeface="Calibri"/>
-              </a:rPr>
-              <a:t> versiones van en la mini tabla de comentarios: nodo más costoso, filas estimadas vs reales, tiempo.</a:t>
-            </a:r>
-          </a:p>
-          <a:p>
-            <a:pPr>
-              <a:spcAft>
-                <a:spcPts val="800"/>
-              </a:spcAft>
-            </a:pPr>
-            <a:r>
-              <a:rPr sz="1900" b="0" i="0">
-                <a:solidFill>
-                  <a:srgbClr val="333333"/>
-                </a:solidFill>
-                <a:latin typeface="Calibri"/>
-              </a:rPr>
-              <a:t>–   </a:t>
-            </a:r>
-            <a:r>
-              <a:rPr sz="1900" b="1" i="0">
-                <a:solidFill>
-                  <a:srgbClr val="333333"/>
-                </a:solidFill>
-                <a:latin typeface="Calibri"/>
-              </a:rPr>
-              <a:t>Exito:</a:t>
-            </a:r>
-            <a:r>
-              <a:rPr sz="1900" b="0" i="0">
-                <a:solidFill>
-                  <a:srgbClr val="333333"/>
-                </a:solidFill>
-                <a:latin typeface="Calibri"/>
-              </a:rPr>
-              <a:t> La subconsulta correlacionada convertida en </a:t>
-            </a:r>
-            <a:r>
-              <a:rPr sz="1900" b="1" i="0">
-                <a:solidFill>
-                  <a:srgbClr val="333333"/>
-                </a:solidFill>
-                <a:latin typeface="Calibri"/>
-              </a:rPr>
-              <a:t>una sola pasada</a:t>
-            </a:r>
-            <a:r>
-              <a:rPr sz="1900" b="0" i="0">
-                <a:solidFill>
-                  <a:srgbClr val="333333"/>
-                </a:solidFill>
-                <a:latin typeface="Calibri"/>
-              </a:rPr>
-              <a:t>: «LEFT JOIN» + «GROUP BY» + </a:t>
-            </a:r>
-            <a:r>
-              <a:rPr sz="1900" b="1" i="0">
-                <a:solidFill>
-                  <a:srgbClr val="333333"/>
-                </a:solidFill>
-                <a:latin typeface="Calibri"/>
-              </a:rPr>
-              <a:t>«COUNT(c.id_cita)»</a:t>
-            </a:r>
-            <a:r>
-              <a:rPr sz="1900" b="0" i="0">
-                <a:solidFill>
-                  <a:srgbClr val="333333"/>
-                </a:solidFill>
-                <a:latin typeface="Calibri"/>
-              </a:rPr>
-              <a:t>, con los duenos sin citas todavía en 0.</a:t>
-            </a:r>
-          </a:p>
-          <a:p>
-            <a:pPr>
-              <a:spcAft>
-                <a:spcPts val="800"/>
-              </a:spcAft>
-            </a:pPr>
-            <a:r>
-              <a:rPr sz="1900" b="0" i="0">
-                <a:solidFill>
-                  <a:srgbClr val="333333"/>
-                </a:solidFill>
-                <a:latin typeface="Calibri"/>
-              </a:rPr>
-              <a:t>–   </a:t>
-            </a:r>
-            <a:r>
-              <a:rPr sz="1900" b="1" i="0">
-                <a:solidFill>
-                  <a:srgbClr val="333333"/>
-                </a:solidFill>
-                <a:latin typeface="Calibri"/>
-              </a:rPr>
-              <a:t>Exito:</a:t>
-            </a:r>
-            <a:r>
-              <a:rPr sz="1900" b="0" i="0">
-                <a:solidFill>
-                  <a:srgbClr val="333333"/>
-                </a:solidFill>
-                <a:latin typeface="Calibri"/>
-              </a:rPr>
-              <a:t> La equivalencia del ranking probada con «EXCEPT» en los </a:t>
-            </a:r>
-            <a:r>
-              <a:rPr sz="1900" b="1" i="0">
-                <a:solidFill>
-                  <a:srgbClr val="333333"/>
-                </a:solidFill>
-                <a:latin typeface="Calibri"/>
-              </a:rPr>
-              <a:t>dos sentidos</a:t>
-            </a:r>
-            <a:r>
-              <a:rPr sz="1900" b="0" i="0">
-                <a:solidFill>
-                  <a:srgbClr val="333333"/>
-                </a:solidFill>
-                <a:latin typeface="Calibri"/>
-              </a:rPr>
-              <a:t>: cero filas.</a:t>
-            </a:r>
-          </a:p>
-          <a:p>
-            <a:pPr>
-              <a:spcAft>
-                <a:spcPts val="800"/>
-              </a:spcAft>
-            </a:pPr>
-            <a:r>
-              <a:rPr sz="1900" b="0" i="0">
-                <a:solidFill>
-                  <a:srgbClr val="333333"/>
-                </a:solidFill>
-                <a:latin typeface="Calibri"/>
-              </a:rPr>
-              <a:t>–   </a:t>
-            </a:r>
-            <a:r>
-              <a:rPr sz="1900" b="1" i="0">
-                <a:solidFill>
-                  <a:srgbClr val="333333"/>
-                </a:solidFill>
-                <a:latin typeface="Calibri"/>
-              </a:rPr>
-              <a:t>Exito:</a:t>
-            </a:r>
-            <a:r>
-              <a:rPr sz="1900" b="0" i="0">
-                <a:solidFill>
-                  <a:srgbClr val="333333"/>
-                </a:solidFill>
-                <a:latin typeface="Calibri"/>
-              </a:rPr>
-              <a:t> La justificación de media página con sus 5 secciones, y «06_opt_antes.sql» / «06_opt_despues.sql» en la carpeta del PI.</a:t>
-            </a:r>
-          </a:p>
-          <a:p>
-            <a:pPr>
-              <a:spcAft>
-                <a:spcPts val="800"/>
-              </a:spcAft>
-            </a:pPr>
-            <a:r>
-              <a:rPr sz="1900" b="0" i="0">
-                <a:solidFill>
-                  <a:srgbClr val="333333"/>
-                </a:solidFill>
-                <a:latin typeface="Calibri"/>
-              </a:rPr>
-              <a:t>–   </a:t>
-            </a:r>
-            <a:r>
-              <a:rPr sz="1900" b="1" i="0">
-                <a:solidFill>
-                  <a:srgbClr val="333333"/>
-                </a:solidFill>
-                <a:latin typeface="Calibri"/>
-              </a:rPr>
-              <a:t>Exito:</a:t>
-            </a:r>
-            <a:r>
-              <a:rPr sz="1900" b="0" i="0">
-                <a:solidFill>
-                  <a:srgbClr val="333333"/>
-                </a:solidFill>
-                <a:latin typeface="Calibri"/>
-              </a:rPr>
-              <a:t> Entrega en la fecha que indique el docente.</a:t>
-            </a:r>
-          </a:p>
-        </p:txBody>
-      </p:sp>
-      <p:sp>
-        <p:nvSpPr>
-          <p:cNvPr id="6" name="TextBox 5"/>
-          <p:cNvSpPr txBox="1"/>
-          <p:nvPr/>
-        </p:nvSpPr>
-        <p:spPr>
-          <a:xfrm>
-            <a:off x="11185855" y="6473952"/>
-            <a:ext cx="640080" cy="274320"/>
-          </a:xfrm>
-          <a:prstGeom prst="rect">
-            <a:avLst/>
-          </a:prstGeom>
-          <a:noFill/>
-        </p:spPr>
-        <p:txBody>
-          <a:bodyPr wrap="square">
-            <a:spAutoFit/>
-          </a:bodyPr>
-          <a:lstStyle/>
-          <a:p>
-            <a:pPr algn="r"/>
-            <a:r>
-              <a:rPr sz="1100" b="0" i="0">
-                <a:solidFill>
-                  <a:srgbClr val="666666"/>
-                </a:solidFill>
-                <a:latin typeface="Calibri"/>
-              </a:rPr>
-              <a:t>45</a:t>
-            </a:r>
-          </a:p>
-        </p:txBody>
-      </p:sp>
-    </p:spTree>
-  </p:cSld>
-  <p:clrMapOvr>
-    <a:masterClrMapping/>
-  </p:clrMapOvr>
-</p:sld>
-</file>
-
-<file path=ppt/slides/slide46.xml><?xml version="1.0" encoding="utf-8"?>
-<p:sld xmlns:a="http://schemas.openxmlformats.org/drawingml/2006/main" xmlns:p="http://schemas.openxmlformats.org/presentationml/2006/main" xmlns:r="http://schemas.openxmlformats.org/officeDocument/2006/relationships">
-  <p:cSld>
-    <p:bg>
-      <p:bgPr>
-        <a:solidFill>
-          <a:srgbClr val="FFFFFF"/>
-        </a:solidFill>
-        <a:effectLst/>
-      </p:bgPr>
-    </p:bg>
-    <p:spTree>
-      <p:nvGrpSpPr>
-        <p:cNvPr id="1" name=""/>
-        <p:cNvGrpSpPr/>
-        <p:nvPr/>
-      </p:nvGrpSpPr>
-      <p:grpSpPr/>
-      <p:sp>
-        <p:nvSpPr>
-          <p:cNvPr id="2" name="Rectangle 1"/>
-          <p:cNvSpPr/>
-          <p:nvPr/>
-        </p:nvSpPr>
-        <p:spPr>
-          <a:xfrm>
-            <a:off x="0" y="0"/>
-            <a:ext cx="12191695" cy="960120"/>
-          </a:xfrm>
-          <a:prstGeom prst="rect">
-            <a:avLst/>
-          </a:prstGeom>
-          <a:solidFill>
-            <a:srgbClr val="095292"/>
-          </a:solidFill>
-          <a:ln>
-            <a:noFill/>
-          </a:ln>
-        </p:spPr>
-        <p:style>
-          <a:lnRef idx="1">
-            <a:schemeClr val="accent1"/>
-          </a:lnRef>
-          <a:fillRef idx="3">
-            <a:schemeClr val="accent1"/>
-          </a:fillRef>
-          <a:effectRef idx="2">
-            <a:schemeClr val="accent1"/>
-          </a:effectRef>
-          <a:fontRef idx="minor">
-            <a:schemeClr val="lt1"/>
-          </a:fontRef>
-        </p:style>
-        <p:txBody>
-          <a:bodyPr rtlCol="0" anchor="ctr"/>
-          <a:lstStyle/>
-          <a:p>
-            <a:pPr algn="ctr"/>
-          </a:p>
-        </p:txBody>
-      </p:sp>
-      <p:sp>
-        <p:nvSpPr>
-          <p:cNvPr id="3" name="Rectangle 2"/>
-          <p:cNvSpPr/>
-          <p:nvPr/>
-        </p:nvSpPr>
-        <p:spPr>
-          <a:xfrm>
-            <a:off x="0" y="960120"/>
-            <a:ext cx="12191695" cy="41148"/>
-          </a:xfrm>
-          <a:prstGeom prst="rect">
-            <a:avLst/>
-          </a:prstGeom>
-          <a:solidFill>
-            <a:srgbClr val="FFD000"/>
-          </a:solidFill>
-          <a:ln>
-            <a:noFill/>
-          </a:ln>
-        </p:spPr>
-        <p:style>
-          <a:lnRef idx="1">
-            <a:schemeClr val="accent1"/>
-          </a:lnRef>
-          <a:fillRef idx="3">
-            <a:schemeClr val="accent1"/>
-          </a:fillRef>
-          <a:effectRef idx="2">
-            <a:schemeClr val="accent1"/>
-          </a:effectRef>
-          <a:fontRef idx="minor">
-            <a:schemeClr val="lt1"/>
-          </a:fontRef>
-        </p:style>
-        <p:txBody>
-          <a:bodyPr rtlCol="0" anchor="ctr"/>
-          <a:lstStyle/>
-          <a:p>
-            <a:pPr algn="ctr"/>
-          </a:p>
-        </p:txBody>
-      </p:sp>
-      <p:sp>
-        <p:nvSpPr>
-          <p:cNvPr id="4" name="TextBox 3"/>
-          <p:cNvSpPr txBox="1"/>
-          <p:nvPr/>
-        </p:nvSpPr>
-        <p:spPr>
-          <a:xfrm>
-            <a:off x="457200" y="164592"/>
-            <a:ext cx="11277295" cy="502920"/>
-          </a:xfrm>
-          <a:prstGeom prst="rect">
-            <a:avLst/>
-          </a:prstGeom>
-          <a:noFill/>
-        </p:spPr>
-        <p:txBody>
-          <a:bodyPr wrap="square">
-            <a:spAutoFit/>
-          </a:bodyPr>
-          <a:lstStyle/>
-          <a:p>
-            <a:r>
-              <a:rPr sz="2600" b="1" i="0">
-                <a:solidFill>
-                  <a:srgbClr val="FFFFFF"/>
-                </a:solidFill>
-                <a:latin typeface="Calibri"/>
-              </a:rPr>
-              <a:t>Taller PI VetCare — escenario / datos de partida</a:t>
-            </a:r>
-          </a:p>
-        </p:txBody>
-      </p:sp>
-      <p:sp>
-        <p:nvSpPr>
-          <p:cNvPr id="5" name="TextBox 4"/>
-          <p:cNvSpPr txBox="1"/>
-          <p:nvPr/>
-        </p:nvSpPr>
-        <p:spPr>
-          <a:xfrm>
-            <a:off x="457200" y="1170432"/>
-            <a:ext cx="11277295" cy="5230368"/>
-          </a:xfrm>
-          <a:prstGeom prst="rect">
-            <a:avLst/>
-          </a:prstGeom>
-          <a:noFill/>
-        </p:spPr>
-        <p:txBody>
-          <a:bodyPr wrap="square">
-            <a:spAutoFit/>
-          </a:bodyPr>
-          <a:lstStyle/>
-          <a:p>
-            <a:pPr>
-              <a:spcAft>
-                <a:spcPts val="800"/>
-              </a:spcAft>
-            </a:pPr>
-            <a:r>
-              <a:rPr sz="2000" b="0" i="0">
-                <a:solidFill>
-                  <a:srgbClr val="333333"/>
-                </a:solidFill>
-                <a:latin typeface="Calibri"/>
-              </a:rPr>
-              <a:t>–   La base de este taller </a:t>
-            </a:r>
-            <a:r>
-              <a:rPr sz="2000" b="1" i="0">
-                <a:solidFill>
-                  <a:srgbClr val="333333"/>
-                </a:solidFill>
-                <a:latin typeface="Calibri"/>
-              </a:rPr>
-              <a:t>sí tiene volumen</a:t>
-            </a:r>
-            <a:r>
-              <a:rPr sz="2000" b="0" i="0">
-                <a:solidFill>
-                  <a:srgbClr val="333333"/>
-                </a:solidFill>
-                <a:latin typeface="Calibri"/>
-              </a:rPr>
-              <a:t>: 2.006 duenos, 5.008 mascotas, 16 veterinarios y </a:t>
-            </a:r>
-            <a:r>
-              <a:rPr sz="2000" b="1" i="0">
-                <a:solidFill>
-                  <a:srgbClr val="333333"/>
-                </a:solidFill>
-                <a:latin typeface="Calibri"/>
-              </a:rPr>
-              <a:t>30.010 citas</a:t>
-            </a:r>
-            <a:r>
-              <a:rPr sz="2000" b="0" i="0">
-                <a:solidFill>
-                  <a:srgbClr val="333333"/>
-                </a:solidFill>
-                <a:latin typeface="Calibri"/>
-              </a:rPr>
-              <a:t> entre el 2026-01-05 y el 2026-07-23, unas 150 por día.</a:t>
-            </a:r>
-          </a:p>
-          <a:p>
-            <a:pPr>
-              <a:spcAft>
-                <a:spcPts val="800"/>
-              </a:spcAft>
-            </a:pPr>
-            <a:r>
-              <a:rPr sz="2000" b="0" i="0">
-                <a:solidFill>
-                  <a:srgbClr val="333333"/>
-                </a:solidFill>
-                <a:latin typeface="Calibri"/>
-              </a:rPr>
-              <a:t>–   «ANALYZE» ya está corrido y </a:t>
-            </a:r>
-            <a:r>
-              <a:rPr sz="2000" b="1" i="0">
-                <a:solidFill>
-                  <a:srgbClr val="333333"/>
-                </a:solidFill>
-                <a:latin typeface="Calibri"/>
-              </a:rPr>
-              <a:t>no hay ningún índice</a:t>
-            </a:r>
-            <a:r>
-              <a:rPr sz="2000" b="0" i="0">
-                <a:solidFill>
-                  <a:srgbClr val="333333"/>
-                </a:solidFill>
-                <a:latin typeface="Calibri"/>
-              </a:rPr>
-              <a:t> más allá de las llaves primarias: es a propósito, para que la mejora venga de la consulta y no de una estructura que aún no se ha visto.</a:t>
-            </a:r>
-          </a:p>
-          <a:p>
-            <a:pPr>
-              <a:spcAft>
-                <a:spcPts val="800"/>
-              </a:spcAft>
-            </a:pPr>
-            <a:r>
-              <a:rPr sz="2000" b="0" i="0">
-                <a:solidFill>
-                  <a:srgbClr val="333333"/>
-                </a:solidFill>
-                <a:latin typeface="Calibri"/>
-              </a:rPr>
-              <a:t>–   </a:t>
-            </a:r>
-            <a:r>
-              <a:rPr sz="2000" b="1" i="0">
-                <a:solidFill>
-                  <a:srgbClr val="333333"/>
-                </a:solidFill>
-                <a:latin typeface="Calibri"/>
-              </a:rPr>
-              <a:t>Motor:</a:t>
-            </a:r>
-            <a:r>
-              <a:rPr sz="2000" b="0" i="0">
-                <a:solidFill>
-                  <a:srgbClr val="333333"/>
-                </a:solidFill>
-                <a:latin typeface="Calibri"/>
-              </a:rPr>
-              <a:t> PostgreSQL dentro de la plataforma del curso, en el navegador. «EXPLAIN», «EXPLAIN ANALYZE» y la opción «BUFFERS» corren de verdad; ahí se califica.</a:t>
-            </a:r>
-          </a:p>
-          <a:p>
-            <a:pPr>
-              <a:spcAft>
-                <a:spcPts val="800"/>
-              </a:spcAft>
-            </a:pPr>
-            <a:r>
-              <a:rPr sz="2000" b="0" i="0">
-                <a:solidFill>
-                  <a:srgbClr val="333333"/>
-                </a:solidFill>
-                <a:latin typeface="Calibri"/>
-              </a:rPr>
-              <a:t>–   Los </a:t>
-            </a:r>
-            <a:r>
-              <a:rPr sz="2000" b="1" i="0">
-                <a:solidFill>
-                  <a:srgbClr val="333333"/>
-                </a:solidFill>
-                <a:latin typeface="Calibri"/>
-              </a:rPr>
-              <a:t>seis duenos con cero citas</a:t>
-            </a:r>
-            <a:r>
-              <a:rPr sz="2000" b="0" i="0">
-                <a:solidFill>
-                  <a:srgbClr val="333333"/>
-                </a:solidFill>
-                <a:latin typeface="Calibri"/>
-              </a:rPr>
-              <a:t> (ids 2001 a 2006) están puestos a propósito: son los que delatan un «COUNT(*)» o un «INNER JOIN» mal elegidos.</a:t>
-            </a:r>
-          </a:p>
-          <a:p>
-            <a:pPr>
-              <a:spcAft>
-                <a:spcPts val="800"/>
-              </a:spcAft>
-            </a:pPr>
-            <a:r>
-              <a:rPr sz="2000" b="0" i="0">
-                <a:solidFill>
-                  <a:srgbClr val="333333"/>
-                </a:solidFill>
-                <a:latin typeface="Calibri"/>
-              </a:rPr>
-              <a:t>–   </a:t>
-            </a:r>
-            <a:r>
-              <a:rPr sz="2000" b="1" i="0">
-                <a:solidFill>
-                  <a:srgbClr val="333333"/>
-                </a:solidFill>
-                <a:latin typeface="Calibri"/>
-              </a:rPr>
-              <a:t>Aviso:</a:t>
-            </a:r>
-            <a:r>
-              <a:rPr sz="2000" b="0" i="0">
-                <a:solidFill>
-                  <a:srgbClr val="333333"/>
-                </a:solidFill>
-                <a:latin typeface="Calibri"/>
-              </a:rPr>
-              <a:t> la versión ANTES de la pregunta 3 se ejecuta 2.006 veces y puede tardar de varios segundos a más de un minuto. </a:t>
-            </a:r>
-            <a:r>
-              <a:rPr sz="2000" b="1" i="0">
-                <a:solidFill>
-                  <a:srgbClr val="333333"/>
-                </a:solidFill>
-                <a:latin typeface="Calibri"/>
-              </a:rPr>
-              <a:t>No está colgada.</a:t>
-            </a:r>
-          </a:p>
-        </p:txBody>
-      </p:sp>
-      <p:sp>
-        <p:nvSpPr>
-          <p:cNvPr id="6" name="TextBox 5"/>
-          <p:cNvSpPr txBox="1"/>
-          <p:nvPr/>
-        </p:nvSpPr>
-        <p:spPr>
-          <a:xfrm>
-            <a:off x="11185855" y="6473952"/>
-            <a:ext cx="640080" cy="274320"/>
-          </a:xfrm>
-          <a:prstGeom prst="rect">
-            <a:avLst/>
-          </a:prstGeom>
-          <a:noFill/>
-        </p:spPr>
-        <p:txBody>
-          <a:bodyPr wrap="square">
-            <a:spAutoFit/>
-          </a:bodyPr>
-          <a:lstStyle/>
-          <a:p>
-            <a:pPr algn="r"/>
-            <a:r>
-              <a:rPr sz="1100" b="0" i="0">
-                <a:solidFill>
-                  <a:srgbClr val="666666"/>
-                </a:solidFill>
-                <a:latin typeface="Calibri"/>
-              </a:rPr>
-              <a:t>46</a:t>
-            </a:r>
-          </a:p>
-        </p:txBody>
-      </p:sp>
-    </p:spTree>
-  </p:cSld>
-  <p:clrMapOvr>
-    <a:masterClrMapping/>
-  </p:clrMapOvr>
-</p:sld>
-</file>
-
-<file path=ppt/slides/slide47.xml><?xml version="1.0" encoding="utf-8"?>
-<p:sld xmlns:a="http://schemas.openxmlformats.org/drawingml/2006/main" xmlns:p="http://schemas.openxmlformats.org/presentationml/2006/main" xmlns:r="http://schemas.openxmlformats.org/officeDocument/2006/relationships">
-  <p:cSld>
-    <p:bg>
-      <p:bgPr>
-        <a:solidFill>
-          <a:srgbClr val="FFFFFF"/>
-        </a:solidFill>
-        <a:effectLst/>
-      </p:bgPr>
-    </p:bg>
-    <p:spTree>
-      <p:nvGrpSpPr>
-        <p:cNvPr id="1" name=""/>
-        <p:cNvGrpSpPr/>
-        <p:nvPr/>
-      </p:nvGrpSpPr>
-      <p:grpSpPr/>
-      <p:sp>
-        <p:nvSpPr>
-          <p:cNvPr id="2" name="Rectangle 1"/>
-          <p:cNvSpPr/>
-          <p:nvPr/>
-        </p:nvSpPr>
-        <p:spPr>
-          <a:xfrm>
-            <a:off x="0" y="0"/>
-            <a:ext cx="12191695" cy="960120"/>
-          </a:xfrm>
-          <a:prstGeom prst="rect">
-            <a:avLst/>
-          </a:prstGeom>
-          <a:solidFill>
-            <a:srgbClr val="095292"/>
-          </a:solidFill>
-          <a:ln>
-            <a:noFill/>
-          </a:ln>
-        </p:spPr>
-        <p:style>
-          <a:lnRef idx="1">
-            <a:schemeClr val="accent1"/>
-          </a:lnRef>
-          <a:fillRef idx="3">
-            <a:schemeClr val="accent1"/>
-          </a:fillRef>
-          <a:effectRef idx="2">
-            <a:schemeClr val="accent1"/>
-          </a:effectRef>
-          <a:fontRef idx="minor">
-            <a:schemeClr val="lt1"/>
-          </a:fontRef>
-        </p:style>
-        <p:txBody>
-          <a:bodyPr rtlCol="0" anchor="ctr"/>
-          <a:lstStyle/>
-          <a:p>
-            <a:pPr algn="ctr"/>
-          </a:p>
-        </p:txBody>
-      </p:sp>
-      <p:sp>
-        <p:nvSpPr>
-          <p:cNvPr id="3" name="Rectangle 2"/>
-          <p:cNvSpPr/>
-          <p:nvPr/>
-        </p:nvSpPr>
-        <p:spPr>
-          <a:xfrm>
-            <a:off x="0" y="960120"/>
-            <a:ext cx="12191695" cy="41148"/>
-          </a:xfrm>
-          <a:prstGeom prst="rect">
-            <a:avLst/>
-          </a:prstGeom>
-          <a:solidFill>
-            <a:srgbClr val="FFD000"/>
-          </a:solidFill>
-          <a:ln>
-            <a:noFill/>
-          </a:ln>
-        </p:spPr>
-        <p:style>
-          <a:lnRef idx="1">
-            <a:schemeClr val="accent1"/>
-          </a:lnRef>
-          <a:fillRef idx="3">
-            <a:schemeClr val="accent1"/>
-          </a:fillRef>
-          <a:effectRef idx="2">
-            <a:schemeClr val="accent1"/>
-          </a:effectRef>
-          <a:fontRef idx="minor">
-            <a:schemeClr val="lt1"/>
-          </a:fontRef>
-        </p:style>
-        <p:txBody>
-          <a:bodyPr rtlCol="0" anchor="ctr"/>
-          <a:lstStyle/>
-          <a:p>
-            <a:pPr algn="ctr"/>
-          </a:p>
-        </p:txBody>
-      </p:sp>
-      <p:sp>
-        <p:nvSpPr>
-          <p:cNvPr id="4" name="TextBox 3"/>
-          <p:cNvSpPr txBox="1"/>
-          <p:nvPr/>
-        </p:nvSpPr>
-        <p:spPr>
-          <a:xfrm>
-            <a:off x="457200" y="164592"/>
-            <a:ext cx="11277295" cy="502920"/>
-          </a:xfrm>
-          <a:prstGeom prst="rect">
-            <a:avLst/>
-          </a:prstGeom>
-          <a:noFill/>
-        </p:spPr>
-        <p:txBody>
-          <a:bodyPr wrap="square">
-            <a:spAutoFit/>
-          </a:bodyPr>
-          <a:lstStyle/>
-          <a:p>
-            <a:r>
-              <a:rPr sz="2600" b="1" i="0">
-                <a:solidFill>
-                  <a:srgbClr val="FFFFFF"/>
-                </a:solidFill>
-                <a:latin typeface="Calibri"/>
-              </a:rPr>
-              <a:t>Taller PI VetCare — pasos guiados</a:t>
-            </a:r>
-          </a:p>
-        </p:txBody>
-      </p:sp>
-      <p:sp>
-        <p:nvSpPr>
-          <p:cNvPr id="5" name="Rounded Rectangle 4"/>
-          <p:cNvSpPr/>
-          <p:nvPr/>
-        </p:nvSpPr>
-        <p:spPr>
-          <a:xfrm>
-            <a:off x="457200" y="1234440"/>
-            <a:ext cx="11277295" cy="950976"/>
-          </a:xfrm>
-          <a:prstGeom prst="roundRect">
-            <a:avLst>
-              <a:gd name="adj" fmla="val 12000"/>
-            </a:avLst>
-          </a:prstGeom>
-          <a:solidFill>
-            <a:srgbClr val="F2F2F2"/>
-          </a:solidFill>
-          <a:ln>
-            <a:noFill/>
-          </a:ln>
-        </p:spPr>
-        <p:style>
-          <a:lnRef idx="1">
-            <a:schemeClr val="accent1"/>
-          </a:lnRef>
-          <a:fillRef idx="3">
-            <a:schemeClr val="accent1"/>
-          </a:fillRef>
-          <a:effectRef idx="2">
-            <a:schemeClr val="accent1"/>
-          </a:effectRef>
-          <a:fontRef idx="minor">
-            <a:schemeClr val="lt1"/>
-          </a:fontRef>
-        </p:style>
-        <p:txBody>
-          <a:bodyPr rtlCol="0" anchor="ctr"/>
-          <a:lstStyle/>
-          <a:p>
-            <a:pPr algn="ctr"/>
-          </a:p>
-        </p:txBody>
-      </p:sp>
-      <p:sp>
-        <p:nvSpPr>
-          <p:cNvPr id="6" name="Rounded Rectangle 5"/>
-          <p:cNvSpPr/>
-          <p:nvPr/>
-        </p:nvSpPr>
-        <p:spPr>
-          <a:xfrm>
-            <a:off x="594360" y="1490472"/>
-            <a:ext cx="438912" cy="438912"/>
-          </a:xfrm>
-          <a:prstGeom prst="roundRect">
-            <a:avLst>
-              <a:gd name="adj" fmla="val 12000"/>
-            </a:avLst>
-          </a:prstGeom>
-          <a:solidFill>
-            <a:srgbClr val="095292"/>
-          </a:solidFill>
-          <a:ln>
-            <a:noFill/>
-          </a:ln>
-        </p:spPr>
-        <p:style>
-          <a:lnRef idx="1">
-            <a:schemeClr val="accent1"/>
-          </a:lnRef>
-          <a:fillRef idx="3">
-            <a:schemeClr val="accent1"/>
-          </a:fillRef>
-          <a:effectRef idx="2">
-            <a:schemeClr val="accent1"/>
-          </a:effectRef>
-          <a:fontRef idx="minor">
-            <a:schemeClr val="lt1"/>
-          </a:fontRef>
-        </p:style>
-        <p:txBody>
-          <a:bodyPr rtlCol="0" anchor="ctr"/>
-          <a:lstStyle/>
-          <a:p>
-            <a:pPr algn="ctr"/>
-          </a:p>
-        </p:txBody>
-      </p:sp>
-      <p:sp>
-        <p:nvSpPr>
-          <p:cNvPr id="7" name="TextBox 6"/>
-          <p:cNvSpPr txBox="1"/>
-          <p:nvPr/>
-        </p:nvSpPr>
-        <p:spPr>
-          <a:xfrm>
-            <a:off x="594360" y="1490472"/>
-            <a:ext cx="438912" cy="438912"/>
-          </a:xfrm>
-          <a:prstGeom prst="rect">
-            <a:avLst/>
-          </a:prstGeom>
-          <a:noFill/>
-        </p:spPr>
-        <p:txBody>
-          <a:bodyPr wrap="square" anchor="ctr"/>
-          <a:lstStyle/>
-          <a:p>
-            <a:pPr algn="ctr"/>
-            <a:r>
-              <a:rPr sz="1600" b="1" i="0">
-                <a:solidFill>
-                  <a:srgbClr val="FFFFFF"/>
-                </a:solidFill>
-                <a:latin typeface="Calibri"/>
-              </a:rPr>
-              <a:t>1</a:t>
-            </a:r>
-          </a:p>
-        </p:txBody>
-      </p:sp>
-      <p:sp>
-        <p:nvSpPr>
-          <p:cNvPr id="8" name="TextBox 7"/>
-          <p:cNvSpPr txBox="1"/>
-          <p:nvPr/>
-        </p:nvSpPr>
-        <p:spPr>
-          <a:xfrm>
-            <a:off x="1188720" y="1325880"/>
-            <a:ext cx="10271455" cy="786384"/>
-          </a:xfrm>
-          <a:prstGeom prst="rect">
-            <a:avLst/>
-          </a:prstGeom>
-          <a:noFill/>
-        </p:spPr>
-        <p:txBody>
-          <a:bodyPr wrap="square" anchor="ctr"/>
-          <a:lstStyle/>
-          <a:p>
-            <a:r>
-              <a:rPr sz="1500" b="1" i="0">
-                <a:solidFill>
-                  <a:srgbClr val="095292"/>
-                </a:solidFill>
-                <a:latin typeface="Calibri"/>
-              </a:rPr>
-              <a:t>Reescribir la agenda del dia corrigiendo sus 4 antipatrones (SELECT *, joins con coma, to_char sobre la fecha, UPPER sobre el estado) y probar con COUNT(*) que las dos versiones devuelven las mismas 91 filas.</a:t>
-            </a:r>
-          </a:p>
-        </p:txBody>
-      </p:sp>
-      <p:sp>
-        <p:nvSpPr>
-          <p:cNvPr id="9" name="Rounded Rectangle 8"/>
-          <p:cNvSpPr/>
-          <p:nvPr/>
-        </p:nvSpPr>
-        <p:spPr>
-          <a:xfrm>
-            <a:off x="457200" y="2276856"/>
-            <a:ext cx="11277295" cy="950976"/>
-          </a:xfrm>
-          <a:prstGeom prst="roundRect">
-            <a:avLst>
-              <a:gd name="adj" fmla="val 12000"/>
-            </a:avLst>
-          </a:prstGeom>
-          <a:solidFill>
-            <a:srgbClr val="E8F4FA"/>
-          </a:solidFill>
-          <a:ln>
-            <a:noFill/>
-          </a:ln>
-        </p:spPr>
-        <p:style>
-          <a:lnRef idx="1">
-            <a:schemeClr val="accent1"/>
-          </a:lnRef>
-          <a:fillRef idx="3">
-            <a:schemeClr val="accent1"/>
-          </a:fillRef>
-          <a:effectRef idx="2">
-            <a:schemeClr val="accent1"/>
-          </a:effectRef>
-          <a:fontRef idx="minor">
-            <a:schemeClr val="lt1"/>
-          </a:fontRef>
-        </p:style>
-        <p:txBody>
-          <a:bodyPr rtlCol="0" anchor="ctr"/>
-          <a:lstStyle/>
-          <a:p>
-            <a:pPr algn="ctr"/>
-          </a:p>
-        </p:txBody>
-      </p:sp>
-      <p:sp>
-        <p:nvSpPr>
-          <p:cNvPr id="10" name="Rounded Rectangle 9"/>
-          <p:cNvSpPr/>
-          <p:nvPr/>
-        </p:nvSpPr>
-        <p:spPr>
-          <a:xfrm>
-            <a:off x="594360" y="2532888"/>
-            <a:ext cx="438912" cy="438912"/>
-          </a:xfrm>
-          <a:prstGeom prst="roundRect">
-            <a:avLst>
-              <a:gd name="adj" fmla="val 12000"/>
-            </a:avLst>
-          </a:prstGeom>
-          <a:solidFill>
-            <a:srgbClr val="095292"/>
-          </a:solidFill>
-          <a:ln>
-            <a:noFill/>
-          </a:ln>
-        </p:spPr>
-        <p:style>
-          <a:lnRef idx="1">
-            <a:schemeClr val="accent1"/>
-          </a:lnRef>
-          <a:fillRef idx="3">
-            <a:schemeClr val="accent1"/>
-          </a:fillRef>
-          <a:effectRef idx="2">
-            <a:schemeClr val="accent1"/>
-          </a:effectRef>
-          <a:fontRef idx="minor">
-            <a:schemeClr val="lt1"/>
-          </a:fontRef>
-        </p:style>
-        <p:txBody>
-          <a:bodyPr rtlCol="0" anchor="ctr"/>
-          <a:lstStyle/>
-          <a:p>
-            <a:pPr algn="ctr"/>
-          </a:p>
-        </p:txBody>
-      </p:sp>
-      <p:sp>
-        <p:nvSpPr>
-          <p:cNvPr id="11" name="TextBox 10"/>
-          <p:cNvSpPr txBox="1"/>
-          <p:nvPr/>
-        </p:nvSpPr>
-        <p:spPr>
-          <a:xfrm>
-            <a:off x="594360" y="2532888"/>
-            <a:ext cx="438912" cy="438912"/>
-          </a:xfrm>
-          <a:prstGeom prst="rect">
-            <a:avLst/>
-          </a:prstGeom>
-          <a:noFill/>
-        </p:spPr>
-        <p:txBody>
-          <a:bodyPr wrap="square" anchor="ctr"/>
-          <a:lstStyle/>
-          <a:p>
-            <a:pPr algn="ctr"/>
-            <a:r>
-              <a:rPr sz="1600" b="1" i="0">
-                <a:solidFill>
-                  <a:srgbClr val="FFFFFF"/>
-                </a:solidFill>
-                <a:latin typeface="Calibri"/>
-              </a:rPr>
-              <a:t>2</a:t>
-            </a:r>
-          </a:p>
-        </p:txBody>
-      </p:sp>
-      <p:sp>
-        <p:nvSpPr>
-          <p:cNvPr id="12" name="TextBox 11"/>
-          <p:cNvSpPr txBox="1"/>
-          <p:nvPr/>
-        </p:nvSpPr>
-        <p:spPr>
-          <a:xfrm>
-            <a:off x="1188720" y="2368296"/>
-            <a:ext cx="10271455" cy="786384"/>
-          </a:xfrm>
-          <a:prstGeom prst="rect">
-            <a:avLst/>
-          </a:prstGeom>
-          <a:noFill/>
-        </p:spPr>
-        <p:txBody>
-          <a:bodyPr wrap="square" anchor="ctr"/>
-          <a:lstStyle/>
-          <a:p>
-            <a:r>
-              <a:rPr sz="1500" b="1" i="0">
-                <a:solidFill>
-                  <a:srgbClr val="095292"/>
-                </a:solidFill>
-                <a:latin typeface="Calibri"/>
-              </a:rPr>
-              <a:t>Medir con EXPLAIN (ANALYZE, BUFFERS) las dos versiones, y con EXPLAIN ANALYZE una tercera que le anada LIMIT 50, y anotar las tres en comentarios: nodo mas costoso, filas estimadas vs reales y tiempo.</a:t>
-            </a:r>
-          </a:p>
-        </p:txBody>
-      </p:sp>
-      <p:sp>
-        <p:nvSpPr>
-          <p:cNvPr id="13" name="Rounded Rectangle 12"/>
-          <p:cNvSpPr/>
-          <p:nvPr/>
-        </p:nvSpPr>
-        <p:spPr>
-          <a:xfrm>
-            <a:off x="457200" y="3319272"/>
-            <a:ext cx="11277295" cy="950976"/>
-          </a:xfrm>
-          <a:prstGeom prst="roundRect">
-            <a:avLst>
-              <a:gd name="adj" fmla="val 12000"/>
-            </a:avLst>
-          </a:prstGeom>
-          <a:solidFill>
-            <a:srgbClr val="F2F2F2"/>
-          </a:solidFill>
-          <a:ln>
-            <a:noFill/>
-          </a:ln>
-        </p:spPr>
-        <p:style>
-          <a:lnRef idx="1">
-            <a:schemeClr val="accent1"/>
-          </a:lnRef>
-          <a:fillRef idx="3">
-            <a:schemeClr val="accent1"/>
-          </a:fillRef>
-          <a:effectRef idx="2">
-            <a:schemeClr val="accent1"/>
-          </a:effectRef>
-          <a:fontRef idx="minor">
-            <a:schemeClr val="lt1"/>
-          </a:fontRef>
-        </p:style>
-        <p:txBody>
-          <a:bodyPr rtlCol="0" anchor="ctr"/>
-          <a:lstStyle/>
-          <a:p>
-            <a:pPr algn="ctr"/>
-          </a:p>
-        </p:txBody>
-      </p:sp>
-      <p:sp>
-        <p:nvSpPr>
-          <p:cNvPr id="14" name="Rounded Rectangle 13"/>
-          <p:cNvSpPr/>
-          <p:nvPr/>
-        </p:nvSpPr>
-        <p:spPr>
-          <a:xfrm>
-            <a:off x="594360" y="3575304"/>
-            <a:ext cx="438912" cy="438912"/>
-          </a:xfrm>
-          <a:prstGeom prst="roundRect">
-            <a:avLst>
-              <a:gd name="adj" fmla="val 12000"/>
-            </a:avLst>
-          </a:prstGeom>
-          <a:solidFill>
-            <a:srgbClr val="095292"/>
-          </a:solidFill>
-          <a:ln>
-            <a:noFill/>
-          </a:ln>
-        </p:spPr>
-        <p:style>
-          <a:lnRef idx="1">
-            <a:schemeClr val="accent1"/>
-          </a:lnRef>
-          <a:fillRef idx="3">
-            <a:schemeClr val="accent1"/>
-          </a:fillRef>
-          <a:effectRef idx="2">
-            <a:schemeClr val="accent1"/>
-          </a:effectRef>
-          <a:fontRef idx="minor">
-            <a:schemeClr val="lt1"/>
-          </a:fontRef>
-        </p:style>
-        <p:txBody>
-          <a:bodyPr rtlCol="0" anchor="ctr"/>
-          <a:lstStyle/>
-          <a:p>
-            <a:pPr algn="ctr"/>
-          </a:p>
-        </p:txBody>
-      </p:sp>
-      <p:sp>
-        <p:nvSpPr>
-          <p:cNvPr id="15" name="TextBox 14"/>
-          <p:cNvSpPr txBox="1"/>
-          <p:nvPr/>
-        </p:nvSpPr>
-        <p:spPr>
-          <a:xfrm>
-            <a:off x="594360" y="3575304"/>
-            <a:ext cx="438912" cy="438912"/>
-          </a:xfrm>
-          <a:prstGeom prst="rect">
-            <a:avLst/>
-          </a:prstGeom>
-          <a:noFill/>
-        </p:spPr>
-        <p:txBody>
-          <a:bodyPr wrap="square" anchor="ctr"/>
-          <a:lstStyle/>
-          <a:p>
-            <a:pPr algn="ctr"/>
-            <a:r>
-              <a:rPr sz="1600" b="1" i="0">
-                <a:solidFill>
-                  <a:srgbClr val="FFFFFF"/>
-                </a:solidFill>
-                <a:latin typeface="Calibri"/>
-              </a:rPr>
-              <a:t>3</a:t>
-            </a:r>
-          </a:p>
-        </p:txBody>
-      </p:sp>
-      <p:sp>
-        <p:nvSpPr>
-          <p:cNvPr id="16" name="TextBox 15"/>
-          <p:cNvSpPr txBox="1"/>
-          <p:nvPr/>
-        </p:nvSpPr>
-        <p:spPr>
-          <a:xfrm>
-            <a:off x="1188720" y="3410712"/>
-            <a:ext cx="10271455" cy="786384"/>
-          </a:xfrm>
-          <a:prstGeom prst="rect">
-            <a:avLst/>
-          </a:prstGeom>
-          <a:noFill/>
-        </p:spPr>
-        <p:txBody>
-          <a:bodyPr wrap="square" anchor="ctr"/>
-          <a:lstStyle/>
-          <a:p>
-            <a:r>
-              <a:rPr sz="1500" b="1" i="0">
-                <a:solidFill>
-                  <a:srgbClr val="095292"/>
-                </a:solidFill>
-                <a:latin typeface="Calibri"/>
-              </a:rPr>
-              <a:t>Matar la subconsulta correlacionada del ranking de duenos: LEFT JOIN + GROUP BY + COUNT(c.id_cita), y demostrar la equivalencia con EXCEPT en los dos sentidos.</a:t>
-            </a:r>
-          </a:p>
-        </p:txBody>
-      </p:sp>
-      <p:sp>
-        <p:nvSpPr>
-          <p:cNvPr id="17" name="Rounded Rectangle 16"/>
-          <p:cNvSpPr/>
-          <p:nvPr/>
-        </p:nvSpPr>
-        <p:spPr>
-          <a:xfrm>
-            <a:off x="457200" y="4361688"/>
-            <a:ext cx="11277295" cy="950976"/>
-          </a:xfrm>
-          <a:prstGeom prst="roundRect">
-            <a:avLst>
-              <a:gd name="adj" fmla="val 12000"/>
-            </a:avLst>
-          </a:prstGeom>
-          <a:solidFill>
-            <a:srgbClr val="E8F4FA"/>
-          </a:solidFill>
-          <a:ln>
-            <a:noFill/>
-          </a:ln>
-        </p:spPr>
-        <p:style>
-          <a:lnRef idx="1">
-            <a:schemeClr val="accent1"/>
-          </a:lnRef>
-          <a:fillRef idx="3">
-            <a:schemeClr val="accent1"/>
-          </a:fillRef>
-          <a:effectRef idx="2">
-            <a:schemeClr val="accent1"/>
-          </a:effectRef>
-          <a:fontRef idx="minor">
-            <a:schemeClr val="lt1"/>
-          </a:fontRef>
-        </p:style>
-        <p:txBody>
-          <a:bodyPr rtlCol="0" anchor="ctr"/>
-          <a:lstStyle/>
-          <a:p>
-            <a:pPr algn="ctr"/>
-          </a:p>
-        </p:txBody>
-      </p:sp>
-      <p:sp>
-        <p:nvSpPr>
-          <p:cNvPr id="18" name="Rounded Rectangle 17"/>
-          <p:cNvSpPr/>
-          <p:nvPr/>
-        </p:nvSpPr>
-        <p:spPr>
-          <a:xfrm>
-            <a:off x="594360" y="4617720"/>
-            <a:ext cx="438912" cy="438912"/>
-          </a:xfrm>
-          <a:prstGeom prst="roundRect">
-            <a:avLst>
-              <a:gd name="adj" fmla="val 12000"/>
-            </a:avLst>
-          </a:prstGeom>
-          <a:solidFill>
-            <a:srgbClr val="095292"/>
-          </a:solidFill>
-          <a:ln>
-            <a:noFill/>
-          </a:ln>
-        </p:spPr>
-        <p:style>
-          <a:lnRef idx="1">
-            <a:schemeClr val="accent1"/>
-          </a:lnRef>
-          <a:fillRef idx="3">
-            <a:schemeClr val="accent1"/>
-          </a:fillRef>
-          <a:effectRef idx="2">
-            <a:schemeClr val="accent1"/>
-          </a:effectRef>
-          <a:fontRef idx="minor">
-            <a:schemeClr val="lt1"/>
-          </a:fontRef>
-        </p:style>
-        <p:txBody>
-          <a:bodyPr rtlCol="0" anchor="ctr"/>
-          <a:lstStyle/>
-          <a:p>
-            <a:pPr algn="ctr"/>
-          </a:p>
-        </p:txBody>
-      </p:sp>
-      <p:sp>
-        <p:nvSpPr>
-          <p:cNvPr id="19" name="TextBox 18"/>
-          <p:cNvSpPr txBox="1"/>
-          <p:nvPr/>
-        </p:nvSpPr>
-        <p:spPr>
-          <a:xfrm>
-            <a:off x="594360" y="4617720"/>
-            <a:ext cx="438912" cy="438912"/>
-          </a:xfrm>
-          <a:prstGeom prst="rect">
-            <a:avLst/>
-          </a:prstGeom>
-          <a:noFill/>
-        </p:spPr>
-        <p:txBody>
-          <a:bodyPr wrap="square" anchor="ctr"/>
-          <a:lstStyle/>
-          <a:p>
-            <a:pPr algn="ctr"/>
-            <a:r>
-              <a:rPr sz="1600" b="1" i="0">
-                <a:solidFill>
-                  <a:srgbClr val="FFFFFF"/>
-                </a:solidFill>
-                <a:latin typeface="Calibri"/>
-              </a:rPr>
-              <a:t>4</a:t>
-            </a:r>
-          </a:p>
-        </p:txBody>
-      </p:sp>
-      <p:sp>
-        <p:nvSpPr>
-          <p:cNvPr id="20" name="TextBox 19"/>
-          <p:cNvSpPr txBox="1"/>
-          <p:nvPr/>
-        </p:nvSpPr>
-        <p:spPr>
-          <a:xfrm>
-            <a:off x="1188720" y="4453128"/>
-            <a:ext cx="10271455" cy="786384"/>
-          </a:xfrm>
-          <a:prstGeom prst="rect">
-            <a:avLst/>
-          </a:prstGeom>
-          <a:noFill/>
-        </p:spPr>
-        <p:txBody>
-          <a:bodyPr wrap="square" anchor="ctr"/>
-          <a:lstStyle/>
-          <a:p>
-            <a:r>
-              <a:rPr sz="1500" b="1" i="0">
-                <a:solidFill>
-                  <a:srgbClr val="095292"/>
-                </a:solidFill>
-                <a:latin typeface="Calibri"/>
-              </a:rPr>
-              <a:t>Responder la de seleccion multiple sobre antipatrones (6 afirmaciones, 4 correctas).</a:t>
-            </a:r>
-          </a:p>
-        </p:txBody>
-      </p:sp>
-      <p:sp>
-        <p:nvSpPr>
-          <p:cNvPr id="21" name="Rounded Rectangle 20"/>
-          <p:cNvSpPr/>
-          <p:nvPr/>
-        </p:nvSpPr>
-        <p:spPr>
-          <a:xfrm>
-            <a:off x="457200" y="5404104"/>
-            <a:ext cx="11277295" cy="950976"/>
-          </a:xfrm>
-          <a:prstGeom prst="roundRect">
-            <a:avLst>
-              <a:gd name="adj" fmla="val 12000"/>
-            </a:avLst>
-          </a:prstGeom>
-          <a:solidFill>
-            <a:srgbClr val="F2F2F2"/>
-          </a:solidFill>
-          <a:ln>
-            <a:noFill/>
-          </a:ln>
-        </p:spPr>
-        <p:style>
-          <a:lnRef idx="1">
-            <a:schemeClr val="accent1"/>
-          </a:lnRef>
-          <a:fillRef idx="3">
-            <a:schemeClr val="accent1"/>
-          </a:fillRef>
-          <a:effectRef idx="2">
-            <a:schemeClr val="accent1"/>
-          </a:effectRef>
-          <a:fontRef idx="minor">
-            <a:schemeClr val="lt1"/>
-          </a:fontRef>
-        </p:style>
-        <p:txBody>
-          <a:bodyPr rtlCol="0" anchor="ctr"/>
-          <a:lstStyle/>
-          <a:p>
-            <a:pPr algn="ctr"/>
-          </a:p>
-        </p:txBody>
-      </p:sp>
-      <p:sp>
-        <p:nvSpPr>
-          <p:cNvPr id="22" name="Rounded Rectangle 21"/>
-          <p:cNvSpPr/>
-          <p:nvPr/>
-        </p:nvSpPr>
-        <p:spPr>
-          <a:xfrm>
-            <a:off x="594360" y="5660136"/>
-            <a:ext cx="438912" cy="438912"/>
-          </a:xfrm>
-          <a:prstGeom prst="roundRect">
-            <a:avLst>
-              <a:gd name="adj" fmla="val 12000"/>
-            </a:avLst>
-          </a:prstGeom>
-          <a:solidFill>
-            <a:srgbClr val="095292"/>
-          </a:solidFill>
-          <a:ln>
-            <a:noFill/>
-          </a:ln>
-        </p:spPr>
-        <p:style>
-          <a:lnRef idx="1">
-            <a:schemeClr val="accent1"/>
-          </a:lnRef>
-          <a:fillRef idx="3">
-            <a:schemeClr val="accent1"/>
-          </a:fillRef>
-          <a:effectRef idx="2">
-            <a:schemeClr val="accent1"/>
-          </a:effectRef>
-          <a:fontRef idx="minor">
-            <a:schemeClr val="lt1"/>
-          </a:fontRef>
-        </p:style>
-        <p:txBody>
-          <a:bodyPr rtlCol="0" anchor="ctr"/>
-          <a:lstStyle/>
-          <a:p>
-            <a:pPr algn="ctr"/>
-          </a:p>
-        </p:txBody>
-      </p:sp>
-      <p:sp>
-        <p:nvSpPr>
-          <p:cNvPr id="23" name="TextBox 22"/>
-          <p:cNvSpPr txBox="1"/>
-          <p:nvPr/>
-        </p:nvSpPr>
-        <p:spPr>
-          <a:xfrm>
-            <a:off x="594360" y="5660136"/>
-            <a:ext cx="438912" cy="438912"/>
-          </a:xfrm>
-          <a:prstGeom prst="rect">
-            <a:avLst/>
-          </a:prstGeom>
-          <a:noFill/>
-        </p:spPr>
-        <p:txBody>
-          <a:bodyPr wrap="square" anchor="ctr"/>
-          <a:lstStyle/>
-          <a:p>
-            <a:pPr algn="ctr"/>
-            <a:r>
-              <a:rPr sz="1600" b="1" i="0">
-                <a:solidFill>
-                  <a:srgbClr val="FFFFFF"/>
-                </a:solidFill>
-                <a:latin typeface="Calibri"/>
-              </a:rPr>
-              <a:t>5</a:t>
-            </a:r>
-          </a:p>
-        </p:txBody>
-      </p:sp>
-      <p:sp>
-        <p:nvSpPr>
-          <p:cNvPr id="24" name="TextBox 23"/>
-          <p:cNvSpPr txBox="1"/>
-          <p:nvPr/>
-        </p:nvSpPr>
-        <p:spPr>
-          <a:xfrm>
-            <a:off x="1188720" y="5495544"/>
-            <a:ext cx="10271455" cy="786384"/>
-          </a:xfrm>
-          <a:prstGeom prst="rect">
-            <a:avLst/>
-          </a:prstGeom>
-          <a:noFill/>
-        </p:spPr>
-        <p:txBody>
-          <a:bodyPr wrap="square" anchor="ctr"/>
-          <a:lstStyle/>
-          <a:p>
-            <a:r>
-              <a:rPr sz="1500" b="1" i="0">
-                <a:solidFill>
-                  <a:srgbClr val="095292"/>
-                </a:solidFill>
-                <a:latin typeface="Calibri"/>
-              </a:rPr>
-              <a:t>Escribir la justificacion tecnica de media pagina y guardar 06_opt_antes.sql / 06_opt_despues.sql en la carpeta del PI.</a:t>
-            </a:r>
-          </a:p>
-        </p:txBody>
-      </p:sp>
-      <p:sp>
-        <p:nvSpPr>
-          <p:cNvPr id="25" name="TextBox 24"/>
-          <p:cNvSpPr txBox="1"/>
-          <p:nvPr/>
-        </p:nvSpPr>
-        <p:spPr>
-          <a:xfrm>
-            <a:off x="11185855" y="6473952"/>
-            <a:ext cx="640080" cy="274320"/>
-          </a:xfrm>
-          <a:prstGeom prst="rect">
-            <a:avLst/>
-          </a:prstGeom>
-          <a:noFill/>
-        </p:spPr>
-        <p:txBody>
-          <a:bodyPr wrap="square">
-            <a:spAutoFit/>
-          </a:bodyPr>
-          <a:lstStyle/>
-          <a:p>
-            <a:pPr algn="r"/>
-            <a:r>
-              <a:rPr sz="1100" b="0" i="0">
-                <a:solidFill>
-                  <a:srgbClr val="666666"/>
-                </a:solidFill>
-                <a:latin typeface="Calibri"/>
-              </a:rPr>
-              <a:t>47</a:t>
-            </a:r>
-          </a:p>
-        </p:txBody>
-      </p:sp>
-    </p:spTree>
-  </p:cSld>
-  <p:clrMapOvr>
-    <a:masterClrMapping/>
-  </p:clrMapOvr>
-</p:sld>
-</file>
-
-<file path=ppt/slides/slide48.xml><?xml version="1.0" encoding="utf-8"?>
-<p:sld xmlns:a="http://schemas.openxmlformats.org/drawingml/2006/main" xmlns:p="http://schemas.openxmlformats.org/presentationml/2006/main" xmlns:r="http://schemas.openxmlformats.org/officeDocument/2006/relationships">
-  <p:cSld>
-    <p:bg>
-      <p:bgPr>
-        <a:solidFill>
-          <a:srgbClr val="FFFFFF"/>
-        </a:solidFill>
-        <a:effectLst/>
-      </p:bgPr>
-    </p:bg>
-    <p:spTree>
-      <p:nvGrpSpPr>
-        <p:cNvPr id="1" name=""/>
-        <p:cNvGrpSpPr/>
-        <p:nvPr/>
-      </p:nvGrpSpPr>
-      <p:grpSpPr/>
-      <p:sp>
-        <p:nvSpPr>
-          <p:cNvPr id="2" name="Rectangle 1"/>
-          <p:cNvSpPr/>
-          <p:nvPr/>
-        </p:nvSpPr>
-        <p:spPr>
-          <a:xfrm>
-            <a:off x="0" y="0"/>
-            <a:ext cx="12191695" cy="960120"/>
-          </a:xfrm>
-          <a:prstGeom prst="rect">
-            <a:avLst/>
-          </a:prstGeom>
-          <a:solidFill>
-            <a:srgbClr val="095292"/>
-          </a:solidFill>
-          <a:ln>
-            <a:noFill/>
-          </a:ln>
-        </p:spPr>
-        <p:style>
-          <a:lnRef idx="1">
-            <a:schemeClr val="accent1"/>
-          </a:lnRef>
-          <a:fillRef idx="3">
-            <a:schemeClr val="accent1"/>
-          </a:fillRef>
-          <a:effectRef idx="2">
-            <a:schemeClr val="accent1"/>
-          </a:effectRef>
-          <a:fontRef idx="minor">
-            <a:schemeClr val="lt1"/>
-          </a:fontRef>
-        </p:style>
-        <p:txBody>
-          <a:bodyPr rtlCol="0" anchor="ctr"/>
-          <a:lstStyle/>
-          <a:p>
-            <a:pPr algn="ctr"/>
-          </a:p>
-        </p:txBody>
-      </p:sp>
-      <p:sp>
-        <p:nvSpPr>
-          <p:cNvPr id="3" name="Rectangle 2"/>
-          <p:cNvSpPr/>
-          <p:nvPr/>
-        </p:nvSpPr>
-        <p:spPr>
-          <a:xfrm>
-            <a:off x="0" y="960120"/>
-            <a:ext cx="12191695" cy="41148"/>
-          </a:xfrm>
-          <a:prstGeom prst="rect">
-            <a:avLst/>
-          </a:prstGeom>
-          <a:solidFill>
-            <a:srgbClr val="FFD000"/>
-          </a:solidFill>
-          <a:ln>
-            <a:noFill/>
-          </a:ln>
-        </p:spPr>
-        <p:style>
-          <a:lnRef idx="1">
-            <a:schemeClr val="accent1"/>
-          </a:lnRef>
-          <a:fillRef idx="3">
-            <a:schemeClr val="accent1"/>
-          </a:fillRef>
-          <a:effectRef idx="2">
-            <a:schemeClr val="accent1"/>
-          </a:effectRef>
-          <a:fontRef idx="minor">
-            <a:schemeClr val="lt1"/>
-          </a:fontRef>
-        </p:style>
-        <p:txBody>
-          <a:bodyPr rtlCol="0" anchor="ctr"/>
-          <a:lstStyle/>
-          <a:p>
-            <a:pPr algn="ctr"/>
-          </a:p>
-        </p:txBody>
-      </p:sp>
-      <p:sp>
-        <p:nvSpPr>
-          <p:cNvPr id="4" name="TextBox 3"/>
-          <p:cNvSpPr txBox="1"/>
-          <p:nvPr/>
-        </p:nvSpPr>
-        <p:spPr>
-          <a:xfrm>
-            <a:off x="457200" y="164592"/>
-            <a:ext cx="11277295" cy="502920"/>
-          </a:xfrm>
-          <a:prstGeom prst="rect">
-            <a:avLst/>
-          </a:prstGeom>
-          <a:noFill/>
-        </p:spPr>
-        <p:txBody>
-          <a:bodyPr wrap="square">
-            <a:spAutoFit/>
-          </a:bodyPr>
-          <a:lstStyle/>
-          <a:p>
-            <a:r>
-              <a:rPr sz="2600" b="1" i="0">
-                <a:solidFill>
-                  <a:srgbClr val="FFFFFF"/>
-                </a:solidFill>
-                <a:latin typeface="Calibri"/>
-              </a:rPr>
-              <a:t>Taller PI VetCare — pistas (checklist vacio)</a:t>
-            </a:r>
-          </a:p>
-        </p:txBody>
-      </p:sp>
-      <p:sp>
-        <p:nvSpPr>
-          <p:cNvPr id="5" name="Rounded Rectangle 4"/>
-          <p:cNvSpPr/>
-          <p:nvPr/>
-        </p:nvSpPr>
-        <p:spPr>
-          <a:xfrm>
-            <a:off x="457200" y="1261872"/>
-            <a:ext cx="11277295" cy="566928"/>
-          </a:xfrm>
-          <a:prstGeom prst="roundRect">
-            <a:avLst>
-              <a:gd name="adj" fmla="val 12000"/>
-            </a:avLst>
-          </a:prstGeom>
-          <a:solidFill>
-            <a:srgbClr val="F2F2F2"/>
-          </a:solidFill>
-          <a:ln>
-            <a:noFill/>
-          </a:ln>
-        </p:spPr>
-        <p:style>
-          <a:lnRef idx="1">
-            <a:schemeClr val="accent1"/>
-          </a:lnRef>
-          <a:fillRef idx="3">
-            <a:schemeClr val="accent1"/>
-          </a:fillRef>
-          <a:effectRef idx="2">
-            <a:schemeClr val="accent1"/>
-          </a:effectRef>
-          <a:fontRef idx="minor">
-            <a:schemeClr val="lt1"/>
-          </a:fontRef>
-        </p:style>
-        <p:txBody>
-          <a:bodyPr rtlCol="0" anchor="ctr"/>
-          <a:lstStyle/>
-          <a:p>
-            <a:pPr algn="ctr"/>
-          </a:p>
-        </p:txBody>
-      </p:sp>
-      <p:sp>
-        <p:nvSpPr>
-          <p:cNvPr id="6" name="Rectangle 5"/>
-          <p:cNvSpPr/>
-          <p:nvPr/>
-        </p:nvSpPr>
-        <p:spPr>
-          <a:xfrm>
-            <a:off x="640080" y="1408175"/>
-            <a:ext cx="274320" cy="274320"/>
-          </a:xfrm>
-          <a:prstGeom prst="rect">
-            <a:avLst/>
-          </a:prstGeom>
-          <a:solidFill>
-            <a:srgbClr val="FFFFFF"/>
-          </a:solidFill>
-          <a:ln>
-            <a:solidFill>
-              <a:srgbClr val="333333"/>
-            </a:solidFill>
-          </a:ln>
-        </p:spPr>
-        <p:style>
-          <a:lnRef idx="1">
-            <a:schemeClr val="accent1"/>
-          </a:lnRef>
-          <a:fillRef idx="3">
-            <a:schemeClr val="accent1"/>
-          </a:fillRef>
-          <a:effectRef idx="2">
-            <a:schemeClr val="accent1"/>
-          </a:effectRef>
-          <a:fontRef idx="minor">
-            <a:schemeClr val="lt1"/>
-          </a:fontRef>
-        </p:style>
-        <p:txBody>
-          <a:bodyPr rtlCol="0" anchor="ctr"/>
-          <a:lstStyle/>
-          <a:p>
-            <a:pPr algn="ctr"/>
-          </a:p>
-        </p:txBody>
-      </p:sp>
-      <p:sp>
-        <p:nvSpPr>
-          <p:cNvPr id="7" name="Rectangle 6"/>
-          <p:cNvSpPr/>
-          <p:nvPr/>
-        </p:nvSpPr>
-        <p:spPr>
-          <a:xfrm>
-            <a:off x="640080" y="1408175"/>
-            <a:ext cx="73152" cy="274320"/>
-          </a:xfrm>
-          <a:prstGeom prst="rect">
-            <a:avLst/>
-          </a:prstGeom>
-          <a:solidFill>
-            <a:srgbClr val="269CCB"/>
-          </a:solidFill>
-          <a:ln>
-            <a:noFill/>
-          </a:ln>
-        </p:spPr>
-        <p:style>
-          <a:lnRef idx="1">
-            <a:schemeClr val="accent1"/>
-          </a:lnRef>
-          <a:fillRef idx="3">
-            <a:schemeClr val="accent1"/>
-          </a:fillRef>
-          <a:effectRef idx="2">
-            <a:schemeClr val="accent1"/>
-          </a:effectRef>
-          <a:fontRef idx="minor">
-            <a:schemeClr val="lt1"/>
-          </a:fontRef>
-        </p:style>
-        <p:txBody>
-          <a:bodyPr rtlCol="0" anchor="ctr"/>
-          <a:lstStyle/>
-          <a:p>
-            <a:pPr algn="ctr"/>
-          </a:p>
-        </p:txBody>
-      </p:sp>
-      <p:sp>
-        <p:nvSpPr>
-          <p:cNvPr id="8" name="TextBox 7"/>
-          <p:cNvSpPr txBox="1"/>
-          <p:nvPr/>
-        </p:nvSpPr>
-        <p:spPr>
-          <a:xfrm>
-            <a:off x="1097280" y="1353312"/>
-            <a:ext cx="10362895" cy="402336"/>
-          </a:xfrm>
-          <a:prstGeom prst="rect">
-            <a:avLst/>
-          </a:prstGeom>
-          <a:noFill/>
-        </p:spPr>
-        <p:txBody>
-          <a:bodyPr wrap="square" anchor="ctr"/>
-          <a:lstStyle/>
-          <a:p>
-            <a:r>
-              <a:rPr sz="1500" b="0" i="0">
-                <a:solidFill>
-                  <a:srgbClr val="333333"/>
-                </a:solidFill>
-                <a:latin typeface="Calibri"/>
-              </a:rPr>
-              <a:t>□ ¿Quedó algún «SELECT *», o proyectaste las </a:t>
-            </a:r>
-            <a:r>
-              <a:rPr sz="1500" b="1" i="0">
-                <a:solidFill>
-                  <a:srgbClr val="333333"/>
-                </a:solidFill>
-                <a:latin typeface="Calibri"/>
-              </a:rPr>
-              <a:t>6</a:t>
-            </a:r>
-            <a:r>
-              <a:rPr sz="1500" b="0" i="0">
-                <a:solidFill>
-                  <a:srgbClr val="333333"/>
-                </a:solidFill>
-                <a:latin typeface="Calibri"/>
-              </a:rPr>
-              <a:t> columnas que pide el enunciado?</a:t>
-            </a:r>
-          </a:p>
-        </p:txBody>
-      </p:sp>
-      <p:sp>
-        <p:nvSpPr>
-          <p:cNvPr id="9" name="Rounded Rectangle 8"/>
-          <p:cNvSpPr/>
-          <p:nvPr/>
-        </p:nvSpPr>
-        <p:spPr>
-          <a:xfrm>
-            <a:off x="457200" y="1938528"/>
-            <a:ext cx="11277295" cy="566928"/>
-          </a:xfrm>
-          <a:prstGeom prst="roundRect">
-            <a:avLst>
-              <a:gd name="adj" fmla="val 12000"/>
-            </a:avLst>
-          </a:prstGeom>
-          <a:solidFill>
-            <a:srgbClr val="F2F2F2"/>
-          </a:solidFill>
-          <a:ln>
-            <a:noFill/>
-          </a:ln>
-        </p:spPr>
-        <p:style>
-          <a:lnRef idx="1">
-            <a:schemeClr val="accent1"/>
-          </a:lnRef>
-          <a:fillRef idx="3">
-            <a:schemeClr val="accent1"/>
-          </a:fillRef>
-          <a:effectRef idx="2">
-            <a:schemeClr val="accent1"/>
-          </a:effectRef>
-          <a:fontRef idx="minor">
-            <a:schemeClr val="lt1"/>
-          </a:fontRef>
-        </p:style>
-        <p:txBody>
-          <a:bodyPr rtlCol="0" anchor="ctr"/>
-          <a:lstStyle/>
-          <a:p>
-            <a:pPr algn="ctr"/>
-          </a:p>
-        </p:txBody>
-      </p:sp>
-      <p:sp>
-        <p:nvSpPr>
-          <p:cNvPr id="10" name="Rectangle 9"/>
-          <p:cNvSpPr/>
-          <p:nvPr/>
-        </p:nvSpPr>
-        <p:spPr>
-          <a:xfrm>
-            <a:off x="640080" y="2084832"/>
-            <a:ext cx="274320" cy="274320"/>
-          </a:xfrm>
-          <a:prstGeom prst="rect">
-            <a:avLst/>
-          </a:prstGeom>
-          <a:solidFill>
-            <a:srgbClr val="FFFFFF"/>
-          </a:solidFill>
-          <a:ln>
-            <a:solidFill>
-              <a:srgbClr val="333333"/>
-            </a:solidFill>
-          </a:ln>
-        </p:spPr>
-        <p:style>
-          <a:lnRef idx="1">
-            <a:schemeClr val="accent1"/>
-          </a:lnRef>
-          <a:fillRef idx="3">
-            <a:schemeClr val="accent1"/>
-          </a:fillRef>
-          <a:effectRef idx="2">
-            <a:schemeClr val="accent1"/>
-          </a:effectRef>
-          <a:fontRef idx="minor">
-            <a:schemeClr val="lt1"/>
-          </a:fontRef>
-        </p:style>
-        <p:txBody>
-          <a:bodyPr rtlCol="0" anchor="ctr"/>
-          <a:lstStyle/>
-          <a:p>
-            <a:pPr algn="ctr"/>
-          </a:p>
-        </p:txBody>
-      </p:sp>
-      <p:sp>
-        <p:nvSpPr>
-          <p:cNvPr id="11" name="Rectangle 10"/>
-          <p:cNvSpPr/>
-          <p:nvPr/>
-        </p:nvSpPr>
-        <p:spPr>
-          <a:xfrm>
-            <a:off x="640080" y="2084832"/>
-            <a:ext cx="73152" cy="274320"/>
-          </a:xfrm>
-          <a:prstGeom prst="rect">
-            <a:avLst/>
-          </a:prstGeom>
-          <a:solidFill>
-            <a:srgbClr val="269CCB"/>
-          </a:solidFill>
-          <a:ln>
-            <a:noFill/>
-          </a:ln>
-        </p:spPr>
-        <p:style>
-          <a:lnRef idx="1">
-            <a:schemeClr val="accent1"/>
-          </a:lnRef>
-          <a:fillRef idx="3">
-            <a:schemeClr val="accent1"/>
-          </a:fillRef>
-          <a:effectRef idx="2">
-            <a:schemeClr val="accent1"/>
-          </a:effectRef>
-          <a:fontRef idx="minor">
-            <a:schemeClr val="lt1"/>
-          </a:fontRef>
-        </p:style>
-        <p:txBody>
-          <a:bodyPr rtlCol="0" anchor="ctr"/>
-          <a:lstStyle/>
-          <a:p>
-            <a:pPr algn="ctr"/>
-          </a:p>
-        </p:txBody>
-      </p:sp>
-      <p:sp>
-        <p:nvSpPr>
-          <p:cNvPr id="12" name="TextBox 11"/>
-          <p:cNvSpPr txBox="1"/>
-          <p:nvPr/>
-        </p:nvSpPr>
-        <p:spPr>
-          <a:xfrm>
-            <a:off x="1097280" y="2029968"/>
-            <a:ext cx="10362895" cy="402336"/>
-          </a:xfrm>
-          <a:prstGeom prst="rect">
-            <a:avLst/>
-          </a:prstGeom>
-          <a:noFill/>
-        </p:spPr>
-        <p:txBody>
-          <a:bodyPr wrap="square" anchor="ctr"/>
-          <a:lstStyle/>
-          <a:p>
-            <a:r>
-              <a:rPr sz="1500" b="0" i="0">
-                <a:solidFill>
-                  <a:srgbClr val="333333"/>
-                </a:solidFill>
-                <a:latin typeface="Calibri"/>
-              </a:rPr>
-              <a:t>□ ¿La fecha se filtra con un </a:t>
-            </a:r>
-            <a:r>
-              <a:rPr sz="1500" b="1" i="0">
-                <a:solidFill>
-                  <a:srgbClr val="333333"/>
-                </a:solidFill>
-                <a:latin typeface="Calibri"/>
-              </a:rPr>
-              <a:t>rango</a:t>
-            </a:r>
-            <a:r>
-              <a:rPr sz="1500" b="0" i="0">
-                <a:solidFill>
-                  <a:srgbClr val="333333"/>
-                </a:solidFill>
-                <a:latin typeface="Calibri"/>
-              </a:rPr>
-              <a:t> sobre la columna, sin «to_char» ni «EXTRACT» encima de ella?</a:t>
-            </a:r>
-          </a:p>
-        </p:txBody>
-      </p:sp>
-      <p:sp>
-        <p:nvSpPr>
-          <p:cNvPr id="13" name="Rounded Rectangle 12"/>
-          <p:cNvSpPr/>
-          <p:nvPr/>
-        </p:nvSpPr>
-        <p:spPr>
-          <a:xfrm>
-            <a:off x="457200" y="2615184"/>
-            <a:ext cx="11277295" cy="566928"/>
-          </a:xfrm>
-          <a:prstGeom prst="roundRect">
-            <a:avLst>
-              <a:gd name="adj" fmla="val 12000"/>
-            </a:avLst>
-          </a:prstGeom>
-          <a:solidFill>
-            <a:srgbClr val="F2F2F2"/>
-          </a:solidFill>
-          <a:ln>
-            <a:noFill/>
-          </a:ln>
-        </p:spPr>
-        <p:style>
-          <a:lnRef idx="1">
-            <a:schemeClr val="accent1"/>
-          </a:lnRef>
-          <a:fillRef idx="3">
-            <a:schemeClr val="accent1"/>
-          </a:fillRef>
-          <a:effectRef idx="2">
-            <a:schemeClr val="accent1"/>
-          </a:effectRef>
-          <a:fontRef idx="minor">
-            <a:schemeClr val="lt1"/>
-          </a:fontRef>
-        </p:style>
-        <p:txBody>
-          <a:bodyPr rtlCol="0" anchor="ctr"/>
-          <a:lstStyle/>
-          <a:p>
-            <a:pPr algn="ctr"/>
-          </a:p>
-        </p:txBody>
-      </p:sp>
-      <p:sp>
-        <p:nvSpPr>
-          <p:cNvPr id="14" name="Rectangle 13"/>
-          <p:cNvSpPr/>
-          <p:nvPr/>
-        </p:nvSpPr>
-        <p:spPr>
-          <a:xfrm>
-            <a:off x="640080" y="2761488"/>
-            <a:ext cx="274320" cy="274320"/>
-          </a:xfrm>
-          <a:prstGeom prst="rect">
-            <a:avLst/>
-          </a:prstGeom>
-          <a:solidFill>
-            <a:srgbClr val="FFFFFF"/>
-          </a:solidFill>
-          <a:ln>
-            <a:solidFill>
-              <a:srgbClr val="333333"/>
-            </a:solidFill>
-          </a:ln>
-        </p:spPr>
-        <p:style>
-          <a:lnRef idx="1">
-            <a:schemeClr val="accent1"/>
-          </a:lnRef>
-          <a:fillRef idx="3">
-            <a:schemeClr val="accent1"/>
-          </a:fillRef>
-          <a:effectRef idx="2">
-            <a:schemeClr val="accent1"/>
-          </a:effectRef>
-          <a:fontRef idx="minor">
-            <a:schemeClr val="lt1"/>
-          </a:fontRef>
-        </p:style>
-        <p:txBody>
-          <a:bodyPr rtlCol="0" anchor="ctr"/>
-          <a:lstStyle/>
-          <a:p>
-            <a:pPr algn="ctr"/>
-          </a:p>
-        </p:txBody>
-      </p:sp>
-      <p:sp>
-        <p:nvSpPr>
-          <p:cNvPr id="15" name="Rectangle 14"/>
-          <p:cNvSpPr/>
-          <p:nvPr/>
-        </p:nvSpPr>
-        <p:spPr>
-          <a:xfrm>
-            <a:off x="640080" y="2761488"/>
-            <a:ext cx="73152" cy="274320"/>
-          </a:xfrm>
-          <a:prstGeom prst="rect">
-            <a:avLst/>
-          </a:prstGeom>
-          <a:solidFill>
-            <a:srgbClr val="269CCB"/>
-          </a:solidFill>
-          <a:ln>
-            <a:noFill/>
-          </a:ln>
-        </p:spPr>
-        <p:style>
-          <a:lnRef idx="1">
-            <a:schemeClr val="accent1"/>
-          </a:lnRef>
-          <a:fillRef idx="3">
-            <a:schemeClr val="accent1"/>
-          </a:fillRef>
-          <a:effectRef idx="2">
-            <a:schemeClr val="accent1"/>
-          </a:effectRef>
-          <a:fontRef idx="minor">
-            <a:schemeClr val="lt1"/>
-          </a:fontRef>
-        </p:style>
-        <p:txBody>
-          <a:bodyPr rtlCol="0" anchor="ctr"/>
-          <a:lstStyle/>
-          <a:p>
-            <a:pPr algn="ctr"/>
-          </a:p>
-        </p:txBody>
-      </p:sp>
-      <p:sp>
-        <p:nvSpPr>
-          <p:cNvPr id="16" name="TextBox 15"/>
-          <p:cNvSpPr txBox="1"/>
-          <p:nvPr/>
-        </p:nvSpPr>
-        <p:spPr>
-          <a:xfrm>
-            <a:off x="1097280" y="2706624"/>
-            <a:ext cx="10362895" cy="402336"/>
-          </a:xfrm>
-          <a:prstGeom prst="rect">
-            <a:avLst/>
-          </a:prstGeom>
-          <a:noFill/>
-        </p:spPr>
-        <p:txBody>
-          <a:bodyPr wrap="square" anchor="ctr"/>
-          <a:lstStyle/>
-          <a:p>
-            <a:r>
-              <a:rPr sz="1500" b="0" i="0">
-                <a:solidFill>
-                  <a:srgbClr val="333333"/>
-                </a:solidFill>
-                <a:latin typeface="Calibri"/>
-              </a:rPr>
-              <a:t>□ ¿Los dos «COUNT(*)» de la pregunta 1 dan el </a:t>
-            </a:r>
-            <a:r>
-              <a:rPr sz="1500" b="1" i="0">
-                <a:solidFill>
-                  <a:srgbClr val="333333"/>
-                </a:solidFill>
-                <a:latin typeface="Calibri"/>
-              </a:rPr>
-              <a:t>mismo</a:t>
-            </a:r>
-            <a:r>
-              <a:rPr sz="1500" b="0" i="0">
-                <a:solidFill>
-                  <a:srgbClr val="333333"/>
-                </a:solidFill>
-                <a:latin typeface="Calibri"/>
-              </a:rPr>
-              <a:t> número?</a:t>
-            </a:r>
-          </a:p>
-        </p:txBody>
-      </p:sp>
-      <p:sp>
-        <p:nvSpPr>
-          <p:cNvPr id="17" name="Rounded Rectangle 16"/>
-          <p:cNvSpPr/>
-          <p:nvPr/>
-        </p:nvSpPr>
-        <p:spPr>
-          <a:xfrm>
-            <a:off x="457200" y="3291840"/>
-            <a:ext cx="11277295" cy="566928"/>
-          </a:xfrm>
-          <a:prstGeom prst="roundRect">
-            <a:avLst>
-              <a:gd name="adj" fmla="val 12000"/>
-            </a:avLst>
-          </a:prstGeom>
-          <a:solidFill>
-            <a:srgbClr val="F2F2F2"/>
-          </a:solidFill>
-          <a:ln>
-            <a:noFill/>
-          </a:ln>
-        </p:spPr>
-        <p:style>
-          <a:lnRef idx="1">
-            <a:schemeClr val="accent1"/>
-          </a:lnRef>
-          <a:fillRef idx="3">
-            <a:schemeClr val="accent1"/>
-          </a:fillRef>
-          <a:effectRef idx="2">
-            <a:schemeClr val="accent1"/>
-          </a:effectRef>
-          <a:fontRef idx="minor">
-            <a:schemeClr val="lt1"/>
-          </a:fontRef>
-        </p:style>
-        <p:txBody>
-          <a:bodyPr rtlCol="0" anchor="ctr"/>
-          <a:lstStyle/>
-          <a:p>
-            <a:pPr algn="ctr"/>
-          </a:p>
-        </p:txBody>
-      </p:sp>
-      <p:sp>
-        <p:nvSpPr>
-          <p:cNvPr id="18" name="Rectangle 17"/>
-          <p:cNvSpPr/>
-          <p:nvPr/>
-        </p:nvSpPr>
-        <p:spPr>
-          <a:xfrm>
-            <a:off x="640080" y="3438144"/>
-            <a:ext cx="274320" cy="274320"/>
-          </a:xfrm>
-          <a:prstGeom prst="rect">
-            <a:avLst/>
-          </a:prstGeom>
-          <a:solidFill>
-            <a:srgbClr val="FFFFFF"/>
-          </a:solidFill>
-          <a:ln>
-            <a:solidFill>
-              <a:srgbClr val="333333"/>
-            </a:solidFill>
-          </a:ln>
-        </p:spPr>
-        <p:style>
-          <a:lnRef idx="1">
-            <a:schemeClr val="accent1"/>
-          </a:lnRef>
-          <a:fillRef idx="3">
-            <a:schemeClr val="accent1"/>
-          </a:fillRef>
-          <a:effectRef idx="2">
-            <a:schemeClr val="accent1"/>
-          </a:effectRef>
-          <a:fontRef idx="minor">
-            <a:schemeClr val="lt1"/>
-          </a:fontRef>
-        </p:style>
-        <p:txBody>
-          <a:bodyPr rtlCol="0" anchor="ctr"/>
-          <a:lstStyle/>
-          <a:p>
-            <a:pPr algn="ctr"/>
-          </a:p>
-        </p:txBody>
-      </p:sp>
-      <p:sp>
-        <p:nvSpPr>
-          <p:cNvPr id="19" name="Rectangle 18"/>
-          <p:cNvSpPr/>
-          <p:nvPr/>
-        </p:nvSpPr>
-        <p:spPr>
-          <a:xfrm>
-            <a:off x="640080" y="3438144"/>
-            <a:ext cx="73152" cy="274320"/>
-          </a:xfrm>
-          <a:prstGeom prst="rect">
-            <a:avLst/>
-          </a:prstGeom>
-          <a:solidFill>
-            <a:srgbClr val="269CCB"/>
-          </a:solidFill>
-          <a:ln>
-            <a:noFill/>
-          </a:ln>
-        </p:spPr>
-        <p:style>
-          <a:lnRef idx="1">
-            <a:schemeClr val="accent1"/>
-          </a:lnRef>
-          <a:fillRef idx="3">
-            <a:schemeClr val="accent1"/>
-          </a:fillRef>
-          <a:effectRef idx="2">
-            <a:schemeClr val="accent1"/>
-          </a:effectRef>
-          <a:fontRef idx="minor">
-            <a:schemeClr val="lt1"/>
-          </a:fontRef>
-        </p:style>
-        <p:txBody>
-          <a:bodyPr rtlCol="0" anchor="ctr"/>
-          <a:lstStyle/>
-          <a:p>
-            <a:pPr algn="ctr"/>
-          </a:p>
-        </p:txBody>
-      </p:sp>
-      <p:sp>
-        <p:nvSpPr>
-          <p:cNvPr id="20" name="TextBox 19"/>
-          <p:cNvSpPr txBox="1"/>
-          <p:nvPr/>
-        </p:nvSpPr>
-        <p:spPr>
-          <a:xfrm>
-            <a:off x="1097280" y="3383280"/>
-            <a:ext cx="10362895" cy="402336"/>
-          </a:xfrm>
-          <a:prstGeom prst="rect">
-            <a:avLst/>
-          </a:prstGeom>
-          <a:noFill/>
-        </p:spPr>
-        <p:txBody>
-          <a:bodyPr wrap="square" anchor="ctr"/>
-          <a:lstStyle/>
-          <a:p>
-            <a:r>
-              <a:rPr sz="1500" b="0" i="0">
-                <a:solidFill>
-                  <a:srgbClr val="333333"/>
-                </a:solidFill>
-                <a:latin typeface="Calibri"/>
-              </a:rPr>
-              <a:t>□ ¿Están los </a:t>
-            </a:r>
-            <a:r>
-              <a:rPr sz="1500" b="1" i="0">
-                <a:solidFill>
-                  <a:srgbClr val="333333"/>
-                </a:solidFill>
-                <a:latin typeface="Calibri"/>
-              </a:rPr>
-              <a:t>tres</a:t>
-            </a:r>
-            <a:r>
-              <a:rPr sz="1500" b="0" i="0">
-                <a:solidFill>
-                  <a:srgbClr val="333333"/>
-                </a:solidFill>
-                <a:latin typeface="Calibri"/>
-              </a:rPr>
-              <a:t> «EXPLAIN», incluido el de «LIMIT 50», y la tabla de comentarios con sus </a:t>
-            </a:r>
-            <a:r>
-              <a:rPr sz="1500" b="1" i="0">
-                <a:solidFill>
-                  <a:srgbClr val="333333"/>
-                </a:solidFill>
-                <a:latin typeface="Calibri"/>
-              </a:rPr>
-              <a:t>tres filas</a:t>
-            </a:r>
-            <a:r>
-              <a:rPr sz="1500" b="0" i="0">
-                <a:solidFill>
-                  <a:srgbClr val="333333"/>
-                </a:solidFill>
-                <a:latin typeface="Calibri"/>
-              </a:rPr>
-              <a:t> (ANTES, DESPUES, DESPUES+LIM50) y sus tres columnas?</a:t>
-            </a:r>
-          </a:p>
-        </p:txBody>
-      </p:sp>
-      <p:sp>
-        <p:nvSpPr>
-          <p:cNvPr id="21" name="Rounded Rectangle 20"/>
-          <p:cNvSpPr/>
-          <p:nvPr/>
-        </p:nvSpPr>
-        <p:spPr>
-          <a:xfrm>
-            <a:off x="457200" y="3968496"/>
-            <a:ext cx="11277295" cy="566928"/>
-          </a:xfrm>
-          <a:prstGeom prst="roundRect">
-            <a:avLst>
-              <a:gd name="adj" fmla="val 12000"/>
-            </a:avLst>
-          </a:prstGeom>
-          <a:solidFill>
-            <a:srgbClr val="F2F2F2"/>
-          </a:solidFill>
-          <a:ln>
-            <a:noFill/>
-          </a:ln>
-        </p:spPr>
-        <p:style>
-          <a:lnRef idx="1">
-            <a:schemeClr val="accent1"/>
-          </a:lnRef>
-          <a:fillRef idx="3">
-            <a:schemeClr val="accent1"/>
-          </a:fillRef>
-          <a:effectRef idx="2">
-            <a:schemeClr val="accent1"/>
-          </a:effectRef>
-          <a:fontRef idx="minor">
-            <a:schemeClr val="lt1"/>
-          </a:fontRef>
-        </p:style>
-        <p:txBody>
-          <a:bodyPr rtlCol="0" anchor="ctr"/>
-          <a:lstStyle/>
-          <a:p>
-            <a:pPr algn="ctr"/>
-          </a:p>
-        </p:txBody>
-      </p:sp>
-      <p:sp>
-        <p:nvSpPr>
-          <p:cNvPr id="22" name="Rectangle 21"/>
-          <p:cNvSpPr/>
-          <p:nvPr/>
-        </p:nvSpPr>
-        <p:spPr>
-          <a:xfrm>
-            <a:off x="640080" y="4114800"/>
-            <a:ext cx="274320" cy="274320"/>
-          </a:xfrm>
-          <a:prstGeom prst="rect">
-            <a:avLst/>
-          </a:prstGeom>
-          <a:solidFill>
-            <a:srgbClr val="FFFFFF"/>
-          </a:solidFill>
-          <a:ln>
-            <a:solidFill>
-              <a:srgbClr val="333333"/>
-            </a:solidFill>
-          </a:ln>
-        </p:spPr>
-        <p:style>
-          <a:lnRef idx="1">
-            <a:schemeClr val="accent1"/>
-          </a:lnRef>
-          <a:fillRef idx="3">
-            <a:schemeClr val="accent1"/>
-          </a:fillRef>
-          <a:effectRef idx="2">
-            <a:schemeClr val="accent1"/>
-          </a:effectRef>
-          <a:fontRef idx="minor">
-            <a:schemeClr val="lt1"/>
-          </a:fontRef>
-        </p:style>
-        <p:txBody>
-          <a:bodyPr rtlCol="0" anchor="ctr"/>
-          <a:lstStyle/>
-          <a:p>
-            <a:pPr algn="ctr"/>
-          </a:p>
-        </p:txBody>
-      </p:sp>
-      <p:sp>
-        <p:nvSpPr>
-          <p:cNvPr id="23" name="Rectangle 22"/>
-          <p:cNvSpPr/>
-          <p:nvPr/>
-        </p:nvSpPr>
-        <p:spPr>
-          <a:xfrm>
-            <a:off x="640080" y="4114800"/>
-            <a:ext cx="73152" cy="274320"/>
-          </a:xfrm>
-          <a:prstGeom prst="rect">
-            <a:avLst/>
-          </a:prstGeom>
-          <a:solidFill>
-            <a:srgbClr val="269CCB"/>
-          </a:solidFill>
-          <a:ln>
-            <a:noFill/>
-          </a:ln>
-        </p:spPr>
-        <p:style>
-          <a:lnRef idx="1">
-            <a:schemeClr val="accent1"/>
-          </a:lnRef>
-          <a:fillRef idx="3">
-            <a:schemeClr val="accent1"/>
-          </a:fillRef>
-          <a:effectRef idx="2">
-            <a:schemeClr val="accent1"/>
-          </a:effectRef>
-          <a:fontRef idx="minor">
-            <a:schemeClr val="lt1"/>
-          </a:fontRef>
-        </p:style>
-        <p:txBody>
-          <a:bodyPr rtlCol="0" anchor="ctr"/>
-          <a:lstStyle/>
-          <a:p>
-            <a:pPr algn="ctr"/>
-          </a:p>
-        </p:txBody>
-      </p:sp>
-      <p:sp>
-        <p:nvSpPr>
-          <p:cNvPr id="24" name="TextBox 23"/>
-          <p:cNvSpPr txBox="1"/>
-          <p:nvPr/>
-        </p:nvSpPr>
-        <p:spPr>
-          <a:xfrm>
-            <a:off x="1097280" y="4059936"/>
-            <a:ext cx="10362895" cy="402336"/>
-          </a:xfrm>
-          <a:prstGeom prst="rect">
-            <a:avLst/>
-          </a:prstGeom>
-          <a:noFill/>
-        </p:spPr>
-        <p:txBody>
-          <a:bodyPr wrap="square" anchor="ctr"/>
-          <a:lstStyle/>
-          <a:p>
-            <a:r>
-              <a:rPr sz="1500" b="0" i="0">
-                <a:solidFill>
-                  <a:srgbClr val="333333"/>
-                </a:solidFill>
-                <a:latin typeface="Calibri"/>
-              </a:rPr>
-              <a:t>□ ¿Los números de la tabla los </a:t>
-            </a:r>
-            <a:r>
-              <a:rPr sz="1500" b="1" i="0">
-                <a:solidFill>
-                  <a:srgbClr val="333333"/>
-                </a:solidFill>
-                <a:latin typeface="Calibri"/>
-              </a:rPr>
-              <a:t>leíste del plan</a:t>
-            </a:r>
-            <a:r>
-              <a:rPr sz="1500" b="0" i="0">
-                <a:solidFill>
-                  <a:srgbClr val="333333"/>
-                </a:solidFill>
-                <a:latin typeface="Calibri"/>
-              </a:rPr>
-              <a:t>, o los estimaste? Se compara con «rows=» frente a «actual rows=».</a:t>
-            </a:r>
-          </a:p>
-        </p:txBody>
-      </p:sp>
-      <p:sp>
-        <p:nvSpPr>
-          <p:cNvPr id="25" name="Rounded Rectangle 24"/>
-          <p:cNvSpPr/>
-          <p:nvPr/>
-        </p:nvSpPr>
-        <p:spPr>
-          <a:xfrm>
-            <a:off x="457200" y="4645152"/>
-            <a:ext cx="11277295" cy="566928"/>
-          </a:xfrm>
-          <a:prstGeom prst="roundRect">
-            <a:avLst>
-              <a:gd name="adj" fmla="val 12000"/>
-            </a:avLst>
-          </a:prstGeom>
-          <a:solidFill>
-            <a:srgbClr val="F2F2F2"/>
-          </a:solidFill>
-          <a:ln>
-            <a:noFill/>
-          </a:ln>
-        </p:spPr>
-        <p:style>
-          <a:lnRef idx="1">
-            <a:schemeClr val="accent1"/>
-          </a:lnRef>
-          <a:fillRef idx="3">
-            <a:schemeClr val="accent1"/>
-          </a:fillRef>
-          <a:effectRef idx="2">
-            <a:schemeClr val="accent1"/>
-          </a:effectRef>
-          <a:fontRef idx="minor">
-            <a:schemeClr val="lt1"/>
-          </a:fontRef>
-        </p:style>
-        <p:txBody>
-          <a:bodyPr rtlCol="0" anchor="ctr"/>
-          <a:lstStyle/>
-          <a:p>
-            <a:pPr algn="ctr"/>
-          </a:p>
-        </p:txBody>
-      </p:sp>
-      <p:sp>
-        <p:nvSpPr>
-          <p:cNvPr id="26" name="Rectangle 25"/>
-          <p:cNvSpPr/>
-          <p:nvPr/>
-        </p:nvSpPr>
-        <p:spPr>
-          <a:xfrm>
-            <a:off x="640080" y="4791456"/>
-            <a:ext cx="274320" cy="274320"/>
-          </a:xfrm>
-          <a:prstGeom prst="rect">
-            <a:avLst/>
-          </a:prstGeom>
-          <a:solidFill>
-            <a:srgbClr val="FFFFFF"/>
-          </a:solidFill>
-          <a:ln>
-            <a:solidFill>
-              <a:srgbClr val="333333"/>
-            </a:solidFill>
-          </a:ln>
-        </p:spPr>
-        <p:style>
-          <a:lnRef idx="1">
-            <a:schemeClr val="accent1"/>
-          </a:lnRef>
-          <a:fillRef idx="3">
-            <a:schemeClr val="accent1"/>
-          </a:fillRef>
-          <a:effectRef idx="2">
-            <a:schemeClr val="accent1"/>
-          </a:effectRef>
-          <a:fontRef idx="minor">
-            <a:schemeClr val="lt1"/>
-          </a:fontRef>
-        </p:style>
-        <p:txBody>
-          <a:bodyPr rtlCol="0" anchor="ctr"/>
-          <a:lstStyle/>
-          <a:p>
-            <a:pPr algn="ctr"/>
-          </a:p>
-        </p:txBody>
-      </p:sp>
-      <p:sp>
-        <p:nvSpPr>
-          <p:cNvPr id="27" name="Rectangle 26"/>
-          <p:cNvSpPr/>
-          <p:nvPr/>
-        </p:nvSpPr>
-        <p:spPr>
-          <a:xfrm>
-            <a:off x="640080" y="4791456"/>
-            <a:ext cx="73152" cy="274320"/>
-          </a:xfrm>
-          <a:prstGeom prst="rect">
-            <a:avLst/>
-          </a:prstGeom>
-          <a:solidFill>
-            <a:srgbClr val="269CCB"/>
-          </a:solidFill>
-          <a:ln>
-            <a:noFill/>
-          </a:ln>
-        </p:spPr>
-        <p:style>
-          <a:lnRef idx="1">
-            <a:schemeClr val="accent1"/>
-          </a:lnRef>
-          <a:fillRef idx="3">
-            <a:schemeClr val="accent1"/>
-          </a:fillRef>
-          <a:effectRef idx="2">
-            <a:schemeClr val="accent1"/>
-          </a:effectRef>
-          <a:fontRef idx="minor">
-            <a:schemeClr val="lt1"/>
-          </a:fontRef>
-        </p:style>
-        <p:txBody>
-          <a:bodyPr rtlCol="0" anchor="ctr"/>
-          <a:lstStyle/>
-          <a:p>
-            <a:pPr algn="ctr"/>
-          </a:p>
-        </p:txBody>
-      </p:sp>
-      <p:sp>
-        <p:nvSpPr>
-          <p:cNvPr id="28" name="TextBox 27"/>
-          <p:cNvSpPr txBox="1"/>
-          <p:nvPr/>
-        </p:nvSpPr>
-        <p:spPr>
-          <a:xfrm>
-            <a:off x="1097280" y="4736592"/>
-            <a:ext cx="10362895" cy="402336"/>
-          </a:xfrm>
-          <a:prstGeom prst="rect">
-            <a:avLst/>
-          </a:prstGeom>
-          <a:noFill/>
-        </p:spPr>
-        <p:txBody>
-          <a:bodyPr wrap="square" anchor="ctr"/>
-          <a:lstStyle/>
-          <a:p>
-            <a:r>
-              <a:rPr sz="1500" b="0" i="0">
-                <a:solidFill>
-                  <a:srgbClr val="333333"/>
-                </a:solidFill>
-                <a:latin typeface="Calibri"/>
-              </a:rPr>
-              <a:t>□ ¿Contaste «COUNT(c.id_cita)» y no «COUNT(*)»? Mira los duenos </a:t>
-            </a:r>
-            <a:r>
-              <a:rPr sz="1500" b="1" i="0">
-                <a:solidFill>
-                  <a:srgbClr val="333333"/>
-                </a:solidFill>
-                <a:latin typeface="Calibri"/>
-              </a:rPr>
-              <a:t>2001 a 2006</a:t>
-            </a:r>
-            <a:r>
-              <a:rPr sz="1500" b="0" i="0">
-                <a:solidFill>
-                  <a:srgbClr val="333333"/>
-                </a:solidFill>
-                <a:latin typeface="Calibri"/>
-              </a:rPr>
-              <a:t>: tienen que decir </a:t>
-            </a:r>
-            <a:r>
-              <a:rPr sz="1500" b="1" i="0">
-                <a:solidFill>
-                  <a:srgbClr val="333333"/>
-                </a:solidFill>
-                <a:latin typeface="Calibri"/>
-              </a:rPr>
-              <a:t>0</a:t>
-            </a:r>
-            <a:r>
-              <a:rPr sz="1500" b="0" i="0">
-                <a:solidFill>
-                  <a:srgbClr val="333333"/>
-                </a:solidFill>
-                <a:latin typeface="Calibri"/>
-              </a:rPr>
-              <a:t>.</a:t>
-            </a:r>
-          </a:p>
-        </p:txBody>
-      </p:sp>
-      <p:sp>
-        <p:nvSpPr>
-          <p:cNvPr id="29" name="Rounded Rectangle 28"/>
-          <p:cNvSpPr/>
-          <p:nvPr/>
-        </p:nvSpPr>
-        <p:spPr>
-          <a:xfrm>
-            <a:off x="457200" y="5321808"/>
-            <a:ext cx="11277295" cy="566928"/>
-          </a:xfrm>
-          <a:prstGeom prst="roundRect">
-            <a:avLst>
-              <a:gd name="adj" fmla="val 12000"/>
-            </a:avLst>
-          </a:prstGeom>
-          <a:solidFill>
-            <a:srgbClr val="F2F2F2"/>
-          </a:solidFill>
-          <a:ln>
-            <a:noFill/>
-          </a:ln>
-        </p:spPr>
-        <p:style>
-          <a:lnRef idx="1">
-            <a:schemeClr val="accent1"/>
-          </a:lnRef>
-          <a:fillRef idx="3">
-            <a:schemeClr val="accent1"/>
-          </a:fillRef>
-          <a:effectRef idx="2">
-            <a:schemeClr val="accent1"/>
-          </a:effectRef>
-          <a:fontRef idx="minor">
-            <a:schemeClr val="lt1"/>
-          </a:fontRef>
-        </p:style>
-        <p:txBody>
-          <a:bodyPr rtlCol="0" anchor="ctr"/>
-          <a:lstStyle/>
-          <a:p>
-            <a:pPr algn="ctr"/>
-          </a:p>
-        </p:txBody>
-      </p:sp>
-      <p:sp>
-        <p:nvSpPr>
-          <p:cNvPr id="30" name="Rectangle 29"/>
-          <p:cNvSpPr/>
-          <p:nvPr/>
-        </p:nvSpPr>
-        <p:spPr>
-          <a:xfrm>
-            <a:off x="640080" y="5468112"/>
-            <a:ext cx="274320" cy="274320"/>
-          </a:xfrm>
-          <a:prstGeom prst="rect">
-            <a:avLst/>
-          </a:prstGeom>
-          <a:solidFill>
-            <a:srgbClr val="FFFFFF"/>
-          </a:solidFill>
-          <a:ln>
-            <a:solidFill>
-              <a:srgbClr val="333333"/>
-            </a:solidFill>
-          </a:ln>
-        </p:spPr>
-        <p:style>
-          <a:lnRef idx="1">
-            <a:schemeClr val="accent1"/>
-          </a:lnRef>
-          <a:fillRef idx="3">
-            <a:schemeClr val="accent1"/>
-          </a:fillRef>
-          <a:effectRef idx="2">
-            <a:schemeClr val="accent1"/>
-          </a:effectRef>
-          <a:fontRef idx="minor">
-            <a:schemeClr val="lt1"/>
-          </a:fontRef>
-        </p:style>
-        <p:txBody>
-          <a:bodyPr rtlCol="0" anchor="ctr"/>
-          <a:lstStyle/>
-          <a:p>
-            <a:pPr algn="ctr"/>
-          </a:p>
-        </p:txBody>
-      </p:sp>
-      <p:sp>
-        <p:nvSpPr>
-          <p:cNvPr id="31" name="Rectangle 30"/>
-          <p:cNvSpPr/>
-          <p:nvPr/>
-        </p:nvSpPr>
-        <p:spPr>
-          <a:xfrm>
-            <a:off x="640080" y="5468112"/>
-            <a:ext cx="73152" cy="274320"/>
-          </a:xfrm>
-          <a:prstGeom prst="rect">
-            <a:avLst/>
-          </a:prstGeom>
-          <a:solidFill>
-            <a:srgbClr val="269CCB"/>
-          </a:solidFill>
-          <a:ln>
-            <a:noFill/>
-          </a:ln>
-        </p:spPr>
-        <p:style>
-          <a:lnRef idx="1">
-            <a:schemeClr val="accent1"/>
-          </a:lnRef>
-          <a:fillRef idx="3">
-            <a:schemeClr val="accent1"/>
-          </a:fillRef>
-          <a:effectRef idx="2">
-            <a:schemeClr val="accent1"/>
-          </a:effectRef>
-          <a:fontRef idx="minor">
-            <a:schemeClr val="lt1"/>
-          </a:fontRef>
-        </p:style>
-        <p:txBody>
-          <a:bodyPr rtlCol="0" anchor="ctr"/>
-          <a:lstStyle/>
-          <a:p>
-            <a:pPr algn="ctr"/>
-          </a:p>
-        </p:txBody>
-      </p:sp>
-      <p:sp>
-        <p:nvSpPr>
-          <p:cNvPr id="32" name="TextBox 31"/>
-          <p:cNvSpPr txBox="1"/>
-          <p:nvPr/>
-        </p:nvSpPr>
-        <p:spPr>
-          <a:xfrm>
-            <a:off x="1097280" y="5413248"/>
-            <a:ext cx="10362895" cy="402336"/>
-          </a:xfrm>
-          <a:prstGeom prst="rect">
-            <a:avLst/>
-          </a:prstGeom>
-          <a:noFill/>
-        </p:spPr>
-        <p:txBody>
-          <a:bodyPr wrap="square" anchor="ctr"/>
-          <a:lstStyle/>
-          <a:p>
-            <a:r>
-              <a:rPr sz="1500" b="0" i="0">
-                <a:solidFill>
-                  <a:srgbClr val="333333"/>
-                </a:solidFill>
-                <a:latin typeface="Calibri"/>
-              </a:rPr>
-              <a:t>□ ¿El «EXCEPT» va en los </a:t>
-            </a:r>
-            <a:r>
-              <a:rPr sz="1500" b="1" i="0">
-                <a:solidFill>
-                  <a:srgbClr val="333333"/>
-                </a:solidFill>
-                <a:latin typeface="Calibri"/>
-              </a:rPr>
-              <a:t>dos</a:t>
-            </a:r>
-            <a:r>
-              <a:rPr sz="1500" b="0" i="0">
-                <a:solidFill>
-                  <a:srgbClr val="333333"/>
-                </a:solidFill>
-                <a:latin typeface="Calibri"/>
-              </a:rPr>
-              <a:t> sentidos y </a:t>
-            </a:r>
-            <a:r>
-              <a:rPr sz="1500" b="1" i="0">
-                <a:solidFill>
-                  <a:srgbClr val="333333"/>
-                </a:solidFill>
-                <a:latin typeface="Calibri"/>
-              </a:rPr>
-              <a:t>sin</a:t>
-            </a:r>
-            <a:r>
-              <a:rPr sz="1500" b="0" i="0">
-                <a:solidFill>
-                  <a:srgbClr val="333333"/>
-                </a:solidFill>
-                <a:latin typeface="Calibri"/>
-              </a:rPr>
-              <a:t> «LIMIT»?</a:t>
-            </a:r>
-          </a:p>
-        </p:txBody>
-      </p:sp>
-      <p:sp>
-        <p:nvSpPr>
-          <p:cNvPr id="33" name="Rounded Rectangle 32"/>
-          <p:cNvSpPr/>
-          <p:nvPr/>
-        </p:nvSpPr>
-        <p:spPr>
-          <a:xfrm>
-            <a:off x="457200" y="5998464"/>
-            <a:ext cx="11277295" cy="566928"/>
-          </a:xfrm>
-          <a:prstGeom prst="roundRect">
-            <a:avLst>
-              <a:gd name="adj" fmla="val 12000"/>
-            </a:avLst>
-          </a:prstGeom>
-          <a:solidFill>
-            <a:srgbClr val="F2F2F2"/>
-          </a:solidFill>
-          <a:ln>
-            <a:noFill/>
-          </a:ln>
-        </p:spPr>
-        <p:style>
-          <a:lnRef idx="1">
-            <a:schemeClr val="accent1"/>
-          </a:lnRef>
-          <a:fillRef idx="3">
-            <a:schemeClr val="accent1"/>
-          </a:fillRef>
-          <a:effectRef idx="2">
-            <a:schemeClr val="accent1"/>
-          </a:effectRef>
-          <a:fontRef idx="minor">
-            <a:schemeClr val="lt1"/>
-          </a:fontRef>
-        </p:style>
-        <p:txBody>
-          <a:bodyPr rtlCol="0" anchor="ctr"/>
-          <a:lstStyle/>
-          <a:p>
-            <a:pPr algn="ctr"/>
-          </a:p>
-        </p:txBody>
-      </p:sp>
-      <p:sp>
-        <p:nvSpPr>
-          <p:cNvPr id="34" name="Rectangle 33"/>
-          <p:cNvSpPr/>
-          <p:nvPr/>
-        </p:nvSpPr>
-        <p:spPr>
-          <a:xfrm>
-            <a:off x="640080" y="6144768"/>
-            <a:ext cx="274320" cy="274320"/>
-          </a:xfrm>
-          <a:prstGeom prst="rect">
-            <a:avLst/>
-          </a:prstGeom>
-          <a:solidFill>
-            <a:srgbClr val="FFFFFF"/>
-          </a:solidFill>
-          <a:ln>
-            <a:solidFill>
-              <a:srgbClr val="333333"/>
-            </a:solidFill>
-          </a:ln>
-        </p:spPr>
-        <p:style>
-          <a:lnRef idx="1">
-            <a:schemeClr val="accent1"/>
-          </a:lnRef>
-          <a:fillRef idx="3">
-            <a:schemeClr val="accent1"/>
-          </a:fillRef>
-          <a:effectRef idx="2">
-            <a:schemeClr val="accent1"/>
-          </a:effectRef>
-          <a:fontRef idx="minor">
-            <a:schemeClr val="lt1"/>
-          </a:fontRef>
-        </p:style>
-        <p:txBody>
-          <a:bodyPr rtlCol="0" anchor="ctr"/>
-          <a:lstStyle/>
-          <a:p>
-            <a:pPr algn="ctr"/>
-          </a:p>
-        </p:txBody>
-      </p:sp>
-      <p:sp>
-        <p:nvSpPr>
-          <p:cNvPr id="35" name="Rectangle 34"/>
-          <p:cNvSpPr/>
-          <p:nvPr/>
-        </p:nvSpPr>
-        <p:spPr>
-          <a:xfrm>
-            <a:off x="640080" y="6144768"/>
-            <a:ext cx="73152" cy="274320"/>
-          </a:xfrm>
-          <a:prstGeom prst="rect">
-            <a:avLst/>
-          </a:prstGeom>
-          <a:solidFill>
-            <a:srgbClr val="269CCB"/>
-          </a:solidFill>
-          <a:ln>
-            <a:noFill/>
-          </a:ln>
-        </p:spPr>
-        <p:style>
-          <a:lnRef idx="1">
-            <a:schemeClr val="accent1"/>
-          </a:lnRef>
-          <a:fillRef idx="3">
-            <a:schemeClr val="accent1"/>
-          </a:fillRef>
-          <a:effectRef idx="2">
-            <a:schemeClr val="accent1"/>
-          </a:effectRef>
-          <a:fontRef idx="minor">
-            <a:schemeClr val="lt1"/>
-          </a:fontRef>
-        </p:style>
-        <p:txBody>
-          <a:bodyPr rtlCol="0" anchor="ctr"/>
-          <a:lstStyle/>
-          <a:p>
-            <a:pPr algn="ctr"/>
-          </a:p>
-        </p:txBody>
-      </p:sp>
-      <p:sp>
-        <p:nvSpPr>
-          <p:cNvPr id="36" name="TextBox 35"/>
-          <p:cNvSpPr txBox="1"/>
-          <p:nvPr/>
-        </p:nvSpPr>
-        <p:spPr>
-          <a:xfrm>
-            <a:off x="1097280" y="6089904"/>
-            <a:ext cx="10362895" cy="402336"/>
-          </a:xfrm>
-          <a:prstGeom prst="rect">
-            <a:avLst/>
-          </a:prstGeom>
-          <a:noFill/>
-        </p:spPr>
-        <p:txBody>
-          <a:bodyPr wrap="square" anchor="ctr"/>
-          <a:lstStyle/>
-          <a:p>
-            <a:r>
-              <a:rPr sz="1500" b="0" i="0">
-                <a:solidFill>
-                  <a:srgbClr val="333333"/>
-                </a:solidFill>
-                <a:latin typeface="Calibri"/>
-              </a:rPr>
-              <a:t>□ ¿En la de selección múltiple revisaste </a:t>
-            </a:r>
-            <a:r>
-              <a:rPr sz="1500" b="1" i="0">
-                <a:solidFill>
-                  <a:srgbClr val="333333"/>
-                </a:solidFill>
-                <a:latin typeface="Calibri"/>
-              </a:rPr>
-              <a:t>las seis</a:t>
-            </a:r>
-            <a:r>
-              <a:rPr sz="1500" b="0" i="0">
-                <a:solidFill>
-                  <a:srgbClr val="333333"/>
-                </a:solidFill>
-                <a:latin typeface="Calibri"/>
-              </a:rPr>
-              <a:t> afirmaciones, incluida la que dice que optimizar puede cambiar el número de filas?</a:t>
-            </a:r>
-          </a:p>
-        </p:txBody>
-      </p:sp>
-      <p:sp>
-        <p:nvSpPr>
-          <p:cNvPr id="37" name="TextBox 36"/>
-          <p:cNvSpPr txBox="1"/>
-          <p:nvPr/>
-        </p:nvSpPr>
-        <p:spPr>
-          <a:xfrm>
-            <a:off x="11185855" y="6473952"/>
-            <a:ext cx="640080" cy="274320"/>
-          </a:xfrm>
-          <a:prstGeom prst="rect">
-            <a:avLst/>
-          </a:prstGeom>
-          <a:noFill/>
-        </p:spPr>
-        <p:txBody>
-          <a:bodyPr wrap="square">
-            <a:spAutoFit/>
-          </a:bodyPr>
-          <a:lstStyle/>
-          <a:p>
-            <a:pPr algn="r"/>
-            <a:r>
-              <a:rPr sz="1100" b="0" i="0">
-                <a:solidFill>
-                  <a:srgbClr val="666666"/>
-                </a:solidFill>
-                <a:latin typeface="Calibri"/>
-              </a:rPr>
-              <a:t>48</a:t>
-            </a:r>
-          </a:p>
-        </p:txBody>
-      </p:sp>
-    </p:spTree>
-  </p:cSld>
-  <p:clrMapOvr>
-    <a:masterClrMapping/>
-  </p:clrMapOvr>
-</p:sld>
-</file>
-
-<file path=ppt/slides/slide49.xml><?xml version="1.0" encoding="utf-8"?>
-<p:sld xmlns:a="http://schemas.openxmlformats.org/drawingml/2006/main" xmlns:p="http://schemas.openxmlformats.org/presentationml/2006/main" xmlns:r="http://schemas.openxmlformats.org/officeDocument/2006/relationships">
-  <p:cSld>
-    <p:bg>
-      <p:bgPr>
-        <a:solidFill>
-          <a:srgbClr val="FFFFFF"/>
-        </a:solidFill>
-        <a:effectLst/>
-      </p:bgPr>
-    </p:bg>
-    <p:spTree>
-      <p:nvGrpSpPr>
-        <p:cNvPr id="1" name=""/>
-        <p:cNvGrpSpPr/>
-        <p:nvPr/>
-      </p:nvGrpSpPr>
-      <p:grpSpPr/>
-      <p:sp>
-        <p:nvSpPr>
-          <p:cNvPr id="2" name="Rectangle 1"/>
-          <p:cNvSpPr/>
-          <p:nvPr/>
-        </p:nvSpPr>
-        <p:spPr>
-          <a:xfrm>
-            <a:off x="0" y="0"/>
-            <a:ext cx="12191695" cy="960120"/>
-          </a:xfrm>
-          <a:prstGeom prst="rect">
-            <a:avLst/>
-          </a:prstGeom>
-          <a:solidFill>
-            <a:srgbClr val="095292"/>
-          </a:solidFill>
-          <a:ln>
-            <a:noFill/>
-          </a:ln>
-        </p:spPr>
-        <p:style>
-          <a:lnRef idx="1">
-            <a:schemeClr val="accent1"/>
-          </a:lnRef>
-          <a:fillRef idx="3">
-            <a:schemeClr val="accent1"/>
-          </a:fillRef>
-          <a:effectRef idx="2">
-            <a:schemeClr val="accent1"/>
-          </a:effectRef>
-          <a:fontRef idx="minor">
-            <a:schemeClr val="lt1"/>
-          </a:fontRef>
-        </p:style>
-        <p:txBody>
-          <a:bodyPr rtlCol="0" anchor="ctr"/>
-          <a:lstStyle/>
-          <a:p>
-            <a:pPr algn="ctr"/>
-          </a:p>
-        </p:txBody>
-      </p:sp>
-      <p:sp>
-        <p:nvSpPr>
-          <p:cNvPr id="3" name="Rectangle 2"/>
-          <p:cNvSpPr/>
-          <p:nvPr/>
-        </p:nvSpPr>
-        <p:spPr>
-          <a:xfrm>
-            <a:off x="0" y="960120"/>
-            <a:ext cx="12191695" cy="41148"/>
-          </a:xfrm>
-          <a:prstGeom prst="rect">
-            <a:avLst/>
-          </a:prstGeom>
-          <a:solidFill>
-            <a:srgbClr val="FFD000"/>
-          </a:solidFill>
-          <a:ln>
-            <a:noFill/>
-          </a:ln>
-        </p:spPr>
-        <p:style>
-          <a:lnRef idx="1">
-            <a:schemeClr val="accent1"/>
-          </a:lnRef>
-          <a:fillRef idx="3">
-            <a:schemeClr val="accent1"/>
-          </a:fillRef>
-          <a:effectRef idx="2">
-            <a:schemeClr val="accent1"/>
-          </a:effectRef>
-          <a:fontRef idx="minor">
-            <a:schemeClr val="lt1"/>
-          </a:fontRef>
-        </p:style>
-        <p:txBody>
-          <a:bodyPr rtlCol="0" anchor="ctr"/>
-          <a:lstStyle/>
-          <a:p>
-            <a:pPr algn="ctr"/>
-          </a:p>
-        </p:txBody>
-      </p:sp>
-      <p:sp>
-        <p:nvSpPr>
-          <p:cNvPr id="4" name="TextBox 3"/>
-          <p:cNvSpPr txBox="1"/>
-          <p:nvPr/>
-        </p:nvSpPr>
-        <p:spPr>
-          <a:xfrm>
-            <a:off x="457200" y="164592"/>
-            <a:ext cx="11277295" cy="502920"/>
-          </a:xfrm>
-          <a:prstGeom prst="rect">
-            <a:avLst/>
-          </a:prstGeom>
-          <a:noFill/>
-        </p:spPr>
-        <p:txBody>
-          <a:bodyPr wrap="square">
-            <a:spAutoFit/>
-          </a:bodyPr>
-          <a:lstStyle/>
-          <a:p>
-            <a:r>
-              <a:rPr sz="2600" b="1" i="0">
-                <a:solidFill>
-                  <a:srgbClr val="FFFFFF"/>
-                </a:solidFill>
-                <a:latin typeface="Calibri"/>
-              </a:rPr>
-              <a:t>Criterios de exito / entregable</a:t>
-            </a:r>
-          </a:p>
-        </p:txBody>
-      </p:sp>
-      <p:sp>
-        <p:nvSpPr>
-          <p:cNvPr id="5" name="TextBox 4"/>
-          <p:cNvSpPr txBox="1"/>
-          <p:nvPr/>
-        </p:nvSpPr>
-        <p:spPr>
-          <a:xfrm>
-            <a:off x="457200" y="1170432"/>
-            <a:ext cx="11277295" cy="5230368"/>
-          </a:xfrm>
-          <a:prstGeom prst="rect">
-            <a:avLst/>
-          </a:prstGeom>
-          <a:noFill/>
-        </p:spPr>
-        <p:txBody>
-          <a:bodyPr wrap="square">
-            <a:spAutoFit/>
-          </a:bodyPr>
-          <a:lstStyle/>
-          <a:p>
-            <a:pPr>
-              <a:spcAft>
-                <a:spcPts val="800"/>
-              </a:spcAft>
-            </a:pPr>
-            <a:r>
-              <a:rPr sz="2000" b="0" i="0">
-                <a:solidFill>
-                  <a:srgbClr val="333333"/>
-                </a:solidFill>
-                <a:latin typeface="Calibri"/>
-              </a:rPr>
-              <a:t>–   </a:t>
-            </a:r>
-            <a:r>
-              <a:rPr sz="2000" b="1" i="0">
-                <a:solidFill>
-                  <a:srgbClr val="333333"/>
-                </a:solidFill>
-                <a:latin typeface="Calibri"/>
-              </a:rPr>
-              <a:t>Entregable:</a:t>
-            </a:r>
-            <a:r>
-              <a:rPr sz="2000" b="0" i="0">
-                <a:solidFill>
-                  <a:srgbClr val="333333"/>
-                </a:solidFill>
-                <a:latin typeface="Calibri"/>
-              </a:rPr>
-              <a:t> 2 consultas (antes/despues) + justificacion (media pag.)</a:t>
-            </a:r>
-          </a:p>
-          <a:p>
-            <a:pPr>
-              <a:spcAft>
-                <a:spcPts val="800"/>
-              </a:spcAft>
-            </a:pPr>
-            <a:r>
-              <a:rPr sz="2000" b="0" i="0">
-                <a:solidFill>
-                  <a:srgbClr val="333333"/>
-                </a:solidFill>
-                <a:latin typeface="Calibri"/>
-              </a:rPr>
-              <a:t>–   Evidencia: el SQL y su salida quedan guardados en cada pregunta de la plataforma del curso.</a:t>
-            </a:r>
-          </a:p>
-          <a:p>
-            <a:pPr>
-              <a:spcAft>
-                <a:spcPts val="800"/>
-              </a:spcAft>
-            </a:pPr>
-            <a:r>
-              <a:rPr sz="2000" b="0" i="0">
-                <a:solidFill>
-                  <a:srgbClr val="333333"/>
-                </a:solidFill>
-                <a:latin typeface="Calibri"/>
-              </a:rPr>
-              <a:t>–   Conserva copia en tu carpeta del PI (los .sql que pide el entregable).</a:t>
-            </a:r>
-          </a:p>
-          <a:p>
-            <a:pPr>
-              <a:spcAft>
-                <a:spcPts val="800"/>
-              </a:spcAft>
-            </a:pPr>
-            <a:r>
-              <a:rPr sz="2000" b="0" i="0">
-                <a:solidFill>
-                  <a:srgbClr val="333333"/>
-                </a:solidFill>
-                <a:latin typeface="Calibri"/>
-              </a:rPr>
-              <a:t>–   Actualizar checklist PI (que criterio de rubrica avanzo).</a:t>
-            </a:r>
-          </a:p>
-          <a:p>
-            <a:pPr>
-              <a:spcAft>
-                <a:spcPts val="800"/>
-              </a:spcAft>
-            </a:pPr>
-            <a:r>
-              <a:rPr sz="2000" b="0" i="0">
-                <a:solidFill>
-                  <a:srgbClr val="333333"/>
-                </a:solidFill>
-                <a:latin typeface="Calibri"/>
-              </a:rPr>
-              <a:t>–   </a:t>
-            </a:r>
-            <a:r>
-              <a:rPr sz="2000" b="1" i="0">
-                <a:solidFill>
-                  <a:srgbClr val="333333"/>
-                </a:solidFill>
-                <a:latin typeface="Calibri"/>
-              </a:rPr>
-              <a:t>Entrega en la plataforma del curso</a:t>
-            </a:r>
-            <a:r>
-              <a:rPr sz="2000" b="0" i="0">
-                <a:solidFill>
-                  <a:srgbClr val="333333"/>
-                </a:solidFill>
-                <a:latin typeface="Calibri"/>
-              </a:rPr>
-              <a:t> — en la fecha que indique el docente.</a:t>
-            </a:r>
-          </a:p>
-        </p:txBody>
-      </p:sp>
-      <p:sp>
-        <p:nvSpPr>
-          <p:cNvPr id="6" name="TextBox 5"/>
-          <p:cNvSpPr txBox="1"/>
-          <p:nvPr/>
-        </p:nvSpPr>
-        <p:spPr>
-          <a:xfrm>
-            <a:off x="11185855" y="6473952"/>
-            <a:ext cx="640080" cy="274320"/>
-          </a:xfrm>
-          <a:prstGeom prst="rect">
-            <a:avLst/>
-          </a:prstGeom>
-          <a:noFill/>
-        </p:spPr>
-        <p:txBody>
-          <a:bodyPr wrap="square">
-            <a:spAutoFit/>
-          </a:bodyPr>
-          <a:lstStyle/>
-          <a:p>
-            <a:pPr algn="r"/>
-            <a:r>
-              <a:rPr sz="1100" b="0" i="0">
-                <a:solidFill>
-                  <a:srgbClr val="666666"/>
-                </a:solidFill>
-                <a:latin typeface="Calibri"/>
-              </a:rPr>
-              <a:t>49</a:t>
+                  <a:srgbClr val="269CCB"/>
+                </a:solidFill>
+                <a:latin typeface="Calibri"/>
+              </a:rPr>
+              <a:t>Todo lo visto queda proyectado para repasar</a:t>
             </a:r>
           </a:p>
         </p:txBody>
@@ -21160,833 +17456,6 @@
                 <a:latin typeface="Calibri"/>
               </a:rPr>
               <a:t>5</a:t>
-            </a:r>
-          </a:p>
-        </p:txBody>
-      </p:sp>
-    </p:spTree>
-  </p:cSld>
-  <p:clrMapOvr>
-    <a:masterClrMapping/>
-  </p:clrMapOvr>
-</p:sld>
-</file>
-
-<file path=ppt/slides/slide50.xml><?xml version="1.0" encoding="utf-8"?>
-<p:sld xmlns:a="http://schemas.openxmlformats.org/drawingml/2006/main" xmlns:p="http://schemas.openxmlformats.org/presentationml/2006/main" xmlns:r="http://schemas.openxmlformats.org/officeDocument/2006/relationships">
-  <p:cSld>
-    <p:bg>
-      <p:bgPr>
-        <a:solidFill>
-          <a:srgbClr val="FFFFFF"/>
-        </a:solidFill>
-        <a:effectLst/>
-      </p:bgPr>
-    </p:bg>
-    <p:spTree>
-      <p:nvGrpSpPr>
-        <p:cNvPr id="1" name=""/>
-        <p:cNvGrpSpPr/>
-        <p:nvPr/>
-      </p:nvGrpSpPr>
-      <p:grpSpPr/>
-      <p:sp>
-        <p:nvSpPr>
-          <p:cNvPr id="2" name="Rectangle 1"/>
-          <p:cNvSpPr/>
-          <p:nvPr/>
-        </p:nvSpPr>
-        <p:spPr>
-          <a:xfrm>
-            <a:off x="0" y="0"/>
-            <a:ext cx="12191695" cy="960120"/>
-          </a:xfrm>
-          <a:prstGeom prst="rect">
-            <a:avLst/>
-          </a:prstGeom>
-          <a:solidFill>
-            <a:srgbClr val="095292"/>
-          </a:solidFill>
-          <a:ln>
-            <a:noFill/>
-          </a:ln>
-        </p:spPr>
-        <p:style>
-          <a:lnRef idx="1">
-            <a:schemeClr val="accent1"/>
-          </a:lnRef>
-          <a:fillRef idx="3">
-            <a:schemeClr val="accent1"/>
-          </a:fillRef>
-          <a:effectRef idx="2">
-            <a:schemeClr val="accent1"/>
-          </a:effectRef>
-          <a:fontRef idx="minor">
-            <a:schemeClr val="lt1"/>
-          </a:fontRef>
-        </p:style>
-        <p:txBody>
-          <a:bodyPr rtlCol="0" anchor="ctr"/>
-          <a:lstStyle/>
-          <a:p>
-            <a:pPr algn="ctr"/>
-          </a:p>
-        </p:txBody>
-      </p:sp>
-      <p:sp>
-        <p:nvSpPr>
-          <p:cNvPr id="3" name="Rectangle 2"/>
-          <p:cNvSpPr/>
-          <p:nvPr/>
-        </p:nvSpPr>
-        <p:spPr>
-          <a:xfrm>
-            <a:off x="0" y="960120"/>
-            <a:ext cx="12191695" cy="41148"/>
-          </a:xfrm>
-          <a:prstGeom prst="rect">
-            <a:avLst/>
-          </a:prstGeom>
-          <a:solidFill>
-            <a:srgbClr val="FFD000"/>
-          </a:solidFill>
-          <a:ln>
-            <a:noFill/>
-          </a:ln>
-        </p:spPr>
-        <p:style>
-          <a:lnRef idx="1">
-            <a:schemeClr val="accent1"/>
-          </a:lnRef>
-          <a:fillRef idx="3">
-            <a:schemeClr val="accent1"/>
-          </a:fillRef>
-          <a:effectRef idx="2">
-            <a:schemeClr val="accent1"/>
-          </a:effectRef>
-          <a:fontRef idx="minor">
-            <a:schemeClr val="lt1"/>
-          </a:fontRef>
-        </p:style>
-        <p:txBody>
-          <a:bodyPr rtlCol="0" anchor="ctr"/>
-          <a:lstStyle/>
-          <a:p>
-            <a:pPr algn="ctr"/>
-          </a:p>
-        </p:txBody>
-      </p:sp>
-      <p:sp>
-        <p:nvSpPr>
-          <p:cNvPr id="4" name="TextBox 3"/>
-          <p:cNvSpPr txBox="1"/>
-          <p:nvPr/>
-        </p:nvSpPr>
-        <p:spPr>
-          <a:xfrm>
-            <a:off x="457200" y="164592"/>
-            <a:ext cx="11277295" cy="502920"/>
-          </a:xfrm>
-          <a:prstGeom prst="rect">
-            <a:avLst/>
-          </a:prstGeom>
-          <a:noFill/>
-        </p:spPr>
-        <p:txBody>
-          <a:bodyPr wrap="square">
-            <a:spAutoFit/>
-          </a:bodyPr>
-          <a:lstStyle/>
-          <a:p>
-            <a:r>
-              <a:rPr sz="2600" b="1" i="0">
-                <a:solidFill>
-                  <a:srgbClr val="FFFFFF"/>
-                </a:solidFill>
-                <a:latin typeface="Calibri"/>
-              </a:rPr>
-              <a:t>Para el PI esta semana</a:t>
-            </a:r>
-          </a:p>
-        </p:txBody>
-      </p:sp>
-      <p:sp>
-        <p:nvSpPr>
-          <p:cNvPr id="5" name="Rounded Rectangle 4"/>
-          <p:cNvSpPr/>
-          <p:nvPr/>
-        </p:nvSpPr>
-        <p:spPr>
-          <a:xfrm>
-            <a:off x="457200" y="1261872"/>
-            <a:ext cx="11277295" cy="1051560"/>
-          </a:xfrm>
-          <a:prstGeom prst="roundRect">
-            <a:avLst>
-              <a:gd name="adj" fmla="val 12000"/>
-            </a:avLst>
-          </a:prstGeom>
-          <a:solidFill>
-            <a:srgbClr val="E8F4FA"/>
-          </a:solidFill>
-          <a:ln>
-            <a:noFill/>
-          </a:ln>
-        </p:spPr>
-        <p:style>
-          <a:lnRef idx="1">
-            <a:schemeClr val="accent1"/>
-          </a:lnRef>
-          <a:fillRef idx="3">
-            <a:schemeClr val="accent1"/>
-          </a:fillRef>
-          <a:effectRef idx="2">
-            <a:schemeClr val="accent1"/>
-          </a:effectRef>
-          <a:fontRef idx="minor">
-            <a:schemeClr val="lt1"/>
-          </a:fontRef>
-        </p:style>
-        <p:txBody>
-          <a:bodyPr rtlCol="0" anchor="ctr"/>
-          <a:lstStyle/>
-          <a:p>
-            <a:pPr algn="ctr"/>
-          </a:p>
-        </p:txBody>
-      </p:sp>
-      <p:sp>
-        <p:nvSpPr>
-          <p:cNvPr id="6" name="Rectangle 5"/>
-          <p:cNvSpPr/>
-          <p:nvPr/>
-        </p:nvSpPr>
-        <p:spPr>
-          <a:xfrm>
-            <a:off x="457200" y="1261872"/>
-            <a:ext cx="128016" cy="1051560"/>
-          </a:xfrm>
-          <a:prstGeom prst="rect">
-            <a:avLst/>
-          </a:prstGeom>
-          <a:solidFill>
-            <a:srgbClr val="269CCB"/>
-          </a:solidFill>
-          <a:ln>
-            <a:noFill/>
-          </a:ln>
-        </p:spPr>
-        <p:style>
-          <a:lnRef idx="1">
-            <a:schemeClr val="accent1"/>
-          </a:lnRef>
-          <a:fillRef idx="3">
-            <a:schemeClr val="accent1"/>
-          </a:fillRef>
-          <a:effectRef idx="2">
-            <a:schemeClr val="accent1"/>
-          </a:effectRef>
-          <a:fontRef idx="minor">
-            <a:schemeClr val="lt1"/>
-          </a:fontRef>
-        </p:style>
-        <p:txBody>
-          <a:bodyPr rtlCol="0" anchor="ctr"/>
-          <a:lstStyle/>
-          <a:p>
-            <a:pPr algn="ctr"/>
-          </a:p>
-        </p:txBody>
-      </p:sp>
-      <p:sp>
-        <p:nvSpPr>
-          <p:cNvPr id="7" name="TextBox 6"/>
-          <p:cNvSpPr txBox="1"/>
-          <p:nvPr/>
-        </p:nvSpPr>
-        <p:spPr>
-          <a:xfrm>
-            <a:off x="777240" y="1399031"/>
-            <a:ext cx="10774375" cy="822959"/>
-          </a:xfrm>
-          <a:prstGeom prst="rect">
-            <a:avLst/>
-          </a:prstGeom>
-          <a:noFill/>
-        </p:spPr>
-        <p:txBody>
-          <a:bodyPr wrap="square">
-            <a:spAutoFit/>
-          </a:bodyPr>
-          <a:lstStyle/>
-          <a:p>
-            <a:r>
-              <a:rPr sz="1200" b="1" i="0">
-                <a:solidFill>
-                  <a:srgbClr val="269CCB"/>
-                </a:solidFill>
-                <a:latin typeface="Calibri"/>
-              </a:rPr>
-              <a:t>Info</a:t>
-            </a:r>
-          </a:p>
-          <a:p>
-            <a:pPr>
-              <a:spcBef>
-                <a:spcPts val="400"/>
-              </a:spcBef>
-            </a:pPr>
-            <a:r>
-              <a:rPr sz="1400" b="0" i="0">
-                <a:solidFill>
-                  <a:srgbClr val="333333"/>
-                </a:solidFill>
-                <a:latin typeface="Calibri"/>
-              </a:rPr>
-              <a:t>Hito: Primera pareja de consultas antes/despues del PI</a:t>
-            </a:r>
-          </a:p>
-        </p:txBody>
-      </p:sp>
-      <p:sp>
-        <p:nvSpPr>
-          <p:cNvPr id="8" name="Rounded Rectangle 7"/>
-          <p:cNvSpPr/>
-          <p:nvPr/>
-        </p:nvSpPr>
-        <p:spPr>
-          <a:xfrm>
-            <a:off x="457200" y="2478024"/>
-            <a:ext cx="11277295" cy="1051560"/>
-          </a:xfrm>
-          <a:prstGeom prst="roundRect">
-            <a:avLst>
-              <a:gd name="adj" fmla="val 12000"/>
-            </a:avLst>
-          </a:prstGeom>
-          <a:solidFill>
-            <a:srgbClr val="FFF8E1"/>
-          </a:solidFill>
-          <a:ln>
-            <a:noFill/>
-          </a:ln>
-        </p:spPr>
-        <p:style>
-          <a:lnRef idx="1">
-            <a:schemeClr val="accent1"/>
-          </a:lnRef>
-          <a:fillRef idx="3">
-            <a:schemeClr val="accent1"/>
-          </a:fillRef>
-          <a:effectRef idx="2">
-            <a:schemeClr val="accent1"/>
-          </a:effectRef>
-          <a:fontRef idx="minor">
-            <a:schemeClr val="lt1"/>
-          </a:fontRef>
-        </p:style>
-        <p:txBody>
-          <a:bodyPr rtlCol="0" anchor="ctr"/>
-          <a:lstStyle/>
-          <a:p>
-            <a:pPr algn="ctr"/>
-          </a:p>
-        </p:txBody>
-      </p:sp>
-      <p:sp>
-        <p:nvSpPr>
-          <p:cNvPr id="9" name="Rectangle 8"/>
-          <p:cNvSpPr/>
-          <p:nvPr/>
-        </p:nvSpPr>
-        <p:spPr>
-          <a:xfrm>
-            <a:off x="457200" y="2478024"/>
-            <a:ext cx="128016" cy="1051560"/>
-          </a:xfrm>
-          <a:prstGeom prst="rect">
-            <a:avLst/>
-          </a:prstGeom>
-          <a:solidFill>
-            <a:srgbClr val="FFD000"/>
-          </a:solidFill>
-          <a:ln>
-            <a:noFill/>
-          </a:ln>
-        </p:spPr>
-        <p:style>
-          <a:lnRef idx="1">
-            <a:schemeClr val="accent1"/>
-          </a:lnRef>
-          <a:fillRef idx="3">
-            <a:schemeClr val="accent1"/>
-          </a:fillRef>
-          <a:effectRef idx="2">
-            <a:schemeClr val="accent1"/>
-          </a:effectRef>
-          <a:fontRef idx="minor">
-            <a:schemeClr val="lt1"/>
-          </a:fontRef>
-        </p:style>
-        <p:txBody>
-          <a:bodyPr rtlCol="0" anchor="ctr"/>
-          <a:lstStyle/>
-          <a:p>
-            <a:pPr algn="ctr"/>
-          </a:p>
-        </p:txBody>
-      </p:sp>
-      <p:sp>
-        <p:nvSpPr>
-          <p:cNvPr id="10" name="TextBox 9"/>
-          <p:cNvSpPr txBox="1"/>
-          <p:nvPr/>
-        </p:nvSpPr>
-        <p:spPr>
-          <a:xfrm>
-            <a:off x="777240" y="2615184"/>
-            <a:ext cx="10774375" cy="822959"/>
-          </a:xfrm>
-          <a:prstGeom prst="rect">
-            <a:avLst/>
-          </a:prstGeom>
-          <a:noFill/>
-        </p:spPr>
-        <p:txBody>
-          <a:bodyPr wrap="square">
-            <a:spAutoFit/>
-          </a:bodyPr>
-          <a:lstStyle/>
-          <a:p>
-            <a:r>
-              <a:rPr sz="1200" b="1" i="0">
-                <a:solidFill>
-                  <a:srgbClr val="FFD000"/>
-                </a:solidFill>
-                <a:latin typeface="Calibri"/>
-              </a:rPr>
-              <a:t>Aclaración</a:t>
-            </a:r>
-          </a:p>
-          <a:p>
-            <a:pPr>
-              <a:spcBef>
-                <a:spcPts val="400"/>
-              </a:spcBef>
-            </a:pPr>
-            <a:r>
-              <a:rPr sz="1400" b="0" i="0">
-                <a:solidFill>
-                  <a:srgbClr val="333333"/>
-                </a:solidFill>
-                <a:latin typeface="Calibri"/>
-              </a:rPr>
-              <a:t>Enunciado completo: Clases/Proyecto Integrador/ (VetCare DB).</a:t>
-            </a:r>
-          </a:p>
-        </p:txBody>
-      </p:sp>
-      <p:sp>
-        <p:nvSpPr>
-          <p:cNvPr id="11" name="Rounded Rectangle 10"/>
-          <p:cNvSpPr/>
-          <p:nvPr/>
-        </p:nvSpPr>
-        <p:spPr>
-          <a:xfrm>
-            <a:off x="457200" y="3694176"/>
-            <a:ext cx="11277295" cy="1051560"/>
-          </a:xfrm>
-          <a:prstGeom prst="roundRect">
-            <a:avLst>
-              <a:gd name="adj" fmla="val 12000"/>
-            </a:avLst>
-          </a:prstGeom>
-          <a:solidFill>
-            <a:srgbClr val="FBE4E4"/>
-          </a:solidFill>
-          <a:ln>
-            <a:noFill/>
-          </a:ln>
-        </p:spPr>
-        <p:style>
-          <a:lnRef idx="1">
-            <a:schemeClr val="accent1"/>
-          </a:lnRef>
-          <a:fillRef idx="3">
-            <a:schemeClr val="accent1"/>
-          </a:fillRef>
-          <a:effectRef idx="2">
-            <a:schemeClr val="accent1"/>
-          </a:effectRef>
-          <a:fontRef idx="minor">
-            <a:schemeClr val="lt1"/>
-          </a:fontRef>
-        </p:style>
-        <p:txBody>
-          <a:bodyPr rtlCol="0" anchor="ctr"/>
-          <a:lstStyle/>
-          <a:p>
-            <a:pPr algn="ctr"/>
-          </a:p>
-        </p:txBody>
-      </p:sp>
-      <p:sp>
-        <p:nvSpPr>
-          <p:cNvPr id="12" name="Rectangle 11"/>
-          <p:cNvSpPr/>
-          <p:nvPr/>
-        </p:nvSpPr>
-        <p:spPr>
-          <a:xfrm>
-            <a:off x="457200" y="3694176"/>
-            <a:ext cx="128016" cy="1051560"/>
-          </a:xfrm>
-          <a:prstGeom prst="rect">
-            <a:avLst/>
-          </a:prstGeom>
-          <a:solidFill>
-            <a:srgbClr val="A02030"/>
-          </a:solidFill>
-          <a:ln>
-            <a:noFill/>
-          </a:ln>
-        </p:spPr>
-        <p:style>
-          <a:lnRef idx="1">
-            <a:schemeClr val="accent1"/>
-          </a:lnRef>
-          <a:fillRef idx="3">
-            <a:schemeClr val="accent1"/>
-          </a:fillRef>
-          <a:effectRef idx="2">
-            <a:schemeClr val="accent1"/>
-          </a:effectRef>
-          <a:fontRef idx="minor">
-            <a:schemeClr val="lt1"/>
-          </a:fontRef>
-        </p:style>
-        <p:txBody>
-          <a:bodyPr rtlCol="0" anchor="ctr"/>
-          <a:lstStyle/>
-          <a:p>
-            <a:pPr algn="ctr"/>
-          </a:p>
-        </p:txBody>
-      </p:sp>
-      <p:sp>
-        <p:nvSpPr>
-          <p:cNvPr id="13" name="TextBox 12"/>
-          <p:cNvSpPr txBox="1"/>
-          <p:nvPr/>
-        </p:nvSpPr>
-        <p:spPr>
-          <a:xfrm>
-            <a:off x="777240" y="3831336"/>
-            <a:ext cx="10774375" cy="822959"/>
-          </a:xfrm>
-          <a:prstGeom prst="rect">
-            <a:avLst/>
-          </a:prstGeom>
-          <a:noFill/>
-        </p:spPr>
-        <p:txBody>
-          <a:bodyPr wrap="square">
-            <a:spAutoFit/>
-          </a:bodyPr>
-          <a:lstStyle/>
-          <a:p>
-            <a:r>
-              <a:rPr sz="1200" b="1" i="0">
-                <a:solidFill>
-                  <a:srgbClr val="A02030"/>
-                </a:solidFill>
-                <a:latin typeface="Calibri"/>
-              </a:rPr>
-              <a:t>Atención</a:t>
-            </a:r>
-          </a:p>
-          <a:p>
-            <a:pPr>
-              <a:spcBef>
-                <a:spcPts val="400"/>
-              </a:spcBef>
-            </a:pPr>
-            <a:r>
-              <a:rPr sz="1400" b="0" i="0">
-                <a:solidFill>
-                  <a:srgbClr val="333333"/>
-                </a:solidFill>
-                <a:latin typeface="Calibri"/>
-              </a:rPr>
-              <a:t>Si el docente asigna taller esta semana, él indica el canal y la fecha.</a:t>
-            </a:r>
-          </a:p>
-        </p:txBody>
-      </p:sp>
-      <p:sp>
-        <p:nvSpPr>
-          <p:cNvPr id="14" name="TextBox 13"/>
-          <p:cNvSpPr txBox="1"/>
-          <p:nvPr/>
-        </p:nvSpPr>
-        <p:spPr>
-          <a:xfrm>
-            <a:off x="11185855" y="6473952"/>
-            <a:ext cx="640080" cy="274320"/>
-          </a:xfrm>
-          <a:prstGeom prst="rect">
-            <a:avLst/>
-          </a:prstGeom>
-          <a:noFill/>
-        </p:spPr>
-        <p:txBody>
-          <a:bodyPr wrap="square">
-            <a:spAutoFit/>
-          </a:bodyPr>
-          <a:lstStyle/>
-          <a:p>
-            <a:pPr algn="r"/>
-            <a:r>
-              <a:rPr sz="1100" b="0" i="0">
-                <a:solidFill>
-                  <a:srgbClr val="666666"/>
-                </a:solidFill>
-                <a:latin typeface="Calibri"/>
-              </a:rPr>
-              <a:t>50</a:t>
-            </a:r>
-          </a:p>
-        </p:txBody>
-      </p:sp>
-    </p:spTree>
-  </p:cSld>
-  <p:clrMapOvr>
-    <a:masterClrMapping/>
-  </p:clrMapOvr>
-</p:sld>
-</file>
-
-<file path=ppt/slides/slide51.xml><?xml version="1.0" encoding="utf-8"?>
-<p:sld xmlns:a="http://schemas.openxmlformats.org/drawingml/2006/main" xmlns:p="http://schemas.openxmlformats.org/presentationml/2006/main" xmlns:r="http://schemas.openxmlformats.org/officeDocument/2006/relationships">
-  <p:cSld>
-    <p:bg>
-      <p:bgPr>
-        <a:solidFill>
-          <a:srgbClr val="FFFFFF"/>
-        </a:solidFill>
-        <a:effectLst/>
-      </p:bgPr>
-    </p:bg>
-    <p:spTree>
-      <p:nvGrpSpPr>
-        <p:cNvPr id="1" name=""/>
-        <p:cNvGrpSpPr/>
-        <p:nvPr/>
-      </p:nvGrpSpPr>
-      <p:grpSpPr/>
-      <p:sp>
-        <p:nvSpPr>
-          <p:cNvPr id="2" name="Rectangle 1"/>
-          <p:cNvSpPr/>
-          <p:nvPr/>
-        </p:nvSpPr>
-        <p:spPr>
-          <a:xfrm>
-            <a:off x="0" y="0"/>
-            <a:ext cx="12191695" cy="164592"/>
-          </a:xfrm>
-          <a:prstGeom prst="rect">
-            <a:avLst/>
-          </a:prstGeom>
-          <a:solidFill>
-            <a:srgbClr val="269CCB"/>
-          </a:solidFill>
-          <a:ln>
-            <a:noFill/>
-          </a:ln>
-        </p:spPr>
-        <p:style>
-          <a:lnRef idx="1">
-            <a:schemeClr val="accent1"/>
-          </a:lnRef>
-          <a:fillRef idx="3">
-            <a:schemeClr val="accent1"/>
-          </a:fillRef>
-          <a:effectRef idx="2">
-            <a:schemeClr val="accent1"/>
-          </a:effectRef>
-          <a:fontRef idx="minor">
-            <a:schemeClr val="lt1"/>
-          </a:fontRef>
-        </p:style>
-        <p:txBody>
-          <a:bodyPr rtlCol="0" anchor="ctr"/>
-          <a:lstStyle/>
-          <a:p>
-            <a:pPr algn="ctr"/>
-          </a:p>
-        </p:txBody>
-      </p:sp>
-      <p:pic>
-        <p:nvPicPr>
-          <p:cNvPr id="3" name="Picture 2" descr="logo_uniajc_color.png"/>
-          <p:cNvPicPr>
-            <a:picLocks noChangeAspect="1"/>
-          </p:cNvPicPr>
-          <p:nvPr/>
-        </p:nvPicPr>
-        <p:blipFill>
-          <a:blip r:embed="rId2"/>
-          <a:stretch>
-            <a:fillRect/>
-          </a:stretch>
-        </p:blipFill>
-        <p:spPr>
-          <a:xfrm>
-            <a:off x="10271455" y="5998464"/>
-            <a:ext cx="1463040" cy="643233"/>
-          </a:xfrm>
-          <a:prstGeom prst="rect">
-            <a:avLst/>
-          </a:prstGeom>
-        </p:spPr>
-      </p:pic>
-      <p:sp>
-        <p:nvSpPr>
-          <p:cNvPr id="4" name="TextBox 3"/>
-          <p:cNvSpPr txBox="1"/>
-          <p:nvPr/>
-        </p:nvSpPr>
-        <p:spPr>
-          <a:xfrm>
-            <a:off x="457200" y="1737360"/>
-            <a:ext cx="11277295" cy="1097280"/>
-          </a:xfrm>
-          <a:prstGeom prst="rect">
-            <a:avLst/>
-          </a:prstGeom>
-          <a:noFill/>
-        </p:spPr>
-        <p:txBody>
-          <a:bodyPr wrap="square" anchor="ctr"/>
-          <a:lstStyle/>
-          <a:p>
-            <a:pPr algn="ctr"/>
-            <a:r>
-              <a:rPr sz="3400" b="1" i="0">
-                <a:solidFill>
-                  <a:srgbClr val="095292"/>
-                </a:solidFill>
-                <a:latin typeface="Calibri"/>
-              </a:rPr>
-              <a:t>Clase 6 · VetCare avanza</a:t>
-            </a:r>
-          </a:p>
-        </p:txBody>
-      </p:sp>
-      <p:sp>
-        <p:nvSpPr>
-          <p:cNvPr id="5" name="TextBox 4"/>
-          <p:cNvSpPr txBox="1"/>
-          <p:nvPr/>
-        </p:nvSpPr>
-        <p:spPr>
-          <a:xfrm>
-            <a:off x="457200" y="3017520"/>
-            <a:ext cx="11277295" cy="1645920"/>
-          </a:xfrm>
-          <a:prstGeom prst="rect">
-            <a:avLst/>
-          </a:prstGeom>
-          <a:noFill/>
-        </p:spPr>
-        <p:txBody>
-          <a:bodyPr wrap="square">
-            <a:spAutoFit/>
-          </a:bodyPr>
-          <a:lstStyle/>
-          <a:p>
-            <a:pPr algn="ctr">
-              <a:spcAft>
-                <a:spcPts val="600"/>
-              </a:spcAft>
-            </a:pPr>
-            <a:r>
-              <a:rPr sz="1600" b="0" i="0">
-                <a:solidFill>
-                  <a:srgbClr val="333333"/>
-                </a:solidFill>
-                <a:latin typeface="Calibri"/>
-              </a:rPr>
-              <a:t>Primera pareja de consultas antes/despues del PI</a:t>
-            </a:r>
-          </a:p>
-          <a:p>
-            <a:pPr algn="ctr">
-              <a:spcAft>
-                <a:spcPts val="600"/>
-              </a:spcAft>
-            </a:pPr>
-            <a:r>
-              <a:rPr sz="1600" b="0" i="0">
-                <a:solidFill>
-                  <a:srgbClr val="333333"/>
-                </a:solidFill>
-                <a:latin typeface="Calibri"/>
-              </a:rPr>
-              <a:t>Entregable: 2 consultas (antes/despues) + justificacion (media pag.)</a:t>
-            </a:r>
-          </a:p>
-          <a:p>
-            <a:pPr algn="ctr">
-              <a:spcAft>
-                <a:spcPts val="600"/>
-              </a:spcAft>
-            </a:pPr>
-            <a:r>
-              <a:rPr sz="1600" b="0" i="0">
-                <a:solidFill>
-                  <a:srgbClr val="333333"/>
-                </a:solidFill>
-                <a:latin typeface="Calibri"/>
-              </a:rPr>
-              <a:t>Siguiente clase: continuar el hilo del PI segun plan</a:t>
-            </a:r>
-          </a:p>
-        </p:txBody>
-      </p:sp>
-      <p:sp>
-        <p:nvSpPr>
-          <p:cNvPr id="6" name="TextBox 5"/>
-          <p:cNvSpPr txBox="1"/>
-          <p:nvPr/>
-        </p:nvSpPr>
-        <p:spPr>
-          <a:xfrm>
-            <a:off x="457200" y="4754880"/>
-            <a:ext cx="11277295" cy="640080"/>
-          </a:xfrm>
-          <a:prstGeom prst="rect">
-            <a:avLst/>
-          </a:prstGeom>
-          <a:noFill/>
-        </p:spPr>
-        <p:txBody>
-          <a:bodyPr wrap="square">
-            <a:spAutoFit/>
-          </a:bodyPr>
-          <a:lstStyle/>
-          <a:p>
-            <a:pPr algn="ctr"/>
-            <a:r>
-              <a:rPr sz="2000" b="1" i="0">
-                <a:solidFill>
-                  <a:srgbClr val="269CCB"/>
-                </a:solidFill>
-                <a:latin typeface="Calibri"/>
-              </a:rPr>
-              <a:t>Teoria breve · practica = PI</a:t>
             </a:r>
           </a:p>
         </p:txBody>
@@ -23421,4 +18890,324 @@
   </a:objectDefaults>
   <a:extraClrSchemeLst/>
 </a:theme>
+</file>
+
+<file path=ppt/theme/theme2.xml><?xml version="1.0" encoding="utf-8"?>
+<a:theme xmlns:a="http://schemas.openxmlformats.org/drawingml/2006/main" name="Office Theme">
+  <a:themeElements>
+    <a:clrScheme name="Office">
+      <a:dk1>
+        <a:sysClr val="windowText" lastClr="000000"/>
+      </a:dk1>
+      <a:lt1>
+        <a:sysClr val="window" lastClr="FFFFFF"/>
+      </a:lt1>
+      <a:dk2>
+        <a:srgbClr val="1F497D"/>
+      </a:dk2>
+      <a:lt2>
+        <a:srgbClr val="EEECE1"/>
+      </a:lt2>
+      <a:accent1>
+        <a:srgbClr val="4F81BD"/>
+      </a:accent1>
+      <a:accent2>
+        <a:srgbClr val="C0504D"/>
+      </a:accent2>
+      <a:accent3>
+        <a:srgbClr val="9BBB59"/>
+      </a:accent3>
+      <a:accent4>
+        <a:srgbClr val="8064A2"/>
+      </a:accent4>
+      <a:accent5>
+        <a:srgbClr val="4BACC6"/>
+      </a:accent5>
+      <a:accent6>
+        <a:srgbClr val="F79646"/>
+      </a:accent6>
+      <a:hlink>
+        <a:srgbClr val="0000FF"/>
+      </a:hlink>
+      <a:folHlink>
+        <a:srgbClr val="800080"/>
+      </a:folHlink>
+    </a:clrScheme>
+    <a:fontScheme name="Office">
+      <a:majorFont>
+        <a:latin typeface="Calibri"/>
+        <a:ea typeface=""/>
+        <a:cs typeface=""/>
+        <a:font script="Jpan" typeface="ＭＳ Ｐゴシック"/>
+        <a:font script="Hang" typeface="맑은 고딕"/>
+        <a:font script="Hans" typeface="宋体"/>
+        <a:font script="Hant" typeface="新細明體"/>
+        <a:font script="Arab" typeface="Times New Roman"/>
+        <a:font script="Hebr" typeface="Times New Roman"/>
+        <a:font script="Thai" typeface="Angsana New"/>
+        <a:font script="Ethi" typeface="Nyala"/>
+        <a:font script="Beng" typeface="Vrinda"/>
+        <a:font script="Gujr" typeface="Shruti"/>
+        <a:font script="Khmr" typeface="MoolBoran"/>
+        <a:font script="Knda" typeface="Tunga"/>
+        <a:font script="Guru" typeface="Raavi"/>
+        <a:font script="Cans" typeface="Euphemia"/>
+        <a:font script="Cher" typeface="Plantagenet Cherokee"/>
+        <a:font script="Yiii" typeface="Microsoft Yi Baiti"/>
+        <a:font script="Tibt" typeface="Microsoft Himalaya"/>
+        <a:font script="Thaa" typeface="MV Boli"/>
+        <a:font script="Deva" typeface="Mangal"/>
+        <a:font script="Telu" typeface="Gautami"/>
+        <a:font script="Taml" typeface="Latha"/>
+        <a:font script="Syrc" typeface="Estrangelo Edessa"/>
+        <a:font script="Orya" typeface="Kalinga"/>
+        <a:font script="Mlym" typeface="Kartika"/>
+        <a:font script="Laoo" typeface="DokChampa"/>
+        <a:font script="Sinh" typeface="Iskoola Pota"/>
+        <a:font script="Mong" typeface="Mongolian Baiti"/>
+        <a:font script="Viet" typeface="Times New Roman"/>
+        <a:font script="Uigh" typeface="Microsoft Uighur"/>
+        <a:font script="Geor" typeface="Sylfaen"/>
+      </a:majorFont>
+      <a:minorFont>
+        <a:latin typeface="Calibri"/>
+        <a:ea typeface=""/>
+        <a:cs typeface=""/>
+        <a:font script="Jpan" typeface="ＭＳ Ｐゴシック"/>
+        <a:font script="Hang" typeface="맑은 고딕"/>
+        <a:font script="Hans" typeface="宋体"/>
+        <a:font script="Hant" typeface="新細明體"/>
+        <a:font script="Arab" typeface="Arial"/>
+        <a:font script="Hebr" typeface="Arial"/>
+        <a:font script="Thai" typeface="Cordia New"/>
+        <a:font script="Ethi" typeface="Nyala"/>
+        <a:font script="Beng" typeface="Vrinda"/>
+        <a:font script="Gujr" typeface="Shruti"/>
+        <a:font script="Khmr" typeface="DaunPenh"/>
+        <a:font script="Knda" typeface="Tunga"/>
+        <a:font script="Guru" typeface="Raavi"/>
+        <a:font script="Cans" typeface="Euphemia"/>
+        <a:font script="Cher" typeface="Plantagenet Cherokee"/>
+        <a:font script="Yiii" typeface="Microsoft Yi Baiti"/>
+        <a:font script="Tibt" typeface="Microsoft Himalaya"/>
+        <a:font script="Thaa" typeface="MV Boli"/>
+        <a:font script="Deva" typeface="Mangal"/>
+        <a:font script="Telu" typeface="Gautami"/>
+        <a:font script="Taml" typeface="Latha"/>
+        <a:font script="Syrc" typeface="Estrangelo Edessa"/>
+        <a:font script="Orya" typeface="Kalinga"/>
+        <a:font script="Mlym" typeface="Kartika"/>
+        <a:font script="Laoo" typeface="DokChampa"/>
+        <a:font script="Sinh" typeface="Iskoola Pota"/>
+        <a:font script="Mong" typeface="Mongolian Baiti"/>
+        <a:font script="Viet" typeface="Arial"/>
+        <a:font script="Uigh" typeface="Microsoft Uighur"/>
+        <a:font script="Geor" typeface="Sylfaen"/>
+      </a:minorFont>
+    </a:fontScheme>
+    <a:fmtScheme name="Office">
+      <a:fillStyleLst>
+        <a:solidFill>
+          <a:schemeClr val="phClr"/>
+        </a:solidFill>
+        <a:gradFill rotWithShape="1">
+          <a:gsLst>
+            <a:gs pos="0">
+              <a:schemeClr val="phClr">
+                <a:tint val="50000"/>
+                <a:satMod val="300000"/>
+              </a:schemeClr>
+            </a:gs>
+            <a:gs pos="35000">
+              <a:schemeClr val="phClr">
+                <a:tint val="37000"/>
+                <a:satMod val="300000"/>
+              </a:schemeClr>
+            </a:gs>
+            <a:gs pos="100000">
+              <a:schemeClr val="phClr">
+                <a:tint val="15000"/>
+                <a:satMod val="350000"/>
+              </a:schemeClr>
+            </a:gs>
+          </a:gsLst>
+          <a:lin ang="16200000" scaled="1"/>
+        </a:gradFill>
+        <a:gradFill rotWithShape="1">
+          <a:gsLst>
+            <a:gs pos="0">
+              <a:schemeClr val="phClr">
+                <a:tint val="100000"/>
+                <a:shade val="100000"/>
+                <a:satMod val="130000"/>
+              </a:schemeClr>
+            </a:gs>
+            <a:gs pos="100000">
+              <a:schemeClr val="phClr">
+                <a:tint val="50000"/>
+                <a:shade val="100000"/>
+                <a:satMod val="350000"/>
+              </a:schemeClr>
+            </a:gs>
+          </a:gsLst>
+          <a:lin ang="16200000" scaled="0"/>
+        </a:gradFill>
+      </a:fillStyleLst>
+      <a:lnStyleLst>
+        <a:ln w="9525" cap="flat" cmpd="sng" algn="ctr">
+          <a:solidFill>
+            <a:schemeClr val="phClr">
+              <a:shade val="95000"/>
+              <a:satMod val="105000"/>
+            </a:schemeClr>
+          </a:solidFill>
+          <a:prstDash val="solid"/>
+        </a:ln>
+        <a:ln w="25400" cap="flat" cmpd="sng" algn="ctr">
+          <a:solidFill>
+            <a:schemeClr val="phClr"/>
+          </a:solidFill>
+          <a:prstDash val="solid"/>
+        </a:ln>
+        <a:ln w="38100" cap="flat" cmpd="sng" algn="ctr">
+          <a:solidFill>
+            <a:schemeClr val="phClr"/>
+          </a:solidFill>
+          <a:prstDash val="solid"/>
+        </a:ln>
+      </a:lnStyleLst>
+      <a:effectStyleLst>
+        <a:effectStyle>
+          <a:effectLst>
+            <a:outerShdw blurRad="40000" dist="20000" dir="5400000" rotWithShape="0">
+              <a:srgbClr val="000000">
+                <a:alpha val="38000"/>
+              </a:srgbClr>
+            </a:outerShdw>
+          </a:effectLst>
+        </a:effectStyle>
+        <a:effectStyle>
+          <a:effectLst>
+            <a:outerShdw blurRad="40000" dist="23000" dir="5400000" rotWithShape="0">
+              <a:srgbClr val="000000">
+                <a:alpha val="35000"/>
+              </a:srgbClr>
+            </a:outerShdw>
+          </a:effectLst>
+        </a:effectStyle>
+        <a:effectStyle>
+          <a:effectLst>
+            <a:outerShdw blurRad="40000" dist="23000" dir="5400000" rotWithShape="0">
+              <a:srgbClr val="000000">
+                <a:alpha val="35000"/>
+              </a:srgbClr>
+            </a:outerShdw>
+          </a:effectLst>
+          <a:scene3d>
+            <a:camera prst="orthographicFront">
+              <a:rot lat="0" lon="0" rev="0"/>
+            </a:camera>
+            <a:lightRig rig="threePt" dir="t">
+              <a:rot lat="0" lon="0" rev="1200000"/>
+            </a:lightRig>
+          </a:scene3d>
+          <a:sp3d>
+            <a:bevelT w="63500" h="25400"/>
+          </a:sp3d>
+        </a:effectStyle>
+      </a:effectStyleLst>
+      <a:bgFillStyleLst>
+        <a:solidFill>
+          <a:schemeClr val="phClr"/>
+        </a:solidFill>
+        <a:gradFill rotWithShape="1">
+          <a:gsLst>
+            <a:gs pos="0">
+              <a:schemeClr val="phClr">
+                <a:tint val="40000"/>
+                <a:satMod val="350000"/>
+              </a:schemeClr>
+            </a:gs>
+            <a:gs pos="40000">
+              <a:schemeClr val="phClr">
+                <a:tint val="45000"/>
+                <a:shade val="99000"/>
+                <a:satMod val="350000"/>
+              </a:schemeClr>
+            </a:gs>
+            <a:gs pos="100000">
+              <a:schemeClr val="phClr">
+                <a:shade val="20000"/>
+                <a:satMod val="255000"/>
+              </a:schemeClr>
+            </a:gs>
+          </a:gsLst>
+          <a:path path="circle">
+            <a:fillToRect l="50000" t="-80000" r="50000" b="180000"/>
+          </a:path>
+        </a:gradFill>
+        <a:gradFill rotWithShape="1">
+          <a:gsLst>
+            <a:gs pos="0">
+              <a:schemeClr val="phClr">
+                <a:tint val="80000"/>
+                <a:satMod val="300000"/>
+              </a:schemeClr>
+            </a:gs>
+            <a:gs pos="100000">
+              <a:schemeClr val="phClr">
+                <a:shade val="30000"/>
+                <a:satMod val="200000"/>
+              </a:schemeClr>
+            </a:gs>
+          </a:gsLst>
+          <a:path path="circle">
+            <a:fillToRect l="50000" t="50000" r="50000" b="50000"/>
+          </a:path>
+        </a:gradFill>
+      </a:bgFillStyleLst>
+    </a:fmtScheme>
+  </a:themeElements>
+  <a:objectDefaults>
+    <a:spDef>
+      <a:spPr/>
+      <a:bodyPr/>
+      <a:lstStyle/>
+      <a:style>
+        <a:lnRef idx="1">
+          <a:schemeClr val="accent1"/>
+        </a:lnRef>
+        <a:fillRef idx="3">
+          <a:schemeClr val="accent1"/>
+        </a:fillRef>
+        <a:effectRef idx="2">
+          <a:schemeClr val="accent1"/>
+        </a:effectRef>
+        <a:fontRef idx="minor">
+          <a:schemeClr val="lt1"/>
+        </a:fontRef>
+      </a:style>
+    </a:spDef>
+    <a:lnDef>
+      <a:spPr/>
+      <a:bodyPr/>
+      <a:lstStyle/>
+      <a:style>
+        <a:lnRef idx="2">
+          <a:schemeClr val="accent1"/>
+        </a:lnRef>
+        <a:fillRef idx="0">
+          <a:schemeClr val="accent1"/>
+        </a:fillRef>
+        <a:effectRef idx="1">
+          <a:schemeClr val="accent1"/>
+        </a:effectRef>
+        <a:fontRef idx="minor">
+          <a:schemeClr val="tx1"/>
+        </a:fontRef>
+      </a:style>
+    </a:lnDef>
+  </a:objectDefaults>
+  <a:extraClrSchemeLst/>
+</a:theme>
 </file>
--- a/Bases de Datos II/Clases/Clase 6 - Optimizacion de consultas/Presentacion.pptx
+++ b/Bases de Datos II/Clases/Clase 6 - Optimizacion de consultas/Presentacion.pptx
@@ -569,6 +569,737 @@
 </p:notes>
 </file>
 
+<file path=ppt/notesSlides/notesSlide10.xml><?xml version="1.0" encoding="utf-8"?>
+<p:notes xmlns:a="http://schemas.openxmlformats.org/drawingml/2006/main" xmlns:p="http://schemas.openxmlformats.org/presentationml/2006/main" xmlns:r="http://schemas.openxmlformats.org/officeDocument/2006/relationships">
+  <p:cSld>
+    <p:spTree>
+      <p:nvGrpSpPr>
+        <p:cNvPr id="1" name=""/>
+        <p:cNvGrpSpPr/>
+        <p:nvPr/>
+      </p:nvGrpSpPr>
+      <p:grpSpPr>
+        <a:xfrm>
+          <a:off x="0" y="0"/>
+          <a:ext cx="0" cy="0"/>
+          <a:chOff x="0" y="0"/>
+          <a:chExt cx="0" cy="0"/>
+        </a:xfrm>
+      </p:grpSpPr>
+      <p:sp>
+        <p:nvSpPr>
+          <p:cNvPr id="2" name="Slide Image Placeholder 1"/>
+          <p:cNvSpPr>
+            <a:spLocks noGrp="1"/>
+          </p:cNvSpPr>
+          <p:nvPr>
+            <p:ph type="sldImg" idx="2"/>
+          </p:nvPr>
+        </p:nvSpPr>
+        <p:spPr/>
+      </p:sp>
+      <p:sp>
+        <p:nvSpPr>
+          <p:cNvPr id="3" name="Notes Placeholder 2"/>
+          <p:cNvSpPr>
+            <a:spLocks noGrp="1"/>
+          </p:cNvSpPr>
+          <p:nvPr>
+            <p:ph type="body" idx="3" sz="quarter"/>
+          </p:nvPr>
+        </p:nvSpPr>
+        <p:spPr/>
+        <p:txBody>
+          <a:bodyPr/>
+          <a:lstStyle/>
+          <a:p>
+            <a:r>
+              <a:t>Y se rompe sin avisar, porque ningun motor va a lanzar un error por eso.</a:t>
+            </a:r>
+          </a:p>
+          <a:p>
+            <a:r>
+              <a:t>Por eso el taller cobra la prueba dos veces, unos 6 de los 100 puntos, y hay dos formas segun lo que se compare.</a:t>
+            </a:r>
+          </a:p>
+          <a:p>
+            <a:r>
+              <a:t>Para conjuntos completos, donde el conteo puede coincidir con filas distintas, se usa EXCEPT en los DOS sentidos, y el docente tiene que saber por que son dos: A EXCEPT B devuelve lo que esta en A y no esta en B, asi que si sale vacio todavia puede haber filas de mas en B; se corren las dos direcciones unidas con UNION ALL y se exige cero filas en total.</a:t>
+            </a:r>
+          </a:p>
+          <a:p>
+            <a:r>
+              <a:t>Tres advertencias al calificar.</a:t>
+            </a:r>
+          </a:p>
+        </p:txBody>
+      </p:sp>
+      <p:sp>
+        <p:nvSpPr>
+          <p:cNvPr id="4" name="Slide Number Placeholder 3"/>
+          <p:cNvSpPr>
+            <a:spLocks noGrp="1"/>
+          </p:cNvSpPr>
+          <p:nvPr>
+            <p:ph type="sldNum" idx="5" sz="quarter"/>
+          </p:nvPr>
+        </p:nvSpPr>
+        <p:spPr/>
+      </p:sp>
+    </p:spTree>
+  </p:cSld>
+  <p:clrMapOvr>
+    <a:masterClrMapping/>
+  </p:clrMapOvr>
+</p:notes>
+</file>
+
+<file path=ppt/notesSlides/notesSlide11.xml><?xml version="1.0" encoding="utf-8"?>
+<p:notes xmlns:a="http://schemas.openxmlformats.org/drawingml/2006/main" xmlns:p="http://schemas.openxmlformats.org/presentationml/2006/main" xmlns:r="http://schemas.openxmlformats.org/officeDocument/2006/relationships">
+  <p:cSld>
+    <p:spTree>
+      <p:nvGrpSpPr>
+        <p:cNvPr id="1" name=""/>
+        <p:cNvGrpSpPr/>
+        <p:nvPr/>
+      </p:nvGrpSpPr>
+      <p:grpSpPr>
+        <a:xfrm>
+          <a:off x="0" y="0"/>
+          <a:ext cx="0" cy="0"/>
+          <a:chOff x="0" y="0"/>
+          <a:chExt cx="0" cy="0"/>
+        </a:xfrm>
+      </p:grpSpPr>
+      <p:sp>
+        <p:nvSpPr>
+          <p:cNvPr id="2" name="Slide Image Placeholder 1"/>
+          <p:cNvSpPr>
+            <a:spLocks noGrp="1"/>
+          </p:cNvSpPr>
+          <p:nvPr>
+            <p:ph type="sldImg" idx="2"/>
+          </p:nvPr>
+        </p:nvSpPr>
+        <p:spPr/>
+      </p:sp>
+      <p:sp>
+        <p:nvSpPr>
+          <p:cNvPr id="3" name="Notes Placeholder 2"/>
+          <p:cNvSpPr>
+            <a:spLocks noGrp="1"/>
+          </p:cNvSpPr>
+          <p:nvPr>
+            <p:ph type="body" idx="3" sz="quarter"/>
+          </p:nvPr>
+        </p:nvSpPr>
+        <p:spPr/>
+        <p:txBody>
+          <a:bodyPr/>
+          <a:lstStyle/>
+          <a:p>
+            <a:r>
+              <a:t>La version ANTES es SELECT * FROM cita c, mascota m, dueno d, veterinario v con las cuatro condiciones de union en el WHERE, to_char sobre la fecha y UPPER sobre el estado, y el docente debe saber que esta mal en cada linea.</a:t>
+            </a:r>
+          </a:p>
+          <a:p>
+            <a:r>
+              <a:t>SELECT * arrastra todas las columnas de las cuatro tablas cuando la pantalla de agenda necesita seis, lo cual multiplica el ancho de la fila y con el la memoria de trabajo del ordenamiento.</a:t>
+            </a:r>
+          </a:p>
+          <a:p>
+            <a:r>
+              <a:t>Las dos funciones sobre columnas se explicaron en el parrafo del predicado sargable.</a:t>
+            </a:r>
+          </a:p>
+          <a:p>
+            <a:r>
+              <a:t>Hay que decir aqui, y no despues, lo que la quinta afirmacion de la pregunta 4 castiga: cambiar la coma por JOIN...</a:t>
+            </a:r>
+          </a:p>
+          <a:p>
+            <a:r>
+              <a:t>ON no acelera nada, porque PostgreSQL normaliza las dos formas al mismo plan interno; se gana legibilidad y se gana que un ON faltante salte a la vista, o sea seguridad, no milisegundos.</a:t>
+            </a:r>
+          </a:p>
+          <a:p>
+            <a:r>
+              <a:t>Si el docente lo presenta como una mejora de rendimiento, esta ensenando justo la opcion por la que va a descontar.</a:t>
+            </a:r>
+          </a:p>
+          <a:p>
+            <a:r>
+              <a:t>La version DESPUES proyecta las seis columnas, escribe los tres JOIN...</a:t>
+            </a:r>
+          </a:p>
+        </p:txBody>
+      </p:sp>
+      <p:sp>
+        <p:nvSpPr>
+          <p:cNvPr id="4" name="Slide Number Placeholder 3"/>
+          <p:cNvSpPr>
+            <a:spLocks noGrp="1"/>
+          </p:cNvSpPr>
+          <p:nvPr>
+            <p:ph type="sldNum" idx="5" sz="quarter"/>
+          </p:nvPr>
+        </p:nvSpPr>
+        <p:spPr/>
+      </p:sp>
+    </p:spTree>
+  </p:cSld>
+  <p:clrMapOvr>
+    <a:masterClrMapping/>
+  </p:clrMapOvr>
+</p:notes>
+</file>
+
+<file path=ppt/notesSlides/notesSlide12.xml><?xml version="1.0" encoding="utf-8"?>
+<p:notes xmlns:a="http://schemas.openxmlformats.org/drawingml/2006/main" xmlns:p="http://schemas.openxmlformats.org/presentationml/2006/main" xmlns:r="http://schemas.openxmlformats.org/officeDocument/2006/relationships">
+  <p:cSld>
+    <p:spTree>
+      <p:nvGrpSpPr>
+        <p:cNvPr id="1" name=""/>
+        <p:cNvGrpSpPr/>
+        <p:nvPr/>
+      </p:nvGrpSpPr>
+      <p:grpSpPr>
+        <a:xfrm>
+          <a:off x="0" y="0"/>
+          <a:ext cx="0" cy="0"/>
+          <a:chOff x="0" y="0"/>
+          <a:chExt cx="0" cy="0"/>
+        </a:xfrm>
+      </p:grpSpPr>
+      <p:sp>
+        <p:nvSpPr>
+          <p:cNvPr id="2" name="Slide Image Placeholder 1"/>
+          <p:cNvSpPr>
+            <a:spLocks noGrp="1"/>
+          </p:cNvSpPr>
+          <p:nvPr>
+            <p:ph type="sldImg" idx="2"/>
+          </p:nvPr>
+        </p:nvSpPr>
+        <p:spPr/>
+      </p:sp>
+      <p:sp>
+        <p:nvSpPr>
+          <p:cNvPr id="3" name="Notes Placeholder 2"/>
+          <p:cNvSpPr>
+            <a:spLocks noGrp="1"/>
+          </p:cNvSpPr>
+          <p:nvPr>
+            <p:ph type="body" idx="3" sz="quarter"/>
+          </p:nvPr>
+        </p:nvSpPr>
+        <p:spPr/>
+        <p:txBody>
+          <a:bodyPr/>
+          <a:lstStyle/>
+          <a:p>
+            <a:r>
+              <a:t>Fuera de la lamina (habla de la practica, no del tema):</a:t>
+            </a:r>
+          </a:p>
+          <a:p>
+            <a:r>
+              <a:t>- Que es medio minuto de demo y ahorra la mitad de los reclamos de la pregunta 3.</a:t>
+            </a:r>
+          </a:p>
+        </p:txBody>
+      </p:sp>
+      <p:sp>
+        <p:nvSpPr>
+          <p:cNvPr id="4" name="Slide Number Placeholder 3"/>
+          <p:cNvSpPr>
+            <a:spLocks noGrp="1"/>
+          </p:cNvSpPr>
+          <p:nvPr>
+            <p:ph type="sldNum" idx="5" sz="quarter"/>
+          </p:nvPr>
+        </p:nvSpPr>
+        <p:spPr/>
+      </p:sp>
+    </p:spTree>
+  </p:cSld>
+  <p:clrMapOvr>
+    <a:masterClrMapping/>
+  </p:clrMapOvr>
+</p:notes>
+</file>
+
+<file path=ppt/notesSlides/notesSlide13.xml><?xml version="1.0" encoding="utf-8"?>
+<p:notes xmlns:a="http://schemas.openxmlformats.org/drawingml/2006/main" xmlns:p="http://schemas.openxmlformats.org/presentationml/2006/main" xmlns:r="http://schemas.openxmlformats.org/officeDocument/2006/relationships">
+  <p:cSld>
+    <p:spTree>
+      <p:nvGrpSpPr>
+        <p:cNvPr id="1" name=""/>
+        <p:cNvGrpSpPr/>
+        <p:nvPr/>
+      </p:nvGrpSpPr>
+      <p:grpSpPr>
+        <a:xfrm>
+          <a:off x="0" y="0"/>
+          <a:ext cx="0" cy="0"/>
+          <a:chOff x="0" y="0"/>
+          <a:chExt cx="0" cy="0"/>
+        </a:xfrm>
+      </p:grpSpPr>
+      <p:sp>
+        <p:nvSpPr>
+          <p:cNvPr id="2" name="Slide Image Placeholder 1"/>
+          <p:cNvSpPr>
+            <a:spLocks noGrp="1"/>
+          </p:cNvSpPr>
+          <p:nvPr>
+            <p:ph type="sldImg" idx="2"/>
+          </p:nvPr>
+        </p:nvSpPr>
+        <p:spPr/>
+      </p:sp>
+      <p:sp>
+        <p:nvSpPr>
+          <p:cNvPr id="3" name="Notes Placeholder 2"/>
+          <p:cNvSpPr>
+            <a:spLocks noGrp="1"/>
+          </p:cNvSpPr>
+          <p:nvPr>
+            <p:ph type="body" idx="3" sz="quarter"/>
+          </p:nvPr>
+        </p:nvSpPr>
+        <p:spPr/>
+        <p:txBody>
+          <a:bodyPr/>
+          <a:lstStyle/>
+          <a:p>
+            <a:r>
+              <a:t>Fuera de la lamina (habla de la practica, no del tema):</a:t>
+            </a:r>
+          </a:p>
+          <a:p>
+            <a:r>
+              <a:t>- Soporta EXPLAIN, EXPLAIN ANALYZE y la opcion BUFFERS; si en alguna maquina BUFFERS no responde, el enunciado ya autoriza usar EXPLAIN ANALYZE a secas y declararlo en la seccion 5 de la pregunta 5, asi que eso no cuesta puntos.</a:t>
+            </a:r>
+          </a:p>
+          <a:p/>
+          <a:p>
+            <a:r>
+              <a:t>Lo que hay que documentar en papel, porque el entorno no lo permite y es literalmente la seccion 5 de la pregunta 5: los tiempos con la memoria intermedia vacia, ya que vaciarla exige privilegios de administrador; el comportamiento con varias sesiones compitiendo, que es la Clase 10; y cualquier comparacion por encima de unos cientos de miles de filas.</a:t>
+            </a:r>
+          </a:p>
+        </p:txBody>
+      </p:sp>
+      <p:sp>
+        <p:nvSpPr>
+          <p:cNvPr id="4" name="Slide Number Placeholder 3"/>
+          <p:cNvSpPr>
+            <a:spLocks noGrp="1"/>
+          </p:cNvSpPr>
+          <p:nvPr>
+            <p:ph type="sldNum" idx="5" sz="quarter"/>
+          </p:nvPr>
+        </p:nvSpPr>
+        <p:spPr/>
+      </p:sp>
+    </p:spTree>
+  </p:cSld>
+  <p:clrMapOvr>
+    <a:masterClrMapping/>
+  </p:clrMapOvr>
+</p:notes>
+</file>
+
+<file path=ppt/notesSlides/notesSlide14.xml><?xml version="1.0" encoding="utf-8"?>
+<p:notes xmlns:a="http://schemas.openxmlformats.org/drawingml/2006/main" xmlns:p="http://schemas.openxmlformats.org/presentationml/2006/main" xmlns:r="http://schemas.openxmlformats.org/officeDocument/2006/relationships">
+  <p:cSld>
+    <p:spTree>
+      <p:nvGrpSpPr>
+        <p:cNvPr id="1" name=""/>
+        <p:cNvGrpSpPr/>
+        <p:nvPr/>
+      </p:nvGrpSpPr>
+      <p:grpSpPr>
+        <a:xfrm>
+          <a:off x="0" y="0"/>
+          <a:ext cx="0" cy="0"/>
+          <a:chOff x="0" y="0"/>
+          <a:chExt cx="0" cy="0"/>
+        </a:xfrm>
+      </p:grpSpPr>
+      <p:sp>
+        <p:nvSpPr>
+          <p:cNvPr id="2" name="Slide Image Placeholder 1"/>
+          <p:cNvSpPr>
+            <a:spLocks noGrp="1"/>
+          </p:cNvSpPr>
+          <p:nvPr>
+            <p:ph type="sldImg" idx="2"/>
+          </p:nvPr>
+        </p:nvSpPr>
+        <p:spPr/>
+      </p:sp>
+      <p:sp>
+        <p:nvSpPr>
+          <p:cNvPr id="3" name="Notes Placeholder 2"/>
+          <p:cNvSpPr>
+            <a:spLocks noGrp="1"/>
+          </p:cNvSpPr>
+          <p:nvPr>
+            <p:ph type="body" idx="3" sz="quarter"/>
+          </p:nvPr>
+        </p:nvSpPr>
+        <p:spPr/>
+        <p:txBody>
+          <a:bodyPr/>
+          <a:lstStyle/>
+          <a:p>
+            <a:r>
+              <a:t>Fuera de la lamina (habla de la practica, no del tema):</a:t>
+            </a:r>
+          </a:p>
+          <a:p>
+            <a:r>
+              <a:t>- Y la rubrica pide los del plan real -- el «Rows Removed by Filter: 29919» y las 91 filas son justo las dos anclas con las que se verifica.</a:t>
+            </a:r>
+          </a:p>
+          <a:p>
+            <a:r>
+              <a:t>- Un alterno que cuesta puntos no es un alterno.</a:t>
+            </a:r>
+          </a:p>
+          <a:p>
+            <a:r>
+              <a:t>- Los milisegundos, ademas, cambian entre dos corridas seguidas en la misma maquina: lo que no cambia son los conteos de filas, y por eso los conteos son lo que se califica y los milisegundos solo tienen que ser coherentes entre si.</a:t>
+            </a:r>
+          </a:p>
+        </p:txBody>
+      </p:sp>
+      <p:sp>
+        <p:nvSpPr>
+          <p:cNvPr id="4" name="Slide Number Placeholder 3"/>
+          <p:cNvSpPr>
+            <a:spLocks noGrp="1"/>
+          </p:cNvSpPr>
+          <p:nvPr>
+            <p:ph type="sldNum" idx="5" sz="quarter"/>
+          </p:nvPr>
+        </p:nvSpPr>
+        <p:spPr/>
+      </p:sp>
+    </p:spTree>
+  </p:cSld>
+  <p:clrMapOvr>
+    <a:masterClrMapping/>
+  </p:clrMapOvr>
+</p:notes>
+</file>
+
+<file path=ppt/notesSlides/notesSlide15.xml><?xml version="1.0" encoding="utf-8"?>
+<p:notes xmlns:a="http://schemas.openxmlformats.org/drawingml/2006/main" xmlns:p="http://schemas.openxmlformats.org/presentationml/2006/main" xmlns:r="http://schemas.openxmlformats.org/officeDocument/2006/relationships">
+  <p:cSld>
+    <p:spTree>
+      <p:nvGrpSpPr>
+        <p:cNvPr id="1" name=""/>
+        <p:cNvGrpSpPr/>
+        <p:nvPr/>
+      </p:nvGrpSpPr>
+      <p:grpSpPr>
+        <a:xfrm>
+          <a:off x="0" y="0"/>
+          <a:ext cx="0" cy="0"/>
+          <a:chOff x="0" y="0"/>
+          <a:chExt cx="0" cy="0"/>
+        </a:xfrm>
+      </p:grpSpPr>
+      <p:sp>
+        <p:nvSpPr>
+          <p:cNvPr id="2" name="Slide Image Placeholder 1"/>
+          <p:cNvSpPr>
+            <a:spLocks noGrp="1"/>
+          </p:cNvSpPr>
+          <p:nvPr>
+            <p:ph type="sldImg" idx="2"/>
+          </p:nvPr>
+        </p:nvSpPr>
+        <p:spPr/>
+      </p:sp>
+      <p:sp>
+        <p:nvSpPr>
+          <p:cNvPr id="3" name="Notes Placeholder 2"/>
+          <p:cNvSpPr>
+            <a:spLocks noGrp="1"/>
+          </p:cNvSpPr>
+          <p:nvPr>
+            <p:ph type="body" idx="3" sz="quarter"/>
+          </p:nvPr>
+        </p:nvSpPr>
+        <p:spPr/>
+        <p:txBody>
+          <a:bodyPr/>
+          <a:lstStyle/>
+          <a:p>
+            <a:r>
+              <a:t>Cuatro preguntas aparecen siempre.</a:t>
+            </a:r>
+          </a:p>
+        </p:txBody>
+      </p:sp>
+      <p:sp>
+        <p:nvSpPr>
+          <p:cNvPr id="4" name="Slide Number Placeholder 3"/>
+          <p:cNvSpPr>
+            <a:spLocks noGrp="1"/>
+          </p:cNvSpPr>
+          <p:nvPr>
+            <p:ph type="sldNum" idx="5" sz="quarter"/>
+          </p:nvPr>
+        </p:nvSpPr>
+        <p:spPr/>
+      </p:sp>
+    </p:spTree>
+  </p:cSld>
+  <p:clrMapOvr>
+    <a:masterClrMapping/>
+  </p:clrMapOvr>
+</p:notes>
+</file>
+
+<file path=ppt/notesSlides/notesSlide16.xml><?xml version="1.0" encoding="utf-8"?>
+<p:notes xmlns:a="http://schemas.openxmlformats.org/drawingml/2006/main" xmlns:p="http://schemas.openxmlformats.org/presentationml/2006/main" xmlns:r="http://schemas.openxmlformats.org/officeDocument/2006/relationships">
+  <p:cSld>
+    <p:spTree>
+      <p:nvGrpSpPr>
+        <p:cNvPr id="1" name=""/>
+        <p:cNvGrpSpPr/>
+        <p:nvPr/>
+      </p:nvGrpSpPr>
+      <p:grpSpPr>
+        <a:xfrm>
+          <a:off x="0" y="0"/>
+          <a:ext cx="0" cy="0"/>
+          <a:chOff x="0" y="0"/>
+          <a:chExt cx="0" cy="0"/>
+        </a:xfrm>
+      </p:grpSpPr>
+      <p:sp>
+        <p:nvSpPr>
+          <p:cNvPr id="2" name="Slide Image Placeholder 1"/>
+          <p:cNvSpPr>
+            <a:spLocks noGrp="1"/>
+          </p:cNvSpPr>
+          <p:nvPr>
+            <p:ph type="sldImg" idx="2"/>
+          </p:nvPr>
+        </p:nvSpPr>
+        <p:spPr/>
+      </p:sp>
+      <p:sp>
+        <p:nvSpPr>
+          <p:cNvPr id="3" name="Notes Placeholder 2"/>
+          <p:cNvSpPr>
+            <a:spLocks noGrp="1"/>
+          </p:cNvSpPr>
+          <p:nvPr>
+            <p:ph type="body" idx="3" sz="quarter"/>
+          </p:nvPr>
+        </p:nvSpPr>
+        <p:spPr/>
+        <p:txBody>
+          <a:bodyPr/>
+          <a:lstStyle/>
+          <a:p>
+            <a:r>
+              <a:t>Fuera de la lamina (habla de la practica, no del tema):</a:t>
+            </a:r>
+          </a:p>
+          <a:p>
+            <a:r>
+              <a:t>- Es lo que se anota en la tabla de la pregunta 2.</a:t>
+            </a:r>
+          </a:p>
+          <a:p>
+            <a:r>
+              <a:t>- Es la pregunta 2 completa — 20 de los 100 puntos — y se responde leyendo estos campos, no pegando el plano tal cual</a:t>
+            </a:r>
+          </a:p>
+        </p:txBody>
+      </p:sp>
+      <p:sp>
+        <p:nvSpPr>
+          <p:cNvPr id="4" name="Slide Number Placeholder 3"/>
+          <p:cNvSpPr>
+            <a:spLocks noGrp="1"/>
+          </p:cNvSpPr>
+          <p:nvPr>
+            <p:ph type="sldNum" idx="5" sz="quarter"/>
+          </p:nvPr>
+        </p:nvSpPr>
+        <p:spPr/>
+      </p:sp>
+    </p:spTree>
+  </p:cSld>
+  <p:clrMapOvr>
+    <a:masterClrMapping/>
+  </p:clrMapOvr>
+</p:notes>
+</file>
+
+<file path=ppt/notesSlides/notesSlide17.xml><?xml version="1.0" encoding="utf-8"?>
+<p:notes xmlns:a="http://schemas.openxmlformats.org/drawingml/2006/main" xmlns:p="http://schemas.openxmlformats.org/presentationml/2006/main" xmlns:r="http://schemas.openxmlformats.org/officeDocument/2006/relationships">
+  <p:cSld>
+    <p:spTree>
+      <p:nvGrpSpPr>
+        <p:cNvPr id="1" name=""/>
+        <p:cNvGrpSpPr/>
+        <p:nvPr/>
+      </p:nvGrpSpPr>
+      <p:grpSpPr>
+        <a:xfrm>
+          <a:off x="0" y="0"/>
+          <a:ext cx="0" cy="0"/>
+          <a:chOff x="0" y="0"/>
+          <a:chExt cx="0" cy="0"/>
+        </a:xfrm>
+      </p:grpSpPr>
+      <p:sp>
+        <p:nvSpPr>
+          <p:cNvPr id="2" name="Slide Image Placeholder 1"/>
+          <p:cNvSpPr>
+            <a:spLocks noGrp="1"/>
+          </p:cNvSpPr>
+          <p:nvPr>
+            <p:ph type="sldImg" idx="2"/>
+          </p:nvPr>
+        </p:nvSpPr>
+        <p:spPr/>
+      </p:sp>
+      <p:sp>
+        <p:nvSpPr>
+          <p:cNvPr id="3" name="Notes Placeholder 2"/>
+          <p:cNvSpPr>
+            <a:spLocks noGrp="1"/>
+          </p:cNvSpPr>
+          <p:nvPr>
+            <p:ph type="body" idx="3" sz="quarter"/>
+          </p:nvPr>
+        </p:nvSpPr>
+        <p:spPr/>
+        <p:txBody>
+          <a:bodyPr/>
+          <a:lstStyle/>
+          <a:p>
+            <a:r>
+              <a:t>Fuera de la lamina (habla de la practica, no del tema):</a:t>
+            </a:r>
+          </a:p>
+          <a:p>
+            <a:r>
+              <a:t>- Es la pregunta 3 de la clase — 20 de los 100 puntos — y la afirmacion de la pregunta 4 que mas se falla</a:t>
+            </a:r>
+          </a:p>
+        </p:txBody>
+      </p:sp>
+      <p:sp>
+        <p:nvSpPr>
+          <p:cNvPr id="4" name="Slide Number Placeholder 3"/>
+          <p:cNvSpPr>
+            <a:spLocks noGrp="1"/>
+          </p:cNvSpPr>
+          <p:nvPr>
+            <p:ph type="sldNum" idx="5" sz="quarter"/>
+          </p:nvPr>
+        </p:nvSpPr>
+        <p:spPr/>
+      </p:sp>
+    </p:spTree>
+  </p:cSld>
+  <p:clrMapOvr>
+    <a:masterClrMapping/>
+  </p:clrMapOvr>
+</p:notes>
+</file>
+
+<file path=ppt/notesSlides/notesSlide18.xml><?xml version="1.0" encoding="utf-8"?>
+<p:notes xmlns:a="http://schemas.openxmlformats.org/drawingml/2006/main" xmlns:p="http://schemas.openxmlformats.org/presentationml/2006/main" xmlns:r="http://schemas.openxmlformats.org/officeDocument/2006/relationships">
+  <p:cSld>
+    <p:spTree>
+      <p:nvGrpSpPr>
+        <p:cNvPr id="1" name=""/>
+        <p:cNvGrpSpPr/>
+        <p:nvPr/>
+      </p:nvGrpSpPr>
+      <p:grpSpPr>
+        <a:xfrm>
+          <a:off x="0" y="0"/>
+          <a:ext cx="0" cy="0"/>
+          <a:chOff x="0" y="0"/>
+          <a:chExt cx="0" cy="0"/>
+        </a:xfrm>
+      </p:grpSpPr>
+      <p:sp>
+        <p:nvSpPr>
+          <p:cNvPr id="2" name="Slide Image Placeholder 1"/>
+          <p:cNvSpPr>
+            <a:spLocks noGrp="1"/>
+          </p:cNvSpPr>
+          <p:nvPr>
+            <p:ph type="sldImg" idx="2"/>
+          </p:nvPr>
+        </p:nvSpPr>
+        <p:spPr/>
+      </p:sp>
+      <p:sp>
+        <p:nvSpPr>
+          <p:cNvPr id="3" name="Notes Placeholder 2"/>
+          <p:cNvSpPr>
+            <a:spLocks noGrp="1"/>
+          </p:cNvSpPr>
+          <p:nvPr>
+            <p:ph type="body" idx="3" sz="quarter"/>
+          </p:nvPr>
+        </p:nvSpPr>
+        <p:spPr/>
+        <p:txBody>
+          <a:bodyPr/>
+          <a:lstStyle/>
+          <a:p>
+            <a:r>
+              <a:t>Fuera de la lamina (habla de la practica, no del tema):</a:t>
+            </a:r>
+          </a:p>
+          <a:p>
+            <a:r>
+              <a:t>- El `LIMIT` va en la consulta que se entrega, no en la que verifica.</a:t>
+            </a:r>
+          </a:p>
+          <a:p>
+            <a:r>
+              <a:t>- Vale puntos dos veces: los dos `COUNT(*)` de la pregunta 1 y el `EXCEPT` de la pregunta 3</a:t>
+            </a:r>
+          </a:p>
+        </p:txBody>
+      </p:sp>
+      <p:sp>
+        <p:nvSpPr>
+          <p:cNvPr id="4" name="Slide Number Placeholder 3"/>
+          <p:cNvSpPr>
+            <a:spLocks noGrp="1"/>
+          </p:cNvSpPr>
+          <p:nvPr>
+            <p:ph type="sldNum" idx="5" sz="quarter"/>
+          </p:nvPr>
+        </p:nvSpPr>
+        <p:spPr/>
+      </p:sp>
+    </p:spTree>
+  </p:cSld>
+  <p:clrMapOvr>
+    <a:masterClrMapping/>
+  </p:clrMapOvr>
+</p:notes>
+</file>
+
 <file path=ppt/notesSlides/notesSlide2.xml><?xml version="1.0" encoding="utf-8"?>
 <p:notes xmlns:a="http://schemas.openxmlformats.org/drawingml/2006/main" xmlns:p="http://schemas.openxmlformats.org/presentationml/2006/main" xmlns:r="http://schemas.openxmlformats.org/officeDocument/2006/relationships">
   <p:cSld>
@@ -614,12 +1345,17 @@
           <a:lstStyle/>
           <a:p>
             <a:r>
-              <a:t>De ahi que se comparen rows estimadas contra actual rows, que es literalmente una de las tres columnas que pide la pregunta 2: una divergencia de 2 veces es normal, una de 10 veces o mas es la senal clasica de estadisticas viejas o de predicados correlacionados, y esa es tambien la sexta afirmacion de la pregunta 4, que es correcta.</a:t>
-            </a:r>
-          </a:p>
-          <a:p>
-            <a:r>
-              <a:t>Conviene marcar la diferencia de palabras en voz alta, porque van a aparecer las dos hoy: predicados correlacionados es esto, un asunto de estimacion; subconsulta correlacionada, la de la pregunta 3, es otra cosa completamente distinta y es un asunto de numero de ejecuciones.</a:t>
+              <a:t>Fuera de la lamina (habla de la practica, no del tema):</a:t>
+            </a:r>
+          </a:p>
+          <a:p>
+            <a:r>
+              <a:t>- Y solo sirve para comparar planes del mismo motor; confundir cost con tiempo es el error mas frecuente al calificar esta pregunta.</a:t>
+            </a:r>
+          </a:p>
+          <a:p>
+            <a:r>
+              <a:t>- Advertencia que evita un accidente en clase: ANALYZE EJECUTA la sentencia, asi que sobre un UPDATE o un DELETE hay que envolverlo en BEGIN y ROLLBACK, lo cual ya anticipa la Clase 8; con SELECT no hay riesgo y el taller es solo de SELECT.</a:t>
             </a:r>
           </a:p>
         </p:txBody>
@@ -689,7 +1425,12 @@
           <a:lstStyle/>
           <a:p>
             <a:r>
-              <a:t>Dos terminos explican por que el motor decide lo que decide.</a:t>
+              <a:t>Fuera de la lamina (habla de la practica, no del tema):</a:t>
+            </a:r>
+          </a:p>
+          <a:p>
+            <a:r>
+              <a:t>- Un nodo de 0,5 ms con loops=2006 cuesta un segundo entero y aparece impreso como el mas barato de la pantalla; es exactamente lo que va a pasar en la pregunta 3.</a:t>
             </a:r>
           </a:p>
         </p:txBody>
@@ -759,12 +1500,23 @@
           <a:lstStyle/>
           <a:p>
             <a:r>
-              <a:t>Con eso se explica full table scan contra index scan sin caricaturas.</a:t>
-            </a:r>
-          </a:p>
-          <a:p>
-            <a:r>
-              <a:t>Por eso la Clase 7 tiene que MEDIRLO y no suponerlo.</a:t>
+              <a:t>Fuera de la lamina (habla de la practica, no del tema):</a:t>
+            </a:r>
+          </a:p>
+          <a:p>
+            <a:r>
+              <a:t>- En la base de la clase el ANALYZE ya esta corrido, y eso es deliberado: si faltara, el estimado contra real de la pregunta 2 saldria disparatado por una razon que no es el tema de la clase y el estudiante concluiria lo contrario de lo que hay que aprender.</a:t>
+            </a:r>
+          </a:p>
+          <a:p/>
+          <a:p>
+            <a:r>
+              <a:t>De ahi que se comparen rows estimadas contra actual rows, que es literalmente una de las tres columnas que pide la pregunta 2: una divergencia de 2 veces es normal, una de 10 veces o mas es la senal clasica de estadisticas viejas o de predicados correlacionados, y esa es tambien la sexta afirmacion de la pregunta 4, que es correcta.</a:t>
+            </a:r>
+          </a:p>
+          <a:p>
+            <a:r>
+              <a:t>Conviene marcar la diferencia de palabras en voz alta, porque van a aparecer las dos hoy: predicados correlacionados es esto, un asunto de estimacion; subconsulta correlacionada, la de la pregunta 3, es otra cosa completamente distinta y es un asunto de numero de ejecuciones.</a:t>
             </a:r>
           </a:p>
         </p:txBody>
@@ -834,12 +1586,7 @@
           <a:lstStyle/>
           <a:p>
             <a:r>
-              <a:t>Dos detalles que valen puntos y que el docente tiene que poder justificar en el momento.</a:t>
-            </a:r>
-          </a:p>
-          <a:p>
-            <a:r>
-              <a:t>No esta colgada.</a:t>
+              <a:t>Dos terminos explican por que el motor decide lo que decide.</a:t>
             </a:r>
           </a:p>
         </p:txBody>
@@ -909,22 +1656,12 @@
           <a:lstStyle/>
           <a:p>
             <a:r>
-              <a:t>Y se rompe sin avisar, porque ningun motor va a lanzar un error por eso.</a:t>
-            </a:r>
-          </a:p>
-          <a:p>
-            <a:r>
-              <a:t>Por eso el taller cobra la prueba dos veces, unos 6 de los 100 puntos, y hay dos formas segun lo que se compare.</a:t>
-            </a:r>
-          </a:p>
-          <a:p>
-            <a:r>
-              <a:t>Para conjuntos completos, donde el conteo puede coincidir con filas distintas, se usa EXCEPT en los DOS sentidos, y el docente tiene que saber por que son dos: A EXCEPT B devuelve lo que esta en A y no esta en B, asi que si sale vacio todavia puede haber filas de mas en B; se corren las dos direcciones unidas con UNION ALL y se exige cero filas en total.</a:t>
-            </a:r>
-          </a:p>
-          <a:p>
-            <a:r>
-              <a:t>Tres advertencias al calificar.</a:t>
+              <a:t>Fuera de la lamina (habla de la practica, no del tema):</a:t>
+            </a:r>
+          </a:p>
+          <a:p>
+            <a:r>
+              <a:t>- Los dos filtros juntos dejan 91 filas de 30.010, el 0,3 %, y ese 91 es el numero que el estudiante tiene que ver dos veces en la pregunta 1.</a:t>
             </a:r>
           </a:p>
         </p:txBody>
@@ -994,37 +1731,12 @@
           <a:lstStyle/>
           <a:p>
             <a:r>
-              <a:t>La version ANTES es SELECT * FROM cita c, mascota m, dueno d, veterinario v con las cuatro condiciones de union en el WHERE, to_char sobre la fecha y UPPER sobre el estado, y el docente debe saber que esta mal en cada linea.</a:t>
-            </a:r>
-          </a:p>
-          <a:p>
-            <a:r>
-              <a:t>SELECT * arrastra todas las columnas de las cuatro tablas cuando la pantalla de agenda necesita seis, lo cual multiplica el ancho de la fila y con el la memoria de trabajo del ordenamiento.</a:t>
-            </a:r>
-          </a:p>
-          <a:p>
-            <a:r>
-              <a:t>Las dos funciones sobre columnas se explicaron en el parrafo del predicado sargable.</a:t>
-            </a:r>
-          </a:p>
-          <a:p>
-            <a:r>
-              <a:t>Hay que decir aqui, y no despues, lo que la quinta afirmacion de la pregunta 4 castiga: cambiar la coma por JOIN...</a:t>
-            </a:r>
-          </a:p>
-          <a:p>
-            <a:r>
-              <a:t>ON no acelera nada, porque PostgreSQL normaliza las dos formas al mismo plan interno; se gana legibilidad y se gana que un ON faltante salte a la vista, o sea seguridad, no milisegundos.</a:t>
-            </a:r>
-          </a:p>
-          <a:p>
-            <a:r>
-              <a:t>Si el docente lo presenta como una mejora de rendimiento, esta ensenando justo la opcion por la que va a descontar.</a:t>
-            </a:r>
-          </a:p>
-          <a:p>
-            <a:r>
-              <a:t>La version DESPUES proyecta las seis columnas, escribe los tres JOIN...</a:t>
+              <a:t>Con eso se explica full table scan contra index scan sin caricaturas.</a:t>
+            </a:r>
+          </a:p>
+          <a:p>
+            <a:r>
+              <a:t>Por eso la Clase 7 tiene que MEDIRLO y no suponerlo.</a:t>
             </a:r>
           </a:p>
         </p:txBody>
@@ -1094,7 +1806,12 @@
           <a:lstStyle/>
           <a:p>
             <a:r>
-              <a:t>Lo que hay que documentar en papel, porque el entorno no lo permite y es literalmente la seccion 5 de la pregunta 5: los tiempos con la memoria intermedia vacia, ya que vaciarla exige privilegios de administrador; el comportamiento con varias sesiones compitiendo, que es la Clase 10; y cualquier comparacion por encima de unos cientos de miles de filas.</a:t>
+              <a:t>Fuera de la lamina (habla de la practica, no del tema):</a:t>
+            </a:r>
+          </a:p>
+          <a:p>
+            <a:r>
+              <a:t>- El antipatron de la funcion sobre la columna merece parrafo propio porque conecta con la Clase 7 y porque es el que la pregunta 4 pone de primero.</a:t>
             </a:r>
           </a:p>
         </p:txBody>
@@ -1164,7 +1881,23 @@
           <a:lstStyle/>
           <a:p>
             <a:r>
-              <a:t>Cuatro preguntas aparecen siempre.</a:t>
+              <a:t>Fuera de la lamina (habla de la practica, no del tema):</a:t>
+            </a:r>
+          </a:p>
+          <a:p>
+            <a:r>
+              <a:t>- Es la pregunta 3, otros 20 puntos, y la cuarta afirmacion de la pregunta 4 dice lo mismo.</a:t>
+            </a:r>
+          </a:p>
+          <a:p/>
+          <a:p>
+            <a:r>
+              <a:t>Dos detalles que valen puntos y que el docente tiene que poder justificar en el momento.</a:t>
+            </a:r>
+          </a:p>
+          <a:p>
+            <a:r>
+              <a:t>No esta colgada.</a:t>
             </a:r>
           </a:p>
         </p:txBody>
@@ -5043,7 +5776,7 @@
                 </a:solidFill>
                 <a:latin typeface="Calibri"/>
               </a:rPr>
-              <a:t>–   Las cifras que hay que usar son las de la base del taller, no unas inventadas</a:t>
+              <a:t>–   Las cifras que hay que usar son las de la base de la clase, no unas inventadas</a:t>
             </a:r>
           </a:p>
           <a:p>
@@ -5327,7 +6060,7 @@
                 </a:solidFill>
                 <a:latin typeface="Calibri"/>
               </a:rPr>
-              <a:t>–   Los dos filtros juntos dejan 91 filas de 30.010, el 0,3 %, y ese 91 es el numero que el estudiante tiene que ver dos veces en la pregunta 1.</a:t>
+              <a:t>–   Los dos filtros juntos dejan 91 filas de 30.010, el 0,3 %.</a:t>
             </a:r>
           </a:p>
         </p:txBody>
@@ -5815,7 +6548,7 @@
                 </a:solidFill>
                 <a:latin typeface="Calibri"/>
               </a:rPr>
-              <a:t>–   Las cuentas de la base del taller: cita con 30.010 filas de unos 60 bytes ocupa del orden de 2 MB, unas 230 a 250 paginas de 8 KB —el numero exacto lo dice el Buffers del EXPLAIN, no hace falta estimarlo—</a:t>
+              <a:t>–   Las cuentas de la base de la clase: cita con 30.010 filas de unos 60 bytes ocupa del orden de 2 MB, unas 230 a 250 paginas de 8 KB —el numero exacto lo dice el Buffers del EXPLAIN, no hace falta estimarlo—</a:t>
             </a:r>
           </a:p>
           <a:p>
@@ -6099,7 +6832,7 @@
                 </a:solidFill>
                 <a:latin typeface="Calibri"/>
               </a:rPr>
-              <a:t>–   Y aqui esta el punto pedagogico central, que cambio de sitio y hay que decirlo bien: el problema de las 20 filas es el de la base propia del estudiante, la que cargo en la Clase 1, no el del taller.</a:t>
+              <a:t>–   Y aqui esta el punto pedagogico central, que cambio de sitio y hay que decirlo bien: el problema de las 20 filas es el de la base propia del estudiante, la que cargo en la Clase 1, no el de la clase.</a:t>
             </a:r>
           </a:p>
           <a:p>
@@ -6367,7 +7100,7 @@
                 </a:solidFill>
                 <a:latin typeface="Calibri"/>
               </a:rPr>
-              <a:t>–   Justamente por eso el taller de hoy NO se hace sobre la base propia sino en la plataforma del curso, cuyo setup siembra las 30.010 citas, y por eso el script de la demo tambien las siembra: para que el docente y el estudiante midan sobre lo mismo.</a:t>
+              <a:t>–   Justamente por eso hoy no se mide sobre la base propia sino sobre una base sembrada con 30.010 citas, y por eso el script de la demo tambien las siembra: para que el docente y el estudiante midan sobre lo mismo.</a:t>
             </a:r>
           </a:p>
           <a:p>
@@ -6603,7 +7336,7 @@
                 </a:solidFill>
                 <a:latin typeface="Calibri"/>
               </a:rPr>
-              <a:t>–   El antipatron de la funcion sobre la columna merece parrafo propio porque conecta con la Clase 7 y porque es el que la pregunta 4 pone de primero.</a:t>
+              <a:t>–   Un predicado es sargable, de Search ARGument ABLE, cuando el motor puede resolverlo navegando un indice, y para eso la columna indexada debe aparecer sola a un lado de la comparacion.</a:t>
             </a:r>
           </a:p>
           <a:p>
@@ -6619,23 +7352,7 @@
                 </a:solidFill>
                 <a:latin typeface="Calibri"/>
               </a:rPr>
-              <a:t>–   Un predicado es sargable, de Search ARGument ABLE, cuando el motor puede resolverlo navegando un indice, y para eso la columna indexada debe aparecer sola a un lado de la comparacion.</a:t>
-            </a:r>
-          </a:p>
-          <a:p>
-            <a:pPr>
-              <a:spcAft>
-                <a:spcPts val="800"/>
-              </a:spcAft>
-            </a:pPr>
-            <a:r>
-              <a:rPr sz="2000" b="0" i="0">
-                <a:solidFill>
-                  <a:srgbClr val="333333"/>
-                </a:solidFill>
-                <a:latin typeface="Calibri"/>
-              </a:rPr>
-              <a:t>–   Las dos formas no sargables estan las dos en la consulta ANTES del taller: to_char(c.fecha_hora, 'YYYY-MM-DD') = '2026-03-10' y UPPER(c.estado) = 'PROGRAMADA'.</a:t>
+              <a:t>–   Las dos formas no sargables estan las dos en la consulta ANTES de la clase: to_char(c.fecha_hora, 'YYYY-MM-DD') = '2026-03-10' y UPPER(c.estado) = 'PROGRAMADA'.</a:t>
             </a:r>
           </a:p>
           <a:p>
@@ -6903,7 +7620,7 @@
                 </a:solidFill>
                 <a:latin typeface="Calibri"/>
               </a:rPr>
-              <a:t>–   La reescritura correcta casi siempre es un rango, que es lo que pide el taller: WHERE c.fecha_hora &gt;= TIMESTAMP '2026-03-10 00:00:00' AND c.fecha_hora &lt; TIMESTAMP '2026-03-11 00:00:00'.</a:t>
+              <a:t>–   La reescritura correcta casi siempre es un rango: WHERE c.fecha_hora &gt;= TIMESTAMP '2026-03-10 00:00:00' AND c.fecha_hora &lt; TIMESTAMP '2026-03-11 00:00:00'.</a:t>
             </a:r>
           </a:p>
           <a:p>
@@ -7466,7 +8183,7 @@
                 </a:solidFill>
                 <a:latin typeface="Calibri"/>
               </a:rPr>
-              <a:t>PostgreSQL en el navegador + Google Docs</a:t>
+              <a:t>PostgreSQL + Google Docs</a:t>
             </a:r>
             <a:r>
               <a:rPr sz="2000" b="0" i="0">
@@ -8092,7 +8809,7 @@
                 </a:solidFill>
                 <a:latin typeface="Calibri"/>
               </a:rPr>
-              <a:t>–   Es la pregunta 3, otros 20 puntos, y la cuarta afirmacion de la pregunta 4 dice lo mismo.</a:t>
+              <a:t>–   Una subconsulta es correlacionada cuando menciona una columna de la consulta exterior; si ademas esta en la lista de columnas, el motor no puede calcularla una vez y reusarla</a:t>
             </a:r>
           </a:p>
           <a:p>
@@ -8108,7 +8825,7 @@
                 </a:solidFill>
                 <a:latin typeface="Calibri"/>
               </a:rPr>
-              <a:t>–   Una subconsulta es correlacionada cuando menciona una columna de la consulta exterior; si ademas esta en la lista de columnas, el motor no puede calcularla una vez y reusarla</a:t>
+              <a:t>–   Porque depende de la fila que se este mirando, asi que la ejecuta una vez por cada fila del exterior.</a:t>
             </a:r>
           </a:p>
           <a:p>
@@ -8124,23 +8841,7 @@
                 </a:solidFill>
                 <a:latin typeface="Calibri"/>
               </a:rPr>
-              <a:t>–   Porque depende de la fila que se este mirando, asi que la ejecuta una vez por cada fila del exterior.</a:t>
-            </a:r>
-          </a:p>
-          <a:p>
-            <a:pPr>
-              <a:spcAft>
-                <a:spcPts val="800"/>
-              </a:spcAft>
-            </a:pPr>
-            <a:r>
-              <a:rPr sz="2000" b="0" i="0">
-                <a:solidFill>
-                  <a:srgbClr val="333333"/>
-                </a:solidFill>
-                <a:latin typeface="Calibri"/>
-              </a:rPr>
-              <a:t>–   El reporte de ranking de duenos del taller la tiene: (SELECT COUNT(*) FROM cita c JOIN mascota m ON m.id_mascota = c.id_mascota WHERE m.id_dueno = d.id_dueno) AS total_citas, con FROM dueno d.</a:t>
+              <a:t>–   El reporte de ranking de duenos de la clase la tiene: (SELECT COUNT(*) FROM cita c JOIN mascota m ON m.id_mascota = c.id_mascota WHERE m.id_dueno = d.id_dueno) AS total_citas, con FROM dueno d.</a:t>
             </a:r>
           </a:p>
           <a:p>
@@ -8660,7 +9361,7 @@
                 </a:solidFill>
                 <a:latin typeface="Calibri"/>
               </a:rPr>
-              <a:t>–   El sintoma es exacto y se puede proyectar en treinta segundos: los duenos 2001 a 2006 de la base del taller no tienen mascotas, asi que su respuesta correcta es 0 y con COUNT(*) dicen 1.</a:t>
+              <a:t>–   El sintoma es exacto y se puede proyectar en treinta segundos: los duenos 2001 a 2006 de la base de la clase no tienen mascotas, asi que su respuesta correcta es 0 y con COUNT(*) dicen 1.</a:t>
             </a:r>
           </a:p>
           <a:p>
@@ -9432,7 +10133,7 @@
                 </a:solidFill>
                 <a:latin typeface="Calibri"/>
               </a:rPr>
-              <a:t>–   EXCEPT elimina duplicados, de modo que si el conjunto puede traer filas repetidas hay que usar EXCEPT ALL o incluir la llave; en el ranking del taller no ocurre, porque hay una fila por dueno.</a:t>
+              <a:t>–   EXCEPT elimina duplicados, de modo que si el conjunto puede traer filas repetidas hay que usar EXCEPT ALL o incluir la llave; en el ranking de la clase no ocurre, porque hay una fila por dueno.</a:t>
             </a:r>
           </a:p>
           <a:p>
@@ -9668,7 +10369,7 @@
                 </a:solidFill>
                 <a:latin typeface="Calibri"/>
               </a:rPr>
-              <a:t>–   El script Codigo/06_opt_consultas.sql es autocontenido y siembra el mismo volumen que la plataforma del curso, de modo que los numeros de la demo son los que el estudiante va a ver en su pantalla</a:t>
+              <a:t>–   El script Codigo/06_opt_consultas.sql es autocontenido y siembra el mismo volumen que PostgreSQL en el navegador, de modo que los numeros de la demo son los que el estudiante va a ver en su pantalla</a:t>
             </a:r>
           </a:p>
           <a:p>
@@ -10207,22 +10908,6 @@
               <a:t>–   El script cierra con los bloques de la subconsulta correlacionada y con las dos pruebas de equivalencia, incluido el contraejemplo de COUNT(*) contra COUNT(c.id_cita) sobre los duenos 2001 a 2006</a:t>
             </a:r>
           </a:p>
-          <a:p>
-            <a:pPr>
-              <a:spcAft>
-                <a:spcPts val="800"/>
-              </a:spcAft>
-            </a:pPr>
-            <a:r>
-              <a:rPr sz="2000" b="0" i="0">
-                <a:solidFill>
-                  <a:srgbClr val="333333"/>
-                </a:solidFill>
-                <a:latin typeface="Calibri"/>
-              </a:rPr>
-              <a:t>–   Que es medio minuto de demo y ahorra la mitad de los reclamos de la pregunta 3.</a:t>
-            </a:r>
-          </a:p>
         </p:txBody>
       </p:sp>
       <p:sp>
@@ -11292,7 +11977,7 @@
                 </a:solidFill>
                 <a:latin typeface="Calibri"/>
               </a:rPr>
-              <a:t>–   La herramienta del dia es la plataforma del curso, que corre PostgreSQL compilado para el navegador, y ahi mismo se califica el taller: es el unico entorno de la clase que trae las 30.010 citas ya sembradas y las estadisticas ya recolectadas.</a:t>
+              <a:t>–   La herramienta del dia es PostgreSQL compilado para el navegador: es el unico entorno de la clase que trae las 30.010 citas ya sembradas y las estadisticas ya recolectadas.</a:t>
             </a:r>
           </a:p>
           <a:p>
@@ -11308,7 +11993,7 @@
                 </a:solidFill>
                 <a:latin typeface="Calibri"/>
               </a:rPr>
-              <a:t>–   Soporta EXPLAIN, EXPLAIN ANALYZE y la opcion BUFFERS; si en alguna maquina BUFFERS no responde, el enunciado ya autoriza usar EXPLAIN ANALYZE a secas y declararlo en la seccion 5 de la pregunta 5, asi que eso no cuesta puntos.</a:t>
+              <a:t>–   Soporta EXPLAIN, EXPLAIN ANALYZE y la opcion BUFFERS; si en alguna maquina BUFFERS no responde.</a:t>
             </a:r>
           </a:p>
           <a:p>
@@ -11560,7 +12245,7 @@
                 </a:solidFill>
                 <a:latin typeface="Calibri"/>
               </a:rPr>
-              <a:t>–   Y la rubrica pide los del plan real -- el «Rows Removed by Filter: 29919» y las 91 filas son justo las dos anclas con las que se verifica.</a:t>
+              <a:t>–   Tampoco tiene sentido hoy un comparador de motores, porque el motor de hoy es uno solo.</a:t>
             </a:r>
           </a:p>
           <a:p>
@@ -11576,39 +12261,7 @@
                 </a:solidFill>
                 <a:latin typeface="Calibri"/>
               </a:rPr>
-              <a:t>–   Un alterno que cuesta puntos no es un alterno.</a:t>
-            </a:r>
-          </a:p>
-          <a:p>
-            <a:pPr>
-              <a:spcAft>
-                <a:spcPts val="800"/>
-              </a:spcAft>
-            </a:pPr>
-            <a:r>
-              <a:rPr sz="2000" b="0" i="0">
-                <a:solidFill>
-                  <a:srgbClr val="333333"/>
-                </a:solidFill>
-                <a:latin typeface="Calibri"/>
-              </a:rPr>
-              <a:t>–   Tampoco tiene sentido hoy un comparador de motores, porque el motor de hoy es uno solo.</a:t>
-            </a:r>
-          </a:p>
-          <a:p>
-            <a:pPr>
-              <a:spcAft>
-                <a:spcPts val="800"/>
-              </a:spcAft>
-            </a:pPr>
-            <a:r>
-              <a:rPr sz="2000" b="0" i="0">
-                <a:solidFill>
-                  <a:srgbClr val="333333"/>
-                </a:solidFill>
-                <a:latin typeface="Calibri"/>
-              </a:rPr>
-              <a:t>–   Los milisegundos, ademas, cambian entre dos corridas seguidas en la misma maquina: lo que no cambia son los conteos de filas, y por eso los conteos son lo que se califica y los milisegundos solo tienen que ser coherentes entre si.</a:t>
+              <a:t>–   Los milisegundos, ademas, cambian entre dos corridas seguidas en la misma maquina: lo que no cambia son los conteos de filas.</a:t>
             </a:r>
           </a:p>
         </p:txBody>
@@ -11860,7 +12513,7 @@
                 </a:solidFill>
                 <a:latin typeface="Calibri"/>
               </a:rPr>
-              <a:t>–   Cuanto debe bajar el tiempo para que cuente como optimizada: la evidencia que pide el entregable no es un porcentaje sino un cambio verificable y leido del plan</a:t>
+              <a:t>–   Cuanto debe bajar el tiempo para que cuente como optimizada: la evidencia no es un porcentaje sino un cambio verificable y leido del plan</a:t>
             </a:r>
           </a:p>
           <a:p>
@@ -14731,7 +15384,7 @@
         <p:spPr>
           <a:xfrm>
             <a:off x="0" y="0"/>
-            <a:ext cx="12191695" cy="1170432"/>
+            <a:ext cx="12191695" cy="960120"/>
           </a:xfrm>
           <a:prstGeom prst="rect">
             <a:avLst/>
@@ -14773,7 +15426,7 @@
         </p:nvSpPr>
         <p:spPr>
           <a:xfrm>
-            <a:off x="0" y="1170432"/>
+            <a:off x="0" y="960120"/>
             <a:ext cx="12191695" cy="41148"/>
           </a:xfrm>
           <a:prstGeom prst="rect">
@@ -14817,7 +15470,7 @@
         <p:spPr>
           <a:xfrm>
             <a:off x="457200" y="164592"/>
-            <a:ext cx="11277295" cy="384048"/>
+            <a:ext cx="11277295" cy="502920"/>
           </a:xfrm>
           <a:prstGeom prst="rect">
             <a:avLst/>
@@ -14850,42 +15503,8 @@
         </p:nvSpPr>
         <p:spPr>
           <a:xfrm>
-            <a:off x="457200" y="566928"/>
-            <a:ext cx="11277295" cy="411480"/>
-          </a:xfrm>
-          <a:prstGeom prst="rect">
-            <a:avLst/>
-          </a:prstGeom>
-          <a:noFill/>
-        </p:spPr>
-        <p:txBody>
-          <a:bodyPr wrap="square">
-            <a:spAutoFit/>
-          </a:bodyPr>
-          <a:lstStyle/>
-          <a:p>
-            <a:r>
-              <a:rPr sz="1400" b="0" i="0">
-                <a:solidFill>
-                  <a:srgbClr val="B8D8EE"/>
-                </a:solidFill>
-                <a:latin typeface="Calibri"/>
-              </a:rPr>
-              <a:t>Es la pregunta 2 completa — 20 de los 100 puntos — y se responde leyendo estos campos, no pegando el plano tal cual</a:t>
-            </a:r>
-          </a:p>
-        </p:txBody>
-      </p:sp>
-      <p:sp>
-        <p:nvSpPr>
-          <p:cNvPr id="6" name="TextBox 5"/>
-          <p:cNvSpPr txBox="1"/>
-          <p:nvPr/>
-        </p:nvSpPr>
-        <p:spPr>
-          <a:xfrm>
-            <a:off x="457200" y="1380744"/>
-            <a:ext cx="11277295" cy="5020056"/>
+            <a:off x="457200" y="1170432"/>
+            <a:ext cx="11277295" cy="5230368"/>
           </a:xfrm>
           <a:prstGeom prst="rect">
             <a:avLst/>
@@ -14904,7 +15523,7 @@
               </a:spcAft>
             </a:pPr>
             <a:r>
-              <a:rPr sz="1900" b="0" i="0">
+              <a:rPr sz="2000" b="0" i="0">
                 <a:solidFill>
                   <a:srgbClr val="333333"/>
                 </a:solidFill>
@@ -14913,7 +15532,7 @@
               <a:t>–   </a:t>
             </a:r>
             <a:r>
-              <a:rPr sz="1900" b="1" i="0">
+              <a:rPr sz="2000" b="1" i="0">
                 <a:solidFill>
                   <a:srgbClr val="333333"/>
                 </a:solidFill>
@@ -14922,7 +15541,7 @@
               <a:t>El orden de lectura.</a:t>
             </a:r>
             <a:r>
-              <a:rPr sz="1900" b="0" i="0">
+              <a:rPr sz="2000" b="0" i="0">
                 <a:solidFill>
                   <a:srgbClr val="333333"/>
                 </a:solidFill>
@@ -14931,7 +15550,7 @@
               <a:t> El plan </a:t>
             </a:r>
             <a:r>
-              <a:rPr sz="1900" b="1" i="0">
+              <a:rPr sz="2000" b="1" i="0">
                 <a:solidFill>
                   <a:srgbClr val="333333"/>
                 </a:solidFill>
@@ -14940,7 +15559,7 @@
               <a:t>no</a:t>
             </a:r>
             <a:r>
-              <a:rPr sz="1900" b="0" i="0">
+              <a:rPr sz="2000" b="0" i="0">
                 <a:solidFill>
                   <a:srgbClr val="333333"/>
                 </a:solidFill>
@@ -14949,7 +15568,7 @@
               <a:t> es una lista de pasos de arriba hacia abajo: es un arbol. Los nodos </a:t>
             </a:r>
             <a:r>
-              <a:rPr sz="1900" b="1" i="0">
+              <a:rPr sz="2000" b="1" i="0">
                 <a:solidFill>
                   <a:srgbClr val="333333"/>
                 </a:solidFill>
@@ -14958,7 +15577,7 @@
               <a:t>mas indentados son las hojas</a:t>
             </a:r>
             <a:r>
-              <a:rPr sz="1900" b="0" i="0">
+              <a:rPr sz="2000" b="0" i="0">
                 <a:solidFill>
                   <a:srgbClr val="333333"/>
                 </a:solidFill>
@@ -14967,7 +15586,7 @@
               <a:t> y se ejecutan primero; cada nodo consume las filas de sus hijos. La </a:t>
             </a:r>
             <a:r>
-              <a:rPr sz="1900" b="1" i="0">
+              <a:rPr sz="2000" b="1" i="0">
                 <a:solidFill>
                   <a:srgbClr val="333333"/>
                 </a:solidFill>
@@ -14976,7 +15595,7 @@
               <a:t>primera linea impresa es la ULTIMA operacion</a:t>
             </a:r>
             <a:r>
-              <a:rPr sz="1900" b="0" i="0">
+              <a:rPr sz="2000" b="0" i="0">
                 <a:solidFill>
                   <a:srgbClr val="333333"/>
                 </a:solidFill>
@@ -14992,7 +15611,7 @@
               </a:spcAft>
             </a:pPr>
             <a:r>
-              <a:rPr sz="1900" b="0" i="0">
+              <a:rPr sz="2000" b="0" i="0">
                 <a:solidFill>
                   <a:srgbClr val="333333"/>
                 </a:solidFill>
@@ -15001,7 +15620,7 @@
               <a:t>–   </a:t>
             </a:r>
             <a:r>
-              <a:rPr sz="1900" b="1" i="0">
+              <a:rPr sz="2000" b="1" i="0">
                 <a:solidFill>
                   <a:srgbClr val="333333"/>
                 </a:solidFill>
@@ -15010,7 +15629,7 @@
               <a:t>Los cuatro campos.</a:t>
             </a:r>
             <a:r>
-              <a:rPr sz="1900" b="0" i="0">
+              <a:rPr sz="2000" b="0" i="0">
                 <a:solidFill>
                   <a:srgbClr val="333333"/>
                 </a:solidFill>
@@ -15019,7 +15638,7 @@
               <a:t> «cost=270.00..4821.50» son arranque y total en una unidad </a:t>
             </a:r>
             <a:r>
-              <a:rPr sz="1900" b="1" i="0">
+              <a:rPr sz="2000" b="1" i="0">
                 <a:solidFill>
                   <a:srgbClr val="333333"/>
                 </a:solidFill>
@@ -15028,7 +15647,7 @@
               <a:t>relativa</a:t>
             </a:r>
             <a:r>
-              <a:rPr sz="1900" b="0" i="0">
+              <a:rPr sz="2000" b="0" i="0">
                 <a:solidFill>
                   <a:srgbClr val="333333"/>
                 </a:solidFill>
@@ -15037,7 +15656,7 @@
               <a:t> (1.0 = leer una pagina de 8 KB), </a:t>
             </a:r>
             <a:r>
-              <a:rPr sz="1900" b="1" i="0">
+              <a:rPr sz="2000" b="1" i="0">
                 <a:solidFill>
                   <a:srgbClr val="333333"/>
                 </a:solidFill>
@@ -15046,7 +15665,7 @@
               <a:t>no</a:t>
             </a:r>
             <a:r>
-              <a:rPr sz="1900" b="0" i="0">
+              <a:rPr sz="2000" b="0" i="0">
                 <a:solidFill>
                   <a:srgbClr val="333333"/>
                 </a:solidFill>
@@ -15055,7 +15674,7 @@
               <a:t> milisegundos; «rows=» son las filas que el motor </a:t>
             </a:r>
             <a:r>
-              <a:rPr sz="1900" b="1" i="0">
+              <a:rPr sz="2000" b="1" i="0">
                 <a:solidFill>
                   <a:srgbClr val="333333"/>
                 </a:solidFill>
@@ -15064,7 +15683,7 @@
               <a:t>estima</a:t>
             </a:r>
             <a:r>
-              <a:rPr sz="1900" b="0" i="0">
+              <a:rPr sz="2000" b="0" i="0">
                 <a:solidFill>
                   <a:srgbClr val="333333"/>
                 </a:solidFill>
@@ -15073,7 +15692,7 @@
               <a:t>; «width=» el ancho de la fila en bytes; «loops=» cuantas </a:t>
             </a:r>
             <a:r>
-              <a:rPr sz="1900" b="1" i="0">
+              <a:rPr sz="2000" b="1" i="0">
                 <a:solidFill>
                   <a:srgbClr val="333333"/>
                 </a:solidFill>
@@ -15082,7 +15701,7 @@
               <a:t>veces se repitio</a:t>
             </a:r>
             <a:r>
-              <a:rPr sz="1900" b="0" i="0">
+              <a:rPr sz="2000" b="0" i="0">
                 <a:solidFill>
                   <a:srgbClr val="333333"/>
                 </a:solidFill>
@@ -15098,7 +15717,7 @@
               </a:spcAft>
             </a:pPr>
             <a:r>
-              <a:rPr sz="1900" b="0" i="0">
+              <a:rPr sz="2000" b="0" i="0">
                 <a:solidFill>
                   <a:srgbClr val="333333"/>
                 </a:solidFill>
@@ -15107,7 +15726,7 @@
               <a:t>–   </a:t>
             </a:r>
             <a:r>
-              <a:rPr sz="1900" b="1" i="0">
+              <a:rPr sz="2000" b="1" i="0">
                 <a:solidFill>
                   <a:srgbClr val="333333"/>
                 </a:solidFill>
@@ -15116,7 +15735,7 @@
               <a:t>«EXPLAIN» estima, «EXPLAIN ANALYZE» ejecuta.</a:t>
             </a:r>
             <a:r>
-              <a:rPr sz="1900" b="0" i="0">
+              <a:rPr sz="2000" b="0" i="0">
                 <a:solidFill>
                   <a:srgbClr val="333333"/>
                 </a:solidFill>
@@ -15125,7 +15744,7 @@
               <a:t> El segundo agrega «actual time=», «actual rows=» y el «Execution Time» final. Y ejecuta </a:t>
             </a:r>
             <a:r>
-              <a:rPr sz="1900" b="1" i="0">
+              <a:rPr sz="2000" b="1" i="0">
                 <a:solidFill>
                   <a:srgbClr val="333333"/>
                 </a:solidFill>
@@ -15134,7 +15753,7 @@
               <a:t>de verdad</a:t>
             </a:r>
             <a:r>
-              <a:rPr sz="1900" b="0" i="0">
+              <a:rPr sz="2000" b="0" i="0">
                 <a:solidFill>
                   <a:srgbClr val="333333"/>
                 </a:solidFill>
@@ -15150,7 +15769,7 @@
               </a:spcAft>
             </a:pPr>
             <a:r>
-              <a:rPr sz="1900" b="0" i="0">
+              <a:rPr sz="2000" b="0" i="0">
                 <a:solidFill>
                   <a:srgbClr val="333333"/>
                 </a:solidFill>
@@ -15159,7 +15778,7 @@
               <a:t>–   </a:t>
             </a:r>
             <a:r>
-              <a:rPr sz="1900" b="1" i="0">
+              <a:rPr sz="2000" b="1" i="0">
                 <a:solidFill>
                   <a:srgbClr val="333333"/>
                 </a:solidFill>
@@ -15168,7 +15787,7 @@
               <a:t>Estimado contra real: la senal.</a:t>
             </a:r>
             <a:r>
-              <a:rPr sz="1900" b="0" i="0">
+              <a:rPr sz="2000" b="0" i="0">
                 <a:solidFill>
                   <a:srgbClr val="333333"/>
                 </a:solidFill>
@@ -15177,7 +15796,7 @@
               <a:t> Una divergencia de 2 veces es normal; de </a:t>
             </a:r>
             <a:r>
-              <a:rPr sz="1900" b="1" i="0">
+              <a:rPr sz="2000" b="1" i="0">
                 <a:solidFill>
                   <a:srgbClr val="333333"/>
                 </a:solidFill>
@@ -15186,13 +15805,13 @@
               <a:t>10 veces o mas</a:t>
             </a:r>
             <a:r>
-              <a:rPr sz="1900" b="0" i="0">
-                <a:solidFill>
-                  <a:srgbClr val="333333"/>
-                </a:solidFill>
-                <a:latin typeface="Calibri"/>
-              </a:rPr>
-              <a:t> delata estadisticas viejas o predicados que el motor cree independientes y no lo son. Es lo que se anota en la tabla de la pregunta 2.</a:t>
+              <a:rPr sz="2000" b="0" i="0">
+                <a:solidFill>
+                  <a:srgbClr val="333333"/>
+                </a:solidFill>
+                <a:latin typeface="Calibri"/>
+              </a:rPr>
+              <a:t> delata estadisticas viejas o predicados que el motor cree independientes y no lo son.</a:t>
             </a:r>
           </a:p>
           <a:p>
@@ -15202,7 +15821,7 @@
               </a:spcAft>
             </a:pPr>
             <a:r>
-              <a:rPr sz="1900" b="0" i="0">
+              <a:rPr sz="2000" b="0" i="0">
                 <a:solidFill>
                   <a:srgbClr val="333333"/>
                 </a:solidFill>
@@ -15211,7 +15830,7 @@
               <a:t>–   </a:t>
             </a:r>
             <a:r>
-              <a:rPr sz="1900" b="1" i="0">
+              <a:rPr sz="2000" b="1" i="0">
                 <a:solidFill>
                   <a:srgbClr val="333333"/>
                 </a:solidFill>
@@ -15220,7 +15839,7 @@
               <a:t>El nodo mas costoso, sin trampa.</a:t>
             </a:r>
             <a:r>
-              <a:rPr sz="1900" b="0" i="0">
+              <a:rPr sz="2000" b="0" i="0">
                 <a:solidFill>
                   <a:srgbClr val="333333"/>
                 </a:solidFill>
@@ -15229,7 +15848,7 @@
               <a:t> El tiempo de un nodo </a:t>
             </a:r>
             <a:r>
-              <a:rPr sz="1900" b="1" i="0">
+              <a:rPr sz="2000" b="1" i="0">
                 <a:solidFill>
                   <a:srgbClr val="333333"/>
                 </a:solidFill>
@@ -15238,7 +15857,7 @@
               <a:t>incluye el de sus hijos</a:t>
             </a:r>
             <a:r>
-              <a:rPr sz="1900" b="0" i="0">
+              <a:rPr sz="2000" b="0" i="0">
                 <a:solidFill>
                   <a:srgbClr val="333333"/>
                 </a:solidFill>
@@ -15247,7 +15866,7 @@
               <a:t>, y «actual time» es </a:t>
             </a:r>
             <a:r>
-              <a:rPr sz="1900" b="1" i="0">
+              <a:rPr sz="2000" b="1" i="0">
                 <a:solidFill>
                   <a:srgbClr val="333333"/>
                 </a:solidFill>
@@ -15256,7 +15875,7 @@
               <a:t>por vuelta</a:t>
             </a:r>
             <a:r>
-              <a:rPr sz="1900" b="0" i="0">
+              <a:rPr sz="2000" b="0" i="0">
                 <a:solidFill>
                   <a:srgbClr val="333333"/>
                 </a:solidFill>
@@ -15269,7 +15888,7 @@
       </p:sp>
       <p:sp>
         <p:nvSpPr>
-          <p:cNvPr id="7" name="TextBox 6"/>
+          <p:cNvPr id="6" name="TextBox 5"/>
           <p:cNvSpPr txBox="1"/>
           <p:nvPr/>
         </p:nvSpPr>
@@ -15546,7 +16165,7 @@
                 </a:solidFill>
                 <a:latin typeface="Calibri"/>
               </a:rPr>
-              <a:t>–   El numero que hace visible el problema, y conviene decirlo con la consulta del taller en pantalla, que cruza cuatro tablas: con tres tablas hay 6 ordenes de cruce posibles (3 factorial), con las cuatro de la agenda hay 24, con cinco 120</a:t>
+              <a:t>–   El numero que hace visible el problema, y conviene decirlo con la consulta de la clase en pantalla, que cruza cuatro tablas: con tres tablas hay 6 ordenes de cruce posibles (3 factorial), con las cuatro de la agenda hay 24, con cinco 120</a:t>
             </a:r>
           </a:p>
         </p:txBody>
@@ -15621,7 +16240,7 @@
         <p:spPr>
           <a:xfrm>
             <a:off x="0" y="0"/>
-            <a:ext cx="12191695" cy="1170432"/>
+            <a:ext cx="12191695" cy="960120"/>
           </a:xfrm>
           <a:prstGeom prst="rect">
             <a:avLst/>
@@ -15663,7 +16282,7 @@
         </p:nvSpPr>
         <p:spPr>
           <a:xfrm>
-            <a:off x="0" y="1170432"/>
+            <a:off x="0" y="960120"/>
             <a:ext cx="12191695" cy="41148"/>
           </a:xfrm>
           <a:prstGeom prst="rect">
@@ -15707,7 +16326,7 @@
         <p:spPr>
           <a:xfrm>
             <a:off x="457200" y="164592"/>
-            <a:ext cx="11277295" cy="384048"/>
+            <a:ext cx="11277295" cy="502920"/>
           </a:xfrm>
           <a:prstGeom prst="rect">
             <a:avLst/>
@@ -15740,42 +16359,8 @@
         </p:nvSpPr>
         <p:spPr>
           <a:xfrm>
-            <a:off x="457200" y="566928"/>
-            <a:ext cx="11277295" cy="411480"/>
-          </a:xfrm>
-          <a:prstGeom prst="rect">
-            <a:avLst/>
-          </a:prstGeom>
-          <a:noFill/>
-        </p:spPr>
-        <p:txBody>
-          <a:bodyPr wrap="square">
-            <a:spAutoFit/>
-          </a:bodyPr>
-          <a:lstStyle/>
-          <a:p>
-            <a:r>
-              <a:rPr sz="1400" b="0" i="0">
-                <a:solidFill>
-                  <a:srgbClr val="B8D8EE"/>
-                </a:solidFill>
-                <a:latin typeface="Calibri"/>
-              </a:rPr>
-              <a:t>Es la pregunta 3 del taller — 20 de los 100 puntos — y la afirmacion de la pregunta 4 que mas se falla</a:t>
-            </a:r>
-          </a:p>
-        </p:txBody>
-      </p:sp>
-      <p:sp>
-        <p:nvSpPr>
-          <p:cNvPr id="6" name="TextBox 5"/>
-          <p:cNvSpPr txBox="1"/>
-          <p:nvPr/>
-        </p:nvSpPr>
-        <p:spPr>
-          <a:xfrm>
-            <a:off x="457200" y="1380744"/>
-            <a:ext cx="11277295" cy="5020056"/>
+            <a:off x="457200" y="1170432"/>
+            <a:ext cx="11277295" cy="5230368"/>
           </a:xfrm>
           <a:prstGeom prst="rect">
             <a:avLst/>
@@ -15794,7 +16379,7 @@
               </a:spcAft>
             </a:pPr>
             <a:r>
-              <a:rPr sz="1800" b="0" i="0">
+              <a:rPr sz="1900" b="0" i="0">
                 <a:solidFill>
                   <a:srgbClr val="333333"/>
                 </a:solidFill>
@@ -15803,7 +16388,7 @@
               <a:t>–   </a:t>
             </a:r>
             <a:r>
-              <a:rPr sz="1800" b="1" i="0">
+              <a:rPr sz="1900" b="1" i="0">
                 <a:solidFill>
                   <a:srgbClr val="333333"/>
                 </a:solidFill>
@@ -15812,7 +16397,7 @@
               <a:t>Que la hace correlacionada.</a:t>
             </a:r>
             <a:r>
-              <a:rPr sz="1800" b="0" i="0">
+              <a:rPr sz="1900" b="0" i="0">
                 <a:solidFill>
                   <a:srgbClr val="333333"/>
                 </a:solidFill>
@@ -15821,7 +16406,7 @@
               <a:t> La subconsulta esta en la </a:t>
             </a:r>
             <a:r>
-              <a:rPr sz="1800" b="1" i="0">
+              <a:rPr sz="1900" b="1" i="0">
                 <a:solidFill>
                   <a:srgbClr val="333333"/>
                 </a:solidFill>
@@ -15830,7 +16415,7 @@
               <a:t>lista de columnas</a:t>
             </a:r>
             <a:r>
-              <a:rPr sz="1800" b="0" i="0">
+              <a:rPr sz="1900" b="0" i="0">
                 <a:solidFill>
                   <a:srgbClr val="333333"/>
                 </a:solidFill>
@@ -15839,7 +16424,7 @@
               <a:t> y menciona una columna del exterior («WHERE m.id_dueno = d.id_dueno»). No se puede calcular una vez y reusar: depende de la fila que se este mirando, asi que el motor </a:t>
             </a:r>
             <a:r>
-              <a:rPr sz="1800" b="1" i="0">
+              <a:rPr sz="1900" b="1" i="0">
                 <a:solidFill>
                   <a:srgbClr val="333333"/>
                 </a:solidFill>
@@ -15848,7 +16433,7 @@
               <a:t>la ejecuta una vez por fila</a:t>
             </a:r>
             <a:r>
-              <a:rPr sz="1800" b="0" i="0">
+              <a:rPr sz="1900" b="0" i="0">
                 <a:solidFill>
                   <a:srgbClr val="333333"/>
                 </a:solidFill>
@@ -15864,7 +16449,7 @@
               </a:spcAft>
             </a:pPr>
             <a:r>
-              <a:rPr sz="1800" b="0" i="0">
+              <a:rPr sz="1900" b="0" i="0">
                 <a:solidFill>
                   <a:srgbClr val="333333"/>
                 </a:solidFill>
@@ -15873,7 +16458,7 @@
               <a:t>–   </a:t>
             </a:r>
             <a:r>
-              <a:rPr sz="1800" b="1" i="0">
+              <a:rPr sz="1900" b="1" i="0">
                 <a:solidFill>
                   <a:srgbClr val="333333"/>
                 </a:solidFill>
@@ -15882,7 +16467,7 @@
               <a:t>El numero que lo delata en el plan.</a:t>
             </a:r>
             <a:r>
-              <a:rPr sz="1800" b="0" i="0">
+              <a:rPr sz="1900" b="0" i="0">
                 <a:solidFill>
                   <a:srgbClr val="333333"/>
                 </a:solidFill>
@@ -15891,7 +16476,7 @@
               <a:t> «EXPLAIN ANALYZE» muestra un nodo «SubPlan» con </a:t>
             </a:r>
             <a:r>
-              <a:rPr sz="1800" b="1" i="0">
+              <a:rPr sz="1900" b="1" i="0">
                 <a:solidFill>
                   <a:srgbClr val="333333"/>
                 </a:solidFill>
@@ -15900,7 +16485,7 @@
               <a:t>«loops=2006»</a:t>
             </a:r>
             <a:r>
-              <a:rPr sz="1800" b="0" i="0">
+              <a:rPr sz="1900" b="0" i="0">
                 <a:solidFill>
                   <a:srgbClr val="333333"/>
                 </a:solidFill>
@@ -15916,7 +16501,7 @@
               </a:spcAft>
             </a:pPr>
             <a:r>
-              <a:rPr sz="1800" b="0" i="0">
+              <a:rPr sz="1900" b="0" i="0">
                 <a:solidFill>
                   <a:srgbClr val="333333"/>
                 </a:solidFill>
@@ -15925,7 +16510,7 @@
               <a:t>–   </a:t>
             </a:r>
             <a:r>
-              <a:rPr sz="1800" b="1" i="0">
+              <a:rPr sz="1900" b="1" i="0">
                 <a:solidFill>
                   <a:srgbClr val="333333"/>
                 </a:solidFill>
@@ -15934,7 +16519,7 @@
               <a:t>La reescritura.</a:t>
             </a:r>
             <a:r>
-              <a:rPr sz="1800" b="0" i="0">
+              <a:rPr sz="1900" b="0" i="0">
                 <a:solidFill>
                   <a:srgbClr val="333333"/>
                 </a:solidFill>
@@ -15943,7 +16528,7 @@
               <a:t> «dueno LEFT JOIN mascota LEFT JOIN cita» + «GROUP BY d.id_dueno, d.nombre» + «COUNT(...)». El «SubPlan» desaparece y en su lugar queda un solo «HashAggregate»: </a:t>
             </a:r>
             <a:r>
-              <a:rPr sz="1800" b="1" i="0">
+              <a:rPr sz="1900" b="1" i="0">
                 <a:solidFill>
                   <a:srgbClr val="333333"/>
                 </a:solidFill>
@@ -15952,7 +16537,7 @@
               <a:t>una pasada</a:t>
             </a:r>
             <a:r>
-              <a:rPr sz="1800" b="0" i="0">
+              <a:rPr sz="1900" b="0" i="0">
                 <a:solidFill>
                   <a:srgbClr val="333333"/>
                 </a:solidFill>
@@ -15968,7 +16553,7 @@
               </a:spcAft>
             </a:pPr>
             <a:r>
-              <a:rPr sz="1800" b="0" i="0">
+              <a:rPr sz="1900" b="0" i="0">
                 <a:solidFill>
                   <a:srgbClr val="333333"/>
                 </a:solidFill>
@@ -15977,7 +16562,7 @@
               <a:t>–   </a:t>
             </a:r>
             <a:r>
-              <a:rPr sz="1800" b="1" i="0">
+              <a:rPr sz="1900" b="1" i="0">
                 <a:solidFill>
                   <a:srgbClr val="333333"/>
                 </a:solidFill>
@@ -15986,7 +16571,7 @@
               <a:t>«COUNT(c.id_cita)», nunca «COUNT(*)».</a:t>
             </a:r>
             <a:r>
-              <a:rPr sz="1800" b="0" i="0">
+              <a:rPr sz="1900" b="0" i="0">
                 <a:solidFill>
                   <a:srgbClr val="333333"/>
                 </a:solidFill>
@@ -15995,7 +16580,7 @@
               <a:t> El «LEFT JOIN» fabrica </a:t>
             </a:r>
             <a:r>
-              <a:rPr sz="1800" b="1" i="0">
+              <a:rPr sz="1900" b="1" i="0">
                 <a:solidFill>
                   <a:srgbClr val="333333"/>
                 </a:solidFill>
@@ -16004,7 +16589,7 @@
               <a:t>una fila llena de «NULL»</a:t>
             </a:r>
             <a:r>
-              <a:rPr sz="1800" b="0" i="0">
+              <a:rPr sz="1900" b="0" i="0">
                 <a:solidFill>
                   <a:srgbClr val="333333"/>
                 </a:solidFill>
@@ -16013,7 +16598,7 @@
               <a:t> por cada dueno sin citas. «COUNT(*)» cuenta filas y reporta </a:t>
             </a:r>
             <a:r>
-              <a:rPr sz="1800" b="1" i="0">
+              <a:rPr sz="1900" b="1" i="0">
                 <a:solidFill>
                   <a:srgbClr val="333333"/>
                 </a:solidFill>
@@ -16022,7 +16607,7 @@
               <a:t>1</a:t>
             </a:r>
             <a:r>
-              <a:rPr sz="1800" b="0" i="0">
+              <a:rPr sz="1900" b="0" i="0">
                 <a:solidFill>
                   <a:srgbClr val="333333"/>
                 </a:solidFill>
@@ -16031,7 +16616,7 @@
               <a:t>; «COUNT» de una columna ignora los «NULL» y reporta </a:t>
             </a:r>
             <a:r>
-              <a:rPr sz="1800" b="1" i="0">
+              <a:rPr sz="1900" b="1" i="0">
                 <a:solidFill>
                   <a:srgbClr val="333333"/>
                 </a:solidFill>
@@ -16040,7 +16625,7 @@
               <a:t>0</a:t>
             </a:r>
             <a:r>
-              <a:rPr sz="1800" b="0" i="0">
+              <a:rPr sz="1900" b="0" i="0">
                 <a:solidFill>
                   <a:srgbClr val="333333"/>
                 </a:solidFill>
@@ -16056,7 +16641,7 @@
               </a:spcAft>
             </a:pPr>
             <a:r>
-              <a:rPr sz="1800" b="0" i="0">
+              <a:rPr sz="1900" b="0" i="0">
                 <a:solidFill>
                   <a:srgbClr val="333333"/>
                 </a:solidFill>
@@ -16065,7 +16650,7 @@
               <a:t>–   </a:t>
             </a:r>
             <a:r>
-              <a:rPr sz="1800" b="1" i="0">
+              <a:rPr sz="1900" b="1" i="0">
                 <a:solidFill>
                   <a:srgbClr val="333333"/>
                 </a:solidFill>
@@ -16074,7 +16659,7 @@
               <a:t>Y «LEFT», no «INNER».</a:t>
             </a:r>
             <a:r>
-              <a:rPr sz="1800" b="0" i="0">
+              <a:rPr sz="1900" b="0" i="0">
                 <a:solidFill>
                   <a:srgbClr val="333333"/>
                 </a:solidFill>
@@ -16083,7 +16668,7 @@
               <a:t> Un «INNER JOIN» es mas rapido y esta </a:t>
             </a:r>
             <a:r>
-              <a:rPr sz="1800" b="1" i="0">
+              <a:rPr sz="1900" b="1" i="0">
                 <a:solidFill>
                   <a:srgbClr val="333333"/>
                 </a:solidFill>
@@ -16092,7 +16677,7 @@
               <a:t>mal</a:t>
             </a:r>
             <a:r>
-              <a:rPr sz="1800" b="0" i="0">
+              <a:rPr sz="1900" b="0" i="0">
                 <a:solidFill>
                   <a:srgbClr val="333333"/>
                 </a:solidFill>
@@ -16105,7 +16690,7 @@
       </p:sp>
       <p:sp>
         <p:nvSpPr>
-          <p:cNvPr id="7" name="TextBox 6"/>
+          <p:cNvPr id="6" name="TextBox 5"/>
           <p:cNvSpPr txBox="1"/>
           <p:nvPr/>
         </p:nvSpPr>
@@ -16173,7 +16758,7 @@
         <p:spPr>
           <a:xfrm>
             <a:off x="0" y="0"/>
-            <a:ext cx="12191695" cy="1170432"/>
+            <a:ext cx="12191695" cy="960120"/>
           </a:xfrm>
           <a:prstGeom prst="rect">
             <a:avLst/>
@@ -16215,7 +16800,7 @@
         </p:nvSpPr>
         <p:spPr>
           <a:xfrm>
-            <a:off x="0" y="1170432"/>
+            <a:off x="0" y="960120"/>
             <a:ext cx="12191695" cy="41148"/>
           </a:xfrm>
           <a:prstGeom prst="rect">
@@ -16259,7 +16844,7 @@
         <p:spPr>
           <a:xfrm>
             <a:off x="457200" y="164592"/>
-            <a:ext cx="11277295" cy="384048"/>
+            <a:ext cx="11277295" cy="502920"/>
           </a:xfrm>
           <a:prstGeom prst="rect">
             <a:avLst/>
@@ -16292,42 +16877,8 @@
         </p:nvSpPr>
         <p:spPr>
           <a:xfrm>
-            <a:off x="457200" y="566928"/>
-            <a:ext cx="11277295" cy="411480"/>
-          </a:xfrm>
-          <a:prstGeom prst="rect">
-            <a:avLst/>
-          </a:prstGeom>
-          <a:noFill/>
-        </p:spPr>
-        <p:txBody>
-          <a:bodyPr wrap="square">
-            <a:spAutoFit/>
-          </a:bodyPr>
-          <a:lstStyle/>
-          <a:p>
-            <a:r>
-              <a:rPr sz="1400" b="0" i="0">
-                <a:solidFill>
-                  <a:srgbClr val="B8D8EE"/>
-                </a:solidFill>
-                <a:latin typeface="Calibri"/>
-              </a:rPr>
-              <a:t>Vale puntos dos veces: los dos «COUNT(*)» de la pregunta 1 y el «EXCEPT» de la pregunta 3</a:t>
-            </a:r>
-          </a:p>
-        </p:txBody>
-      </p:sp>
-      <p:sp>
-        <p:nvSpPr>
-          <p:cNvPr id="6" name="TextBox 5"/>
-          <p:cNvSpPr txBox="1"/>
-          <p:nvPr/>
-        </p:nvSpPr>
-        <p:spPr>
-          <a:xfrm>
-            <a:off x="457200" y="1380744"/>
-            <a:ext cx="11277295" cy="5020056"/>
+            <a:off x="457200" y="1170432"/>
+            <a:ext cx="11277295" cy="5230368"/>
           </a:xfrm>
           <a:prstGeom prst="rect">
             <a:avLst/>
@@ -16346,7 +16897,7 @@
               </a:spcAft>
             </a:pPr>
             <a:r>
-              <a:rPr sz="1900" b="0" i="0">
+              <a:rPr sz="2000" b="0" i="0">
                 <a:solidFill>
                   <a:srgbClr val="333333"/>
                 </a:solidFill>
@@ -16355,7 +16906,7 @@
               <a:t>–   </a:t>
             </a:r>
             <a:r>
-              <a:rPr sz="1900" b="1" i="0">
+              <a:rPr sz="2000" b="1" i="0">
                 <a:solidFill>
                   <a:srgbClr val="333333"/>
                 </a:solidFill>
@@ -16364,7 +16915,7 @@
               <a:t>La regla.</a:t>
             </a:r>
             <a:r>
-              <a:rPr sz="1900" b="0" i="0">
+              <a:rPr sz="2000" b="0" i="0">
                 <a:solidFill>
                   <a:srgbClr val="333333"/>
                 </a:solidFill>
@@ -16373,7 +16924,7 @@
               <a:t> Correccion y tiempo son ejes </a:t>
             </a:r>
             <a:r>
-              <a:rPr sz="1900" b="1" i="0">
+              <a:rPr sz="2000" b="1" i="0">
                 <a:solidFill>
                   <a:srgbClr val="333333"/>
                 </a:solidFill>
@@ -16382,7 +16933,7 @@
               <a:t>independientes</a:t>
             </a:r>
             <a:r>
-              <a:rPr sz="1900" b="0" i="0">
+              <a:rPr sz="2000" b="0" i="0">
                 <a:solidFill>
                   <a:srgbClr val="333333"/>
                 </a:solidFill>
@@ -16391,7 +16942,7 @@
               <a:t>. Si la version DESPUES devuelve algo distinto, no se optimizo nada: se rompio la consulta, y se rompio </a:t>
             </a:r>
             <a:r>
-              <a:rPr sz="1900" b="1" i="0">
+              <a:rPr sz="2000" b="1" i="0">
                 <a:solidFill>
                   <a:srgbClr val="333333"/>
                 </a:solidFill>
@@ -16400,7 +16951,7 @@
               <a:t>sin avisar</a:t>
             </a:r>
             <a:r>
-              <a:rPr sz="1900" b="0" i="0">
+              <a:rPr sz="2000" b="0" i="0">
                 <a:solidFill>
                   <a:srgbClr val="333333"/>
                 </a:solidFill>
@@ -16416,7 +16967,7 @@
               </a:spcAft>
             </a:pPr>
             <a:r>
-              <a:rPr sz="1900" b="0" i="0">
+              <a:rPr sz="2000" b="0" i="0">
                 <a:solidFill>
                   <a:srgbClr val="333333"/>
                 </a:solidFill>
@@ -16425,7 +16976,7 @@
               <a:t>–   </a:t>
             </a:r>
             <a:r>
-              <a:rPr sz="1900" b="1" i="0">
+              <a:rPr sz="2000" b="1" i="0">
                 <a:solidFill>
                   <a:srgbClr val="333333"/>
                 </a:solidFill>
@@ -16434,7 +16985,7 @@
               <a:t>Prueba 1, para una consulta con filtro: los dos «COUNT(*)».</a:t>
             </a:r>
             <a:r>
-              <a:rPr sz="1900" b="0" i="0">
+              <a:rPr sz="2000" b="0" i="0">
                 <a:solidFill>
                   <a:srgbClr val="333333"/>
                 </a:solidFill>
@@ -16443,7 +16994,7 @@
               <a:t> Se envuelve cada version y se comparan los conteos en la </a:t>
             </a:r>
             <a:r>
-              <a:rPr sz="1900" b="1" i="0">
+              <a:rPr sz="2000" b="1" i="0">
                 <a:solidFill>
                   <a:srgbClr val="333333"/>
                 </a:solidFill>
@@ -16452,7 +17003,7 @@
               <a:t>misma corrida</a:t>
             </a:r>
             <a:r>
-              <a:rPr sz="1900" b="0" i="0">
+              <a:rPr sz="2000" b="0" i="0">
                 <a:solidFill>
                   <a:srgbClr val="333333"/>
                 </a:solidFill>
@@ -16461,7 +17012,7 @@
               <a:t>. En la agenda del 2026-03-10 las dos tienen que decir </a:t>
             </a:r>
             <a:r>
-              <a:rPr sz="1900" b="1" i="0">
+              <a:rPr sz="2000" b="1" i="0">
                 <a:solidFill>
                   <a:srgbClr val="333333"/>
                 </a:solidFill>
@@ -16470,7 +17021,7 @@
               <a:t>91</a:t>
             </a:r>
             <a:r>
-              <a:rPr sz="1900" b="0" i="0">
+              <a:rPr sz="2000" b="0" i="0">
                 <a:solidFill>
                   <a:srgbClr val="333333"/>
                 </a:solidFill>
@@ -16486,7 +17037,7 @@
               </a:spcAft>
             </a:pPr>
             <a:r>
-              <a:rPr sz="1900" b="0" i="0">
+              <a:rPr sz="2000" b="0" i="0">
                 <a:solidFill>
                   <a:srgbClr val="333333"/>
                 </a:solidFill>
@@ -16495,7 +17046,7 @@
               <a:t>–   </a:t>
             </a:r>
             <a:r>
-              <a:rPr sz="1900" b="1" i="0">
+              <a:rPr sz="2000" b="1" i="0">
                 <a:solidFill>
                   <a:srgbClr val="333333"/>
                 </a:solidFill>
@@ -16504,7 +17055,7 @@
               <a:t>Prueba 2, para conjuntos completos: «EXCEPT» en los DOS sentidos.</a:t>
             </a:r>
             <a:r>
-              <a:rPr sz="1900" b="0" i="0">
+              <a:rPr sz="2000" b="0" i="0">
                 <a:solidFill>
                   <a:srgbClr val="333333"/>
                 </a:solidFill>
@@ -16513,7 +17064,7 @@
               <a:t> «A EXCEPT B» devuelve lo que esta en A y no en B. Que salga vacio </a:t>
             </a:r>
             <a:r>
-              <a:rPr sz="1900" b="1" i="0">
+              <a:rPr sz="2000" b="1" i="0">
                 <a:solidFill>
                   <a:srgbClr val="333333"/>
                 </a:solidFill>
@@ -16522,7 +17073,7 @@
               <a:t>no</a:t>
             </a:r>
             <a:r>
-              <a:rPr sz="1900" b="0" i="0">
+              <a:rPr sz="2000" b="0" i="0">
                 <a:solidFill>
                   <a:srgbClr val="333333"/>
                 </a:solidFill>
@@ -16531,7 +17082,7 @@
               <a:t> prueba la igualdad: B puede tener filas de mas. Se corren las dos direcciones unidas con «UNION ALL» y se exige </a:t>
             </a:r>
             <a:r>
-              <a:rPr sz="1900" b="1" i="0">
+              <a:rPr sz="2000" b="1" i="0">
                 <a:solidFill>
                   <a:srgbClr val="333333"/>
                 </a:solidFill>
@@ -16540,7 +17091,7 @@
               <a:t>cero filas</a:t>
             </a:r>
             <a:r>
-              <a:rPr sz="1900" b="0" i="0">
+              <a:rPr sz="2000" b="0" i="0">
                 <a:solidFill>
                   <a:srgbClr val="333333"/>
                 </a:solidFill>
@@ -16556,7 +17107,7 @@
               </a:spcAft>
             </a:pPr>
             <a:r>
-              <a:rPr sz="1900" b="0" i="0">
+              <a:rPr sz="2000" b="0" i="0">
                 <a:solidFill>
                   <a:srgbClr val="333333"/>
                 </a:solidFill>
@@ -16565,7 +17116,7 @@
               <a:t>–   </a:t>
             </a:r>
             <a:r>
-              <a:rPr sz="1900" b="1" i="0">
+              <a:rPr sz="2000" b="1" i="0">
                 <a:solidFill>
                   <a:srgbClr val="333333"/>
                 </a:solidFill>
@@ -16574,13 +17125,13 @@
               <a:t>Sin «LIMIT» en la prueba.</a:t>
             </a:r>
             <a:r>
-              <a:rPr sz="1900" b="0" i="0">
-                <a:solidFill>
-                  <a:srgbClr val="333333"/>
-                </a:solidFill>
-                <a:latin typeface="Calibri"/>
-              </a:rPr>
-              <a:t> Comparar solo las primeras 20 filas deja fuera justamente las que fallan — las de los duenos con cero citas, que es donde «COUNT(*)» miente. El «LIMIT» va en la consulta que se entrega, no en la que verifica.</a:t>
+              <a:rPr sz="2000" b="0" i="0">
+                <a:solidFill>
+                  <a:srgbClr val="333333"/>
+                </a:solidFill>
+                <a:latin typeface="Calibri"/>
+              </a:rPr>
+              <a:t> Comparar solo las primeras 20 filas deja fuera justamente las que fallan — las de los duenos con cero citas, que es donde «COUNT(*)» miente.</a:t>
             </a:r>
           </a:p>
           <a:p>
@@ -16590,7 +17141,7 @@
               </a:spcAft>
             </a:pPr>
             <a:r>
-              <a:rPr sz="1900" b="0" i="0">
+              <a:rPr sz="2000" b="0" i="0">
                 <a:solidFill>
                   <a:srgbClr val="333333"/>
                 </a:solidFill>
@@ -16599,7 +17150,7 @@
               <a:t>–   </a:t>
             </a:r>
             <a:r>
-              <a:rPr sz="1900" b="1" i="0">
+              <a:rPr sz="2000" b="1" i="0">
                 <a:solidFill>
                   <a:srgbClr val="333333"/>
                 </a:solidFill>
@@ -16608,7 +17159,7 @@
               <a:t>Que NO sirve como prueba.</a:t>
             </a:r>
             <a:r>
-              <a:rPr sz="1900" b="0" i="0">
+              <a:rPr sz="2000" b="0" i="0">
                 <a:solidFill>
                   <a:srgbClr val="333333"/>
                 </a:solidFill>
@@ -16617,7 +17168,7 @@
               <a:t> «Se ve igual», «trae mas o menos lo mismo» o mirar la primera pantalla de resultados. La equivalencia se afirma con una consulta cuyo resultado </a:t>
             </a:r>
             <a:r>
-              <a:rPr sz="1900" b="1" i="0">
+              <a:rPr sz="2000" b="1" i="0">
                 <a:solidFill>
                   <a:srgbClr val="333333"/>
                 </a:solidFill>
@@ -16626,7 +17177,7 @@
               <a:t>se conoce de antemano</a:t>
             </a:r>
             <a:r>
-              <a:rPr sz="1900" b="0" i="0">
+              <a:rPr sz="2000" b="0" i="0">
                 <a:solidFill>
                   <a:srgbClr val="333333"/>
                 </a:solidFill>
@@ -16639,7 +17190,7 @@
       </p:sp>
       <p:sp>
         <p:nvSpPr>
-          <p:cNvPr id="7" name="TextBox 6"/>
+          <p:cNvPr id="6" name="TextBox 5"/>
           <p:cNvSpPr txBox="1"/>
           <p:nvPr/>
         </p:nvSpPr>
@@ -16870,7 +17421,7 @@
                 </a:solidFill>
                 <a:latin typeface="Calibri"/>
               </a:rPr>
-              <a:t> PostgreSQL en el navegador + Google Docs</a:t>
+              <a:t> PostgreSQL + Google Docs</a:t>
             </a:r>
           </a:p>
           <a:p>
@@ -16904,7 +17455,7 @@
                 </a:solidFill>
                 <a:latin typeface="Calibri"/>
               </a:rPr>
-              <a:t> Consulta pesada citas+mascotas+duenos -&gt; version filtrada y proyectada, con EXPLAIN ANALYZE antes y despues, en la plataforma del curso.</a:t>
+              <a:t> Consulta pesada citas+mascotas+duenos -&gt; version filtrada y proyectada, con EXPLAIN ANALYZE antes y despues.</a:t>
             </a:r>
           </a:p>
           <a:p>
@@ -17640,7 +18191,7 @@
                 </a:solidFill>
                 <a:latin typeface="Calibri"/>
               </a:rPr>
-              <a:t>–   Esta es la diapositiva que sostiene la pregunta 2 del taller, que vale 20 de los 100 puntos y pide tres cosas concretas de cada plan: el nodo mas costoso, las filas estimadas frente a las reales y el tiempo total.</a:t>
+              <a:t>–   De cada plan se leen tres cosas concretas: el nodo mas costoso, las filas estimadas frente a las reales y el tiempo total.</a:t>
             </a:r>
           </a:p>
           <a:p>
@@ -17672,7 +18223,7 @@
                 </a:solidFill>
                 <a:latin typeface="Calibri"/>
               </a:rPr>
-              <a:t>–   En PostgreSQL se escribe EXPLAIN antes de la consulta, y para la agenda del taller aparece algo de esta forma: un Hash Join en la primera linea con su cost=... rows=... width=...</a:t>
+              <a:t>–   En PostgreSQL se escribe EXPLAIN antes de la consulta, y para la agenda de la clase aparece algo de esta forma: un Hash Join en la primera linea con su cost=... rows=... width=...</a:t>
             </a:r>
           </a:p>
           <a:p>
@@ -17704,7 +18255,7 @@
                 </a:solidFill>
                 <a:latin typeface="Calibri"/>
               </a:rPr>
-              <a:t>–   Los cuatro campos hay que saber nombrarlos y hay que exigir que el estudiante los nombre, porque la rubrica los pide por su nombre: cost trae el costo de arranque y el costo total separados por dos puntos</a:t>
+              <a:t>–   Los cuatro campos hay que saber nombrarlos: cost trae el costo de arranque y el costo total separados por dos puntos; rows son las filas que el motor ESTIMA</a:t>
             </a:r>
           </a:p>
         </p:txBody>
@@ -17924,7 +18475,7 @@
                 </a:solidFill>
                 <a:latin typeface="Calibri"/>
               </a:rPr>
-              <a:t>–   Rows son las filas que el motor ESTIMA; width es el ancho promedio de la fila en bytes; y loops, que solo aparece con ANALYZE, dice cuantas veces se ejecuto ese nodo.</a:t>
+              <a:t>–   Width es el ancho promedio de la fila en bytes; y loops, que solo aparece con ANALYZE, dice cuantas veces se ejecuto ese nodo.</a:t>
             </a:r>
           </a:p>
           <a:p>
@@ -17956,7 +18507,7 @@
                 </a:solidFill>
                 <a:latin typeface="Calibri"/>
               </a:rPr>
-              <a:t>–   Y solo sirve para comparar planes del mismo motor; confundir cost con tiempo es el error mas frecuente al calificar esta pregunta.</a:t>
+              <a:t>–   Y solo sirve para comparar planes del mismo motor.</a:t>
             </a:r>
           </a:p>
           <a:p>
@@ -18004,7 +18555,7 @@
                 </a:solidFill>
                 <a:latin typeface="Calibri"/>
               </a:rPr>
-              <a:t>–   Advertencia que evita un accidente en clase: ANALYZE EJECUTA la sentencia, asi que sobre un UPDATE o un DELETE hay que envolverlo en BEGIN y ROLLBACK, lo cual ya anticipa la Clase 8; con SELECT no hay riesgo y el taller es solo de SELECT.</a:t>
+              <a:t>–   Advertencia que evita un accidente en clase: ANALYZE EJECUTA la sentencia, asi que sobre un UPDATE o un DELETE hay que envolverlo en BEGIN y ROLLBACK, lo cual ya anticipa la Clase 8.</a:t>
             </a:r>
           </a:p>
         </p:txBody>
@@ -18224,7 +18775,7 @@
                 </a:solidFill>
                 <a:latin typeface="Calibri"/>
               </a:rPr>
-              <a:t>–   Un nodo de 0,5 ms con loops=2006 cuesta un segundo entero y aparece impreso como el mas barato de la pantalla; es exactamente lo que va a pasar en la pregunta 3.</a:t>
+              <a:t>–   Un nodo de 0,5 ms con loops=2006 cuesta un segundo entero y aparece impreso como el mas barato de la pantalla.</a:t>
             </a:r>
           </a:p>
           <a:p>
@@ -18524,7 +19075,7 @@
                 </a:solidFill>
                 <a:latin typeface="Calibri"/>
               </a:rPr>
-              <a:t>–   En la base del taller el ANALYZE ya esta corrido, y eso es deliberado: si faltara, el estimado contra real de la pregunta 2 saldria disparatado por una razon que no es el tema de la clase y el estudiante concluiria lo contrario de lo que hay que aprender.</a:t>
+              <a:t>–   En la base de la clase el ANALYZE ya esta corrido, y eso es deliberado: si faltara.</a:t>
             </a:r>
           </a:p>
         </p:txBody>

--- a/Bases de Datos II/Clases/Clase 6 - Optimizacion de consultas/Presentacion.pptx
+++ b/Bases de Datos II/Clases/Clase 6 - Optimizacion de consultas/Presentacion.pptx
@@ -46,8 +46,6 @@
     <p:sldId id="294" r:id="rId46"/>
     <p:sldId id="295" r:id="rId47"/>
     <p:sldId id="296" r:id="rId48"/>
-    <p:sldId id="297" r:id="rId49"/>
-    <p:sldId id="298" r:id="rId50"/>
   </p:sldIdLst>
   <p:sldSz cx="12191695" cy="6858000" type="screen4x3"/>
   <p:notesSz cx="6858000" cy="9144000"/>
@@ -544,7 +542,27 @@
           <a:lstStyle/>
           <a:p>
             <a:r>
-              <a:t>Y hay dos trampas al senalar el nodo mas costoso, que el docente tiene que conocer antes de calificar: el tiempo que muestra un nodo INCLUYE el de sus hijos, de modo que la primera linea siempre parece la mas cara sin serlo, y actual time es POR VUELTA, asi que el costo real de un nodo es su tiempo multiplicado por loops.</a:t>
+              <a:t>Y hay dos trampas al senalar el nodo mas costoso.</a:t>
+            </a:r>
+          </a:p>
+          <a:p>
+            <a:r>
+              <a:t>Fuera de la lamina (habla de la practica): El costo NO esta en milisegundos, es una unidad relativa donde 1.0 equivale por convencion a leer secuencialmente una pagina de 8 KB, y solo sirve para comparar planes del mismo motor; confundir cost con tiempo es el error mas frecuente al calificar esta pregunta.</a:t>
+            </a:r>
+          </a:p>
+          <a:p>
+            <a:r>
+              <a:t>Fuera de la lamina (habla de la practica): Advertencia que evita un accidente en clase: ANALYZE EJECUTA la sentencia, asi que sobre un UPDATE o un DELETE hay que envolverlo en BEGIN y ROLLBACK, lo cual ya anticipa la Clase 8; con SELECT no hay riesgo y el taller es solo de SELECT.</a:t>
+            </a:r>
+          </a:p>
+          <a:p>
+            <a:r>
+              <a:t>Fuera de la lamina (habla de la practica): Y hay dos trampas al senalar el nodo mas costoso, que el docente tiene que conocer antes de calificar: el tiempo que muestra un nodo INCLUYE el de sus hijos, de modo que la primera linea siempre parece la mas cara sin serlo, y actual time es POR VUELTA, asi que el costo real de un nodo es su tiempo multiplicado por loops.</a:t>
+            </a:r>
+          </a:p>
+          <a:p>
+            <a:r>
+              <a:t>Fuera de la lamina (habla de la practica): Un nodo de 0,5 ms con loops=2006 cuesta un segundo entero y aparece impreso como el mas barato de la pantalla; es exactamente lo que va a pasar en la pregunta 3.</a:t>
             </a:r>
           </a:p>
         </p:txBody>
@@ -614,22 +632,7 @@
           <a:lstStyle/>
           <a:p>
             <a:r>
-              <a:t>Y se rompe sin avisar, porque ningun motor va a lanzar un error por eso.</a:t>
-            </a:r>
-          </a:p>
-          <a:p>
-            <a:r>
-              <a:t>Por eso el taller cobra la prueba dos veces, unos 6 de los 100 puntos, y hay dos formas segun lo que se compare.</a:t>
-            </a:r>
-          </a:p>
-          <a:p>
-            <a:r>
-              <a:t>Para conjuntos completos, donde el conteo puede coincidir con filas distintas, se usa EXCEPT en los DOS sentidos, y el docente tiene que saber por que son dos: A EXCEPT B devuelve lo que esta en A y no esta en B, asi que si sale vacio todavia puede haber filas de mas en B; se corren las dos direcciones unidas con UNION ALL y se exige cero filas en total.</a:t>
-            </a:r>
-          </a:p>
-          <a:p>
-            <a:r>
-              <a:t>Tres advertencias al calificar.</a:t>
+              <a:t>Cuatro preguntas aparecen siempre.</a:t>
             </a:r>
           </a:p>
         </p:txBody>
@@ -699,37 +702,12 @@
           <a:lstStyle/>
           <a:p>
             <a:r>
-              <a:t>La version ANTES es SELECT * FROM cita c, mascota m, dueno d, veterinario v con las cuatro condiciones de union en el WHERE, to_char sobre la fecha y UPPER sobre el estado, y el docente debe saber que esta mal en cada linea.</a:t>
-            </a:r>
-          </a:p>
-          <a:p>
-            <a:r>
-              <a:t>SELECT * arrastra todas las columnas de las cuatro tablas cuando la pantalla de agenda necesita seis, lo cual multiplica el ancho de la fila y con el la memoria de trabajo del ordenamiento.</a:t>
-            </a:r>
-          </a:p>
-          <a:p>
-            <a:r>
-              <a:t>Las dos funciones sobre columnas se explicaron en el parrafo del predicado sargable.</a:t>
-            </a:r>
-          </a:p>
-          <a:p>
-            <a:r>
-              <a:t>Hay que decir aqui, y no despues, lo que la quinta afirmacion de la pregunta 4 castiga: cambiar la coma por JOIN...</a:t>
-            </a:r>
-          </a:p>
-          <a:p>
-            <a:r>
-              <a:t>ON no acelera nada, porque PostgreSQL normaliza las dos formas al mismo plan interno; se gana legibilidad y se gana que un ON faltante salte a la vista, o sea seguridad, no milisegundos.</a:t>
-            </a:r>
-          </a:p>
-          <a:p>
-            <a:r>
-              <a:t>Si el docente lo presenta como una mejora de rendimiento, esta ensenando justo la opcion por la que va a descontar.</a:t>
-            </a:r>
-          </a:p>
-          <a:p>
-            <a:r>
-              <a:t>La version DESPUES proyecta las seis columnas, escribe los tres JOIN...</a:t>
+              <a:t>Fuera de la lamina (habla de la practica, no del tema):</a:t>
+            </a:r>
+          </a:p>
+          <a:p>
+            <a:r>
+              <a:t>- Es lo que se anota en la tabla de la pregunta 2.</a:t>
             </a:r>
           </a:p>
         </p:txBody>
@@ -804,478 +782,7 @@
           </a:p>
           <a:p>
             <a:r>
-              <a:t>- Que es medio minuto de demo y ahorra la mitad de los reclamos de la pregunta 3.</a:t>
-            </a:r>
-          </a:p>
-        </p:txBody>
-      </p:sp>
-      <p:sp>
-        <p:nvSpPr>
-          <p:cNvPr id="4" name="Slide Number Placeholder 3"/>
-          <p:cNvSpPr>
-            <a:spLocks noGrp="1"/>
-          </p:cNvSpPr>
-          <p:nvPr>
-            <p:ph type="sldNum" idx="5" sz="quarter"/>
-          </p:nvPr>
-        </p:nvSpPr>
-        <p:spPr/>
-      </p:sp>
-    </p:spTree>
-  </p:cSld>
-  <p:clrMapOvr>
-    <a:masterClrMapping/>
-  </p:clrMapOvr>
-</p:notes>
-</file>
-
-<file path=ppt/notesSlides/notesSlide13.xml><?xml version="1.0" encoding="utf-8"?>
-<p:notes xmlns:a="http://schemas.openxmlformats.org/drawingml/2006/main" xmlns:p="http://schemas.openxmlformats.org/presentationml/2006/main" xmlns:r="http://schemas.openxmlformats.org/officeDocument/2006/relationships">
-  <p:cSld>
-    <p:spTree>
-      <p:nvGrpSpPr>
-        <p:cNvPr id="1" name=""/>
-        <p:cNvGrpSpPr/>
-        <p:nvPr/>
-      </p:nvGrpSpPr>
-      <p:grpSpPr>
-        <a:xfrm>
-          <a:off x="0" y="0"/>
-          <a:ext cx="0" cy="0"/>
-          <a:chOff x="0" y="0"/>
-          <a:chExt cx="0" cy="0"/>
-        </a:xfrm>
-      </p:grpSpPr>
-      <p:sp>
-        <p:nvSpPr>
-          <p:cNvPr id="2" name="Slide Image Placeholder 1"/>
-          <p:cNvSpPr>
-            <a:spLocks noGrp="1"/>
-          </p:cNvSpPr>
-          <p:nvPr>
-            <p:ph type="sldImg" idx="2"/>
-          </p:nvPr>
-        </p:nvSpPr>
-        <p:spPr/>
-      </p:sp>
-      <p:sp>
-        <p:nvSpPr>
-          <p:cNvPr id="3" name="Notes Placeholder 2"/>
-          <p:cNvSpPr>
-            <a:spLocks noGrp="1"/>
-          </p:cNvSpPr>
-          <p:nvPr>
-            <p:ph type="body" idx="3" sz="quarter"/>
-          </p:nvPr>
-        </p:nvSpPr>
-        <p:spPr/>
-        <p:txBody>
-          <a:bodyPr/>
-          <a:lstStyle/>
-          <a:p>
-            <a:r>
-              <a:t>Fuera de la lamina (habla de la practica, no del tema):</a:t>
-            </a:r>
-          </a:p>
-          <a:p>
-            <a:r>
-              <a:t>- Soporta EXPLAIN, EXPLAIN ANALYZE y la opcion BUFFERS; si en alguna maquina BUFFERS no responde, el enunciado ya autoriza usar EXPLAIN ANALYZE a secas y declararlo en la seccion 5 de la pregunta 5, asi que eso no cuesta puntos.</a:t>
-            </a:r>
-          </a:p>
-          <a:p/>
-          <a:p>
-            <a:r>
-              <a:t>Lo que hay que documentar en papel, porque el entorno no lo permite y es literalmente la seccion 5 de la pregunta 5: los tiempos con la memoria intermedia vacia, ya que vaciarla exige privilegios de administrador; el comportamiento con varias sesiones compitiendo, que es la Clase 10; y cualquier comparacion por encima de unos cientos de miles de filas.</a:t>
-            </a:r>
-          </a:p>
-        </p:txBody>
-      </p:sp>
-      <p:sp>
-        <p:nvSpPr>
-          <p:cNvPr id="4" name="Slide Number Placeholder 3"/>
-          <p:cNvSpPr>
-            <a:spLocks noGrp="1"/>
-          </p:cNvSpPr>
-          <p:nvPr>
-            <p:ph type="sldNum" idx="5" sz="quarter"/>
-          </p:nvPr>
-        </p:nvSpPr>
-        <p:spPr/>
-      </p:sp>
-    </p:spTree>
-  </p:cSld>
-  <p:clrMapOvr>
-    <a:masterClrMapping/>
-  </p:clrMapOvr>
-</p:notes>
-</file>
-
-<file path=ppt/notesSlides/notesSlide14.xml><?xml version="1.0" encoding="utf-8"?>
-<p:notes xmlns:a="http://schemas.openxmlformats.org/drawingml/2006/main" xmlns:p="http://schemas.openxmlformats.org/presentationml/2006/main" xmlns:r="http://schemas.openxmlformats.org/officeDocument/2006/relationships">
-  <p:cSld>
-    <p:spTree>
-      <p:nvGrpSpPr>
-        <p:cNvPr id="1" name=""/>
-        <p:cNvGrpSpPr/>
-        <p:nvPr/>
-      </p:nvGrpSpPr>
-      <p:grpSpPr>
-        <a:xfrm>
-          <a:off x="0" y="0"/>
-          <a:ext cx="0" cy="0"/>
-          <a:chOff x="0" y="0"/>
-          <a:chExt cx="0" cy="0"/>
-        </a:xfrm>
-      </p:grpSpPr>
-      <p:sp>
-        <p:nvSpPr>
-          <p:cNvPr id="2" name="Slide Image Placeholder 1"/>
-          <p:cNvSpPr>
-            <a:spLocks noGrp="1"/>
-          </p:cNvSpPr>
-          <p:nvPr>
-            <p:ph type="sldImg" idx="2"/>
-          </p:nvPr>
-        </p:nvSpPr>
-        <p:spPr/>
-      </p:sp>
-      <p:sp>
-        <p:nvSpPr>
-          <p:cNvPr id="3" name="Notes Placeholder 2"/>
-          <p:cNvSpPr>
-            <a:spLocks noGrp="1"/>
-          </p:cNvSpPr>
-          <p:nvPr>
-            <p:ph type="body" idx="3" sz="quarter"/>
-          </p:nvPr>
-        </p:nvSpPr>
-        <p:spPr/>
-        <p:txBody>
-          <a:bodyPr/>
-          <a:lstStyle/>
-          <a:p>
-            <a:r>
-              <a:t>Fuera de la lamina (habla de la practica, no del tema):</a:t>
-            </a:r>
-          </a:p>
-          <a:p>
-            <a:r>
-              <a:t>- Y la rubrica pide los del plan real -- el «Rows Removed by Filter: 29919» y las 91 filas son justo las dos anclas con las que se verifica.</a:t>
-            </a:r>
-          </a:p>
-          <a:p>
-            <a:r>
-              <a:t>- Un alterno que cuesta puntos no es un alterno.</a:t>
-            </a:r>
-          </a:p>
-          <a:p>
-            <a:r>
-              <a:t>- Los milisegundos, ademas, cambian entre dos corridas seguidas en la misma maquina: lo que no cambia son los conteos de filas, y por eso los conteos son lo que se califica y los milisegundos solo tienen que ser coherentes entre si.</a:t>
-            </a:r>
-          </a:p>
-        </p:txBody>
-      </p:sp>
-      <p:sp>
-        <p:nvSpPr>
-          <p:cNvPr id="4" name="Slide Number Placeholder 3"/>
-          <p:cNvSpPr>
-            <a:spLocks noGrp="1"/>
-          </p:cNvSpPr>
-          <p:nvPr>
-            <p:ph type="sldNum" idx="5" sz="quarter"/>
-          </p:nvPr>
-        </p:nvSpPr>
-        <p:spPr/>
-      </p:sp>
-    </p:spTree>
-  </p:cSld>
-  <p:clrMapOvr>
-    <a:masterClrMapping/>
-  </p:clrMapOvr>
-</p:notes>
-</file>
-
-<file path=ppt/notesSlides/notesSlide15.xml><?xml version="1.0" encoding="utf-8"?>
-<p:notes xmlns:a="http://schemas.openxmlformats.org/drawingml/2006/main" xmlns:p="http://schemas.openxmlformats.org/presentationml/2006/main" xmlns:r="http://schemas.openxmlformats.org/officeDocument/2006/relationships">
-  <p:cSld>
-    <p:spTree>
-      <p:nvGrpSpPr>
-        <p:cNvPr id="1" name=""/>
-        <p:cNvGrpSpPr/>
-        <p:nvPr/>
-      </p:nvGrpSpPr>
-      <p:grpSpPr>
-        <a:xfrm>
-          <a:off x="0" y="0"/>
-          <a:ext cx="0" cy="0"/>
-          <a:chOff x="0" y="0"/>
-          <a:chExt cx="0" cy="0"/>
-        </a:xfrm>
-      </p:grpSpPr>
-      <p:sp>
-        <p:nvSpPr>
-          <p:cNvPr id="2" name="Slide Image Placeholder 1"/>
-          <p:cNvSpPr>
-            <a:spLocks noGrp="1"/>
-          </p:cNvSpPr>
-          <p:nvPr>
-            <p:ph type="sldImg" idx="2"/>
-          </p:nvPr>
-        </p:nvSpPr>
-        <p:spPr/>
-      </p:sp>
-      <p:sp>
-        <p:nvSpPr>
-          <p:cNvPr id="3" name="Notes Placeholder 2"/>
-          <p:cNvSpPr>
-            <a:spLocks noGrp="1"/>
-          </p:cNvSpPr>
-          <p:nvPr>
-            <p:ph type="body" idx="3" sz="quarter"/>
-          </p:nvPr>
-        </p:nvSpPr>
-        <p:spPr/>
-        <p:txBody>
-          <a:bodyPr/>
-          <a:lstStyle/>
-          <a:p>
-            <a:r>
-              <a:t>Cuatro preguntas aparecen siempre.</a:t>
-            </a:r>
-          </a:p>
-        </p:txBody>
-      </p:sp>
-      <p:sp>
-        <p:nvSpPr>
-          <p:cNvPr id="4" name="Slide Number Placeholder 3"/>
-          <p:cNvSpPr>
-            <a:spLocks noGrp="1"/>
-          </p:cNvSpPr>
-          <p:nvPr>
-            <p:ph type="sldNum" idx="5" sz="quarter"/>
-          </p:nvPr>
-        </p:nvSpPr>
-        <p:spPr/>
-      </p:sp>
-    </p:spTree>
-  </p:cSld>
-  <p:clrMapOvr>
-    <a:masterClrMapping/>
-  </p:clrMapOvr>
-</p:notes>
-</file>
-
-<file path=ppt/notesSlides/notesSlide16.xml><?xml version="1.0" encoding="utf-8"?>
-<p:notes xmlns:a="http://schemas.openxmlformats.org/drawingml/2006/main" xmlns:p="http://schemas.openxmlformats.org/presentationml/2006/main" xmlns:r="http://schemas.openxmlformats.org/officeDocument/2006/relationships">
-  <p:cSld>
-    <p:spTree>
-      <p:nvGrpSpPr>
-        <p:cNvPr id="1" name=""/>
-        <p:cNvGrpSpPr/>
-        <p:nvPr/>
-      </p:nvGrpSpPr>
-      <p:grpSpPr>
-        <a:xfrm>
-          <a:off x="0" y="0"/>
-          <a:ext cx="0" cy="0"/>
-          <a:chOff x="0" y="0"/>
-          <a:chExt cx="0" cy="0"/>
-        </a:xfrm>
-      </p:grpSpPr>
-      <p:sp>
-        <p:nvSpPr>
-          <p:cNvPr id="2" name="Slide Image Placeholder 1"/>
-          <p:cNvSpPr>
-            <a:spLocks noGrp="1"/>
-          </p:cNvSpPr>
-          <p:nvPr>
-            <p:ph type="sldImg" idx="2"/>
-          </p:nvPr>
-        </p:nvSpPr>
-        <p:spPr/>
-      </p:sp>
-      <p:sp>
-        <p:nvSpPr>
-          <p:cNvPr id="3" name="Notes Placeholder 2"/>
-          <p:cNvSpPr>
-            <a:spLocks noGrp="1"/>
-          </p:cNvSpPr>
-          <p:nvPr>
-            <p:ph type="body" idx="3" sz="quarter"/>
-          </p:nvPr>
-        </p:nvSpPr>
-        <p:spPr/>
-        <p:txBody>
-          <a:bodyPr/>
-          <a:lstStyle/>
-          <a:p>
-            <a:r>
-              <a:t>Fuera de la lamina (habla de la practica, no del tema):</a:t>
-            </a:r>
-          </a:p>
-          <a:p>
-            <a:r>
-              <a:t>- Es lo que se anota en la tabla de la pregunta 2.</a:t>
-            </a:r>
-          </a:p>
-          <a:p>
-            <a:r>
-              <a:t>- Es la pregunta 2 completa — 20 de los 100 puntos — y se responde leyendo estos campos, no pegando el plano tal cual</a:t>
-            </a:r>
-          </a:p>
-        </p:txBody>
-      </p:sp>
-      <p:sp>
-        <p:nvSpPr>
-          <p:cNvPr id="4" name="Slide Number Placeholder 3"/>
-          <p:cNvSpPr>
-            <a:spLocks noGrp="1"/>
-          </p:cNvSpPr>
-          <p:nvPr>
-            <p:ph type="sldNum" idx="5" sz="quarter"/>
-          </p:nvPr>
-        </p:nvSpPr>
-        <p:spPr/>
-      </p:sp>
-    </p:spTree>
-  </p:cSld>
-  <p:clrMapOvr>
-    <a:masterClrMapping/>
-  </p:clrMapOvr>
-</p:notes>
-</file>
-
-<file path=ppt/notesSlides/notesSlide17.xml><?xml version="1.0" encoding="utf-8"?>
-<p:notes xmlns:a="http://schemas.openxmlformats.org/drawingml/2006/main" xmlns:p="http://schemas.openxmlformats.org/presentationml/2006/main" xmlns:r="http://schemas.openxmlformats.org/officeDocument/2006/relationships">
-  <p:cSld>
-    <p:spTree>
-      <p:nvGrpSpPr>
-        <p:cNvPr id="1" name=""/>
-        <p:cNvGrpSpPr/>
-        <p:nvPr/>
-      </p:nvGrpSpPr>
-      <p:grpSpPr>
-        <a:xfrm>
-          <a:off x="0" y="0"/>
-          <a:ext cx="0" cy="0"/>
-          <a:chOff x="0" y="0"/>
-          <a:chExt cx="0" cy="0"/>
-        </a:xfrm>
-      </p:grpSpPr>
-      <p:sp>
-        <p:nvSpPr>
-          <p:cNvPr id="2" name="Slide Image Placeholder 1"/>
-          <p:cNvSpPr>
-            <a:spLocks noGrp="1"/>
-          </p:cNvSpPr>
-          <p:nvPr>
-            <p:ph type="sldImg" idx="2"/>
-          </p:nvPr>
-        </p:nvSpPr>
-        <p:spPr/>
-      </p:sp>
-      <p:sp>
-        <p:nvSpPr>
-          <p:cNvPr id="3" name="Notes Placeholder 2"/>
-          <p:cNvSpPr>
-            <a:spLocks noGrp="1"/>
-          </p:cNvSpPr>
-          <p:nvPr>
-            <p:ph type="body" idx="3" sz="quarter"/>
-          </p:nvPr>
-        </p:nvSpPr>
-        <p:spPr/>
-        <p:txBody>
-          <a:bodyPr/>
-          <a:lstStyle/>
-          <a:p>
-            <a:r>
-              <a:t>Fuera de la lamina (habla de la practica, no del tema):</a:t>
-            </a:r>
-          </a:p>
-          <a:p>
-            <a:r>
-              <a:t>- Es la pregunta 3 de la clase — 20 de los 100 puntos — y la afirmacion de la pregunta 4 que mas se falla</a:t>
-            </a:r>
-          </a:p>
-        </p:txBody>
-      </p:sp>
-      <p:sp>
-        <p:nvSpPr>
-          <p:cNvPr id="4" name="Slide Number Placeholder 3"/>
-          <p:cNvSpPr>
-            <a:spLocks noGrp="1"/>
-          </p:cNvSpPr>
-          <p:nvPr>
-            <p:ph type="sldNum" idx="5" sz="quarter"/>
-          </p:nvPr>
-        </p:nvSpPr>
-        <p:spPr/>
-      </p:sp>
-    </p:spTree>
-  </p:cSld>
-  <p:clrMapOvr>
-    <a:masterClrMapping/>
-  </p:clrMapOvr>
-</p:notes>
-</file>
-
-<file path=ppt/notesSlides/notesSlide18.xml><?xml version="1.0" encoding="utf-8"?>
-<p:notes xmlns:a="http://schemas.openxmlformats.org/drawingml/2006/main" xmlns:p="http://schemas.openxmlformats.org/presentationml/2006/main" xmlns:r="http://schemas.openxmlformats.org/officeDocument/2006/relationships">
-  <p:cSld>
-    <p:spTree>
-      <p:nvGrpSpPr>
-        <p:cNvPr id="1" name=""/>
-        <p:cNvGrpSpPr/>
-        <p:nvPr/>
-      </p:nvGrpSpPr>
-      <p:grpSpPr>
-        <a:xfrm>
-          <a:off x="0" y="0"/>
-          <a:ext cx="0" cy="0"/>
-          <a:chOff x="0" y="0"/>
-          <a:chExt cx="0" cy="0"/>
-        </a:xfrm>
-      </p:grpSpPr>
-      <p:sp>
-        <p:nvSpPr>
-          <p:cNvPr id="2" name="Slide Image Placeholder 1"/>
-          <p:cNvSpPr>
-            <a:spLocks noGrp="1"/>
-          </p:cNvSpPr>
-          <p:nvPr>
-            <p:ph type="sldImg" idx="2"/>
-          </p:nvPr>
-        </p:nvSpPr>
-        <p:spPr/>
-      </p:sp>
-      <p:sp>
-        <p:nvSpPr>
-          <p:cNvPr id="3" name="Notes Placeholder 2"/>
-          <p:cNvSpPr>
-            <a:spLocks noGrp="1"/>
-          </p:cNvSpPr>
-          <p:nvPr>
-            <p:ph type="body" idx="3" sz="quarter"/>
-          </p:nvPr>
-        </p:nvSpPr>
-        <p:spPr/>
-        <p:txBody>
-          <a:bodyPr/>
-          <a:lstStyle/>
-          <a:p>
-            <a:r>
-              <a:t>Fuera de la lamina (habla de la practica, no del tema):</a:t>
-            </a:r>
-          </a:p>
-          <a:p>
-            <a:r>
               <a:t>- El `LIMIT` va en la consulta que se entrega, no en la que verifica.</a:t>
-            </a:r>
-          </a:p>
-          <a:p>
-            <a:r>
-              <a:t>- Vale puntos dos veces: los dos `COUNT(*)` de la pregunta 1 y el `EXCEPT` de la pregunta 3</a:t>
             </a:r>
           </a:p>
         </p:txBody>
@@ -1345,17 +852,27 @@
           <a:lstStyle/>
           <a:p>
             <a:r>
-              <a:t>Fuera de la lamina (habla de la practica, no del tema):</a:t>
-            </a:r>
-          </a:p>
-          <a:p>
-            <a:r>
-              <a:t>- Y solo sirve para comparar planes del mismo motor; confundir cost con tiempo es el error mas frecuente al calificar esta pregunta.</a:t>
-            </a:r>
-          </a:p>
-          <a:p>
-            <a:r>
-              <a:t>- Advertencia que evita un accidente en clase: ANALYZE EJECUTA la sentencia, asi que sobre un UPDATE o un DELETE hay que envolverlo en BEGIN y ROLLBACK, lo cual ya anticipa la Clase 8; con SELECT no hay riesgo y el taller es solo de SELECT.</a:t>
+              <a:t>De ahi que se comparen rows estimadas contra actual rows.</a:t>
+            </a:r>
+          </a:p>
+          <a:p>
+            <a:r>
+              <a:t>Conviene marcar la diferencia de palabras en voz alta, porque van a aparecer las dos hoy: predicados correlacionados es esto, un asunto de estimacion; subconsulta correlacionada.</a:t>
+            </a:r>
+          </a:p>
+          <a:p>
+            <a:r>
+              <a:t>Fuera de la lamina (habla de la practica): En la base de la clase el ANALYZE ya esta corrido, y eso es deliberado: si faltara, el estimado contra real de la pregunta 2 saldria disparatado por una razon que no es el tema de la clase y el estudiante concluiria lo contrario de lo que hay que aprender.</a:t>
+            </a:r>
+          </a:p>
+          <a:p>
+            <a:r>
+              <a:t>Fuera de la lamina (habla de la practica): De ahi que se comparen rows estimadas contra actual rows, que es literalmente una de las tres columnas que pide la pregunta 2: una divergencia de 2 veces es normal, una de 10 veces o mas es la senal clasica de estadisticas viejas o de predicados correlacionados, y esa es tambien la sexta afirmacion de la pregunta 4, que es correcta.</a:t>
+            </a:r>
+          </a:p>
+          <a:p>
+            <a:r>
+              <a:t>Fuera de la lamina (habla de la practica): Conviene marcar la diferencia de palabras en voz alta, porque van a aparecer las dos hoy: predicados correlacionados es esto, un asunto de estimacion; subconsulta correlacionada, la de la pregunta 3, es otra cosa completamente distinta y es un asunto de numero de ejecuciones.</a:t>
             </a:r>
           </a:p>
         </p:txBody>
@@ -1425,12 +942,12 @@
           <a:lstStyle/>
           <a:p>
             <a:r>
-              <a:t>Fuera de la lamina (habla de la practica, no del tema):</a:t>
-            </a:r>
-          </a:p>
-          <a:p>
-            <a:r>
-              <a:t>- Un nodo de 0,5 ms con loops=2006 cuesta un segundo entero y aparece impreso como el mas barato de la pantalla; es exactamente lo que va a pasar en la pregunta 3.</a:t>
+              <a:t>Dos terminos explican por que el motor decide lo que decide.</a:t>
+            </a:r>
+          </a:p>
+          <a:p>
+            <a:r>
+              <a:t>Fuera de la lamina (habla de la practica): Los dos filtros juntos dejan 91 filas de 30.010, el 0,3 %, y ese 91 es el numero que el estudiante tiene que ver dos veces en la pregunta 1.</a:t>
             </a:r>
           </a:p>
         </p:txBody>
@@ -1500,23 +1017,12 @@
           <a:lstStyle/>
           <a:p>
             <a:r>
-              <a:t>Fuera de la lamina (habla de la practica, no del tema):</a:t>
-            </a:r>
-          </a:p>
-          <a:p>
-            <a:r>
-              <a:t>- En la base de la clase el ANALYZE ya esta corrido, y eso es deliberado: si faltara, el estimado contra real de la pregunta 2 saldria disparatado por una razon que no es el tema de la clase y el estudiante concluiria lo contrario de lo que hay que aprender.</a:t>
-            </a:r>
-          </a:p>
-          <a:p/>
-          <a:p>
-            <a:r>
-              <a:t>De ahi que se comparen rows estimadas contra actual rows, que es literalmente una de las tres columnas que pide la pregunta 2: una divergencia de 2 veces es normal, una de 10 veces o mas es la senal clasica de estadisticas viejas o de predicados correlacionados, y esa es tambien la sexta afirmacion de la pregunta 4, que es correcta.</a:t>
-            </a:r>
-          </a:p>
-          <a:p>
-            <a:r>
-              <a:t>Conviene marcar la diferencia de palabras en voz alta, porque van a aparecer las dos hoy: predicados correlacionados es esto, un asunto de estimacion; subconsulta correlacionada, la de la pregunta 3, es otra cosa completamente distinta y es un asunto de numero de ejecuciones.</a:t>
+              <a:t>Con eso se explica full table scan contra index scan sin caricaturas.</a:t>
+            </a:r>
+          </a:p>
+          <a:p>
+            <a:r>
+              <a:t>Por eso la Clase 7 tiene que MEDIRLO y no suponerlo.</a:t>
             </a:r>
           </a:p>
         </p:txBody>
@@ -1586,7 +1092,7 @@
           <a:lstStyle/>
           <a:p>
             <a:r>
-              <a:t>Dos terminos explican por que el motor decide lo que decide.</a:t>
+              <a:t>Fuera de la lamina (habla de la practica): El antipatron de la funcion sobre la columna merece parrafo propio porque conecta con la Clase 7 y porque es el que la pregunta 4 pone de primero.</a:t>
             </a:r>
           </a:p>
         </p:txBody>
@@ -1656,12 +1162,17 @@
           <a:lstStyle/>
           <a:p>
             <a:r>
-              <a:t>Fuera de la lamina (habla de la practica, no del tema):</a:t>
-            </a:r>
-          </a:p>
-          <a:p>
-            <a:r>
-              <a:t>- Los dos filtros juntos dejan 91 filas de 30.010, el 0,3 %, y ese 91 es el numero que el estudiante tiene que ver dos veces en la pregunta 1.</a:t>
+              <a:t>No esta colgada.</a:t>
+            </a:r>
+          </a:p>
+          <a:p>
+            <a:r>
+              <a:t>Fuera de la lamina (habla de la practica): Es la pregunta 3, otros 20 puntos, y la cuarta afirmacion de la pregunta 4 dice lo mismo.</a:t>
+            </a:r>
+          </a:p>
+          <a:p>
+            <a:r>
+              <a:t>Fuera de la lamina (habla de la practica): Dos detalles que valen puntos y que el docente tiene que poder justificar en el momento.</a:t>
             </a:r>
           </a:p>
         </p:txBody>
@@ -1731,12 +1242,22 @@
           <a:lstStyle/>
           <a:p>
             <a:r>
-              <a:t>Con eso se explica full table scan contra index scan sin caricaturas.</a:t>
-            </a:r>
-          </a:p>
-          <a:p>
-            <a:r>
-              <a:t>Por eso la Clase 7 tiene que MEDIRLO y no suponerlo.</a:t>
+              <a:t>Y se rompe sin avisar, porque ningun motor va a lanzar un error por eso.</a:t>
+            </a:r>
+          </a:p>
+          <a:p>
+            <a:r>
+              <a:t>Para conjuntos completos, donde el conteo puede coincidir con filas distintas, se usa EXCEPT en los DOS sentidos, y el docente tiene que saber por que son dos: A EXCEPT B devuelve lo que esta en A y no esta en B, asi que si sale vacio todavia puede haber filas de mas en B; se corren las dos direcciones unidas con UNION ALL y se exige cero filas en total.</a:t>
+            </a:r>
+          </a:p>
+          <a:p>
+            <a:r>
+              <a:t>Fuera de la lamina (habla de la practica): Por eso el taller cobra la prueba dos veces, unos 6 de los 100 puntos, y hay dos formas segun lo que se compare.</a:t>
+            </a:r>
+          </a:p>
+          <a:p>
+            <a:r>
+              <a:t>Fuera de la lamina (habla de la practica): Tres advertencias al calificar.</a:t>
             </a:r>
           </a:p>
         </p:txBody>
@@ -1806,12 +1327,47 @@
           <a:lstStyle/>
           <a:p>
             <a:r>
-              <a:t>Fuera de la lamina (habla de la practica, no del tema):</a:t>
-            </a:r>
-          </a:p>
-          <a:p>
-            <a:r>
-              <a:t>- El antipatron de la funcion sobre la columna merece parrafo propio porque conecta con la Clase 7 y porque es el que la pregunta 4 pone de primero.</a:t>
+              <a:t>La version ANTES es SELECT * FROM cita c, mascota m, dueno d, veterinario v con las cuatro condiciones de union en el WHERE, to_char sobre la fecha y UPPER sobre el estado, y el docente debe saber que esta mal en cada linea.</a:t>
+            </a:r>
+          </a:p>
+          <a:p>
+            <a:r>
+              <a:t>SELECT * arrastra todas las columnas de las cuatro tablas cuando la pantalla de agenda necesita seis, lo cual multiplica el ancho de la fila y con el la memoria de trabajo del ordenamiento.</a:t>
+            </a:r>
+          </a:p>
+          <a:p>
+            <a:r>
+              <a:t>Las dos funciones sobre columnas se explicaron en el parrafo del predicado sargable.</a:t>
+            </a:r>
+          </a:p>
+          <a:p>
+            <a:r>
+              <a:t>Hay que decir aqui, y no despues.</a:t>
+            </a:r>
+          </a:p>
+          <a:p>
+            <a:r>
+              <a:t>ON no acelera nada, porque PostgreSQL normaliza las dos formas al mismo plan interno; se gana legibilidad y se gana que un ON faltante salte a la vista, o sea seguridad, no milisegundos.</a:t>
+            </a:r>
+          </a:p>
+          <a:p>
+            <a:r>
+              <a:t>Si el docente lo presenta como una mejora de rendimiento, esta ensenando justo la opcion por la que va a descontar.</a:t>
+            </a:r>
+          </a:p>
+          <a:p>
+            <a:r>
+              <a:t>La version DESPUES proyecta las seis columnas, escribe los tres JOIN...</a:t>
+            </a:r>
+          </a:p>
+          <a:p>
+            <a:r>
+              <a:t>Fuera de la lamina (habla de la practica): Hay que decir aqui, y no despues, lo que la quinta afirmacion de la pregunta 4 castiga: cambiar la coma por JOIN ...</a:t>
+            </a:r>
+          </a:p>
+          <a:p>
+            <a:r>
+              <a:t>Fuera de la lamina (habla de la practica): El script cierra con los bloques de la subconsulta correlacionada y con las dos pruebas de equivalencia, incluido el contraejemplo de COUNT(*) contra COUNT(c.id_cita) sobre los duenos 2001 a 2006, que es medio minuto de demo y ahorra la mitad de los reclamos de la pregunta 3.</a:t>
             </a:r>
           </a:p>
         </p:txBody>
@@ -1881,23 +1437,37 @@
           <a:lstStyle/>
           <a:p>
             <a:r>
-              <a:t>Fuera de la lamina (habla de la practica, no del tema):</a:t>
-            </a:r>
-          </a:p>
-          <a:p>
-            <a:r>
-              <a:t>- Es la pregunta 3, otros 20 puntos, y la cuarta afirmacion de la pregunta 4 dice lo mismo.</a:t>
-            </a:r>
-          </a:p>
-          <a:p/>
-          <a:p>
-            <a:r>
-              <a:t>Dos detalles que valen puntos y que el docente tiene que poder justificar en el momento.</a:t>
-            </a:r>
-          </a:p>
-          <a:p>
-            <a:r>
-              <a:t>No esta colgada.</a:t>
+              <a:t>Soporta EXPLAIN, EXPLAIN ANALYZE y la opcion BUFFERS; si en alguna maquina BUFFERS no responde.</a:t>
+            </a:r>
+          </a:p>
+          <a:p>
+            <a:r>
+              <a:t>Lo que hay que documentar en papel.</a:t>
+            </a:r>
+          </a:p>
+          <a:p>
+            <a:r>
+              <a:t>Fuera de la lamina (habla de la practica): Soporta EXPLAIN, EXPLAIN ANALYZE y la opcion BUFFERS; si en alguna maquina BUFFERS no responde, el enunciado ya autoriza usar EXPLAIN ANALYZE a secas y declararlo en la seccion 5 de la pregunta 5, asi que eso no cuesta puntos.</a:t>
+            </a:r>
+          </a:p>
+          <a:p>
+            <a:r>
+              <a:t>Fuera de la lamina (habla de la practica): Hoy no se ofrece ningun playground externo como alterno, y conviene que lo digas asi de claro: en DB Fiddle o en cualquier otro no existe la base sembrada, de modo que quien mida ahi obtiene otros numeros, y la rubrica pide los del plan real -- el «Rows Removed by Filter: 29919» y las 91 filas son justo las dos anclas con las que se verifica.</a:t>
+            </a:r>
+          </a:p>
+          <a:p>
+            <a:r>
+              <a:t>Fuera de la lamina (habla de la practica): Un alterno que cuesta puntos no es un alterno.</a:t>
+            </a:r>
+          </a:p>
+          <a:p>
+            <a:r>
+              <a:t>Fuera de la lamina (habla de la practica): Lo que hay que documentar en papel, porque el entorno no lo permite y es literalmente la seccion 5 de la pregunta 5: los tiempos con la memoria intermedia vacia, ya que vaciarla exige privilegios de administrador; el comportamiento con varias sesiones compitiendo, que es la Clase 10; y cualquier comparacion por encima de unos cientos de miles de filas.</a:t>
+            </a:r>
+          </a:p>
+          <a:p>
+            <a:r>
+              <a:t>Fuera de la lamina (habla de la practica): Los milisegundos, ademas, cambian entre dos corridas seguidas en la misma maquina: lo que no cambia son los conteos de filas, y por eso los conteos son lo que se califica y los milisegundos solo tienen que ser coherentes entre si.</a:t>
             </a:r>
           </a:p>
         </p:txBody>
@@ -5460,22 +5030,6 @@
                 </a:solidFill>
                 <a:latin typeface="Calibri"/>
               </a:rPr>
-              <a:t>–   De aqui sale la explicacion de un fenomeno que desconcierta: la misma consulta, sin cambiar una letra, puede tener hoy un plan distinto al de ayer</a:t>
-            </a:r>
-          </a:p>
-          <a:p>
-            <a:pPr>
-              <a:spcAft>
-                <a:spcPts val="800"/>
-              </a:spcAft>
-            </a:pPr>
-            <a:r>
-              <a:rPr sz="2000" b="0" i="0">
-                <a:solidFill>
-                  <a:srgbClr val="333333"/>
-                </a:solidFill>
-                <a:latin typeface="Calibri"/>
-              </a:rPr>
               <a:t>–   Porque la tabla crecio, porque se recolectaron estadisticas nuevas, porque alguien creo un indice o porque el valor comparado cambio la selectividad estimada.</a:t>
             </a:r>
           </a:p>
@@ -7655,22 +7209,6 @@
               <a:t>–   Porque el dominio ya esta normalizado por el CHECK (estado IN ('PROGRAMADA','ATENDIDA','CANCELADA')), de modo que no existe ninguna fila en minusculas que UPPER pudiera rescatar.</a:t>
             </a:r>
           </a:p>
-          <a:p>
-            <a:pPr>
-              <a:spcAft>
-                <a:spcPts val="800"/>
-              </a:spcAft>
-            </a:pPr>
-            <a:r>
-              <a:rPr sz="2000" b="0" i="0">
-                <a:solidFill>
-                  <a:srgbClr val="333333"/>
-                </a:solidFill>
-                <a:latin typeface="Calibri"/>
-              </a:rPr>
-              <a:t>–   Un caso mas: LIKE 'Lu%' si usa indice porque el comodin va al final, y LIKE '%una%' no, porque no hay prefijo por donde bajar el arbol.</a:t>
-            </a:r>
-          </a:p>
         </p:txBody>
       </p:sp>
       <p:sp>
@@ -7888,6 +7426,22 @@
                 </a:solidFill>
                 <a:latin typeface="Calibri"/>
               </a:rPr>
+              <a:t>–   Un caso mas: LIKE 'Lu%' si usa indice porque el comodin va al final, y LIKE '%una%' no, porque no hay prefijo por donde bajar el arbol.</a:t>
+            </a:r>
+          </a:p>
+          <a:p>
+            <a:pPr>
+              <a:spcAft>
+                <a:spcPts val="800"/>
+              </a:spcAft>
+            </a:pPr>
+            <a:r>
+              <a:rPr sz="2000" b="0" i="0">
+                <a:solidFill>
+                  <a:srgbClr val="333333"/>
+                </a:solidFill>
+                <a:latin typeface="Calibri"/>
+              </a:rPr>
               <a:t>–   Cuando la funcion es necesaria para el negocio existe la salida de la clase siguiente, el indice funcional,, que existe en PostgreSQL y en Oracle; hoy se menciona solo como adelanto, para que nadie crea que las funciones estan prohibidas en el WHERE.</a:t>
             </a:r>
           </a:p>
@@ -8252,6 +7806,40 @@
               <a:t>–   Cada lámina se sostiene sola: sirve para repasar aunque hayas faltado.</a:t>
             </a:r>
           </a:p>
+          <a:p>
+            <a:pPr>
+              <a:spcAft>
+                <a:spcPts val="800"/>
+              </a:spcAft>
+            </a:pPr>
+            <a:r>
+              <a:rPr sz="2000" b="0" i="0">
+                <a:solidFill>
+                  <a:srgbClr val="333333"/>
+                </a:solidFill>
+                <a:latin typeface="Calibri"/>
+              </a:rPr>
+              <a:t>–   </a:t>
+            </a:r>
+            <a:r>
+              <a:rPr sz="2000" b="1" i="0">
+                <a:solidFill>
+                  <a:srgbClr val="333333"/>
+                </a:solidFill>
+                <a:latin typeface="Calibri"/>
+              </a:rPr>
+              <a:t>Conceptos de hoy:</a:t>
+            </a:r>
+            <a:r>
+              <a:rPr sz="2000" b="0" i="0">
+                <a:solidFill>
+                  <a:srgbClr val="333333"/>
+                </a:solidFill>
+                <a:latin typeface="Calibri"/>
+              </a:rPr>
+              <a:t> SQL es declarativo · Leer un plan · Las estadisticas · Cardinalidad y selectividad.</a:t>
+            </a:r>
+          </a:p>
         </p:txBody>
       </p:sp>
       <p:sp>
@@ -8860,6 +8448,22 @@
               <a:t>–   Como hay 2.006 duenos, se ejecuta 2.006 veces, y cada ejecucion recorre mascota y cita completas: del orden de 70 millones de filas procesadas para producir 2.006.</a:t>
             </a:r>
           </a:p>
+          <a:p>
+            <a:pPr>
+              <a:spcAft>
+                <a:spcPts val="800"/>
+              </a:spcAft>
+            </a:pPr>
+            <a:r>
+              <a:rPr sz="2000" b="0" i="0">
+                <a:solidFill>
+                  <a:srgbClr val="333333"/>
+                </a:solidFill>
+                <a:latin typeface="Calibri"/>
+              </a:rPr>
+              <a:t>–   El plan lo dice con un nodo SubPlan y con loops=2006, y loops es el unico lugar del plan donde se lee «esto se repitio»</a:t>
+            </a:r>
+          </a:p>
         </p:txBody>
       </p:sp>
       <p:sp>
@@ -9077,22 +8681,6 @@
                 </a:solidFill>
                 <a:latin typeface="Calibri"/>
               </a:rPr>
-              <a:t>–   El plan lo dice con un nodo SubPlan y con loops=2006, y loops es el unico lugar del plan donde se lee «esto se repitio»</a:t>
-            </a:r>
-          </a:p>
-          <a:p>
-            <a:pPr>
-              <a:spcAft>
-                <a:spcPts val="800"/>
-              </a:spcAft>
-            </a:pPr>
-            <a:r>
-              <a:rPr sz="2000" b="0" i="0">
-                <a:solidFill>
-                  <a:srgbClr val="333333"/>
-                </a:solidFill>
-                <a:latin typeface="Calibri"/>
-              </a:rPr>
               <a:t>–   Si el docente no ensena a buscar ese campo, el estudiante va a senalar como nodo mas costoso el Seq Scan de arriba, que aparece con un tiempo mayor solo porque incluye a sus hijos.</a:t>
             </a:r>
           </a:p>
@@ -9648,6 +9236,22 @@
               <a:t>–   Mostrar que el plan dice loops=200 y decir en voz alta que la version completa es diez veces esa; lo que no se puede hacer es saltarse la medicion y afirmar el resultado.</a:t>
             </a:r>
           </a:p>
+          <a:p>
+            <a:pPr>
+              <a:spcAft>
+                <a:spcPts val="800"/>
+              </a:spcAft>
+            </a:pPr>
+            <a:r>
+              <a:rPr sz="2000" b="0" i="0">
+                <a:solidFill>
+                  <a:srgbClr val="333333"/>
+                </a:solidFill>
+                <a:latin typeface="Calibri"/>
+              </a:rPr>
+              <a:t>–   Salida esperada: los dos rankings devuelven las mismas filas, los duenos sin citas aparecen con 0 en los dos, y el plan de la reescritura ya no muestra un nodo repetido 2.006 veces.</a:t>
+            </a:r>
+          </a:p>
         </p:txBody>
       </p:sp>
       <p:sp>
@@ -10330,7 +9934,7 @@
                 </a:solidFill>
                 <a:latin typeface="Calibri"/>
               </a:rPr>
-              <a:t>El antes y el despues del script de la clase (1/3)</a:t>
+              <a:t>El antes y el despues del script de la clase (1/2)</a:t>
             </a:r>
           </a:p>
         </p:txBody>
@@ -10418,6 +10022,38 @@
                 <a:latin typeface="Calibri"/>
               </a:rPr>
               <a:t>–   El resultado no es un error sino un producto cartesiano —30.010 por 5.008 filas son mas de 150 millones— que en el navegador acaba en una pestana bloqueada.</a:t>
+            </a:r>
+          </a:p>
+          <a:p>
+            <a:pPr>
+              <a:spcAft>
+                <a:spcPts val="800"/>
+              </a:spcAft>
+            </a:pPr>
+            <a:r>
+              <a:rPr sz="2000" b="0" i="0">
+                <a:solidFill>
+                  <a:srgbClr val="333333"/>
+                </a:solidFill>
+                <a:latin typeface="Calibri"/>
+              </a:rPr>
+              <a:t>–   ON, filtra con el rango de fecha y con la comparacion directa del estado, y ordena por c.fecha_hora.</a:t>
+            </a:r>
+          </a:p>
+          <a:p>
+            <a:pPr>
+              <a:spcAft>
+                <a:spcPts val="800"/>
+              </a:spcAft>
+            </a:pPr>
+            <a:r>
+              <a:rPr sz="2000" b="0" i="0">
+                <a:solidFill>
+                  <a:srgbClr val="333333"/>
+                </a:solidFill>
+                <a:latin typeface="Calibri"/>
+              </a:rPr>
+              <a:t>–   Filtrar temprano se llama empuje de predicados o predicate pushdown, y hay que decir con honestidad que el optimizador moderno lo hace solo casi siempre; lo que si cambia el plan es dejar de esconder el filtro donde no puede moverlo</a:t>
             </a:r>
           </a:p>
         </p:txBody>
@@ -10598,7 +10234,7 @@
                 </a:solidFill>
                 <a:latin typeface="Calibri"/>
               </a:rPr>
-              <a:t>El antes y el despues del script de la clase (2/3)</a:t>
+              <a:t>El antes y el despues del script de la clase (2/2)</a:t>
             </a:r>
           </a:p>
         </p:txBody>
@@ -10637,7 +10273,7 @@
                 </a:solidFill>
                 <a:latin typeface="Calibri"/>
               </a:rPr>
-              <a:t>–   ON, filtra con el rango de fecha y con la comparacion directa del estado, y ordena por c.fecha_hora.</a:t>
+              <a:t>–   Y los dos casos clasicos son escribirlo en HAVING cuando cabia en WHERE, y ponerlo en el WHERE de un LEFT JOIN cuando corresponde al ON, lo que ademas cambia el significado de la consulta.</a:t>
             </a:r>
           </a:p>
           <a:p>
@@ -10653,7 +10289,7 @@
                 </a:solidFill>
                 <a:latin typeface="Calibri"/>
               </a:rPr>
-              <a:t>–   Filtrar temprano se llama empuje de predicados o predicate pushdown, y hay que decir con honestidad que el optimizador moderno lo hace solo casi siempre; lo que si cambia el plan es dejar de esconder el filtro donde no puede moverlo</a:t>
+              <a:t>–   La tercera sentencia de la demo agrega LIMIT 50, que es lo que la pantalla de agenda realmente necesita: el motor deja de producir filas en cuanto tiene 50, y por eso el tiempo baja aunque el plan sea el mismo.</a:t>
             </a:r>
           </a:p>
           <a:p>
@@ -10669,23 +10305,7 @@
                 </a:solidFill>
                 <a:latin typeface="Calibri"/>
               </a:rPr>
-              <a:t>–   Y los dos casos clasicos son escribirlo en HAVING cuando cabia en WHERE, y ponerlo en el WHERE de un LEFT JOIN cuando corresponde al ON, lo que ademas cambia el significado de la consulta.</a:t>
-            </a:r>
-          </a:p>
-          <a:p>
-            <a:pPr>
-              <a:spcAft>
-                <a:spcPts val="800"/>
-              </a:spcAft>
-            </a:pPr>
-            <a:r>
-              <a:rPr sz="2000" b="0" i="0">
-                <a:solidFill>
-                  <a:srgbClr val="333333"/>
-                </a:solidFill>
-                <a:latin typeface="Calibri"/>
-              </a:rPr>
-              <a:t>–   La tercera sentencia de la demo agrega LIMIT 50, que es lo que la pantalla de agenda realmente necesita: el motor deja de producir filas en cuanto tiene 50, y por eso el tiempo baja aunque el plan sea el mismo.</a:t>
+              <a:t>–   El script cierra con los bloques de la subconsulta correlacionada y con las dos pruebas de equivalencia, incluido el contraejemplo de COUNT(*) contra COUNT(c.id_cita) sobre los duenos 2001 a 2006.</a:t>
             </a:r>
           </a:p>
         </p:txBody>
@@ -10866,7 +10486,7 @@
                 </a:solidFill>
                 <a:latin typeface="Calibri"/>
               </a:rPr>
-              <a:t>El antes y el despues del script de la clase (3/3)</a:t>
+              <a:t>Donde se corre todo esto, y que no se puede medir aqui</a:t>
             </a:r>
           </a:p>
         </p:txBody>
@@ -10905,7 +10525,71 @@
                 </a:solidFill>
                 <a:latin typeface="Calibri"/>
               </a:rPr>
-              <a:t>–   El script cierra con los bloques de la subconsulta correlacionada y con las dos pruebas de equivalencia, incluido el contraejemplo de COUNT(*) contra COUNT(c.id_cita) sobre los duenos 2001 a 2006</a:t>
+              <a:t>–   La herramienta del dia es PostgreSQL compilado para el navegador: es el unico entorno de la clase que trae las 30.010 citas ya sembradas y las estadisticas ya recolectadas.</a:t>
+            </a:r>
+          </a:p>
+          <a:p>
+            <a:pPr>
+              <a:spcAft>
+                <a:spcPts val="800"/>
+              </a:spcAft>
+            </a:pPr>
+            <a:r>
+              <a:rPr sz="2000" b="0" i="0">
+                <a:solidFill>
+                  <a:srgbClr val="333333"/>
+                </a:solidFill>
+                <a:latin typeface="Calibri"/>
+              </a:rPr>
+              <a:t>–   La justificacion de media pagina y la matriz de cambios se escriben en Google Docs.</a:t>
+            </a:r>
+          </a:p>
+          <a:p>
+            <a:pPr>
+              <a:spcAft>
+                <a:spcPts val="800"/>
+              </a:spcAft>
+            </a:pPr>
+            <a:r>
+              <a:rPr sz="2000" b="0" i="0">
+                <a:solidFill>
+                  <a:srgbClr val="333333"/>
+                </a:solidFill>
+                <a:latin typeface="Calibri"/>
+              </a:rPr>
+              <a:t>–   Hoy no se ofrece ningun playground externo como alterno, y conviene que lo digas asi de claro: en DB Fiddle o en cualquier otro no existe la base sembrada, de modo que quien mida ahi obtiene otros numeros.</a:t>
+            </a:r>
+          </a:p>
+          <a:p>
+            <a:pPr>
+              <a:spcAft>
+                <a:spcPts val="800"/>
+              </a:spcAft>
+            </a:pPr>
+            <a:r>
+              <a:rPr sz="2000" b="0" i="0">
+                <a:solidFill>
+                  <a:srgbClr val="333333"/>
+                </a:solidFill>
+                <a:latin typeface="Calibri"/>
+              </a:rPr>
+              <a:t>–   Tampoco tiene sentido hoy un comparador de motores, porque el motor de hoy es uno solo.</a:t>
+            </a:r>
+          </a:p>
+          <a:p>
+            <a:pPr>
+              <a:spcAft>
+                <a:spcPts val="800"/>
+              </a:spcAft>
+            </a:pPr>
+            <a:r>
+              <a:rPr sz="2000" b="0" i="0">
+                <a:solidFill>
+                  <a:srgbClr val="333333"/>
+                </a:solidFill>
+                <a:latin typeface="Calibri"/>
+              </a:rPr>
+              <a:t>–   Los milisegundos, ademas, cambian entre dos corridas seguidas en la misma maquina: lo que no cambia son los conteos de filas.</a:t>
             </a:r>
           </a:p>
         </p:txBody>
@@ -11938,7 +11622,7 @@
                 </a:solidFill>
                 <a:latin typeface="Calibri"/>
               </a:rPr>
-              <a:t>Donde se corre todo esto, y que no se puede medir aqui (1/2)</a:t>
+              <a:t>Preguntas frecuentes del grupo (1/3)</a:t>
             </a:r>
           </a:p>
         </p:txBody>
@@ -11977,7 +11661,7 @@
                 </a:solidFill>
                 <a:latin typeface="Calibri"/>
               </a:rPr>
-              <a:t>–   La herramienta del dia es PostgreSQL compilado para el navegador: es el unico entorno de la clase que trae las 30.010 citas ya sembradas y las estadisticas ya recolectadas.</a:t>
+              <a:t>–   Si la consulta ya devuelve el resultado correcto, para que reescribirla: correccion y costo son ejes independientes, el motor garantiza el resultado pero no el tiempo</a:t>
             </a:r>
           </a:p>
           <a:p>
@@ -11993,7 +11677,7 @@
                 </a:solidFill>
                 <a:latin typeface="Calibri"/>
               </a:rPr>
-              <a:t>–   Soporta EXPLAIN, EXPLAIN ANALYZE y la opcion BUFFERS; si en alguna maquina BUFFERS no responde.</a:t>
+              <a:t>–   Y una consulta correcta que tarda 40 segundos congela la pantalla de recepcion igual que si estuviera mal.</a:t>
             </a:r>
           </a:p>
           <a:p>
@@ -12009,7 +11693,7 @@
                 </a:solidFill>
                 <a:latin typeface="Calibri"/>
               </a:rPr>
-              <a:t>–   La justificacion de media pagina y la matriz de cambios se escriben en Google Docs.</a:t>
+              <a:t>–   Cuanto debe bajar el tiempo para que cuente como optimizada: la evidencia no es un porcentaje sino un cambio verificable y leido del plan</a:t>
             </a:r>
           </a:p>
           <a:p>
@@ -12025,7 +11709,7 @@
                 </a:solidFill>
                 <a:latin typeface="Calibri"/>
               </a:rPr>
-              <a:t>–   Hoy no se ofrece ningun playground externo como alterno, y conviene que lo digas asi de claro: en DB Fiddle o en cualquier otro no existe la base sembrada, de modo que quien mida ahi obtiene otros numeros</a:t>
+              <a:t>–   Y hoy ese cambio es de dos clases, menos filas procesadas y menos pasadas sobre la tabla —el SubPlan con loops=2006 que se convierte en un HashAggregate—; lo que hoy NO va a pasar</a:t>
             </a:r>
           </a:p>
         </p:txBody>
@@ -12206,7 +11890,7 @@
                 </a:solidFill>
                 <a:latin typeface="Calibri"/>
               </a:rPr>
-              <a:t>Donde se corre todo esto, y que no se puede medir aqui (2/2)</a:t>
+              <a:t>Preguntas frecuentes del grupo (2/3)</a:t>
             </a:r>
           </a:p>
         </p:txBody>
@@ -12245,7 +11929,7 @@
                 </a:solidFill>
                 <a:latin typeface="Calibri"/>
               </a:rPr>
-              <a:t>–   Tampoco tiene sentido hoy un comparador de motores, porque el motor de hoy es uno solo.</a:t>
+              <a:t>–   Y hay que anticiparlo porque es la confusion mas frecuente de la clase, es que un Seq Scan se convierta en Index Scan, porque en esta base no hay ningun indice y no puede aparecer uno de la nada: eso es la Clase 7.</a:t>
             </a:r>
           </a:p>
           <a:p>
@@ -12261,7 +11945,39 @@
                 </a:solidFill>
                 <a:latin typeface="Calibri"/>
               </a:rPr>
-              <a:t>–   Los milisegundos, ademas, cambian entre dos corridas seguidas en la misma maquina: lo que no cambia son los conteos de filas.</a:t>
+              <a:t>–   Por que la misma consulta tarda mas la primera vez: la primera ejecucion trae las paginas de disco y la segunda las encuentra en memoria, asi que se mide tres veces y se reporta la segunda o la tercera</a:t>
+            </a:r>
+          </a:p>
+          <a:p>
+            <a:pPr>
+              <a:spcAft>
+                <a:spcPts val="800"/>
+              </a:spcAft>
+            </a:pPr>
+            <a:r>
+              <a:rPr sz="2000" b="0" i="0">
+                <a:solidFill>
+                  <a:srgbClr val="333333"/>
+                </a:solidFill>
+                <a:latin typeface="Calibri"/>
+              </a:rPr>
+              <a:t>–   Y EXPLAIN (ANALYZE, BUFFERS) muestra cuantas paginas se leyeron y cuantas se acertaron en cache.</a:t>
+            </a:r>
+          </a:p>
+          <a:p>
+            <a:pPr>
+              <a:spcAft>
+                <a:spcPts val="800"/>
+              </a:spcAft>
+            </a:pPr>
+            <a:r>
+              <a:rPr sz="2000" b="0" i="0">
+                <a:solidFill>
+                  <a:srgbClr val="333333"/>
+                </a:solidFill>
+                <a:latin typeface="Calibri"/>
+              </a:rPr>
+              <a:t>–   Y por que el estimado no coincide con el real: siempre que la diferencia sea de dos o tres veces esta bien y no hay nada que corregir, la senal de alarma es un orden de magnitud</a:t>
             </a:r>
           </a:p>
         </p:txBody>
@@ -12442,7 +12158,7 @@
                 </a:solidFill>
                 <a:latin typeface="Calibri"/>
               </a:rPr>
-              <a:t>Preguntas frecuentes del grupo (1/3)</a:t>
+              <a:t>Preguntas frecuentes del grupo (3/3)</a:t>
             </a:r>
           </a:p>
         </p:txBody>
@@ -12481,7 +12197,7 @@
                 </a:solidFill>
                 <a:latin typeface="Calibri"/>
               </a:rPr>
-              <a:t>–   Si la consulta ya devuelve el resultado correcto, para que reescribirla: correccion y costo son ejes independientes, el motor garantiza el resultado pero no el tiempo</a:t>
+              <a:t>–   Y en esta base, con ANALYZE recien corrido, las divergencias grandes vienen de que dos filtros no son independientes y no de estadisticas viejas.</a:t>
             </a:r>
           </a:p>
           <a:p>
@@ -12497,7 +12213,7 @@
                 </a:solidFill>
                 <a:latin typeface="Calibri"/>
               </a:rPr>
-              <a:t>–   Y una consulta correcta que tarda 40 segundos congela la pantalla de recepcion igual que si estuviera mal.</a:t>
+              <a:t>–   La clase se apoya en la Clase 4, donde se vio que un disparador corre fila por fila y encarece una carga masiva —es la misma aritmetica del loops=2006 de hoy—</a:t>
             </a:r>
           </a:p>
           <a:p>
@@ -12513,23 +12229,7 @@
                 </a:solidFill>
                 <a:latin typeface="Calibri"/>
               </a:rPr>
-              <a:t>–   Cuanto debe bajar el tiempo para que cuente como optimizada: la evidencia no es un porcentaje sino un cambio verificable y leido del plan</a:t>
-            </a:r>
-          </a:p>
-          <a:p>
-            <a:pPr>
-              <a:spcAft>
-                <a:spcPts val="800"/>
-              </a:spcAft>
-            </a:pPr>
-            <a:r>
-              <a:rPr sz="2000" b="0" i="0">
-                <a:solidFill>
-                  <a:srgbClr val="333333"/>
-                </a:solidFill>
-                <a:latin typeface="Calibri"/>
-              </a:rPr>
-              <a:t>–   Y hoy ese cambio es de dos clases, menos filas procesadas y menos pasadas sobre la tabla —el SubPlan con loops=2006 que se convierte en un HashAggregate—; lo que hoy NO va a pasar</a:t>
+              <a:t>–   Y entrega el testigo a la Clase 7, que crea los indices que hoy se echaron de menos, y a la Clase 8, que suma transacciones y bloqueos al mismo analisis.</a:t>
             </a:r>
           </a:p>
         </p:txBody>
@@ -12710,21 +12410,141 @@
                 </a:solidFill>
                 <a:latin typeface="Calibri"/>
               </a:rPr>
-              <a:t>Preguntas frecuentes del grupo (2/3)</a:t>
-            </a:r>
-          </a:p>
-        </p:txBody>
-      </p:sp>
-      <p:sp>
-        <p:nvSpPr>
-          <p:cNvPr id="5" name="TextBox 4"/>
+              <a:t>El antipatron y su reescritura</a:t>
+            </a:r>
+          </a:p>
+        </p:txBody>
+      </p:sp>
+      <p:sp>
+        <p:nvSpPr>
+          <p:cNvPr id="5" name="Rounded Rectangle 4"/>
+          <p:cNvSpPr/>
+          <p:nvPr/>
+        </p:nvSpPr>
+        <p:spPr>
+          <a:xfrm>
+            <a:off x="457200" y="1261872"/>
+            <a:ext cx="11277295" cy="5093208"/>
+          </a:xfrm>
+          <a:prstGeom prst="roundRect">
+            <a:avLst>
+              <a:gd name="adj" fmla="val 12000"/>
+            </a:avLst>
+          </a:prstGeom>
+          <a:solidFill>
+            <a:srgbClr val="1E2A38"/>
+          </a:solidFill>
+          <a:ln>
+            <a:noFill/>
+          </a:ln>
+        </p:spPr>
+        <p:style>
+          <a:lnRef idx="1">
+            <a:schemeClr val="accent1"/>
+          </a:lnRef>
+          <a:fillRef idx="3">
+            <a:schemeClr val="accent1"/>
+          </a:fillRef>
+          <a:effectRef idx="2">
+            <a:schemeClr val="accent1"/>
+          </a:effectRef>
+          <a:fontRef idx="minor">
+            <a:schemeClr val="lt1"/>
+          </a:fontRef>
+        </p:style>
+        <p:txBody>
+          <a:bodyPr rtlCol="0" anchor="ctr"/>
+          <a:lstStyle/>
+          <a:p>
+            <a:pPr algn="ctr"/>
+          </a:p>
+        </p:txBody>
+      </p:sp>
+      <p:sp>
+        <p:nvSpPr>
+          <p:cNvPr id="6" name="Rectangle 5"/>
+          <p:cNvSpPr/>
+          <p:nvPr/>
+        </p:nvSpPr>
+        <p:spPr>
+          <a:xfrm>
+            <a:off x="457200" y="1261872"/>
+            <a:ext cx="11277295" cy="320040"/>
+          </a:xfrm>
+          <a:prstGeom prst="rect">
+            <a:avLst/>
+          </a:prstGeom>
+          <a:solidFill>
+            <a:srgbClr val="095292"/>
+          </a:solidFill>
+          <a:ln>
+            <a:noFill/>
+          </a:ln>
+        </p:spPr>
+        <p:style>
+          <a:lnRef idx="1">
+            <a:schemeClr val="accent1"/>
+          </a:lnRef>
+          <a:fillRef idx="3">
+            <a:schemeClr val="accent1"/>
+          </a:fillRef>
+          <a:effectRef idx="2">
+            <a:schemeClr val="accent1"/>
+          </a:effectRef>
+          <a:fontRef idx="minor">
+            <a:schemeClr val="lt1"/>
+          </a:fontRef>
+        </p:style>
+        <p:txBody>
+          <a:bodyPr rtlCol="0" anchor="ctr"/>
+          <a:lstStyle/>
+          <a:p>
+            <a:pPr algn="ctr"/>
+          </a:p>
+        </p:txBody>
+      </p:sp>
+      <p:sp>
+        <p:nvSpPr>
+          <p:cNvPr id="7" name="TextBox 6"/>
           <p:cNvSpPr txBox="1"/>
           <p:nvPr/>
         </p:nvSpPr>
         <p:spPr>
           <a:xfrm>
-            <a:off x="457200" y="1170432"/>
-            <a:ext cx="11277295" cy="5230368"/>
+            <a:off x="685800" y="1307592"/>
+            <a:ext cx="10820095" cy="256032"/>
+          </a:xfrm>
+          <a:prstGeom prst="rect">
+            <a:avLst/>
+          </a:prstGeom>
+          <a:noFill/>
+        </p:spPr>
+        <p:txBody>
+          <a:bodyPr wrap="square" anchor="ctr"/>
+          <a:lstStyle/>
+          <a:p>
+            <a:r>
+              <a:rPr sz="1000" b="1" i="0">
+                <a:solidFill>
+                  <a:srgbClr val="269CCB"/>
+                </a:solidFill>
+                <a:latin typeface="Calibri"/>
+              </a:rPr>
+              <a:t>● ● ●</a:t>
+            </a:r>
+          </a:p>
+        </p:txBody>
+      </p:sp>
+      <p:sp>
+        <p:nvSpPr>
+          <p:cNvPr id="8" name="TextBox 7"/>
+          <p:cNvSpPr txBox="1"/>
+          <p:nvPr/>
+        </p:nvSpPr>
+        <p:spPr>
+          <a:xfrm>
+            <a:off x="777240" y="1719072"/>
+            <a:ext cx="10637215" cy="4453128"/>
           </a:xfrm>
           <a:prstGeom prst="rect">
             <a:avLst/>
@@ -12739,72 +12559,200 @@
           <a:p>
             <a:pPr>
               <a:spcAft>
-                <a:spcPts val="800"/>
+                <a:spcPts val="400"/>
               </a:spcAft>
             </a:pPr>
             <a:r>
-              <a:rPr sz="2000" b="0" i="0">
-                <a:solidFill>
-                  <a:srgbClr val="333333"/>
-                </a:solidFill>
-                <a:latin typeface="Calibri"/>
-              </a:rPr>
-              <a:t>–   Y hay que anticiparlo porque es la confusion mas frecuente de la clase, es que un Seq Scan se convierta en Index Scan, porque en esta base no hay ningun indice y no puede aparecer uno de la nada: eso es la Clase 7.</a:t>
+              <a:rPr sz="1400" b="0" i="0">
+                <a:solidFill>
+                  <a:srgbClr val="FFFFFF"/>
+                </a:solidFill>
+                <a:latin typeface="Calibri"/>
+              </a:rPr>
+              <a:t>-- ANTES: funcion sobre la columna -&gt; el indice de fecha_hora no se usa</a:t>
             </a:r>
           </a:p>
           <a:p>
             <a:pPr>
               <a:spcAft>
-                <a:spcPts val="800"/>
+                <a:spcPts val="400"/>
               </a:spcAft>
             </a:pPr>
             <a:r>
-              <a:rPr sz="2000" b="0" i="0">
-                <a:solidFill>
-                  <a:srgbClr val="333333"/>
-                </a:solidFill>
-                <a:latin typeface="Calibri"/>
-              </a:rPr>
-              <a:t>–   Por que la misma consulta tarda mas la primera vez: la primera ejecucion trae las paginas de disco y la segunda las encuentra en memoria, asi que se mide tres veces y se reporta la segunda o la tercera</a:t>
+              <a:rPr sz="1400" b="0" i="0">
+                <a:solidFill>
+                  <a:srgbClr val="FFFFFF"/>
+                </a:solidFill>
+                <a:latin typeface="Calibri"/>
+              </a:rPr>
+              <a:t>SELECT * FROM cita</a:t>
             </a:r>
           </a:p>
           <a:p>
             <a:pPr>
               <a:spcAft>
-                <a:spcPts val="800"/>
+                <a:spcPts val="400"/>
               </a:spcAft>
             </a:pPr>
             <a:r>
-              <a:rPr sz="2000" b="0" i="0">
-                <a:solidFill>
-                  <a:srgbClr val="333333"/>
-                </a:solidFill>
-                <a:latin typeface="Calibri"/>
-              </a:rPr>
-              <a:t>–   Y EXPLAIN (ANALYZE, BUFFERS) muestra cuantas paginas se leyeron y cuantas se acertaron en cache.</a:t>
+              <a:rPr sz="1400" b="0" i="0">
+                <a:solidFill>
+                  <a:srgbClr val="FFFFFF"/>
+                </a:solidFill>
+                <a:latin typeface="Calibri"/>
+              </a:rPr>
+              <a:t>WHERE TO_CHAR(fecha_hora, 'YYYY-MM-DD') = '2026-09-01';</a:t>
             </a:r>
           </a:p>
           <a:p>
             <a:pPr>
               <a:spcAft>
-                <a:spcPts val="800"/>
+                <a:spcPts val="400"/>
               </a:spcAft>
             </a:pPr>
             <a:r>
-              <a:rPr sz="2000" b="0" i="0">
-                <a:solidFill>
-                  <a:srgbClr val="333333"/>
-                </a:solidFill>
-                <a:latin typeface="Calibri"/>
-              </a:rPr>
-              <a:t>–   Y por que el estimado no coincide con el real: siempre que la diferencia sea de dos o tres veces esta bien y no hay nada que corregir, la senal de alarma es un orden de magnitud</a:t>
-            </a:r>
-          </a:p>
-        </p:txBody>
-      </p:sp>
-      <p:sp>
-        <p:nvSpPr>
-          <p:cNvPr id="6" name="TextBox 5"/>
+              <a:rPr sz="1400" b="0" i="0">
+                <a:solidFill>
+                  <a:srgbClr val="FFFFFF"/>
+                </a:solidFill>
+                <a:latin typeface="Calibri"/>
+              </a:rPr>
+              <a:t/>
+            </a:r>
+          </a:p>
+          <a:p>
+            <a:pPr>
+              <a:spcAft>
+                <a:spcPts val="400"/>
+              </a:spcAft>
+            </a:pPr>
+            <a:r>
+              <a:rPr sz="1400" b="0" i="0">
+                <a:solidFill>
+                  <a:srgbClr val="FFFFFF"/>
+                </a:solidFill>
+                <a:latin typeface="Calibri"/>
+              </a:rPr>
+              <a:t>-- DESPUES: rango sobre la columna desnuda -&gt; el indice si se usa</a:t>
+            </a:r>
+          </a:p>
+          <a:p>
+            <a:pPr>
+              <a:spcAft>
+                <a:spcPts val="400"/>
+              </a:spcAft>
+            </a:pPr>
+            <a:r>
+              <a:rPr sz="1400" b="0" i="0">
+                <a:solidFill>
+                  <a:srgbClr val="FFFFFF"/>
+                </a:solidFill>
+                <a:latin typeface="Calibri"/>
+              </a:rPr>
+              <a:t>SELECT c.id_cita, c.fecha_hora, m.nombre</a:t>
+            </a:r>
+          </a:p>
+          <a:p>
+            <a:pPr>
+              <a:spcAft>
+                <a:spcPts val="400"/>
+              </a:spcAft>
+            </a:pPr>
+            <a:r>
+              <a:rPr sz="1400" b="0" i="0">
+                <a:solidFill>
+                  <a:srgbClr val="FFFFFF"/>
+                </a:solidFill>
+                <a:latin typeface="Calibri"/>
+              </a:rPr>
+              <a:t>FROM cita c</a:t>
+            </a:r>
+          </a:p>
+          <a:p>
+            <a:pPr>
+              <a:spcAft>
+                <a:spcPts val="400"/>
+              </a:spcAft>
+            </a:pPr>
+            <a:r>
+              <a:rPr sz="1400" b="0" i="0">
+                <a:solidFill>
+                  <a:srgbClr val="FFFFFF"/>
+                </a:solidFill>
+                <a:latin typeface="Calibri"/>
+              </a:rPr>
+              <a:t>JOIN mascota m ON m.id_mascota = c.id_mascota</a:t>
+            </a:r>
+          </a:p>
+          <a:p>
+            <a:pPr>
+              <a:spcAft>
+                <a:spcPts val="400"/>
+              </a:spcAft>
+            </a:pPr>
+            <a:r>
+              <a:rPr sz="1400" b="0" i="0">
+                <a:solidFill>
+                  <a:srgbClr val="FFFFFF"/>
+                </a:solidFill>
+                <a:latin typeface="Calibri"/>
+              </a:rPr>
+              <a:t>WHERE c.fecha_hora &gt;= TIMESTAMP '2026-09-01 00:00:00'</a:t>
+            </a:r>
+          </a:p>
+          <a:p>
+            <a:pPr>
+              <a:spcAft>
+                <a:spcPts val="400"/>
+              </a:spcAft>
+            </a:pPr>
+            <a:r>
+              <a:rPr sz="1400" b="0" i="0">
+                <a:solidFill>
+                  <a:srgbClr val="FFFFFF"/>
+                </a:solidFill>
+                <a:latin typeface="Calibri"/>
+              </a:rPr>
+              <a:t>  AND c.fecha_hora &lt;  TIMESTAMP '2026-09-02 00:00:00';</a:t>
+            </a:r>
+          </a:p>
+          <a:p>
+            <a:pPr>
+              <a:spcAft>
+                <a:spcPts val="400"/>
+              </a:spcAft>
+            </a:pPr>
+            <a:r>
+              <a:rPr sz="1400" b="0" i="0">
+                <a:solidFill>
+                  <a:srgbClr val="FFFFFF"/>
+                </a:solidFill>
+                <a:latin typeface="Calibri"/>
+              </a:rPr>
+              <a:t/>
+            </a:r>
+          </a:p>
+          <a:p>
+            <a:pPr>
+              <a:spcAft>
+                <a:spcPts val="400"/>
+              </a:spcAft>
+            </a:pPr>
+            <a:r>
+              <a:rPr sz="1400" b="0" i="0">
+                <a:solidFill>
+                  <a:srgbClr val="FFFFFF"/>
+                </a:solidFill>
+                <a:latin typeface="Calibri"/>
+              </a:rPr>
+              <a:t>-- La regla: nunca envolver en una funcion la columna por la que se filtra.</a:t>
+            </a:r>
+          </a:p>
+        </p:txBody>
+      </p:sp>
+      <p:sp>
+        <p:nvSpPr>
+          <p:cNvPr id="9" name="TextBox 8"/>
           <p:cNvSpPr txBox="1"/>
           <p:nvPr/>
         </p:nvSpPr>
@@ -12978,21 +12926,141 @@
                 </a:solidFill>
                 <a:latin typeface="Calibri"/>
               </a:rPr>
-              <a:t>Preguntas frecuentes del grupo (3/3)</a:t>
-            </a:r>
-          </a:p>
-        </p:txBody>
-      </p:sp>
-      <p:sp>
-        <p:nvSpPr>
-          <p:cNvPr id="5" name="TextBox 4"/>
+              <a:t>EXPLAIN ANALYZE: la evidencia, no la opinion</a:t>
+            </a:r>
+          </a:p>
+        </p:txBody>
+      </p:sp>
+      <p:sp>
+        <p:nvSpPr>
+          <p:cNvPr id="5" name="Rounded Rectangle 4"/>
+          <p:cNvSpPr/>
+          <p:nvPr/>
+        </p:nvSpPr>
+        <p:spPr>
+          <a:xfrm>
+            <a:off x="457200" y="1261872"/>
+            <a:ext cx="11277295" cy="5093208"/>
+          </a:xfrm>
+          <a:prstGeom prst="roundRect">
+            <a:avLst>
+              <a:gd name="adj" fmla="val 12000"/>
+            </a:avLst>
+          </a:prstGeom>
+          <a:solidFill>
+            <a:srgbClr val="1E2A38"/>
+          </a:solidFill>
+          <a:ln>
+            <a:noFill/>
+          </a:ln>
+        </p:spPr>
+        <p:style>
+          <a:lnRef idx="1">
+            <a:schemeClr val="accent1"/>
+          </a:lnRef>
+          <a:fillRef idx="3">
+            <a:schemeClr val="accent1"/>
+          </a:fillRef>
+          <a:effectRef idx="2">
+            <a:schemeClr val="accent1"/>
+          </a:effectRef>
+          <a:fontRef idx="minor">
+            <a:schemeClr val="lt1"/>
+          </a:fontRef>
+        </p:style>
+        <p:txBody>
+          <a:bodyPr rtlCol="0" anchor="ctr"/>
+          <a:lstStyle/>
+          <a:p>
+            <a:pPr algn="ctr"/>
+          </a:p>
+        </p:txBody>
+      </p:sp>
+      <p:sp>
+        <p:nvSpPr>
+          <p:cNvPr id="6" name="Rectangle 5"/>
+          <p:cNvSpPr/>
+          <p:nvPr/>
+        </p:nvSpPr>
+        <p:spPr>
+          <a:xfrm>
+            <a:off x="457200" y="1261872"/>
+            <a:ext cx="11277295" cy="320040"/>
+          </a:xfrm>
+          <a:prstGeom prst="rect">
+            <a:avLst/>
+          </a:prstGeom>
+          <a:solidFill>
+            <a:srgbClr val="095292"/>
+          </a:solidFill>
+          <a:ln>
+            <a:noFill/>
+          </a:ln>
+        </p:spPr>
+        <p:style>
+          <a:lnRef idx="1">
+            <a:schemeClr val="accent1"/>
+          </a:lnRef>
+          <a:fillRef idx="3">
+            <a:schemeClr val="accent1"/>
+          </a:fillRef>
+          <a:effectRef idx="2">
+            <a:schemeClr val="accent1"/>
+          </a:effectRef>
+          <a:fontRef idx="minor">
+            <a:schemeClr val="lt1"/>
+          </a:fontRef>
+        </p:style>
+        <p:txBody>
+          <a:bodyPr rtlCol="0" anchor="ctr"/>
+          <a:lstStyle/>
+          <a:p>
+            <a:pPr algn="ctr"/>
+          </a:p>
+        </p:txBody>
+      </p:sp>
+      <p:sp>
+        <p:nvSpPr>
+          <p:cNvPr id="7" name="TextBox 6"/>
           <p:cNvSpPr txBox="1"/>
           <p:nvPr/>
         </p:nvSpPr>
         <p:spPr>
           <a:xfrm>
-            <a:off x="457200" y="1170432"/>
-            <a:ext cx="11277295" cy="5230368"/>
+            <a:off x="685800" y="1307592"/>
+            <a:ext cx="10820095" cy="256032"/>
+          </a:xfrm>
+          <a:prstGeom prst="rect">
+            <a:avLst/>
+          </a:prstGeom>
+          <a:noFill/>
+        </p:spPr>
+        <p:txBody>
+          <a:bodyPr wrap="square" anchor="ctr"/>
+          <a:lstStyle/>
+          <a:p>
+            <a:r>
+              <a:rPr sz="1000" b="1" i="0">
+                <a:solidFill>
+                  <a:srgbClr val="269CCB"/>
+                </a:solidFill>
+                <a:latin typeface="Calibri"/>
+              </a:rPr>
+              <a:t>● ● ●</a:t>
+            </a:r>
+          </a:p>
+        </p:txBody>
+      </p:sp>
+      <p:sp>
+        <p:nvSpPr>
+          <p:cNvPr id="8" name="TextBox 7"/>
+          <p:cNvSpPr txBox="1"/>
+          <p:nvPr/>
+        </p:nvSpPr>
+        <p:spPr>
+          <a:xfrm>
+            <a:off x="777240" y="1719072"/>
+            <a:ext cx="10637215" cy="4453128"/>
           </a:xfrm>
           <a:prstGeom prst="rect">
             <a:avLst/>
@@ -13007,56 +13075,184 @@
           <a:p>
             <a:pPr>
               <a:spcAft>
-                <a:spcPts val="800"/>
+                <a:spcPts val="400"/>
               </a:spcAft>
             </a:pPr>
             <a:r>
-              <a:rPr sz="2000" b="0" i="0">
-                <a:solidFill>
-                  <a:srgbClr val="333333"/>
-                </a:solidFill>
-                <a:latin typeface="Calibri"/>
-              </a:rPr>
-              <a:t>–   Y en esta base, con ANALYZE recien corrido, las divergencias grandes vienen de que dos filtros no son independientes y no de estadisticas viejas.</a:t>
+              <a:rPr sz="1400" b="0" i="0">
+                <a:solidFill>
+                  <a:srgbClr val="FFFFFF"/>
+                </a:solidFill>
+                <a:latin typeface="Calibri"/>
+              </a:rPr>
+              <a:t>EXPLAIN (ANALYZE, BUFFERS)</a:t>
             </a:r>
           </a:p>
           <a:p>
             <a:pPr>
               <a:spcAft>
-                <a:spcPts val="800"/>
+                <a:spcPts val="400"/>
               </a:spcAft>
             </a:pPr>
             <a:r>
-              <a:rPr sz="2000" b="0" i="0">
-                <a:solidFill>
-                  <a:srgbClr val="333333"/>
-                </a:solidFill>
-                <a:latin typeface="Calibri"/>
-              </a:rPr>
-              <a:t>–   La clase se apoya en la Clase 4, donde se vio que un disparador corre fila por fila y encarece una carga masiva —es la misma aritmetica del loops=2006 de hoy—</a:t>
+              <a:rPr sz="1400" b="0" i="0">
+                <a:solidFill>
+                  <a:srgbClr val="FFFFFF"/>
+                </a:solidFill>
+                <a:latin typeface="Calibri"/>
+              </a:rPr>
+              <a:t>SELECT c.id_cita, c.fecha_hora, m.nombre</a:t>
             </a:r>
           </a:p>
           <a:p>
             <a:pPr>
               <a:spcAft>
-                <a:spcPts val="800"/>
+                <a:spcPts val="400"/>
               </a:spcAft>
             </a:pPr>
             <a:r>
-              <a:rPr sz="2000" b="0" i="0">
-                <a:solidFill>
-                  <a:srgbClr val="333333"/>
-                </a:solidFill>
-                <a:latin typeface="Calibri"/>
-              </a:rPr>
-              <a:t>–   Y entrega el testigo a la Clase 7, que crea los indices que hoy se echaron de menos, y a la Clase 8, que suma transacciones y bloqueos al mismo analisis.</a:t>
-            </a:r>
-          </a:p>
-        </p:txBody>
-      </p:sp>
-      <p:sp>
-        <p:nvSpPr>
-          <p:cNvPr id="6" name="TextBox 5"/>
+              <a:rPr sz="1400" b="0" i="0">
+                <a:solidFill>
+                  <a:srgbClr val="FFFFFF"/>
+                </a:solidFill>
+                <a:latin typeface="Calibri"/>
+              </a:rPr>
+              <a:t>FROM cita c JOIN mascota m ON m.id_mascota = c.id_mascota</a:t>
+            </a:r>
+          </a:p>
+          <a:p>
+            <a:pPr>
+              <a:spcAft>
+                <a:spcPts val="400"/>
+              </a:spcAft>
+            </a:pPr>
+            <a:r>
+              <a:rPr sz="1400" b="0" i="0">
+                <a:solidFill>
+                  <a:srgbClr val="FFFFFF"/>
+                </a:solidFill>
+                <a:latin typeface="Calibri"/>
+              </a:rPr>
+              <a:t>WHERE c.fecha_hora &gt;= TIMESTAMP '2026-09-01 00:00:00'</a:t>
+            </a:r>
+          </a:p>
+          <a:p>
+            <a:pPr>
+              <a:spcAft>
+                <a:spcPts val="400"/>
+              </a:spcAft>
+            </a:pPr>
+            <a:r>
+              <a:rPr sz="1400" b="0" i="0">
+                <a:solidFill>
+                  <a:srgbClr val="FFFFFF"/>
+                </a:solidFill>
+                <a:latin typeface="Calibri"/>
+              </a:rPr>
+              <a:t>  AND c.fecha_hora &lt;  TIMESTAMP '2026-09-02 00:00:00';</a:t>
+            </a:r>
+          </a:p>
+          <a:p>
+            <a:pPr>
+              <a:spcAft>
+                <a:spcPts val="400"/>
+              </a:spcAft>
+            </a:pPr>
+            <a:r>
+              <a:rPr sz="1400" b="0" i="0">
+                <a:solidFill>
+                  <a:srgbClr val="FFFFFF"/>
+                </a:solidFill>
+                <a:latin typeface="Calibri"/>
+              </a:rPr>
+              <a:t/>
+            </a:r>
+          </a:p>
+          <a:p>
+            <a:pPr>
+              <a:spcAft>
+                <a:spcPts val="400"/>
+              </a:spcAft>
+            </a:pPr>
+            <a:r>
+              <a:rPr sz="1400" b="0" i="0">
+                <a:solidFill>
+                  <a:srgbClr val="FFFFFF"/>
+                </a:solidFill>
+                <a:latin typeface="Calibri"/>
+              </a:rPr>
+              <a:t>-- Lo que se lee, en este orden:</a:t>
+            </a:r>
+          </a:p>
+          <a:p>
+            <a:pPr>
+              <a:spcAft>
+                <a:spcPts val="400"/>
+              </a:spcAft>
+            </a:pPr>
+            <a:r>
+              <a:rPr sz="1400" b="0" i="0">
+                <a:solidFill>
+                  <a:srgbClr val="FFFFFF"/>
+                </a:solidFill>
+                <a:latin typeface="Calibri"/>
+              </a:rPr>
+              <a:t>--   Seq Scan  -&gt; recorre la tabla entera</a:t>
+            </a:r>
+          </a:p>
+          <a:p>
+            <a:pPr>
+              <a:spcAft>
+                <a:spcPts val="400"/>
+              </a:spcAft>
+            </a:pPr>
+            <a:r>
+              <a:rPr sz="1400" b="0" i="0">
+                <a:solidFill>
+                  <a:srgbClr val="FFFFFF"/>
+                </a:solidFill>
+                <a:latin typeface="Calibri"/>
+              </a:rPr>
+              <a:t>--   Index Scan / Bitmap Heap Scan -&gt; usa el indice</a:t>
+            </a:r>
+          </a:p>
+          <a:p>
+            <a:pPr>
+              <a:spcAft>
+                <a:spcPts val="400"/>
+              </a:spcAft>
+            </a:pPr>
+            <a:r>
+              <a:rPr sz="1400" b="0" i="0">
+                <a:solidFill>
+                  <a:srgbClr val="FFFFFF"/>
+                </a:solidFill>
+                <a:latin typeface="Calibri"/>
+              </a:rPr>
+              <a:t>--   actual time=...  el tiempo REAL (EXPLAIN solo estima; ANALYZE ejecuta)</a:t>
+            </a:r>
+          </a:p>
+          <a:p>
+            <a:pPr>
+              <a:spcAft>
+                <a:spcPts val="400"/>
+              </a:spcAft>
+            </a:pPr>
+            <a:r>
+              <a:rPr sz="1400" b="0" i="0">
+                <a:solidFill>
+                  <a:srgbClr val="FFFFFF"/>
+                </a:solidFill>
+                <a:latin typeface="Calibri"/>
+              </a:rPr>
+              <a:t>--   rows=...  comparar con las filas estimadas: si difieren mucho, ANALYZE</a:t>
+            </a:r>
+          </a:p>
+        </p:txBody>
+      </p:sp>
+      <p:sp>
+        <p:nvSpPr>
+          <p:cNvPr id="9" name="TextBox 8"/>
           <p:cNvSpPr txBox="1"/>
           <p:nvPr/>
         </p:nvSpPr>
@@ -13230,7 +13426,7 @@
                 </a:solidFill>
                 <a:latin typeface="Calibri"/>
               </a:rPr>
-              <a:t>El antipatron y su reescritura</a:t>
+              <a:t>Matar la subconsulta correlacionada</a:t>
             </a:r>
           </a:p>
         </p:txBody>
@@ -13389,7 +13585,7 @@
                 </a:solidFill>
                 <a:latin typeface="Calibri"/>
               </a:rPr>
-              <a:t>-- ANTES: funcion sobre la columna -&gt; el indice de fecha_hora no se usa</a:t>
+              <a:t>-- ANTES: la subconsulta se ejecuta UNA VEZ POR DUENO</a:t>
             </a:r>
           </a:p>
           <a:p>
@@ -13405,7 +13601,7 @@
                 </a:solidFill>
                 <a:latin typeface="Calibri"/>
               </a:rPr>
-              <a:t>SELECT * FROM cita</a:t>
+              <a:t>SELECT d.nombre,</a:t>
             </a:r>
           </a:p>
           <a:p>
@@ -13421,7 +13617,7 @@
                 </a:solidFill>
                 <a:latin typeface="Calibri"/>
               </a:rPr>
-              <a:t>WHERE TO_CHAR(fecha_hora, 'YYYY-MM-DD') = '2026-09-01';</a:t>
+              <a:t>       (SELECT COUNT(*) FROM mascota m WHERE m.id_dueno = d.id_dueno) AS n</a:t>
             </a:r>
           </a:p>
           <a:p>
@@ -13437,7 +13633,7 @@
                 </a:solidFill>
                 <a:latin typeface="Calibri"/>
               </a:rPr>
-              <a:t/>
+              <a:t>FROM dueno d;</a:t>
             </a:r>
           </a:p>
           <a:p>
@@ -13453,7 +13649,7 @@
                 </a:solidFill>
                 <a:latin typeface="Calibri"/>
               </a:rPr>
-              <a:t>-- DESPUES: rango sobre la columna desnuda -&gt; el indice si se usa</a:t>
+              <a:t/>
             </a:r>
           </a:p>
           <a:p>
@@ -13469,7 +13665,7 @@
                 </a:solidFill>
                 <a:latin typeface="Calibri"/>
               </a:rPr>
-              <a:t>SELECT c.id_cita, c.fecha_hora, m.nombre</a:t>
+              <a:t>-- DESPUES: una sola pasada, agrupando</a:t>
             </a:r>
           </a:p>
           <a:p>
@@ -13485,7 +13681,7 @@
                 </a:solidFill>
                 <a:latin typeface="Calibri"/>
               </a:rPr>
-              <a:t>FROM cita c</a:t>
+              <a:t>SELECT d.nombre, COUNT(m.id_mascota) AS n</a:t>
             </a:r>
           </a:p>
           <a:p>
@@ -13501,7 +13697,7 @@
                 </a:solidFill>
                 <a:latin typeface="Calibri"/>
               </a:rPr>
-              <a:t>JOIN mascota m ON m.id_mascota = c.id_mascota</a:t>
+              <a:t>FROM dueno d</a:t>
             </a:r>
           </a:p>
           <a:p>
@@ -13517,7 +13713,7 @@
                 </a:solidFill>
                 <a:latin typeface="Calibri"/>
               </a:rPr>
-              <a:t>WHERE c.fecha_hora &gt;= TIMESTAMP '2026-09-01 00:00:00'</a:t>
+              <a:t>LEFT JOIN mascota m ON m.id_dueno = d.id_dueno</a:t>
             </a:r>
           </a:p>
           <a:p>
@@ -13533,7 +13729,7 @@
                 </a:solidFill>
                 <a:latin typeface="Calibri"/>
               </a:rPr>
-              <a:t>  AND c.fecha_hora &lt;  TIMESTAMP '2026-09-02 00:00:00';</a:t>
+              <a:t>GROUP BY d.id_dueno, d.nombre</a:t>
             </a:r>
           </a:p>
           <a:p>
@@ -13549,7 +13745,7 @@
                 </a:solidFill>
                 <a:latin typeface="Calibri"/>
               </a:rPr>
-              <a:t/>
+              <a:t>ORDER BY n DESC;</a:t>
             </a:r>
           </a:p>
           <a:p>
@@ -13565,7 +13761,23 @@
                 </a:solidFill>
                 <a:latin typeface="Calibri"/>
               </a:rPr>
-              <a:t>-- La regla: nunca envolver en una funcion la columna por la que se filtra.</a:t>
+              <a:t/>
+            </a:r>
+          </a:p>
+          <a:p>
+            <a:pPr>
+              <a:spcAft>
+                <a:spcPts val="400"/>
+              </a:spcAft>
+            </a:pPr>
+            <a:r>
+              <a:rPr sz="1400" b="0" i="0">
+                <a:solidFill>
+                  <a:srgbClr val="FFFFFF"/>
+                </a:solidFill>
+                <a:latin typeface="Calibri"/>
+              </a:rPr>
+              <a:t>-- LEFT JOIN, no JOIN: con JOIN desaparecen los duenos sin mascota.</a:t>
             </a:r>
           </a:p>
         </p:txBody>
@@ -13640,7 +13852,7 @@
         <p:spPr>
           <a:xfrm>
             <a:off x="0" y="0"/>
-            <a:ext cx="12191695" cy="960120"/>
+            <a:ext cx="12191695" cy="1170432"/>
           </a:xfrm>
           <a:prstGeom prst="rect">
             <a:avLst/>
@@ -13682,7 +13894,7 @@
         </p:nvSpPr>
         <p:spPr>
           <a:xfrm>
-            <a:off x="0" y="960120"/>
+            <a:off x="0" y="1170432"/>
             <a:ext cx="12191695" cy="41148"/>
           </a:xfrm>
           <a:prstGeom prst="rect">
@@ -13726,7 +13938,7 @@
         <p:spPr>
           <a:xfrm>
             <a:off x="457200" y="164592"/>
-            <a:ext cx="11277295" cy="502920"/>
+            <a:ext cx="11277295" cy="384048"/>
           </a:xfrm>
           <a:prstGeom prst="rect">
             <a:avLst/>
@@ -13746,21 +13958,73 @@
                 </a:solidFill>
                 <a:latin typeface="Calibri"/>
               </a:rPr>
-              <a:t>EXPLAIN ANALYZE: la evidencia, no la opinion</a:t>
-            </a:r>
-          </a:p>
-        </p:txBody>
-      </p:sp>
-      <p:sp>
-        <p:nvSpPr>
-          <p:cNvPr id="5" name="Rounded Rectangle 4"/>
+              <a:t>Optimizar es un ANTES medible, no una opinion</a:t>
+            </a:r>
+          </a:p>
+        </p:txBody>
+      </p:sp>
+      <p:sp>
+        <p:nvSpPr>
+          <p:cNvPr id="5" name="TextBox 4"/>
+          <p:cNvSpPr txBox="1"/>
+          <p:nvPr/>
+        </p:nvSpPr>
+        <p:spPr>
+          <a:xfrm>
+            <a:off x="457200" y="566928"/>
+            <a:ext cx="11277295" cy="411480"/>
+          </a:xfrm>
+          <a:prstGeom prst="rect">
+            <a:avLst/>
+          </a:prstGeom>
+          <a:noFill/>
+        </p:spPr>
+        <p:txBody>
+          <a:bodyPr wrap="square">
+            <a:spAutoFit/>
+          </a:bodyPr>
+          <a:lstStyle/>
+          <a:p>
+            <a:r>
+              <a:rPr sz="1400" b="0" i="0">
+                <a:solidFill>
+                  <a:srgbClr val="B8D8EE"/>
+                </a:solidFill>
+                <a:latin typeface="Calibri"/>
+              </a:rPr>
+              <a:t>Mismas </a:t>
+            </a:r>
+            <a:r>
+              <a:rPr sz="1400" b="1" i="0">
+                <a:solidFill>
+                  <a:srgbClr val="B8D8EE"/>
+                </a:solidFill>
+                <a:latin typeface="Calibri"/>
+              </a:rPr>
+              <a:t>91 filas</a:t>
+            </a:r>
+            <a:r>
+              <a:rPr sz="1400" b="0" i="0">
+                <a:solidFill>
+                  <a:srgbClr val="B8D8EE"/>
+                </a:solidFill>
+                <a:latin typeface="Calibri"/>
+              </a:rPr>
+              <a:t> en las dos versiones. Y sin indices no hay Index Scan —eso es la Clase 7—: hoy se miden filas procesadas y pasadas sobre la tabla</a:t>
+            </a:r>
+          </a:p>
+        </p:txBody>
+      </p:sp>
+      <p:sp>
+        <p:nvSpPr>
+          <p:cNvPr id="6" name="Rounded Rectangle 5"/>
           <p:cNvSpPr/>
           <p:nvPr/>
         </p:nvSpPr>
         <p:spPr>
           <a:xfrm>
-            <a:off x="457200" y="1261872"/>
-            <a:ext cx="11277295" cy="5093208"/>
+            <a:off x="457200" y="1472184"/>
+            <a:ext cx="5478627" cy="4882896"/>
           </a:xfrm>
           <a:prstGeom prst="roundRect">
             <a:avLst>
@@ -13768,7 +14032,7 @@
             </a:avLst>
           </a:prstGeom>
           <a:solidFill>
-            <a:srgbClr val="1E2A38"/>
+            <a:srgbClr val="FBE4E4"/>
           </a:solidFill>
           <a:ln>
             <a:noFill/>
@@ -13798,14 +14062,249 @@
       </p:sp>
       <p:sp>
         <p:nvSpPr>
-          <p:cNvPr id="6" name="Rectangle 5"/>
+          <p:cNvPr id="7" name="Rectangle 6"/>
           <p:cNvSpPr/>
           <p:nvPr/>
         </p:nvSpPr>
         <p:spPr>
           <a:xfrm>
-            <a:off x="457200" y="1261872"/>
-            <a:ext cx="11277295" cy="320040"/>
+            <a:off x="457200" y="1472184"/>
+            <a:ext cx="5478627" cy="502920"/>
+          </a:xfrm>
+          <a:prstGeom prst="rect">
+            <a:avLst/>
+          </a:prstGeom>
+          <a:solidFill>
+            <a:srgbClr val="A02030"/>
+          </a:solidFill>
+          <a:ln>
+            <a:noFill/>
+          </a:ln>
+        </p:spPr>
+        <p:style>
+          <a:lnRef idx="1">
+            <a:schemeClr val="accent1"/>
+          </a:lnRef>
+          <a:fillRef idx="3">
+            <a:schemeClr val="accent1"/>
+          </a:fillRef>
+          <a:effectRef idx="2">
+            <a:schemeClr val="accent1"/>
+          </a:effectRef>
+          <a:fontRef idx="minor">
+            <a:schemeClr val="lt1"/>
+          </a:fontRef>
+        </p:style>
+        <p:txBody>
+          <a:bodyPr rtlCol="0" anchor="ctr"/>
+          <a:lstStyle/>
+          <a:p>
+            <a:pPr algn="ctr"/>
+          </a:p>
+        </p:txBody>
+      </p:sp>
+      <p:sp>
+        <p:nvSpPr>
+          <p:cNvPr id="8" name="TextBox 7"/>
+          <p:cNvSpPr txBox="1"/>
+          <p:nvPr/>
+        </p:nvSpPr>
+        <p:spPr>
+          <a:xfrm>
+            <a:off x="594360" y="1563624"/>
+            <a:ext cx="5204307" cy="365760"/>
+          </a:xfrm>
+          <a:prstGeom prst="rect">
+            <a:avLst/>
+          </a:prstGeom>
+          <a:noFill/>
+        </p:spPr>
+        <p:txBody>
+          <a:bodyPr wrap="square" anchor="ctr"/>
+          <a:lstStyle/>
+          <a:p>
+            <a:pPr algn="ctr"/>
+            <a:r>
+              <a:rPr sz="1600" b="1" i="0">
+                <a:solidFill>
+                  <a:srgbClr val="FFFFFF"/>
+                </a:solidFill>
+                <a:latin typeface="Calibri"/>
+              </a:rPr>
+              <a:t>Antes</a:t>
+            </a:r>
+          </a:p>
+        </p:txBody>
+      </p:sp>
+      <p:sp>
+        <p:nvSpPr>
+          <p:cNvPr id="9" name="TextBox 8"/>
+          <p:cNvSpPr txBox="1"/>
+          <p:nvPr/>
+        </p:nvSpPr>
+        <p:spPr>
+          <a:xfrm>
+            <a:off x="621792" y="2112263"/>
+            <a:ext cx="5158587" cy="4288536"/>
+          </a:xfrm>
+          <a:prstGeom prst="rect">
+            <a:avLst/>
+          </a:prstGeom>
+          <a:noFill/>
+        </p:spPr>
+        <p:txBody>
+          <a:bodyPr wrap="square">
+            <a:spAutoFit/>
+          </a:bodyPr>
+          <a:lstStyle/>
+          <a:p>
+            <a:pPr>
+              <a:spcAft>
+                <a:spcPts val="800"/>
+              </a:spcAft>
+            </a:pPr>
+            <a:r>
+              <a:rPr sz="1500" b="0" i="0">
+                <a:solidFill>
+                  <a:srgbClr val="333333"/>
+                </a:solidFill>
+                <a:latin typeface="Calibri"/>
+              </a:rPr>
+              <a:t>–   «SELECT *» arrastra las columnas de 4 tablas por el join</a:t>
+            </a:r>
+          </a:p>
+          <a:p>
+            <a:pPr>
+              <a:spcAft>
+                <a:spcPts val="800"/>
+              </a:spcAft>
+            </a:pPr>
+            <a:r>
+              <a:rPr sz="1500" b="0" i="0">
+                <a:solidFill>
+                  <a:srgbClr val="333333"/>
+                </a:solidFill>
+                <a:latin typeface="Calibri"/>
+              </a:rPr>
+              <a:t>–   «to_char(fecha_hora,…)» y «UPPER(estado)»: </a:t>
+            </a:r>
+            <a:r>
+              <a:rPr sz="1500" b="1" i="0">
+                <a:solidFill>
+                  <a:srgbClr val="333333"/>
+                </a:solidFill>
+                <a:latin typeface="Calibri"/>
+              </a:rPr>
+              <a:t>funcion sobre la columna</a:t>
+            </a:r>
+          </a:p>
+          <a:p>
+            <a:pPr>
+              <a:spcAft>
+                <a:spcPts val="800"/>
+              </a:spcAft>
+            </a:pPr>
+            <a:r>
+              <a:rPr sz="1500" b="0" i="0">
+                <a:solidFill>
+                  <a:srgbClr val="333333"/>
+                </a:solidFill>
+                <a:latin typeface="Calibri"/>
+              </a:rPr>
+              <a:t>–   Joins con coma: si falta una condicion, </a:t>
+            </a:r>
+            <a:r>
+              <a:rPr sz="1500" b="1" i="0">
+                <a:solidFill>
+                  <a:srgbClr val="333333"/>
+                </a:solidFill>
+                <a:latin typeface="Calibri"/>
+              </a:rPr>
+              <a:t>producto cartesiano</a:t>
+            </a:r>
+          </a:p>
+          <a:p>
+            <a:pPr>
+              <a:spcAft>
+                <a:spcPts val="800"/>
+              </a:spcAft>
+            </a:pPr>
+            <a:r>
+              <a:rPr sz="1500" b="0" i="0">
+                <a:solidFill>
+                  <a:srgbClr val="333333"/>
+                </a:solidFill>
+                <a:latin typeface="Calibri"/>
+              </a:rPr>
+              <a:t>–   Subconsulta por fila: el plan dice </a:t>
+            </a:r>
+            <a:r>
+              <a:rPr sz="1500" b="1" i="0">
+                <a:solidFill>
+                  <a:srgbClr val="333333"/>
+                </a:solidFill>
+                <a:latin typeface="Calibri"/>
+              </a:rPr>
+              <a:t>loops=2006</a:t>
+            </a:r>
+          </a:p>
+        </p:txBody>
+      </p:sp>
+      <p:sp>
+        <p:nvSpPr>
+          <p:cNvPr id="10" name="Rounded Rectangle 9"/>
+          <p:cNvSpPr/>
+          <p:nvPr/>
+        </p:nvSpPr>
+        <p:spPr>
+          <a:xfrm>
+            <a:off x="6255867" y="1472184"/>
+            <a:ext cx="5478627" cy="4882896"/>
+          </a:xfrm>
+          <a:prstGeom prst="roundRect">
+            <a:avLst>
+              <a:gd name="adj" fmla="val 12000"/>
+            </a:avLst>
+          </a:prstGeom>
+          <a:solidFill>
+            <a:srgbClr val="E8F4FA"/>
+          </a:solidFill>
+          <a:ln>
+            <a:noFill/>
+          </a:ln>
+        </p:spPr>
+        <p:style>
+          <a:lnRef idx="1">
+            <a:schemeClr val="accent1"/>
+          </a:lnRef>
+          <a:fillRef idx="3">
+            <a:schemeClr val="accent1"/>
+          </a:fillRef>
+          <a:effectRef idx="2">
+            <a:schemeClr val="accent1"/>
+          </a:effectRef>
+          <a:fontRef idx="minor">
+            <a:schemeClr val="lt1"/>
+          </a:fontRef>
+        </p:style>
+        <p:txBody>
+          <a:bodyPr rtlCol="0" anchor="ctr"/>
+          <a:lstStyle/>
+          <a:p>
+            <a:pPr algn="ctr"/>
+          </a:p>
+        </p:txBody>
+      </p:sp>
+      <p:sp>
+        <p:nvSpPr>
+          <p:cNvPr id="11" name="Rectangle 10"/>
+          <p:cNvSpPr/>
+          <p:nvPr/>
+        </p:nvSpPr>
+        <p:spPr>
+          <a:xfrm>
+            <a:off x="6255867" y="1472184"/>
+            <a:ext cx="5478627" cy="502920"/>
           </a:xfrm>
           <a:prstGeom prst="rect">
             <a:avLst/>
@@ -13841,14 +14340,14 @@
       </p:sp>
       <p:sp>
         <p:nvSpPr>
-          <p:cNvPr id="7" name="TextBox 6"/>
+          <p:cNvPr id="12" name="TextBox 11"/>
           <p:cNvSpPr txBox="1"/>
           <p:nvPr/>
         </p:nvSpPr>
         <p:spPr>
           <a:xfrm>
-            <a:off x="685800" y="1307592"/>
-            <a:ext cx="10820095" cy="256032"/>
+            <a:off x="6393027" y="1563624"/>
+            <a:ext cx="5204307" cy="365760"/>
           </a:xfrm>
           <a:prstGeom prst="rect">
             <a:avLst/>
@@ -13859,28 +14358,29 @@
           <a:bodyPr wrap="square" anchor="ctr"/>
           <a:lstStyle/>
           <a:p>
-            <a:r>
-              <a:rPr sz="1000" b="1" i="0">
-                <a:solidFill>
-                  <a:srgbClr val="269CCB"/>
-                </a:solidFill>
-                <a:latin typeface="Calibri"/>
-              </a:rPr>
-              <a:t>● ● ●</a:t>
-            </a:r>
-          </a:p>
-        </p:txBody>
-      </p:sp>
-      <p:sp>
-        <p:nvSpPr>
-          <p:cNvPr id="8" name="TextBox 7"/>
+            <a:pPr algn="ctr"/>
+            <a:r>
+              <a:rPr sz="1600" b="1" i="0">
+                <a:solidFill>
+                  <a:srgbClr val="FFFFFF"/>
+                </a:solidFill>
+                <a:latin typeface="Calibri"/>
+              </a:rPr>
+              <a:t>Despues</a:t>
+            </a:r>
+          </a:p>
+        </p:txBody>
+      </p:sp>
+      <p:sp>
+        <p:nvSpPr>
+          <p:cNvPr id="13" name="TextBox 12"/>
           <p:cNvSpPr txBox="1"/>
           <p:nvPr/>
         </p:nvSpPr>
         <p:spPr>
           <a:xfrm>
-            <a:off x="777240" y="1719072"/>
-            <a:ext cx="10637215" cy="4453128"/>
+            <a:off x="6420459" y="2112263"/>
+            <a:ext cx="5158587" cy="4288536"/>
           </a:xfrm>
           <a:prstGeom prst="rect">
             <a:avLst/>
@@ -13895,184 +14395,108 @@
           <a:p>
             <a:pPr>
               <a:spcAft>
-                <a:spcPts val="400"/>
+                <a:spcPts val="800"/>
               </a:spcAft>
             </a:pPr>
             <a:r>
-              <a:rPr sz="1400" b="0" i="0">
-                <a:solidFill>
-                  <a:srgbClr val="FFFFFF"/>
-                </a:solidFill>
-                <a:latin typeface="Calibri"/>
-              </a:rPr>
-              <a:t>EXPLAIN (ANALYZE, BUFFERS)</a:t>
+              <a:rPr sz="1500" b="0" i="0">
+                <a:solidFill>
+                  <a:srgbClr val="333333"/>
+                </a:solidFill>
+                <a:latin typeface="Calibri"/>
+              </a:rPr>
+              <a:t>–   Las 6 columnas que la pantalla de agenda usa</a:t>
             </a:r>
           </a:p>
           <a:p>
             <a:pPr>
               <a:spcAft>
-                <a:spcPts val="400"/>
+                <a:spcPts val="800"/>
               </a:spcAft>
             </a:pPr>
             <a:r>
-              <a:rPr sz="1400" b="0" i="0">
-                <a:solidFill>
-                  <a:srgbClr val="FFFFFF"/>
-                </a:solidFill>
-                <a:latin typeface="Calibri"/>
-              </a:rPr>
-              <a:t>SELECT c.id_cita, c.fecha_hora, m.nombre</a:t>
+              <a:rPr sz="1500" b="0" i="0">
+                <a:solidFill>
+                  <a:srgbClr val="333333"/>
+                </a:solidFill>
+                <a:latin typeface="Calibri"/>
+              </a:rPr>
+              <a:t>–   «&gt;= TIMESTAMP '2026-03-10' … &lt;» y «estado = '…'»: </a:t>
+            </a:r>
+            <a:r>
+              <a:rPr sz="1500" b="1" i="0">
+                <a:solidFill>
+                  <a:srgbClr val="333333"/>
+                </a:solidFill>
+                <a:latin typeface="Calibri"/>
+              </a:rPr>
+              <a:t>sargable</a:t>
             </a:r>
           </a:p>
           <a:p>
             <a:pPr>
               <a:spcAft>
-                <a:spcPts val="400"/>
+                <a:spcPts val="800"/>
               </a:spcAft>
             </a:pPr>
             <a:r>
-              <a:rPr sz="1400" b="0" i="0">
-                <a:solidFill>
-                  <a:srgbClr val="FFFFFF"/>
-                </a:solidFill>
-                <a:latin typeface="Calibri"/>
-              </a:rPr>
-              <a:t>FROM cita c JOIN mascota m ON m.id_mascota = c.id_mascota</a:t>
+              <a:rPr sz="1500" b="0" i="0">
+                <a:solidFill>
+                  <a:srgbClr val="333333"/>
+                </a:solidFill>
+                <a:latin typeface="Calibri"/>
+              </a:rPr>
+              <a:t>–   «JOIN … ON»: </a:t>
+            </a:r>
+            <a:r>
+              <a:rPr sz="1500" b="1" i="0">
+                <a:solidFill>
+                  <a:srgbClr val="333333"/>
+                </a:solidFill>
+                <a:latin typeface="Calibri"/>
+              </a:rPr>
+              <a:t>no acelera</a:t>
+            </a:r>
+            <a:r>
+              <a:rPr sz="1500" b="0" i="0">
+                <a:solidFill>
+                  <a:srgbClr val="333333"/>
+                </a:solidFill>
+                <a:latin typeface="Calibri"/>
+              </a:rPr>
+              <a:t>, impide el cartesiano</a:t>
             </a:r>
           </a:p>
           <a:p>
             <a:pPr>
               <a:spcAft>
-                <a:spcPts val="400"/>
+                <a:spcPts val="800"/>
               </a:spcAft>
             </a:pPr>
             <a:r>
-              <a:rPr sz="1400" b="0" i="0">
-                <a:solidFill>
-                  <a:srgbClr val="FFFFFF"/>
-                </a:solidFill>
-                <a:latin typeface="Calibri"/>
-              </a:rPr>
-              <a:t>WHERE c.fecha_hora &gt;= TIMESTAMP '2026-09-01 00:00:00'</a:t>
-            </a:r>
-          </a:p>
-          <a:p>
-            <a:pPr>
-              <a:spcAft>
-                <a:spcPts val="400"/>
-              </a:spcAft>
-            </a:pPr>
-            <a:r>
-              <a:rPr sz="1400" b="0" i="0">
-                <a:solidFill>
-                  <a:srgbClr val="FFFFFF"/>
-                </a:solidFill>
-                <a:latin typeface="Calibri"/>
-              </a:rPr>
-              <a:t>  AND c.fecha_hora &lt;  TIMESTAMP '2026-09-02 00:00:00';</a:t>
-            </a:r>
-          </a:p>
-          <a:p>
-            <a:pPr>
-              <a:spcAft>
-                <a:spcPts val="400"/>
-              </a:spcAft>
-            </a:pPr>
-            <a:r>
-              <a:rPr sz="1400" b="0" i="0">
-                <a:solidFill>
-                  <a:srgbClr val="FFFFFF"/>
-                </a:solidFill>
-                <a:latin typeface="Calibri"/>
-              </a:rPr>
-              <a:t/>
-            </a:r>
-          </a:p>
-          <a:p>
-            <a:pPr>
-              <a:spcAft>
-                <a:spcPts val="400"/>
-              </a:spcAft>
-            </a:pPr>
-            <a:r>
-              <a:rPr sz="1400" b="0" i="0">
-                <a:solidFill>
-                  <a:srgbClr val="FFFFFF"/>
-                </a:solidFill>
-                <a:latin typeface="Calibri"/>
-              </a:rPr>
-              <a:t>-- Lo que se lee, en este orden:</a:t>
-            </a:r>
-          </a:p>
-          <a:p>
-            <a:pPr>
-              <a:spcAft>
-                <a:spcPts val="400"/>
-              </a:spcAft>
-            </a:pPr>
-            <a:r>
-              <a:rPr sz="1400" b="0" i="0">
-                <a:solidFill>
-                  <a:srgbClr val="FFFFFF"/>
-                </a:solidFill>
-                <a:latin typeface="Calibri"/>
-              </a:rPr>
-              <a:t>--   Seq Scan  -&gt; recorre la tabla entera</a:t>
-            </a:r>
-          </a:p>
-          <a:p>
-            <a:pPr>
-              <a:spcAft>
-                <a:spcPts val="400"/>
-              </a:spcAft>
-            </a:pPr>
-            <a:r>
-              <a:rPr sz="1400" b="0" i="0">
-                <a:solidFill>
-                  <a:srgbClr val="FFFFFF"/>
-                </a:solidFill>
-                <a:latin typeface="Calibri"/>
-              </a:rPr>
-              <a:t>--   Index Scan / Bitmap Heap Scan -&gt; usa el indice</a:t>
-            </a:r>
-          </a:p>
-          <a:p>
-            <a:pPr>
-              <a:spcAft>
-                <a:spcPts val="400"/>
-              </a:spcAft>
-            </a:pPr>
-            <a:r>
-              <a:rPr sz="1400" b="0" i="0">
-                <a:solidFill>
-                  <a:srgbClr val="FFFFFF"/>
-                </a:solidFill>
-                <a:latin typeface="Calibri"/>
-              </a:rPr>
-              <a:t>--   actual time=...  el tiempo REAL (EXPLAIN solo estima; ANALYZE ejecuta)</a:t>
-            </a:r>
-          </a:p>
-          <a:p>
-            <a:pPr>
-              <a:spcAft>
-                <a:spcPts val="400"/>
-              </a:spcAft>
-            </a:pPr>
-            <a:r>
-              <a:rPr sz="1400" b="0" i="0">
-                <a:solidFill>
-                  <a:srgbClr val="FFFFFF"/>
-                </a:solidFill>
-                <a:latin typeface="Calibri"/>
-              </a:rPr>
-              <a:t>--   rows=...  comparar con las filas estimadas: si difieren mucho, ANALYZE</a:t>
-            </a:r>
-          </a:p>
-        </p:txBody>
-      </p:sp>
-      <p:sp>
-        <p:nvSpPr>
-          <p:cNvPr id="9" name="TextBox 8"/>
+              <a:rPr sz="1500" b="0" i="0">
+                <a:solidFill>
+                  <a:srgbClr val="333333"/>
+                </a:solidFill>
+                <a:latin typeface="Calibri"/>
+              </a:rPr>
+              <a:t>–   «LEFT JOIN» + «GROUP BY»: de 2.006 pasadas a </a:t>
+            </a:r>
+            <a:r>
+              <a:rPr sz="1500" b="1" i="0">
+                <a:solidFill>
+                  <a:srgbClr val="333333"/>
+                </a:solidFill>
+                <a:latin typeface="Calibri"/>
+              </a:rPr>
+              <a:t>una</a:t>
+            </a:r>
+          </a:p>
+        </p:txBody>
+      </p:sp>
+      <p:sp>
+        <p:nvSpPr>
+          <p:cNvPr id="14" name="TextBox 13"/>
           <p:cNvSpPr txBox="1"/>
           <p:nvPr/>
         </p:nvSpPr>
@@ -14140,7 +14564,7 @@
         <p:spPr>
           <a:xfrm>
             <a:off x="0" y="0"/>
-            <a:ext cx="12191695" cy="960120"/>
+            <a:ext cx="12191695" cy="1170432"/>
           </a:xfrm>
           <a:prstGeom prst="rect">
             <a:avLst/>
@@ -14182,7 +14606,7 @@
         </p:nvSpPr>
         <p:spPr>
           <a:xfrm>
-            <a:off x="0" y="960120"/>
+            <a:off x="0" y="1170432"/>
             <a:ext cx="12191695" cy="41148"/>
           </a:xfrm>
           <a:prstGeom prst="rect">
@@ -14226,7 +14650,7 @@
         <p:spPr>
           <a:xfrm>
             <a:off x="457200" y="164592"/>
-            <a:ext cx="11277295" cy="502920"/>
+            <a:ext cx="11277295" cy="384048"/>
           </a:xfrm>
           <a:prstGeom prst="rect">
             <a:avLst/>
@@ -14246,141 +14670,21 @@
                 </a:solidFill>
                 <a:latin typeface="Calibri"/>
               </a:rPr>
-              <a:t>Matar la subconsulta correlacionada</a:t>
-            </a:r>
-          </a:p>
-        </p:txBody>
-      </p:sp>
-      <p:sp>
-        <p:nvSpPr>
-          <p:cNvPr id="5" name="Rounded Rectangle 4"/>
-          <p:cNvSpPr/>
-          <p:nvPr/>
-        </p:nvSpPr>
-        <p:spPr>
-          <a:xfrm>
-            <a:off x="457200" y="1261872"/>
-            <a:ext cx="11277295" cy="5093208"/>
-          </a:xfrm>
-          <a:prstGeom prst="roundRect">
-            <a:avLst>
-              <a:gd name="adj" fmla="val 12000"/>
-            </a:avLst>
-          </a:prstGeom>
-          <a:solidFill>
-            <a:srgbClr val="1E2A38"/>
-          </a:solidFill>
-          <a:ln>
-            <a:noFill/>
-          </a:ln>
-        </p:spPr>
-        <p:style>
-          <a:lnRef idx="1">
-            <a:schemeClr val="accent1"/>
-          </a:lnRef>
-          <a:fillRef idx="3">
-            <a:schemeClr val="accent1"/>
-          </a:fillRef>
-          <a:effectRef idx="2">
-            <a:schemeClr val="accent1"/>
-          </a:effectRef>
-          <a:fontRef idx="minor">
-            <a:schemeClr val="lt1"/>
-          </a:fontRef>
-        </p:style>
-        <p:txBody>
-          <a:bodyPr rtlCol="0" anchor="ctr"/>
-          <a:lstStyle/>
-          <a:p>
-            <a:pPr algn="ctr"/>
-          </a:p>
-        </p:txBody>
-      </p:sp>
-      <p:sp>
-        <p:nvSpPr>
-          <p:cNvPr id="6" name="Rectangle 5"/>
-          <p:cNvSpPr/>
-          <p:nvPr/>
-        </p:nvSpPr>
-        <p:spPr>
-          <a:xfrm>
-            <a:off x="457200" y="1261872"/>
-            <a:ext cx="11277295" cy="320040"/>
-          </a:xfrm>
-          <a:prstGeom prst="rect">
-            <a:avLst/>
-          </a:prstGeom>
-          <a:solidFill>
-            <a:srgbClr val="095292"/>
-          </a:solidFill>
-          <a:ln>
-            <a:noFill/>
-          </a:ln>
-        </p:spPr>
-        <p:style>
-          <a:lnRef idx="1">
-            <a:schemeClr val="accent1"/>
-          </a:lnRef>
-          <a:fillRef idx="3">
-            <a:schemeClr val="accent1"/>
-          </a:fillRef>
-          <a:effectRef idx="2">
-            <a:schemeClr val="accent1"/>
-          </a:effectRef>
-          <a:fontRef idx="minor">
-            <a:schemeClr val="lt1"/>
-          </a:fontRef>
-        </p:style>
-        <p:txBody>
-          <a:bodyPr rtlCol="0" anchor="ctr"/>
-          <a:lstStyle/>
-          <a:p>
-            <a:pPr algn="ctr"/>
-          </a:p>
-        </p:txBody>
-      </p:sp>
-      <p:sp>
-        <p:nvSpPr>
-          <p:cNvPr id="7" name="TextBox 6"/>
+              <a:t>Leer un plan: es un arbol y se lee de adentro hacia afuera</a:t>
+            </a:r>
+          </a:p>
+        </p:txBody>
+      </p:sp>
+      <p:sp>
+        <p:nvSpPr>
+          <p:cNvPr id="5" name="TextBox 4"/>
           <p:cNvSpPr txBox="1"/>
           <p:nvPr/>
         </p:nvSpPr>
         <p:spPr>
           <a:xfrm>
-            <a:off x="685800" y="1307592"/>
-            <a:ext cx="10820095" cy="256032"/>
-          </a:xfrm>
-          <a:prstGeom prst="rect">
-            <a:avLst/>
-          </a:prstGeom>
-          <a:noFill/>
-        </p:spPr>
-        <p:txBody>
-          <a:bodyPr wrap="square" anchor="ctr"/>
-          <a:lstStyle/>
-          <a:p>
-            <a:r>
-              <a:rPr sz="1000" b="1" i="0">
-                <a:solidFill>
-                  <a:srgbClr val="269CCB"/>
-                </a:solidFill>
-                <a:latin typeface="Calibri"/>
-              </a:rPr>
-              <a:t>● ● ●</a:t>
-            </a:r>
-          </a:p>
-        </p:txBody>
-      </p:sp>
-      <p:sp>
-        <p:nvSpPr>
-          <p:cNvPr id="8" name="TextBox 7"/>
-          <p:cNvSpPr txBox="1"/>
-          <p:nvPr/>
-        </p:nvSpPr>
-        <p:spPr>
-          <a:xfrm>
-            <a:off x="777240" y="1719072"/>
-            <a:ext cx="10637215" cy="4453128"/>
+            <a:off x="457200" y="566928"/>
+            <a:ext cx="11277295" cy="411480"/>
           </a:xfrm>
           <a:prstGeom prst="rect">
             <a:avLst/>
@@ -14393,218 +14697,412 @@
           </a:bodyPr>
           <a:lstStyle/>
           <a:p>
+            <a:r>
+              <a:rPr sz="1400" b="0" i="0">
+                <a:solidFill>
+                  <a:srgbClr val="B8D8EE"/>
+                </a:solidFill>
+                <a:latin typeface="Calibri"/>
+              </a:rPr>
+              <a:t>Un plan se lee campo por campo: nodo mas costoso, filas estimadas contra reales y tiempo total</a:t>
+            </a:r>
+          </a:p>
+        </p:txBody>
+      </p:sp>
+      <p:sp>
+        <p:nvSpPr>
+          <p:cNvPr id="6" name="TextBox 5"/>
+          <p:cNvSpPr txBox="1"/>
+          <p:nvPr/>
+        </p:nvSpPr>
+        <p:spPr>
+          <a:xfrm>
+            <a:off x="457200" y="1380744"/>
+            <a:ext cx="11277295" cy="5020056"/>
+          </a:xfrm>
+          <a:prstGeom prst="rect">
+            <a:avLst/>
+          </a:prstGeom>
+          <a:noFill/>
+        </p:spPr>
+        <p:txBody>
+          <a:bodyPr wrap="square">
+            <a:spAutoFit/>
+          </a:bodyPr>
+          <a:lstStyle/>
+          <a:p>
             <a:pPr>
               <a:spcAft>
-                <a:spcPts val="400"/>
+                <a:spcPts val="800"/>
               </a:spcAft>
             </a:pPr>
             <a:r>
-              <a:rPr sz="1400" b="0" i="0">
-                <a:solidFill>
-                  <a:srgbClr val="FFFFFF"/>
-                </a:solidFill>
-                <a:latin typeface="Calibri"/>
-              </a:rPr>
-              <a:t>-- ANTES: la subconsulta se ejecuta UNA VEZ POR DUENO</a:t>
+              <a:rPr sz="2000" b="0" i="0">
+                <a:solidFill>
+                  <a:srgbClr val="333333"/>
+                </a:solidFill>
+                <a:latin typeface="Calibri"/>
+              </a:rPr>
+              <a:t>–   </a:t>
+            </a:r>
+            <a:r>
+              <a:rPr sz="2000" b="1" i="0">
+                <a:solidFill>
+                  <a:srgbClr val="333333"/>
+                </a:solidFill>
+                <a:latin typeface="Calibri"/>
+              </a:rPr>
+              <a:t>El orden de lectura.</a:t>
+            </a:r>
+            <a:r>
+              <a:rPr sz="2000" b="0" i="0">
+                <a:solidFill>
+                  <a:srgbClr val="333333"/>
+                </a:solidFill>
+                <a:latin typeface="Calibri"/>
+              </a:rPr>
+              <a:t> El plan </a:t>
+            </a:r>
+            <a:r>
+              <a:rPr sz="2000" b="1" i="0">
+                <a:solidFill>
+                  <a:srgbClr val="333333"/>
+                </a:solidFill>
+                <a:latin typeface="Calibri"/>
+              </a:rPr>
+              <a:t>no</a:t>
+            </a:r>
+            <a:r>
+              <a:rPr sz="2000" b="0" i="0">
+                <a:solidFill>
+                  <a:srgbClr val="333333"/>
+                </a:solidFill>
+                <a:latin typeface="Calibri"/>
+              </a:rPr>
+              <a:t> es una lista de pasos de arriba hacia abajo: es un arbol. Los nodos </a:t>
+            </a:r>
+            <a:r>
+              <a:rPr sz="2000" b="1" i="0">
+                <a:solidFill>
+                  <a:srgbClr val="333333"/>
+                </a:solidFill>
+                <a:latin typeface="Calibri"/>
+              </a:rPr>
+              <a:t>mas indentados son las hojas</a:t>
+            </a:r>
+            <a:r>
+              <a:rPr sz="2000" b="0" i="0">
+                <a:solidFill>
+                  <a:srgbClr val="333333"/>
+                </a:solidFill>
+                <a:latin typeface="Calibri"/>
+              </a:rPr>
+              <a:t> y se ejecutan primero; cada nodo consume las filas de sus hijos. La </a:t>
+            </a:r>
+            <a:r>
+              <a:rPr sz="2000" b="1" i="0">
+                <a:solidFill>
+                  <a:srgbClr val="333333"/>
+                </a:solidFill>
+                <a:latin typeface="Calibri"/>
+              </a:rPr>
+              <a:t>primera linea impresa es la ULTIMA operacion</a:t>
+            </a:r>
+            <a:r>
+              <a:rPr sz="2000" b="0" i="0">
+                <a:solidFill>
+                  <a:srgbClr val="333333"/>
+                </a:solidFill>
+                <a:latin typeface="Calibri"/>
+              </a:rPr>
+              <a:t>.</a:t>
             </a:r>
           </a:p>
           <a:p>
             <a:pPr>
               <a:spcAft>
-                <a:spcPts val="400"/>
+                <a:spcPts val="800"/>
               </a:spcAft>
             </a:pPr>
             <a:r>
-              <a:rPr sz="1400" b="0" i="0">
-                <a:solidFill>
-                  <a:srgbClr val="FFFFFF"/>
-                </a:solidFill>
-                <a:latin typeface="Calibri"/>
-              </a:rPr>
-              <a:t>SELECT d.nombre,</a:t>
+              <a:rPr sz="2000" b="0" i="0">
+                <a:solidFill>
+                  <a:srgbClr val="333333"/>
+                </a:solidFill>
+                <a:latin typeface="Calibri"/>
+              </a:rPr>
+              <a:t>–   </a:t>
+            </a:r>
+            <a:r>
+              <a:rPr sz="2000" b="1" i="0">
+                <a:solidFill>
+                  <a:srgbClr val="333333"/>
+                </a:solidFill>
+                <a:latin typeface="Calibri"/>
+              </a:rPr>
+              <a:t>Los cuatro campos.</a:t>
+            </a:r>
+            <a:r>
+              <a:rPr sz="2000" b="0" i="0">
+                <a:solidFill>
+                  <a:srgbClr val="333333"/>
+                </a:solidFill>
+                <a:latin typeface="Calibri"/>
+              </a:rPr>
+              <a:t> «cost=270.00..4821.50» son arranque y total en una unidad </a:t>
+            </a:r>
+            <a:r>
+              <a:rPr sz="2000" b="1" i="0">
+                <a:solidFill>
+                  <a:srgbClr val="333333"/>
+                </a:solidFill>
+                <a:latin typeface="Calibri"/>
+              </a:rPr>
+              <a:t>relativa</a:t>
+            </a:r>
+            <a:r>
+              <a:rPr sz="2000" b="0" i="0">
+                <a:solidFill>
+                  <a:srgbClr val="333333"/>
+                </a:solidFill>
+                <a:latin typeface="Calibri"/>
+              </a:rPr>
+              <a:t> (1.0 = leer una pagina de 8 KB), </a:t>
+            </a:r>
+            <a:r>
+              <a:rPr sz="2000" b="1" i="0">
+                <a:solidFill>
+                  <a:srgbClr val="333333"/>
+                </a:solidFill>
+                <a:latin typeface="Calibri"/>
+              </a:rPr>
+              <a:t>no</a:t>
+            </a:r>
+            <a:r>
+              <a:rPr sz="2000" b="0" i="0">
+                <a:solidFill>
+                  <a:srgbClr val="333333"/>
+                </a:solidFill>
+                <a:latin typeface="Calibri"/>
+              </a:rPr>
+              <a:t> milisegundos; «rows=» son las filas que el motor </a:t>
+            </a:r>
+            <a:r>
+              <a:rPr sz="2000" b="1" i="0">
+                <a:solidFill>
+                  <a:srgbClr val="333333"/>
+                </a:solidFill>
+                <a:latin typeface="Calibri"/>
+              </a:rPr>
+              <a:t>estima</a:t>
+            </a:r>
+            <a:r>
+              <a:rPr sz="2000" b="0" i="0">
+                <a:solidFill>
+                  <a:srgbClr val="333333"/>
+                </a:solidFill>
+                <a:latin typeface="Calibri"/>
+              </a:rPr>
+              <a:t>; «width=» el ancho de la fila en bytes; «loops=» cuantas </a:t>
+            </a:r>
+            <a:r>
+              <a:rPr sz="2000" b="1" i="0">
+                <a:solidFill>
+                  <a:srgbClr val="333333"/>
+                </a:solidFill>
+                <a:latin typeface="Calibri"/>
+              </a:rPr>
+              <a:t>veces se repitio</a:t>
+            </a:r>
+            <a:r>
+              <a:rPr sz="2000" b="0" i="0">
+                <a:solidFill>
+                  <a:srgbClr val="333333"/>
+                </a:solidFill>
+                <a:latin typeface="Calibri"/>
+              </a:rPr>
+              <a:t> ese nodo.</a:t>
             </a:r>
           </a:p>
           <a:p>
             <a:pPr>
               <a:spcAft>
-                <a:spcPts val="400"/>
+                <a:spcPts val="800"/>
               </a:spcAft>
             </a:pPr>
             <a:r>
-              <a:rPr sz="1400" b="0" i="0">
-                <a:solidFill>
-                  <a:srgbClr val="FFFFFF"/>
-                </a:solidFill>
-                <a:latin typeface="Calibri"/>
-              </a:rPr>
-              <a:t>       (SELECT COUNT(*) FROM mascota m WHERE m.id_dueno = d.id_dueno) AS n</a:t>
+              <a:rPr sz="2000" b="0" i="0">
+                <a:solidFill>
+                  <a:srgbClr val="333333"/>
+                </a:solidFill>
+                <a:latin typeface="Calibri"/>
+              </a:rPr>
+              <a:t>–   </a:t>
+            </a:r>
+            <a:r>
+              <a:rPr sz="2000" b="1" i="0">
+                <a:solidFill>
+                  <a:srgbClr val="333333"/>
+                </a:solidFill>
+                <a:latin typeface="Calibri"/>
+              </a:rPr>
+              <a:t>«EXPLAIN» estima, «EXPLAIN ANALYZE» ejecuta.</a:t>
+            </a:r>
+            <a:r>
+              <a:rPr sz="2000" b="0" i="0">
+                <a:solidFill>
+                  <a:srgbClr val="333333"/>
+                </a:solidFill>
+                <a:latin typeface="Calibri"/>
+              </a:rPr>
+              <a:t> El segundo agrega «actual time=», «actual rows=» y el «Execution Time» final. Y ejecuta </a:t>
+            </a:r>
+            <a:r>
+              <a:rPr sz="2000" b="1" i="0">
+                <a:solidFill>
+                  <a:srgbClr val="333333"/>
+                </a:solidFill>
+                <a:latin typeface="Calibri"/>
+              </a:rPr>
+              <a:t>de verdad</a:t>
+            </a:r>
+            <a:r>
+              <a:rPr sz="2000" b="0" i="0">
+                <a:solidFill>
+                  <a:srgbClr val="333333"/>
+                </a:solidFill>
+                <a:latin typeface="Calibri"/>
+              </a:rPr>
+              <a:t>: sobre un «UPDATE» o «DELETE» hay que envolverlo en «BEGIN» … «ROLLBACK» (eso es la Clase 8). Con «SELECT» no hay riesgo.</a:t>
             </a:r>
           </a:p>
           <a:p>
             <a:pPr>
               <a:spcAft>
-                <a:spcPts val="400"/>
+                <a:spcPts val="800"/>
               </a:spcAft>
             </a:pPr>
             <a:r>
-              <a:rPr sz="1400" b="0" i="0">
-                <a:solidFill>
-                  <a:srgbClr val="FFFFFF"/>
-                </a:solidFill>
-                <a:latin typeface="Calibri"/>
-              </a:rPr>
-              <a:t>FROM dueno d;</a:t>
+              <a:rPr sz="2000" b="0" i="0">
+                <a:solidFill>
+                  <a:srgbClr val="333333"/>
+                </a:solidFill>
+                <a:latin typeface="Calibri"/>
+              </a:rPr>
+              <a:t>–   </a:t>
+            </a:r>
+            <a:r>
+              <a:rPr sz="2000" b="1" i="0">
+                <a:solidFill>
+                  <a:srgbClr val="333333"/>
+                </a:solidFill>
+                <a:latin typeface="Calibri"/>
+              </a:rPr>
+              <a:t>Estimado contra real: la senal.</a:t>
+            </a:r>
+            <a:r>
+              <a:rPr sz="2000" b="0" i="0">
+                <a:solidFill>
+                  <a:srgbClr val="333333"/>
+                </a:solidFill>
+                <a:latin typeface="Calibri"/>
+              </a:rPr>
+              <a:t> Una divergencia de 2 veces es normal; de </a:t>
+            </a:r>
+            <a:r>
+              <a:rPr sz="2000" b="1" i="0">
+                <a:solidFill>
+                  <a:srgbClr val="333333"/>
+                </a:solidFill>
+                <a:latin typeface="Calibri"/>
+              </a:rPr>
+              <a:t>10 veces o mas</a:t>
+            </a:r>
+            <a:r>
+              <a:rPr sz="2000" b="0" i="0">
+                <a:solidFill>
+                  <a:srgbClr val="333333"/>
+                </a:solidFill>
+                <a:latin typeface="Calibri"/>
+              </a:rPr>
+              <a:t> delata estadisticas viejas o predicados que el motor cree independientes y no lo son.</a:t>
             </a:r>
           </a:p>
           <a:p>
             <a:pPr>
               <a:spcAft>
-                <a:spcPts val="400"/>
+                <a:spcPts val="800"/>
               </a:spcAft>
             </a:pPr>
             <a:r>
-              <a:rPr sz="1400" b="0" i="0">
-                <a:solidFill>
-                  <a:srgbClr val="FFFFFF"/>
-                </a:solidFill>
-                <a:latin typeface="Calibri"/>
-              </a:rPr>
-              <a:t/>
-            </a:r>
-          </a:p>
-          <a:p>
-            <a:pPr>
-              <a:spcAft>
-                <a:spcPts val="400"/>
-              </a:spcAft>
-            </a:pPr>
-            <a:r>
-              <a:rPr sz="1400" b="0" i="0">
-                <a:solidFill>
-                  <a:srgbClr val="FFFFFF"/>
-                </a:solidFill>
-                <a:latin typeface="Calibri"/>
-              </a:rPr>
-              <a:t>-- DESPUES: una sola pasada, agrupando</a:t>
-            </a:r>
-          </a:p>
-          <a:p>
-            <a:pPr>
-              <a:spcAft>
-                <a:spcPts val="400"/>
-              </a:spcAft>
-            </a:pPr>
-            <a:r>
-              <a:rPr sz="1400" b="0" i="0">
-                <a:solidFill>
-                  <a:srgbClr val="FFFFFF"/>
-                </a:solidFill>
-                <a:latin typeface="Calibri"/>
-              </a:rPr>
-              <a:t>SELECT d.nombre, COUNT(m.id_mascota) AS n</a:t>
-            </a:r>
-          </a:p>
-          <a:p>
-            <a:pPr>
-              <a:spcAft>
-                <a:spcPts val="400"/>
-              </a:spcAft>
-            </a:pPr>
-            <a:r>
-              <a:rPr sz="1400" b="0" i="0">
-                <a:solidFill>
-                  <a:srgbClr val="FFFFFF"/>
-                </a:solidFill>
-                <a:latin typeface="Calibri"/>
-              </a:rPr>
-              <a:t>FROM dueno d</a:t>
-            </a:r>
-          </a:p>
-          <a:p>
-            <a:pPr>
-              <a:spcAft>
-                <a:spcPts val="400"/>
-              </a:spcAft>
-            </a:pPr>
-            <a:r>
-              <a:rPr sz="1400" b="0" i="0">
-                <a:solidFill>
-                  <a:srgbClr val="FFFFFF"/>
-                </a:solidFill>
-                <a:latin typeface="Calibri"/>
-              </a:rPr>
-              <a:t>LEFT JOIN mascota m ON m.id_dueno = d.id_dueno</a:t>
-            </a:r>
-          </a:p>
-          <a:p>
-            <a:pPr>
-              <a:spcAft>
-                <a:spcPts val="400"/>
-              </a:spcAft>
-            </a:pPr>
-            <a:r>
-              <a:rPr sz="1400" b="0" i="0">
-                <a:solidFill>
-                  <a:srgbClr val="FFFFFF"/>
-                </a:solidFill>
-                <a:latin typeface="Calibri"/>
-              </a:rPr>
-              <a:t>GROUP BY d.id_dueno, d.nombre</a:t>
-            </a:r>
-          </a:p>
-          <a:p>
-            <a:pPr>
-              <a:spcAft>
-                <a:spcPts val="400"/>
-              </a:spcAft>
-            </a:pPr>
-            <a:r>
-              <a:rPr sz="1400" b="0" i="0">
-                <a:solidFill>
-                  <a:srgbClr val="FFFFFF"/>
-                </a:solidFill>
-                <a:latin typeface="Calibri"/>
-              </a:rPr>
-              <a:t>ORDER BY n DESC;</a:t>
-            </a:r>
-          </a:p>
-          <a:p>
-            <a:pPr>
-              <a:spcAft>
-                <a:spcPts val="400"/>
-              </a:spcAft>
-            </a:pPr>
-            <a:r>
-              <a:rPr sz="1400" b="0" i="0">
-                <a:solidFill>
-                  <a:srgbClr val="FFFFFF"/>
-                </a:solidFill>
-                <a:latin typeface="Calibri"/>
-              </a:rPr>
-              <a:t/>
-            </a:r>
-          </a:p>
-          <a:p>
-            <a:pPr>
-              <a:spcAft>
-                <a:spcPts val="400"/>
-              </a:spcAft>
-            </a:pPr>
-            <a:r>
-              <a:rPr sz="1400" b="0" i="0">
-                <a:solidFill>
-                  <a:srgbClr val="FFFFFF"/>
-                </a:solidFill>
-                <a:latin typeface="Calibri"/>
-              </a:rPr>
-              <a:t>-- LEFT JOIN, no JOIN: con JOIN desaparecen los duenos sin mascota.</a:t>
-            </a:r>
-          </a:p>
-        </p:txBody>
-      </p:sp>
-      <p:sp>
-        <p:nvSpPr>
-          <p:cNvPr id="9" name="TextBox 8"/>
+              <a:rPr sz="2000" b="0" i="0">
+                <a:solidFill>
+                  <a:srgbClr val="333333"/>
+                </a:solidFill>
+                <a:latin typeface="Calibri"/>
+              </a:rPr>
+              <a:t>–   </a:t>
+            </a:r>
+            <a:r>
+              <a:rPr sz="2000" b="1" i="0">
+                <a:solidFill>
+                  <a:srgbClr val="333333"/>
+                </a:solidFill>
+                <a:latin typeface="Calibri"/>
+              </a:rPr>
+              <a:t>El nodo mas costoso, sin trampa.</a:t>
+            </a:r>
+            <a:r>
+              <a:rPr sz="2000" b="0" i="0">
+                <a:solidFill>
+                  <a:srgbClr val="333333"/>
+                </a:solidFill>
+                <a:latin typeface="Calibri"/>
+              </a:rPr>
+              <a:t> El tiempo de un nodo </a:t>
+            </a:r>
+            <a:r>
+              <a:rPr sz="2000" b="1" i="0">
+                <a:solidFill>
+                  <a:srgbClr val="333333"/>
+                </a:solidFill>
+                <a:latin typeface="Calibri"/>
+              </a:rPr>
+              <a:t>incluye el de sus hijos</a:t>
+            </a:r>
+            <a:r>
+              <a:rPr sz="2000" b="0" i="0">
+                <a:solidFill>
+                  <a:srgbClr val="333333"/>
+                </a:solidFill>
+                <a:latin typeface="Calibri"/>
+              </a:rPr>
+              <a:t>, y «actual time» es </a:t>
+            </a:r>
+            <a:r>
+              <a:rPr sz="2000" b="1" i="0">
+                <a:solidFill>
+                  <a:srgbClr val="333333"/>
+                </a:solidFill>
+                <a:latin typeface="Calibri"/>
+              </a:rPr>
+              <a:t>por vuelta</a:t>
+            </a:r>
+            <a:r>
+              <a:rPr sz="2000" b="0" i="0">
+                <a:solidFill>
+                  <a:srgbClr val="333333"/>
+                </a:solidFill>
+                <a:latin typeface="Calibri"/>
+              </a:rPr>
+              <a:t>: hay que multiplicarlo por «loops». Un nodo de 0,5 ms con «loops=2006» cuesta un segundo — mas que el «Seq Scan» de arriba que parece el culpable.</a:t>
+            </a:r>
+          </a:p>
+        </p:txBody>
+      </p:sp>
+      <p:sp>
+        <p:nvSpPr>
+          <p:cNvPr id="7" name="TextBox 6"/>
           <p:cNvSpPr txBox="1"/>
           <p:nvPr/>
         </p:nvSpPr>
@@ -14778,7 +15276,7 @@
                 </a:solidFill>
                 <a:latin typeface="Calibri"/>
               </a:rPr>
-              <a:t>Optimizar es un ANTES medible, no una opinion</a:t>
+              <a:t>La subconsulta correlacionada: 2.006 pasadas o una sola</a:t>
             </a:r>
           </a:p>
         </p:txBody>
@@ -14812,160 +15310,21 @@
                 </a:solidFill>
                 <a:latin typeface="Calibri"/>
               </a:rPr>
-              <a:t>Mismas </a:t>
-            </a:r>
-            <a:r>
-              <a:rPr sz="1400" b="1" i="0">
-                <a:solidFill>
-                  <a:srgbClr val="B8D8EE"/>
-                </a:solidFill>
-                <a:latin typeface="Calibri"/>
-              </a:rPr>
-              <a:t>91 filas</a:t>
-            </a:r>
-            <a:r>
-              <a:rPr sz="1400" b="0" i="0">
-                <a:solidFill>
-                  <a:srgbClr val="B8D8EE"/>
-                </a:solidFill>
-                <a:latin typeface="Calibri"/>
-              </a:rPr>
-              <a:t> en las dos versiones. Y sin indices no hay Index Scan —eso es la Clase 7—: hoy se miden filas procesadas y pasadas sobre la tabla</a:t>
-            </a:r>
-          </a:p>
-        </p:txBody>
-      </p:sp>
-      <p:sp>
-        <p:nvSpPr>
-          <p:cNvPr id="6" name="Rounded Rectangle 5"/>
-          <p:cNvSpPr/>
-          <p:nvPr/>
-        </p:nvSpPr>
-        <p:spPr>
-          <a:xfrm>
-            <a:off x="457200" y="1472184"/>
-            <a:ext cx="5478627" cy="4882896"/>
-          </a:xfrm>
-          <a:prstGeom prst="roundRect">
-            <a:avLst>
-              <a:gd name="adj" fmla="val 12000"/>
-            </a:avLst>
-          </a:prstGeom>
-          <a:solidFill>
-            <a:srgbClr val="FBE4E4"/>
-          </a:solidFill>
-          <a:ln>
-            <a:noFill/>
-          </a:ln>
-        </p:spPr>
-        <p:style>
-          <a:lnRef idx="1">
-            <a:schemeClr val="accent1"/>
-          </a:lnRef>
-          <a:fillRef idx="3">
-            <a:schemeClr val="accent1"/>
-          </a:fillRef>
-          <a:effectRef idx="2">
-            <a:schemeClr val="accent1"/>
-          </a:effectRef>
-          <a:fontRef idx="minor">
-            <a:schemeClr val="lt1"/>
-          </a:fontRef>
-        </p:style>
-        <p:txBody>
-          <a:bodyPr rtlCol="0" anchor="ctr"/>
-          <a:lstStyle/>
-          <a:p>
-            <a:pPr algn="ctr"/>
-          </a:p>
-        </p:txBody>
-      </p:sp>
-      <p:sp>
-        <p:nvSpPr>
-          <p:cNvPr id="7" name="Rectangle 6"/>
-          <p:cNvSpPr/>
-          <p:nvPr/>
-        </p:nvSpPr>
-        <p:spPr>
-          <a:xfrm>
-            <a:off x="457200" y="1472184"/>
-            <a:ext cx="5478627" cy="502920"/>
-          </a:xfrm>
-          <a:prstGeom prst="rect">
-            <a:avLst/>
-          </a:prstGeom>
-          <a:solidFill>
-            <a:srgbClr val="A02030"/>
-          </a:solidFill>
-          <a:ln>
-            <a:noFill/>
-          </a:ln>
-        </p:spPr>
-        <p:style>
-          <a:lnRef idx="1">
-            <a:schemeClr val="accent1"/>
-          </a:lnRef>
-          <a:fillRef idx="3">
-            <a:schemeClr val="accent1"/>
-          </a:fillRef>
-          <a:effectRef idx="2">
-            <a:schemeClr val="accent1"/>
-          </a:effectRef>
-          <a:fontRef idx="minor">
-            <a:schemeClr val="lt1"/>
-          </a:fontRef>
-        </p:style>
-        <p:txBody>
-          <a:bodyPr rtlCol="0" anchor="ctr"/>
-          <a:lstStyle/>
-          <a:p>
-            <a:pPr algn="ctr"/>
-          </a:p>
-        </p:txBody>
-      </p:sp>
-      <p:sp>
-        <p:nvSpPr>
-          <p:cNvPr id="8" name="TextBox 7"/>
+              <a:t>Una subconsulta que menciona la fila de afuera se repite por cada fila: el plan lo delata con loops</a:t>
+            </a:r>
+          </a:p>
+        </p:txBody>
+      </p:sp>
+      <p:sp>
+        <p:nvSpPr>
+          <p:cNvPr id="6" name="TextBox 5"/>
           <p:cNvSpPr txBox="1"/>
           <p:nvPr/>
         </p:nvSpPr>
         <p:spPr>
           <a:xfrm>
-            <a:off x="594360" y="1563624"/>
-            <a:ext cx="5204307" cy="365760"/>
-          </a:xfrm>
-          <a:prstGeom prst="rect">
-            <a:avLst/>
-          </a:prstGeom>
-          <a:noFill/>
-        </p:spPr>
-        <p:txBody>
-          <a:bodyPr wrap="square" anchor="ctr"/>
-          <a:lstStyle/>
-          <a:p>
-            <a:pPr algn="ctr"/>
-            <a:r>
-              <a:rPr sz="1600" b="1" i="0">
-                <a:solidFill>
-                  <a:srgbClr val="FFFFFF"/>
-                </a:solidFill>
-                <a:latin typeface="Calibri"/>
-              </a:rPr>
-              <a:t>Antes</a:t>
-            </a:r>
-          </a:p>
-        </p:txBody>
-      </p:sp>
-      <p:sp>
-        <p:nvSpPr>
-          <p:cNvPr id="9" name="TextBox 8"/>
-          <p:cNvSpPr txBox="1"/>
-          <p:nvPr/>
-        </p:nvSpPr>
-        <p:spPr>
-          <a:xfrm>
-            <a:off x="621792" y="2112263"/>
-            <a:ext cx="5158587" cy="4288536"/>
+            <a:off x="457200" y="1380744"/>
+            <a:ext cx="11277295" cy="5020056"/>
           </a:xfrm>
           <a:prstGeom prst="rect">
             <a:avLst/>
@@ -14984,13 +15343,67 @@
               </a:spcAft>
             </a:pPr>
             <a:r>
-              <a:rPr sz="1500" b="0" i="0">
-                <a:solidFill>
-                  <a:srgbClr val="333333"/>
-                </a:solidFill>
-                <a:latin typeface="Calibri"/>
-              </a:rPr>
-              <a:t>–   «SELECT *» arrastra las columnas de 4 tablas por el join</a:t>
+              <a:rPr sz="1800" b="0" i="0">
+                <a:solidFill>
+                  <a:srgbClr val="333333"/>
+                </a:solidFill>
+                <a:latin typeface="Calibri"/>
+              </a:rPr>
+              <a:t>–   </a:t>
+            </a:r>
+            <a:r>
+              <a:rPr sz="1800" b="1" i="0">
+                <a:solidFill>
+                  <a:srgbClr val="333333"/>
+                </a:solidFill>
+                <a:latin typeface="Calibri"/>
+              </a:rPr>
+              <a:t>Que la hace correlacionada.</a:t>
+            </a:r>
+            <a:r>
+              <a:rPr sz="1800" b="0" i="0">
+                <a:solidFill>
+                  <a:srgbClr val="333333"/>
+                </a:solidFill>
+                <a:latin typeface="Calibri"/>
+              </a:rPr>
+              <a:t> La subconsulta esta en la </a:t>
+            </a:r>
+            <a:r>
+              <a:rPr sz="1800" b="1" i="0">
+                <a:solidFill>
+                  <a:srgbClr val="333333"/>
+                </a:solidFill>
+                <a:latin typeface="Calibri"/>
+              </a:rPr>
+              <a:t>lista de columnas</a:t>
+            </a:r>
+            <a:r>
+              <a:rPr sz="1800" b="0" i="0">
+                <a:solidFill>
+                  <a:srgbClr val="333333"/>
+                </a:solidFill>
+                <a:latin typeface="Calibri"/>
+              </a:rPr>
+              <a:t> y menciona una columna del exterior («WHERE m.id_dueno = d.id_dueno»). No se puede calcular una vez y reusar: depende de la fila que se este mirando, asi que el motor </a:t>
+            </a:r>
+            <a:r>
+              <a:rPr sz="1800" b="1" i="0">
+                <a:solidFill>
+                  <a:srgbClr val="333333"/>
+                </a:solidFill>
+                <a:latin typeface="Calibri"/>
+              </a:rPr>
+              <a:t>la ejecuta una vez por fila</a:t>
+            </a:r>
+            <a:r>
+              <a:rPr sz="1800" b="0" i="0">
+                <a:solidFill>
+                  <a:srgbClr val="333333"/>
+                </a:solidFill>
+                <a:latin typeface="Calibri"/>
+              </a:rPr>
+              <a:t> del exterior.</a:t>
             </a:r>
           </a:p>
           <a:p>
@@ -15000,22 +15413,49 @@
               </a:spcAft>
             </a:pPr>
             <a:r>
-              <a:rPr sz="1500" b="0" i="0">
-                <a:solidFill>
-                  <a:srgbClr val="333333"/>
-                </a:solidFill>
-                <a:latin typeface="Calibri"/>
-              </a:rPr>
-              <a:t>–   «to_char(fecha_hora,…)» y «UPPER(estado)»: </a:t>
-            </a:r>
-            <a:r>
-              <a:rPr sz="1500" b="1" i="0">
-                <a:solidFill>
-                  <a:srgbClr val="333333"/>
-                </a:solidFill>
-                <a:latin typeface="Calibri"/>
-              </a:rPr>
-              <a:t>funcion sobre la columna</a:t>
+              <a:rPr sz="1800" b="0" i="0">
+                <a:solidFill>
+                  <a:srgbClr val="333333"/>
+                </a:solidFill>
+                <a:latin typeface="Calibri"/>
+              </a:rPr>
+              <a:t>–   </a:t>
+            </a:r>
+            <a:r>
+              <a:rPr sz="1800" b="1" i="0">
+                <a:solidFill>
+                  <a:srgbClr val="333333"/>
+                </a:solidFill>
+                <a:latin typeface="Calibri"/>
+              </a:rPr>
+              <a:t>El numero que lo delata en el plan.</a:t>
+            </a:r>
+            <a:r>
+              <a:rPr sz="1800" b="0" i="0">
+                <a:solidFill>
+                  <a:srgbClr val="333333"/>
+                </a:solidFill>
+                <a:latin typeface="Calibri"/>
+              </a:rPr>
+              <a:t> «EXPLAIN ANALYZE» muestra un nodo «SubPlan» con </a:t>
+            </a:r>
+            <a:r>
+              <a:rPr sz="1800" b="1" i="0">
+                <a:solidFill>
+                  <a:srgbClr val="333333"/>
+                </a:solidFill>
+                <a:latin typeface="Calibri"/>
+              </a:rPr>
+              <a:t>«loops=2006»</a:t>
+            </a:r>
+            <a:r>
+              <a:rPr sz="1800" b="0" i="0">
+                <a:solidFill>
+                  <a:srgbClr val="333333"/>
+                </a:solidFill>
+                <a:latin typeface="Calibri"/>
+              </a:rPr>
+              <a:t> — un dueno, una ejecucion. Y cada ejecucion recorre las 30.010 citas. «loops» es el campo que hay que buscar: es el unico lugar donde el plan dice «esto se repitio».</a:t>
             </a:r>
           </a:p>
           <a:p>
@@ -15025,22 +15465,49 @@
               </a:spcAft>
             </a:pPr>
             <a:r>
-              <a:rPr sz="1500" b="0" i="0">
-                <a:solidFill>
-                  <a:srgbClr val="333333"/>
-                </a:solidFill>
-                <a:latin typeface="Calibri"/>
-              </a:rPr>
-              <a:t>–   Joins con coma: si falta una condicion, </a:t>
-            </a:r>
-            <a:r>
-              <a:rPr sz="1500" b="1" i="0">
-                <a:solidFill>
-                  <a:srgbClr val="333333"/>
-                </a:solidFill>
-                <a:latin typeface="Calibri"/>
-              </a:rPr>
-              <a:t>producto cartesiano</a:t>
+              <a:rPr sz="1800" b="0" i="0">
+                <a:solidFill>
+                  <a:srgbClr val="333333"/>
+                </a:solidFill>
+                <a:latin typeface="Calibri"/>
+              </a:rPr>
+              <a:t>–   </a:t>
+            </a:r>
+            <a:r>
+              <a:rPr sz="1800" b="1" i="0">
+                <a:solidFill>
+                  <a:srgbClr val="333333"/>
+                </a:solidFill>
+                <a:latin typeface="Calibri"/>
+              </a:rPr>
+              <a:t>La reescritura.</a:t>
+            </a:r>
+            <a:r>
+              <a:rPr sz="1800" b="0" i="0">
+                <a:solidFill>
+                  <a:srgbClr val="333333"/>
+                </a:solidFill>
+                <a:latin typeface="Calibri"/>
+              </a:rPr>
+              <a:t> «dueno LEFT JOIN mascota LEFT JOIN cita» + «GROUP BY d.id_dueno, d.nombre» + «COUNT(...)». El «SubPlan» desaparece y en su lugar queda un solo «HashAggregate»: </a:t>
+            </a:r>
+            <a:r>
+              <a:rPr sz="1800" b="1" i="0">
+                <a:solidFill>
+                  <a:srgbClr val="333333"/>
+                </a:solidFill>
+                <a:latin typeface="Calibri"/>
+              </a:rPr>
+              <a:t>una pasada</a:t>
+            </a:r>
+            <a:r>
+              <a:rPr sz="1800" b="0" i="0">
+                <a:solidFill>
+                  <a:srgbClr val="333333"/>
+                </a:solidFill>
+                <a:latin typeface="Calibri"/>
+              </a:rPr>
+              <a:t>. Es la unica mejora del dia que es de ordenes de magnitud, y no necesita ningun indice — lo que se elimino no fue un escaneo, fueron 2.005 escaneos.</a:t>
             </a:r>
           </a:p>
           <a:p>
@@ -15050,168 +15517,87 @@
               </a:spcAft>
             </a:pPr>
             <a:r>
-              <a:rPr sz="1500" b="0" i="0">
-                <a:solidFill>
-                  <a:srgbClr val="333333"/>
-                </a:solidFill>
-                <a:latin typeface="Calibri"/>
-              </a:rPr>
-              <a:t>–   Subconsulta por fila: el plan dice </a:t>
-            </a:r>
-            <a:r>
-              <a:rPr sz="1500" b="1" i="0">
-                <a:solidFill>
-                  <a:srgbClr val="333333"/>
-                </a:solidFill>
-                <a:latin typeface="Calibri"/>
-              </a:rPr>
-              <a:t>loops=2006</a:t>
-            </a:r>
-          </a:p>
-        </p:txBody>
-      </p:sp>
-      <p:sp>
-        <p:nvSpPr>
-          <p:cNvPr id="10" name="Rounded Rectangle 9"/>
-          <p:cNvSpPr/>
-          <p:nvPr/>
-        </p:nvSpPr>
-        <p:spPr>
-          <a:xfrm>
-            <a:off x="6255867" y="1472184"/>
-            <a:ext cx="5478627" cy="4882896"/>
-          </a:xfrm>
-          <a:prstGeom prst="roundRect">
-            <a:avLst>
-              <a:gd name="adj" fmla="val 12000"/>
-            </a:avLst>
-          </a:prstGeom>
-          <a:solidFill>
-            <a:srgbClr val="E8F4FA"/>
-          </a:solidFill>
-          <a:ln>
-            <a:noFill/>
-          </a:ln>
-        </p:spPr>
-        <p:style>
-          <a:lnRef idx="1">
-            <a:schemeClr val="accent1"/>
-          </a:lnRef>
-          <a:fillRef idx="3">
-            <a:schemeClr val="accent1"/>
-          </a:fillRef>
-          <a:effectRef idx="2">
-            <a:schemeClr val="accent1"/>
-          </a:effectRef>
-          <a:fontRef idx="minor">
-            <a:schemeClr val="lt1"/>
-          </a:fontRef>
-        </p:style>
-        <p:txBody>
-          <a:bodyPr rtlCol="0" anchor="ctr"/>
-          <a:lstStyle/>
-          <a:p>
-            <a:pPr algn="ctr"/>
-          </a:p>
-        </p:txBody>
-      </p:sp>
-      <p:sp>
-        <p:nvSpPr>
-          <p:cNvPr id="11" name="Rectangle 10"/>
-          <p:cNvSpPr/>
-          <p:nvPr/>
-        </p:nvSpPr>
-        <p:spPr>
-          <a:xfrm>
-            <a:off x="6255867" y="1472184"/>
-            <a:ext cx="5478627" cy="502920"/>
-          </a:xfrm>
-          <a:prstGeom prst="rect">
-            <a:avLst/>
-          </a:prstGeom>
-          <a:solidFill>
-            <a:srgbClr val="095292"/>
-          </a:solidFill>
-          <a:ln>
-            <a:noFill/>
-          </a:ln>
-        </p:spPr>
-        <p:style>
-          <a:lnRef idx="1">
-            <a:schemeClr val="accent1"/>
-          </a:lnRef>
-          <a:fillRef idx="3">
-            <a:schemeClr val="accent1"/>
-          </a:fillRef>
-          <a:effectRef idx="2">
-            <a:schemeClr val="accent1"/>
-          </a:effectRef>
-          <a:fontRef idx="minor">
-            <a:schemeClr val="lt1"/>
-          </a:fontRef>
-        </p:style>
-        <p:txBody>
-          <a:bodyPr rtlCol="0" anchor="ctr"/>
-          <a:lstStyle/>
-          <a:p>
-            <a:pPr algn="ctr"/>
-          </a:p>
-        </p:txBody>
-      </p:sp>
-      <p:sp>
-        <p:nvSpPr>
-          <p:cNvPr id="12" name="TextBox 11"/>
-          <p:cNvSpPr txBox="1"/>
-          <p:nvPr/>
-        </p:nvSpPr>
-        <p:spPr>
-          <a:xfrm>
-            <a:off x="6393027" y="1563624"/>
-            <a:ext cx="5204307" cy="365760"/>
-          </a:xfrm>
-          <a:prstGeom prst="rect">
-            <a:avLst/>
-          </a:prstGeom>
-          <a:noFill/>
-        </p:spPr>
-        <p:txBody>
-          <a:bodyPr wrap="square" anchor="ctr"/>
-          <a:lstStyle/>
-          <a:p>
-            <a:pPr algn="ctr"/>
-            <a:r>
-              <a:rPr sz="1600" b="1" i="0">
-                <a:solidFill>
-                  <a:srgbClr val="FFFFFF"/>
-                </a:solidFill>
-                <a:latin typeface="Calibri"/>
-              </a:rPr>
-              <a:t>Despues</a:t>
-            </a:r>
-          </a:p>
-        </p:txBody>
-      </p:sp>
-      <p:sp>
-        <p:nvSpPr>
-          <p:cNvPr id="13" name="TextBox 12"/>
-          <p:cNvSpPr txBox="1"/>
-          <p:nvPr/>
-        </p:nvSpPr>
-        <p:spPr>
-          <a:xfrm>
-            <a:off x="6420459" y="2112263"/>
-            <a:ext cx="5158587" cy="4288536"/>
-          </a:xfrm>
-          <a:prstGeom prst="rect">
-            <a:avLst/>
-          </a:prstGeom>
-          <a:noFill/>
-        </p:spPr>
-        <p:txBody>
-          <a:bodyPr wrap="square">
-            <a:spAutoFit/>
-          </a:bodyPr>
-          <a:lstStyle/>
+              <a:rPr sz="1800" b="0" i="0">
+                <a:solidFill>
+                  <a:srgbClr val="333333"/>
+                </a:solidFill>
+                <a:latin typeface="Calibri"/>
+              </a:rPr>
+              <a:t>–   </a:t>
+            </a:r>
+            <a:r>
+              <a:rPr sz="1800" b="1" i="0">
+                <a:solidFill>
+                  <a:srgbClr val="333333"/>
+                </a:solidFill>
+                <a:latin typeface="Calibri"/>
+              </a:rPr>
+              <a:t>«COUNT(c.id_cita)», nunca «COUNT(*)».</a:t>
+            </a:r>
+            <a:r>
+              <a:rPr sz="1800" b="0" i="0">
+                <a:solidFill>
+                  <a:srgbClr val="333333"/>
+                </a:solidFill>
+                <a:latin typeface="Calibri"/>
+              </a:rPr>
+              <a:t> El «LEFT JOIN» fabrica </a:t>
+            </a:r>
+            <a:r>
+              <a:rPr sz="1800" b="1" i="0">
+                <a:solidFill>
+                  <a:srgbClr val="333333"/>
+                </a:solidFill>
+                <a:latin typeface="Calibri"/>
+              </a:rPr>
+              <a:t>una fila llena de «NULL»</a:t>
+            </a:r>
+            <a:r>
+              <a:rPr sz="1800" b="0" i="0">
+                <a:solidFill>
+                  <a:srgbClr val="333333"/>
+                </a:solidFill>
+                <a:latin typeface="Calibri"/>
+              </a:rPr>
+              <a:t> por cada dueno sin citas. «COUNT(*)» cuenta filas y reporta </a:t>
+            </a:r>
+            <a:r>
+              <a:rPr sz="1800" b="1" i="0">
+                <a:solidFill>
+                  <a:srgbClr val="333333"/>
+                </a:solidFill>
+                <a:latin typeface="Calibri"/>
+              </a:rPr>
+              <a:t>1</a:t>
+            </a:r>
+            <a:r>
+              <a:rPr sz="1800" b="0" i="0">
+                <a:solidFill>
+                  <a:srgbClr val="333333"/>
+                </a:solidFill>
+                <a:latin typeface="Calibri"/>
+              </a:rPr>
+              <a:t>; «COUNT» de una columna ignora los «NULL» y reporta </a:t>
+            </a:r>
+            <a:r>
+              <a:rPr sz="1800" b="1" i="0">
+                <a:solidFill>
+                  <a:srgbClr val="333333"/>
+                </a:solidFill>
+                <a:latin typeface="Calibri"/>
+              </a:rPr>
+              <a:t>0</a:t>
+            </a:r>
+            <a:r>
+              <a:rPr sz="1800" b="0" i="0">
+                <a:solidFill>
+                  <a:srgbClr val="333333"/>
+                </a:solidFill>
+                <a:latin typeface="Calibri"/>
+              </a:rPr>
+              <a:t>. El sintoma es exacto: los duenos sin citas dicen 1 en vez de 0.</a:t>
+            </a:r>
+          </a:p>
           <a:p>
             <a:pPr>
               <a:spcAft>
@@ -15219,104 +15605,56 @@
               </a:spcAft>
             </a:pPr>
             <a:r>
-              <a:rPr sz="1500" b="0" i="0">
-                <a:solidFill>
-                  <a:srgbClr val="333333"/>
-                </a:solidFill>
-                <a:latin typeface="Calibri"/>
-              </a:rPr>
-              <a:t>–   Las 6 columnas que la pantalla de agenda usa</a:t>
-            </a:r>
-          </a:p>
-          <a:p>
-            <a:pPr>
-              <a:spcAft>
-                <a:spcPts val="800"/>
-              </a:spcAft>
-            </a:pPr>
-            <a:r>
-              <a:rPr sz="1500" b="0" i="0">
-                <a:solidFill>
-                  <a:srgbClr val="333333"/>
-                </a:solidFill>
-                <a:latin typeface="Calibri"/>
-              </a:rPr>
-              <a:t>–   «&gt;= TIMESTAMP '2026-03-10' … &lt;» y «estado = '…'»: </a:t>
-            </a:r>
-            <a:r>
-              <a:rPr sz="1500" b="1" i="0">
-                <a:solidFill>
-                  <a:srgbClr val="333333"/>
-                </a:solidFill>
-                <a:latin typeface="Calibri"/>
-              </a:rPr>
-              <a:t>sargable</a:t>
-            </a:r>
-          </a:p>
-          <a:p>
-            <a:pPr>
-              <a:spcAft>
-                <a:spcPts val="800"/>
-              </a:spcAft>
-            </a:pPr>
-            <a:r>
-              <a:rPr sz="1500" b="0" i="0">
-                <a:solidFill>
-                  <a:srgbClr val="333333"/>
-                </a:solidFill>
-                <a:latin typeface="Calibri"/>
-              </a:rPr>
-              <a:t>–   «JOIN … ON»: </a:t>
-            </a:r>
-            <a:r>
-              <a:rPr sz="1500" b="1" i="0">
-                <a:solidFill>
-                  <a:srgbClr val="333333"/>
-                </a:solidFill>
-                <a:latin typeface="Calibri"/>
-              </a:rPr>
-              <a:t>no acelera</a:t>
-            </a:r>
-            <a:r>
-              <a:rPr sz="1500" b="0" i="0">
-                <a:solidFill>
-                  <a:srgbClr val="333333"/>
-                </a:solidFill>
-                <a:latin typeface="Calibri"/>
-              </a:rPr>
-              <a:t>, impide el cartesiano</a:t>
-            </a:r>
-          </a:p>
-          <a:p>
-            <a:pPr>
-              <a:spcAft>
-                <a:spcPts val="800"/>
-              </a:spcAft>
-            </a:pPr>
-            <a:r>
-              <a:rPr sz="1500" b="0" i="0">
-                <a:solidFill>
-                  <a:srgbClr val="333333"/>
-                </a:solidFill>
-                <a:latin typeface="Calibri"/>
-              </a:rPr>
-              <a:t>–   «LEFT JOIN» + «GROUP BY»: de 2.006 pasadas a </a:t>
-            </a:r>
-            <a:r>
-              <a:rPr sz="1500" b="1" i="0">
-                <a:solidFill>
-                  <a:srgbClr val="333333"/>
-                </a:solidFill>
-                <a:latin typeface="Calibri"/>
-              </a:rPr>
-              <a:t>una</a:t>
-            </a:r>
-          </a:p>
-        </p:txBody>
-      </p:sp>
-      <p:sp>
-        <p:nvSpPr>
-          <p:cNvPr id="14" name="TextBox 13"/>
+              <a:rPr sz="1800" b="0" i="0">
+                <a:solidFill>
+                  <a:srgbClr val="333333"/>
+                </a:solidFill>
+                <a:latin typeface="Calibri"/>
+              </a:rPr>
+              <a:t>–   </a:t>
+            </a:r>
+            <a:r>
+              <a:rPr sz="1800" b="1" i="0">
+                <a:solidFill>
+                  <a:srgbClr val="333333"/>
+                </a:solidFill>
+                <a:latin typeface="Calibri"/>
+              </a:rPr>
+              <a:t>Y «LEFT», no «INNER».</a:t>
+            </a:r>
+            <a:r>
+              <a:rPr sz="1800" b="0" i="0">
+                <a:solidFill>
+                  <a:srgbClr val="333333"/>
+                </a:solidFill>
+                <a:latin typeface="Calibri"/>
+              </a:rPr>
+              <a:t> Un «INNER JOIN» es mas rapido y esta </a:t>
+            </a:r>
+            <a:r>
+              <a:rPr sz="1800" b="1" i="0">
+                <a:solidFill>
+                  <a:srgbClr val="333333"/>
+                </a:solidFill>
+                <a:latin typeface="Calibri"/>
+              </a:rPr>
+              <a:t>mal</a:t>
+            </a:r>
+            <a:r>
+              <a:rPr sz="1800" b="0" i="0">
+                <a:solidFill>
+                  <a:srgbClr val="333333"/>
+                </a:solidFill>
+                <a:latin typeface="Calibri"/>
+              </a:rPr>
+              <a:t>: borra del reporte a los duenos sin mascotas, y el ranking deja de cuadrar con el total de clientes de la clinica. Mas rapido devolviendo otra cosa no es optimizar.</a:t>
+            </a:r>
+          </a:p>
+        </p:txBody>
+      </p:sp>
+      <p:sp>
+        <p:nvSpPr>
+          <p:cNvPr id="7" name="TextBox 6"/>
           <p:cNvSpPr txBox="1"/>
           <p:nvPr/>
         </p:nvSpPr>
@@ -15384,7 +15722,7 @@
         <p:spPr>
           <a:xfrm>
             <a:off x="0" y="0"/>
-            <a:ext cx="12191695" cy="960120"/>
+            <a:ext cx="12191695" cy="1170432"/>
           </a:xfrm>
           <a:prstGeom prst="rect">
             <a:avLst/>
@@ -15426,7 +15764,7 @@
         </p:nvSpPr>
         <p:spPr>
           <a:xfrm>
-            <a:off x="0" y="960120"/>
+            <a:off x="0" y="1170432"/>
             <a:ext cx="12191695" cy="41148"/>
           </a:xfrm>
           <a:prstGeom prst="rect">
@@ -15470,7 +15808,7 @@
         <p:spPr>
           <a:xfrm>
             <a:off x="457200" y="164592"/>
-            <a:ext cx="11277295" cy="502920"/>
+            <a:ext cx="11277295" cy="384048"/>
           </a:xfrm>
           <a:prstGeom prst="rect">
             <a:avLst/>
@@ -15490,7 +15828,7 @@
                 </a:solidFill>
                 <a:latin typeface="Calibri"/>
               </a:rPr>
-              <a:t>Leer un plan: es un arbol y se lee de adentro hacia afuera</a:t>
+              <a:t>Optimizar no cambia el resultado: como se prueba</a:t>
             </a:r>
           </a:p>
         </p:txBody>
@@ -15503,8 +15841,42 @@
         </p:nvSpPr>
         <p:spPr>
           <a:xfrm>
-            <a:off x="457200" y="1170432"/>
-            <a:ext cx="11277295" cy="5230368"/>
+            <a:off x="457200" y="566928"/>
+            <a:ext cx="11277295" cy="411480"/>
+          </a:xfrm>
+          <a:prstGeom prst="rect">
+            <a:avLst/>
+          </a:prstGeom>
+          <a:noFill/>
+        </p:spPr>
+        <p:txBody>
+          <a:bodyPr wrap="square">
+            <a:spAutoFit/>
+          </a:bodyPr>
+          <a:lstStyle/>
+          <a:p>
+            <a:r>
+              <a:rPr sz="1400" b="0" i="0">
+                <a:solidFill>
+                  <a:srgbClr val="B8D8EE"/>
+                </a:solidFill>
+                <a:latin typeface="Calibri"/>
+              </a:rPr>
+              <a:t>Optimizar sin probar la equivalencia es apostar: «COUNT(*)» de cada version y «EXCEPT» en los dos sentidos</a:t>
+            </a:r>
+          </a:p>
+        </p:txBody>
+      </p:sp>
+      <p:sp>
+        <p:nvSpPr>
+          <p:cNvPr id="6" name="TextBox 5"/>
+          <p:cNvSpPr txBox="1"/>
+          <p:nvPr/>
+        </p:nvSpPr>
+        <p:spPr>
+          <a:xfrm>
+            <a:off x="457200" y="1380744"/>
+            <a:ext cx="11277295" cy="5020056"/>
           </a:xfrm>
           <a:prstGeom prst="rect">
             <a:avLst/>
@@ -15538,7 +15910,7 @@
                 </a:solidFill>
                 <a:latin typeface="Calibri"/>
               </a:rPr>
-              <a:t>El orden de lectura.</a:t>
+              <a:t>La regla.</a:t>
             </a:r>
             <a:r>
               <a:rPr sz="2000" b="0" i="0">
@@ -15547,7 +15919,7 @@
                 </a:solidFill>
                 <a:latin typeface="Calibri"/>
               </a:rPr>
-              <a:t> El plan </a:t>
+              <a:t> Correccion y tiempo son ejes </a:t>
             </a:r>
             <a:r>
               <a:rPr sz="2000" b="1" i="0">
@@ -15556,7 +15928,7 @@
                 </a:solidFill>
                 <a:latin typeface="Calibri"/>
               </a:rPr>
-              <a:t>no</a:t>
+              <a:t>independientes</a:t>
             </a:r>
             <a:r>
               <a:rPr sz="2000" b="0" i="0">
@@ -15565,7 +15937,7 @@
                 </a:solidFill>
                 <a:latin typeface="Calibri"/>
               </a:rPr>
-              <a:t> es una lista de pasos de arriba hacia abajo: es un arbol. Los nodos </a:t>
+              <a:t>. Si la version DESPUES devuelve algo distinto, no se optimizo nada: se rompio la consulta, y se rompio </a:t>
             </a:r>
             <a:r>
               <a:rPr sz="2000" b="1" i="0">
@@ -15574,7 +15946,7 @@
                 </a:solidFill>
                 <a:latin typeface="Calibri"/>
               </a:rPr>
-              <a:t>mas indentados son las hojas</a:t>
+              <a:t>sin avisar</a:t>
             </a:r>
             <a:r>
               <a:rPr sz="2000" b="0" i="0">
@@ -15583,25 +15955,7 @@
                 </a:solidFill>
                 <a:latin typeface="Calibri"/>
               </a:rPr>
-              <a:t> y se ejecutan primero; cada nodo consume las filas de sus hijos. La </a:t>
-            </a:r>
-            <a:r>
-              <a:rPr sz="2000" b="1" i="0">
-                <a:solidFill>
-                  <a:srgbClr val="333333"/>
-                </a:solidFill>
-                <a:latin typeface="Calibri"/>
-              </a:rPr>
-              <a:t>primera linea impresa es la ULTIMA operacion</a:t>
-            </a:r>
-            <a:r>
-              <a:rPr sz="2000" b="0" i="0">
-                <a:solidFill>
-                  <a:srgbClr val="333333"/>
-                </a:solidFill>
-                <a:latin typeface="Calibri"/>
-              </a:rPr>
-              <a:t>.</a:t>
+              <a:t>, porque ningun motor va a lanzar un error por eso.</a:t>
             </a:r>
           </a:p>
           <a:p>
@@ -15626,7 +15980,7 @@
                 </a:solidFill>
                 <a:latin typeface="Calibri"/>
               </a:rPr>
-              <a:t>Los cuatro campos.</a:t>
+              <a:t>Prueba 1, para una consulta con filtro: los dos «COUNT(*)».</a:t>
             </a:r>
             <a:r>
               <a:rPr sz="2000" b="0" i="0">
@@ -15635,7 +15989,7 @@
                 </a:solidFill>
                 <a:latin typeface="Calibri"/>
               </a:rPr>
-              <a:t> «cost=270.00..4821.50» son arranque y total en una unidad </a:t>
+              <a:t> Se envuelve cada version y se comparan los conteos en la </a:t>
             </a:r>
             <a:r>
               <a:rPr sz="2000" b="1" i="0">
@@ -15644,7 +15998,7 @@
                 </a:solidFill>
                 <a:latin typeface="Calibri"/>
               </a:rPr>
-              <a:t>relativa</a:t>
+              <a:t>misma corrida</a:t>
             </a:r>
             <a:r>
               <a:rPr sz="2000" b="0" i="0">
@@ -15653,7 +16007,7 @@
                 </a:solidFill>
                 <a:latin typeface="Calibri"/>
               </a:rPr>
-              <a:t> (1.0 = leer una pagina de 8 KB), </a:t>
+              <a:t>. En la agenda del 2026-03-10 las dos tienen que decir </a:t>
             </a:r>
             <a:r>
               <a:rPr sz="2000" b="1" i="0">
@@ -15662,7 +16016,7 @@
                 </a:solidFill>
                 <a:latin typeface="Calibri"/>
               </a:rPr>
-              <a:t>no</a:t>
+              <a:t>91</a:t>
             </a:r>
             <a:r>
               <a:rPr sz="2000" b="0" i="0">
@@ -15671,43 +16025,7 @@
                 </a:solidFill>
                 <a:latin typeface="Calibri"/>
               </a:rPr>
-              <a:t> milisegundos; «rows=» son las filas que el motor </a:t>
-            </a:r>
-            <a:r>
-              <a:rPr sz="2000" b="1" i="0">
-                <a:solidFill>
-                  <a:srgbClr val="333333"/>
-                </a:solidFill>
-                <a:latin typeface="Calibri"/>
-              </a:rPr>
-              <a:t>estima</a:t>
-            </a:r>
-            <a:r>
-              <a:rPr sz="2000" b="0" i="0">
-                <a:solidFill>
-                  <a:srgbClr val="333333"/>
-                </a:solidFill>
-                <a:latin typeface="Calibri"/>
-              </a:rPr>
-              <a:t>; «width=» el ancho de la fila en bytes; «loops=» cuantas </a:t>
-            </a:r>
-            <a:r>
-              <a:rPr sz="2000" b="1" i="0">
-                <a:solidFill>
-                  <a:srgbClr val="333333"/>
-                </a:solidFill>
-                <a:latin typeface="Calibri"/>
-              </a:rPr>
-              <a:t>veces se repitio</a:t>
-            </a:r>
-            <a:r>
-              <a:rPr sz="2000" b="0" i="0">
-                <a:solidFill>
-                  <a:srgbClr val="333333"/>
-                </a:solidFill>
-                <a:latin typeface="Calibri"/>
-              </a:rPr>
-              <a:t> ese nodo.</a:t>
+              <a:t>. Un conteo distinto es la respuesta equivocada, no una version mas rapida.</a:t>
             </a:r>
           </a:p>
           <a:p>
@@ -15732,7 +16050,7 @@
                 </a:solidFill>
                 <a:latin typeface="Calibri"/>
               </a:rPr>
-              <a:t>«EXPLAIN» estima, «EXPLAIN ANALYZE» ejecuta.</a:t>
+              <a:t>Prueba 2, para conjuntos completos: «EXCEPT» en los DOS sentidos.</a:t>
             </a:r>
             <a:r>
               <a:rPr sz="2000" b="0" i="0">
@@ -15741,7 +16059,7 @@
                 </a:solidFill>
                 <a:latin typeface="Calibri"/>
               </a:rPr>
-              <a:t> El segundo agrega «actual time=», «actual rows=» y el «Execution Time» final. Y ejecuta </a:t>
+              <a:t> «A EXCEPT B» devuelve lo que esta en A y no en B. Que salga vacio </a:t>
             </a:r>
             <a:r>
               <a:rPr sz="2000" b="1" i="0">
@@ -15750,7 +16068,7 @@
                 </a:solidFill>
                 <a:latin typeface="Calibri"/>
               </a:rPr>
-              <a:t>de verdad</a:t>
+              <a:t>no</a:t>
             </a:r>
             <a:r>
               <a:rPr sz="2000" b="0" i="0">
@@ -15759,7 +16077,25 @@
                 </a:solidFill>
                 <a:latin typeface="Calibri"/>
               </a:rPr>
-              <a:t>: sobre un «UPDATE» o «DELETE» hay que envolverlo en «BEGIN» … «ROLLBACK» (eso es la Clase 8). Con «SELECT» no hay riesgo.</a:t>
+              <a:t> prueba la igualdad: B puede tener filas de mas. Se corren las dos direcciones unidas con «UNION ALL» y se exige </a:t>
+            </a:r>
+            <a:r>
+              <a:rPr sz="2000" b="1" i="0">
+                <a:solidFill>
+                  <a:srgbClr val="333333"/>
+                </a:solidFill>
+                <a:latin typeface="Calibri"/>
+              </a:rPr>
+              <a:t>cero filas</a:t>
+            </a:r>
+            <a:r>
+              <a:rPr sz="2000" b="0" i="0">
+                <a:solidFill>
+                  <a:srgbClr val="333333"/>
+                </a:solidFill>
+                <a:latin typeface="Calibri"/>
+              </a:rPr>
+              <a:t>.</a:t>
             </a:r>
           </a:p>
           <a:p>
@@ -15784,7 +16120,7 @@
                 </a:solidFill>
                 <a:latin typeface="Calibri"/>
               </a:rPr>
-              <a:t>Estimado contra real: la senal.</a:t>
+              <a:t>Sin «LIMIT» en la prueba.</a:t>
             </a:r>
             <a:r>
               <a:rPr sz="2000" b="0" i="0">
@@ -15793,25 +16129,7 @@
                 </a:solidFill>
                 <a:latin typeface="Calibri"/>
               </a:rPr>
-              <a:t> Una divergencia de 2 veces es normal; de </a:t>
-            </a:r>
-            <a:r>
-              <a:rPr sz="2000" b="1" i="0">
-                <a:solidFill>
-                  <a:srgbClr val="333333"/>
-                </a:solidFill>
-                <a:latin typeface="Calibri"/>
-              </a:rPr>
-              <a:t>10 veces o mas</a:t>
-            </a:r>
-            <a:r>
-              <a:rPr sz="2000" b="0" i="0">
-                <a:solidFill>
-                  <a:srgbClr val="333333"/>
-                </a:solidFill>
-                <a:latin typeface="Calibri"/>
-              </a:rPr>
-              <a:t> delata estadisticas viejas o predicados que el motor cree independientes y no lo son.</a:t>
+              <a:t> Comparar solo las primeras 20 filas deja fuera justamente las que fallan — las de los duenos con cero citas, que es donde «COUNT(*)» miente.</a:t>
             </a:r>
           </a:p>
           <a:p>
@@ -15836,7 +16154,7 @@
                 </a:solidFill>
                 <a:latin typeface="Calibri"/>
               </a:rPr>
-              <a:t>El nodo mas costoso, sin trampa.</a:t>
+              <a:t>Que NO sirve como prueba.</a:t>
             </a:r>
             <a:r>
               <a:rPr sz="2000" b="0" i="0">
@@ -15845,7 +16163,7 @@
                 </a:solidFill>
                 <a:latin typeface="Calibri"/>
               </a:rPr>
-              <a:t> El tiempo de un nodo </a:t>
+              <a:t> «Se ve igual», «trae mas o menos lo mismo» o mirar la primera pantalla de resultados. La equivalencia se afirma con una consulta cuyo resultado </a:t>
             </a:r>
             <a:r>
               <a:rPr sz="2000" b="1" i="0">
@@ -15854,7 +16172,7 @@
                 </a:solidFill>
                 <a:latin typeface="Calibri"/>
               </a:rPr>
-              <a:t>incluye el de sus hijos</a:t>
+              <a:t>se conoce de antemano</a:t>
             </a:r>
             <a:r>
               <a:rPr sz="2000" b="0" i="0">
@@ -15863,32 +16181,14 @@
                 </a:solidFill>
                 <a:latin typeface="Calibri"/>
               </a:rPr>
-              <a:t>, y «actual time» es </a:t>
-            </a:r>
-            <a:r>
-              <a:rPr sz="2000" b="1" i="0">
-                <a:solidFill>
-                  <a:srgbClr val="333333"/>
-                </a:solidFill>
-                <a:latin typeface="Calibri"/>
-              </a:rPr>
-              <a:t>por vuelta</a:t>
-            </a:r>
-            <a:r>
-              <a:rPr sz="2000" b="0" i="0">
-                <a:solidFill>
-                  <a:srgbClr val="333333"/>
-                </a:solidFill>
-                <a:latin typeface="Calibri"/>
-              </a:rPr>
-              <a:t>: hay que multiplicarlo por «loops». Un nodo de 0,5 ms con «loops=2006» cuesta un segundo — mas que el «Seq Scan» de arriba que parece el culpable.</a:t>
-            </a:r>
-          </a:p>
-        </p:txBody>
-      </p:sp>
-      <p:sp>
-        <p:nvSpPr>
-          <p:cNvPr id="6" name="TextBox 5"/>
+              <a:t>: un numero que coincide o un conjunto vacio.</a:t>
+            </a:r>
+          </a:p>
+        </p:txBody>
+      </p:sp>
+      <p:sp>
+        <p:nvSpPr>
+          <p:cNvPr id="7" name="TextBox 6"/>
           <p:cNvSpPr txBox="1"/>
           <p:nvPr/>
         </p:nvSpPr>
@@ -16346,7 +16646,7 @@
                 </a:solidFill>
                 <a:latin typeface="Calibri"/>
               </a:rPr>
-              <a:t>La subconsulta correlacionada: 2.006 pasadas o una sola</a:t>
+              <a:t>Demo del dia</a:t>
             </a:r>
           </a:p>
         </p:txBody>
@@ -16379,7 +16679,7 @@
               </a:spcAft>
             </a:pPr>
             <a:r>
-              <a:rPr sz="1900" b="0" i="0">
+              <a:rPr sz="2000" b="0" i="0">
                 <a:solidFill>
                   <a:srgbClr val="333333"/>
                 </a:solidFill>
@@ -16388,58 +16688,22 @@
               <a:t>–   </a:t>
             </a:r>
             <a:r>
-              <a:rPr sz="1900" b="1" i="0">
-                <a:solidFill>
-                  <a:srgbClr val="333333"/>
-                </a:solidFill>
-                <a:latin typeface="Calibri"/>
-              </a:rPr>
-              <a:t>Que la hace correlacionada.</a:t>
-            </a:r>
-            <a:r>
-              <a:rPr sz="1900" b="0" i="0">
-                <a:solidFill>
-                  <a:srgbClr val="333333"/>
-                </a:solidFill>
-                <a:latin typeface="Calibri"/>
-              </a:rPr>
-              <a:t> La subconsulta esta en la </a:t>
-            </a:r>
-            <a:r>
-              <a:rPr sz="1900" b="1" i="0">
-                <a:solidFill>
-                  <a:srgbClr val="333333"/>
-                </a:solidFill>
-                <a:latin typeface="Calibri"/>
-              </a:rPr>
-              <a:t>lista de columnas</a:t>
-            </a:r>
-            <a:r>
-              <a:rPr sz="1900" b="0" i="0">
-                <a:solidFill>
-                  <a:srgbClr val="333333"/>
-                </a:solidFill>
-                <a:latin typeface="Calibri"/>
-              </a:rPr>
-              <a:t> y menciona una columna del exterior («WHERE m.id_dueno = d.id_dueno»). No se puede calcular una vez y reusar: depende de la fila que se este mirando, asi que el motor </a:t>
-            </a:r>
-            <a:r>
-              <a:rPr sz="1900" b="1" i="0">
-                <a:solidFill>
-                  <a:srgbClr val="333333"/>
-                </a:solidFill>
-                <a:latin typeface="Calibri"/>
-              </a:rPr>
-              <a:t>la ejecuta una vez por fila</a:t>
-            </a:r>
-            <a:r>
-              <a:rPr sz="1900" b="0" i="0">
-                <a:solidFill>
-                  <a:srgbClr val="333333"/>
-                </a:solidFill>
-                <a:latin typeface="Calibri"/>
-              </a:rPr>
-              <a:t> del exterior.</a:t>
+              <a:rPr sz="2000" b="1" i="0">
+                <a:solidFill>
+                  <a:srgbClr val="333333"/>
+                </a:solidFill>
+                <a:latin typeface="Calibri"/>
+              </a:rPr>
+              <a:t>Herramienta:</a:t>
+            </a:r>
+            <a:r>
+              <a:rPr sz="2000" b="0" i="0">
+                <a:solidFill>
+                  <a:srgbClr val="333333"/>
+                </a:solidFill>
+                <a:latin typeface="Calibri"/>
+              </a:rPr>
+              <a:t> PostgreSQL + Google Docs</a:t>
             </a:r>
           </a:p>
           <a:p>
@@ -16449,7 +16713,7 @@
               </a:spcAft>
             </a:pPr>
             <a:r>
-              <a:rPr sz="1900" b="0" i="0">
+              <a:rPr sz="2000" b="0" i="0">
                 <a:solidFill>
                   <a:srgbClr val="333333"/>
                 </a:solidFill>
@@ -16458,40 +16722,22 @@
               <a:t>–   </a:t>
             </a:r>
             <a:r>
-              <a:rPr sz="1900" b="1" i="0">
-                <a:solidFill>
-                  <a:srgbClr val="333333"/>
-                </a:solidFill>
-                <a:latin typeface="Calibri"/>
-              </a:rPr>
-              <a:t>El numero que lo delata en el plan.</a:t>
-            </a:r>
-            <a:r>
-              <a:rPr sz="1900" b="0" i="0">
-                <a:solidFill>
-                  <a:srgbClr val="333333"/>
-                </a:solidFill>
-                <a:latin typeface="Calibri"/>
-              </a:rPr>
-              <a:t> «EXPLAIN ANALYZE» muestra un nodo «SubPlan» con </a:t>
-            </a:r>
-            <a:r>
-              <a:rPr sz="1900" b="1" i="0">
-                <a:solidFill>
-                  <a:srgbClr val="333333"/>
-                </a:solidFill>
-                <a:latin typeface="Calibri"/>
-              </a:rPr>
-              <a:t>«loops=2006»</a:t>
-            </a:r>
-            <a:r>
-              <a:rPr sz="1900" b="0" i="0">
-                <a:solidFill>
-                  <a:srgbClr val="333333"/>
-                </a:solidFill>
-                <a:latin typeface="Calibri"/>
-              </a:rPr>
-              <a:t> — un dueno, una ejecucion. Y cada ejecucion recorre las 30.010 citas. «loops» es el campo que hay que buscar: es el unico lugar donde el plan dice «esto se repitio».</a:t>
+              <a:rPr sz="2000" b="1" i="0">
+                <a:solidFill>
+                  <a:srgbClr val="333333"/>
+                </a:solidFill>
+                <a:latin typeface="Calibri"/>
+              </a:rPr>
+              <a:t>Demo:</a:t>
+            </a:r>
+            <a:r>
+              <a:rPr sz="2000" b="0" i="0">
+                <a:solidFill>
+                  <a:srgbClr val="333333"/>
+                </a:solidFill>
+                <a:latin typeface="Calibri"/>
+              </a:rPr>
+              <a:t> Consulta pesada citas+mascotas+duenos -&gt; version filtrada y proyectada, con EXPLAIN ANALYZE antes y despues.</a:t>
             </a:r>
           </a:p>
           <a:p>
@@ -16501,49 +16747,13 @@
               </a:spcAft>
             </a:pPr>
             <a:r>
-              <a:rPr sz="1900" b="0" i="0">
-                <a:solidFill>
-                  <a:srgbClr val="333333"/>
-                </a:solidFill>
-                <a:latin typeface="Calibri"/>
-              </a:rPr>
-              <a:t>–   </a:t>
-            </a:r>
-            <a:r>
-              <a:rPr sz="1900" b="1" i="0">
-                <a:solidFill>
-                  <a:srgbClr val="333333"/>
-                </a:solidFill>
-                <a:latin typeface="Calibri"/>
-              </a:rPr>
-              <a:t>La reescritura.</a:t>
-            </a:r>
-            <a:r>
-              <a:rPr sz="1900" b="0" i="0">
-                <a:solidFill>
-                  <a:srgbClr val="333333"/>
-                </a:solidFill>
-                <a:latin typeface="Calibri"/>
-              </a:rPr>
-              <a:t> «dueno LEFT JOIN mascota LEFT JOIN cita» + «GROUP BY d.id_dueno, d.nombre» + «COUNT(...)». El «SubPlan» desaparece y en su lugar queda un solo «HashAggregate»: </a:t>
-            </a:r>
-            <a:r>
-              <a:rPr sz="1900" b="1" i="0">
-                <a:solidFill>
-                  <a:srgbClr val="333333"/>
-                </a:solidFill>
-                <a:latin typeface="Calibri"/>
-              </a:rPr>
-              <a:t>una pasada</a:t>
-            </a:r>
-            <a:r>
-              <a:rPr sz="1900" b="0" i="0">
-                <a:solidFill>
-                  <a:srgbClr val="333333"/>
-                </a:solidFill>
-                <a:latin typeface="Calibri"/>
-              </a:rPr>
-              <a:t>. Es la unica mejora del dia que es de ordenes de magnitud, y no necesita ningun indice — lo que se elimino no fue un escaneo, fueron 2.005 escaneos.</a:t>
+              <a:rPr sz="2000" b="0" i="0">
+                <a:solidFill>
+                  <a:srgbClr val="333333"/>
+                </a:solidFill>
+                <a:latin typeface="Calibri"/>
+              </a:rPr>
+              <a:t>–   Sigan el mismo dominio VetCare (no inventen otro caso).</a:t>
             </a:r>
           </a:p>
           <a:p>
@@ -16553,7 +16763,7 @@
               </a:spcAft>
             </a:pPr>
             <a:r>
-              <a:rPr sz="1900" b="0" i="0">
+              <a:rPr sz="2000" b="0" i="0">
                 <a:solidFill>
                   <a:srgbClr val="333333"/>
                 </a:solidFill>
@@ -16562,76 +16772,22 @@
               <a:t>–   </a:t>
             </a:r>
             <a:r>
-              <a:rPr sz="1900" b="1" i="0">
-                <a:solidFill>
-                  <a:srgbClr val="333333"/>
-                </a:solidFill>
-                <a:latin typeface="Calibri"/>
-              </a:rPr>
-              <a:t>«COUNT(c.id_cita)», nunca «COUNT(*)».</a:t>
-            </a:r>
-            <a:r>
-              <a:rPr sz="1900" b="0" i="0">
-                <a:solidFill>
-                  <a:srgbClr val="333333"/>
-                </a:solidFill>
-                <a:latin typeface="Calibri"/>
-              </a:rPr>
-              <a:t> El «LEFT JOIN» fabrica </a:t>
-            </a:r>
-            <a:r>
-              <a:rPr sz="1900" b="1" i="0">
-                <a:solidFill>
-                  <a:srgbClr val="333333"/>
-                </a:solidFill>
-                <a:latin typeface="Calibri"/>
-              </a:rPr>
-              <a:t>una fila llena de «NULL»</a:t>
-            </a:r>
-            <a:r>
-              <a:rPr sz="1900" b="0" i="0">
-                <a:solidFill>
-                  <a:srgbClr val="333333"/>
-                </a:solidFill>
-                <a:latin typeface="Calibri"/>
-              </a:rPr>
-              <a:t> por cada dueno sin citas. «COUNT(*)» cuenta filas y reporta </a:t>
-            </a:r>
-            <a:r>
-              <a:rPr sz="1900" b="1" i="0">
-                <a:solidFill>
-                  <a:srgbClr val="333333"/>
-                </a:solidFill>
-                <a:latin typeface="Calibri"/>
-              </a:rPr>
-              <a:t>1</a:t>
-            </a:r>
-            <a:r>
-              <a:rPr sz="1900" b="0" i="0">
-                <a:solidFill>
-                  <a:srgbClr val="333333"/>
-                </a:solidFill>
-                <a:latin typeface="Calibri"/>
-              </a:rPr>
-              <a:t>; «COUNT» de una columna ignora los «NULL» y reporta </a:t>
-            </a:r>
-            <a:r>
-              <a:rPr sz="1900" b="1" i="0">
-                <a:solidFill>
-                  <a:srgbClr val="333333"/>
-                </a:solidFill>
-                <a:latin typeface="Calibri"/>
-              </a:rPr>
-              <a:t>0</a:t>
-            </a:r>
-            <a:r>
-              <a:rPr sz="1900" b="0" i="0">
-                <a:solidFill>
-                  <a:srgbClr val="333333"/>
-                </a:solidFill>
-                <a:latin typeface="Calibri"/>
-              </a:rPr>
-              <a:t>. El sintoma es exacto: los duenos sin citas dicen 1 en vez de 0.</a:t>
+              <a:rPr sz="2000" b="1" i="0">
+                <a:solidFill>
+                  <a:srgbClr val="333333"/>
+                </a:solidFill>
+                <a:latin typeface="Calibri"/>
+              </a:rPr>
+              <a:t>Qué observar:</a:t>
+            </a:r>
+            <a:r>
+              <a:rPr sz="2000" b="0" i="0">
+                <a:solidFill>
+                  <a:srgbClr val="333333"/>
+                </a:solidFill>
+                <a:latin typeface="Calibri"/>
+              </a:rPr>
+              <a:t> las dos versiones devuelven las mismas 91 filas, pero el plan de la primera muestra loops=2006 y el de la segunda una sola pasada.</a:t>
             </a:r>
           </a:p>
           <a:p>
@@ -16641,7 +16797,7 @@
               </a:spcAft>
             </a:pPr>
             <a:r>
-              <a:rPr sz="1900" b="0" i="0">
+              <a:rPr sz="2000" b="0" i="0">
                 <a:solidFill>
                   <a:srgbClr val="333333"/>
                 </a:solidFill>
@@ -16650,40 +16806,22 @@
               <a:t>–   </a:t>
             </a:r>
             <a:r>
-              <a:rPr sz="1900" b="1" i="0">
-                <a:solidFill>
-                  <a:srgbClr val="333333"/>
-                </a:solidFill>
-                <a:latin typeface="Calibri"/>
-              </a:rPr>
-              <a:t>Y «LEFT», no «INNER».</a:t>
-            </a:r>
-            <a:r>
-              <a:rPr sz="1900" b="0" i="0">
-                <a:solidFill>
-                  <a:srgbClr val="333333"/>
-                </a:solidFill>
-                <a:latin typeface="Calibri"/>
-              </a:rPr>
-              <a:t> Un «INNER JOIN» es mas rapido y esta </a:t>
-            </a:r>
-            <a:r>
-              <a:rPr sz="1900" b="1" i="0">
-                <a:solidFill>
-                  <a:srgbClr val="333333"/>
-                </a:solidFill>
-                <a:latin typeface="Calibri"/>
-              </a:rPr>
-              <a:t>mal</a:t>
-            </a:r>
-            <a:r>
-              <a:rPr sz="1900" b="0" i="0">
-                <a:solidFill>
-                  <a:srgbClr val="333333"/>
-                </a:solidFill>
-                <a:latin typeface="Calibri"/>
-              </a:rPr>
-              <a:t>: borra del reporte a los duenos sin mascotas, y el ranking deja de cuadrar con el total de clientes de la clinica. Mas rapido devolviendo otra cosa no es optimizar.</a:t>
+              <a:rPr sz="2000" b="1" i="0">
+                <a:solidFill>
+                  <a:srgbClr val="333333"/>
+                </a:solidFill>
+                <a:latin typeface="Calibri"/>
+              </a:rPr>
+              <a:t>Qué observar:</a:t>
+            </a:r>
+            <a:r>
+              <a:rPr sz="2000" b="0" i="0">
+                <a:solidFill>
+                  <a:srgbClr val="333333"/>
+                </a:solidFill>
+                <a:latin typeface="Calibri"/>
+              </a:rPr>
+              <a:t> el nodo mas costoso, las filas estimadas contra las reales y el tiempo total, leidos en ese orden en cada plan.</a:t>
             </a:r>
           </a:p>
         </p:txBody>
@@ -16758,810 +16896,6 @@
         <p:spPr>
           <a:xfrm>
             <a:off x="0" y="0"/>
-            <a:ext cx="12191695" cy="960120"/>
-          </a:xfrm>
-          <a:prstGeom prst="rect">
-            <a:avLst/>
-          </a:prstGeom>
-          <a:solidFill>
-            <a:srgbClr val="095292"/>
-          </a:solidFill>
-          <a:ln>
-            <a:noFill/>
-          </a:ln>
-        </p:spPr>
-        <p:style>
-          <a:lnRef idx="1">
-            <a:schemeClr val="accent1"/>
-          </a:lnRef>
-          <a:fillRef idx="3">
-            <a:schemeClr val="accent1"/>
-          </a:fillRef>
-          <a:effectRef idx="2">
-            <a:schemeClr val="accent1"/>
-          </a:effectRef>
-          <a:fontRef idx="minor">
-            <a:schemeClr val="lt1"/>
-          </a:fontRef>
-        </p:style>
-        <p:txBody>
-          <a:bodyPr rtlCol="0" anchor="ctr"/>
-          <a:lstStyle/>
-          <a:p>
-            <a:pPr algn="ctr"/>
-          </a:p>
-        </p:txBody>
-      </p:sp>
-      <p:sp>
-        <p:nvSpPr>
-          <p:cNvPr id="3" name="Rectangle 2"/>
-          <p:cNvSpPr/>
-          <p:nvPr/>
-        </p:nvSpPr>
-        <p:spPr>
-          <a:xfrm>
-            <a:off x="0" y="960120"/>
-            <a:ext cx="12191695" cy="41148"/>
-          </a:xfrm>
-          <a:prstGeom prst="rect">
-            <a:avLst/>
-          </a:prstGeom>
-          <a:solidFill>
-            <a:srgbClr val="FFD000"/>
-          </a:solidFill>
-          <a:ln>
-            <a:noFill/>
-          </a:ln>
-        </p:spPr>
-        <p:style>
-          <a:lnRef idx="1">
-            <a:schemeClr val="accent1"/>
-          </a:lnRef>
-          <a:fillRef idx="3">
-            <a:schemeClr val="accent1"/>
-          </a:fillRef>
-          <a:effectRef idx="2">
-            <a:schemeClr val="accent1"/>
-          </a:effectRef>
-          <a:fontRef idx="minor">
-            <a:schemeClr val="lt1"/>
-          </a:fontRef>
-        </p:style>
-        <p:txBody>
-          <a:bodyPr rtlCol="0" anchor="ctr"/>
-          <a:lstStyle/>
-          <a:p>
-            <a:pPr algn="ctr"/>
-          </a:p>
-        </p:txBody>
-      </p:sp>
-      <p:sp>
-        <p:nvSpPr>
-          <p:cNvPr id="4" name="TextBox 3"/>
-          <p:cNvSpPr txBox="1"/>
-          <p:nvPr/>
-        </p:nvSpPr>
-        <p:spPr>
-          <a:xfrm>
-            <a:off x="457200" y="164592"/>
-            <a:ext cx="11277295" cy="502920"/>
-          </a:xfrm>
-          <a:prstGeom prst="rect">
-            <a:avLst/>
-          </a:prstGeom>
-          <a:noFill/>
-        </p:spPr>
-        <p:txBody>
-          <a:bodyPr wrap="square">
-            <a:spAutoFit/>
-          </a:bodyPr>
-          <a:lstStyle/>
-          <a:p>
-            <a:r>
-              <a:rPr sz="2600" b="1" i="0">
-                <a:solidFill>
-                  <a:srgbClr val="FFFFFF"/>
-                </a:solidFill>
-                <a:latin typeface="Calibri"/>
-              </a:rPr>
-              <a:t>Optimizar no cambia el resultado: como se prueba</a:t>
-            </a:r>
-          </a:p>
-        </p:txBody>
-      </p:sp>
-      <p:sp>
-        <p:nvSpPr>
-          <p:cNvPr id="5" name="TextBox 4"/>
-          <p:cNvSpPr txBox="1"/>
-          <p:nvPr/>
-        </p:nvSpPr>
-        <p:spPr>
-          <a:xfrm>
-            <a:off x="457200" y="1170432"/>
-            <a:ext cx="11277295" cy="5230368"/>
-          </a:xfrm>
-          <a:prstGeom prst="rect">
-            <a:avLst/>
-          </a:prstGeom>
-          <a:noFill/>
-        </p:spPr>
-        <p:txBody>
-          <a:bodyPr wrap="square">
-            <a:spAutoFit/>
-          </a:bodyPr>
-          <a:lstStyle/>
-          <a:p>
-            <a:pPr>
-              <a:spcAft>
-                <a:spcPts val="800"/>
-              </a:spcAft>
-            </a:pPr>
-            <a:r>
-              <a:rPr sz="2000" b="0" i="0">
-                <a:solidFill>
-                  <a:srgbClr val="333333"/>
-                </a:solidFill>
-                <a:latin typeface="Calibri"/>
-              </a:rPr>
-              <a:t>–   </a:t>
-            </a:r>
-            <a:r>
-              <a:rPr sz="2000" b="1" i="0">
-                <a:solidFill>
-                  <a:srgbClr val="333333"/>
-                </a:solidFill>
-                <a:latin typeface="Calibri"/>
-              </a:rPr>
-              <a:t>La regla.</a:t>
-            </a:r>
-            <a:r>
-              <a:rPr sz="2000" b="0" i="0">
-                <a:solidFill>
-                  <a:srgbClr val="333333"/>
-                </a:solidFill>
-                <a:latin typeface="Calibri"/>
-              </a:rPr>
-              <a:t> Correccion y tiempo son ejes </a:t>
-            </a:r>
-            <a:r>
-              <a:rPr sz="2000" b="1" i="0">
-                <a:solidFill>
-                  <a:srgbClr val="333333"/>
-                </a:solidFill>
-                <a:latin typeface="Calibri"/>
-              </a:rPr>
-              <a:t>independientes</a:t>
-            </a:r>
-            <a:r>
-              <a:rPr sz="2000" b="0" i="0">
-                <a:solidFill>
-                  <a:srgbClr val="333333"/>
-                </a:solidFill>
-                <a:latin typeface="Calibri"/>
-              </a:rPr>
-              <a:t>. Si la version DESPUES devuelve algo distinto, no se optimizo nada: se rompio la consulta, y se rompio </a:t>
-            </a:r>
-            <a:r>
-              <a:rPr sz="2000" b="1" i="0">
-                <a:solidFill>
-                  <a:srgbClr val="333333"/>
-                </a:solidFill>
-                <a:latin typeface="Calibri"/>
-              </a:rPr>
-              <a:t>sin avisar</a:t>
-            </a:r>
-            <a:r>
-              <a:rPr sz="2000" b="0" i="0">
-                <a:solidFill>
-                  <a:srgbClr val="333333"/>
-                </a:solidFill>
-                <a:latin typeface="Calibri"/>
-              </a:rPr>
-              <a:t>, porque ningun motor va a lanzar un error por eso.</a:t>
-            </a:r>
-          </a:p>
-          <a:p>
-            <a:pPr>
-              <a:spcAft>
-                <a:spcPts val="800"/>
-              </a:spcAft>
-            </a:pPr>
-            <a:r>
-              <a:rPr sz="2000" b="0" i="0">
-                <a:solidFill>
-                  <a:srgbClr val="333333"/>
-                </a:solidFill>
-                <a:latin typeface="Calibri"/>
-              </a:rPr>
-              <a:t>–   </a:t>
-            </a:r>
-            <a:r>
-              <a:rPr sz="2000" b="1" i="0">
-                <a:solidFill>
-                  <a:srgbClr val="333333"/>
-                </a:solidFill>
-                <a:latin typeface="Calibri"/>
-              </a:rPr>
-              <a:t>Prueba 1, para una consulta con filtro: los dos «COUNT(*)».</a:t>
-            </a:r>
-            <a:r>
-              <a:rPr sz="2000" b="0" i="0">
-                <a:solidFill>
-                  <a:srgbClr val="333333"/>
-                </a:solidFill>
-                <a:latin typeface="Calibri"/>
-              </a:rPr>
-              <a:t> Se envuelve cada version y se comparan los conteos en la </a:t>
-            </a:r>
-            <a:r>
-              <a:rPr sz="2000" b="1" i="0">
-                <a:solidFill>
-                  <a:srgbClr val="333333"/>
-                </a:solidFill>
-                <a:latin typeface="Calibri"/>
-              </a:rPr>
-              <a:t>misma corrida</a:t>
-            </a:r>
-            <a:r>
-              <a:rPr sz="2000" b="0" i="0">
-                <a:solidFill>
-                  <a:srgbClr val="333333"/>
-                </a:solidFill>
-                <a:latin typeface="Calibri"/>
-              </a:rPr>
-              <a:t>. En la agenda del 2026-03-10 las dos tienen que decir </a:t>
-            </a:r>
-            <a:r>
-              <a:rPr sz="2000" b="1" i="0">
-                <a:solidFill>
-                  <a:srgbClr val="333333"/>
-                </a:solidFill>
-                <a:latin typeface="Calibri"/>
-              </a:rPr>
-              <a:t>91</a:t>
-            </a:r>
-            <a:r>
-              <a:rPr sz="2000" b="0" i="0">
-                <a:solidFill>
-                  <a:srgbClr val="333333"/>
-                </a:solidFill>
-                <a:latin typeface="Calibri"/>
-              </a:rPr>
-              <a:t>. Un conteo distinto es la respuesta equivocada, no una version mas rapida.</a:t>
-            </a:r>
-          </a:p>
-          <a:p>
-            <a:pPr>
-              <a:spcAft>
-                <a:spcPts val="800"/>
-              </a:spcAft>
-            </a:pPr>
-            <a:r>
-              <a:rPr sz="2000" b="0" i="0">
-                <a:solidFill>
-                  <a:srgbClr val="333333"/>
-                </a:solidFill>
-                <a:latin typeface="Calibri"/>
-              </a:rPr>
-              <a:t>–   </a:t>
-            </a:r>
-            <a:r>
-              <a:rPr sz="2000" b="1" i="0">
-                <a:solidFill>
-                  <a:srgbClr val="333333"/>
-                </a:solidFill>
-                <a:latin typeface="Calibri"/>
-              </a:rPr>
-              <a:t>Prueba 2, para conjuntos completos: «EXCEPT» en los DOS sentidos.</a:t>
-            </a:r>
-            <a:r>
-              <a:rPr sz="2000" b="0" i="0">
-                <a:solidFill>
-                  <a:srgbClr val="333333"/>
-                </a:solidFill>
-                <a:latin typeface="Calibri"/>
-              </a:rPr>
-              <a:t> «A EXCEPT B» devuelve lo que esta en A y no en B. Que salga vacio </a:t>
-            </a:r>
-            <a:r>
-              <a:rPr sz="2000" b="1" i="0">
-                <a:solidFill>
-                  <a:srgbClr val="333333"/>
-                </a:solidFill>
-                <a:latin typeface="Calibri"/>
-              </a:rPr>
-              <a:t>no</a:t>
-            </a:r>
-            <a:r>
-              <a:rPr sz="2000" b="0" i="0">
-                <a:solidFill>
-                  <a:srgbClr val="333333"/>
-                </a:solidFill>
-                <a:latin typeface="Calibri"/>
-              </a:rPr>
-              <a:t> prueba la igualdad: B puede tener filas de mas. Se corren las dos direcciones unidas con «UNION ALL» y se exige </a:t>
-            </a:r>
-            <a:r>
-              <a:rPr sz="2000" b="1" i="0">
-                <a:solidFill>
-                  <a:srgbClr val="333333"/>
-                </a:solidFill>
-                <a:latin typeface="Calibri"/>
-              </a:rPr>
-              <a:t>cero filas</a:t>
-            </a:r>
-            <a:r>
-              <a:rPr sz="2000" b="0" i="0">
-                <a:solidFill>
-                  <a:srgbClr val="333333"/>
-                </a:solidFill>
-                <a:latin typeface="Calibri"/>
-              </a:rPr>
-              <a:t>.</a:t>
-            </a:r>
-          </a:p>
-          <a:p>
-            <a:pPr>
-              <a:spcAft>
-                <a:spcPts val="800"/>
-              </a:spcAft>
-            </a:pPr>
-            <a:r>
-              <a:rPr sz="2000" b="0" i="0">
-                <a:solidFill>
-                  <a:srgbClr val="333333"/>
-                </a:solidFill>
-                <a:latin typeface="Calibri"/>
-              </a:rPr>
-              <a:t>–   </a:t>
-            </a:r>
-            <a:r>
-              <a:rPr sz="2000" b="1" i="0">
-                <a:solidFill>
-                  <a:srgbClr val="333333"/>
-                </a:solidFill>
-                <a:latin typeface="Calibri"/>
-              </a:rPr>
-              <a:t>Sin «LIMIT» en la prueba.</a:t>
-            </a:r>
-            <a:r>
-              <a:rPr sz="2000" b="0" i="0">
-                <a:solidFill>
-                  <a:srgbClr val="333333"/>
-                </a:solidFill>
-                <a:latin typeface="Calibri"/>
-              </a:rPr>
-              <a:t> Comparar solo las primeras 20 filas deja fuera justamente las que fallan — las de los duenos con cero citas, que es donde «COUNT(*)» miente.</a:t>
-            </a:r>
-          </a:p>
-          <a:p>
-            <a:pPr>
-              <a:spcAft>
-                <a:spcPts val="800"/>
-              </a:spcAft>
-            </a:pPr>
-            <a:r>
-              <a:rPr sz="2000" b="0" i="0">
-                <a:solidFill>
-                  <a:srgbClr val="333333"/>
-                </a:solidFill>
-                <a:latin typeface="Calibri"/>
-              </a:rPr>
-              <a:t>–   </a:t>
-            </a:r>
-            <a:r>
-              <a:rPr sz="2000" b="1" i="0">
-                <a:solidFill>
-                  <a:srgbClr val="333333"/>
-                </a:solidFill>
-                <a:latin typeface="Calibri"/>
-              </a:rPr>
-              <a:t>Que NO sirve como prueba.</a:t>
-            </a:r>
-            <a:r>
-              <a:rPr sz="2000" b="0" i="0">
-                <a:solidFill>
-                  <a:srgbClr val="333333"/>
-                </a:solidFill>
-                <a:latin typeface="Calibri"/>
-              </a:rPr>
-              <a:t> «Se ve igual», «trae mas o menos lo mismo» o mirar la primera pantalla de resultados. La equivalencia se afirma con una consulta cuyo resultado </a:t>
-            </a:r>
-            <a:r>
-              <a:rPr sz="2000" b="1" i="0">
-                <a:solidFill>
-                  <a:srgbClr val="333333"/>
-                </a:solidFill>
-                <a:latin typeface="Calibri"/>
-              </a:rPr>
-              <a:t>se conoce de antemano</a:t>
-            </a:r>
-            <a:r>
-              <a:rPr sz="2000" b="0" i="0">
-                <a:solidFill>
-                  <a:srgbClr val="333333"/>
-                </a:solidFill>
-                <a:latin typeface="Calibri"/>
-              </a:rPr>
-              <a:t>: un numero que coincide o un conjunto vacio.</a:t>
-            </a:r>
-          </a:p>
-        </p:txBody>
-      </p:sp>
-      <p:sp>
-        <p:nvSpPr>
-          <p:cNvPr id="6" name="TextBox 5"/>
-          <p:cNvSpPr txBox="1"/>
-          <p:nvPr/>
-        </p:nvSpPr>
-        <p:spPr>
-          <a:xfrm>
-            <a:off x="11185855" y="6473952"/>
-            <a:ext cx="640080" cy="274320"/>
-          </a:xfrm>
-          <a:prstGeom prst="rect">
-            <a:avLst/>
-          </a:prstGeom>
-          <a:noFill/>
-        </p:spPr>
-        <p:txBody>
-          <a:bodyPr wrap="square">
-            <a:spAutoFit/>
-          </a:bodyPr>
-          <a:lstStyle/>
-          <a:p>
-            <a:pPr algn="r"/>
-            <a:r>
-              <a:rPr sz="1100" b="0" i="0">
-                <a:solidFill>
-                  <a:srgbClr val="666666"/>
-                </a:solidFill>
-                <a:latin typeface="Calibri"/>
-              </a:rPr>
-              <a:t>41</a:t>
-            </a:r>
-          </a:p>
-        </p:txBody>
-      </p:sp>
-    </p:spTree>
-  </p:cSld>
-  <p:clrMapOvr>
-    <a:masterClrMapping/>
-  </p:clrMapOvr>
-</p:sld>
-</file>
-
-<file path=ppt/slides/slide42.xml><?xml version="1.0" encoding="utf-8"?>
-<p:sld xmlns:a="http://schemas.openxmlformats.org/drawingml/2006/main" xmlns:p="http://schemas.openxmlformats.org/presentationml/2006/main" xmlns:r="http://schemas.openxmlformats.org/officeDocument/2006/relationships">
-  <p:cSld>
-    <p:bg>
-      <p:bgPr>
-        <a:solidFill>
-          <a:srgbClr val="FFFFFF"/>
-        </a:solidFill>
-        <a:effectLst/>
-      </p:bgPr>
-    </p:bg>
-    <p:spTree>
-      <p:nvGrpSpPr>
-        <p:cNvPr id="1" name=""/>
-        <p:cNvGrpSpPr/>
-        <p:nvPr/>
-      </p:nvGrpSpPr>
-      <p:grpSpPr/>
-      <p:sp>
-        <p:nvSpPr>
-          <p:cNvPr id="2" name="Rectangle 1"/>
-          <p:cNvSpPr/>
-          <p:nvPr/>
-        </p:nvSpPr>
-        <p:spPr>
-          <a:xfrm>
-            <a:off x="0" y="0"/>
-            <a:ext cx="12191695" cy="960120"/>
-          </a:xfrm>
-          <a:prstGeom prst="rect">
-            <a:avLst/>
-          </a:prstGeom>
-          <a:solidFill>
-            <a:srgbClr val="095292"/>
-          </a:solidFill>
-          <a:ln>
-            <a:noFill/>
-          </a:ln>
-        </p:spPr>
-        <p:style>
-          <a:lnRef idx="1">
-            <a:schemeClr val="accent1"/>
-          </a:lnRef>
-          <a:fillRef idx="3">
-            <a:schemeClr val="accent1"/>
-          </a:fillRef>
-          <a:effectRef idx="2">
-            <a:schemeClr val="accent1"/>
-          </a:effectRef>
-          <a:fontRef idx="minor">
-            <a:schemeClr val="lt1"/>
-          </a:fontRef>
-        </p:style>
-        <p:txBody>
-          <a:bodyPr rtlCol="0" anchor="ctr"/>
-          <a:lstStyle/>
-          <a:p>
-            <a:pPr algn="ctr"/>
-          </a:p>
-        </p:txBody>
-      </p:sp>
-      <p:sp>
-        <p:nvSpPr>
-          <p:cNvPr id="3" name="Rectangle 2"/>
-          <p:cNvSpPr/>
-          <p:nvPr/>
-        </p:nvSpPr>
-        <p:spPr>
-          <a:xfrm>
-            <a:off x="0" y="960120"/>
-            <a:ext cx="12191695" cy="41148"/>
-          </a:xfrm>
-          <a:prstGeom prst="rect">
-            <a:avLst/>
-          </a:prstGeom>
-          <a:solidFill>
-            <a:srgbClr val="FFD000"/>
-          </a:solidFill>
-          <a:ln>
-            <a:noFill/>
-          </a:ln>
-        </p:spPr>
-        <p:style>
-          <a:lnRef idx="1">
-            <a:schemeClr val="accent1"/>
-          </a:lnRef>
-          <a:fillRef idx="3">
-            <a:schemeClr val="accent1"/>
-          </a:fillRef>
-          <a:effectRef idx="2">
-            <a:schemeClr val="accent1"/>
-          </a:effectRef>
-          <a:fontRef idx="minor">
-            <a:schemeClr val="lt1"/>
-          </a:fontRef>
-        </p:style>
-        <p:txBody>
-          <a:bodyPr rtlCol="0" anchor="ctr"/>
-          <a:lstStyle/>
-          <a:p>
-            <a:pPr algn="ctr"/>
-          </a:p>
-        </p:txBody>
-      </p:sp>
-      <p:sp>
-        <p:nvSpPr>
-          <p:cNvPr id="4" name="TextBox 3"/>
-          <p:cNvSpPr txBox="1"/>
-          <p:nvPr/>
-        </p:nvSpPr>
-        <p:spPr>
-          <a:xfrm>
-            <a:off x="457200" y="164592"/>
-            <a:ext cx="11277295" cy="502920"/>
-          </a:xfrm>
-          <a:prstGeom prst="rect">
-            <a:avLst/>
-          </a:prstGeom>
-          <a:noFill/>
-        </p:spPr>
-        <p:txBody>
-          <a:bodyPr wrap="square">
-            <a:spAutoFit/>
-          </a:bodyPr>
-          <a:lstStyle/>
-          <a:p>
-            <a:r>
-              <a:rPr sz="2600" b="1" i="0">
-                <a:solidFill>
-                  <a:srgbClr val="FFFFFF"/>
-                </a:solidFill>
-                <a:latin typeface="Calibri"/>
-              </a:rPr>
-              <a:t>Demo del dia</a:t>
-            </a:r>
-          </a:p>
-        </p:txBody>
-      </p:sp>
-      <p:sp>
-        <p:nvSpPr>
-          <p:cNvPr id="5" name="TextBox 4"/>
-          <p:cNvSpPr txBox="1"/>
-          <p:nvPr/>
-        </p:nvSpPr>
-        <p:spPr>
-          <a:xfrm>
-            <a:off x="457200" y="1170432"/>
-            <a:ext cx="11277295" cy="5230368"/>
-          </a:xfrm>
-          <a:prstGeom prst="rect">
-            <a:avLst/>
-          </a:prstGeom>
-          <a:noFill/>
-        </p:spPr>
-        <p:txBody>
-          <a:bodyPr wrap="square">
-            <a:spAutoFit/>
-          </a:bodyPr>
-          <a:lstStyle/>
-          <a:p>
-            <a:pPr>
-              <a:spcAft>
-                <a:spcPts val="800"/>
-              </a:spcAft>
-            </a:pPr>
-            <a:r>
-              <a:rPr sz="2000" b="0" i="0">
-                <a:solidFill>
-                  <a:srgbClr val="333333"/>
-                </a:solidFill>
-                <a:latin typeface="Calibri"/>
-              </a:rPr>
-              <a:t>–   </a:t>
-            </a:r>
-            <a:r>
-              <a:rPr sz="2000" b="1" i="0">
-                <a:solidFill>
-                  <a:srgbClr val="333333"/>
-                </a:solidFill>
-                <a:latin typeface="Calibri"/>
-              </a:rPr>
-              <a:t>Herramienta:</a:t>
-            </a:r>
-            <a:r>
-              <a:rPr sz="2000" b="0" i="0">
-                <a:solidFill>
-                  <a:srgbClr val="333333"/>
-                </a:solidFill>
-                <a:latin typeface="Calibri"/>
-              </a:rPr>
-              <a:t> PostgreSQL + Google Docs</a:t>
-            </a:r>
-          </a:p>
-          <a:p>
-            <a:pPr>
-              <a:spcAft>
-                <a:spcPts val="800"/>
-              </a:spcAft>
-            </a:pPr>
-            <a:r>
-              <a:rPr sz="2000" b="0" i="0">
-                <a:solidFill>
-                  <a:srgbClr val="333333"/>
-                </a:solidFill>
-                <a:latin typeface="Calibri"/>
-              </a:rPr>
-              <a:t>–   </a:t>
-            </a:r>
-            <a:r>
-              <a:rPr sz="2000" b="1" i="0">
-                <a:solidFill>
-                  <a:srgbClr val="333333"/>
-                </a:solidFill>
-                <a:latin typeface="Calibri"/>
-              </a:rPr>
-              <a:t>Demo:</a:t>
-            </a:r>
-            <a:r>
-              <a:rPr sz="2000" b="0" i="0">
-                <a:solidFill>
-                  <a:srgbClr val="333333"/>
-                </a:solidFill>
-                <a:latin typeface="Calibri"/>
-              </a:rPr>
-              <a:t> Consulta pesada citas+mascotas+duenos -&gt; version filtrada y proyectada, con EXPLAIN ANALYZE antes y despues.</a:t>
-            </a:r>
-          </a:p>
-          <a:p>
-            <a:pPr>
-              <a:spcAft>
-                <a:spcPts val="800"/>
-              </a:spcAft>
-            </a:pPr>
-            <a:r>
-              <a:rPr sz="2000" b="0" i="0">
-                <a:solidFill>
-                  <a:srgbClr val="333333"/>
-                </a:solidFill>
-                <a:latin typeface="Calibri"/>
-              </a:rPr>
-              <a:t>–   Sigan el mismo dominio VetCare (no inventen otro caso).</a:t>
-            </a:r>
-          </a:p>
-          <a:p>
-            <a:pPr>
-              <a:spcAft>
-                <a:spcPts val="800"/>
-              </a:spcAft>
-            </a:pPr>
-            <a:r>
-              <a:rPr sz="2000" b="0" i="0">
-                <a:solidFill>
-                  <a:srgbClr val="333333"/>
-                </a:solidFill>
-                <a:latin typeface="Calibri"/>
-              </a:rPr>
-              <a:t>–   Al final de la demo: dejar enlace/script compartible al grupo.</a:t>
-            </a:r>
-          </a:p>
-        </p:txBody>
-      </p:sp>
-      <p:sp>
-        <p:nvSpPr>
-          <p:cNvPr id="6" name="TextBox 5"/>
-          <p:cNvSpPr txBox="1"/>
-          <p:nvPr/>
-        </p:nvSpPr>
-        <p:spPr>
-          <a:xfrm>
-            <a:off x="11185855" y="6473952"/>
-            <a:ext cx="640080" cy="274320"/>
-          </a:xfrm>
-          <a:prstGeom prst="rect">
-            <a:avLst/>
-          </a:prstGeom>
-          <a:noFill/>
-        </p:spPr>
-        <p:txBody>
-          <a:bodyPr wrap="square">
-            <a:spAutoFit/>
-          </a:bodyPr>
-          <a:lstStyle/>
-          <a:p>
-            <a:pPr algn="r"/>
-            <a:r>
-              <a:rPr sz="1100" b="0" i="0">
-                <a:solidFill>
-                  <a:srgbClr val="666666"/>
-                </a:solidFill>
-                <a:latin typeface="Calibri"/>
-              </a:rPr>
-              <a:t>42</a:t>
-            </a:r>
-          </a:p>
-        </p:txBody>
-      </p:sp>
-    </p:spTree>
-  </p:cSld>
-  <p:clrMapOvr>
-    <a:masterClrMapping/>
-  </p:clrMapOvr>
-</p:sld>
-</file>
-
-<file path=ppt/slides/slide43.xml><?xml version="1.0" encoding="utf-8"?>
-<p:sld xmlns:a="http://schemas.openxmlformats.org/drawingml/2006/main" xmlns:p="http://schemas.openxmlformats.org/presentationml/2006/main" xmlns:r="http://schemas.openxmlformats.org/officeDocument/2006/relationships">
-  <p:cSld>
-    <p:bg>
-      <p:bgPr>
-        <a:solidFill>
-          <a:srgbClr val="FFFFFF"/>
-        </a:solidFill>
-        <a:effectLst/>
-      </p:bgPr>
-    </p:bg>
-    <p:spTree>
-      <p:nvGrpSpPr>
-        <p:cNvPr id="1" name=""/>
-        <p:cNvGrpSpPr/>
-        <p:nvPr/>
-      </p:nvGrpSpPr>
-      <p:grpSpPr/>
-      <p:sp>
-        <p:nvSpPr>
-          <p:cNvPr id="2" name="Rectangle 1"/>
-          <p:cNvSpPr/>
-          <p:nvPr/>
-        </p:nvSpPr>
-        <p:spPr>
-          <a:xfrm>
-            <a:off x="0" y="0"/>
             <a:ext cx="12191695" cy="164592"/>
           </a:xfrm>
           <a:prstGeom prst="rect">
@@ -18242,22 +17576,6 @@
               <a:t>–   Y debajo, mas indentado, un Seq Scan on cita c con el filtro del dia y un Hash construido sobre un Seq Scan on mascota m.</a:t>
             </a:r>
           </a:p>
-          <a:p>
-            <a:pPr>
-              <a:spcAft>
-                <a:spcPts val="800"/>
-              </a:spcAft>
-            </a:pPr>
-            <a:r>
-              <a:rPr sz="2000" b="0" i="0">
-                <a:solidFill>
-                  <a:srgbClr val="333333"/>
-                </a:solidFill>
-                <a:latin typeface="Calibri"/>
-              </a:rPr>
-              <a:t>–   Los cuatro campos hay que saber nombrarlos: cost trae el costo de arranque y el costo total separados por dos puntos; rows son las filas que el motor ESTIMA</a:t>
-            </a:r>
-          </a:p>
         </p:txBody>
       </p:sp>
       <p:sp>
@@ -18475,7 +17793,7 @@
                 </a:solidFill>
                 <a:latin typeface="Calibri"/>
               </a:rPr>
-              <a:t>–   Width es el ancho promedio de la fila en bytes; y loops, que solo aparece con ANALYZE, dice cuantas veces se ejecuto ese nodo.</a:t>
+              <a:t>–   Los cuatro campos hay que saber nombrarlos: cost trae el costo de arranque y el costo total separados por dos puntos; rows son las filas que el motor ESTIMA</a:t>
             </a:r>
           </a:p>
           <a:p>
@@ -18491,7 +17809,7 @@
                 </a:solidFill>
                 <a:latin typeface="Calibri"/>
               </a:rPr>
-              <a:t>–   El costo NO esta en milisegundos, es una unidad relativa donde 1.0 equivale por convencion a leer secuencialmente una pagina de 8 KB</a:t>
+              <a:t>–   Width es el ancho promedio de la fila en bytes; y loops, que solo aparece con ANALYZE, dice cuantas veces se ejecuto ese nodo.</a:t>
             </a:r>
           </a:p>
           <a:p>
@@ -18507,7 +17825,7 @@
                 </a:solidFill>
                 <a:latin typeface="Calibri"/>
               </a:rPr>
-              <a:t>–   Y solo sirve para comparar planes del mismo motor.</a:t>
+              <a:t>–   El costo NO esta en milisegundos, es una unidad relativa donde 1.0 equivale por convencion a leer secuencialmente una pagina de 8 KB, y solo sirve para comparar planes del mismo motor.</a:t>
             </a:r>
           </a:p>
           <a:p>
@@ -18524,38 +17842,6 @@
                 <a:latin typeface="Calibri"/>
               </a:rPr>
               <a:t>–   Los tiempos reales los da EXPLAIN ANALYZE, que agrega actual time, actual rows, loops y el Execution Time del final; con la opcion BUFFERS agrega ademas cuantos bloques de 8 KB se leyeron y cuantos se acertaron en memoria</a:t>
-            </a:r>
-          </a:p>
-          <a:p>
-            <a:pPr>
-              <a:spcAft>
-                <a:spcPts val="800"/>
-              </a:spcAft>
-            </a:pPr>
-            <a:r>
-              <a:rPr sz="2000" b="0" i="0">
-                <a:solidFill>
-                  <a:srgbClr val="333333"/>
-                </a:solidFill>
-                <a:latin typeface="Calibri"/>
-              </a:rPr>
-              <a:t>–   Que es de donde sale el numero exacto de paginas de cada tabla sin tener que estimarlo.</a:t>
-            </a:r>
-          </a:p>
-          <a:p>
-            <a:pPr>
-              <a:spcAft>
-                <a:spcPts val="800"/>
-              </a:spcAft>
-            </a:pPr>
-            <a:r>
-              <a:rPr sz="2000" b="0" i="0">
-                <a:solidFill>
-                  <a:srgbClr val="333333"/>
-                </a:solidFill>
-                <a:latin typeface="Calibri"/>
-              </a:rPr>
-              <a:t>–   Advertencia que evita un accidente en clase: ANALYZE EJECUTA la sentencia, asi que sobre un UPDATE o un DELETE hay que envolverlo en BEGIN y ROLLBACK, lo cual ya anticipa la Clase 8.</a:t>
             </a:r>
           </a:p>
         </p:txBody>
@@ -18775,6 +18061,38 @@
                 </a:solidFill>
                 <a:latin typeface="Calibri"/>
               </a:rPr>
+              <a:t>–   Que es de donde sale el numero exacto de paginas de cada tabla sin tener que estimarlo.</a:t>
+            </a:r>
+          </a:p>
+          <a:p>
+            <a:pPr>
+              <a:spcAft>
+                <a:spcPts val="800"/>
+              </a:spcAft>
+            </a:pPr>
+            <a:r>
+              <a:rPr sz="2000" b="0" i="0">
+                <a:solidFill>
+                  <a:srgbClr val="333333"/>
+                </a:solidFill>
+                <a:latin typeface="Calibri"/>
+              </a:rPr>
+              <a:t>–   Advertencia que evita un accidente en clase: ANALYZE EJECUTA la sentencia, asi que sobre un UPDATE o un DELETE hay que envolverlo en BEGIN y ROLLBACK, lo cual ya anticipa la Clase 8.</a:t>
+            </a:r>
+          </a:p>
+          <a:p>
+            <a:pPr>
+              <a:spcAft>
+                <a:spcPts val="800"/>
+              </a:spcAft>
+            </a:pPr>
+            <a:r>
+              <a:rPr sz="2000" b="0" i="0">
+                <a:solidFill>
+                  <a:srgbClr val="333333"/>
+                </a:solidFill>
+                <a:latin typeface="Calibri"/>
+              </a:rPr>
               <a:t>–   Un nodo de 0,5 ms con loops=2006 cuesta un segundo entero y aparece impreso como el mas barato de la pantalla.</a:t>
             </a:r>
           </a:p>
@@ -19076,6 +18394,22 @@
                 <a:latin typeface="Calibri"/>
               </a:rPr>
               <a:t>–   En la base de la clase el ANALYZE ya esta corrido, y eso es deliberado: si faltara.</a:t>
+            </a:r>
+          </a:p>
+          <a:p>
+            <a:pPr>
+              <a:spcAft>
+                <a:spcPts val="800"/>
+              </a:spcAft>
+            </a:pPr>
+            <a:r>
+              <a:rPr sz="2000" b="0" i="0">
+                <a:solidFill>
+                  <a:srgbClr val="333333"/>
+                </a:solidFill>
+                <a:latin typeface="Calibri"/>
+              </a:rPr>
+              <a:t>–   De aqui sale la explicacion de un fenomeno que desconcierta: la misma consulta, sin cambiar una letra, puede tener hoy un plan distinto al de ayer</a:t>
             </a:r>
           </a:p>
         </p:txBody>

--- a/Bases de Datos II/Clases/Clase 6 - Optimizacion de consultas/Presentacion.pptx
+++ b/Bases de Datos II/Clases/Clase 6 - Optimizacion de consultas/Presentacion.pptx
@@ -4726,13 +4726,13 @@
           <a:p>
             <a:pPr algn="ctr"/>
             <a:r>
-              <a:rPr sz="4000" b="1" i="0">
+              <a:rPr sz="3400" b="1" i="0">
                 <a:solidFill>
                   <a:srgbClr val="FFFFFF"/>
                 </a:solidFill>
                 <a:latin typeface="Calibri"/>
               </a:rPr>
-              <a:t>Optimizacion de consultas · VetCare</a:t>
+              <a:t>Optimizacion de consultas · la clínica</a:t>
             </a:r>
           </a:p>
         </p:txBody>
@@ -4810,7 +4810,7 @@
                 </a:solidFill>
                 <a:latin typeface="Calibri"/>
               </a:rPr>
-              <a:t>Antes/despues sobre el DDL del PI</a:t>
+              <a:t>Antes/despues sobre el DDL del proyecto</a:t>
             </a:r>
           </a:p>
         </p:txBody>
@@ -5062,7 +5062,7 @@
                 </a:solidFill>
                 <a:latin typeface="Calibri"/>
               </a:rPr>
-              <a:t>–   Correlacionados quiere decir que el motor multiplica las selectividades de dos filtros como si fueran independientes y no lo son: en VetCare</a:t>
+              <a:t>–   Correlacionados quiere decir que el motor multiplica las selectividades de dos filtros como si fueran independientes y no lo son: en la clínica</a:t>
             </a:r>
           </a:p>
           <a:p>
@@ -6370,7 +6370,7 @@
                 </a:solidFill>
                 <a:latin typeface="Calibri"/>
               </a:rPr>
-              <a:t>–   La ventaja del indice crece con el tamano, no con el porcentaje: si Huellitas acumulara 300.000 citas, el Seq Scan pasaria a 2.400 paginas y el indice seguiria costando unas 153, y ahi si son dieciseis veces menos.</a:t>
+              <a:t>–   La ventaja del indice crece con el tamano, no con el porcentaje: si la clínica acumulara 300.000 citas, el Seq Scan pasaria a 2.400 paginas y el indice seguiria costando unas 153, y ahi si son dieciseis veces menos.</a:t>
             </a:r>
           </a:p>
           <a:p>
@@ -7712,7 +7712,7 @@
                 </a:solidFill>
                 <a:latin typeface="Calibri"/>
               </a:rPr>
-              <a:t> Optimizacion de consultas · VetCare</a:t>
+              <a:t> Optimizacion de consultas · la clínica</a:t>
             </a:r>
           </a:p>
           <a:p>
@@ -7787,7 +7787,7 @@
                 </a:solidFill>
                 <a:latin typeface="Calibri"/>
               </a:rPr>
-              <a:t>–   Recorrido: teoría del tema, una lámina por concepto, y demo del docente sobre VetCare DB.</a:t>
+              <a:t>–   Recorrido: teoría del tema, una lámina por concepto, y demo del docente sobre la base de la clínica.</a:t>
             </a:r>
           </a:p>
           <a:p>
@@ -10928,7 +10928,7 @@
                 </a:solidFill>
                 <a:latin typeface="Calibri"/>
               </a:rPr>
-              <a:t>Encuadre · clase regular · VetCare</a:t>
+              <a:t>Encuadre · clase regular · la clínica</a:t>
             </a:r>
           </a:p>
         </p:txBody>
@@ -11043,7 +11043,7 @@
                 </a:solidFill>
                 <a:latin typeface="Calibri"/>
               </a:rPr>
-              <a:t>Teoría Core breve (al servicio del PI)</a:t>
+              <a:t>Teoría Core breve (al servicio del proyecto)</a:t>
             </a:r>
           </a:p>
         </p:txBody>
@@ -16753,7 +16753,7 @@
                 </a:solidFill>
                 <a:latin typeface="Calibri"/>
               </a:rPr>
-              <a:t>–   Sigan el mismo dominio VetCare (no inventen otro caso).</a:t>
+              <a:t>–   Sigan el mismo dominio de la clínica (no inventen otro caso).</a:t>
             </a:r>
           </a:p>
           <a:p>
@@ -16982,7 +16982,7 @@
                 </a:solidFill>
                 <a:latin typeface="Calibri"/>
               </a:rPr>
-              <a:t>Clase 6 · Optimizacion de consultas · VetCare</a:t>
+              <a:t>Clase 6 · Optimizacion de consultas · la clínica</a:t>
             </a:r>
           </a:p>
         </p:txBody>

--- a/Bases de Datos II/Clases/Clase 6 - Optimizacion de consultas/Presentacion.pptx
+++ b/Bases de Datos II/Clases/Clase 6 - Optimizacion de consultas/Presentacion.pptx
@@ -7,8 +7,8 @@
   <p:sldIdLst>
     <p:sldId id="256" r:id="rId7"/>
     <p:sldId id="257" r:id="rId8"/>
-    <p:sldId id="258" r:id="rId10"/>
-    <p:sldId id="259" r:id="rId11"/>
+    <p:sldId id="258" r:id="rId9"/>
+    <p:sldId id="259" r:id="rId10"/>
     <p:sldId id="260" r:id="rId12"/>
     <p:sldId id="261" r:id="rId13"/>
     <p:sldId id="262" r:id="rId14"/>
@@ -523,43 +523,47 @@
           <a:lstStyle/>
           <a:p>
             <a:r>
-              <a:t>TEXTO COMPLETO DE LA LÁMINA (se proyecta resumido):</a:t>
-            </a:r>
-          </a:p>
-          <a:p/>
-          <a:p>
-            <a:r>
-              <a:t>Tema de hoy: Optimizacion de consultas · la clínica</a:t>
-            </a:r>
-          </a:p>
-          <a:p/>
-          <a:p>
-            <a:r>
-              <a:t>Herramienta: PostgreSQL + Google Docs · Bloque 120 min</a:t>
-            </a:r>
-          </a:p>
-          <a:p/>
-          <a:p>
-            <a:r>
-              <a:t>Gratis + navegador · free tier · sin software de pago obligatorio.</a:t>
-            </a:r>
-          </a:p>
-          <a:p/>
-          <a:p>
-            <a:r>
-              <a:t>Recorrido: teoría del tema, una lámina por concepto, y demo del docente sobre la base de la clínica.</a:t>
-            </a:r>
-          </a:p>
-          <a:p/>
-          <a:p>
-            <a:r>
-              <a:t>Cada lámina se sostiene sola: sirve para repasar aunque hayas faltado.</a:t>
-            </a:r>
-          </a:p>
-          <a:p/>
-          <a:p>
-            <a:r>
-              <a:t>Conceptos de hoy: SQL es declarativo · Leer un plan · EXPLAIN ANALYZE · Las estadisticas.</a:t>
+              <a:t>DESARROLLO (para explicarlo, no se proyecta):</a:t>
+            </a:r>
+          </a:p>
+          <a:p>
+            <a:r>
+              <a:t>SQL es un lenguaje declarativo: la consulta describe QUE datos se quieren y nunca COMO obtenerlos.</a:t>
+            </a:r>
+          </a:p>
+          <a:p>
+            <a:r>
+              <a:t>Quien decide el como es el optimizador, un componente del motor que convierte la sentencia en un plan de ejecucion</a:t>
+            </a:r>
+          </a:p>
+          <a:p>
+            <a:r>
+              <a:t>Es decir el arbol de operaciones fisicas que se ejecutara de verdad: que tabla se lee primero, si completa o por indice, con que algoritmo se cruzan dos tablas y donde se ordena.</a:t>
+            </a:r>
+          </a:p>
+          <a:p>
+            <a:r>
+              <a:t>Son tres etapas: el analizador verifica sintaxis y existencia de tablas y columnas; el optimizador genera planes candidatos, estima el costo de cada uno y elige el mas barato; el ejecutor corre el elegido.</a:t>
+            </a:r>
+          </a:p>
+          <a:p>
+            <a:r>
+              <a:t>Lo decisivo es que todos devuelven EXACTAMENTE el mismo resultado y pueden diferir en tiempo por factores de cien o de mil.</a:t>
+            </a:r>
+          </a:p>
+          <a:p>
+            <a:r>
+              <a:t>Optimizar es ayudar al optimizador a encontrar el plan bueno, no reescribir SQL por gusto estetico.</a:t>
+            </a:r>
+          </a:p>
+          <a:p>
+            <a:r>
+              <a:t>NOTAS:</a:t>
+            </a:r>
+          </a:p>
+          <a:p>
+            <a:r>
+              <a:t>El numero que hace visible el problema, y conviene decirlo con la consulta de la clase en pantalla, que cruza cuatro tablas: con tres tablas hay 6 ordenes de cruce posibles (3 factorial), con las cuatro de la agenda hay 24, con cinco 120, y al multiplicar metodos de acceso y algoritmos de cruce el espacio pasa del millar de planes; el optimizador no los prueba todos, poda con heuristicas y decide en milisegundos.</a:t>
             </a:r>
           </a:p>
         </p:txBody>
@@ -629,37 +633,12 @@
           <a:lstStyle/>
           <a:p>
             <a:r>
-              <a:t>TEXTO COMPLETO DE LA LÁMINA (se proyecta resumido):</a:t>
-            </a:r>
-          </a:p>
-          <a:p/>
-          <a:p>
-            <a:r>
-              <a:t>Que la hace correlacionada. La subconsulta esta en la lista de columnas y menciona una columna del exterior (`WHERE m.id_dueno = d.id_dueno`). No se puede calcular una vez y reusar: depende de la fila que se este mirando, asi que el motor la ejecuta una vez por fila del exterior.</a:t>
-            </a:r>
-          </a:p>
-          <a:p/>
-          <a:p>
-            <a:r>
-              <a:t>El numero que lo delata en el plan. `EXPLAIN ANALYZE` muestra un nodo `SubPlan` con `loops=2006` — un dueno, una ejecucion. Y cada ejecucion recorre las 30.010 citas. `loops` es el campo que hay que buscar: es el unico lugar donde el plan dice «esto se repitio».</a:t>
-            </a:r>
-          </a:p>
-          <a:p/>
-          <a:p>
-            <a:r>
-              <a:t>La reescritura. `dueno LEFT JOIN mascota LEFT JOIN cita` + `GROUP BY d.id_dueno, d.nombre` + `COUNT(...)`. El `SubPlan` desaparece y en su lugar queda un solo `HashAggregate`: una pasada. Es la unica mejora del dia que es de ordenes de magnitud, y no necesita ningun indice — lo que se elimino no fue un escaneo, fueron 2.005 escaneos.</a:t>
-            </a:r>
-          </a:p>
-          <a:p/>
-          <a:p>
-            <a:r>
-              <a:t>`COUNT(c.id_cita)`, nunca `COUNT(*)`. El `LEFT JOIN` fabrica una fila llena de `NULL` por cada dueno sin citas. `COUNT(*)` cuenta filas y reporta 1; `COUNT` de una columna ignora los `NULL` y reporta 0. El sintoma es exacto: los duenos sin citas dicen 1 en vez de 0.</a:t>
-            </a:r>
-          </a:p>
-          <a:p/>
-          <a:p>
-            <a:r>
-              <a:t>Y `LEFT`, no `INNER`. Un `INNER JOIN` es mas rapido y esta mal: borra del reporte a los duenos sin mascotas, y el ranking deja de cuadrar con el total de clientes de la clinica. Mas rapido devolviendo otra cosa no es optimizar.</a:t>
+              <a:t>Fuera de la lamina (habla de la practica, no del tema):</a:t>
+            </a:r>
+          </a:p>
+          <a:p>
+            <a:r>
+              <a:t>- El `LIMIT` va en la consulta que se entrega, no en la que verifica.</a:t>
             </a:r>
           </a:p>
         </p:txBody>
@@ -734,32 +713,37 @@
           </a:p>
           <a:p>
             <a:r>
-              <a:t>Correccion y tiempo son ejes independientes, y la consecuencia practica es que una version «optimizada» que devuelve algo distinto no es una optimizacion peor: no es una optimizacion.</a:t>
-            </a:r>
-          </a:p>
-          <a:p>
-            <a:r>
-              <a:t>Para una consulta con filtro sirve el conteo: se envuelve cada version en un SELECT COUNT(*) y se comparan los dos numeros en la misma corrida, y en la agenda del 2026-03-10 las dos tienen que decir 91.</a:t>
-            </a:r>
-          </a:p>
-          <a:p>
-            <a:r>
-              <a:t>Un conteo distinto no es una version mas rapida, es la respuesta equivocada.</a:t>
-            </a:r>
-          </a:p>
-          <a:p>
-            <a:r>
-              <a:t>La prueba va sin LIMIT, porque comparar solo las primeras 20 filas deja fuera justamente las que fallan, que son las de los duenos con cero citas.</a:t>
-            </a:r>
-          </a:p>
-          <a:p>
-            <a:r>
-              <a:t>EXCEPT elimina duplicados, de modo que si el conjunto puede traer filas repetidas hay que usar EXCEPT ALL o incluir la llave; en el ranking de la clase no ocurre, porque hay una fila por dueno.</a:t>
-            </a:r>
-          </a:p>
-          <a:p>
-            <a:r>
-              <a:t>Y no cuentan como prueba «se ve igual», «trae mas o menos lo mismo» ni mirar la primera pantalla de resultados: la equivalencia se afirma con una consulta cuyo resultado se conoce de antemano, un numero que coincide o un conjunto vacio.</a:t>
+              <a:t>El script Codigo/06_opt_consultas.sql es autocontenido y siembra el mismo volumen que PostgreSQL en el navegador, de modo que los numeros de la demo son los que el estudiante va a ver en su pantalla</a:t>
+            </a:r>
+          </a:p>
+          <a:p>
+            <a:r>
+              <a:t>Empieza con dos conteos de control que conviene proyectar antes de tocar nada: 30.010 citas en total y, para el 2026-03-10, 91 PROGRAMADA, 45 ATENDIDA y 14 CANCELADA.</a:t>
+            </a:r>
+          </a:p>
+          <a:p>
+            <a:r>
+              <a:t>Y el cruce implicito con comas es peligroso por aritmetica, no por estilo: si alguien olvida una de las tres condiciones de union</a:t>
+            </a:r>
+          </a:p>
+          <a:p>
+            <a:r>
+              <a:t>El resultado no es un error sino un producto cartesiano —30.010 por 5.008 filas son mas de 150 millones— que en el navegador acaba en una pestana bloqueada.</a:t>
+            </a:r>
+          </a:p>
+          <a:p>
+            <a:r>
+              <a:t>ON, filtra con el rango de fecha y con la comparacion directa del estado, y ordena por c.fecha_hora.</a:t>
+            </a:r>
+          </a:p>
+          <a:p>
+            <a:r>
+              <a:t>La tercera sentencia de la demo agrega LIMIT 50, que es lo que la pantalla de agenda realmente necesita: el motor deja de producir filas en cuanto tiene 50, y por eso el tiempo baja aunque el plan sea el mismo.</a:t>
+            </a:r>
+          </a:p>
+          <a:p>
+            <a:r>
+              <a:t>El script cierra con los bloques de la subconsulta correlacionada y con las dos pruebas de equivalencia, incluido el contraejemplo de COUNT(*) contra COUNT(c.id_cita) sobre los duenos 2001 a 2006.</a:t>
             </a:r>
           </a:p>
           <a:p>
@@ -769,22 +753,52 @@
           </a:p>
           <a:p>
             <a:r>
-              <a:t>Y se rompe sin avisar, porque ningun motor va a lanzar un error por eso.</a:t>
-            </a:r>
-          </a:p>
-          <a:p>
-            <a:r>
-              <a:t>Para conjuntos completos, donde el conteo puede coincidir con filas distintas, se usa EXCEPT en los DOS sentidos, y el docente tiene que saber por que son dos: A EXCEPT B devuelve lo que esta en A y no esta en B, asi que si sale vacio todavia puede haber filas de mas en B; se corren las dos direcciones unidas con UNION ALL y se exige cero filas en total.</a:t>
-            </a:r>
-          </a:p>
-          <a:p>
-            <a:r>
-              <a:t>Fuera de la lamina (habla de la practica): Por eso el taller cobra la prueba dos veces, unos 6 de los 100 puntos, y hay dos formas segun lo que se compare.</a:t>
-            </a:r>
-          </a:p>
-          <a:p>
-            <a:r>
-              <a:t>Fuera de la lamina (habla de la practica): Tres advertencias al calificar.</a:t>
+              <a:t>La version ANTES es SELECT * FROM cita c, mascota m, dueno d, veterinario v con las cuatro condiciones de union en el WHERE, to_char sobre la fecha y UPPER sobre el estado, y el docente debe saber que esta mal en cada linea.</a:t>
+            </a:r>
+          </a:p>
+          <a:p>
+            <a:r>
+              <a:t>SELECT * arrastra todas las columnas de las cuatro tablas cuando la pantalla de agenda necesita seis, lo cual multiplica el ancho de la fila y con el la memoria de trabajo del ordenamiento.</a:t>
+            </a:r>
+          </a:p>
+          <a:p>
+            <a:r>
+              <a:t>Las dos funciones sobre columnas se explicaron en el parrafo del predicado sargable.</a:t>
+            </a:r>
+          </a:p>
+          <a:p>
+            <a:r>
+              <a:t>Hay que decir aqui, y no despues.</a:t>
+            </a:r>
+          </a:p>
+          <a:p>
+            <a:r>
+              <a:t>ON no acelera nada, porque PostgreSQL normaliza las dos formas al mismo plan interno; se gana legibilidad y se gana que un ON faltante salte a la vista, o sea seguridad, no milisegundos.</a:t>
+            </a:r>
+          </a:p>
+          <a:p>
+            <a:r>
+              <a:t>Si el docente lo presenta como una mejora de rendimiento, esta ensenando justo la opcion por la que va a descontar.</a:t>
+            </a:r>
+          </a:p>
+          <a:p>
+            <a:r>
+              <a:t>La version DESPUES proyecta las seis columnas, escribe los tres JOIN...</a:t>
+            </a:r>
+          </a:p>
+          <a:p>
+            <a:r>
+              <a:t>Filtrar temprano se llama empuje de predicados o predicate pushdown, y hay que decir con honestidad que el optimizador moderno lo hace solo casi siempre; lo que si cambia el plan es dejar de esconder el filtro donde no puede moverlo, y los dos casos clasicos son escribirlo en HAVING cuando cabia en WHERE, y ponerlo en el WHERE de un LEFT JOIN cuando corresponde al ON, lo que ademas cambia el significado de la consulta.</a:t>
+            </a:r>
+          </a:p>
+          <a:p>
+            <a:r>
+              <a:t>Fuera de la lamina (habla de la practica): Hay que decir aqui, y no despues, lo que la quinta afirmacion de la pregunta 4 castiga: cambiar la coma por JOIN ...</a:t>
+            </a:r>
+          </a:p>
+          <a:p>
+            <a:r>
+              <a:t>Fuera de la lamina (habla de la practica): El script cierra con los bloques de la subconsulta correlacionada y con las dos pruebas de equivalencia, incluido el contraejemplo de COUNT(*) contra COUNT(c.id_cita) sobre los duenos 2001 a 2006, que es medio minuto de demo y ahorra la mitad de los reclamos de la pregunta 3.</a:t>
             </a:r>
           </a:p>
         </p:txBody>
@@ -854,153 +868,32 @@
           <a:lstStyle/>
           <a:p>
             <a:r>
-              <a:t>TEXTO COMPLETO DE LA LÁMINA (se proyecta resumido):</a:t>
-            </a:r>
-          </a:p>
-          <a:p/>
-          <a:p>
-            <a:r>
-              <a:t>La regla. Correccion y tiempo son ejes independientes. Si la version DESPUES devuelve algo distinto, no se optimizo nada: se rompio la consulta, y se rompio sin avisar, porque ningun motor va a lanzar un error por eso.</a:t>
-            </a:r>
-          </a:p>
-          <a:p/>
-          <a:p>
-            <a:r>
-              <a:t>Prueba 1, para una consulta con filtro: los dos `COUNT(*)`. Se envuelve cada version y se comparan los conteos en la misma corrida. En la agenda del 2026-03-10 las dos tienen que decir 91. Un conteo distinto es la respuesta equivocada, no una version mas rapida.</a:t>
-            </a:r>
-          </a:p>
-          <a:p/>
-          <a:p>
-            <a:r>
-              <a:t>Prueba 2, para conjuntos completos: `EXCEPT` en los DOS sentidos. `A EXCEPT B` devuelve lo que esta en A y no en B. Que salga vacio no prueba la igualdad: B puede tener filas de mas. Se corren las dos direcciones unidas con `UNION ALL` y se exige cero filas.</a:t>
-            </a:r>
-          </a:p>
-          <a:p/>
-          <a:p>
-            <a:r>
-              <a:t>Sin `LIMIT` en la prueba. Comparar solo las primeras 20 filas deja fuera justamente las que fallan — las de los duenos con cero citas, que es donde `COUNT(*)` miente.</a:t>
-            </a:r>
-          </a:p>
-          <a:p/>
-          <a:p>
-            <a:r>
-              <a:t>Que NO sirve como prueba. «Se ve igual», «trae mas o menos lo mismo» o mirar la primera pantalla de resultados. La equivalencia se afirma con una consulta cuyo resultado se conoce de antemano: un numero que coincide o un conjunto vacio.</a:t>
-            </a:r>
-          </a:p>
-          <a:p/>
-          <a:p>
-            <a:r>
-              <a:t>Fuera de la lamina (habla de la practica, no del tema):</a:t>
-            </a:r>
-          </a:p>
-          <a:p>
-            <a:r>
-              <a:t>- El `LIMIT` va en la consulta que se entrega, no en la que verifica.</a:t>
-            </a:r>
-          </a:p>
-        </p:txBody>
-      </p:sp>
-      <p:sp>
-        <p:nvSpPr>
-          <p:cNvPr id="4" name="Slide Number Placeholder 3"/>
-          <p:cNvSpPr>
-            <a:spLocks noGrp="1"/>
-          </p:cNvSpPr>
-          <p:nvPr>
-            <p:ph type="sldNum" idx="5" sz="quarter"/>
-          </p:nvPr>
-        </p:nvSpPr>
-        <p:spPr/>
-      </p:sp>
-    </p:spTree>
-  </p:cSld>
-  <p:clrMapOvr>
-    <a:masterClrMapping/>
-  </p:clrMapOvr>
-</p:notes>
-</file>
-
-<file path=ppt/notesSlides/notesSlide13.xml><?xml version="1.0" encoding="utf-8"?>
-<p:notes xmlns:a="http://schemas.openxmlformats.org/drawingml/2006/main" xmlns:p="http://schemas.openxmlformats.org/presentationml/2006/main" xmlns:r="http://schemas.openxmlformats.org/officeDocument/2006/relationships">
-  <p:cSld>
-    <p:spTree>
-      <p:nvGrpSpPr>
-        <p:cNvPr id="1" name=""/>
-        <p:cNvGrpSpPr/>
-        <p:nvPr/>
-      </p:nvGrpSpPr>
-      <p:grpSpPr>
-        <a:xfrm>
-          <a:off x="0" y="0"/>
-          <a:ext cx="0" cy="0"/>
-          <a:chOff x="0" y="0"/>
-          <a:chExt cx="0" cy="0"/>
-        </a:xfrm>
-      </p:grpSpPr>
-      <p:sp>
-        <p:nvSpPr>
-          <p:cNvPr id="2" name="Slide Image Placeholder 1"/>
-          <p:cNvSpPr>
-            <a:spLocks noGrp="1"/>
-          </p:cNvSpPr>
-          <p:nvPr>
-            <p:ph type="sldImg" idx="2"/>
-          </p:nvPr>
-        </p:nvSpPr>
-        <p:spPr/>
-      </p:sp>
-      <p:sp>
-        <p:nvSpPr>
-          <p:cNvPr id="3" name="Notes Placeholder 2"/>
-          <p:cNvSpPr>
-            <a:spLocks noGrp="1"/>
-          </p:cNvSpPr>
-          <p:nvPr>
-            <p:ph type="body" idx="3" sz="quarter"/>
-          </p:nvPr>
-        </p:nvSpPr>
-        <p:spPr/>
-        <p:txBody>
-          <a:bodyPr/>
-          <a:lstStyle/>
-          <a:p>
-            <a:r>
               <a:t>DESARROLLO (para explicarlo, no se proyecta):</a:t>
             </a:r>
           </a:p>
           <a:p>
             <a:r>
-              <a:t>El script Codigo/06_opt_consultas.sql es autocontenido y siembra el mismo volumen que PostgreSQL en el navegador, de modo que los numeros de la demo son los que el estudiante va a ver en su pantalla</a:t>
-            </a:r>
-          </a:p>
-          <a:p>
-            <a:r>
-              <a:t>Empieza con dos conteos de control que conviene proyectar antes de tocar nada: 30.010 citas en total y, para el 2026-03-10, 91 PROGRAMADA, 45 ATENDIDA y 14 CANCELADA.</a:t>
-            </a:r>
-          </a:p>
-          <a:p>
-            <a:r>
-              <a:t>Y el cruce implicito con comas es peligroso por aritmetica, no por estilo: si alguien olvida una de las tres condiciones de union</a:t>
-            </a:r>
-          </a:p>
-          <a:p>
-            <a:r>
-              <a:t>El resultado no es un error sino un producto cartesiano —30.010 por 5.008 filas son mas de 150 millones— que en el navegador acaba en una pestana bloqueada.</a:t>
-            </a:r>
-          </a:p>
-          <a:p>
-            <a:r>
-              <a:t>ON, filtra con el rango de fecha y con la comparacion directa del estado, y ordena por c.fecha_hora.</a:t>
-            </a:r>
-          </a:p>
-          <a:p>
-            <a:r>
-              <a:t>La tercera sentencia de la demo agrega LIMIT 50, que es lo que la pantalla de agenda realmente necesita: el motor deja de producir filas en cuanto tiene 50, y por eso el tiempo baja aunque el plan sea el mismo.</a:t>
-            </a:r>
-          </a:p>
-          <a:p>
-            <a:r>
-              <a:t>El script cierra con los bloques de la subconsulta correlacionada y con las dos pruebas de equivalencia, incluido el contraejemplo de COUNT(*) contra COUNT(c.id_cita) sobre los duenos 2001 a 2006.</a:t>
+              <a:t>La herramienta del dia es PostgreSQL compilado para el navegador: es el unico entorno de la clase que trae las 30.010 citas ya sembradas y las estadisticas ya recolectadas.</a:t>
+            </a:r>
+          </a:p>
+          <a:p>
+            <a:r>
+              <a:t>La justificacion de media pagina y la matriz de cambios se escriben en Google Docs.</a:t>
+            </a:r>
+          </a:p>
+          <a:p>
+            <a:r>
+              <a:t>Hoy no se ofrece ningun playground externo como alterno, y conviene que lo digas asi de claro: en DB Fiddle o en cualquier otro no existe la base sembrada, de modo que quien mida ahi obtiene otros numeros.</a:t>
+            </a:r>
+          </a:p>
+          <a:p>
+            <a:r>
+              <a:t>Tampoco tiene sentido hoy un comparador de motores, porque el motor de hoy es uno solo.</a:t>
+            </a:r>
+          </a:p>
+          <a:p>
+            <a:r>
+              <a:t>Los milisegundos, ademas, cambian entre dos corridas seguidas en la misma maquina: lo que no cambia son los conteos de filas.</a:t>
             </a:r>
           </a:p>
           <a:p>
@@ -1010,156 +903,6 @@
           </a:p>
           <a:p>
             <a:r>
-              <a:t>La version ANTES es SELECT * FROM cita c, mascota m, dueno d, veterinario v con las cuatro condiciones de union en el WHERE, to_char sobre la fecha y UPPER sobre el estado, y el docente debe saber que esta mal en cada linea.</a:t>
-            </a:r>
-          </a:p>
-          <a:p>
-            <a:r>
-              <a:t>SELECT * arrastra todas las columnas de las cuatro tablas cuando la pantalla de agenda necesita seis, lo cual multiplica el ancho de la fila y con el la memoria de trabajo del ordenamiento.</a:t>
-            </a:r>
-          </a:p>
-          <a:p>
-            <a:r>
-              <a:t>Las dos funciones sobre columnas se explicaron en el parrafo del predicado sargable.</a:t>
-            </a:r>
-          </a:p>
-          <a:p>
-            <a:r>
-              <a:t>Hay que decir aqui, y no despues.</a:t>
-            </a:r>
-          </a:p>
-          <a:p>
-            <a:r>
-              <a:t>ON no acelera nada, porque PostgreSQL normaliza las dos formas al mismo plan interno; se gana legibilidad y se gana que un ON faltante salte a la vista, o sea seguridad, no milisegundos.</a:t>
-            </a:r>
-          </a:p>
-          <a:p>
-            <a:r>
-              <a:t>Si el docente lo presenta como una mejora de rendimiento, esta ensenando justo la opcion por la que va a descontar.</a:t>
-            </a:r>
-          </a:p>
-          <a:p>
-            <a:r>
-              <a:t>La version DESPUES proyecta las seis columnas, escribe los tres JOIN...</a:t>
-            </a:r>
-          </a:p>
-          <a:p>
-            <a:r>
-              <a:t>Filtrar temprano se llama empuje de predicados o predicate pushdown, y hay que decir con honestidad que el optimizador moderno lo hace solo casi siempre; lo que si cambia el plan es dejar de esconder el filtro donde no puede moverlo, y los dos casos clasicos son escribirlo en HAVING cuando cabia en WHERE, y ponerlo en el WHERE de un LEFT JOIN cuando corresponde al ON, lo que ademas cambia el significado de la consulta.</a:t>
-            </a:r>
-          </a:p>
-          <a:p>
-            <a:r>
-              <a:t>Fuera de la lamina (habla de la practica): Hay que decir aqui, y no despues, lo que la quinta afirmacion de la pregunta 4 castiga: cambiar la coma por JOIN ...</a:t>
-            </a:r>
-          </a:p>
-          <a:p>
-            <a:r>
-              <a:t>Fuera de la lamina (habla de la practica): El script cierra con los bloques de la subconsulta correlacionada y con las dos pruebas de equivalencia, incluido el contraejemplo de COUNT(*) contra COUNT(c.id_cita) sobre los duenos 2001 a 2006, que es medio minuto de demo y ahorra la mitad de los reclamos de la pregunta 3.</a:t>
-            </a:r>
-          </a:p>
-        </p:txBody>
-      </p:sp>
-      <p:sp>
-        <p:nvSpPr>
-          <p:cNvPr id="4" name="Slide Number Placeholder 3"/>
-          <p:cNvSpPr>
-            <a:spLocks noGrp="1"/>
-          </p:cNvSpPr>
-          <p:nvPr>
-            <p:ph type="sldNum" idx="5" sz="quarter"/>
-          </p:nvPr>
-        </p:nvSpPr>
-        <p:spPr/>
-      </p:sp>
-    </p:spTree>
-  </p:cSld>
-  <p:clrMapOvr>
-    <a:masterClrMapping/>
-  </p:clrMapOvr>
-</p:notes>
-</file>
-
-<file path=ppt/notesSlides/notesSlide14.xml><?xml version="1.0" encoding="utf-8"?>
-<p:notes xmlns:a="http://schemas.openxmlformats.org/drawingml/2006/main" xmlns:p="http://schemas.openxmlformats.org/presentationml/2006/main" xmlns:r="http://schemas.openxmlformats.org/officeDocument/2006/relationships">
-  <p:cSld>
-    <p:spTree>
-      <p:nvGrpSpPr>
-        <p:cNvPr id="1" name=""/>
-        <p:cNvGrpSpPr/>
-        <p:nvPr/>
-      </p:nvGrpSpPr>
-      <p:grpSpPr>
-        <a:xfrm>
-          <a:off x="0" y="0"/>
-          <a:ext cx="0" cy="0"/>
-          <a:chOff x="0" y="0"/>
-          <a:chExt cx="0" cy="0"/>
-        </a:xfrm>
-      </p:grpSpPr>
-      <p:sp>
-        <p:nvSpPr>
-          <p:cNvPr id="2" name="Slide Image Placeholder 1"/>
-          <p:cNvSpPr>
-            <a:spLocks noGrp="1"/>
-          </p:cNvSpPr>
-          <p:nvPr>
-            <p:ph type="sldImg" idx="2"/>
-          </p:nvPr>
-        </p:nvSpPr>
-        <p:spPr/>
-      </p:sp>
-      <p:sp>
-        <p:nvSpPr>
-          <p:cNvPr id="3" name="Notes Placeholder 2"/>
-          <p:cNvSpPr>
-            <a:spLocks noGrp="1"/>
-          </p:cNvSpPr>
-          <p:nvPr>
-            <p:ph type="body" idx="3" sz="quarter"/>
-          </p:nvPr>
-        </p:nvSpPr>
-        <p:spPr/>
-        <p:txBody>
-          <a:bodyPr/>
-          <a:lstStyle/>
-          <a:p>
-            <a:r>
-              <a:t>DESARROLLO (para explicarlo, no se proyecta):</a:t>
-            </a:r>
-          </a:p>
-          <a:p>
-            <a:r>
-              <a:t>La herramienta del dia es PostgreSQL compilado para el navegador: es el unico entorno de la clase que trae las 30.010 citas ya sembradas y las estadisticas ya recolectadas.</a:t>
-            </a:r>
-          </a:p>
-          <a:p>
-            <a:r>
-              <a:t>La justificacion de media pagina y la matriz de cambios se escriben en Google Docs.</a:t>
-            </a:r>
-          </a:p>
-          <a:p>
-            <a:r>
-              <a:t>Hoy no se ofrece ningun playground externo como alterno, y conviene que lo digas asi de claro: en DB Fiddle o en cualquier otro no existe la base sembrada, de modo que quien mida ahi obtiene otros numeros.</a:t>
-            </a:r>
-          </a:p>
-          <a:p>
-            <a:r>
-              <a:t>Tampoco tiene sentido hoy un comparador de motores, porque el motor de hoy es uno solo.</a:t>
-            </a:r>
-          </a:p>
-          <a:p>
-            <a:r>
-              <a:t>Los milisegundos, ademas, cambian entre dos corridas seguidas en la misma maquina: lo que no cambia son los conteos de filas.</a:t>
-            </a:r>
-          </a:p>
-          <a:p>
-            <a:r>
-              <a:t>NOTAS:</a:t>
-            </a:r>
-          </a:p>
-          <a:p>
-            <a:r>
               <a:t>Soporta EXPLAIN, EXPLAIN ANALYZE y la opcion BUFFERS; si en alguna maquina BUFFERS no responde.</a:t>
             </a:r>
           </a:p>
@@ -1256,106 +999,6 @@
           <a:p>
             <a:r>
               <a:t>Fuera de la lamina (habla de la practica): Los milisegundos, ademas, cambian entre dos corridas seguidas en la misma maquina: lo que no cambia son los conteos de filas, y por eso los conteos son lo que se califica y los milisegundos solo tienen que ser coherentes entre si.</a:t>
-            </a:r>
-          </a:p>
-        </p:txBody>
-      </p:sp>
-      <p:sp>
-        <p:nvSpPr>
-          <p:cNvPr id="4" name="Slide Number Placeholder 3"/>
-          <p:cNvSpPr>
-            <a:spLocks noGrp="1"/>
-          </p:cNvSpPr>
-          <p:nvPr>
-            <p:ph type="sldNum" idx="5" sz="quarter"/>
-          </p:nvPr>
-        </p:nvSpPr>
-        <p:spPr/>
-      </p:sp>
-    </p:spTree>
-  </p:cSld>
-  <p:clrMapOvr>
-    <a:masterClrMapping/>
-  </p:clrMapOvr>
-</p:notes>
-</file>
-
-<file path=ppt/notesSlides/notesSlide15.xml><?xml version="1.0" encoding="utf-8"?>
-<p:notes xmlns:a="http://schemas.openxmlformats.org/drawingml/2006/main" xmlns:p="http://schemas.openxmlformats.org/presentationml/2006/main" xmlns:r="http://schemas.openxmlformats.org/officeDocument/2006/relationships">
-  <p:cSld>
-    <p:spTree>
-      <p:nvGrpSpPr>
-        <p:cNvPr id="1" name=""/>
-        <p:cNvGrpSpPr/>
-        <p:nvPr/>
-      </p:nvGrpSpPr>
-      <p:grpSpPr>
-        <a:xfrm>
-          <a:off x="0" y="0"/>
-          <a:ext cx="0" cy="0"/>
-          <a:chOff x="0" y="0"/>
-          <a:chExt cx="0" cy="0"/>
-        </a:xfrm>
-      </p:grpSpPr>
-      <p:sp>
-        <p:nvSpPr>
-          <p:cNvPr id="2" name="Slide Image Placeholder 1"/>
-          <p:cNvSpPr>
-            <a:spLocks noGrp="1"/>
-          </p:cNvSpPr>
-          <p:nvPr>
-            <p:ph type="sldImg" idx="2"/>
-          </p:nvPr>
-        </p:nvSpPr>
-        <p:spPr/>
-      </p:sp>
-      <p:sp>
-        <p:nvSpPr>
-          <p:cNvPr id="3" name="Notes Placeholder 2"/>
-          <p:cNvSpPr>
-            <a:spLocks noGrp="1"/>
-          </p:cNvSpPr>
-          <p:nvPr>
-            <p:ph type="body" idx="3" sz="quarter"/>
-          </p:nvPr>
-        </p:nvSpPr>
-        <p:spPr/>
-        <p:txBody>
-          <a:bodyPr/>
-          <a:lstStyle/>
-          <a:p>
-            <a:r>
-              <a:t>TEXTO COMPLETO DE LA LÁMINA (se proyecta resumido):</a:t>
-            </a:r>
-          </a:p>
-          <a:p/>
-          <a:p>
-            <a:r>
-              <a:t>Herramienta: PostgreSQL + Google Docs</a:t>
-            </a:r>
-          </a:p>
-          <a:p/>
-          <a:p>
-            <a:r>
-              <a:t>Demo: Consulta pesada citas+mascotas+duenos -&gt; version filtrada y proyectada, con EXPLAIN ANALYZE antes y despues.</a:t>
-            </a:r>
-          </a:p>
-          <a:p/>
-          <a:p>
-            <a:r>
-              <a:t>Sigan el mismo dominio de la clínica (no inventen otro caso).</a:t>
-            </a:r>
-          </a:p>
-          <a:p/>
-          <a:p>
-            <a:r>
-              <a:t>Qué observar: las dos versiones devuelven las mismas 91 filas, pero el plan de la primera muestra loops=2006 y el de la segunda una sola pasada.</a:t>
-            </a:r>
-          </a:p>
-          <a:p/>
-          <a:p>
-            <a:r>
-              <a:t>Qué observar: el nodo mas costoso, las filas estimadas contra las reales y el tiempo total, leidos en ese orden en cada plan.</a:t>
             </a:r>
           </a:p>
         </p:txBody>
@@ -1430,32 +1073,62 @@
           </a:p>
           <a:p>
             <a:r>
-              <a:t>SQL es un lenguaje declarativo: la consulta describe QUE datos se quieren y nunca COMO obtenerlos.</a:t>
-            </a:r>
-          </a:p>
-          <a:p>
-            <a:r>
-              <a:t>Quien decide el como es el optimizador, un componente del motor que convierte la sentencia en un plan de ejecucion</a:t>
-            </a:r>
-          </a:p>
-          <a:p>
-            <a:r>
-              <a:t>Es decir el arbol de operaciones fisicas que se ejecutara de verdad: que tabla se lee primero, si completa o por indice, con que algoritmo se cruzan dos tablas y donde se ordena.</a:t>
-            </a:r>
-          </a:p>
-          <a:p>
-            <a:r>
-              <a:t>Son tres etapas: el analizador verifica sintaxis y existencia de tablas y columnas; el optimizador genera planes candidatos, estima el costo de cada uno y elige el mas barato; el ejecutor corre el elegido.</a:t>
-            </a:r>
-          </a:p>
-          <a:p>
-            <a:r>
-              <a:t>Lo decisivo es que todos devuelven EXACTAMENTE el mismo resultado y pueden diferir en tiempo por factores de cien o de mil.</a:t>
-            </a:r>
-          </a:p>
-          <a:p>
-            <a:r>
-              <a:t>Optimizar es ayudar al optimizador a encontrar el plan bueno, no reescribir SQL por gusto estetico.</a:t>
+              <a:t>De cada plan se leen tres cosas concretas: el nodo mas costoso, las filas estimadas frente a las reales y el tiempo total.</a:t>
+            </a:r>
+          </a:p>
+          <a:p>
+            <a:r>
+              <a:t>Leer un plan tiene una regla de orden que casi nadie explica: es un arbol y se lee de adentro hacia afuera, empezando por los nodos mas indentados, que son las hojas; cada nodo consume las filas de sus hijos, y la primera linea impresa es la ULTIMA operacion.</a:t>
+            </a:r>
+          </a:p>
+          <a:p>
+            <a:r>
+              <a:t>En PostgreSQL se escribe EXPLAIN antes de la consulta, y para la agenda de la clase aparece algo de esta forma: un Hash Join en la primera linea con su cost=... rows=... width=...</a:t>
+            </a:r>
+          </a:p>
+          <a:p>
+            <a:r>
+              <a:t>Y debajo, mas indentado, un Seq Scan on cita c con el filtro del dia y un Hash construido sobre un Seq Scan on mascota m.</a:t>
+            </a:r>
+          </a:p>
+          <a:p>
+            <a:r>
+              <a:t>Los cuatro campos hay que saber nombrarlos: cost trae el costo de arranque y el costo total separados por dos puntos; rows son las filas que el motor ESTIMA</a:t>
+            </a:r>
+          </a:p>
+          <a:p>
+            <a:r>
+              <a:t>Width es el ancho promedio de la fila en bytes; y loops, que solo aparece con ANALYZE, dice cuantas veces se ejecuto ese nodo.</a:t>
+            </a:r>
+          </a:p>
+          <a:p>
+            <a:r>
+              <a:t>El costo NO esta en milisegundos, es una unidad relativa donde 1.0 equivale por convencion a leer secuencialmente una pagina de 8 KB, y solo sirve para comparar planes del mismo motor.</a:t>
+            </a:r>
+          </a:p>
+          <a:p>
+            <a:r>
+              <a:t>Los tiempos reales los da EXPLAIN ANALYZE, que agrega actual time, actual rows, loops y el Execution Time del final; con la opcion BUFFERS agrega ademas cuantos bloques de 8 KB se leyeron y cuantos se acertaron en memoria</a:t>
+            </a:r>
+          </a:p>
+          <a:p>
+            <a:r>
+              <a:t>Que es de donde sale el numero exacto de paginas de cada tabla sin tener que estimarlo.</a:t>
+            </a:r>
+          </a:p>
+          <a:p>
+            <a:r>
+              <a:t>Advertencia que evita un accidente en clase: ANALYZE EJECUTA la sentencia, asi que sobre un UPDATE o un DELETE hay que envolverlo en BEGIN y ROLLBACK, lo cual ya anticipa la Clase 8.</a:t>
+            </a:r>
+          </a:p>
+          <a:p>
+            <a:r>
+              <a:t>Un nodo de 0,5 ms con loops=2006 cuesta un segundo entero y aparece impreso como el mas barato de la pantalla.</a:t>
+            </a:r>
+          </a:p>
+          <a:p>
+            <a:r>
+              <a:t>En Oracle la misma lectura son dos pasos, EXPLAIN PLAN FOR y luego SELECT * FROM TABLE(DBMS_XPLAN.DISPLAY), que imprime Id, Operation, Name, Rows, Bytes, Cost y Time con la indentacion como jerarquia; se menciona como contraste, no como herramienta del dia.</a:t>
             </a:r>
           </a:p>
           <a:p>
@@ -1465,7 +1138,27 @@
           </a:p>
           <a:p>
             <a:r>
-              <a:t>El numero que hace visible el problema, y conviene decirlo con la consulta de la clase en pantalla, que cruza cuatro tablas: con tres tablas hay 6 ordenes de cruce posibles (3 factorial), con las cuatro de la agenda hay 24, con cinco 120, y al multiplicar metodos de acceso y algoritmos de cruce el espacio pasa del millar de planes; el optimizador no los prueba todos, poda con heuristicas y decide en milisegundos.</a:t>
+              <a:t>Y hay dos trampas al senalar el nodo mas costoso.</a:t>
+            </a:r>
+          </a:p>
+          <a:p>
+            <a:r>
+              <a:t>Fuera de la lamina (habla de la practica): El costo NO esta en milisegundos, es una unidad relativa donde 1.0 equivale por convencion a leer secuencialmente una pagina de 8 KB, y solo sirve para comparar planes del mismo motor; confundir cost con tiempo es el error mas frecuente al calificar esta pregunta.</a:t>
+            </a:r>
+          </a:p>
+          <a:p>
+            <a:r>
+              <a:t>Fuera de la lamina (habla de la practica): Advertencia que evita un accidente en clase: ANALYZE EJECUTA la sentencia, asi que sobre un UPDATE o un DELETE hay que envolverlo en BEGIN y ROLLBACK, lo cual ya anticipa la Clase 8; con SELECT no hay riesgo y el taller es solo de SELECT.</a:t>
+            </a:r>
+          </a:p>
+          <a:p>
+            <a:r>
+              <a:t>Fuera de la lamina (habla de la practica): Y hay dos trampas al senalar el nodo mas costoso, que el docente tiene que conocer antes de calificar: el tiempo que muestra un nodo INCLUYE el de sus hijos, de modo que la primera linea siempre parece la mas cara sin serlo, y actual time es POR VUELTA, asi que el costo real de un nodo es su tiempo multiplicado por loops.</a:t>
+            </a:r>
+          </a:p>
+          <a:p>
+            <a:r>
+              <a:t>Fuera de la lamina (habla de la practica): Un nodo de 0,5 ms con loops=2006 cuesta un segundo entero y aparece impreso como el mas barato de la pantalla; es exactamente lo que va a pasar en la pregunta 3.</a:t>
             </a:r>
           </a:p>
         </p:txBody>
@@ -1535,97 +1228,12 @@
           <a:lstStyle/>
           <a:p>
             <a:r>
-              <a:t>DESARROLLO (para explicarlo, no se proyecta):</a:t>
-            </a:r>
-          </a:p>
-          <a:p>
-            <a:r>
-              <a:t>De cada plan se leen tres cosas concretas: el nodo mas costoso, las filas estimadas frente a las reales y el tiempo total.</a:t>
-            </a:r>
-          </a:p>
-          <a:p>
-            <a:r>
-              <a:t>Leer un plan tiene una regla de orden que casi nadie explica: es un arbol y se lee de adentro hacia afuera, empezando por los nodos mas indentados, que son las hojas; cada nodo consume las filas de sus hijos, y la primera linea impresa es la ULTIMA operacion.</a:t>
-            </a:r>
-          </a:p>
-          <a:p>
-            <a:r>
-              <a:t>En PostgreSQL se escribe EXPLAIN antes de la consulta, y para la agenda de la clase aparece algo de esta forma: un Hash Join en la primera linea con su cost=... rows=... width=...</a:t>
-            </a:r>
-          </a:p>
-          <a:p>
-            <a:r>
-              <a:t>Y debajo, mas indentado, un Seq Scan on cita c con el filtro del dia y un Hash construido sobre un Seq Scan on mascota m.</a:t>
-            </a:r>
-          </a:p>
-          <a:p>
-            <a:r>
-              <a:t>Los cuatro campos hay que saber nombrarlos: cost trae el costo de arranque y el costo total separados por dos puntos; rows son las filas que el motor ESTIMA</a:t>
-            </a:r>
-          </a:p>
-          <a:p>
-            <a:r>
-              <a:t>Width es el ancho promedio de la fila en bytes; y loops, que solo aparece con ANALYZE, dice cuantas veces se ejecuto ese nodo.</a:t>
-            </a:r>
-          </a:p>
-          <a:p>
-            <a:r>
-              <a:t>El costo NO esta en milisegundos, es una unidad relativa donde 1.0 equivale por convencion a leer secuencialmente una pagina de 8 KB, y solo sirve para comparar planes del mismo motor.</a:t>
-            </a:r>
-          </a:p>
-          <a:p>
-            <a:r>
-              <a:t>Los tiempos reales los da EXPLAIN ANALYZE, que agrega actual time, actual rows, loops y el Execution Time del final; con la opcion BUFFERS agrega ademas cuantos bloques de 8 KB se leyeron y cuantos se acertaron en memoria</a:t>
-            </a:r>
-          </a:p>
-          <a:p>
-            <a:r>
-              <a:t>Que es de donde sale el numero exacto de paginas de cada tabla sin tener que estimarlo.</a:t>
-            </a:r>
-          </a:p>
-          <a:p>
-            <a:r>
-              <a:t>Advertencia que evita un accidente en clase: ANALYZE EJECUTA la sentencia, asi que sobre un UPDATE o un DELETE hay que envolverlo en BEGIN y ROLLBACK, lo cual ya anticipa la Clase 8.</a:t>
-            </a:r>
-          </a:p>
-          <a:p>
-            <a:r>
-              <a:t>Un nodo de 0,5 ms con loops=2006 cuesta un segundo entero y aparece impreso como el mas barato de la pantalla.</a:t>
-            </a:r>
-          </a:p>
-          <a:p>
-            <a:r>
-              <a:t>En Oracle la misma lectura son dos pasos, EXPLAIN PLAN FOR y luego SELECT * FROM TABLE(DBMS_XPLAN.DISPLAY), que imprime Id, Operation, Name, Rows, Bytes, Cost y Time con la indentacion como jerarquia; se menciona como contraste, no como herramienta del dia.</a:t>
-            </a:r>
-          </a:p>
-          <a:p>
-            <a:r>
-              <a:t>NOTAS:</a:t>
-            </a:r>
-          </a:p>
-          <a:p>
-            <a:r>
-              <a:t>Y hay dos trampas al senalar el nodo mas costoso.</a:t>
-            </a:r>
-          </a:p>
-          <a:p>
-            <a:r>
-              <a:t>Fuera de la lamina (habla de la practica): El costo NO esta en milisegundos, es una unidad relativa donde 1.0 equivale por convencion a leer secuencialmente una pagina de 8 KB, y solo sirve para comparar planes del mismo motor; confundir cost con tiempo es el error mas frecuente al calificar esta pregunta.</a:t>
-            </a:r>
-          </a:p>
-          <a:p>
-            <a:r>
-              <a:t>Fuera de la lamina (habla de la practica): Advertencia que evita un accidente en clase: ANALYZE EJECUTA la sentencia, asi que sobre un UPDATE o un DELETE hay que envolverlo en BEGIN y ROLLBACK, lo cual ya anticipa la Clase 8; con SELECT no hay riesgo y el taller es solo de SELECT.</a:t>
-            </a:r>
-          </a:p>
-          <a:p>
-            <a:r>
-              <a:t>Fuera de la lamina (habla de la practica): Y hay dos trampas al senalar el nodo mas costoso, que el docente tiene que conocer antes de calificar: el tiempo que muestra un nodo INCLUYE el de sus hijos, de modo que la primera linea siempre parece la mas cara sin serlo, y actual time es POR VUELTA, asi que el costo real de un nodo es su tiempo multiplicado por loops.</a:t>
-            </a:r>
-          </a:p>
-          <a:p>
-            <a:r>
-              <a:t>Fuera de la lamina (habla de la practica): Un nodo de 0,5 ms con loops=2006 cuesta un segundo entero y aparece impreso como el mas barato de la pantalla; es exactamente lo que va a pasar en la pregunta 3.</a:t>
+              <a:t>Fuera de la lamina (habla de la practica, no del tema):</a:t>
+            </a:r>
+          </a:p>
+          <a:p>
+            <a:r>
+              <a:t>- Es lo que se anota en la tabla de la pregunta 2.</a:t>
             </a:r>
           </a:p>
         </p:txBody>
@@ -1695,48 +1303,87 @@
           <a:lstStyle/>
           <a:p>
             <a:r>
-              <a:t>TEXTO COMPLETO DE LA LÁMINA (se proyecta resumido):</a:t>
-            </a:r>
-          </a:p>
-          <a:p/>
-          <a:p>
-            <a:r>
-              <a:t>El orden de lectura. El plan no es una lista de pasos de arriba hacia abajo: es un arbol. Los nodos mas indentados son las hojas y se ejecutan primero; cada nodo consume las filas de sus hijos. La primera linea impresa es la ULTIMA operacion.</a:t>
-            </a:r>
-          </a:p>
-          <a:p/>
-          <a:p>
-            <a:r>
-              <a:t>Los cuatro campos. `cost=270.00..4821.50` son arranque y total en una unidad relativa (1.0 = leer una pagina de 8 KB), no milisegundos; `rows=` son las filas que el motor estima; `width=` el ancho de la fila en bytes; `loops=` cuantas veces se repitio ese nodo.</a:t>
-            </a:r>
-          </a:p>
-          <a:p/>
-          <a:p>
-            <a:r>
-              <a:t>`EXPLAIN` estima, `EXPLAIN ANALYZE` ejecuta. El segundo agrega `actual time=`, `actual rows=` y el `Execution Time` final. Y ejecuta de verdad: sobre un `UPDATE` o `DELETE` hay que envolverlo en `BEGIN` … `ROLLBACK` (eso es la Clase 8). Con `SELECT` no hay riesgo.</a:t>
-            </a:r>
-          </a:p>
-          <a:p/>
-          <a:p>
-            <a:r>
-              <a:t>Estimado contra real: la senal. Una divergencia de 2 veces es normal; de 10 veces o mas delata estadisticas viejas o predicados que el motor cree independientes y no lo son.</a:t>
-            </a:r>
-          </a:p>
-          <a:p/>
-          <a:p>
-            <a:r>
-              <a:t>El nodo mas costoso, sin trampa. El tiempo de un nodo incluye el de sus hijos, y `actual time` es por vuelta: hay que multiplicarlo por `loops`. Un nodo de 0,5 ms con `loops=2006` cuesta un segundo — mas que el `Seq Scan` de arriba que parece el culpable.</a:t>
-            </a:r>
-          </a:p>
-          <a:p/>
-          <a:p>
-            <a:r>
-              <a:t>Fuera de la lamina (habla de la practica, no del tema):</a:t>
-            </a:r>
-          </a:p>
-          <a:p>
-            <a:r>
-              <a:t>- Es lo que se anota en la tabla de la pregunta 2.</a:t>
+              <a:t>DESARROLLO (para explicarlo, no se proyecta):</a:t>
+            </a:r>
+          </a:p>
+          <a:p>
+            <a:r>
+              <a:t>Las estadisticas del optimizador son los metadatos que describen los datos sin leerlos: filas de la tabla, bloques que ocupa</a:t>
+            </a:r>
+          </a:p>
+          <a:p>
+            <a:r>
+              <a:t>Valores distintos por columna, fraccion de nulos y un histograma que reparte los valores en cubos para saber si estan parejos o concentrados.</a:t>
+            </a:r>
+          </a:p>
+          <a:p>
+            <a:r>
+              <a:t>PostgreSQL las recolecta con ANALYZE cita, con 100 cubos por columna por omision</a:t>
+            </a:r>
+          </a:p>
+          <a:p>
+            <a:r>
+              <a:t>Oracle usa DBMS_STATS.GATHER_TABLE_STATS(USER, 'CITA') y las expone en USER_TABLES.NUM_ROWS.</a:t>
+            </a:r>
+          </a:p>
+          <a:p>
+            <a:r>
+              <a:t>En la base de la clase el ANALYZE ya esta corrido, y eso es deliberado: si faltara.</a:t>
+            </a:r>
+          </a:p>
+          <a:p>
+            <a:r>
+              <a:t>De aqui sale la explicacion de un fenomeno que desconcierta: la misma consulta, sin cambiar una letra, puede tener hoy un plan distinto al de ayer</a:t>
+            </a:r>
+          </a:p>
+          <a:p>
+            <a:r>
+              <a:t>Porque la tabla crecio, porque se recolectaron estadisticas nuevas, porque alguien creo un indice o porque el valor comparado cambio la selectividad estimada.</a:t>
+            </a:r>
+          </a:p>
+          <a:p>
+            <a:r>
+              <a:t>El plan no es propiedad del texto SQL, es una decision tomada con la informacion disponible en ese instante.</a:t>
+            </a:r>
+          </a:p>
+          <a:p>
+            <a:r>
+              <a:t>Correlacionados quiere decir que el motor multiplica las selectividades de dos filtros como si fueran independientes y no lo son: en la clínica</a:t>
+            </a:r>
+          </a:p>
+          <a:p>
+            <a:r>
+              <a:t>Fecha_hora del 2026-03-10 y estado = 'PROGRAMADA' no lo son, porque el reparto de estados no es igual en todos los dias.</a:t>
+            </a:r>
+          </a:p>
+          <a:p>
+            <a:r>
+              <a:t>NOTAS:</a:t>
+            </a:r>
+          </a:p>
+          <a:p>
+            <a:r>
+              <a:t>De ahi que se comparen rows estimadas contra actual rows.</a:t>
+            </a:r>
+          </a:p>
+          <a:p>
+            <a:r>
+              <a:t>Conviene marcar la diferencia de palabras en voz alta, porque van a aparecer las dos hoy: predicados correlacionados es esto, un asunto de estimacion; subconsulta correlacionada.</a:t>
+            </a:r>
+          </a:p>
+          <a:p>
+            <a:r>
+              <a:t>Fuera de la lamina (habla de la practica): En la base de la clase el ANALYZE ya esta corrido, y eso es deliberado: si faltara, el estimado contra real de la pregunta 2 saldria disparatado por una razon que no es el tema de la clase y el estudiante concluiria lo contrario de lo que hay que aprender.</a:t>
+            </a:r>
+          </a:p>
+          <a:p>
+            <a:r>
+              <a:t>Fuera de la lamina (habla de la practica): De ahi que se comparen rows estimadas contra actual rows, que es literalmente una de las tres columnas que pide la pregunta 2: una divergencia de 2 veces es normal, una de 10 veces o mas es la senal clasica de estadisticas viejas o de predicados correlacionados, y esa es tambien la sexta afirmacion de la pregunta 4, que es correcta.</a:t>
+            </a:r>
+          </a:p>
+          <a:p>
+            <a:r>
+              <a:t>Fuera de la lamina (habla de la practica): Conviene marcar la diferencia de palabras en voz alta, porque van a aparecer las dos hoy: predicados correlacionados es esto, un asunto de estimacion; subconsulta correlacionada, la de la pregunta 3, es otra cosa completamente distinta y es un asunto de numero de ejecuciones.</a:t>
             </a:r>
           </a:p>
         </p:txBody>
@@ -1811,52 +1458,52 @@
           </a:p>
           <a:p>
             <a:r>
-              <a:t>Las estadisticas del optimizador son los metadatos que describen los datos sin leerlos: filas de la tabla, bloques que ocupa</a:t>
-            </a:r>
-          </a:p>
-          <a:p>
-            <a:r>
-              <a:t>Valores distintos por columna, fraccion de nulos y un histograma que reparte los valores en cubos para saber si estan parejos o concentrados.</a:t>
-            </a:r>
-          </a:p>
-          <a:p>
-            <a:r>
-              <a:t>PostgreSQL las recolecta con ANALYZE cita, con 100 cubos por columna por omision</a:t>
-            </a:r>
-          </a:p>
-          <a:p>
-            <a:r>
-              <a:t>Oracle usa DBMS_STATS.GATHER_TABLE_STATS(USER, 'CITA') y las expone en USER_TABLES.NUM_ROWS.</a:t>
-            </a:r>
-          </a:p>
-          <a:p>
-            <a:r>
-              <a:t>En la base de la clase el ANALYZE ya esta corrido, y eso es deliberado: si faltara.</a:t>
-            </a:r>
-          </a:p>
-          <a:p>
-            <a:r>
-              <a:t>De aqui sale la explicacion de un fenomeno que desconcierta: la misma consulta, sin cambiar una letra, puede tener hoy un plan distinto al de ayer</a:t>
-            </a:r>
-          </a:p>
-          <a:p>
-            <a:r>
-              <a:t>Porque la tabla crecio, porque se recolectaron estadisticas nuevas, porque alguien creo un indice o porque el valor comparado cambio la selectividad estimada.</a:t>
-            </a:r>
-          </a:p>
-          <a:p>
-            <a:r>
-              <a:t>El plan no es propiedad del texto SQL, es una decision tomada con la informacion disponible en ese instante.</a:t>
-            </a:r>
-          </a:p>
-          <a:p>
-            <a:r>
-              <a:t>Correlacionados quiere decir que el motor multiplica las selectividades de dos filtros como si fueran independientes y no lo son: en la clínica</a:t>
-            </a:r>
-          </a:p>
-          <a:p>
-            <a:r>
-              <a:t>Fecha_hora del 2026-03-10 y estado = 'PROGRAMADA' no lo son, porque el reparto de estados no es igual en todos los dias.</a:t>
+              <a:t>La cardinalidad de una columna es la cantidad de valores distintos que contiene, y conviene advertir que la palabra se usa tambien para las filas que entrega un nodo del plan.</a:t>
+            </a:r>
+          </a:p>
+          <a:p>
+            <a:r>
+              <a:t>La selectividad de un predicado es la fraccion de filas que sobreviven al filtro, entre 0 y 1, y es lo que el optimizador calcula con las estadisticas.</a:t>
+            </a:r>
+          </a:p>
+          <a:p>
+            <a:r>
+              <a:t>Las cifras que hay que usar son las de la base de la clase, no unas inventadas</a:t>
+            </a:r>
+          </a:p>
+          <a:p>
+            <a:r>
+              <a:t>Porque el estudiante las va a ver en su pantalla: 2.006 duenos, 5.008 mascotas, 16 veterinarios y 30.010 citas repartidas entre el 2026-01-05 y el 2026-07-23, o sea 200 dias distintos con exactamente 150 citas cada uno.</a:t>
+            </a:r>
+          </a:p>
+          <a:p>
+            <a:r>
+              <a:t>Con eso, WHERE c.fecha_hora &gt;= TIMESTAMP '2026-03-10 00:00:00' AND c.fecha_hora &lt; TIMESTAMP '2026-03-11 00:00:00' tiene selectividad 150 sobre 30.010, o sea 0,5 %: filtro excelente.</a:t>
+            </a:r>
+          </a:p>
+          <a:p>
+            <a:r>
+              <a:t>WHERE c.estado = 'PROGRAMADA', sobre tres valores distintos (PROGRAMADA, ATENDIDA, CANCELADA), no filtra casi nada: son 18.187 filas, el 60,6 %, porque la siembra hace CANCELADA una de cada once citas y ATENDIDA una de cada tres de las que quedan.</a:t>
+            </a:r>
+          </a:p>
+          <a:p>
+            <a:r>
+              <a:t>Y WHERE m.activa = 'S', con 4.712 de las 5.008 mascotas activas, tiene selectividad 0,94: no filtra nada.</a:t>
+            </a:r>
+          </a:p>
+          <a:p>
+            <a:r>
+              <a:t>Los dos filtros juntos dejan 91 filas de 30.010, el 0,3 %.</a:t>
+            </a:r>
+          </a:p>
+          <a:p>
+            <a:r>
+              <a:t>La regla practica, convencion de oficio y no regla dura, dice que por debajo del 5 % de las filas conviene el indice, entre 5 % y 20 % depende del motor, y por encima del 20 % o 25 % gana leer la tabla completa.</a:t>
+            </a:r>
+          </a:p>
+          <a:p>
+            <a:r>
+              <a:t>Su origen es medible: PostgreSQL valora una lectura aleatoria de pagina en 4,0 y una secuencial en 1,0 (parametros random_page_cost y seq_page_cost), y por eso la regla se enuncia en filas pero el motor decide en costos, que no es lo mismo.</a:t>
             </a:r>
           </a:p>
           <a:p>
@@ -1866,27 +1513,12 @@
           </a:p>
           <a:p>
             <a:r>
-              <a:t>De ahi que se comparen rows estimadas contra actual rows.</a:t>
-            </a:r>
-          </a:p>
-          <a:p>
-            <a:r>
-              <a:t>Conviene marcar la diferencia de palabras en voz alta, porque van a aparecer las dos hoy: predicados correlacionados es esto, un asunto de estimacion; subconsulta correlacionada.</a:t>
-            </a:r>
-          </a:p>
-          <a:p>
-            <a:r>
-              <a:t>Fuera de la lamina (habla de la practica): En la base de la clase el ANALYZE ya esta corrido, y eso es deliberado: si faltara, el estimado contra real de la pregunta 2 saldria disparatado por una razon que no es el tema de la clase y el estudiante concluiria lo contrario de lo que hay que aprender.</a:t>
-            </a:r>
-          </a:p>
-          <a:p>
-            <a:r>
-              <a:t>Fuera de la lamina (habla de la practica): De ahi que se comparen rows estimadas contra actual rows, que es literalmente una de las tres columnas que pide la pregunta 2: una divergencia de 2 veces es normal, una de 10 veces o mas es la senal clasica de estadisticas viejas o de predicados correlacionados, y esa es tambien la sexta afirmacion de la pregunta 4, que es correcta.</a:t>
-            </a:r>
-          </a:p>
-          <a:p>
-            <a:r>
-              <a:t>Fuera de la lamina (habla de la practica): Conviene marcar la diferencia de palabras en voz alta, porque van a aparecer las dos hoy: predicados correlacionados es esto, un asunto de estimacion; subconsulta correlacionada, la de la pregunta 3, es otra cosa completamente distinta y es un asunto de numero de ejecuciones.</a:t>
+              <a:t>Dos terminos explican por que el motor decide lo que decide.</a:t>
+            </a:r>
+          </a:p>
+          <a:p>
+            <a:r>
+              <a:t>Fuera de la lamina (habla de la practica): Los dos filtros juntos dejan 91 filas de 30.010, el 0,3 %, y ese 91 es el numero que el estudiante tiene que ver dos veces en la pregunta 1.</a:t>
             </a:r>
           </a:p>
         </p:txBody>
@@ -1961,52 +1593,62 @@
           </a:p>
           <a:p>
             <a:r>
-              <a:t>La cardinalidad de una columna es la cantidad de valores distintos que contiene, y conviene advertir que la palabra se usa tambien para las filas que entrega un nodo del plan.</a:t>
-            </a:r>
-          </a:p>
-          <a:p>
-            <a:r>
-              <a:t>La selectividad de un predicado es la fraccion de filas que sobreviven al filtro, entre 0 y 1, y es lo que el optimizador calcula con las estadisticas.</a:t>
-            </a:r>
-          </a:p>
-          <a:p>
-            <a:r>
-              <a:t>Las cifras que hay que usar son las de la base de la clase, no unas inventadas</a:t>
-            </a:r>
-          </a:p>
-          <a:p>
-            <a:r>
-              <a:t>Porque el estudiante las va a ver en su pantalla: 2.006 duenos, 5.008 mascotas, 16 veterinarios y 30.010 citas repartidas entre el 2026-01-05 y el 2026-07-23, o sea 200 dias distintos con exactamente 150 citas cada uno.</a:t>
-            </a:r>
-          </a:p>
-          <a:p>
-            <a:r>
-              <a:t>Con eso, WHERE c.fecha_hora &gt;= TIMESTAMP '2026-03-10 00:00:00' AND c.fecha_hora &lt; TIMESTAMP '2026-03-11 00:00:00' tiene selectividad 150 sobre 30.010, o sea 0,5 %: filtro excelente.</a:t>
-            </a:r>
-          </a:p>
-          <a:p>
-            <a:r>
-              <a:t>WHERE c.estado = 'PROGRAMADA', sobre tres valores distintos (PROGRAMADA, ATENDIDA, CANCELADA), no filtra casi nada: son 18.187 filas, el 60,6 %, porque la siembra hace CANCELADA una de cada once citas y ATENDIDA una de cada tres de las que quedan.</a:t>
-            </a:r>
-          </a:p>
-          <a:p>
-            <a:r>
-              <a:t>Y WHERE m.activa = 'S', con 4.712 de las 5.008 mascotas activas, tiene selectividad 0,94: no filtra nada.</a:t>
-            </a:r>
-          </a:p>
-          <a:p>
-            <a:r>
-              <a:t>Los dos filtros juntos dejan 91 filas de 30.010, el 0,3 %.</a:t>
-            </a:r>
-          </a:p>
-          <a:p>
-            <a:r>
-              <a:t>La regla practica, convencion de oficio y no regla dura, dice que por debajo del 5 % de las filas conviene el indice, entre 5 % y 20 % depende del motor, y por encima del 20 % o 25 % gana leer la tabla completa.</a:t>
-            </a:r>
-          </a:p>
-          <a:p>
-            <a:r>
-              <a:t>Su origen es medible: PostgreSQL valora una lectura aleatoria de pagina en 4,0 y una secuencial en 1,0 (parametros random_page_cost y seq_page_cost), y por eso la regla se enuncia en filas pero el motor decide en costos, que no es lo mismo.</a:t>
+              <a:t>Un full table scan, que en PostgreSQL se imprime Seq Scan y en Oracle TABLE ACCESS FULL, lee todos los bloques de principio a fin y descarta en memoria lo que no cumple el filtro; su ventaja es que la lectura es secuencial.</a:t>
+            </a:r>
+          </a:p>
+          <a:p>
+            <a:r>
+              <a:t>Un index scan desciende por el indice y, por cada coincidencia, va a buscar la fila a la tabla, lo cual son lecturas dispersas.</a:t>
+            </a:r>
+          </a:p>
+          <a:p>
+            <a:r>
+              <a:t>Las cuentas de la base de la clase: cita con 30.010 filas de unos 60 bytes ocupa del orden de 2 MB, unas 230 a 250 paginas de 8 KB —el numero exacto lo dice el Buffers del EXPLAIN, no hace falta estimarlo—</a:t>
+            </a:r>
+          </a:p>
+          <a:p>
+            <a:r>
+              <a:t>Y el Seq Scan cuesta esas paginas; buscar el 2026-03-10 por un indice sobre fecha_hora costaria 2 o 3 lecturas para bajar el arbol mas una por cada una de las 150 filas del dia, unas 153 en total.</a:t>
+            </a:r>
+          </a:p>
+          <a:p>
+            <a:r>
+              <a:t>Aqui hay que ser honesto y es mas interesante que la caricatura: a este volumen el indice no es veinte veces mejor, es del mismo orden de magnitud</a:t>
+            </a:r>
+          </a:p>
+          <a:p>
+            <a:r>
+              <a:t>Y medido en la unidad del planeador —donde una pagina dispersa vale cuatro secuenciales— puede incluso salir perdiendo.</a:t>
+            </a:r>
+          </a:p>
+          <a:p>
+            <a:r>
+              <a:t>La ventaja del indice crece con el tamano, no con el porcentaje: si la clínica acumulara 300.000 citas, el Seq Scan pasaria a 2.400 paginas y el indice seguiria costando unas 153, y ahi si son dieciseis veces menos.</a:t>
+            </a:r>
+          </a:p>
+          <a:p>
+            <a:r>
+              <a:t>Sobre 20 filas todo es instantaneo y todo se resuelve con Seq Scan, porque una tabla de 20 filas ocupa una sola pagina y no hay plan mas barato que leer una pagina</a:t>
+            </a:r>
+          </a:p>
+          <a:p>
+            <a:r>
+              <a:t>En ese tamano la consulta pesima y la optima miden lo mismo, entre 0,02 y 0,3 milisegundos, y la diferencia se esconde en el ruido de medicion.</a:t>
+            </a:r>
+          </a:p>
+          <a:p>
+            <a:r>
+              <a:t>Optimizar sobre 20 filas no es optimizar: es adivinar.</a:t>
+            </a:r>
+          </a:p>
+          <a:p>
+            <a:r>
+              <a:t>Justamente por eso hoy no se mide sobre la base propia sino sobre una base sembrada con 30.010 citas, y por eso el script de la demo tambien las siembra: para que el docente y el estudiante midan sobre lo mismo.</a:t>
+            </a:r>
+          </a:p>
+          <a:p>
+            <a:r>
+              <a:t>Si alguien pide medir en su propia base, la respuesta es que primero tiene que fabricar volumen con generate_series, y que sin eso los numeros que reporte no significan nada.</a:t>
             </a:r>
           </a:p>
           <a:p>
@@ -2016,12 +1658,17 @@
           </a:p>
           <a:p>
             <a:r>
-              <a:t>Dos terminos explican por que el motor decide lo que decide.</a:t>
-            </a:r>
-          </a:p>
-          <a:p>
-            <a:r>
-              <a:t>Fuera de la lamina (habla de la practica): Los dos filtros juntos dejan 91 filas de 30.010, el 0,3 %, y ese 91 es el numero que el estudiante tiene que ver dos veces en la pregunta 1.</a:t>
+              <a:t>Con eso se explica full table scan contra index scan sin caricaturas.</a:t>
+            </a:r>
+          </a:p>
+          <a:p>
+            <a:r>
+              <a:t>Por eso la Clase 7 tiene que MEDIRLO y no suponerlo.</a:t>
+            </a:r>
+          </a:p>
+          <a:p>
+            <a:r>
+              <a:t>Y aqui esta el punto pedagogico central, que cambio de sitio y hay que decirlo bien: el problema de las 20 filas es el de la base propia del estudiante, la que cargo en la Clase 1, no el de la clase.</a:t>
             </a:r>
           </a:p>
         </p:txBody>
@@ -2096,62 +1743,52 @@
           </a:p>
           <a:p>
             <a:r>
-              <a:t>Un full table scan, que en PostgreSQL se imprime Seq Scan y en Oracle TABLE ACCESS FULL, lee todos los bloques de principio a fin y descarta en memoria lo que no cumple el filtro; su ventaja es que la lectura es secuencial.</a:t>
-            </a:r>
-          </a:p>
-          <a:p>
-            <a:r>
-              <a:t>Un index scan desciende por el indice y, por cada coincidencia, va a buscar la fila a la tabla, lo cual son lecturas dispersas.</a:t>
-            </a:r>
-          </a:p>
-          <a:p>
-            <a:r>
-              <a:t>Las cuentas de la base de la clase: cita con 30.010 filas de unos 60 bytes ocupa del orden de 2 MB, unas 230 a 250 paginas de 8 KB —el numero exacto lo dice el Buffers del EXPLAIN, no hace falta estimarlo—</a:t>
-            </a:r>
-          </a:p>
-          <a:p>
-            <a:r>
-              <a:t>Y el Seq Scan cuesta esas paginas; buscar el 2026-03-10 por un indice sobre fecha_hora costaria 2 o 3 lecturas para bajar el arbol mas una por cada una de las 150 filas del dia, unas 153 en total.</a:t>
-            </a:r>
-          </a:p>
-          <a:p>
-            <a:r>
-              <a:t>Aqui hay que ser honesto y es mas interesante que la caricatura: a este volumen el indice no es veinte veces mejor, es del mismo orden de magnitud</a:t>
-            </a:r>
-          </a:p>
-          <a:p>
-            <a:r>
-              <a:t>Y medido en la unidad del planeador —donde una pagina dispersa vale cuatro secuenciales— puede incluso salir perdiendo.</a:t>
-            </a:r>
-          </a:p>
-          <a:p>
-            <a:r>
-              <a:t>La ventaja del indice crece con el tamano, no con el porcentaje: si la clínica acumulara 300.000 citas, el Seq Scan pasaria a 2.400 paginas y el indice seguiria costando unas 153, y ahi si son dieciseis veces menos.</a:t>
-            </a:r>
-          </a:p>
-          <a:p>
-            <a:r>
-              <a:t>Sobre 20 filas todo es instantaneo y todo se resuelve con Seq Scan, porque una tabla de 20 filas ocupa una sola pagina y no hay plan mas barato que leer una pagina</a:t>
-            </a:r>
-          </a:p>
-          <a:p>
-            <a:r>
-              <a:t>En ese tamano la consulta pesima y la optima miden lo mismo, entre 0,02 y 0,3 milisegundos, y la diferencia se esconde en el ruido de medicion.</a:t>
-            </a:r>
-          </a:p>
-          <a:p>
-            <a:r>
-              <a:t>Optimizar sobre 20 filas no es optimizar: es adivinar.</a:t>
-            </a:r>
-          </a:p>
-          <a:p>
-            <a:r>
-              <a:t>Justamente por eso hoy no se mide sobre la base propia sino sobre una base sembrada con 30.010 citas, y por eso el script de la demo tambien las siembra: para que el docente y el estudiante midan sobre lo mismo.</a:t>
-            </a:r>
-          </a:p>
-          <a:p>
-            <a:r>
-              <a:t>Si alguien pide medir en su propia base, la respuesta es que primero tiene que fabricar volumen con generate_series, y que sin eso los numeros que reporte no significan nada.</a:t>
+              <a:t>Un predicado es sargable, de Search ARGument ABLE, cuando el motor puede resolverlo navegando un indice, y para eso la columna indexada debe aparecer sola a un lado de la comparacion.</a:t>
+            </a:r>
+          </a:p>
+          <a:p>
+            <a:r>
+              <a:t>Las dos formas no sargables estan las dos en la consulta ANTES de la clase: to_char(c.fecha_hora, 'YYYY-MM-DD') = '2026-03-10' y UPPER(c.estado) = 'PROGRAMADA'.</a:t>
+            </a:r>
+          </a:p>
+          <a:p>
+            <a:r>
+              <a:t>Ninguna de las dos puede usar un indice sobre esa columna, porque el indice guarda el valor tal como se escribio y el motor no puede saber, sin evaluar la funcion, cuales entradas darian ese resultado; asi que la evalua 30.010 veces, una por fila.</a:t>
+            </a:r>
+          </a:p>
+          <a:p>
+            <a:r>
+              <a:t>WHERE UPPER(m.nombre) = 'LUNA' es el mismo caso frente a un indice sobre mascota(nombre) y obliga a aplicar la funcion a las 5.008 filas.</a:t>
+            </a:r>
+          </a:p>
+          <a:p>
+            <a:r>
+              <a:t>Igual ocurre con WHERE EXTRACT(YEAR FROM c.fecha_hora) = 2026, con WHERE SUBSTR(d.telefono, 1, 3) = '300' y con la conversion implicita: si id_mascota es numerico y se escribe WHERE c.id_mascota = '10', algunos motores convierten la columna y no el literal.</a:t>
+            </a:r>
+          </a:p>
+          <a:p>
+            <a:r>
+              <a:t>La reescritura correcta casi siempre es un rango: WHERE c.fecha_hora &gt;= TIMESTAMP '2026-03-10 00:00:00' AND c.fecha_hora &lt; TIMESTAMP '2026-03-11 00:00:00'.</a:t>
+            </a:r>
+          </a:p>
+          <a:p>
+            <a:r>
+              <a:t>Un caso mas: LIKE 'Lu%' si usa indice porque el comodin va al final, y LIKE '%una%' no, porque no hay prefijo por donde bajar el arbol.</a:t>
+            </a:r>
+          </a:p>
+          <a:p>
+            <a:r>
+              <a:t>Cuando la funcion es necesaria para el negocio existe la salida de la clase siguiente, el indice funcional,, que existe en PostgreSQL y en Oracle; hoy se menciona solo como adelanto, para que nadie crea que las funciones estan prohibidas en el WHERE.</a:t>
+            </a:r>
+          </a:p>
+          <a:p>
+            <a:r>
+              <a:t>Y hay que cerrar con la verdad incomoda, que es el mejor bono conceptual de la clase: hoy el rango tampoco evita el Seq Scan</a:t>
+            </a:r>
+          </a:p>
+          <a:p>
+            <a:r>
+              <a:t>Porque en esta base no hay ningun indice sobre fecha_hora; lo que gana el rango hoy es dejar de calcular la funcion 30.010 veces y darle al planeador una estimacion correcta de cuantas filas van a pasar.</a:t>
             </a:r>
           </a:p>
           <a:p>
@@ -2161,17 +1798,22 @@
           </a:p>
           <a:p>
             <a:r>
-              <a:t>Con eso se explica full table scan contra index scan sin caricaturas.</a:t>
-            </a:r>
-          </a:p>
-          <a:p>
-            <a:r>
-              <a:t>Por eso la Clase 7 tiene que MEDIRLO y no suponerlo.</a:t>
-            </a:r>
-          </a:p>
-          <a:p>
-            <a:r>
-              <a:t>Y aqui esta el punto pedagogico central, que cambio de sitio y hay que decirlo bien: el problema de las 20 filas es el de la base propia del estudiante, la que cargo en la Clase 1, no el de la clase.</a:t>
+              <a:t>El caso de UPPER(c.estado) tiene una reescritura mas simple todavia y hay que decirla porque el estudiante duda: se elimina la funcion, porque el dominio ya esta normalizado por el CHECK (estado IN ('PROGRAMADA','ATENDIDA','CANCELADA')), de modo que no existe ninguna fila en minusculas que UPPER pudiera rescatar.</a:t>
+            </a:r>
+          </a:p>
+          <a:p>
+            <a:r>
+              <a:t>CÓDIGO CITADO (referencia):</a:t>
+            </a:r>
+          </a:p>
+          <a:p>
+            <a:r>
+              <a:t>CREATE INDEX idx_mascota_nombre_upper ON mascota (UPPER(nombre))</a:t>
+            </a:r>
+          </a:p>
+          <a:p>
+            <a:r>
+              <a:t>Fuera de la lamina (habla de la practica): El antipatron de la funcion sobre la columna merece parrafo propio porque conecta con la Clase 7 y porque es el que la pregunta 4 pone de primero.</a:t>
             </a:r>
           </a:p>
         </p:txBody>
@@ -2246,52 +1888,67 @@
           </a:p>
           <a:p>
             <a:r>
-              <a:t>Un predicado es sargable, de Search ARGument ABLE, cuando el motor puede resolverlo navegando un indice, y para eso la columna indexada debe aparecer sola a un lado de la comparacion.</a:t>
-            </a:r>
-          </a:p>
-          <a:p>
-            <a:r>
-              <a:t>Las dos formas no sargables estan las dos en la consulta ANTES de la clase: to_char(c.fecha_hora, 'YYYY-MM-DD') = '2026-03-10' y UPPER(c.estado) = 'PROGRAMADA'.</a:t>
-            </a:r>
-          </a:p>
-          <a:p>
-            <a:r>
-              <a:t>Ninguna de las dos puede usar un indice sobre esa columna, porque el indice guarda el valor tal como se escribio y el motor no puede saber, sin evaluar la funcion, cuales entradas darian ese resultado; asi que la evalua 30.010 veces, una por fila.</a:t>
-            </a:r>
-          </a:p>
-          <a:p>
-            <a:r>
-              <a:t>WHERE UPPER(m.nombre) = 'LUNA' es el mismo caso frente a un indice sobre mascota(nombre) y obliga a aplicar la funcion a las 5.008 filas.</a:t>
-            </a:r>
-          </a:p>
-          <a:p>
-            <a:r>
-              <a:t>Igual ocurre con WHERE EXTRACT(YEAR FROM c.fecha_hora) = 2026, con WHERE SUBSTR(d.telefono, 1, 3) = '300' y con la conversion implicita: si id_mascota es numerico y se escribe WHERE c.id_mascota = '10', algunos motores convierten la columna y no el literal.</a:t>
-            </a:r>
-          </a:p>
-          <a:p>
-            <a:r>
-              <a:t>La reescritura correcta casi siempre es un rango: WHERE c.fecha_hora &gt;= TIMESTAMP '2026-03-10 00:00:00' AND c.fecha_hora &lt; TIMESTAMP '2026-03-11 00:00:00'.</a:t>
-            </a:r>
-          </a:p>
-          <a:p>
-            <a:r>
-              <a:t>Un caso mas: LIKE 'Lu%' si usa indice porque el comodin va al final, y LIKE '%una%' no, porque no hay prefijo por donde bajar el arbol.</a:t>
-            </a:r>
-          </a:p>
-          <a:p>
-            <a:r>
-              <a:t>Cuando la funcion es necesaria para el negocio existe la salida de la clase siguiente, el indice funcional,, que existe en PostgreSQL y en Oracle; hoy se menciona solo como adelanto, para que nadie crea que las funciones estan prohibidas en el WHERE.</a:t>
-            </a:r>
-          </a:p>
-          <a:p>
-            <a:r>
-              <a:t>Y hay que cerrar con la verdad incomoda, que es el mejor bono conceptual de la clase: hoy el rango tampoco evita el Seq Scan</a:t>
-            </a:r>
-          </a:p>
-          <a:p>
-            <a:r>
-              <a:t>Porque en esta base no hay ningun indice sobre fecha_hora; lo que gana el rango hoy es dejar de calcular la funcion 30.010 veces y darle al planeador una estimacion correcta de cuantas filas van a pasar.</a:t>
+              <a:t>Una subconsulta es correlacionada cuando menciona una columna de la consulta exterior; si ademas esta en la lista de columnas, el motor no puede calcularla una vez y reusarla</a:t>
+            </a:r>
+          </a:p>
+          <a:p>
+            <a:r>
+              <a:t>Porque depende de la fila que se este mirando, asi que la ejecuta una vez por cada fila del exterior.</a:t>
+            </a:r>
+          </a:p>
+          <a:p>
+            <a:r>
+              <a:t>El reporte de ranking de duenos de la clase la tiene: (SELECT COUNT(*) FROM cita c JOIN mascota m ON m.id_mascota = c.id_mascota WHERE m.id_dueno = d.id_dueno) AS total_citas, con FROM dueno d.</a:t>
+            </a:r>
+          </a:p>
+          <a:p>
+            <a:r>
+              <a:t>Como hay 2.006 duenos, se ejecuta 2.006 veces, y cada ejecucion recorre mascota y cita completas: del orden de 70 millones de filas procesadas para producir 2.006.</a:t>
+            </a:r>
+          </a:p>
+          <a:p>
+            <a:r>
+              <a:t>El plan lo dice con un nodo SubPlan y con loops=2006, y loops es el unico lugar del plan donde se lee «esto se repitio»</a:t>
+            </a:r>
+          </a:p>
+          <a:p>
+            <a:r>
+              <a:t>Si el docente no ensena a buscar ese campo, el estudiante va a senalar como nodo mas costoso el Seq Scan de arriba, que aparece con un tiempo mayor solo porque incluye a sus hijos.</a:t>
+            </a:r>
+          </a:p>
+          <a:p>
+            <a:r>
+              <a:t>La reescritura es dueno LEFT JOIN mascota LEFT JOIN cita, con GROUP BY d.id_dueno, d.nombre y COUNT(c.id_cita): el SubPlan desaparece y en su lugar queda un HashAggregate sobre una sola pasada.</a:t>
+            </a:r>
+          </a:p>
+          <a:p>
+            <a:r>
+              <a:t>Es la unica mejora del dia que es de ordenes de magnitud, y no necesita ningun indice, porque lo que se elimino no fue un escaneo sino 2.005 escaneos.</a:t>
+            </a:r>
+          </a:p>
+          <a:p>
+            <a:r>
+              <a:t>Primero, COUNT(c.id_cita) y nunca COUNT(*): el LEFT JOIN fabrica una fila llena de NULL por cada dueno que no tiene citas, COUNT(*) cuenta filas y reportaria 1, y COUNT de una columna ignora los NULL y reporta 0.</a:t>
+            </a:r>
+          </a:p>
+          <a:p>
+            <a:r>
+              <a:t>El sintoma es exacto y se puede proyectar en treinta segundos: los duenos 2001 a 2006 de la base de la clase no tienen mascotas, asi que su respuesta correcta es 0 y con COUNT(*) dicen 1.</a:t>
+            </a:r>
+          </a:p>
+          <a:p>
+            <a:r>
+              <a:t>Segundo, LEFT y no INNER: el INNER JOIN es mas rapido y esta mal, porque borra del ranking a esos seis duenos y el reporte deja de cuadrar con el total de clientes de la clinica.</a:t>
+            </a:r>
+          </a:p>
+          <a:p>
+            <a:r>
+              <a:t>Mas rapido devolviendo otra cosa no es optimizar, y esa frase es la bisagra con la seccion siguiente.</a:t>
+            </a:r>
+          </a:p>
+          <a:p>
+            <a:r>
+              <a:t>Salida esperada: los dos rankings devuelven las mismas filas, los duenos sin citas aparecen con 0 en los dos, y el plan de la reescritura ya no muestra un nodo repetido 2.006 veces.</a:t>
             </a:r>
           </a:p>
           <a:p>
@@ -2301,22 +1958,27 @@
           </a:p>
           <a:p>
             <a:r>
-              <a:t>El caso de UPPER(c.estado) tiene una reescritura mas simple todavia y hay que decirla porque el estudiante duda: se elimina la funcion, porque el dominio ya esta normalizado por el CHECK (estado IN ('PROGRAMADA','ATENDIDA','CANCELADA')), de modo que no existe ninguna fila en minusculas que UPPER pudiera rescatar.</a:t>
-            </a:r>
-          </a:p>
-          <a:p>
-            <a:r>
-              <a:t>CÓDIGO CITADO (referencia):</a:t>
-            </a:r>
-          </a:p>
-          <a:p>
-            <a:r>
-              <a:t>CREATE INDEX idx_mascota_nombre_upper ON mascota (UPPER(nombre))</a:t>
-            </a:r>
-          </a:p>
-          <a:p>
-            <a:r>
-              <a:t>Fuera de la lamina (habla de la practica): El antipatron de la funcion sobre la columna merece parrafo propio porque conecta con la Clase 7 y porque es el que la pregunta 4 pone de primero.</a:t>
+              <a:t>Aviso operativo que hay que dar antes de que el grupo empiece, porque si no media clase recarga la pagina y pierde sus respuestas: la version ANTES de esta pregunta ejecuta 2.006 veces una consulta que recorre 30.010 filas, y en el navegador puede tardar de varios segundos a mas de un minuto.</a:t>
+            </a:r>
+          </a:p>
+          <a:p>
+            <a:r>
+              <a:t>No esta colgada.</a:t>
+            </a:r>
+          </a:p>
+          <a:p>
+            <a:r>
+              <a:t>En la demo en vivo, si el docente no quiere esperar, la variante honesta es correr la version ANTES con WHERE d.id_dueno &lt;= 200 en el exterior, mostrar que el plan dice loops=200 y decir en voz alta que la version completa es diez veces esa; lo que no se puede hacer es saltarse la medicion y afirmar el resultado.</a:t>
+            </a:r>
+          </a:p>
+          <a:p>
+            <a:r>
+              <a:t>Fuera de la lamina (habla de la practica): Es la pregunta 3, otros 20 puntos, y la cuarta afirmacion de la pregunta 4 dice lo mismo.</a:t>
+            </a:r>
+          </a:p>
+          <a:p>
+            <a:r>
+              <a:t>Fuera de la lamina (habla de la practica): Dos detalles que valen puntos y que el docente tiene que poder justificar en el momento.</a:t>
             </a:r>
           </a:p>
         </p:txBody>
@@ -2391,67 +2053,32 @@
           </a:p>
           <a:p>
             <a:r>
-              <a:t>Una subconsulta es correlacionada cuando menciona una columna de la consulta exterior; si ademas esta en la lista de columnas, el motor no puede calcularla una vez y reusarla</a:t>
-            </a:r>
-          </a:p>
-          <a:p>
-            <a:r>
-              <a:t>Porque depende de la fila que se este mirando, asi que la ejecuta una vez por cada fila del exterior.</a:t>
-            </a:r>
-          </a:p>
-          <a:p>
-            <a:r>
-              <a:t>El reporte de ranking de duenos de la clase la tiene: (SELECT COUNT(*) FROM cita c JOIN mascota m ON m.id_mascota = c.id_mascota WHERE m.id_dueno = d.id_dueno) AS total_citas, con FROM dueno d.</a:t>
-            </a:r>
-          </a:p>
-          <a:p>
-            <a:r>
-              <a:t>Como hay 2.006 duenos, se ejecuta 2.006 veces, y cada ejecucion recorre mascota y cita completas: del orden de 70 millones de filas procesadas para producir 2.006.</a:t>
-            </a:r>
-          </a:p>
-          <a:p>
-            <a:r>
-              <a:t>El plan lo dice con un nodo SubPlan y con loops=2006, y loops es el unico lugar del plan donde se lee «esto se repitio»</a:t>
-            </a:r>
-          </a:p>
-          <a:p>
-            <a:r>
-              <a:t>Si el docente no ensena a buscar ese campo, el estudiante va a senalar como nodo mas costoso el Seq Scan de arriba, que aparece con un tiempo mayor solo porque incluye a sus hijos.</a:t>
-            </a:r>
-          </a:p>
-          <a:p>
-            <a:r>
-              <a:t>La reescritura es dueno LEFT JOIN mascota LEFT JOIN cita, con GROUP BY d.id_dueno, d.nombre y COUNT(c.id_cita): el SubPlan desaparece y en su lugar queda un HashAggregate sobre una sola pasada.</a:t>
-            </a:r>
-          </a:p>
-          <a:p>
-            <a:r>
-              <a:t>Es la unica mejora del dia que es de ordenes de magnitud, y no necesita ningun indice, porque lo que se elimino no fue un escaneo sino 2.005 escaneos.</a:t>
-            </a:r>
-          </a:p>
-          <a:p>
-            <a:r>
-              <a:t>Primero, COUNT(c.id_cita) y nunca COUNT(*): el LEFT JOIN fabrica una fila llena de NULL por cada dueno que no tiene citas, COUNT(*) cuenta filas y reportaria 1, y COUNT de una columna ignora los NULL y reporta 0.</a:t>
-            </a:r>
-          </a:p>
-          <a:p>
-            <a:r>
-              <a:t>El sintoma es exacto y se puede proyectar en treinta segundos: los duenos 2001 a 2006 de la base de la clase no tienen mascotas, asi que su respuesta correcta es 0 y con COUNT(*) dicen 1.</a:t>
-            </a:r>
-          </a:p>
-          <a:p>
-            <a:r>
-              <a:t>Segundo, LEFT y no INNER: el INNER JOIN es mas rapido y esta mal, porque borra del ranking a esos seis duenos y el reporte deja de cuadrar con el total de clientes de la clinica.</a:t>
-            </a:r>
-          </a:p>
-          <a:p>
-            <a:r>
-              <a:t>Mas rapido devolviendo otra cosa no es optimizar, y esa frase es la bisagra con la seccion siguiente.</a:t>
-            </a:r>
-          </a:p>
-          <a:p>
-            <a:r>
-              <a:t>Salida esperada: los dos rankings devuelven las mismas filas, los duenos sin citas aparecen con 0 en los dos, y el plan de la reescritura ya no muestra un nodo repetido 2.006 veces.</a:t>
+              <a:t>Correccion y tiempo son ejes independientes, y la consecuencia practica es que una version «optimizada» que devuelve algo distinto no es una optimizacion peor: no es una optimizacion.</a:t>
+            </a:r>
+          </a:p>
+          <a:p>
+            <a:r>
+              <a:t>Para una consulta con filtro sirve el conteo: se envuelve cada version en un SELECT COUNT(*) y se comparan los dos numeros en la misma corrida, y en la agenda del 2026-03-10 las dos tienen que decir 91.</a:t>
+            </a:r>
+          </a:p>
+          <a:p>
+            <a:r>
+              <a:t>Un conteo distinto no es una version mas rapida, es la respuesta equivocada.</a:t>
+            </a:r>
+          </a:p>
+          <a:p>
+            <a:r>
+              <a:t>La prueba va sin LIMIT, porque comparar solo las primeras 20 filas deja fuera justamente las que fallan, que son las de los duenos con cero citas.</a:t>
+            </a:r>
+          </a:p>
+          <a:p>
+            <a:r>
+              <a:t>EXCEPT elimina duplicados, de modo que si el conjunto puede traer filas repetidas hay que usar EXCEPT ALL o incluir la llave; en el ranking de la clase no ocurre, porque hay una fila por dueno.</a:t>
+            </a:r>
+          </a:p>
+          <a:p>
+            <a:r>
+              <a:t>Y no cuentan como prueba «se ve igual», «trae mas o menos lo mismo» ni mirar la primera pantalla de resultados: la equivalencia se afirma con una consulta cuyo resultado se conoce de antemano, un numero que coincide o un conjunto vacio.</a:t>
             </a:r>
           </a:p>
           <a:p>
@@ -2461,27 +2088,22 @@
           </a:p>
           <a:p>
             <a:r>
-              <a:t>Aviso operativo que hay que dar antes de que el grupo empiece, porque si no media clase recarga la pagina y pierde sus respuestas: la version ANTES de esta pregunta ejecuta 2.006 veces una consulta que recorre 30.010 filas, y en el navegador puede tardar de varios segundos a mas de un minuto.</a:t>
-            </a:r>
-          </a:p>
-          <a:p>
-            <a:r>
-              <a:t>No esta colgada.</a:t>
-            </a:r>
-          </a:p>
-          <a:p>
-            <a:r>
-              <a:t>En la demo en vivo, si el docente no quiere esperar, la variante honesta es correr la version ANTES con WHERE d.id_dueno &lt;= 200 en el exterior, mostrar que el plan dice loops=200 y decir en voz alta que la version completa es diez veces esa; lo que no se puede hacer es saltarse la medicion y afirmar el resultado.</a:t>
-            </a:r>
-          </a:p>
-          <a:p>
-            <a:r>
-              <a:t>Fuera de la lamina (habla de la practica): Es la pregunta 3, otros 20 puntos, y la cuarta afirmacion de la pregunta 4 dice lo mismo.</a:t>
-            </a:r>
-          </a:p>
-          <a:p>
-            <a:r>
-              <a:t>Fuera de la lamina (habla de la practica): Dos detalles que valen puntos y que el docente tiene que poder justificar en el momento.</a:t>
+              <a:t>Y se rompe sin avisar, porque ningun motor va a lanzar un error por eso.</a:t>
+            </a:r>
+          </a:p>
+          <a:p>
+            <a:r>
+              <a:t>Para conjuntos completos, donde el conteo puede coincidir con filas distintas, se usa EXCEPT en los DOS sentidos, y el docente tiene que saber por que son dos: A EXCEPT B devuelve lo que esta en A y no esta en B, asi que si sale vacio todavia puede haber filas de mas en B; se corren las dos direcciones unidas con UNION ALL y se exige cero filas en total.</a:t>
+            </a:r>
+          </a:p>
+          <a:p>
+            <a:r>
+              <a:t>Fuera de la lamina (habla de la practica): Por eso el taller cobra la prueba dos veces, unos 6 de los 100 puntos, y hay dos formas segun lo que se compare.</a:t>
+            </a:r>
+          </a:p>
+          <a:p>
+            <a:r>
+              <a:t>Fuera de la lamina (habla de la practica): Tres advertencias al calificar.</a:t>
             </a:r>
           </a:p>
         </p:txBody>
@@ -11897,118 +11519,14 @@
       </p:sp>
       <p:sp>
         <p:nvSpPr>
-          <p:cNvPr id="6" name="Rounded Rectangle 5"/>
-          <p:cNvSpPr/>
-          <p:nvPr/>
-        </p:nvSpPr>
-        <p:spPr>
-          <a:xfrm>
-            <a:off x="5797149" y="1436512"/>
-            <a:ext cx="6010497" cy="4542758"/>
-          </a:xfrm>
-          <a:prstGeom prst="roundRect">
-            <a:avLst>
-              <a:gd name="adj" fmla="val 4000"/>
-            </a:avLst>
-          </a:prstGeom>
-          <a:solidFill>
-            <a:srgbClr val="E8EEF4"/>
-          </a:solidFill>
-          <a:ln>
-            <a:noFill/>
-          </a:ln>
-        </p:spPr>
-        <p:style>
-          <a:lnRef idx="1">
-            <a:schemeClr val="accent1"/>
-          </a:lnRef>
-          <a:fillRef idx="3">
-            <a:schemeClr val="accent1"/>
-          </a:fillRef>
-          <a:effectRef idx="2">
-            <a:schemeClr val="accent1"/>
-          </a:effectRef>
-          <a:fontRef idx="minor">
-            <a:schemeClr val="lt1"/>
-          </a:fontRef>
-        </p:style>
-        <p:txBody>
-          <a:bodyPr rtlCol="0" anchor="ctr"/>
-          <a:lstStyle/>
-          <a:p>
-            <a:pPr algn="ctr"/>
-          </a:p>
-        </p:txBody>
-      </p:sp>
-      <p:pic>
-        <p:nvPicPr>
-          <p:cNvPr id="7" name="Picture 6" descr="loop-roller-coaster.jpg"/>
-          <p:cNvPicPr>
-            <a:picLocks noChangeAspect="1"/>
-          </p:cNvPicPr>
-          <p:nvPr/>
-        </p:nvPicPr>
-        <p:blipFill>
-          <a:blip r:embed="rId2"/>
-          <a:stretch>
-            <a:fillRect/>
-          </a:stretch>
-        </p:blipFill>
-        <p:spPr>
-          <a:xfrm>
-            <a:off x="5870301" y="1509664"/>
-            <a:ext cx="5864193" cy="4396454"/>
-          </a:xfrm>
-          <a:prstGeom prst="rect">
-            <a:avLst/>
-          </a:prstGeom>
-        </p:spPr>
-      </p:pic>
-      <p:sp>
-        <p:nvSpPr>
-          <p:cNvPr id="8" name="TextBox 7"/>
+          <p:cNvPr id="6" name="TextBox 5"/>
           <p:cNvSpPr txBox="1"/>
           <p:nvPr/>
         </p:nvSpPr>
         <p:spPr>
           <a:xfrm>
-            <a:off x="5870301" y="5961888"/>
-            <a:ext cx="5864193" cy="320040"/>
-          </a:xfrm>
-          <a:prstGeom prst="rect">
-            <a:avLst/>
-          </a:prstGeom>
-          <a:noFill/>
-        </p:spPr>
-        <p:txBody>
-          <a:bodyPr wrap="square">
-            <a:spAutoFit/>
-          </a:bodyPr>
-          <a:lstStyle/>
-          <a:p>
-            <a:pPr algn="ctr"/>
-            <a:r>
-              <a:rPr sz="1100" b="0" i="1">
-                <a:solidFill>
-                  <a:srgbClr val="666666"/>
-                </a:solidFill>
-                <a:latin typeface="Calibri"/>
-              </a:rPr>
-              <a:t>Foto: Dam Design Lab · Pexels</a:t>
-            </a:r>
-          </a:p>
-        </p:txBody>
-      </p:sp>
-      <p:sp>
-        <p:nvSpPr>
-          <p:cNvPr id="9" name="TextBox 8"/>
-          <p:cNvSpPr txBox="1"/>
-          <p:nvPr/>
-        </p:nvSpPr>
-        <p:spPr>
-          <a:xfrm>
-            <a:off x="457200" y="1563624"/>
-            <a:ext cx="5093061" cy="4837176"/>
+            <a:off x="457200" y="1380744"/>
+            <a:ext cx="11277295" cy="5020056"/>
           </a:xfrm>
           <a:prstGeom prst="rect">
             <a:avLst/>
@@ -12027,7 +11545,7 @@
               </a:spcAft>
             </a:pPr>
             <a:r>
-              <a:rPr sz="2000" b="0" i="0">
+              <a:rPr sz="1800" b="0" i="0">
                 <a:solidFill>
                   <a:srgbClr val="333333"/>
                 </a:solidFill>
@@ -12036,7 +11554,7 @@
               <a:t>–   </a:t>
             </a:r>
             <a:r>
-              <a:rPr sz="2000" b="1" i="0">
+              <a:rPr sz="1800" b="1" i="0">
                 <a:solidFill>
                   <a:srgbClr val="333333"/>
                 </a:solidFill>
@@ -12045,7 +11563,7 @@
               <a:t>Que la hace correlacionada.</a:t>
             </a:r>
             <a:r>
-              <a:rPr sz="2000" b="0" i="0">
+              <a:rPr sz="1800" b="0" i="0">
                 <a:solidFill>
                   <a:srgbClr val="333333"/>
                 </a:solidFill>
@@ -12054,7 +11572,7 @@
               <a:t> La subconsulta esta en la </a:t>
             </a:r>
             <a:r>
-              <a:rPr sz="2000" b="1" i="0">
+              <a:rPr sz="1800" b="1" i="0">
                 <a:solidFill>
                   <a:srgbClr val="333333"/>
                 </a:solidFill>
@@ -12063,13 +11581,31 @@
               <a:t>lista de columnas</a:t>
             </a:r>
             <a:r>
-              <a:rPr sz="2000" b="0" i="0">
+              <a:rPr sz="1800" b="0" i="0">
                 <a:solidFill>
                   <a:srgbClr val="333333"/>
                 </a:solidFill>
                 <a:latin typeface="Calibri"/>
               </a:rPr>
-              <a:t> y menciona una columna del exterior («WHERE m.id_dueno = d.id_dueno»).</a:t>
+              <a:t> y menciona una columna del exterior («WHERE m.id_dueno = d.id_dueno»). No se puede calcular una vez y reusar: depende de la fila que se este mirando, asi que el motor </a:t>
+            </a:r>
+            <a:r>
+              <a:rPr sz="1800" b="1" i="0">
+                <a:solidFill>
+                  <a:srgbClr val="333333"/>
+                </a:solidFill>
+                <a:latin typeface="Calibri"/>
+              </a:rPr>
+              <a:t>la ejecuta una vez por fila</a:t>
+            </a:r>
+            <a:r>
+              <a:rPr sz="1800" b="0" i="0">
+                <a:solidFill>
+                  <a:srgbClr val="333333"/>
+                </a:solidFill>
+                <a:latin typeface="Calibri"/>
+              </a:rPr>
+              <a:t> del exterior.</a:t>
             </a:r>
           </a:p>
           <a:p>
@@ -12079,7 +11615,7 @@
               </a:spcAft>
             </a:pPr>
             <a:r>
-              <a:rPr sz="2000" b="0" i="0">
+              <a:rPr sz="1800" b="0" i="0">
                 <a:solidFill>
                   <a:srgbClr val="333333"/>
                 </a:solidFill>
@@ -12088,7 +11624,7 @@
               <a:t>–   </a:t>
             </a:r>
             <a:r>
-              <a:rPr sz="2000" b="1" i="0">
+              <a:rPr sz="1800" b="1" i="0">
                 <a:solidFill>
                   <a:srgbClr val="333333"/>
                 </a:solidFill>
@@ -12097,7 +11633,7 @@
               <a:t>El numero que lo delata en el plan.</a:t>
             </a:r>
             <a:r>
-              <a:rPr sz="2000" b="0" i="0">
+              <a:rPr sz="1800" b="0" i="0">
                 <a:solidFill>
                   <a:srgbClr val="333333"/>
                 </a:solidFill>
@@ -12106,7 +11642,7 @@
               <a:t> «EXPLAIN ANALYZE» muestra un nodo «SubPlan» con </a:t>
             </a:r>
             <a:r>
-              <a:rPr sz="2000" b="1" i="0">
+              <a:rPr sz="1800" b="1" i="0">
                 <a:solidFill>
                   <a:srgbClr val="333333"/>
                 </a:solidFill>
@@ -12115,13 +11651,13 @@
               <a:t>«loops=2006»</a:t>
             </a:r>
             <a:r>
-              <a:rPr sz="2000" b="0" i="0">
+              <a:rPr sz="1800" b="0" i="0">
                 <a:solidFill>
                   <a:srgbClr val="333333"/>
                 </a:solidFill>
                 <a:latin typeface="Calibri"/>
               </a:rPr>
-              <a:t> — un dueno, una ejecucion.</a:t>
+              <a:t> — un dueno, una ejecucion. Y cada ejecucion recorre las 30.010 citas. «loops» es el campo que hay que buscar: es el unico lugar donde el plan dice «esto se repitio».</a:t>
             </a:r>
           </a:p>
           <a:p>
@@ -12131,7 +11667,7 @@
               </a:spcAft>
             </a:pPr>
             <a:r>
-              <a:rPr sz="2000" b="0" i="0">
+              <a:rPr sz="1800" b="0" i="0">
                 <a:solidFill>
                   <a:srgbClr val="333333"/>
                 </a:solidFill>
@@ -12140,7 +11676,7 @@
               <a:t>–   </a:t>
             </a:r>
             <a:r>
-              <a:rPr sz="2000" b="1" i="0">
+              <a:rPr sz="1800" b="1" i="0">
                 <a:solidFill>
                   <a:srgbClr val="333333"/>
                 </a:solidFill>
@@ -12149,20 +11685,178 @@
               <a:t>La reescritura.</a:t>
             </a:r>
             <a:r>
-              <a:rPr sz="2000" b="0" i="0">
+              <a:rPr sz="1800" b="0" i="0">
                 <a:solidFill>
                   <a:srgbClr val="333333"/>
                 </a:solidFill>
                 <a:latin typeface="Calibri"/>
               </a:rPr>
-              <a:t> «dueno LEFT JOIN mascota LEFT JOIN cita» + «GROUP BY d.id_dueno, d.nombre» + «COUNT(...)».</a:t>
-            </a:r>
-          </a:p>
-        </p:txBody>
-      </p:sp>
-      <p:sp>
-        <p:nvSpPr>
-          <p:cNvPr id="10" name="TextBox 9"/>
+              <a:t> «dueno LEFT JOIN mascota LEFT JOIN cita» + «GROUP BY d.id_dueno, d.nombre» + «COUNT(...)». El «SubPlan» desaparece y en su lugar queda un solo «HashAggregate»: </a:t>
+            </a:r>
+            <a:r>
+              <a:rPr sz="1800" b="1" i="0">
+                <a:solidFill>
+                  <a:srgbClr val="333333"/>
+                </a:solidFill>
+                <a:latin typeface="Calibri"/>
+              </a:rPr>
+              <a:t>una pasada</a:t>
+            </a:r>
+            <a:r>
+              <a:rPr sz="1800" b="0" i="0">
+                <a:solidFill>
+                  <a:srgbClr val="333333"/>
+                </a:solidFill>
+                <a:latin typeface="Calibri"/>
+              </a:rPr>
+              <a:t>. Es la unica mejora del dia que es de ordenes de magnitud, y no necesita ningun indice — lo que se elimino no fue un escaneo, fueron 2.005 escaneos.</a:t>
+            </a:r>
+          </a:p>
+          <a:p>
+            <a:pPr>
+              <a:spcAft>
+                <a:spcPts val="800"/>
+              </a:spcAft>
+            </a:pPr>
+            <a:r>
+              <a:rPr sz="1800" b="0" i="0">
+                <a:solidFill>
+                  <a:srgbClr val="333333"/>
+                </a:solidFill>
+                <a:latin typeface="Calibri"/>
+              </a:rPr>
+              <a:t>–   </a:t>
+            </a:r>
+            <a:r>
+              <a:rPr sz="1800" b="1" i="0">
+                <a:solidFill>
+                  <a:srgbClr val="333333"/>
+                </a:solidFill>
+                <a:latin typeface="Calibri"/>
+              </a:rPr>
+              <a:t>«COUNT(c.id_cita)», nunca «COUNT(*)».</a:t>
+            </a:r>
+            <a:r>
+              <a:rPr sz="1800" b="0" i="0">
+                <a:solidFill>
+                  <a:srgbClr val="333333"/>
+                </a:solidFill>
+                <a:latin typeface="Calibri"/>
+              </a:rPr>
+              <a:t> El «LEFT JOIN» fabrica </a:t>
+            </a:r>
+            <a:r>
+              <a:rPr sz="1800" b="1" i="0">
+                <a:solidFill>
+                  <a:srgbClr val="333333"/>
+                </a:solidFill>
+                <a:latin typeface="Calibri"/>
+              </a:rPr>
+              <a:t>una fila llena de «NULL»</a:t>
+            </a:r>
+            <a:r>
+              <a:rPr sz="1800" b="0" i="0">
+                <a:solidFill>
+                  <a:srgbClr val="333333"/>
+                </a:solidFill>
+                <a:latin typeface="Calibri"/>
+              </a:rPr>
+              <a:t> por cada dueno sin citas. «COUNT(*)» cuenta filas y reporta </a:t>
+            </a:r>
+            <a:r>
+              <a:rPr sz="1800" b="1" i="0">
+                <a:solidFill>
+                  <a:srgbClr val="333333"/>
+                </a:solidFill>
+                <a:latin typeface="Calibri"/>
+              </a:rPr>
+              <a:t>1</a:t>
+            </a:r>
+            <a:r>
+              <a:rPr sz="1800" b="0" i="0">
+                <a:solidFill>
+                  <a:srgbClr val="333333"/>
+                </a:solidFill>
+                <a:latin typeface="Calibri"/>
+              </a:rPr>
+              <a:t>; «COUNT» de una columna ignora los «NULL» y reporta </a:t>
+            </a:r>
+            <a:r>
+              <a:rPr sz="1800" b="1" i="0">
+                <a:solidFill>
+                  <a:srgbClr val="333333"/>
+                </a:solidFill>
+                <a:latin typeface="Calibri"/>
+              </a:rPr>
+              <a:t>0</a:t>
+            </a:r>
+            <a:r>
+              <a:rPr sz="1800" b="0" i="0">
+                <a:solidFill>
+                  <a:srgbClr val="333333"/>
+                </a:solidFill>
+                <a:latin typeface="Calibri"/>
+              </a:rPr>
+              <a:t>. El sintoma es exacto: los duenos sin citas dicen 1 en vez de 0.</a:t>
+            </a:r>
+          </a:p>
+          <a:p>
+            <a:pPr>
+              <a:spcAft>
+                <a:spcPts val="800"/>
+              </a:spcAft>
+            </a:pPr>
+            <a:r>
+              <a:rPr sz="1800" b="0" i="0">
+                <a:solidFill>
+                  <a:srgbClr val="333333"/>
+                </a:solidFill>
+                <a:latin typeface="Calibri"/>
+              </a:rPr>
+              <a:t>–   </a:t>
+            </a:r>
+            <a:r>
+              <a:rPr sz="1800" b="1" i="0">
+                <a:solidFill>
+                  <a:srgbClr val="333333"/>
+                </a:solidFill>
+                <a:latin typeface="Calibri"/>
+              </a:rPr>
+              <a:t>Y «LEFT», no «INNER».</a:t>
+            </a:r>
+            <a:r>
+              <a:rPr sz="1800" b="0" i="0">
+                <a:solidFill>
+                  <a:srgbClr val="333333"/>
+                </a:solidFill>
+                <a:latin typeface="Calibri"/>
+              </a:rPr>
+              <a:t> Un «INNER JOIN» es mas rapido y esta </a:t>
+            </a:r>
+            <a:r>
+              <a:rPr sz="1800" b="1" i="0">
+                <a:solidFill>
+                  <a:srgbClr val="333333"/>
+                </a:solidFill>
+                <a:latin typeface="Calibri"/>
+              </a:rPr>
+              <a:t>mal</a:t>
+            </a:r>
+            <a:r>
+              <a:rPr sz="1800" b="0" i="0">
+                <a:solidFill>
+                  <a:srgbClr val="333333"/>
+                </a:solidFill>
+                <a:latin typeface="Calibri"/>
+              </a:rPr>
+              <a:t>: borra del reporte a los duenos sin mascotas, y el ranking deja de cuadrar con el total de clientes de la clinica. Mas rapido devolviendo otra cosa no es optimizar.</a:t>
+            </a:r>
+          </a:p>
+        </p:txBody>
+      </p:sp>
+      <p:sp>
+        <p:nvSpPr>
+          <p:cNvPr id="7" name="TextBox 6"/>
           <p:cNvSpPr txBox="1"/>
           <p:nvPr/>
         </p:nvSpPr>
@@ -12917,118 +12611,14 @@
       </p:sp>
       <p:sp>
         <p:nvSpPr>
-          <p:cNvPr id="6" name="Rounded Rectangle 5"/>
-          <p:cNvSpPr/>
-          <p:nvPr/>
-        </p:nvSpPr>
-        <p:spPr>
-          <a:xfrm>
-            <a:off x="5797149" y="1678969"/>
-            <a:ext cx="6010497" cy="4057845"/>
-          </a:xfrm>
-          <a:prstGeom prst="roundRect">
-            <a:avLst>
-              <a:gd name="adj" fmla="val 4000"/>
-            </a:avLst>
-          </a:prstGeom>
-          <a:solidFill>
-            <a:srgbClr val="E8EEF4"/>
-          </a:solidFill>
-          <a:ln>
-            <a:noFill/>
-          </a:ln>
-        </p:spPr>
-        <p:style>
-          <a:lnRef idx="1">
-            <a:schemeClr val="accent1"/>
-          </a:lnRef>
-          <a:fillRef idx="3">
-            <a:schemeClr val="accent1"/>
-          </a:fillRef>
-          <a:effectRef idx="2">
-            <a:schemeClr val="accent1"/>
-          </a:effectRef>
-          <a:fontRef idx="minor">
-            <a:schemeClr val="lt1"/>
-          </a:fontRef>
-        </p:style>
-        <p:txBody>
-          <a:bodyPr rtlCol="0" anchor="ctr"/>
-          <a:lstStyle/>
-          <a:p>
-            <a:pPr algn="ctr"/>
-          </a:p>
-        </p:txBody>
-      </p:sp>
-      <p:pic>
-        <p:nvPicPr>
-          <p:cNvPr id="7" name="Picture 6" descr="scale-balance-equal.jpg"/>
-          <p:cNvPicPr>
-            <a:picLocks noChangeAspect="1"/>
-          </p:cNvPicPr>
-          <p:nvPr/>
-        </p:nvPicPr>
-        <p:blipFill>
-          <a:blip r:embed="rId2"/>
-          <a:stretch>
-            <a:fillRect/>
-          </a:stretch>
-        </p:blipFill>
-        <p:spPr>
-          <a:xfrm>
-            <a:off x="5870301" y="1752121"/>
-            <a:ext cx="5864193" cy="3911541"/>
-          </a:xfrm>
-          <a:prstGeom prst="rect">
-            <a:avLst/>
-          </a:prstGeom>
-        </p:spPr>
-      </p:pic>
-      <p:sp>
-        <p:nvSpPr>
-          <p:cNvPr id="8" name="TextBox 7"/>
+          <p:cNvPr id="6" name="TextBox 5"/>
           <p:cNvSpPr txBox="1"/>
           <p:nvPr/>
         </p:nvSpPr>
         <p:spPr>
           <a:xfrm>
-            <a:off x="5870301" y="5961888"/>
-            <a:ext cx="5864193" cy="320040"/>
-          </a:xfrm>
-          <a:prstGeom prst="rect">
-            <a:avLst/>
-          </a:prstGeom>
-          <a:noFill/>
-        </p:spPr>
-        <p:txBody>
-          <a:bodyPr wrap="square">
-            <a:spAutoFit/>
-          </a:bodyPr>
-          <a:lstStyle/>
-          <a:p>
-            <a:pPr algn="ctr"/>
-            <a:r>
-              <a:rPr sz="1100" b="0" i="1">
-                <a:solidFill>
-                  <a:srgbClr val="666666"/>
-                </a:solidFill>
-                <a:latin typeface="Calibri"/>
-              </a:rPr>
-              <a:t>Foto: KATRIN  BOLOVTSOVA · Pexels</a:t>
-            </a:r>
-          </a:p>
-        </p:txBody>
-      </p:sp>
-      <p:sp>
-        <p:nvSpPr>
-          <p:cNvPr id="9" name="TextBox 8"/>
-          <p:cNvSpPr txBox="1"/>
-          <p:nvPr/>
-        </p:nvSpPr>
-        <p:spPr>
-          <a:xfrm>
-            <a:off x="457200" y="1563624"/>
-            <a:ext cx="5093061" cy="4837176"/>
+            <a:off x="457200" y="1380744"/>
+            <a:ext cx="11277295" cy="5020056"/>
           </a:xfrm>
           <a:prstGeom prst="rect">
             <a:avLst/>
@@ -13089,7 +12679,25 @@
                 </a:solidFill>
                 <a:latin typeface="Calibri"/>
               </a:rPr>
-              <a:t>.</a:t>
+              <a:t>. Si la version DESPUES devuelve algo distinto, no se optimizo nada: se rompio la consulta, y se rompio </a:t>
+            </a:r>
+            <a:r>
+              <a:rPr sz="2000" b="1" i="0">
+                <a:solidFill>
+                  <a:srgbClr val="333333"/>
+                </a:solidFill>
+                <a:latin typeface="Calibri"/>
+              </a:rPr>
+              <a:t>sin avisar</a:t>
+            </a:r>
+            <a:r>
+              <a:rPr sz="2000" b="0" i="0">
+                <a:solidFill>
+                  <a:srgbClr val="333333"/>
+                </a:solidFill>
+                <a:latin typeface="Calibri"/>
+              </a:rPr>
+              <a:t>, porque ningun motor va a lanzar un error por eso.</a:t>
             </a:r>
           </a:p>
           <a:p>
@@ -13141,7 +12749,25 @@
                 </a:solidFill>
                 <a:latin typeface="Calibri"/>
               </a:rPr>
-              <a:t>.</a:t>
+              <a:t>. En la agenda del 2026-03-10 las dos tienen que decir </a:t>
+            </a:r>
+            <a:r>
+              <a:rPr sz="2000" b="1" i="0">
+                <a:solidFill>
+                  <a:srgbClr val="333333"/>
+                </a:solidFill>
+                <a:latin typeface="Calibri"/>
+              </a:rPr>
+              <a:t>91</a:t>
+            </a:r>
+            <a:r>
+              <a:rPr sz="2000" b="0" i="0">
+                <a:solidFill>
+                  <a:srgbClr val="333333"/>
+                </a:solidFill>
+                <a:latin typeface="Calibri"/>
+              </a:rPr>
+              <a:t>. Un conteo distinto es la respuesta equivocada, no una version mas rapida.</a:t>
             </a:r>
           </a:p>
           <a:p>
@@ -13175,7 +12801,43 @@
                 </a:solidFill>
                 <a:latin typeface="Calibri"/>
               </a:rPr>
-              <a:t> «A EXCEPT B» devuelve lo que esta en A y no en B.</a:t>
+              <a:t> «A EXCEPT B» devuelve lo que esta en A y no en B. Que salga vacio </a:t>
+            </a:r>
+            <a:r>
+              <a:rPr sz="2000" b="1" i="0">
+                <a:solidFill>
+                  <a:srgbClr val="333333"/>
+                </a:solidFill>
+                <a:latin typeface="Calibri"/>
+              </a:rPr>
+              <a:t>no</a:t>
+            </a:r>
+            <a:r>
+              <a:rPr sz="2000" b="0" i="0">
+                <a:solidFill>
+                  <a:srgbClr val="333333"/>
+                </a:solidFill>
+                <a:latin typeface="Calibri"/>
+              </a:rPr>
+              <a:t> prueba la igualdad: B puede tener filas de mas. Se corren las dos direcciones unidas con «UNION ALL» y se exige </a:t>
+            </a:r>
+            <a:r>
+              <a:rPr sz="2000" b="1" i="0">
+                <a:solidFill>
+                  <a:srgbClr val="333333"/>
+                </a:solidFill>
+                <a:latin typeface="Calibri"/>
+              </a:rPr>
+              <a:t>cero filas</a:t>
+            </a:r>
+            <a:r>
+              <a:rPr sz="2000" b="0" i="0">
+                <a:solidFill>
+                  <a:srgbClr val="333333"/>
+                </a:solidFill>
+                <a:latin typeface="Calibri"/>
+              </a:rPr>
+              <a:t>.</a:t>
             </a:r>
           </a:p>
           <a:p>
@@ -13202,12 +12864,73 @@
               </a:rPr>
               <a:t>Sin «LIMIT» en la prueba.</a:t>
             </a:r>
-          </a:p>
-        </p:txBody>
-      </p:sp>
-      <p:sp>
-        <p:nvSpPr>
-          <p:cNvPr id="10" name="TextBox 9"/>
+            <a:r>
+              <a:rPr sz="2000" b="0" i="0">
+                <a:solidFill>
+                  <a:srgbClr val="333333"/>
+                </a:solidFill>
+                <a:latin typeface="Calibri"/>
+              </a:rPr>
+              <a:t> Comparar solo las primeras 20 filas deja fuera justamente las que fallan — las de los duenos con cero citas, que es donde «COUNT(*)» miente.</a:t>
+            </a:r>
+          </a:p>
+          <a:p>
+            <a:pPr>
+              <a:spcAft>
+                <a:spcPts val="800"/>
+              </a:spcAft>
+            </a:pPr>
+            <a:r>
+              <a:rPr sz="2000" b="0" i="0">
+                <a:solidFill>
+                  <a:srgbClr val="333333"/>
+                </a:solidFill>
+                <a:latin typeface="Calibri"/>
+              </a:rPr>
+              <a:t>–   </a:t>
+            </a:r>
+            <a:r>
+              <a:rPr sz="2000" b="1" i="0">
+                <a:solidFill>
+                  <a:srgbClr val="333333"/>
+                </a:solidFill>
+                <a:latin typeface="Calibri"/>
+              </a:rPr>
+              <a:t>Que NO sirve como prueba.</a:t>
+            </a:r>
+            <a:r>
+              <a:rPr sz="2000" b="0" i="0">
+                <a:solidFill>
+                  <a:srgbClr val="333333"/>
+                </a:solidFill>
+                <a:latin typeface="Calibri"/>
+              </a:rPr>
+              <a:t> «Se ve igual», «trae mas o menos lo mismo» o mirar la primera pantalla de resultados. La equivalencia se afirma con una consulta cuyo resultado </a:t>
+            </a:r>
+            <a:r>
+              <a:rPr sz="2000" b="1" i="0">
+                <a:solidFill>
+                  <a:srgbClr val="333333"/>
+                </a:solidFill>
+                <a:latin typeface="Calibri"/>
+              </a:rPr>
+              <a:t>se conoce de antemano</a:t>
+            </a:r>
+            <a:r>
+              <a:rPr sz="2000" b="0" i="0">
+                <a:solidFill>
+                  <a:srgbClr val="333333"/>
+                </a:solidFill>
+                <a:latin typeface="Calibri"/>
+              </a:rPr>
+              <a:t>: un numero que coincide o un conjunto vacio.</a:t>
+            </a:r>
+          </a:p>
+        </p:txBody>
+      </p:sp>
+      <p:sp>
+        <p:nvSpPr>
+          <p:cNvPr id="7" name="TextBox 6"/>
           <p:cNvSpPr txBox="1"/>
           <p:nvPr/>
         </p:nvSpPr>
@@ -13388,118 +13111,14 @@
       </p:sp>
       <p:sp>
         <p:nvSpPr>
-          <p:cNvPr id="5" name="Rounded Rectangle 4"/>
-          <p:cNvSpPr/>
-          <p:nvPr/>
-        </p:nvSpPr>
-        <p:spPr>
-          <a:xfrm>
-            <a:off x="5797149" y="1573813"/>
-            <a:ext cx="6010497" cy="4057845"/>
-          </a:xfrm>
-          <a:prstGeom prst="roundRect">
-            <a:avLst>
-              <a:gd name="adj" fmla="val 4000"/>
-            </a:avLst>
-          </a:prstGeom>
-          <a:solidFill>
-            <a:srgbClr val="E8EEF4"/>
-          </a:solidFill>
-          <a:ln>
-            <a:noFill/>
-          </a:ln>
-        </p:spPr>
-        <p:style>
-          <a:lnRef idx="1">
-            <a:schemeClr val="accent1"/>
-          </a:lnRef>
-          <a:fillRef idx="3">
-            <a:schemeClr val="accent1"/>
-          </a:fillRef>
-          <a:effectRef idx="2">
-            <a:schemeClr val="accent1"/>
-          </a:effectRef>
-          <a:fontRef idx="minor">
-            <a:schemeClr val="lt1"/>
-          </a:fontRef>
-        </p:style>
-        <p:txBody>
-          <a:bodyPr rtlCol="0" anchor="ctr"/>
-          <a:lstStyle/>
-          <a:p>
-            <a:pPr algn="ctr"/>
-          </a:p>
-        </p:txBody>
-      </p:sp>
-      <p:pic>
-        <p:nvPicPr>
-          <p:cNvPr id="6" name="Picture 5" descr="before-after-comparison.jpg"/>
-          <p:cNvPicPr>
-            <a:picLocks noChangeAspect="1"/>
-          </p:cNvPicPr>
-          <p:nvPr/>
-        </p:nvPicPr>
-        <p:blipFill>
-          <a:blip r:embed="rId2"/>
-          <a:stretch>
-            <a:fillRect/>
-          </a:stretch>
-        </p:blipFill>
-        <p:spPr>
-          <a:xfrm>
-            <a:off x="5870301" y="1646965"/>
-            <a:ext cx="5864193" cy="3911541"/>
-          </a:xfrm>
-          <a:prstGeom prst="rect">
-            <a:avLst/>
-          </a:prstGeom>
-        </p:spPr>
-      </p:pic>
-      <p:sp>
-        <p:nvSpPr>
-          <p:cNvPr id="7" name="TextBox 6"/>
+          <p:cNvPr id="5" name="TextBox 4"/>
           <p:cNvSpPr txBox="1"/>
           <p:nvPr/>
         </p:nvSpPr>
         <p:spPr>
           <a:xfrm>
-            <a:off x="5870301" y="5961888"/>
-            <a:ext cx="5864193" cy="320040"/>
-          </a:xfrm>
-          <a:prstGeom prst="rect">
-            <a:avLst/>
-          </a:prstGeom>
-          <a:noFill/>
-        </p:spPr>
-        <p:txBody>
-          <a:bodyPr wrap="square">
-            <a:spAutoFit/>
-          </a:bodyPr>
-          <a:lstStyle/>
-          <a:p>
-            <a:pPr algn="ctr"/>
-            <a:r>
-              <a:rPr sz="1100" b="0" i="1">
-                <a:solidFill>
-                  <a:srgbClr val="666666"/>
-                </a:solidFill>
-                <a:latin typeface="Calibri"/>
-              </a:rPr>
-              <a:t>Foto: Neriman Özaydın · Pexels</a:t>
-            </a:r>
-          </a:p>
-        </p:txBody>
-      </p:sp>
-      <p:sp>
-        <p:nvSpPr>
-          <p:cNvPr id="8" name="TextBox 7"/>
-          <p:cNvSpPr txBox="1"/>
-          <p:nvPr/>
-        </p:nvSpPr>
-        <p:spPr>
-          <a:xfrm>
-            <a:off x="457200" y="1353312"/>
-            <a:ext cx="5093061" cy="5047488"/>
+            <a:off x="457200" y="1170432"/>
+            <a:ext cx="11277295" cy="5230368"/>
           </a:xfrm>
           <a:prstGeom prst="rect">
             <a:avLst/>
@@ -13563,7 +13182,7 @@
       </p:sp>
       <p:sp>
         <p:nvSpPr>
-          <p:cNvPr id="9" name="TextBox 8"/>
+          <p:cNvPr id="6" name="TextBox 5"/>
           <p:cNvSpPr txBox="1"/>
           <p:nvPr/>
         </p:nvSpPr>
@@ -13744,118 +13363,14 @@
       </p:sp>
       <p:sp>
         <p:nvSpPr>
-          <p:cNvPr id="5" name="Rounded Rectangle 4"/>
-          <p:cNvSpPr/>
-          <p:nvPr/>
-        </p:nvSpPr>
-        <p:spPr>
-          <a:xfrm>
-            <a:off x="5797149" y="1573813"/>
-            <a:ext cx="6010497" cy="4057845"/>
-          </a:xfrm>
-          <a:prstGeom prst="roundRect">
-            <a:avLst>
-              <a:gd name="adj" fmla="val 4000"/>
-            </a:avLst>
-          </a:prstGeom>
-          <a:solidFill>
-            <a:srgbClr val="E8EEF4"/>
-          </a:solidFill>
-          <a:ln>
-            <a:noFill/>
-          </a:ln>
-        </p:spPr>
-        <p:style>
-          <a:lnRef idx="1">
-            <a:schemeClr val="accent1"/>
-          </a:lnRef>
-          <a:fillRef idx="3">
-            <a:schemeClr val="accent1"/>
-          </a:fillRef>
-          <a:effectRef idx="2">
-            <a:schemeClr val="accent1"/>
-          </a:effectRef>
-          <a:fontRef idx="minor">
-            <a:schemeClr val="lt1"/>
-          </a:fontRef>
-        </p:style>
-        <p:txBody>
-          <a:bodyPr rtlCol="0" anchor="ctr"/>
-          <a:lstStyle/>
-          <a:p>
-            <a:pPr algn="ctr"/>
-          </a:p>
-        </p:txBody>
-      </p:sp>
-      <p:pic>
-        <p:nvPicPr>
-          <p:cNvPr id="6" name="Picture 5" descr="notebook-planning-desk-coffee.jpg"/>
-          <p:cNvPicPr>
-            <a:picLocks noChangeAspect="1"/>
-          </p:cNvPicPr>
-          <p:nvPr/>
-        </p:nvPicPr>
-        <p:blipFill>
-          <a:blip r:embed="rId2"/>
-          <a:stretch>
-            <a:fillRect/>
-          </a:stretch>
-        </p:blipFill>
-        <p:spPr>
-          <a:xfrm>
-            <a:off x="5870301" y="1646965"/>
-            <a:ext cx="5864193" cy="3911541"/>
-          </a:xfrm>
-          <a:prstGeom prst="rect">
-            <a:avLst/>
-          </a:prstGeom>
-        </p:spPr>
-      </p:pic>
-      <p:sp>
-        <p:nvSpPr>
-          <p:cNvPr id="7" name="TextBox 6"/>
+          <p:cNvPr id="5" name="TextBox 4"/>
           <p:cNvSpPr txBox="1"/>
           <p:nvPr/>
         </p:nvSpPr>
         <p:spPr>
           <a:xfrm>
-            <a:off x="5870301" y="5961888"/>
-            <a:ext cx="5864193" cy="320040"/>
-          </a:xfrm>
-          <a:prstGeom prst="rect">
-            <a:avLst/>
-          </a:prstGeom>
-          <a:noFill/>
-        </p:spPr>
-        <p:txBody>
-          <a:bodyPr wrap="square">
-            <a:spAutoFit/>
-          </a:bodyPr>
-          <a:lstStyle/>
-          <a:p>
-            <a:pPr algn="ctr"/>
-            <a:r>
-              <a:rPr sz="1100" b="0" i="1">
-                <a:solidFill>
-                  <a:srgbClr val="666666"/>
-                </a:solidFill>
-                <a:latin typeface="Calibri"/>
-              </a:rPr>
-              <a:t>Foto: Cup of  Couple · Pexels</a:t>
-            </a:r>
-          </a:p>
-        </p:txBody>
-      </p:sp>
-      <p:sp>
-        <p:nvSpPr>
-          <p:cNvPr id="8" name="TextBox 7"/>
-          <p:cNvSpPr txBox="1"/>
-          <p:nvPr/>
-        </p:nvSpPr>
-        <p:spPr>
-          <a:xfrm>
-            <a:off x="457200" y="1353312"/>
-            <a:ext cx="5093061" cy="5047488"/>
+            <a:off x="457200" y="1170432"/>
+            <a:ext cx="11277295" cy="5230368"/>
           </a:xfrm>
           <a:prstGeom prst="rect">
             <a:avLst/>
@@ -13976,11 +13491,61 @@
               <a:t>–   Recorrido: teoría del tema, una lámina por concepto, y demo del docente sobre la base de la clínica.</a:t>
             </a:r>
           </a:p>
-        </p:txBody>
-      </p:sp>
-      <p:sp>
-        <p:nvSpPr>
-          <p:cNvPr id="9" name="TextBox 8"/>
+          <a:p>
+            <a:pPr>
+              <a:spcAft>
+                <a:spcPts val="800"/>
+              </a:spcAft>
+            </a:pPr>
+            <a:r>
+              <a:rPr sz="2000" b="0" i="0">
+                <a:solidFill>
+                  <a:srgbClr val="333333"/>
+                </a:solidFill>
+                <a:latin typeface="Calibri"/>
+              </a:rPr>
+              <a:t>–   Cada lámina se sostiene sola: sirve para repasar aunque hayas faltado.</a:t>
+            </a:r>
+          </a:p>
+          <a:p>
+            <a:pPr>
+              <a:spcAft>
+                <a:spcPts val="800"/>
+              </a:spcAft>
+            </a:pPr>
+            <a:r>
+              <a:rPr sz="2000" b="0" i="0">
+                <a:solidFill>
+                  <a:srgbClr val="333333"/>
+                </a:solidFill>
+                <a:latin typeface="Calibri"/>
+              </a:rPr>
+              <a:t>–   </a:t>
+            </a:r>
+            <a:r>
+              <a:rPr sz="2000" b="1" i="0">
+                <a:solidFill>
+                  <a:srgbClr val="333333"/>
+                </a:solidFill>
+                <a:latin typeface="Calibri"/>
+              </a:rPr>
+              <a:t>Conceptos de hoy:</a:t>
+            </a:r>
+            <a:r>
+              <a:rPr sz="2000" b="0" i="0">
+                <a:solidFill>
+                  <a:srgbClr val="333333"/>
+                </a:solidFill>
+                <a:latin typeface="Calibri"/>
+              </a:rPr>
+              <a:t> SQL es declarativo · Leer un plan · EXPLAIN ANALYZE · Las estadisticas.</a:t>
+            </a:r>
+          </a:p>
+        </p:txBody>
+      </p:sp>
+      <p:sp>
+        <p:nvSpPr>
+          <p:cNvPr id="6" name="TextBox 5"/>
           <p:cNvSpPr txBox="1"/>
           <p:nvPr/>
         </p:nvSpPr>
@@ -14161,118 +13726,14 @@
       </p:sp>
       <p:sp>
         <p:nvSpPr>
-          <p:cNvPr id="5" name="Rounded Rectangle 4"/>
-          <p:cNvSpPr/>
-          <p:nvPr/>
-        </p:nvSpPr>
-        <p:spPr>
-          <a:xfrm>
-            <a:off x="5797149" y="1573813"/>
-            <a:ext cx="6010497" cy="4057845"/>
-          </a:xfrm>
-          <a:prstGeom prst="roundRect">
-            <a:avLst>
-              <a:gd name="adj" fmla="val 4000"/>
-            </a:avLst>
-          </a:prstGeom>
-          <a:solidFill>
-            <a:srgbClr val="E8EEF4"/>
-          </a:solidFill>
-          <a:ln>
-            <a:noFill/>
-          </a:ln>
-        </p:spPr>
-        <p:style>
-          <a:lnRef idx="1">
-            <a:schemeClr val="accent1"/>
-          </a:lnRef>
-          <a:fillRef idx="3">
-            <a:schemeClr val="accent1"/>
-          </a:fillRef>
-          <a:effectRef idx="2">
-            <a:schemeClr val="accent1"/>
-          </a:effectRef>
-          <a:fontRef idx="minor">
-            <a:schemeClr val="lt1"/>
-          </a:fontRef>
-        </p:style>
-        <p:txBody>
-          <a:bodyPr rtlCol="0" anchor="ctr"/>
-          <a:lstStyle/>
-          <a:p>
-            <a:pPr algn="ctr"/>
-          </a:p>
-        </p:txBody>
-      </p:sp>
-      <p:pic>
-        <p:nvPicPr>
-          <p:cNvPr id="6" name="Picture 5" descr="student-laptop-browser-code.jpg"/>
-          <p:cNvPicPr>
-            <a:picLocks noChangeAspect="1"/>
-          </p:cNvPicPr>
-          <p:nvPr/>
-        </p:nvPicPr>
-        <p:blipFill>
-          <a:blip r:embed="rId2"/>
-          <a:stretch>
-            <a:fillRect/>
-          </a:stretch>
-        </p:blipFill>
-        <p:spPr>
-          <a:xfrm>
-            <a:off x="5870301" y="1646965"/>
-            <a:ext cx="5864193" cy="3911541"/>
-          </a:xfrm>
-          <a:prstGeom prst="rect">
-            <a:avLst/>
-          </a:prstGeom>
-        </p:spPr>
-      </p:pic>
-      <p:sp>
-        <p:nvSpPr>
-          <p:cNvPr id="7" name="TextBox 6"/>
+          <p:cNvPr id="5" name="TextBox 4"/>
           <p:cNvSpPr txBox="1"/>
           <p:nvPr/>
         </p:nvSpPr>
         <p:spPr>
           <a:xfrm>
-            <a:off x="5870301" y="5961888"/>
-            <a:ext cx="5864193" cy="320040"/>
-          </a:xfrm>
-          <a:prstGeom prst="rect">
-            <a:avLst/>
-          </a:prstGeom>
-          <a:noFill/>
-        </p:spPr>
-        <p:txBody>
-          <a:bodyPr wrap="square">
-            <a:spAutoFit/>
-          </a:bodyPr>
-          <a:lstStyle/>
-          <a:p>
-            <a:pPr algn="ctr"/>
-            <a:r>
-              <a:rPr sz="1100" b="0" i="1">
-                <a:solidFill>
-                  <a:srgbClr val="666666"/>
-                </a:solidFill>
-                <a:latin typeface="Calibri"/>
-              </a:rPr>
-              <a:t>Foto: Anna Shvets · Pexels</a:t>
-            </a:r>
-          </a:p>
-        </p:txBody>
-      </p:sp>
-      <p:sp>
-        <p:nvSpPr>
-          <p:cNvPr id="8" name="TextBox 7"/>
-          <p:cNvSpPr txBox="1"/>
-          <p:nvPr/>
-        </p:nvSpPr>
-        <p:spPr>
-          <a:xfrm>
-            <a:off x="457200" y="1353312"/>
-            <a:ext cx="5093061" cy="5047488"/>
+            <a:off x="457200" y="1170432"/>
+            <a:ext cx="11277295" cy="5230368"/>
           </a:xfrm>
           <a:prstGeom prst="rect">
             <a:avLst/>
@@ -14352,7 +13813,7 @@
       </p:sp>
       <p:sp>
         <p:nvSpPr>
-          <p:cNvPr id="9" name="TextBox 8"/>
+          <p:cNvPr id="6" name="TextBox 5"/>
           <p:cNvSpPr txBox="1"/>
           <p:nvPr/>
         </p:nvSpPr>
@@ -14533,118 +13994,14 @@
       </p:sp>
       <p:sp>
         <p:nvSpPr>
-          <p:cNvPr id="5" name="Rounded Rectangle 4"/>
-          <p:cNvSpPr/>
-          <p:nvPr/>
-        </p:nvSpPr>
-        <p:spPr>
-          <a:xfrm>
-            <a:off x="5797149" y="1573813"/>
-            <a:ext cx="6010497" cy="4057845"/>
-          </a:xfrm>
-          <a:prstGeom prst="roundRect">
-            <a:avLst>
-              <a:gd name="adj" fmla="val 4000"/>
-            </a:avLst>
-          </a:prstGeom>
-          <a:solidFill>
-            <a:srgbClr val="E8EEF4"/>
-          </a:solidFill>
-          <a:ln>
-            <a:noFill/>
-          </a:ln>
-        </p:spPr>
-        <p:style>
-          <a:lnRef idx="1">
-            <a:schemeClr val="accent1"/>
-          </a:lnRef>
-          <a:fillRef idx="3">
-            <a:schemeClr val="accent1"/>
-          </a:fillRef>
-          <a:effectRef idx="2">
-            <a:schemeClr val="accent1"/>
-          </a:effectRef>
-          <a:fontRef idx="minor">
-            <a:schemeClr val="lt1"/>
-          </a:fontRef>
-        </p:style>
-        <p:txBody>
-          <a:bodyPr rtlCol="0" anchor="ctr"/>
-          <a:lstStyle/>
-          <a:p>
-            <a:pPr algn="ctr"/>
-          </a:p>
-        </p:txBody>
-      </p:sp>
-      <p:pic>
-        <p:nvPicPr>
-          <p:cNvPr id="6" name="Picture 5" descr="laptop-code-live-demo.jpg"/>
-          <p:cNvPicPr>
-            <a:picLocks noChangeAspect="1"/>
-          </p:cNvPicPr>
-          <p:nvPr/>
-        </p:nvPicPr>
-        <p:blipFill>
-          <a:blip r:embed="rId2"/>
-          <a:stretch>
-            <a:fillRect/>
-          </a:stretch>
-        </p:blipFill>
-        <p:spPr>
-          <a:xfrm>
-            <a:off x="5870301" y="1646965"/>
-            <a:ext cx="5864193" cy="3911541"/>
-          </a:xfrm>
-          <a:prstGeom prst="rect">
-            <a:avLst/>
-          </a:prstGeom>
-        </p:spPr>
-      </p:pic>
-      <p:sp>
-        <p:nvSpPr>
-          <p:cNvPr id="7" name="TextBox 6"/>
+          <p:cNvPr id="5" name="TextBox 4"/>
           <p:cNvSpPr txBox="1"/>
           <p:nvPr/>
         </p:nvSpPr>
         <p:spPr>
           <a:xfrm>
-            <a:off x="5870301" y="5961888"/>
-            <a:ext cx="5864193" cy="320040"/>
-          </a:xfrm>
-          <a:prstGeom prst="rect">
-            <a:avLst/>
-          </a:prstGeom>
-          <a:noFill/>
-        </p:spPr>
-        <p:txBody>
-          <a:bodyPr wrap="square">
-            <a:spAutoFit/>
-          </a:bodyPr>
-          <a:lstStyle/>
-          <a:p>
-            <a:pPr algn="ctr"/>
-            <a:r>
-              <a:rPr sz="1100" b="0" i="1">
-                <a:solidFill>
-                  <a:srgbClr val="666666"/>
-                </a:solidFill>
-                <a:latin typeface="Calibri"/>
-              </a:rPr>
-              <a:t>Foto: olia danilevich · Pexels</a:t>
-            </a:r>
-          </a:p>
-        </p:txBody>
-      </p:sp>
-      <p:sp>
-        <p:nvSpPr>
-          <p:cNvPr id="8" name="TextBox 7"/>
-          <p:cNvSpPr txBox="1"/>
-          <p:nvPr/>
-        </p:nvSpPr>
-        <p:spPr>
-          <a:xfrm>
-            <a:off x="457200" y="1353312"/>
-            <a:ext cx="5093061" cy="5047488"/>
+            <a:off x="457200" y="1170432"/>
+            <a:ext cx="11277295" cy="5230368"/>
           </a:xfrm>
           <a:prstGeom prst="rect">
             <a:avLst/>
@@ -14774,11 +14131,45 @@
               <a:t> las dos versiones devuelven las mismas 91 filas, pero el plan de la primera muestra loops=2006 y el de la segunda una sola pasada.</a:t>
             </a:r>
           </a:p>
-        </p:txBody>
-      </p:sp>
-      <p:sp>
-        <p:nvSpPr>
-          <p:cNvPr id="9" name="TextBox 8"/>
+          <a:p>
+            <a:pPr>
+              <a:spcAft>
+                <a:spcPts val="800"/>
+              </a:spcAft>
+            </a:pPr>
+            <a:r>
+              <a:rPr sz="2000" b="0" i="0">
+                <a:solidFill>
+                  <a:srgbClr val="333333"/>
+                </a:solidFill>
+                <a:latin typeface="Calibri"/>
+              </a:rPr>
+              <a:t>–   </a:t>
+            </a:r>
+            <a:r>
+              <a:rPr sz="2000" b="1" i="0">
+                <a:solidFill>
+                  <a:srgbClr val="333333"/>
+                </a:solidFill>
+                <a:latin typeface="Calibri"/>
+              </a:rPr>
+              <a:t>Qué observar:</a:t>
+            </a:r>
+            <a:r>
+              <a:rPr sz="2000" b="0" i="0">
+                <a:solidFill>
+                  <a:srgbClr val="333333"/>
+                </a:solidFill>
+                <a:latin typeface="Calibri"/>
+              </a:rPr>
+              <a:t> el nodo mas costoso, las filas estimadas contra las reales y el tiempo total, leidos en ese orden en cada plan.</a:t>
+            </a:r>
+          </a:p>
+        </p:txBody>
+      </p:sp>
+      <p:sp>
+        <p:nvSpPr>
+          <p:cNvPr id="6" name="TextBox 5"/>
           <p:cNvSpPr txBox="1"/>
           <p:nvPr/>
         </p:nvSpPr>
@@ -18747,118 +18138,14 @@
       </p:sp>
       <p:sp>
         <p:nvSpPr>
-          <p:cNvPr id="6" name="Rounded Rectangle 5"/>
-          <p:cNvSpPr/>
-          <p:nvPr/>
-        </p:nvSpPr>
-        <p:spPr>
-          <a:xfrm>
-            <a:off x="5797149" y="1678969"/>
-            <a:ext cx="6010497" cy="4057845"/>
-          </a:xfrm>
-          <a:prstGeom prst="roundRect">
-            <a:avLst>
-              <a:gd name="adj" fmla="val 4000"/>
-            </a:avLst>
-          </a:prstGeom>
-          <a:solidFill>
-            <a:srgbClr val="E8EEF4"/>
-          </a:solidFill>
-          <a:ln>
-            <a:noFill/>
-          </a:ln>
-        </p:spPr>
-        <p:style>
-          <a:lnRef idx="1">
-            <a:schemeClr val="accent1"/>
-          </a:lnRef>
-          <a:fillRef idx="3">
-            <a:schemeClr val="accent1"/>
-          </a:fillRef>
-          <a:effectRef idx="2">
-            <a:schemeClr val="accent1"/>
-          </a:effectRef>
-          <a:fontRef idx="minor">
-            <a:schemeClr val="lt1"/>
-          </a:fontRef>
-        </p:style>
-        <p:txBody>
-          <a:bodyPr rtlCol="0" anchor="ctr"/>
-          <a:lstStyle/>
-          <a:p>
-            <a:pPr algn="ctr"/>
-          </a:p>
-        </p:txBody>
-      </p:sp>
-      <p:pic>
-        <p:nvPicPr>
-          <p:cNvPr id="7" name="Picture 6" descr="blueprint-plan-detail.jpg"/>
-          <p:cNvPicPr>
-            <a:picLocks noChangeAspect="1"/>
-          </p:cNvPicPr>
-          <p:nvPr/>
-        </p:nvPicPr>
-        <p:blipFill>
-          <a:blip r:embed="rId2"/>
-          <a:stretch>
-            <a:fillRect/>
-          </a:stretch>
-        </p:blipFill>
-        <p:spPr>
-          <a:xfrm>
-            <a:off x="5870301" y="1752121"/>
-            <a:ext cx="5864193" cy="3911541"/>
-          </a:xfrm>
-          <a:prstGeom prst="rect">
-            <a:avLst/>
-          </a:prstGeom>
-        </p:spPr>
-      </p:pic>
-      <p:sp>
-        <p:nvSpPr>
-          <p:cNvPr id="8" name="TextBox 7"/>
+          <p:cNvPr id="6" name="TextBox 5"/>
           <p:cNvSpPr txBox="1"/>
           <p:nvPr/>
         </p:nvSpPr>
         <p:spPr>
           <a:xfrm>
-            <a:off x="5870301" y="5961888"/>
-            <a:ext cx="5864193" cy="320040"/>
-          </a:xfrm>
-          <a:prstGeom prst="rect">
-            <a:avLst/>
-          </a:prstGeom>
-          <a:noFill/>
-        </p:spPr>
-        <p:txBody>
-          <a:bodyPr wrap="square">
-            <a:spAutoFit/>
-          </a:bodyPr>
-          <a:lstStyle/>
-          <a:p>
-            <a:pPr algn="ctr"/>
-            <a:r>
-              <a:rPr sz="1100" b="0" i="1">
-                <a:solidFill>
-                  <a:srgbClr val="666666"/>
-                </a:solidFill>
-                <a:latin typeface="Calibri"/>
-              </a:rPr>
-              <a:t>Foto: Tima Miroshnichenko · Pexels</a:t>
-            </a:r>
-          </a:p>
-        </p:txBody>
-      </p:sp>
-      <p:sp>
-        <p:nvSpPr>
-          <p:cNvPr id="9" name="TextBox 8"/>
-          <p:cNvSpPr txBox="1"/>
-          <p:nvPr/>
-        </p:nvSpPr>
-        <p:spPr>
-          <a:xfrm>
-            <a:off x="457200" y="1563624"/>
-            <a:ext cx="5093061" cy="4837176"/>
+            <a:off x="457200" y="1380744"/>
+            <a:ext cx="11277295" cy="5020056"/>
           </a:xfrm>
           <a:prstGeom prst="rect">
             <a:avLst/>
@@ -18919,7 +18206,43 @@
                 </a:solidFill>
                 <a:latin typeface="Calibri"/>
               </a:rPr>
-              <a:t> es una lista de pasos de arriba hacia abajo:</a:t>
+              <a:t> es una lista de pasos de arriba hacia abajo: es un arbol. Los nodos </a:t>
+            </a:r>
+            <a:r>
+              <a:rPr sz="2000" b="1" i="0">
+                <a:solidFill>
+                  <a:srgbClr val="333333"/>
+                </a:solidFill>
+                <a:latin typeface="Calibri"/>
+              </a:rPr>
+              <a:t>mas indentados son las hojas</a:t>
+            </a:r>
+            <a:r>
+              <a:rPr sz="2000" b="0" i="0">
+                <a:solidFill>
+                  <a:srgbClr val="333333"/>
+                </a:solidFill>
+                <a:latin typeface="Calibri"/>
+              </a:rPr>
+              <a:t> y se ejecutan primero; cada nodo consume las filas de sus hijos. La </a:t>
+            </a:r>
+            <a:r>
+              <a:rPr sz="2000" b="1" i="0">
+                <a:solidFill>
+                  <a:srgbClr val="333333"/>
+                </a:solidFill>
+                <a:latin typeface="Calibri"/>
+              </a:rPr>
+              <a:t>primera linea impresa es la ULTIMA operacion</a:t>
+            </a:r>
+            <a:r>
+              <a:rPr sz="2000" b="0" i="0">
+                <a:solidFill>
+                  <a:srgbClr val="333333"/>
+                </a:solidFill>
+                <a:latin typeface="Calibri"/>
+              </a:rPr>
+              <a:t>.</a:t>
             </a:r>
           </a:p>
           <a:p>
@@ -18989,7 +18312,43 @@
                 </a:solidFill>
                 <a:latin typeface="Calibri"/>
               </a:rPr>
-              <a:t> milisegundos;</a:t>
+              <a:t> milisegundos; «rows=» son las filas que el motor </a:t>
+            </a:r>
+            <a:r>
+              <a:rPr sz="2000" b="1" i="0">
+                <a:solidFill>
+                  <a:srgbClr val="333333"/>
+                </a:solidFill>
+                <a:latin typeface="Calibri"/>
+              </a:rPr>
+              <a:t>estima</a:t>
+            </a:r>
+            <a:r>
+              <a:rPr sz="2000" b="0" i="0">
+                <a:solidFill>
+                  <a:srgbClr val="333333"/>
+                </a:solidFill>
+                <a:latin typeface="Calibri"/>
+              </a:rPr>
+              <a:t>; «width=» el ancho de la fila en bytes; «loops=» cuantas </a:t>
+            </a:r>
+            <a:r>
+              <a:rPr sz="2000" b="1" i="0">
+                <a:solidFill>
+                  <a:srgbClr val="333333"/>
+                </a:solidFill>
+                <a:latin typeface="Calibri"/>
+              </a:rPr>
+              <a:t>veces se repitio</a:t>
+            </a:r>
+            <a:r>
+              <a:rPr sz="2000" b="0" i="0">
+                <a:solidFill>
+                  <a:srgbClr val="333333"/>
+                </a:solidFill>
+                <a:latin typeface="Calibri"/>
+              </a:rPr>
+              <a:t> ese nodo.</a:t>
             </a:r>
           </a:p>
           <a:p>
@@ -19023,14 +18382,154 @@
                 </a:solidFill>
                 <a:latin typeface="Calibri"/>
               </a:rPr>
-              <a:t> El segundo agrega «actual time=», «actual rows=» y el «Execution Time» final.</a:t>
-            </a:r>
-          </a:p>
-        </p:txBody>
-      </p:sp>
-      <p:sp>
-        <p:nvSpPr>
-          <p:cNvPr id="10" name="TextBox 9"/>
+              <a:t> El segundo agrega «actual time=», «actual rows=» y el «Execution Time» final. Y ejecuta </a:t>
+            </a:r>
+            <a:r>
+              <a:rPr sz="2000" b="1" i="0">
+                <a:solidFill>
+                  <a:srgbClr val="333333"/>
+                </a:solidFill>
+                <a:latin typeface="Calibri"/>
+              </a:rPr>
+              <a:t>de verdad</a:t>
+            </a:r>
+            <a:r>
+              <a:rPr sz="2000" b="0" i="0">
+                <a:solidFill>
+                  <a:srgbClr val="333333"/>
+                </a:solidFill>
+                <a:latin typeface="Calibri"/>
+              </a:rPr>
+              <a:t>: sobre un «UPDATE» o «DELETE» hay que envolverlo en «BEGIN» … «ROLLBACK» (eso es la Clase 8). Con «SELECT» no hay riesgo.</a:t>
+            </a:r>
+          </a:p>
+          <a:p>
+            <a:pPr>
+              <a:spcAft>
+                <a:spcPts val="800"/>
+              </a:spcAft>
+            </a:pPr>
+            <a:r>
+              <a:rPr sz="2000" b="0" i="0">
+                <a:solidFill>
+                  <a:srgbClr val="333333"/>
+                </a:solidFill>
+                <a:latin typeface="Calibri"/>
+              </a:rPr>
+              <a:t>–   </a:t>
+            </a:r>
+            <a:r>
+              <a:rPr sz="2000" b="1" i="0">
+                <a:solidFill>
+                  <a:srgbClr val="333333"/>
+                </a:solidFill>
+                <a:latin typeface="Calibri"/>
+              </a:rPr>
+              <a:t>Estimado contra real: la senal.</a:t>
+            </a:r>
+            <a:r>
+              <a:rPr sz="2000" b="0" i="0">
+                <a:solidFill>
+                  <a:srgbClr val="333333"/>
+                </a:solidFill>
+                <a:latin typeface="Calibri"/>
+              </a:rPr>
+              <a:t> Una divergencia de 2 veces es normal; de </a:t>
+            </a:r>
+            <a:r>
+              <a:rPr sz="2000" b="1" i="0">
+                <a:solidFill>
+                  <a:srgbClr val="333333"/>
+                </a:solidFill>
+                <a:latin typeface="Calibri"/>
+              </a:rPr>
+              <a:t>10 veces o mas</a:t>
+            </a:r>
+            <a:r>
+              <a:rPr sz="2000" b="0" i="0">
+                <a:solidFill>
+                  <a:srgbClr val="333333"/>
+                </a:solidFill>
+                <a:latin typeface="Calibri"/>
+              </a:rPr>
+              <a:t> delata estadisticas viejas o predicados que el motor cree independientes y no lo son.</a:t>
+            </a:r>
+          </a:p>
+          <a:p>
+            <a:pPr>
+              <a:spcAft>
+                <a:spcPts val="800"/>
+              </a:spcAft>
+            </a:pPr>
+            <a:r>
+              <a:rPr sz="2000" b="0" i="0">
+                <a:solidFill>
+                  <a:srgbClr val="333333"/>
+                </a:solidFill>
+                <a:latin typeface="Calibri"/>
+              </a:rPr>
+              <a:t>–   </a:t>
+            </a:r>
+            <a:r>
+              <a:rPr sz="2000" b="1" i="0">
+                <a:solidFill>
+                  <a:srgbClr val="333333"/>
+                </a:solidFill>
+                <a:latin typeface="Calibri"/>
+              </a:rPr>
+              <a:t>El nodo mas costoso, sin trampa.</a:t>
+            </a:r>
+            <a:r>
+              <a:rPr sz="2000" b="0" i="0">
+                <a:solidFill>
+                  <a:srgbClr val="333333"/>
+                </a:solidFill>
+                <a:latin typeface="Calibri"/>
+              </a:rPr>
+              <a:t> El tiempo de un nodo </a:t>
+            </a:r>
+            <a:r>
+              <a:rPr sz="2000" b="1" i="0">
+                <a:solidFill>
+                  <a:srgbClr val="333333"/>
+                </a:solidFill>
+                <a:latin typeface="Calibri"/>
+              </a:rPr>
+              <a:t>incluye el de sus hijos</a:t>
+            </a:r>
+            <a:r>
+              <a:rPr sz="2000" b="0" i="0">
+                <a:solidFill>
+                  <a:srgbClr val="333333"/>
+                </a:solidFill>
+                <a:latin typeface="Calibri"/>
+              </a:rPr>
+              <a:t>, y «actual time» es </a:t>
+            </a:r>
+            <a:r>
+              <a:rPr sz="2000" b="1" i="0">
+                <a:solidFill>
+                  <a:srgbClr val="333333"/>
+                </a:solidFill>
+                <a:latin typeface="Calibri"/>
+              </a:rPr>
+              <a:t>por vuelta</a:t>
+            </a:r>
+            <a:r>
+              <a:rPr sz="2000" b="0" i="0">
+                <a:solidFill>
+                  <a:srgbClr val="333333"/>
+                </a:solidFill>
+                <a:latin typeface="Calibri"/>
+              </a:rPr>
+              <a:t>: hay que multiplicarlo por «loops». Un nodo de 0,5 ms con «loops=2006» cuesta un segundo — mas que el «Seq Scan» de arriba que parece el culpable.</a:t>
+            </a:r>
+          </a:p>
+        </p:txBody>
+      </p:sp>
+      <p:sp>
+        <p:nvSpPr>
+          <p:cNvPr id="7" name="TextBox 6"/>
           <p:cNvSpPr txBox="1"/>
           <p:nvPr/>
         </p:nvSpPr>

--- a/Bases de Datos II/Clases/Clase 6 - Optimizacion de consultas/Presentacion.pptx
+++ b/Bases de Datos II/Clases/Clase 6 - Optimizacion de consultas/Presentacion.pptx
@@ -523,47 +523,62 @@
           <a:lstStyle/>
           <a:p>
             <a:r>
-              <a:t>DESARROLLO (para explicarlo, no se proyecta):</a:t>
-            </a:r>
-          </a:p>
-          <a:p>
-            <a:r>
-              <a:t>SQL es un lenguaje declarativo: la consulta describe QUE datos se quieren y nunca COMO obtenerlos.</a:t>
-            </a:r>
-          </a:p>
-          <a:p>
-            <a:r>
-              <a:t>Quien decide el como es el optimizador, un componente del motor que convierte la sentencia en un plan de ejecucion</a:t>
-            </a:r>
-          </a:p>
-          <a:p>
-            <a:r>
-              <a:t>Es decir el arbol de operaciones fisicas que se ejecutara de verdad: que tabla se lee primero, si completa o por indice, con que algoritmo se cruzan dos tablas y donde se ordena.</a:t>
-            </a:r>
-          </a:p>
-          <a:p>
-            <a:r>
-              <a:t>Son tres etapas: el analizador verifica sintaxis y existencia de tablas y columnas; el optimizador genera planes candidatos, estima el costo de cada uno y elige el mas barato; el ejecutor corre el elegido.</a:t>
-            </a:r>
-          </a:p>
-          <a:p>
-            <a:r>
-              <a:t>Lo decisivo es que todos devuelven EXACTAMENTE el mismo resultado y pueden diferir en tiempo por factores de cien o de mil.</a:t>
-            </a:r>
-          </a:p>
-          <a:p>
-            <a:r>
-              <a:t>Optimizar es ayudar al optimizador a encontrar el plan bueno, no reescribir SQL por gusto estetico.</a:t>
-            </a:r>
-          </a:p>
-          <a:p>
-            <a:r>
-              <a:t>NOTAS:</a:t>
-            </a:r>
-          </a:p>
-          <a:p>
-            <a:r>
-              <a:t>El numero que hace visible el problema, y conviene decirlo con la consulta de la clase en pantalla, que cruza cuatro tablas: con tres tablas hay 6 ordenes de cruce posibles (3 factorial), con las cuatro de la agenda hay 24, con cinco 120, y al multiplicar metodos de acceso y algoritmos de cruce el espacio pasa del millar de planes; el optimizador no los prueba todos, poda con heuristicas y decide en milisegundos.</a:t>
+              <a:t>QUÉ ES (dilo así): Cuando escribimos una consulta solo describimos el resultado. El motor la pasa por tres etapas: el analizador revisa que esté bien escrita y que existan las tablas y columnas; el optimizador arma varios planes, les calcula un costo y elige el más barato; el ejecutor corre ese plan. Optimizar es ayudar al optimizador a encontrar el plan bueno.</a:t>
+            </a:r>
+          </a:p>
+          <a:p/>
+          <a:p>
+            <a:r>
+              <a:t>CÓMO DARLA (≈4 min):</a:t>
+            </a:r>
+          </a:p>
+          <a:p>
+            <a:r>
+              <a:t>  • Al entrar: Arriba, la consulta dice QUÉ; debajo, el analizador. Di: «antes de pensar en velocidad, el motor comprueba que la consulta tenga sentido: sintaxis, tablas y columnas». Si falla aquí, el error sale antes de leer un dato.</a:t>
+            </a:r>
+          </a:p>
+          <a:p>
+            <a:r>
+              <a:t>  • Clic 1: El optimizador y tres planes candidatos con su costo: 1.240, 85 y 9.600, en unidades del motor, no en milisegundos. Elige el B, el más barato. Pregunta: «¿los tres devuelven lo mismo?».</a:t>
+            </a:r>
+          </a:p>
+          <a:p>
+            <a:r>
+              <a:t>  • Clic 2: El ejecutor corre solo el plan elegido. Lee la conclusión: los tres planes devuelven exactamente las mismas filas; lo único que cambia es el trabajo.</a:t>
+            </a:r>
+          </a:p>
+          <a:p/>
+          <a:p>
+            <a:r>
+              <a:t>EJEMPLO: La agenda del día cruza cita, mascota, dueno y veterinario: con 4 tablas hay 24 órdenes posibles de unión (4 × 3 × 2 × 1), y multiplicados por las formas de leer y de cruzar pasan del millar de planes. El optimizador no los prueba todos: poda y decide en milisegundos.</a:t>
+            </a:r>
+          </a:p>
+          <a:p/>
+          <a:p>
+            <a:r>
+              <a:t>SI PREGUNTAN:</a:t>
+            </a:r>
+          </a:p>
+          <a:p>
+            <a:r>
+              <a:t>  • «¿Puedo obligar al motor a usar un plan?» → PostgreSQL no trae «hints» como Oracle. Se le ayuda escribiendo la consulta para que pueda usar lo que existe: filtros sobre columnas desnudas, estadísticas al día e índices adecuados.</a:t>
+            </a:r>
+          </a:p>
+          <a:p>
+            <a:r>
+              <a:t>  • «¿El costo está en milisegundos?» → No. Es una unidad relativa del motor (1 = leer una página de forma secuencial); sirve para comparar planes, no para medir tiempo.</a:t>
+            </a:r>
+          </a:p>
+          <a:p/>
+          <a:p>
+            <a:r>
+              <a:t>CUIDADO: No digas que el optimizador «prueba todos los planes»: estima con estadísticas, poda y elige; por eso a veces se equivoca.</a:t>
+            </a:r>
+          </a:p>
+          <a:p/>
+          <a:p>
+            <a:r>
+              <a:t>PASA A LA SIGUIENTE: Para saber qué plan eligió hay que aprender a leerlo: es un árbol.</a:t>
             </a:r>
           </a:p>
         </p:txBody>
@@ -633,12 +648,57 @@
           <a:lstStyle/>
           <a:p>
             <a:r>
-              <a:t>Fuera de la lamina (habla de la practica, no del tema):</a:t>
-            </a:r>
-          </a:p>
-          <a:p>
-            <a:r>
-              <a:t>- El `LIMIT` va en la consulta que se entrega, no en la que verifica.</a:t>
+              <a:t>QUÉ ES (dilo así): Hay dos pruebas, según lo que se compare. Para una consulta con filtro, contar las filas de cada versión en la misma corrida. Para un conjunto completo, como un ranking, se restan los conjuntos con EXCEPT en los dos sentidos: lo que está en A y no en B, más lo que está en B y no en A. Si salen cero filas, son iguales.</a:t>
+            </a:r>
+          </a:p>
+          <a:p/>
+          <a:p>
+            <a:r>
+              <a:t>CÓMO DARLA (≈2 min):</a:t>
+            </a:r>
+          </a:p>
+          <a:p>
+            <a:r>
+              <a:t>  • Al entrar: Izquierda, prueba 1: dos COUNT(*) en una misma consulta; 91 = 91.</a:t>
+            </a:r>
+          </a:p>
+          <a:p>
+            <a:r>
+              <a:t>  • Derecha: Prueba 2: (ANTES EXCEPT DESPUÉS) UNION ALL (DESPUÉS EXCEPT ANTES) devuelve 0 filas. Explica los dos sentidos: A EXCEPT B vacío solo dice que todo A está en B; B podría tener filas de más.</a:t>
+            </a:r>
+          </a:p>
+          <a:p>
+            <a:r>
+              <a:t>  • Abajo: El contraejemplo real: si la reescritura usa COUNT(*) en vez de COUNT(m.id_mascota), la prueba 2 devuelve 12 filas, los 6 dueños sin mascotas con 0 de un lado y 1 del otro. Cierra: sin LIMIT y sin «se ve igual».</a:t>
+            </a:r>
+          </a:p>
+          <a:p/>
+          <a:p>
+            <a:r>
+              <a:t>EJEMPLO: WITH antes AS (…), despues AS (…) SELECT 'sobra en ANTES', * FROM (SELECT * FROM antes EXCEPT SELECT * FROM despues) a UNION ALL SELECT 'sobra en DESPUES', * FROM (SELECT * FROM despues EXCEPT SELECT * FROM antes) b; devuelve 0 filas.</a:t>
+            </a:r>
+          </a:p>
+          <a:p/>
+          <a:p>
+            <a:r>
+              <a:t>SI PREGUNTAN:</a:t>
+            </a:r>
+          </a:p>
+          <a:p>
+            <a:r>
+              <a:t>  • «¿Y si una versión puede traer filas repetidas?» → EXCEPT elimina duplicados; en ese caso se usa EXCEPT ALL o se incluye la clave en el SELECT. En el ranking no pasa: hay una fila por dueño.</a:t>
+            </a:r>
+          </a:p>
+          <a:p/>
+          <a:p>
+            <a:r>
+              <a:t>CUIDADO: Comparar solo las primeras 20 filas deja fuera justo las que fallan: los dueños con 0 quedan al final del ranking.</a:t>
+            </a:r>
+          </a:p>
+          <a:p/>
+          <a:p>
+            <a:r>
+              <a:t>PASA A LA SIGUIENTE: Ahora el script de la clase, que junta todo lo visto.</a:t>
             </a:r>
           </a:p>
         </p:txBody>
@@ -708,97 +768,57 @@
           <a:lstStyle/>
           <a:p>
             <a:r>
-              <a:t>DESARROLLO (para explicarlo, no se proyecta):</a:t>
-            </a:r>
-          </a:p>
-          <a:p>
-            <a:r>
-              <a:t>El script Codigo/06_opt_consultas.sql es autocontenido y siembra el mismo volumen que PostgreSQL en el navegador, de modo que los numeros de la demo son los que el estudiante va a ver en su pantalla</a:t>
-            </a:r>
-          </a:p>
-          <a:p>
-            <a:r>
-              <a:t>Empieza con dos conteos de control que conviene proyectar antes de tocar nada: 30.010 citas en total y, para el 2026-03-10, 91 PROGRAMADA, 45 ATENDIDA y 14 CANCELADA.</a:t>
-            </a:r>
-          </a:p>
-          <a:p>
-            <a:r>
-              <a:t>Y el cruce implicito con comas es peligroso por aritmetica, no por estilo: si alguien olvida una de las tres condiciones de union</a:t>
-            </a:r>
-          </a:p>
-          <a:p>
-            <a:r>
-              <a:t>El resultado no es un error sino un producto cartesiano —30.010 por 5.008 filas son mas de 150 millones— que en el navegador acaba en una pestana bloqueada.</a:t>
-            </a:r>
-          </a:p>
-          <a:p>
-            <a:r>
-              <a:t>ON, filtra con el rango de fecha y con la comparacion directa del estado, y ordena por c.fecha_hora.</a:t>
-            </a:r>
-          </a:p>
-          <a:p>
-            <a:r>
-              <a:t>La tercera sentencia de la demo agrega LIMIT 50, que es lo que la pantalla de agenda realmente necesita: el motor deja de producir filas en cuanto tiene 50, y por eso el tiempo baja aunque el plan sea el mismo.</a:t>
-            </a:r>
-          </a:p>
-          <a:p>
-            <a:r>
-              <a:t>El script cierra con los bloques de la subconsulta correlacionada y con las dos pruebas de equivalencia, incluido el contraejemplo de COUNT(*) contra COUNT(c.id_cita) sobre los duenos 2001 a 2006.</a:t>
-            </a:r>
-          </a:p>
-          <a:p>
-            <a:r>
-              <a:t>NOTAS:</a:t>
-            </a:r>
-          </a:p>
-          <a:p>
-            <a:r>
-              <a:t>La version ANTES es SELECT * FROM cita c, mascota m, dueno d, veterinario v con las cuatro condiciones de union en el WHERE, to_char sobre la fecha y UPPER sobre el estado, y el docente debe saber que esta mal en cada linea.</a:t>
-            </a:r>
-          </a:p>
-          <a:p>
-            <a:r>
-              <a:t>SELECT * arrastra todas las columnas de las cuatro tablas cuando la pantalla de agenda necesita seis, lo cual multiplica el ancho de la fila y con el la memoria de trabajo del ordenamiento.</a:t>
-            </a:r>
-          </a:p>
-          <a:p>
-            <a:r>
-              <a:t>Las dos funciones sobre columnas se explicaron en el parrafo del predicado sargable.</a:t>
-            </a:r>
-          </a:p>
-          <a:p>
-            <a:r>
-              <a:t>Hay que decir aqui, y no despues.</a:t>
-            </a:r>
-          </a:p>
-          <a:p>
-            <a:r>
-              <a:t>ON no acelera nada, porque PostgreSQL normaliza las dos formas al mismo plan interno; se gana legibilidad y se gana que un ON faltante salte a la vista, o sea seguridad, no milisegundos.</a:t>
-            </a:r>
-          </a:p>
-          <a:p>
-            <a:r>
-              <a:t>Si el docente lo presenta como una mejora de rendimiento, esta ensenando justo la opcion por la que va a descontar.</a:t>
-            </a:r>
-          </a:p>
-          <a:p>
-            <a:r>
-              <a:t>La version DESPUES proyecta las seis columnas, escribe los tres JOIN...</a:t>
-            </a:r>
-          </a:p>
-          <a:p>
-            <a:r>
-              <a:t>Filtrar temprano se llama empuje de predicados o predicate pushdown, y hay que decir con honestidad que el optimizador moderno lo hace solo casi siempre; lo que si cambia el plan es dejar de esconder el filtro donde no puede moverlo, y los dos casos clasicos son escribirlo en HAVING cuando cabia en WHERE, y ponerlo en el WHERE de un LEFT JOIN cuando corresponde al ON, lo que ademas cambia el significado de la consulta.</a:t>
-            </a:r>
-          </a:p>
-          <a:p>
-            <a:r>
-              <a:t>Fuera de la lamina (habla de la practica): Hay que decir aqui, y no despues, lo que la quinta afirmacion de la pregunta 4 castiga: cambiar la coma por JOIN ...</a:t>
-            </a:r>
-          </a:p>
-          <a:p>
-            <a:r>
-              <a:t>Fuera de la lamina (habla de la practica): El script cierra con los bloques de la subconsulta correlacionada y con las dos pruebas de equivalencia, incluido el contraejemplo de COUNT(*) contra COUNT(c.id_cita) sobre los duenos 2001 a 2006, que es medio minuto de demo y ahorra la mitad de los reclamos de la pregunta 3.</a:t>
+              <a:t>QUÉ ES (dilo así): El script de la demo es autocontenido: crea las tablas, siembra el mismo volumen que el estudiante tiene en su pantalla y deja las estadísticas listas. Antes de optimizar se proyectan los conteos de control; después se corren la agenda ANTES y DESPUÉS, el ranking y las pruebas.</a:t>
+            </a:r>
+          </a:p>
+          <a:p/>
+          <a:p>
+            <a:r>
+              <a:t>CÓMO DARLA (≈2 min):</a:t>
+            </a:r>
+          </a:p>
+          <a:p>
+            <a:r>
+              <a:t>  • Al entrar: Arriba a la izquierda, los conteos de control: 30.010 citas; el 2026-03-10, 91 PROGRAMADA, 45 ATENDIDA y 14 CANCELADA. Si no salen esos números, nada de lo demás cuadra.</a:t>
+            </a:r>
+          </a:p>
+          <a:p>
+            <a:r>
+              <a:t>  • Arriba a la derecha: La coma: sin la condición de unión, 30.010 × 5.008 ≈ 150 millones de filas, y el motor no da ningún error.</a:t>
+            </a:r>
+          </a:p>
+          <a:p>
+            <a:r>
+              <a:t>  • Abajo: JOIN … ON da el mismo plan que la coma: no acelera, pero el olvido salta a la vista. Y el LIMIT 50: con ORDER BY fecha_hora y sin índice, el motor igual lee toda la tabla, encuentra las 91 y las ordena; el LIMIT solo ahorra entregar 41.</a:t>
+            </a:r>
+          </a:p>
+          <a:p/>
+          <a:p>
+            <a:r>
+              <a:t>EJEMPLO: Plan con LIMIT 50: Limit, luego Sort de 91 filas y, al fondo, Seq Scan on cita c con Rows Removed by Filter: 29919. El recorrido completo sigue ahí.</a:t>
+            </a:r>
+          </a:p>
+          <a:p/>
+          <a:p>
+            <a:r>
+              <a:t>SI PREGUNTAN:</a:t>
+            </a:r>
+          </a:p>
+          <a:p>
+            <a:r>
+              <a:t>  • «¿Entonces para qué el LIMIT?» → Para no transportar ni pintar filas que la pantalla no usa. Lo que evitaría leer toda la tabla es un índice sobre fecha_hora que entregue las filas ya ordenadas: Clase 7.</a:t>
+            </a:r>
+          </a:p>
+          <a:p/>
+          <a:p>
+            <a:r>
+              <a:t>CUIDADO: La siembra recrea las tablas: córrela en una base vacía, nunca sobre una base con datos que alguien quiera conservar.</a:t>
+            </a:r>
+          </a:p>
+          <a:p/>
+          <a:p>
+            <a:r>
+              <a:t>PASA A LA SIGUIENTE: ¿Dónde se corre todo esto, y qué no se puede medir ahí?</a:t>
             </a:r>
           </a:p>
         </p:txBody>
@@ -868,137 +888,824 @@
           <a:lstStyle/>
           <a:p>
             <a:r>
-              <a:t>DESARROLLO (para explicarlo, no se proyecta):</a:t>
-            </a:r>
-          </a:p>
-          <a:p>
-            <a:r>
-              <a:t>La herramienta del dia es PostgreSQL compilado para el navegador: es el unico entorno de la clase que trae las 30.010 citas ya sembradas y las estadisticas ya recolectadas.</a:t>
-            </a:r>
-          </a:p>
-          <a:p>
-            <a:r>
-              <a:t>La justificacion de media pagina y la matriz de cambios se escriben en Google Docs.</a:t>
-            </a:r>
-          </a:p>
-          <a:p>
-            <a:r>
-              <a:t>Hoy no se ofrece ningun playground externo como alterno, y conviene que lo digas asi de claro: en DB Fiddle o en cualquier otro no existe la base sembrada, de modo que quien mida ahi obtiene otros numeros.</a:t>
-            </a:r>
-          </a:p>
-          <a:p>
-            <a:r>
-              <a:t>Tampoco tiene sentido hoy un comparador de motores, porque el motor de hoy es uno solo.</a:t>
-            </a:r>
-          </a:p>
-          <a:p>
-            <a:r>
-              <a:t>Los milisegundos, ademas, cambian entre dos corridas seguidas en la misma maquina: lo que no cambia son los conteos de filas.</a:t>
-            </a:r>
-          </a:p>
-          <a:p>
-            <a:r>
-              <a:t>NOTAS:</a:t>
-            </a:r>
-          </a:p>
-          <a:p>
-            <a:r>
-              <a:t>Soporta EXPLAIN, EXPLAIN ANALYZE y la opcion BUFFERS; si en alguna maquina BUFFERS no responde.</a:t>
-            </a:r>
-          </a:p>
-          <a:p>
-            <a:r>
-              <a:t>Lo que hay que documentar en papel.</a:t>
-            </a:r>
-          </a:p>
-          <a:p>
-            <a:r>
-              <a:t>PREGUNTAS FRECUENTES DEL GRUPO</a:t>
-            </a:r>
-          </a:p>
-          <a:p>
-            <a:r>
-              <a:t>Si la consulta ya devuelve el resultado correcto, para que reescribirla: correccion y costo son ejes independientes, el motor garantiza el resultado pero no el tiempo</a:t>
-            </a:r>
-          </a:p>
-          <a:p>
-            <a:r>
-              <a:t>Y una consulta correcta que tarda 40 segundos congela la pantalla de recepcion igual que si estuviera mal.</a:t>
-            </a:r>
-          </a:p>
-          <a:p>
-            <a:r>
-              <a:t>Cuanto debe bajar el tiempo para que cuente como optimizada: la evidencia no es un porcentaje sino un cambio verificable y leido del plan</a:t>
-            </a:r>
-          </a:p>
-          <a:p>
-            <a:r>
-              <a:t>Y hoy ese cambio es de dos clases, menos filas procesadas y menos pasadas sobre la tabla —el SubPlan con loops=2006 que se convierte en un HashAggregate—; lo que hoy NO va a pasar</a:t>
-            </a:r>
-          </a:p>
-          <a:p>
-            <a:r>
-              <a:t>Y hay que anticiparlo porque es la confusion mas frecuente de la clase, es que un Seq Scan se convierta en Index Scan, porque en esta base no hay ningun indice y no puede aparecer uno de la nada: eso es la Clase 7.</a:t>
-            </a:r>
-          </a:p>
-          <a:p>
-            <a:r>
-              <a:t>Por que la misma consulta tarda mas la primera vez: la primera ejecucion trae las paginas de disco y la segunda las encuentra en memoria, asi que se mide tres veces y se reporta la segunda o la tercera</a:t>
-            </a:r>
-          </a:p>
-          <a:p>
-            <a:r>
-              <a:t>Y EXPLAIN (ANALYZE, BUFFERS) muestra cuantas paginas se leyeron y cuantas se acertaron en cache.</a:t>
-            </a:r>
-          </a:p>
-          <a:p>
-            <a:r>
-              <a:t>Y por que el estimado no coincide con el real: siempre que la diferencia sea de dos o tres veces esta bien y no hay nada que corregir, la senal de alarma es un orden de magnitud</a:t>
-            </a:r>
-          </a:p>
-          <a:p>
-            <a:r>
-              <a:t>Y en esta base, con ANALYZE recien corrido, las divergencias grandes vienen de que dos filtros no son independientes y no de estadisticas viejas.</a:t>
-            </a:r>
-          </a:p>
-          <a:p>
-            <a:r>
-              <a:t>La clase se apoya en la Clase 4, donde se vio que un disparador corre fila por fila y encarece una carga masiva —es la misma aritmetica del loops=2006 de hoy—</a:t>
-            </a:r>
-          </a:p>
-          <a:p>
-            <a:r>
-              <a:t>Y entrega el testigo a la Clase 7, que crea los indices que hoy se echaron de menos, y a la Clase 8, que suma transacciones y bloqueos al mismo analisis.</a:t>
-            </a:r>
-          </a:p>
-          <a:p>
-            <a:r>
-              <a:t>Cuatro preguntas aparecen siempre.</a:t>
-            </a:r>
-          </a:p>
-          <a:p>
-            <a:r>
-              <a:t>Fuera de la lamina (habla de la practica): Soporta EXPLAIN, EXPLAIN ANALYZE y la opcion BUFFERS; si en alguna maquina BUFFERS no responde, el enunciado ya autoriza usar EXPLAIN ANALYZE a secas y declararlo en la seccion 5 de la pregunta 5, asi que eso no cuesta puntos.</a:t>
-            </a:r>
-          </a:p>
-          <a:p>
-            <a:r>
-              <a:t>Fuera de la lamina (habla de la practica): Hoy no se ofrece ningun playground externo como alterno, y conviene que lo digas asi de claro: en DB Fiddle o en cualquier otro no existe la base sembrada, de modo que quien mida ahi obtiene otros numeros, y la rubrica pide los del plan real -- el «Rows Removed by Filter: 29919» y las 91 filas son justo las dos anclas con las que se verifica.</a:t>
-            </a:r>
-          </a:p>
-          <a:p>
-            <a:r>
-              <a:t>Fuera de la lamina (habla de la practica): Un alterno que cuesta puntos no es un alterno.</a:t>
-            </a:r>
-          </a:p>
-          <a:p>
-            <a:r>
-              <a:t>Fuera de la lamina (habla de la practica): Lo que hay que documentar en papel, porque el entorno no lo permite y es literalmente la seccion 5 de la pregunta 5: los tiempos con la memoria intermedia vacia, ya que vaciarla exige privilegios de administrador; el comportamiento con varias sesiones compitiendo, que es la Clase 10; y cualquier comparacion por encima de unos cientos de miles de filas.</a:t>
-            </a:r>
-          </a:p>
-          <a:p>
-            <a:r>
-              <a:t>Fuera de la lamina (habla de la practica): Los milisegundos, ademas, cambian entre dos corridas seguidas en la misma maquina: lo que no cambia son los conteos de filas, y por eso los conteos son lo que se califica y los milisegundos solo tienen que ser coherentes entre si.</a:t>
+              <a:t>QUÉ ES (dilo así): La herramienta del día es PostgreSQL compilado para ejecutarse dentro del navegador. Trae la base con volumen sembrado y soporta EXPLAIN, EXPLAIN ANALYZE y BUFFERS. Hay cosas que ahí no se pueden medir, y lo correcto es declararlas en vez de inventar un número.</a:t>
+            </a:r>
+          </a:p>
+          <a:p/>
+          <a:p>
+            <a:r>
+              <a:t>CÓMO DARLA (≈2 min):</a:t>
+            </a:r>
+          </a:p>
+          <a:p>
+            <a:r>
+              <a:t>  • Al entrar: Izquierda: lo que se mide y se ve en la salida. Subraya las 30.010 citas: medir sobre una base de 20 filas no sirve, porque todo cabe en una página y cualquier consulta tarda lo mismo.</a:t>
+            </a:r>
+          </a:p>
+          <a:p>
+            <a:r>
+              <a:t>  • Derecha: Lo que no se puede medir: tiempos con la memoria vacía (vaciarla exige ser administrador), varias sesiones compitiendo (eso es la Clase 10) y volúmenes de cientos de miles de filas.</a:t>
+            </a:r>
+          </a:p>
+          <a:p>
+            <a:r>
+              <a:t>  • Abajo: La frase final: filas y páginas son estables; los milisegundos varían incluso entre dos corridas seguidas.</a:t>
+            </a:r>
+          </a:p>
+          <a:p/>
+          <a:p>
+            <a:r>
+              <a:t>EJEMPLO: Dos corridas seguidas de la agenda pueden diferir en milisegundos, incluso al doble; las dos dirán rows=91 y Rows Removed by Filter: 29919.</a:t>
+            </a:r>
+          </a:p>
+          <a:p/>
+          <a:p>
+            <a:r>
+              <a:t>SI PREGUNTAN:</a:t>
+            </a:r>
+          </a:p>
+          <a:p>
+            <a:r>
+              <a:t>  • «¿Puedo medir en mi propia base de la Clase 1?» → Solo si antes le fabricas volumen con generate_series. Con 20 filas el plan siempre es Seq Scan y las diferencias son ruido.</a:t>
+            </a:r>
+          </a:p>
+          <a:p/>
+          <a:p>
+            <a:r>
+              <a:t>CUIDADO: No ofrezcas otra herramienta en línea como alterna: no tiene la base sembrada y da otros números.</a:t>
+            </a:r>
+          </a:p>
+          <a:p/>
+          <a:p>
+            <a:r>
+              <a:t>PASA A LA SIGUIENTE: Vamos a la demo.</a:t>
+            </a:r>
+          </a:p>
+        </p:txBody>
+      </p:sp>
+      <p:sp>
+        <p:nvSpPr>
+          <p:cNvPr id="4" name="Slide Number Placeholder 3"/>
+          <p:cNvSpPr>
+            <a:spLocks noGrp="1"/>
+          </p:cNvSpPr>
+          <p:nvPr>
+            <p:ph type="sldNum" idx="5" sz="quarter"/>
+          </p:nvPr>
+        </p:nvSpPr>
+        <p:spPr/>
+      </p:sp>
+    </p:spTree>
+  </p:cSld>
+  <p:clrMapOvr>
+    <a:masterClrMapping/>
+  </p:clrMapOvr>
+</p:notes>
+</file>
+
+<file path=ppt/notesSlides/notesSlide13.xml><?xml version="1.0" encoding="utf-8"?>
+<p:notes xmlns:a="http://schemas.openxmlformats.org/drawingml/2006/main" xmlns:p="http://schemas.openxmlformats.org/presentationml/2006/main" xmlns:r="http://schemas.openxmlformats.org/officeDocument/2006/relationships">
+  <p:cSld>
+    <p:spTree>
+      <p:nvGrpSpPr>
+        <p:cNvPr id="1" name=""/>
+        <p:cNvGrpSpPr/>
+        <p:nvPr/>
+      </p:nvGrpSpPr>
+      <p:grpSpPr>
+        <a:xfrm>
+          <a:off x="0" y="0"/>
+          <a:ext cx="0" cy="0"/>
+          <a:chOff x="0" y="0"/>
+          <a:chExt cx="0" cy="0"/>
+        </a:xfrm>
+      </p:grpSpPr>
+      <p:sp>
+        <p:nvSpPr>
+          <p:cNvPr id="2" name="Slide Image Placeholder 1"/>
+          <p:cNvSpPr>
+            <a:spLocks noGrp="1"/>
+          </p:cNvSpPr>
+          <p:nvPr>
+            <p:ph type="sldImg" idx="2"/>
+          </p:nvPr>
+        </p:nvSpPr>
+        <p:spPr/>
+      </p:sp>
+      <p:sp>
+        <p:nvSpPr>
+          <p:cNvPr id="3" name="Notes Placeholder 2"/>
+          <p:cNvSpPr>
+            <a:spLocks noGrp="1"/>
+          </p:cNvSpPr>
+          <p:nvPr>
+            <p:ph type="body" idx="3" sz="quarter"/>
+          </p:nvPr>
+        </p:nvSpPr>
+        <p:spPr/>
+        <p:txBody>
+          <a:bodyPr/>
+          <a:lstStyle/>
+          <a:p>
+            <a:r>
+              <a:t>QUÉ ES (dilo así): Hasta ahora la pregunta era si una consulta funciona. Hoy es otra: cuánto trabajo le cuesta al motor responderla, cómo se lee ese trabajo en el plan de ejecución y cómo se demuestra que una versión más rápida devuelve exactamente lo mismo.</a:t>
+            </a:r>
+          </a:p>
+          <a:p/>
+          <a:p>
+            <a:r>
+              <a:t>CÓMO DARLA (≈4 min):</a:t>
+            </a:r>
+          </a:p>
+          <a:p>
+            <a:r>
+              <a:t>  • Al entrar: Lee el tema y pregunta: «si dos consultas devuelven lo mismo, ¿cómo sabemos cuál es mejor?». Deja que respondan una o dos personas; casi siempre dirán «la que tarde menos».</a:t>
+            </a:r>
+          </a:p>
+          <a:p>
+            <a:r>
+              <a:t>  • Después: Cierra: «al final de hoy lo van a decir con evidencia: el plan de ejecución, cuántas filas pasa cada paso y cuántas veces se repite».</a:t>
+            </a:r>
+          </a:p>
+          <a:p/>
+          <a:p>
+            <a:r>
+              <a:t>PASA A LA SIGUIENTE: Empezamos por quién decide cómo se ejecuta una consulta: el optimizador.</a:t>
+            </a:r>
+          </a:p>
+        </p:txBody>
+      </p:sp>
+      <p:sp>
+        <p:nvSpPr>
+          <p:cNvPr id="4" name="Slide Number Placeholder 3"/>
+          <p:cNvSpPr>
+            <a:spLocks noGrp="1"/>
+          </p:cNvSpPr>
+          <p:nvPr>
+            <p:ph type="sldNum" idx="5" sz="quarter"/>
+          </p:nvPr>
+        </p:nvSpPr>
+        <p:spPr/>
+      </p:sp>
+    </p:spTree>
+  </p:cSld>
+  <p:clrMapOvr>
+    <a:masterClrMapping/>
+  </p:clrMapOvr>
+</p:notes>
+</file>
+
+<file path=ppt/notesSlides/notesSlide14.xml><?xml version="1.0" encoding="utf-8"?>
+<p:notes xmlns:a="http://schemas.openxmlformats.org/drawingml/2006/main" xmlns:p="http://schemas.openxmlformats.org/presentationml/2006/main" xmlns:r="http://schemas.openxmlformats.org/officeDocument/2006/relationships">
+  <p:cSld>
+    <p:spTree>
+      <p:nvGrpSpPr>
+        <p:cNvPr id="1" name=""/>
+        <p:cNvGrpSpPr/>
+        <p:nvPr/>
+      </p:nvGrpSpPr>
+      <p:grpSpPr>
+        <a:xfrm>
+          <a:off x="0" y="0"/>
+          <a:ext cx="0" cy="0"/>
+          <a:chOff x="0" y="0"/>
+          <a:chExt cx="0" cy="0"/>
+        </a:xfrm>
+      </p:grpSpPr>
+      <p:sp>
+        <p:nvSpPr>
+          <p:cNvPr id="2" name="Slide Image Placeholder 1"/>
+          <p:cNvSpPr>
+            <a:spLocks noGrp="1"/>
+          </p:cNvSpPr>
+          <p:nvPr>
+            <p:ph type="sldImg" idx="2"/>
+          </p:nvPr>
+        </p:nvSpPr>
+        <p:spPr/>
+      </p:sp>
+      <p:sp>
+        <p:nvSpPr>
+          <p:cNvPr id="3" name="Notes Placeholder 2"/>
+          <p:cNvSpPr>
+            <a:spLocks noGrp="1"/>
+          </p:cNvSpPr>
+          <p:nvPr>
+            <p:ph type="body" idx="3" sz="quarter"/>
+          </p:nvPr>
+        </p:nvSpPr>
+        <p:spPr/>
+        <p:txBody>
+          <a:bodyPr/>
+          <a:lstStyle/>
+          <a:p>
+            <a:r>
+              <a:t>QUÉ ES (dilo así): El recorrido de las dos horas: teoría con una lámina por concepto, demo sobre la base de la clínica y práctica opcional.</a:t>
+            </a:r>
+          </a:p>
+          <a:p/>
+          <a:p>
+            <a:r>
+              <a:t>CÓMO DARLA (≈1 min):</a:t>
+            </a:r>
+          </a:p>
+          <a:p>
+            <a:r>
+              <a:t>  • Al entrar: Señala solo los tramos; no te detengas. La práctica está en la carpeta de la clase y es opcional.</a:t>
+            </a:r>
+          </a:p>
+        </p:txBody>
+      </p:sp>
+      <p:sp>
+        <p:nvSpPr>
+          <p:cNvPr id="4" name="Slide Number Placeholder 3"/>
+          <p:cNvSpPr>
+            <a:spLocks noGrp="1"/>
+          </p:cNvSpPr>
+          <p:nvPr>
+            <p:ph type="sldNum" idx="5" sz="quarter"/>
+          </p:nvPr>
+        </p:nvSpPr>
+        <p:spPr/>
+      </p:sp>
+    </p:spTree>
+  </p:cSld>
+  <p:clrMapOvr>
+    <a:masterClrMapping/>
+  </p:clrMapOvr>
+</p:notes>
+</file>
+
+<file path=ppt/notesSlides/notesSlide15.xml><?xml version="1.0" encoding="utf-8"?>
+<p:notes xmlns:a="http://schemas.openxmlformats.org/drawingml/2006/main" xmlns:p="http://schemas.openxmlformats.org/presentationml/2006/main" xmlns:r="http://schemas.openxmlformats.org/officeDocument/2006/relationships">
+  <p:cSld>
+    <p:spTree>
+      <p:nvGrpSpPr>
+        <p:cNvPr id="1" name=""/>
+        <p:cNvGrpSpPr/>
+        <p:nvPr/>
+      </p:nvGrpSpPr>
+      <p:grpSpPr>
+        <a:xfrm>
+          <a:off x="0" y="0"/>
+          <a:ext cx="0" cy="0"/>
+          <a:chOff x="0" y="0"/>
+          <a:chExt cx="0" cy="0"/>
+        </a:xfrm>
+      </p:grpSpPr>
+      <p:sp>
+        <p:nvSpPr>
+          <p:cNvPr id="2" name="Slide Image Placeholder 1"/>
+          <p:cNvSpPr>
+            <a:spLocks noGrp="1"/>
+          </p:cNvSpPr>
+          <p:nvPr>
+            <p:ph type="sldImg" idx="2"/>
+          </p:nvPr>
+        </p:nvSpPr>
+        <p:spPr/>
+      </p:sp>
+      <p:sp>
+        <p:nvSpPr>
+          <p:cNvPr id="3" name="Notes Placeholder 2"/>
+          <p:cNvSpPr>
+            <a:spLocks noGrp="1"/>
+          </p:cNvSpPr>
+          <p:nvPr>
+            <p:ph type="body" idx="3" sz="quarter"/>
+          </p:nvPr>
+        </p:nvSpPr>
+        <p:spPr/>
+        <p:txBody>
+          <a:bodyPr/>
+          <a:lstStyle/>
+          <a:p>
+            <a:r>
+              <a:t>QUÉ ES (dilo así): EXPLAIN (ANALYZE, BUFFERS) ejecuta la consulta de verdad y muestra, nodo por nodo, lo que pasó: filas reales, tiempo y páginas leídas. Es la evidencia de una optimización; sin ella, «es más rápida» es una opinión.</a:t>
+            </a:r>
+          </a:p>
+          <a:p/>
+          <a:p>
+            <a:r>
+              <a:t>CÓMO DARLA (≈3 min):</a:t>
+            </a:r>
+          </a:p>
+          <a:p>
+            <a:r>
+              <a:t>  • Al entrar: Líneas 1-5: la consulta del día (cita con mascota, rango del 2026-03-10) precedida de EXPLAIN (ANALYZE, BUFFERS). Si puedes, ejecútala en vivo.</a:t>
+            </a:r>
+          </a:p>
+          <a:p>
+            <a:r>
+              <a:t>  • Líneas 7-9: El nodo: hoy sale Seq Scan on cita c, porque la base no tiene índices fuera de las claves primarias. Las filas: el motor estimó 150 y salieron 150 (actual rows=150).</a:t>
+            </a:r>
+          </a:p>
+          <a:p>
+            <a:r>
+              <a:t>  • Líneas 10-12: Rows Removed by Filter: 29860 es lo que leyó para nada; Buffers: shared hit=251 son las 251 páginas de 8 KB de cita. El Execution Time cambia entre corridas: lo estable son filas y páginas.</a:t>
+            </a:r>
+          </a:p>
+          <a:p/>
+          <a:p>
+            <a:r>
+              <a:t>EJEMPLO: Una corrida en el navegador: Seq Scan on cita c … rows=150 … Rows Removed by Filter: 29860 · Buffers: shared hit=251 · Execution Time ≈ 35 ms. Las dos primeras cifras salen idénticas en cualquier equipo; el tiempo no.</a:t>
+            </a:r>
+          </a:p>
+          <a:p/>
+          <a:p>
+            <a:r>
+              <a:t>SI PREGUNTAN:</a:t>
+            </a:r>
+          </a:p>
+          <a:p>
+            <a:r>
+              <a:t>  • «¿Qué significa «shared hit»?» → Que la página ya estaba en memoria; «read» significaría que hubo que traerla del disco. En el navegador todo vive en memoria, así que casi siempre verás hit.</a:t>
+            </a:r>
+          </a:p>
+          <a:p>
+            <a:r>
+              <a:t>  • «¿Puedo usar EXPLAIN ANALYZE con un DELETE?» → Sí, pero lo ejecuta de verdad: envuélvelo en BEGIN y ROLLBACK para no borrar nada.</a:t>
+            </a:r>
+          </a:p>
+          <a:p/>
+          <a:p>
+            <a:r>
+              <a:t>CUIDADO: Si BUFFERS no responde en algún equipo, EXPLAIN ANALYZE a secas sirve igual. Lo que no sirve es comparar milisegundos entre máquinas distintas.</a:t>
+            </a:r>
+          </a:p>
+          <a:p/>
+          <a:p>
+            <a:r>
+              <a:t>PASA A LA SIGUIENTE: Ahora cada campo de una línea del plan, uno por uno.</a:t>
+            </a:r>
+          </a:p>
+        </p:txBody>
+      </p:sp>
+      <p:sp>
+        <p:nvSpPr>
+          <p:cNvPr id="4" name="Slide Number Placeholder 3"/>
+          <p:cNvSpPr>
+            <a:spLocks noGrp="1"/>
+          </p:cNvSpPr>
+          <p:nvPr>
+            <p:ph type="sldNum" idx="5" sz="quarter"/>
+          </p:nvPr>
+        </p:nvSpPr>
+        <p:spPr/>
+      </p:sp>
+    </p:spTree>
+  </p:cSld>
+  <p:clrMapOvr>
+    <a:masterClrMapping/>
+  </p:clrMapOvr>
+</p:notes>
+</file>
+
+<file path=ppt/notesSlides/notesSlide16.xml><?xml version="1.0" encoding="utf-8"?>
+<p:notes xmlns:a="http://schemas.openxmlformats.org/drawingml/2006/main" xmlns:p="http://schemas.openxmlformats.org/presentationml/2006/main" xmlns:r="http://schemas.openxmlformats.org/officeDocument/2006/relationships">
+  <p:cSld>
+    <p:spTree>
+      <p:nvGrpSpPr>
+        <p:cNvPr id="1" name=""/>
+        <p:cNvGrpSpPr/>
+        <p:nvPr/>
+      </p:nvGrpSpPr>
+      <p:grpSpPr>
+        <a:xfrm>
+          <a:off x="0" y="0"/>
+          <a:ext cx="0" cy="0"/>
+          <a:chOff x="0" y="0"/>
+          <a:chExt cx="0" cy="0"/>
+        </a:xfrm>
+      </p:grpSpPr>
+      <p:sp>
+        <p:nvSpPr>
+          <p:cNvPr id="2" name="Slide Image Placeholder 1"/>
+          <p:cNvSpPr>
+            <a:spLocks noGrp="1"/>
+          </p:cNvSpPr>
+          <p:nvPr>
+            <p:ph type="sldImg" idx="2"/>
+          </p:nvPr>
+        </p:nvSpPr>
+        <p:spPr/>
+      </p:sp>
+      <p:sp>
+        <p:nvSpPr>
+          <p:cNvPr id="3" name="Notes Placeholder 2"/>
+          <p:cNvSpPr>
+            <a:spLocks noGrp="1"/>
+          </p:cNvSpPr>
+          <p:nvPr>
+            <p:ph type="body" idx="3" sz="quarter"/>
+          </p:nvPr>
+        </p:nvSpPr>
+        <p:spPr/>
+        <p:txBody>
+          <a:bodyPr/>
+          <a:lstStyle/>
+          <a:p>
+            <a:r>
+              <a:t>QUÉ ES (dilo así): Las dos consultas buscan las citas del 2026-03-10. La primera aplica una función a la columna; la segunda compara la columna desnuda con un rango. Devuelven las mismas 150 citas, pero solo la segunda deja abierta la puerta a un índice.</a:t>
+            </a:r>
+          </a:p>
+          <a:p/>
+          <a:p>
+            <a:r>
+              <a:t>CÓMO DARLA (≈3 min):</a:t>
+            </a:r>
+          </a:p>
+          <a:p>
+            <a:r>
+              <a:t>  • Al entrar: Líneas 1-3: la versión ANTES. Subraya TO_CHAR(fecha_hora, …): el motor lo calcula en las 30.010 filas antes de comparar.</a:t>
+            </a:r>
+          </a:p>
+          <a:p>
+            <a:r>
+              <a:t>  • Líneas 5-8: La versión DESPUÉS: mismo SELECT y el filtro como rango semiabierto, &gt;= el día y &lt; el día siguiente.</a:t>
+            </a:r>
+          </a:p>
+          <a:p>
+            <a:r>
+              <a:t>  • Líneas 10-11: Lee el comentario: mismas 150 citas. Si preguntan por la velocidad, hoy las dos hacen Seq Scan; en una corrida en el navegador la primera tardó unos 130 ms y la segunda unos 40 ms, solo por no calcular la función.</a:t>
+            </a:r>
+          </a:p>
+          <a:p/>
+          <a:p>
+            <a:r>
+              <a:t>EJEMPLO: SELECT COUNT(*) de cada versión devuelve 150 en las dos, y un EXCEPT entre ellas devuelve 0 filas.</a:t>
+            </a:r>
+          </a:p>
+          <a:p/>
+          <a:p>
+            <a:r>
+              <a:t>CUIDADO: Los milisegundos cambian entre corridas y entre equipos. Lo que se afirma con seguridad es el conteo de filas y que el Filter de la segunda ya no contiene to_char.</a:t>
+            </a:r>
+          </a:p>
+          <a:p/>
+          <a:p>
+            <a:r>
+              <a:t>PASA A LA SIGUIENTE: Juntemos todos los cambios de la consulta de agenda en una sola comparación ANTES/DESPUÉS.</a:t>
+            </a:r>
+          </a:p>
+        </p:txBody>
+      </p:sp>
+      <p:sp>
+        <p:nvSpPr>
+          <p:cNvPr id="4" name="Slide Number Placeholder 3"/>
+          <p:cNvSpPr>
+            <a:spLocks noGrp="1"/>
+          </p:cNvSpPr>
+          <p:nvPr>
+            <p:ph type="sldNum" idx="5" sz="quarter"/>
+          </p:nvPr>
+        </p:nvSpPr>
+        <p:spPr/>
+      </p:sp>
+    </p:spTree>
+  </p:cSld>
+  <p:clrMapOvr>
+    <a:masterClrMapping/>
+  </p:clrMapOvr>
+</p:notes>
+</file>
+
+<file path=ppt/notesSlides/notesSlide17.xml><?xml version="1.0" encoding="utf-8"?>
+<p:notes xmlns:a="http://schemas.openxmlformats.org/drawingml/2006/main" xmlns:p="http://schemas.openxmlformats.org/presentationml/2006/main" xmlns:r="http://schemas.openxmlformats.org/officeDocument/2006/relationships">
+  <p:cSld>
+    <p:spTree>
+      <p:nvGrpSpPr>
+        <p:cNvPr id="1" name=""/>
+        <p:cNvGrpSpPr/>
+        <p:nvPr/>
+      </p:nvGrpSpPr>
+      <p:grpSpPr>
+        <a:xfrm>
+          <a:off x="0" y="0"/>
+          <a:ext cx="0" cy="0"/>
+          <a:chOff x="0" y="0"/>
+          <a:chExt cx="0" cy="0"/>
+        </a:xfrm>
+      </p:grpSpPr>
+      <p:sp>
+        <p:nvSpPr>
+          <p:cNvPr id="2" name="Slide Image Placeholder 1"/>
+          <p:cNvSpPr>
+            <a:spLocks noGrp="1"/>
+          </p:cNvSpPr>
+          <p:nvPr>
+            <p:ph type="sldImg" idx="2"/>
+          </p:nvPr>
+        </p:nvSpPr>
+        <p:spPr/>
+      </p:sp>
+      <p:sp>
+        <p:nvSpPr>
+          <p:cNvPr id="3" name="Notes Placeholder 2"/>
+          <p:cNvSpPr>
+            <a:spLocks noGrp="1"/>
+          </p:cNvSpPr>
+          <p:nvPr>
+            <p:ph type="body" idx="3" sz="quarter"/>
+          </p:nvPr>
+        </p:nvSpPr>
+        <p:spPr/>
+        <p:txBody>
+          <a:bodyPr/>
+          <a:lstStyle/>
+          <a:p>
+            <a:r>
+              <a:t>QUÉ ES (dilo así): La consulta de agenda del día tiene cuatro defectos, y cada uno su arreglo. No es una cuestión de gusto: las dos versiones devuelven las mismas 91 filas y lo que cambia se mide en el plan, en filas procesadas y pasadas sobre la tabla.</a:t>
+            </a:r>
+          </a:p>
+          <a:p/>
+          <a:p>
+            <a:r>
+              <a:t>CÓMO DARLA (≈3 min):</a:t>
+            </a:r>
+          </a:p>
+          <a:p>
+            <a:r>
+              <a:t>  • Al entrar: Columna ANTES, de arriba abajo: SELECT * arrastra todas las columnas de 4 tablas; to_char y UPPER esconden las columnas; las comas permiten un producto cartesiano si falta una condición; la subconsulta por fila se repite 2.006 veces.</a:t>
+            </a:r>
+          </a:p>
+          <a:p>
+            <a:r>
+              <a:t>  • Columna DESPUÉS: Los arreglos en el mismo orden: solo las 6 columnas que usa la pantalla, rango y comparación directa, JOIN … ON y LEFT JOIN con GROUP BY.</a:t>
+            </a:r>
+          </a:p>
+          <a:p>
+            <a:r>
+              <a:t>  • Abajo: El subtítulo: mismas 91 filas, y sin índices no hay Index Scan. Subraya que JOIN … ON no acelera: da el mismo plan que las comas; lo que gana es que un ON olvidado sea un error de sintaxis y no un cartesiano.</a:t>
+            </a:r>
+          </a:p>
+          <a:p/>
+          <a:p>
+            <a:r>
+              <a:t>EJEMPLO: Plan del ANTES de la agenda: Seq Scan on cita c con rows=1 estimada y 91 reales. Plan del DESPUÉS: el mismo Seq Scan, con rows=91 estimada y 91 reales. Mismo recorrido, pero ahora el motor sabe cuántas filas vienen.</a:t>
+            </a:r>
+          </a:p>
+          <a:p/>
+          <a:p>
+            <a:r>
+              <a:t>SI PREGUNTAN:</a:t>
+            </a:r>
+          </a:p>
+          <a:p>
+            <a:r>
+              <a:t>  • «¿Cambiar las comas por JOIN … ON no hace la consulta más rápida?» → No. PostgreSQL convierte las dos formas al mismo plan interno; se gana legibilidad y seguridad, no milisegundos.</a:t>
+            </a:r>
+          </a:p>
+          <a:p/>
+          <a:p>
+            <a:r>
+              <a:t>CUIDADO: Si presentas JOIN … ON como mejora de rendimiento, enseñas algo falso: es una mejora de seguridad y de legibilidad.</a:t>
+            </a:r>
+          </a:p>
+          <a:p/>
+          <a:p>
+            <a:r>
+              <a:t>PASA A LA SIGUIENTE: El cambio que sí es de órdenes de magnitud: la subconsulta correlacionada.</a:t>
+            </a:r>
+          </a:p>
+        </p:txBody>
+      </p:sp>
+      <p:sp>
+        <p:nvSpPr>
+          <p:cNvPr id="4" name="Slide Number Placeholder 3"/>
+          <p:cNvSpPr>
+            <a:spLocks noGrp="1"/>
+          </p:cNvSpPr>
+          <p:nvPr>
+            <p:ph type="sldNum" idx="5" sz="quarter"/>
+          </p:nvPr>
+        </p:nvSpPr>
+        <p:spPr/>
+      </p:sp>
+    </p:spTree>
+  </p:cSld>
+  <p:clrMapOvr>
+    <a:masterClrMapping/>
+  </p:clrMapOvr>
+</p:notes>
+</file>
+
+<file path=ppt/notesSlides/notesSlide18.xml><?xml version="1.0" encoding="utf-8"?>
+<p:notes xmlns:a="http://schemas.openxmlformats.org/drawingml/2006/main" xmlns:p="http://schemas.openxmlformats.org/presentationml/2006/main" xmlns:r="http://schemas.openxmlformats.org/officeDocument/2006/relationships">
+  <p:cSld>
+    <p:spTree>
+      <p:nvGrpSpPr>
+        <p:cNvPr id="1" name=""/>
+        <p:cNvGrpSpPr/>
+        <p:nvPr/>
+      </p:nvGrpSpPr>
+      <p:grpSpPr>
+        <a:xfrm>
+          <a:off x="0" y="0"/>
+          <a:ext cx="0" cy="0"/>
+          <a:chOff x="0" y="0"/>
+          <a:chExt cx="0" cy="0"/>
+        </a:xfrm>
+      </p:grpSpPr>
+      <p:sp>
+        <p:nvSpPr>
+          <p:cNvPr id="2" name="Slide Image Placeholder 1"/>
+          <p:cNvSpPr>
+            <a:spLocks noGrp="1"/>
+          </p:cNvSpPr>
+          <p:nvPr>
+            <p:ph type="sldImg" idx="2"/>
+          </p:nvPr>
+        </p:nvSpPr>
+        <p:spPr/>
+      </p:sp>
+      <p:sp>
+        <p:nvSpPr>
+          <p:cNvPr id="3" name="Notes Placeholder 2"/>
+          <p:cNvSpPr>
+            <a:spLocks noGrp="1"/>
+          </p:cNvSpPr>
+          <p:nvPr>
+            <p:ph type="body" idx="3" sz="quarter"/>
+          </p:nvPr>
+        </p:nvSpPr>
+        <p:spPr/>
+        <p:txBody>
+          <a:bodyPr/>
+          <a:lstStyle/>
+          <a:p>
+            <a:r>
+              <a:t>QUÉ ES (dilo así): La reescritura completa: la versión que repite la subconsulta por dueño y la que une y agrupa una sola vez. Dos detalles deciden que el resultado sea idéntico: LEFT JOIN y COUNT de una columna.</a:t>
+            </a:r>
+          </a:p>
+          <a:p/>
+          <a:p>
+            <a:r>
+              <a:t>CÓMO DARLA (≈3 min):</a:t>
+            </a:r>
+          </a:p>
+          <a:p>
+            <a:r>
+              <a:t>  • Al entrar: Líneas 1-5: ANTES. La subconsulta está en la lista de columnas y menciona d.id_dueno, de afuera: se ejecuta una vez por dueño (loops=2006 en el plan).</a:t>
+            </a:r>
+          </a:p>
+          <a:p>
+            <a:r>
+              <a:t>  • Líneas 7-12: DESPUÉS: LEFT JOIN mascota, GROUP BY d.id_dueno, d.nombre y COUNT(m.id_mascota). Se agrupa por id_dueno para no sumar como uno a dos dueños que se llamen igual.</a:t>
+            </a:r>
+          </a:p>
+          <a:p>
+            <a:r>
+              <a:t>  • Líneas 14-15: Los dos detalles. LEFT y no JOIN: con JOIN se pierden los 6 dueños sin mascotas. COUNT(m.id_mascota) y no COUNT(*): el LEFT JOIN deja una fila con NULL para esos dueños; COUNT(*) la cuenta como 1 y COUNT de la columna da 0.</a:t>
+            </a:r>
+          </a:p>
+          <a:p/>
+          <a:p>
+            <a:r>
+              <a:t>EJEMPLO: Los dueños 2001 a 2006 de la base de hoy no tienen mascotas: con COUNT(m.id_mascota) dan 0 y con COUNT(*) dan 1. El primero del ranking es Marcela Diaz, con 5 mascotas.</a:t>
+            </a:r>
+          </a:p>
+          <a:p/>
+          <a:p>
+            <a:r>
+              <a:t>SI PREGUNTAN:</a:t>
+            </a:r>
+          </a:p>
+          <a:p>
+            <a:r>
+              <a:t>  • «¿Por qué agrupar por d.id_dueno y no solo por d.nombre?» → Porque dos dueños pueden llamarse igual: agrupar solo por nombre los sumaría como si fueran uno.</a:t>
+            </a:r>
+          </a:p>
+          <a:p/>
+          <a:p>
+            <a:r>
+              <a:t>CUIDADO: Aceptar COUNT(*) «porque el total sale igual» es el error típico al revisar: solo cambia en los dueños sin mascotas, que quedan al final del ranking.</a:t>
+            </a:r>
+          </a:p>
+          <a:p/>
+          <a:p>
+            <a:r>
+              <a:t>PASA A LA SIGUIENTE: ¿Cómo se ve ese 2.006 en el plan? En un campo: loops.</a:t>
+            </a:r>
+          </a:p>
+        </p:txBody>
+      </p:sp>
+      <p:sp>
+        <p:nvSpPr>
+          <p:cNvPr id="4" name="Slide Number Placeholder 3"/>
+          <p:cNvSpPr>
+            <a:spLocks noGrp="1"/>
+          </p:cNvSpPr>
+          <p:nvPr>
+            <p:ph type="sldNum" idx="5" sz="quarter"/>
+          </p:nvPr>
+        </p:nvSpPr>
+        <p:spPr/>
+      </p:sp>
+    </p:spTree>
+  </p:cSld>
+  <p:clrMapOvr>
+    <a:masterClrMapping/>
+  </p:clrMapOvr>
+</p:notes>
+</file>
+
+<file path=ppt/notesSlides/notesSlide19.xml><?xml version="1.0" encoding="utf-8"?>
+<p:notes xmlns:a="http://schemas.openxmlformats.org/drawingml/2006/main" xmlns:p="http://schemas.openxmlformats.org/presentationml/2006/main" xmlns:r="http://schemas.openxmlformats.org/officeDocument/2006/relationships">
+  <p:cSld>
+    <p:spTree>
+      <p:nvGrpSpPr>
+        <p:cNvPr id="1" name=""/>
+        <p:cNvGrpSpPr/>
+        <p:nvPr/>
+      </p:nvGrpSpPr>
+      <p:grpSpPr>
+        <a:xfrm>
+          <a:off x="0" y="0"/>
+          <a:ext cx="0" cy="0"/>
+          <a:chOff x="0" y="0"/>
+          <a:chExt cx="0" cy="0"/>
+        </a:xfrm>
+      </p:grpSpPr>
+      <p:sp>
+        <p:nvSpPr>
+          <p:cNvPr id="2" name="Slide Image Placeholder 1"/>
+          <p:cNvSpPr>
+            <a:spLocks noGrp="1"/>
+          </p:cNvSpPr>
+          <p:nvPr>
+            <p:ph type="sldImg" idx="2"/>
+          </p:nvPr>
+        </p:nvSpPr>
+        <p:spPr/>
+      </p:sp>
+      <p:sp>
+        <p:nvSpPr>
+          <p:cNvPr id="3" name="Notes Placeholder 2"/>
+          <p:cNvSpPr>
+            <a:spLocks noGrp="1"/>
+          </p:cNvSpPr>
+          <p:nvPr>
+            <p:ph type="body" idx="3" sz="quarter"/>
+          </p:nvPr>
+        </p:nvSpPr>
+        <p:spPr/>
+        <p:txBody>
+          <a:bodyPr/>
+          <a:lstStyle/>
+          <a:p>
+            <a:r>
+              <a:t>QUÉ ES (dilo así): loops es el único campo del plan que dice «esto se repitió». Un nodo puede mostrar un tiempo pequeño y ser el más caro, porque ese tiempo es por vuelta. La lámina muestra el plan real de la versión ANTES y el de la reescritura.</a:t>
+            </a:r>
+          </a:p>
+          <a:p/>
+          <a:p>
+            <a:r>
+              <a:t>CÓMO DARLA (≈2 min):</a:t>
+            </a:r>
+          </a:p>
+          <a:p>
+            <a:r>
+              <a:t>  • Al entrar: Arriba, el ANTES: Seq Scan on dueno d y, colgado de él, SubPlan 1 con un Aggregate de 2,3 ms y loops=2006 (resaltado). Debajo, el Seq Scan on mascota con Rows Removed by Filter: 5006 en cada vuelta.</a:t>
+            </a:r>
+          </a:p>
+          <a:p>
+            <a:r>
+              <a:t>  • La cuenta: 2,3 ms por 2.006 vueltas ≈ 4,6 s: el nodo que parece barato es el culpable. Quien solo mira el número más grande señala el nodo equivocado.</a:t>
+            </a:r>
+          </a:p>
+          <a:p>
+            <a:r>
+              <a:t>  • Abajo: El DESPUÉS: HashAggregate sobre un Hash Right Join; mascota y dueno se leen una vez (loops=1). Cierra con los dos recuadros: LEFT JOIN y COUNT(m.id_mascota).</a:t>
+            </a:r>
+          </a:p>
+          <a:p/>
+          <a:p>
+            <a:r>
+              <a:t>EJEMPLO: Plan real en el navegador: Aggregate (actual time=2.298..2.300 rows=1 loops=2006) y Execution Time: 4909 ms; la reescritura, Execution Time: 188 ms.</a:t>
+            </a:r>
+          </a:p>
+          <a:p/>
+          <a:p>
+            <a:r>
+              <a:t>SI PREGUNTAN:</a:t>
+            </a:r>
+          </a:p>
+          <a:p>
+            <a:r>
+              <a:t>  • «¿Dónde aparece loops?» → Al final del paréntesis de tiempos reales de cada nodo: (actual time=… rows=… loops=…). Solo sale con EXPLAIN ANALYZE.</a:t>
+            </a:r>
+          </a:p>
+          <a:p/>
+          <a:p>
+            <a:r>
+              <a:t>CUIDADO: La versión de la demo cuenta citas, no mascotas: cada vuelta recorre las 30.010 citas y la consulta completa tarda minutos en el navegador. Avisa antes, o acótala con WHERE d.id_dueno &lt;= 200 (loops=200).</a:t>
+            </a:r>
+          </a:p>
+          <a:p/>
+          <a:p>
+            <a:r>
+              <a:t>PASA A LA SIGUIENTE: Más rápido no sirve de nada si el resultado cambió: hay que probar que es el mismo.</a:t>
             </a:r>
           </a:p>
         </p:txBody>
@@ -1068,97 +1775,247 @@
           <a:lstStyle/>
           <a:p>
             <a:r>
-              <a:t>DESARROLLO (para explicarlo, no se proyecta):</a:t>
-            </a:r>
-          </a:p>
-          <a:p>
-            <a:r>
-              <a:t>De cada plan se leen tres cosas concretas: el nodo mas costoso, las filas estimadas frente a las reales y el tiempo total.</a:t>
-            </a:r>
-          </a:p>
-          <a:p>
-            <a:r>
-              <a:t>Leer un plan tiene una regla de orden que casi nadie explica: es un arbol y se lee de adentro hacia afuera, empezando por los nodos mas indentados, que son las hojas; cada nodo consume las filas de sus hijos, y la primera linea impresa es la ULTIMA operacion.</a:t>
-            </a:r>
-          </a:p>
-          <a:p>
-            <a:r>
-              <a:t>En PostgreSQL se escribe EXPLAIN antes de la consulta, y para la agenda de la clase aparece algo de esta forma: un Hash Join en la primera linea con su cost=... rows=... width=...</a:t>
-            </a:r>
-          </a:p>
-          <a:p>
-            <a:r>
-              <a:t>Y debajo, mas indentado, un Seq Scan on cita c con el filtro del dia y un Hash construido sobre un Seq Scan on mascota m.</a:t>
-            </a:r>
-          </a:p>
-          <a:p>
-            <a:r>
-              <a:t>Los cuatro campos hay que saber nombrarlos: cost trae el costo de arranque y el costo total separados por dos puntos; rows son las filas que el motor ESTIMA</a:t>
-            </a:r>
-          </a:p>
-          <a:p>
-            <a:r>
-              <a:t>Width es el ancho promedio de la fila en bytes; y loops, que solo aparece con ANALYZE, dice cuantas veces se ejecuto ese nodo.</a:t>
-            </a:r>
-          </a:p>
-          <a:p>
-            <a:r>
-              <a:t>El costo NO esta en milisegundos, es una unidad relativa donde 1.0 equivale por convencion a leer secuencialmente una pagina de 8 KB, y solo sirve para comparar planes del mismo motor.</a:t>
-            </a:r>
-          </a:p>
-          <a:p>
-            <a:r>
-              <a:t>Los tiempos reales los da EXPLAIN ANALYZE, que agrega actual time, actual rows, loops y el Execution Time del final; con la opcion BUFFERS agrega ademas cuantos bloques de 8 KB se leyeron y cuantos se acertaron en memoria</a:t>
-            </a:r>
-          </a:p>
-          <a:p>
-            <a:r>
-              <a:t>Que es de donde sale el numero exacto de paginas de cada tabla sin tener que estimarlo.</a:t>
-            </a:r>
-          </a:p>
-          <a:p>
-            <a:r>
-              <a:t>Advertencia que evita un accidente en clase: ANALYZE EJECUTA la sentencia, asi que sobre un UPDATE o un DELETE hay que envolverlo en BEGIN y ROLLBACK, lo cual ya anticipa la Clase 8.</a:t>
-            </a:r>
-          </a:p>
-          <a:p>
-            <a:r>
-              <a:t>Un nodo de 0,5 ms con loops=2006 cuesta un segundo entero y aparece impreso como el mas barato de la pantalla.</a:t>
-            </a:r>
-          </a:p>
-          <a:p>
-            <a:r>
-              <a:t>En Oracle la misma lectura son dos pasos, EXPLAIN PLAN FOR y luego SELECT * FROM TABLE(DBMS_XPLAN.DISPLAY), que imprime Id, Operation, Name, Rows, Bytes, Cost y Time con la indentacion como jerarquia; se menciona como contraste, no como herramienta del dia.</a:t>
-            </a:r>
-          </a:p>
-          <a:p>
-            <a:r>
-              <a:t>NOTAS:</a:t>
-            </a:r>
-          </a:p>
-          <a:p>
-            <a:r>
-              <a:t>Y hay dos trampas al senalar el nodo mas costoso.</a:t>
-            </a:r>
-          </a:p>
-          <a:p>
-            <a:r>
-              <a:t>Fuera de la lamina (habla de la practica): El costo NO esta en milisegundos, es una unidad relativa donde 1.0 equivale por convencion a leer secuencialmente una pagina de 8 KB, y solo sirve para comparar planes del mismo motor; confundir cost con tiempo es el error mas frecuente al calificar esta pregunta.</a:t>
-            </a:r>
-          </a:p>
-          <a:p>
-            <a:r>
-              <a:t>Fuera de la lamina (habla de la practica): Advertencia que evita un accidente en clase: ANALYZE EJECUTA la sentencia, asi que sobre un UPDATE o un DELETE hay que envolverlo en BEGIN y ROLLBACK, lo cual ya anticipa la Clase 8; con SELECT no hay riesgo y el taller es solo de SELECT.</a:t>
-            </a:r>
-          </a:p>
-          <a:p>
-            <a:r>
-              <a:t>Fuera de la lamina (habla de la practica): Y hay dos trampas al senalar el nodo mas costoso, que el docente tiene que conocer antes de calificar: el tiempo que muestra un nodo INCLUYE el de sus hijos, de modo que la primera linea siempre parece la mas cara sin serlo, y actual time es POR VUELTA, asi que el costo real de un nodo es su tiempo multiplicado por loops.</a:t>
-            </a:r>
-          </a:p>
-          <a:p>
-            <a:r>
-              <a:t>Fuera de la lamina (habla de la practica): Un nodo de 0,5 ms con loops=2006 cuesta un segundo entero y aparece impreso como el mas barato de la pantalla; es exactamente lo que va a pasar en la pregunta 3.</a:t>
+              <a:t>QUÉ ES (dilo así): EXPLAIN delante de una consulta no la ejecuta: muestra el plan que el optimizador eligió. Se imprime como una lista con sangrías, pero es un árbol: cada línea con más sangría es hija de la de arriba. Primero corren las hojas, que leen las tablas, y la primera línea es la última operación, la que entrega el resultado.</a:t>
+            </a:r>
+          </a:p>
+          <a:p/>
+          <a:p>
+            <a:r>
+              <a:t>CÓMO DARLA (≈4 min):</a:t>
+            </a:r>
+          </a:p>
+          <a:p>
+            <a:r>
+              <a:t>  • Al entrar: Lee en voz alta lo que imprime EXPLAIN para la consulta del día (cita con mascota, citas del 2026-03-10): Hash Join arriba; debajo y más adentro, el Seq Scan sobre cita con su filtro y el Hash armado sobre el Seq Scan de mascota. Pregunta: «¿qué ocurre primero?». La mayoría dirá «el Hash Join».</a:t>
+            </a:r>
+          </a:p>
+          <a:p>
+            <a:r>
+              <a:t>  • Clic 1: Las mismas líneas dibujadas como árbol: el Hash Join es la raíz y los dos Seq Scan son las hojas. La sangría decide quién es hijo de quién.</a:t>
+            </a:r>
+          </a:p>
+          <a:p>
+            <a:r>
+              <a:t>  • Clic 2: Los números marcan el orden real: 1) se lee cita, 2) se lee mascota, 3) con mascota se arma la tabla hash, 4) el Hash Join cruza. Lee la regla: la primera línea es la ÚLTIMA operación.</a:t>
+            </a:r>
+          </a:p>
+          <a:p/>
+          <a:p>
+            <a:r>
+              <a:t>EJEMPLO: En la base de la clase ese plan dice Hash Join (cost=149.68..851.22 rows=150): 150 filas estimadas, que son las 150 citas del 2026-03-10.</a:t>
+            </a:r>
+          </a:p>
+          <a:p/>
+          <a:p>
+            <a:r>
+              <a:t>SI PREGUNTAN:</a:t>
+            </a:r>
+          </a:p>
+          <a:p>
+            <a:r>
+              <a:t>  • «¿EXPLAIN ejecuta la consulta?» → No: solo muestra el plan con estimaciones. EXPLAIN ANALYZE sí la ejecuta y agrega tiempos y filas reales; por eso sobre un UPDATE o un DELETE se envuelve en BEGIN … ROLLBACK.</a:t>
+            </a:r>
+          </a:p>
+          <a:p>
+            <a:r>
+              <a:t>  • «¿Qué es el Hash?» → Una tabla en memoria armada con las filas de mascota, organizada por id_mascota, para encontrar rápido la mascota de cada cita al cruzar.</a:t>
+            </a:r>
+          </a:p>
+          <a:p/>
+          <a:p>
+            <a:r>
+              <a:t>CUIDADO: El error más común, también del docente, es leer el plan de arriba hacia abajo como una lista de pasos. Si se enseña así, el grupo interpretará al revés todos los planes del curso.</a:t>
+            </a:r>
+          </a:p>
+          <a:p/>
+          <a:p>
+            <a:r>
+              <a:t>PASA A LA SIGUIENTE: Con ANALYZE el plan deja de ser una predicción y se vuelve evidencia.</a:t>
+            </a:r>
+          </a:p>
+        </p:txBody>
+      </p:sp>
+      <p:sp>
+        <p:nvSpPr>
+          <p:cNvPr id="4" name="Slide Number Placeholder 3"/>
+          <p:cNvSpPr>
+            <a:spLocks noGrp="1"/>
+          </p:cNvSpPr>
+          <p:nvPr>
+            <p:ph type="sldNum" idx="5" sz="quarter"/>
+          </p:nvPr>
+        </p:nvSpPr>
+        <p:spPr/>
+      </p:sp>
+    </p:spTree>
+  </p:cSld>
+  <p:clrMapOvr>
+    <a:masterClrMapping/>
+  </p:clrMapOvr>
+</p:notes>
+</file>
+
+<file path=ppt/notesSlides/notesSlide20.xml><?xml version="1.0" encoding="utf-8"?>
+<p:notes xmlns:a="http://schemas.openxmlformats.org/drawingml/2006/main" xmlns:p="http://schemas.openxmlformats.org/presentationml/2006/main" xmlns:r="http://schemas.openxmlformats.org/officeDocument/2006/relationships">
+  <p:cSld>
+    <p:spTree>
+      <p:nvGrpSpPr>
+        <p:cNvPr id="1" name=""/>
+        <p:cNvGrpSpPr/>
+        <p:nvPr/>
+      </p:nvGrpSpPr>
+      <p:grpSpPr>
+        <a:xfrm>
+          <a:off x="0" y="0"/>
+          <a:ext cx="0" cy="0"/>
+          <a:chOff x="0" y="0"/>
+          <a:chExt cx="0" cy="0"/>
+        </a:xfrm>
+      </p:grpSpPr>
+      <p:sp>
+        <p:nvSpPr>
+          <p:cNvPr id="2" name="Slide Image Placeholder 1"/>
+          <p:cNvSpPr>
+            <a:spLocks noGrp="1"/>
+          </p:cNvSpPr>
+          <p:nvPr>
+            <p:ph type="sldImg" idx="2"/>
+          </p:nvPr>
+        </p:nvSpPr>
+        <p:spPr/>
+      </p:sp>
+      <p:sp>
+        <p:nvSpPr>
+          <p:cNvPr id="3" name="Notes Placeholder 2"/>
+          <p:cNvSpPr>
+            <a:spLocks noGrp="1"/>
+          </p:cNvSpPr>
+          <p:nvPr>
+            <p:ph type="body" idx="3" sz="quarter"/>
+          </p:nvPr>
+        </p:nvSpPr>
+        <p:spPr/>
+        <p:txBody>
+          <a:bodyPr/>
+          <a:lstStyle/>
+          <a:p>
+            <a:r>
+              <a:t>QUÉ ES (dilo así): La demo corre el script de la clase y muestra con salidas reales lo que se explicó: la agenda optimizada devuelve lo mismo, el ranking deja de repetirse por dueño y la equivalencia se prueba con consultas.</a:t>
+            </a:r>
+          </a:p>
+          <a:p/>
+          <a:p>
+            <a:r>
+              <a:t>CÓMO DARLA (≈15 min):</a:t>
+            </a:r>
+          </a:p>
+          <a:p>
+            <a:r>
+              <a:t>  • Al entrar: 1) Siembra y conteos de control (30.010; 91/45/14). 2) Agenda ANTES y DESPUÉS con EXPLAIN (ANALYZE, BUFFERS): el ANTES estima rows=1 y entrega 91; el DESPUÉS estima 91. 3) La misma consulta con LIMIT 50: el Seq Scan sigue ahí.</a:t>
+            </a:r>
+          </a:p>
+          <a:p>
+            <a:r>
+              <a:t>  • Después: 4) El ranking: corre primero la versión ANTES acotada a 200 dueños (WHERE d.id_dueno &lt;= 200) y muestra loops=200; di que la completa es diez veces eso. 5) La reescritura con LEFT JOIN y GROUP BY. 6) Las pruebas: 91 = 91, EXCEPT con 0 filas y el contraejemplo COUNT(*) contra COUNT(c.id_cita).</a:t>
+            </a:r>
+          </a:p>
+          <a:p/>
+          <a:p>
+            <a:r>
+              <a:t>EJEMPLO: En el contraejemplo, los dueños 2001 a 2006 dan 0 con COUNT(c.id_cita) y 1 con COUNT(*).</a:t>
+            </a:r>
+          </a:p>
+          <a:p/>
+          <a:p>
+            <a:r>
+              <a:t>CUIDADO: La versión ANTES completa del ranking tarda minutos en el navegador (en una prueba, unos tres minutos y medio; la acotada, unos 20 s). Avisa antes de correrla: si alguien recarga la página, pierde lo que tenía.</a:t>
+            </a:r>
+          </a:p>
+          <a:p/>
+          <a:p>
+            <a:r>
+              <a:t>PASA A LA SIGUIENTE: Cierre de la clase.</a:t>
+            </a:r>
+          </a:p>
+        </p:txBody>
+      </p:sp>
+      <p:sp>
+        <p:nvSpPr>
+          <p:cNvPr id="4" name="Slide Number Placeholder 3"/>
+          <p:cNvSpPr>
+            <a:spLocks noGrp="1"/>
+          </p:cNvSpPr>
+          <p:nvPr>
+            <p:ph type="sldNum" idx="5" sz="quarter"/>
+          </p:nvPr>
+        </p:nvSpPr>
+        <p:spPr/>
+      </p:sp>
+    </p:spTree>
+  </p:cSld>
+  <p:clrMapOvr>
+    <a:masterClrMapping/>
+  </p:clrMapOvr>
+</p:notes>
+</file>
+
+<file path=ppt/notesSlides/notesSlide21.xml><?xml version="1.0" encoding="utf-8"?>
+<p:notes xmlns:a="http://schemas.openxmlformats.org/drawingml/2006/main" xmlns:p="http://schemas.openxmlformats.org/presentationml/2006/main" xmlns:r="http://schemas.openxmlformats.org/officeDocument/2006/relationships">
+  <p:cSld>
+    <p:spTree>
+      <p:nvGrpSpPr>
+        <p:cNvPr id="1" name=""/>
+        <p:cNvGrpSpPr/>
+        <p:nvPr/>
+      </p:nvGrpSpPr>
+      <p:grpSpPr>
+        <a:xfrm>
+          <a:off x="0" y="0"/>
+          <a:ext cx="0" cy="0"/>
+          <a:chOff x="0" y="0"/>
+          <a:chExt cx="0" cy="0"/>
+        </a:xfrm>
+      </p:grpSpPr>
+      <p:sp>
+        <p:nvSpPr>
+          <p:cNvPr id="2" name="Slide Image Placeholder 1"/>
+          <p:cNvSpPr>
+            <a:spLocks noGrp="1"/>
+          </p:cNvSpPr>
+          <p:nvPr>
+            <p:ph type="sldImg" idx="2"/>
+          </p:nvPr>
+        </p:nvSpPr>
+        <p:spPr/>
+      </p:sp>
+      <p:sp>
+        <p:nvSpPr>
+          <p:cNvPr id="3" name="Notes Placeholder 2"/>
+          <p:cNvSpPr>
+            <a:spLocks noGrp="1"/>
+          </p:cNvSpPr>
+          <p:nvPr>
+            <p:ph type="body" idx="3" sz="quarter"/>
+          </p:nvPr>
+        </p:nvSpPr>
+        <p:spPr/>
+        <p:txBody>
+          <a:bodyPr/>
+          <a:lstStyle/>
+          <a:p>
+            <a:r>
+              <a:t>QUÉ ES (dilo así): Cierre: optimizar es ayudar al optimizador a encontrar un plan mejor sin cambiar la respuesta, y demostrarlo con el plan y con un conteo.</a:t>
+            </a:r>
+          </a:p>
+          <a:p/>
+          <a:p>
+            <a:r>
+              <a:t>CÓMO DARLA (≈3 min):</a:t>
+            </a:r>
+          </a:p>
+          <a:p>
+            <a:r>
+              <a:t>  • Al entrar: Pregunta de salida: «nombren un cambio que acelera y uno que no». Se espera: quitar la función de la columna o la subconsulta por fila (acelera); cambiar comas por JOIN … ON (no acelera). Anuncia que la Clase 7 crea los índices que hoy se echaron de menos.</a:t>
             </a:r>
           </a:p>
         </p:txBody>
@@ -1228,12 +2085,67 @@
           <a:lstStyle/>
           <a:p>
             <a:r>
-              <a:t>Fuera de la lamina (habla de la practica, no del tema):</a:t>
-            </a:r>
-          </a:p>
-          <a:p>
-            <a:r>
-              <a:t>- Es lo que se anota en la tabla de la pregunta 2.</a:t>
+              <a:t>QUÉ ES (dilo así): Cada línea del plan trae dos grupos de números. En el primer paréntesis, lo que el motor estimó antes de ejecutar: costo, filas y ancho de la fila. En el segundo, lo que pasó: tiempo real, filas reales y cuántas veces se repitió ese nodo (loops). Leer un plan es comparar los dos grupos.</a:t>
+            </a:r>
+          </a:p>
+          <a:p/>
+          <a:p>
+            <a:r>
+              <a:t>CÓMO DARLA (≈3 min):</a:t>
+            </a:r>
+          </a:p>
+          <a:p>
+            <a:r>
+              <a:t>  • Al entrar: Arriba, una línea real del plan de hoy: Seq Scan on cita c (cost=0.00..701.15 rows=150 width=16) y su parte real (actual time … rows=150 loops=1).</a:t>
+            </a:r>
+          </a:p>
+          <a:p>
+            <a:r>
+              <a:t>  • Columna izquierda: Lo estimado: cost es arranque..total en la unidad del motor (1 = leer una página), no milisegundos; rows, las filas que cree que saldrán; width, los bytes promedio por fila.</a:t>
+            </a:r>
+          </a:p>
+          <a:p>
+            <a:r>
+              <a:t>  • Columna derecha: Lo real: actual time en milisegundos POR VUELTA; rows, las filas que salieron; loops, cuántas veces se ejecutó el nodo.</a:t>
+            </a:r>
+          </a:p>
+          <a:p>
+            <a:r>
+              <a:t>  • Abajo: La regla del nodo más costoso: tiempo por loops, sabiendo que el tiempo de un nodo ya incluye el de sus hijos. Un nodo de 0,5 ms con loops=2006 cuesta un segundo aunque parezca el más barato.</a:t>
+            </a:r>
+          </a:p>
+          <a:p/>
+          <a:p>
+            <a:r>
+              <a:t>EJEMPLO: La versión ANTES de la agenda (con to_char y UPPER sobre las columnas) estima rows=1 y entrega 91: con una función sobre la columna el motor no puede usar sus estadísticas y aplica una selectividad por omisión. Esa diferencia de 91 veces es la señal que hay que saber leer.</a:t>
+            </a:r>
+          </a:p>
+          <a:p/>
+          <a:p>
+            <a:r>
+              <a:t>SI PREGUNTAN:</a:t>
+            </a:r>
+          </a:p>
+          <a:p>
+            <a:r>
+              <a:t>  • «¿Una diferencia de 2 veces entre estimado y real es grave?» → No, es normal. La alarma es de 10 veces o más: estadísticas viejas o dos filtros que el motor cree independientes y no lo son.</a:t>
+            </a:r>
+          </a:p>
+          <a:p>
+            <a:r>
+              <a:t>  • «¿Por qué la primera línea muestra el tiempo más alto?» → Porque el tiempo de cada nodo incluye el de sus hijos y la raíz los acumula todos. El culpable se busca por el tiempo propio de cada nodo multiplicado por loops.</a:t>
+            </a:r>
+          </a:p>
+          <a:p/>
+          <a:p>
+            <a:r>
+              <a:t>CUIDADO: Confundir cost con milisegundos es el error más frecuente al leer planes: el costo solo sirve para comparar planes del mismo motor.</a:t>
+            </a:r>
+          </a:p>
+          <a:p/>
+          <a:p>
+            <a:r>
+              <a:t>PASA A LA SIGUIENTE: ¿De dónde saca el motor sus estimaciones? De las estadísticas.</a:t>
             </a:r>
           </a:p>
         </p:txBody>
@@ -1303,87 +2215,62 @@
           <a:lstStyle/>
           <a:p>
             <a:r>
-              <a:t>DESARROLLO (para explicarlo, no se proyecta):</a:t>
-            </a:r>
-          </a:p>
-          <a:p>
-            <a:r>
-              <a:t>Las estadisticas del optimizador son los metadatos que describen los datos sin leerlos: filas de la tabla, bloques que ocupa</a:t>
-            </a:r>
-          </a:p>
-          <a:p>
-            <a:r>
-              <a:t>Valores distintos por columna, fraccion de nulos y un histograma que reparte los valores en cubos para saber si estan parejos o concentrados.</a:t>
-            </a:r>
-          </a:p>
-          <a:p>
-            <a:r>
-              <a:t>PostgreSQL las recolecta con ANALYZE cita, con 100 cubos por columna por omision</a:t>
-            </a:r>
-          </a:p>
-          <a:p>
-            <a:r>
-              <a:t>Oracle usa DBMS_STATS.GATHER_TABLE_STATS(USER, 'CITA') y las expone en USER_TABLES.NUM_ROWS.</a:t>
-            </a:r>
-          </a:p>
-          <a:p>
-            <a:r>
-              <a:t>En la base de la clase el ANALYZE ya esta corrido, y eso es deliberado: si faltara.</a:t>
-            </a:r>
-          </a:p>
-          <a:p>
-            <a:r>
-              <a:t>De aqui sale la explicacion de un fenomeno que desconcierta: la misma consulta, sin cambiar una letra, puede tener hoy un plan distinto al de ayer</a:t>
-            </a:r>
-          </a:p>
-          <a:p>
-            <a:r>
-              <a:t>Porque la tabla crecio, porque se recolectaron estadisticas nuevas, porque alguien creo un indice o porque el valor comparado cambio la selectividad estimada.</a:t>
-            </a:r>
-          </a:p>
-          <a:p>
-            <a:r>
-              <a:t>El plan no es propiedad del texto SQL, es una decision tomada con la informacion disponible en ese instante.</a:t>
-            </a:r>
-          </a:p>
-          <a:p>
-            <a:r>
-              <a:t>Correlacionados quiere decir que el motor multiplica las selectividades de dos filtros como si fueran independientes y no lo son: en la clínica</a:t>
-            </a:r>
-          </a:p>
-          <a:p>
-            <a:r>
-              <a:t>Fecha_hora del 2026-03-10 y estado = 'PROGRAMADA' no lo son, porque el reparto de estados no es igual en todos los dias.</a:t>
-            </a:r>
-          </a:p>
-          <a:p>
-            <a:r>
-              <a:t>NOTAS:</a:t>
-            </a:r>
-          </a:p>
-          <a:p>
-            <a:r>
-              <a:t>De ahi que se comparen rows estimadas contra actual rows.</a:t>
-            </a:r>
-          </a:p>
-          <a:p>
-            <a:r>
-              <a:t>Conviene marcar la diferencia de palabras en voz alta, porque van a aparecer las dos hoy: predicados correlacionados es esto, un asunto de estimacion; subconsulta correlacionada.</a:t>
-            </a:r>
-          </a:p>
-          <a:p>
-            <a:r>
-              <a:t>Fuera de la lamina (habla de la practica): En la base de la clase el ANALYZE ya esta corrido, y eso es deliberado: si faltara, el estimado contra real de la pregunta 2 saldria disparatado por una razon que no es el tema de la clase y el estudiante concluiria lo contrario de lo que hay que aprender.</a:t>
-            </a:r>
-          </a:p>
-          <a:p>
-            <a:r>
-              <a:t>Fuera de la lamina (habla de la practica): De ahi que se comparen rows estimadas contra actual rows, que es literalmente una de las tres columnas que pide la pregunta 2: una divergencia de 2 veces es normal, una de 10 veces o mas es la senal clasica de estadisticas viejas o de predicados correlacionados, y esa es tambien la sexta afirmacion de la pregunta 4, que es correcta.</a:t>
-            </a:r>
-          </a:p>
-          <a:p>
-            <a:r>
-              <a:t>Fuera de la lamina (habla de la practica): Conviene marcar la diferencia de palabras en voz alta, porque van a aparecer las dos hoy: predicados correlacionados es esto, un asunto de estimacion; subconsulta correlacionada, la de la pregunta 3, es otra cosa completamente distinta y es un asunto de numero de ejecuciones.</a:t>
+              <a:t>QUÉ ES (dilo así): El optimizador no lee la tabla para decidir: consulta una ficha que la describe. Cuántas filas tiene, cuántas páginas ocupa, cuántos valores distintos hay en cada columna, qué fracción es nula y cómo se reparten los valores. Esa ficha son las estadísticas, y las actualiza el comando ANALYZE.</a:t>
+            </a:r>
+          </a:p>
+          <a:p/>
+          <a:p>
+            <a:r>
+              <a:t>CÓMO DARLA (≈3 min):</a:t>
+            </a:r>
+          </a:p>
+          <a:p>
+            <a:r>
+              <a:t>  • Al entrar: La tabla cita, ANALYZE y la ficha con las cifras reales de la base de hoy: 30.010 filas, 251 páginas de 8 KB, 3 valores distintos en estado, 1.810 en fecha_hora y ningún nulo.</a:t>
+            </a:r>
+          </a:p>
+          <a:p>
+            <a:r>
+              <a:t>  • Clic 1: El reparto: estado está concentrado (61 % PROGRAMADA, 30 % ATENDIDA, 9 % CANCELADA) y fecha_hora es pareja (150 citas cada día). Con eso el motor calcula cuántas filas dejará pasar cada filtro.</a:t>
+            </a:r>
+          </a:p>
+          <a:p>
+            <a:r>
+              <a:t>  • Clic 2: Lee la conclusión y remata: el plan no es propiedad del texto SQL; es una decisión tomada con las estadísticas de ese momento.</a:t>
+            </a:r>
+          </a:p>
+          <a:p/>
+          <a:p>
+            <a:r>
+              <a:t>EJEMPLO: SELECT relpages, reltuples FROM pg_class WHERE relname = 'cita'; devuelve 251 y 30010. SELECT attname, n_distinct FROM pg_stats WHERE tablename = 'cita'; muestra 3 para estado y 1810 para fecha_hora.</a:t>
+            </a:r>
+          </a:p>
+          <a:p/>
+          <a:p>
+            <a:r>
+              <a:t>SI PREGUNTAN:</a:t>
+            </a:r>
+          </a:p>
+          <a:p>
+            <a:r>
+              <a:t>  • «¿Cada cuánto hay que correr ANALYZE?» → En un servidor, PostgreSQL lo hace solo en segundo plano (autovacuum) cuando la tabla cambia bastante. Después de una carga grande o de crear un índice conviene correrlo a mano.</a:t>
+            </a:r>
+          </a:p>
+          <a:p>
+            <a:r>
+              <a:t>  • «¿Por qué la misma consulta cambia de plan de un día a otro?» → Porque la tabla creció, se recolectaron estadísticas nuevas, alguien creó un índice o el valor buscado es más o menos frecuente.</a:t>
+            </a:r>
+          </a:p>
+          <a:p/>
+          <a:p>
+            <a:r>
+              <a:t>CUIDADO: No confundas «predicados correlacionados» (dos filtros que no son independientes y engañan la estimación) con la «subconsulta correlacionada» que viene después, que es un problema de cuántas veces se ejecuta algo.</a:t>
+            </a:r>
+          </a:p>
+          <a:p/>
+          <a:p>
+            <a:r>
+              <a:t>PASA A LA SIGUIENTE: Con esas estadísticas el motor calcula dos números: cardinalidad y selectividad.</a:t>
             </a:r>
           </a:p>
         </p:txBody>
@@ -1453,72 +2340,62 @@
           <a:lstStyle/>
           <a:p>
             <a:r>
-              <a:t>DESARROLLO (para explicarlo, no se proyecta):</a:t>
-            </a:r>
-          </a:p>
-          <a:p>
-            <a:r>
-              <a:t>La cardinalidad de una columna es la cantidad de valores distintos que contiene, y conviene advertir que la palabra se usa tambien para las filas que entrega un nodo del plan.</a:t>
-            </a:r>
-          </a:p>
-          <a:p>
-            <a:r>
-              <a:t>La selectividad de un predicado es la fraccion de filas que sobreviven al filtro, entre 0 y 1, y es lo que el optimizador calcula con las estadisticas.</a:t>
-            </a:r>
-          </a:p>
-          <a:p>
-            <a:r>
-              <a:t>Las cifras que hay que usar son las de la base de la clase, no unas inventadas</a:t>
-            </a:r>
-          </a:p>
-          <a:p>
-            <a:r>
-              <a:t>Porque el estudiante las va a ver en su pantalla: 2.006 duenos, 5.008 mascotas, 16 veterinarios y 30.010 citas repartidas entre el 2026-01-05 y el 2026-07-23, o sea 200 dias distintos con exactamente 150 citas cada uno.</a:t>
-            </a:r>
-          </a:p>
-          <a:p>
-            <a:r>
-              <a:t>Con eso, WHERE c.fecha_hora &gt;= TIMESTAMP '2026-03-10 00:00:00' AND c.fecha_hora &lt; TIMESTAMP '2026-03-11 00:00:00' tiene selectividad 150 sobre 30.010, o sea 0,5 %: filtro excelente.</a:t>
-            </a:r>
-          </a:p>
-          <a:p>
-            <a:r>
-              <a:t>WHERE c.estado = 'PROGRAMADA', sobre tres valores distintos (PROGRAMADA, ATENDIDA, CANCELADA), no filtra casi nada: son 18.187 filas, el 60,6 %, porque la siembra hace CANCELADA una de cada once citas y ATENDIDA una de cada tres de las que quedan.</a:t>
-            </a:r>
-          </a:p>
-          <a:p>
-            <a:r>
-              <a:t>Y WHERE m.activa = 'S', con 4.712 de las 5.008 mascotas activas, tiene selectividad 0,94: no filtra nada.</a:t>
-            </a:r>
-          </a:p>
-          <a:p>
-            <a:r>
-              <a:t>Los dos filtros juntos dejan 91 filas de 30.010, el 0,3 %.</a:t>
-            </a:r>
-          </a:p>
-          <a:p>
-            <a:r>
-              <a:t>La regla practica, convencion de oficio y no regla dura, dice que por debajo del 5 % de las filas conviene el indice, entre 5 % y 20 % depende del motor, y por encima del 20 % o 25 % gana leer la tabla completa.</a:t>
-            </a:r>
-          </a:p>
-          <a:p>
-            <a:r>
-              <a:t>Su origen es medible: PostgreSQL valora una lectura aleatoria de pagina en 4,0 y una secuencial en 1,0 (parametros random_page_cost y seq_page_cost), y por eso la regla se enuncia en filas pero el motor decide en costos, que no es lo mismo.</a:t>
-            </a:r>
-          </a:p>
-          <a:p>
-            <a:r>
-              <a:t>NOTAS:</a:t>
-            </a:r>
-          </a:p>
-          <a:p>
-            <a:r>
-              <a:t>Dos terminos explican por que el motor decide lo que decide.</a:t>
-            </a:r>
-          </a:p>
-          <a:p>
-            <a:r>
-              <a:t>Fuera de la lamina (habla de la practica): Los dos filtros juntos dejan 91 filas de 30.010, el 0,3 %, y ese 91 es el numero que el estudiante tiene que ver dos veces en la pregunta 1.</a:t>
+              <a:t>QUÉ ES (dilo así): Cardinalidad es cuántos valores distintos tiene una columna. Selectividad es qué fracción de las filas sobrevive a un filtro: 0 es ninguna, 1 es todas. Con ellas el motor estima cuántas filas saldrán de cada filtro, y de eso depende si conviene ir por un índice o leer la tabla completa.</a:t>
+            </a:r>
+          </a:p>
+          <a:p/>
+          <a:p>
+            <a:r>
+              <a:t>CÓMO DARLA (≈4 min):</a:t>
+            </a:r>
+          </a:p>
+          <a:p>
+            <a:r>
+              <a:t>  • Al entrar: Cardinalidad: cita.estado tiene 3 valores (baja); dueno.id_dueno tiene 2.006, uno por fila (alta).</a:t>
+            </a:r>
+          </a:p>
+          <a:p>
+            <a:r>
+              <a:t>  • Clic 1: Selectividad con tres filtros reales de la base de hoy: estado = 'PROGRAMADA' deja 18.187 de 30.010 (0,61); la fecha del 2026-03-10 deja 150 (0,005); los dos juntos, 91 (0,003). Pregunta: «¿a cuál le serviría un índice?».</a:t>
+            </a:r>
+          </a:p>
+          <a:p>
+            <a:r>
+              <a:t>  • Clic 2: La decisión: muchas filas, leer la tabla entera; pocas, ir por un índice. Como convención de oficio, por debajo del 5 % suele ganar el índice y por encima del 20 % la tabla entera; el motor no usa porcentajes, compara costos.</a:t>
+            </a:r>
+          </a:p>
+          <a:p/>
+          <a:p>
+            <a:r>
+              <a:t>EJEMPLO: De 30.010 citas, 91 son el 0,3 %: un índice ayudaría mucho. 18.187 son el 61 %: un índice solo sobre estado no ayudaría.</a:t>
+            </a:r>
+          </a:p>
+          <a:p/>
+          <a:p>
+            <a:r>
+              <a:t>SI PREGUNTAN:</a:t>
+            </a:r>
+          </a:p>
+          <a:p>
+            <a:r>
+              <a:t>  • «¿Por qué no indexar estado si se filtra tanto por él?» → Porque deja pasar el 61 % de las filas: leer la tabla de corrido sale más barato que saltar a la tabla 18.187 veces desde un índice.</a:t>
+            </a:r>
+          </a:p>
+          <a:p>
+            <a:r>
+              <a:t>  • «¿Cómo sabe el motor que la fecha deja 150?» → Por las estadísticas de fecha_hora: sus valores distintos y su reparto. Si estuvieran viejas, la estimación fallaría.</a:t>
+            </a:r>
+          </a:p>
+          <a:p/>
+          <a:p>
+            <a:r>
+              <a:t>CUIDADO: «Cardinalidad» también se usa para las filas que entrega un nodo del plan: aclara en qué sentido la estás usando.</a:t>
+            </a:r>
+          </a:p>
+          <a:p/>
+          <a:p>
+            <a:r>
+              <a:t>PASA A LA SIGUIENTE: Con esas cifras, los dos caminos para leer una tabla: completa o por índice.</a:t>
             </a:r>
           </a:p>
         </p:txBody>
@@ -1588,87 +2465,62 @@
           <a:lstStyle/>
           <a:p>
             <a:r>
-              <a:t>DESARROLLO (para explicarlo, no se proyecta):</a:t>
-            </a:r>
-          </a:p>
-          <a:p>
-            <a:r>
-              <a:t>Un full table scan, que en PostgreSQL se imprime Seq Scan y en Oracle TABLE ACCESS FULL, lee todos los bloques de principio a fin y descarta en memoria lo que no cumple el filtro; su ventaja es que la lectura es secuencial.</a:t>
-            </a:r>
-          </a:p>
-          <a:p>
-            <a:r>
-              <a:t>Un index scan desciende por el indice y, por cada coincidencia, va a buscar la fila a la tabla, lo cual son lecturas dispersas.</a:t>
-            </a:r>
-          </a:p>
-          <a:p>
-            <a:r>
-              <a:t>Las cuentas de la base de la clase: cita con 30.010 filas de unos 60 bytes ocupa del orden de 2 MB, unas 230 a 250 paginas de 8 KB —el numero exacto lo dice el Buffers del EXPLAIN, no hace falta estimarlo—</a:t>
-            </a:r>
-          </a:p>
-          <a:p>
-            <a:r>
-              <a:t>Y el Seq Scan cuesta esas paginas; buscar el 2026-03-10 por un indice sobre fecha_hora costaria 2 o 3 lecturas para bajar el arbol mas una por cada una de las 150 filas del dia, unas 153 en total.</a:t>
-            </a:r>
-          </a:p>
-          <a:p>
-            <a:r>
-              <a:t>Aqui hay que ser honesto y es mas interesante que la caricatura: a este volumen el indice no es veinte veces mejor, es del mismo orden de magnitud</a:t>
-            </a:r>
-          </a:p>
-          <a:p>
-            <a:r>
-              <a:t>Y medido en la unidad del planeador —donde una pagina dispersa vale cuatro secuenciales— puede incluso salir perdiendo.</a:t>
-            </a:r>
-          </a:p>
-          <a:p>
-            <a:r>
-              <a:t>La ventaja del indice crece con el tamano, no con el porcentaje: si la clínica acumulara 300.000 citas, el Seq Scan pasaria a 2.400 paginas y el indice seguiria costando unas 153, y ahi si son dieciseis veces menos.</a:t>
-            </a:r>
-          </a:p>
-          <a:p>
-            <a:r>
-              <a:t>Sobre 20 filas todo es instantaneo y todo se resuelve con Seq Scan, porque una tabla de 20 filas ocupa una sola pagina y no hay plan mas barato que leer una pagina</a:t>
-            </a:r>
-          </a:p>
-          <a:p>
-            <a:r>
-              <a:t>En ese tamano la consulta pesima y la optima miden lo mismo, entre 0,02 y 0,3 milisegundos, y la diferencia se esconde en el ruido de medicion.</a:t>
-            </a:r>
-          </a:p>
-          <a:p>
-            <a:r>
-              <a:t>Optimizar sobre 20 filas no es optimizar: es adivinar.</a:t>
-            </a:r>
-          </a:p>
-          <a:p>
-            <a:r>
-              <a:t>Justamente por eso hoy no se mide sobre la base propia sino sobre una base sembrada con 30.010 citas, y por eso el script de la demo tambien las siembra: para que el docente y el estudiante midan sobre lo mismo.</a:t>
-            </a:r>
-          </a:p>
-          <a:p>
-            <a:r>
-              <a:t>Si alguien pide medir en su propia base, la respuesta es que primero tiene que fabricar volumen con generate_series, y que sin eso los numeros que reporte no significan nada.</a:t>
-            </a:r>
-          </a:p>
-          <a:p>
-            <a:r>
-              <a:t>NOTAS:</a:t>
-            </a:r>
-          </a:p>
-          <a:p>
-            <a:r>
-              <a:t>Con eso se explica full table scan contra index scan sin caricaturas.</a:t>
-            </a:r>
-          </a:p>
-          <a:p>
-            <a:r>
-              <a:t>Por eso la Clase 7 tiene que MEDIRLO y no suponerlo.</a:t>
-            </a:r>
-          </a:p>
-          <a:p>
-            <a:r>
-              <a:t>Y aqui esta el punto pedagogico central, que cambio de sitio y hay que decirlo bien: el problema de las 20 filas es el de la base propia del estudiante, la que cargo en la Clase 1, no el de la clase.</a:t>
+              <a:t>QUÉ ES (dilo así): Hay dos maneras básicas de leer una tabla. El recorrido completo (Seq Scan) lee todas las páginas una tras otra y descarta en memoria lo que no cumple. El acceso por índice baja por el árbol del índice y, por cada coincidencia, va a buscar la fila a la tabla: pocas lecturas, pero dispersas. Cuál conviene depende de cuántas filas salen.</a:t>
+            </a:r>
+          </a:p>
+          <a:p/>
+          <a:p>
+            <a:r>
+              <a:t>CÓMO DARLA (≈3 min):</a:t>
+            </a:r>
+          </a:p>
+          <a:p>
+            <a:r>
+              <a:t>  • Al entrar: Seq Scan: las páginas se leen de corrido. En la base de hoy, cita ocupa 251 páginas de 8 KB, y se leen todas aunque solo sirvan 150 filas.</a:t>
+            </a:r>
+          </a:p>
+          <a:p>
+            <a:r>
+              <a:t>  • Clic 1: Index Scan: 2 o 3 lecturas para bajar el árbol y una lectura dispersa por cada fila encontrada. Para las 150 citas de un día, unas 153 lecturas.</a:t>
+            </a:r>
+          </a:p>
+          <a:p>
+            <a:r>
+              <a:t>  • Clic 2: Lee la regla y di lo honesto: 251 contra 153 es del mismo orden. Con 300.000 citas el Seq Scan pasaría a unas 2.500 páginas y el índice seguiría en unas 153: ahí sí gana por mucho.</a:t>
+            </a:r>
+          </a:p>
+          <a:p/>
+          <a:p>
+            <a:r>
+              <a:t>EJEMPLO: Hoy la base no tiene índice sobre fecha_hora: el plan de las citas del 2026-03-10 siempre dirá Seq Scan on cita. El cambio a un acceso por índice es el tema de la Clase 7.</a:t>
+            </a:r>
+          </a:p>
+          <a:p/>
+          <a:p>
+            <a:r>
+              <a:t>SI PREGUNTAN:</a:t>
+            </a:r>
+          </a:p>
+          <a:p>
+            <a:r>
+              <a:t>  • «Si el índice es mejor, ¿por qué el motor a veces lo ignora?» → Porque cuando salen muchas filas, saltar a la tabla por cada una cuesta más que leerla de corrido. El motor compara costos, no aplica una regla fija.</a:t>
+            </a:r>
+          </a:p>
+          <a:p>
+            <a:r>
+              <a:t>  • «¿Qué es una lectura dispersa?» → Leer una página que no es la siguiente de la anterior. En disco cuesta más: un PostgreSQL de servidor la valora en 4 y la secuencial en 1.</a:t>
+            </a:r>
+          </a:p>
+          <a:p/>
+          <a:p>
+            <a:r>
+              <a:t>CUIDADO: No prometas un Index Scan para hoy: en esta base no hay índices fuera de las claves primarias. Hoy se miden filas procesadas y pasadas sobre la tabla.</a:t>
+            </a:r>
+          </a:p>
+          <a:p/>
+          <a:p>
+            <a:r>
+              <a:t>PASA A LA SIGUIENTE: Hay una forma de escribir el filtro que impide usar cualquier índice: la función sobre la columna.</a:t>
             </a:r>
           </a:p>
         </p:txBody>
@@ -1738,82 +2590,62 @@
           <a:lstStyle/>
           <a:p>
             <a:r>
-              <a:t>DESARROLLO (para explicarlo, no se proyecta):</a:t>
-            </a:r>
-          </a:p>
-          <a:p>
-            <a:r>
-              <a:t>Un predicado es sargable, de Search ARGument ABLE, cuando el motor puede resolverlo navegando un indice, y para eso la columna indexada debe aparecer sola a un lado de la comparacion.</a:t>
-            </a:r>
-          </a:p>
-          <a:p>
-            <a:r>
-              <a:t>Las dos formas no sargables estan las dos en la consulta ANTES de la clase: to_char(c.fecha_hora, 'YYYY-MM-DD') = '2026-03-10' y UPPER(c.estado) = 'PROGRAMADA'.</a:t>
-            </a:r>
-          </a:p>
-          <a:p>
-            <a:r>
-              <a:t>Ninguna de las dos puede usar un indice sobre esa columna, porque el indice guarda el valor tal como se escribio y el motor no puede saber, sin evaluar la funcion, cuales entradas darian ese resultado; asi que la evalua 30.010 veces, una por fila.</a:t>
-            </a:r>
-          </a:p>
-          <a:p>
-            <a:r>
-              <a:t>WHERE UPPER(m.nombre) = 'LUNA' es el mismo caso frente a un indice sobre mascota(nombre) y obliga a aplicar la funcion a las 5.008 filas.</a:t>
-            </a:r>
-          </a:p>
-          <a:p>
-            <a:r>
-              <a:t>Igual ocurre con WHERE EXTRACT(YEAR FROM c.fecha_hora) = 2026, con WHERE SUBSTR(d.telefono, 1, 3) = '300' y con la conversion implicita: si id_mascota es numerico y se escribe WHERE c.id_mascota = '10', algunos motores convierten la columna y no el literal.</a:t>
-            </a:r>
-          </a:p>
-          <a:p>
-            <a:r>
-              <a:t>La reescritura correcta casi siempre es un rango: WHERE c.fecha_hora &gt;= TIMESTAMP '2026-03-10 00:00:00' AND c.fecha_hora &lt; TIMESTAMP '2026-03-11 00:00:00'.</a:t>
-            </a:r>
-          </a:p>
-          <a:p>
-            <a:r>
-              <a:t>Un caso mas: LIKE 'Lu%' si usa indice porque el comodin va al final, y LIKE '%una%' no, porque no hay prefijo por donde bajar el arbol.</a:t>
-            </a:r>
-          </a:p>
-          <a:p>
-            <a:r>
-              <a:t>Cuando la funcion es necesaria para el negocio existe la salida de la clase siguiente, el indice funcional,, que existe en PostgreSQL y en Oracle; hoy se menciona solo como adelanto, para que nadie crea que las funciones estan prohibidas en el WHERE.</a:t>
-            </a:r>
-          </a:p>
-          <a:p>
-            <a:r>
-              <a:t>Y hay que cerrar con la verdad incomoda, que es el mejor bono conceptual de la clase: hoy el rango tampoco evita el Seq Scan</a:t>
-            </a:r>
-          </a:p>
-          <a:p>
-            <a:r>
-              <a:t>Porque en esta base no hay ningun indice sobre fecha_hora; lo que gana el rango hoy es dejar de calcular la funcion 30.010 veces y darle al planeador una estimacion correcta de cuantas filas van a pasar.</a:t>
-            </a:r>
-          </a:p>
-          <a:p>
-            <a:r>
-              <a:t>NOTAS:</a:t>
-            </a:r>
-          </a:p>
-          <a:p>
-            <a:r>
-              <a:t>El caso de UPPER(c.estado) tiene una reescritura mas simple todavia y hay que decirla porque el estudiante duda: se elimina la funcion, porque el dominio ya esta normalizado por el CHECK (estado IN ('PROGRAMADA','ATENDIDA','CANCELADA')), de modo que no existe ninguna fila en minusculas que UPPER pudiera rescatar.</a:t>
-            </a:r>
-          </a:p>
-          <a:p>
-            <a:r>
-              <a:t>CÓDIGO CITADO (referencia):</a:t>
-            </a:r>
-          </a:p>
-          <a:p>
-            <a:r>
-              <a:t>CREATE INDEX idx_mascota_nombre_upper ON mascota (UPPER(nombre))</a:t>
-            </a:r>
-          </a:p>
-          <a:p>
-            <a:r>
-              <a:t>Fuera de la lamina (habla de la practica): El antipatron de la funcion sobre la columna merece parrafo propio porque conecta con la Clase 7 y porque es el que la pregunta 4 pone de primero.</a:t>
+              <a:t>QUÉ ES (dilo así): Un índice guarda los valores de la columna tal como están. Si el filtro le aplica una función —to_char a la fecha, UPPER al estado— el motor no puede saber qué entradas cumplen sin calcular la función fila por fila: el filtro no es sargable. Se arregla dejando la columna sola y pasando el cálculo al otro lado.</a:t>
+            </a:r>
+          </a:p>
+          <a:p/>
+          <a:p>
+            <a:r>
+              <a:t>CÓMO DARLA (≈4 min):</a:t>
+            </a:r>
+          </a:p>
+          <a:p>
+            <a:r>
+              <a:t>  • Al entrar: Las dos formas no sargables de la consulta de agenda: to_char(c.fecha_hora, 'YYYY-MM-DD') = '2026-03-10' y UPPER(c.estado) = 'PROGRAMADA'. El índice guarda fecha_hora, no to_char(fecha_hora).</a:t>
+            </a:r>
+          </a:p>
+          <a:p>
+            <a:r>
+              <a:t>  • Clic 1: La reescritura: un rango sobre la columna desnuda (&gt;= '2026-03-10 00:00:00' y &lt; '2026-03-11 00:00:00') y la comparación directa del estado. UPPER se puede quitar porque el CHECK solo admite PROGRAMADA, ATENDIDA o CANCELADA, en mayúsculas.</a:t>
+            </a:r>
+          </a:p>
+          <a:p>
+            <a:r>
+              <a:t>  • Clic 2: Lee la conclusión y aclara: hoy no hay índice sobre fecha_hora, así que el plan sigue en Seq Scan. Lo que se gana hoy es no calcular la función 30.010 veces y que el motor estime bien cuántas filas vienen.</a:t>
+            </a:r>
+          </a:p>
+          <a:p/>
+          <a:p>
+            <a:r>
+              <a:t>EJEMPLO: Tampoco son sargables EXTRACT(YEAR FROM fecha_hora) = 2026 ni UPPER(m.nombre) = 'LUNA'. El primero se reescribe como rango del año; el segundo, si el negocio lo necesita, con un índice sobre la expresión, que es de la Clase 7.</a:t>
+            </a:r>
+          </a:p>
+          <a:p/>
+          <a:p>
+            <a:r>
+              <a:t>SI PREGUNTAN:</a:t>
+            </a:r>
+          </a:p>
+          <a:p>
+            <a:r>
+              <a:t>  • «¿Entonces nunca puedo usar funciones en el WHERE?» → Sí puedes, sobre el valor constante, no sobre la columna. Y si la función sobre la columna es necesaria, existe el índice sobre la expresión: CREATE INDEX … ON mascota (UPPER(nombre)).</a:t>
+            </a:r>
+          </a:p>
+          <a:p>
+            <a:r>
+              <a:t>  • «¿Por qué el rango termina en &lt; '2026-03-11' y no en &lt;= '2026-03-10 23:59:59'?» → Porque el rango semiabierto no deja huecos: una cita a las 23:59:59.5 quedaría fuera del segundo.</a:t>
+            </a:r>
+          </a:p>
+          <a:p/>
+          <a:p>
+            <a:r>
+              <a:t>CUIDADO: No afirmes que la versión sargable ya usa un índice: sin índice sobre fecha_hora, hoy las dos versiones hacen Seq Scan.</a:t>
+            </a:r>
+          </a:p>
+          <a:p/>
+          <a:p>
+            <a:r>
+              <a:t>PASA A LA SIGUIENTE: Veámoslo en código: las dos versiones devuelven exactamente lo mismo.</a:t>
             </a:r>
           </a:p>
         </p:txBody>
@@ -1883,102 +2715,62 @@
           <a:lstStyle/>
           <a:p>
             <a:r>
-              <a:t>DESARROLLO (para explicarlo, no se proyecta):</a:t>
-            </a:r>
-          </a:p>
-          <a:p>
-            <a:r>
-              <a:t>Una subconsulta es correlacionada cuando menciona una columna de la consulta exterior; si ademas esta en la lista de columnas, el motor no puede calcularla una vez y reusarla</a:t>
-            </a:r>
-          </a:p>
-          <a:p>
-            <a:r>
-              <a:t>Porque depende de la fila que se este mirando, asi que la ejecuta una vez por cada fila del exterior.</a:t>
-            </a:r>
-          </a:p>
-          <a:p>
-            <a:r>
-              <a:t>El reporte de ranking de duenos de la clase la tiene: (SELECT COUNT(*) FROM cita c JOIN mascota m ON m.id_mascota = c.id_mascota WHERE m.id_dueno = d.id_dueno) AS total_citas, con FROM dueno d.</a:t>
-            </a:r>
-          </a:p>
-          <a:p>
-            <a:r>
-              <a:t>Como hay 2.006 duenos, se ejecuta 2.006 veces, y cada ejecucion recorre mascota y cita completas: del orden de 70 millones de filas procesadas para producir 2.006.</a:t>
-            </a:r>
-          </a:p>
-          <a:p>
-            <a:r>
-              <a:t>El plan lo dice con un nodo SubPlan y con loops=2006, y loops es el unico lugar del plan donde se lee «esto se repitio»</a:t>
-            </a:r>
-          </a:p>
-          <a:p>
-            <a:r>
-              <a:t>Si el docente no ensena a buscar ese campo, el estudiante va a senalar como nodo mas costoso el Seq Scan de arriba, que aparece con un tiempo mayor solo porque incluye a sus hijos.</a:t>
-            </a:r>
-          </a:p>
-          <a:p>
-            <a:r>
-              <a:t>La reescritura es dueno LEFT JOIN mascota LEFT JOIN cita, con GROUP BY d.id_dueno, d.nombre y COUNT(c.id_cita): el SubPlan desaparece y en su lugar queda un HashAggregate sobre una sola pasada.</a:t>
-            </a:r>
-          </a:p>
-          <a:p>
-            <a:r>
-              <a:t>Es la unica mejora del dia que es de ordenes de magnitud, y no necesita ningun indice, porque lo que se elimino no fue un escaneo sino 2.005 escaneos.</a:t>
-            </a:r>
-          </a:p>
-          <a:p>
-            <a:r>
-              <a:t>Primero, COUNT(c.id_cita) y nunca COUNT(*): el LEFT JOIN fabrica una fila llena de NULL por cada dueno que no tiene citas, COUNT(*) cuenta filas y reportaria 1, y COUNT de una columna ignora los NULL y reporta 0.</a:t>
-            </a:r>
-          </a:p>
-          <a:p>
-            <a:r>
-              <a:t>El sintoma es exacto y se puede proyectar en treinta segundos: los duenos 2001 a 2006 de la base de la clase no tienen mascotas, asi que su respuesta correcta es 0 y con COUNT(*) dicen 1.</a:t>
-            </a:r>
-          </a:p>
-          <a:p>
-            <a:r>
-              <a:t>Segundo, LEFT y no INNER: el INNER JOIN es mas rapido y esta mal, porque borra del ranking a esos seis duenos y el reporte deja de cuadrar con el total de clientes de la clinica.</a:t>
-            </a:r>
-          </a:p>
-          <a:p>
-            <a:r>
-              <a:t>Mas rapido devolviendo otra cosa no es optimizar, y esa frase es la bisagra con la seccion siguiente.</a:t>
-            </a:r>
-          </a:p>
-          <a:p>
-            <a:r>
-              <a:t>Salida esperada: los dos rankings devuelven las mismas filas, los duenos sin citas aparecen con 0 en los dos, y el plan de la reescritura ya no muestra un nodo repetido 2.006 veces.</a:t>
-            </a:r>
-          </a:p>
-          <a:p>
-            <a:r>
-              <a:t>NOTAS:</a:t>
-            </a:r>
-          </a:p>
-          <a:p>
-            <a:r>
-              <a:t>Aviso operativo que hay que dar antes de que el grupo empiece, porque si no media clase recarga la pagina y pierde sus respuestas: la version ANTES de esta pregunta ejecuta 2.006 veces una consulta que recorre 30.010 filas, y en el navegador puede tardar de varios segundos a mas de un minuto.</a:t>
-            </a:r>
-          </a:p>
-          <a:p>
-            <a:r>
-              <a:t>No esta colgada.</a:t>
-            </a:r>
-          </a:p>
-          <a:p>
-            <a:r>
-              <a:t>En la demo en vivo, si el docente no quiere esperar, la variante honesta es correr la version ANTES con WHERE d.id_dueno &lt;= 200 en el exterior, mostrar que el plan dice loops=200 y decir en voz alta que la version completa es diez veces esa; lo que no se puede hacer es saltarse la medicion y afirmar el resultado.</a:t>
-            </a:r>
-          </a:p>
-          <a:p>
-            <a:r>
-              <a:t>Fuera de la lamina (habla de la practica): Es la pregunta 3, otros 20 puntos, y la cuarta afirmacion de la pregunta 4 dice lo mismo.</a:t>
-            </a:r>
-          </a:p>
-          <a:p>
-            <a:r>
-              <a:t>Fuera de la lamina (habla de la practica): Dos detalles que valen puntos y que el docente tiene que poder justificar en el momento.</a:t>
+              <a:t>QUÉ ES (dilo así): Una subconsulta correlacionada usa un valor de la fila de afuera (aquí, d.id_dueno). Como su resultado cambia con cada fila, el motor no puede calcularla una vez y reutilizarla: la ejecuta una vez por cada fila de la consulta exterior. Con 2.006 dueños son 2.006 ejecuciones. La misma pregunta se responde en una sola pasada uniendo y agrupando.</a:t>
+            </a:r>
+          </a:p>
+          <a:p/>
+          <a:p>
+            <a:r>
+              <a:t>CÓMO DARLA (≈4 min):</a:t>
+            </a:r>
+          </a:p>
+          <a:p>
+            <a:r>
+              <a:t>  • Al entrar: ANTES: por cada uno de los 2.006 dueños, la subconsulta cuenta sus mascotas recorriendo las 5.008 de la tabla. Son 2.006 ejecuciones y unos 10 millones de filas leídas para producir 2.006 números.</a:t>
+            </a:r>
+          </a:p>
+          <a:p>
+            <a:r>
+              <a:t>  • Clic 1: DESPUÉS: dueno LEFT JOIN mascota y GROUP BY por dueño. Cada tabla se lee una sola vez y se agrupa: una pasada.</a:t>
+            </a:r>
+          </a:p>
+          <a:p>
+            <a:r>
+              <a:t>  • Clic 2: Las dos devuelven las mismas 2.006 filas. Es la única mejora del día de órdenes de magnitud, y no necesita ningún índice: se eliminaron 2.005 recorridos.</a:t>
+            </a:r>
+          </a:p>
+          <a:p/>
+          <a:p>
+            <a:r>
+              <a:t>EJEMPLO: En una corrida en el navegador, la versión ANTES tardó unos 4,9 s y la reescrita unos 0,19 s: más de 25 veces menos. Los segundos cambian por máquina; el loops=2006 no.</a:t>
+            </a:r>
+          </a:p>
+          <a:p/>
+          <a:p>
+            <a:r>
+              <a:t>SI PREGUNTAN:</a:t>
+            </a:r>
+          </a:p>
+          <a:p>
+            <a:r>
+              <a:t>  • «¿Toda subconsulta es lenta?» → No. Una subconsulta que no depende de la fila de afuera se calcula una sola vez. El problema es la correlacionada en la lista de columnas, que se repite por fila.</a:t>
+            </a:r>
+          </a:p>
+          <a:p>
+            <a:r>
+              <a:t>  • «¿Por qué LEFT JOIN y no JOIN?» → Porque con JOIN desaparecen los 6 dueños que no tienen mascotas: el reporte pasa de 2.006 a 2.000 filas.</a:t>
+            </a:r>
+          </a:p>
+          <a:p/>
+          <a:p>
+            <a:r>
+              <a:t>CUIDADO: No uses «correlacionada» a secas para dos cosas distintas: los predicados correlacionados (un problema de estimación) no tienen nada que ver con esto.</a:t>
+            </a:r>
+          </a:p>
+          <a:p/>
+          <a:p>
+            <a:r>
+              <a:t>PASA A LA SIGUIENTE: Así se ve en código, con los dos detalles que deciden si el resultado es el mismo.</a:t>
             </a:r>
           </a:p>
         </p:txBody>
@@ -2048,62 +2840,57 @@
           <a:lstStyle/>
           <a:p>
             <a:r>
-              <a:t>DESARROLLO (para explicarlo, no se proyecta):</a:t>
-            </a:r>
-          </a:p>
-          <a:p>
-            <a:r>
-              <a:t>Correccion y tiempo son ejes independientes, y la consecuencia practica es que una version «optimizada» que devuelve algo distinto no es una optimizacion peor: no es una optimizacion.</a:t>
-            </a:r>
-          </a:p>
-          <a:p>
-            <a:r>
-              <a:t>Para una consulta con filtro sirve el conteo: se envuelve cada version en un SELECT COUNT(*) y se comparan los dos numeros en la misma corrida, y en la agenda del 2026-03-10 las dos tienen que decir 91.</a:t>
-            </a:r>
-          </a:p>
-          <a:p>
-            <a:r>
-              <a:t>Un conteo distinto no es una version mas rapida, es la respuesta equivocada.</a:t>
-            </a:r>
-          </a:p>
-          <a:p>
-            <a:r>
-              <a:t>La prueba va sin LIMIT, porque comparar solo las primeras 20 filas deja fuera justamente las que fallan, que son las de los duenos con cero citas.</a:t>
-            </a:r>
-          </a:p>
-          <a:p>
-            <a:r>
-              <a:t>EXCEPT elimina duplicados, de modo que si el conjunto puede traer filas repetidas hay que usar EXCEPT ALL o incluir la llave; en el ranking de la clase no ocurre, porque hay una fila por dueno.</a:t>
-            </a:r>
-          </a:p>
-          <a:p>
-            <a:r>
-              <a:t>Y no cuentan como prueba «se ve igual», «trae mas o menos lo mismo» ni mirar la primera pantalla de resultados: la equivalencia se afirma con una consulta cuyo resultado se conoce de antemano, un numero que coincide o un conjunto vacio.</a:t>
-            </a:r>
-          </a:p>
-          <a:p>
-            <a:r>
-              <a:t>NOTAS:</a:t>
-            </a:r>
-          </a:p>
-          <a:p>
-            <a:r>
-              <a:t>Y se rompe sin avisar, porque ningun motor va a lanzar un error por eso.</a:t>
-            </a:r>
-          </a:p>
-          <a:p>
-            <a:r>
-              <a:t>Para conjuntos completos, donde el conteo puede coincidir con filas distintas, se usa EXCEPT en los DOS sentidos, y el docente tiene que saber por que son dos: A EXCEPT B devuelve lo que esta en A y no esta en B, asi que si sale vacio todavia puede haber filas de mas en B; se corren las dos direcciones unidas con UNION ALL y se exige cero filas en total.</a:t>
-            </a:r>
-          </a:p>
-          <a:p>
-            <a:r>
-              <a:t>Fuera de la lamina (habla de la practica): Por eso el taller cobra la prueba dos veces, unos 6 de los 100 puntos, y hay dos formas segun lo que se compare.</a:t>
-            </a:r>
-          </a:p>
-          <a:p>
-            <a:r>
-              <a:t>Fuera de la lamina (habla de la practica): Tres advertencias al calificar.</a:t>
+              <a:t>QUÉ ES (dilo así): Optimizar es obtener la MISMA respuesta con menos trabajo. Si la versión nueva devuelve filas distintas, se rompió la consulta, y se rompió sin aviso: ningún motor lanza un error porque una consulta devuelva otra cosa. Por eso toda optimización va acompañada de una prueba de equivalencia.</a:t>
+            </a:r>
+          </a:p>
+          <a:p/>
+          <a:p>
+            <a:r>
+              <a:t>CÓMO DARLA (≈3 min):</a:t>
+            </a:r>
+          </a:p>
+          <a:p>
+            <a:r>
+              <a:t>  • Al entrar: La prueba más simple: SELECT COUNT(*) de cada versión, en la misma corrida. En la agenda del 2026-03-10 las dos dicen 91: es una optimización.</a:t>
+            </a:r>
+          </a:p>
+          <a:p>
+            <a:r>
+              <a:t>  • Clic 1: El caso equivocado: la versión nueva devuelve 150. Pregunta: «¿qué se perdió?». El filtro de estado: 150 son todas las citas del día y 91 solo las programadas.</a:t>
+            </a:r>
+          </a:p>
+          <a:p>
+            <a:r>
+              <a:t>  • Clic 2: Lee la regla: corrección y tiempo son ejes independientes.</a:t>
+            </a:r>
+          </a:p>
+          <a:p/>
+          <a:p>
+            <a:r>
+              <a:t>EJEMPLO: Agenda del 2026-03-10: 150 citas en total, 91 PROGRAMADA, 45 ATENDIDA y 14 CANCELADA. Una versión que olvida AND c.estado = 'PROGRAMADA' devuelve 150.</a:t>
+            </a:r>
+          </a:p>
+          <a:p/>
+          <a:p>
+            <a:r>
+              <a:t>SI PREGUNTAN:</a:t>
+            </a:r>
+          </a:p>
+          <a:p>
+            <a:r>
+              <a:t>  • «Si los conteos coinciden, ¿ya es la misma respuesta?» → Para una consulta con filtro es una buena prueba; para un conjunto completo no basta, porque pueden coincidir en número y ser filas distintas. Para eso está EXCEPT en los dos sentidos.</a:t>
+            </a:r>
+          </a:p>
+          <a:p/>
+          <a:p>
+            <a:r>
+              <a:t>CUIDADO: «Se ve igual» o «trae más o menos lo mismo» no son prueba.</a:t>
+            </a:r>
+          </a:p>
+          <a:p/>
+          <a:p>
+            <a:r>
+              <a:t>PASA A LA SIGUIENTE: La prueba fuerte para conjuntos completos: EXCEPT en los dos sentidos.</a:t>
             </a:r>
           </a:p>
         </p:txBody>
@@ -5446,7 +6233,7 @@
                 </a:solidFill>
                 <a:latin typeface="Calibri"/>
               </a:rPr>
-              <a:t>Antes/despues sobre el DDL del proyecto</a:t>
+              <a:t>Medir antes y despues de optimizar</a:t>
             </a:r>
           </a:p>
         </p:txBody>
@@ -5818,7 +6605,25 @@
                 </a:solidFill>
                 <a:latin typeface="Calibri"/>
               </a:rPr>
-              <a:t>–   Un full table scan, que en PostgreSQL se imprime Seq Scan y en Oracle TABLE ACCESS FULL.</a:t>
+              <a:t>–   Un </a:t>
+            </a:r>
+            <a:r>
+              <a:rPr sz="2000" b="1" i="0">
+                <a:solidFill>
+                  <a:srgbClr val="333333"/>
+                </a:solidFill>
+                <a:latin typeface="Calibri"/>
+              </a:rPr>
+              <a:t>Seq Scan</a:t>
+            </a:r>
+            <a:r>
+              <a:rPr sz="2000" b="0" i="0">
+                <a:solidFill>
+                  <a:srgbClr val="333333"/>
+                </a:solidFill>
+                <a:latin typeface="Calibri"/>
+              </a:rPr>
+              <a:t> lee todas las páginas de la tabla en orden y descarta lo que no cumple.</a:t>
             </a:r>
           </a:p>
           <a:p>
@@ -5834,7 +6639,25 @@
                 </a:solidFill>
                 <a:latin typeface="Calibri"/>
               </a:rPr>
-              <a:t>–   Un index scan desciende por el indice y, por cada coincidencia, va a buscar la fila a la tabla, lo cual son lecturas dispersas.</a:t>
+              <a:t>–   Un </a:t>
+            </a:r>
+            <a:r>
+              <a:rPr sz="2000" b="1" i="0">
+                <a:solidFill>
+                  <a:srgbClr val="333333"/>
+                </a:solidFill>
+                <a:latin typeface="Calibri"/>
+              </a:rPr>
+              <a:t>Index Scan</a:t>
+            </a:r>
+            <a:r>
+              <a:rPr sz="2000" b="0" i="0">
+                <a:solidFill>
+                  <a:srgbClr val="333333"/>
+                </a:solidFill>
+                <a:latin typeface="Calibri"/>
+              </a:rPr>
+              <a:t> baja por el índice y salta a la tabla por cada fila encontrada.</a:t>
             </a:r>
           </a:p>
           <a:p>
@@ -5850,7 +6673,59 @@
                 </a:solidFill>
                 <a:latin typeface="Calibri"/>
               </a:rPr>
-              <a:t>–   Las cuentas de la base de la clase: cita con 30.010 filas de unos 60 bytes ocupa del orden de 2 MB.</a:t>
+              <a:t>–   Para un día de citas: 251 páginas seguidas contra unas 153 lecturas </a:t>
+            </a:r>
+            <a:r>
+              <a:rPr sz="2000" b="1" i="0">
+                <a:solidFill>
+                  <a:srgbClr val="333333"/>
+                </a:solidFill>
+                <a:latin typeface="Calibri"/>
+              </a:rPr>
+              <a:t>dispersas</a:t>
+            </a:r>
+            <a:r>
+              <a:rPr sz="2000" b="0" i="0">
+                <a:solidFill>
+                  <a:srgbClr val="333333"/>
+                </a:solidFill>
+                <a:latin typeface="Calibri"/>
+              </a:rPr>
+              <a:t>.</a:t>
+            </a:r>
+          </a:p>
+          <a:p>
+            <a:pPr>
+              <a:spcAft>
+                <a:spcPts val="800"/>
+              </a:spcAft>
+            </a:pPr>
+            <a:r>
+              <a:rPr sz="2000" b="0" i="0">
+                <a:solidFill>
+                  <a:srgbClr val="333333"/>
+                </a:solidFill>
+                <a:latin typeface="Calibri"/>
+              </a:rPr>
+              <a:t>–   A este volumen la diferencia es pequeña: la ventaja del índice crece con el </a:t>
+            </a:r>
+            <a:r>
+              <a:rPr sz="2000" b="1" i="0">
+                <a:solidFill>
+                  <a:srgbClr val="333333"/>
+                </a:solidFill>
+                <a:latin typeface="Calibri"/>
+              </a:rPr>
+              <a:t>tamaño</a:t>
+            </a:r>
+            <a:r>
+              <a:rPr sz="2000" b="0" i="0">
+                <a:solidFill>
+                  <a:srgbClr val="333333"/>
+                </a:solidFill>
+                <a:latin typeface="Calibri"/>
+              </a:rPr>
+              <a:t>.</a:t>
             </a:r>
           </a:p>
         </p:txBody>
@@ -6358,7 +7233,25 @@
                 </a:solidFill>
                 <a:latin typeface="Calibri"/>
               </a:rPr>
-              <a:t>–   Un predicado es sargable, de Search ARGument ABLE, cuando el motor puede resolverlo navegando un indice.</a:t>
+              <a:t>–   Un filtro es </a:t>
+            </a:r>
+            <a:r>
+              <a:rPr sz="2000" b="1" i="0">
+                <a:solidFill>
+                  <a:srgbClr val="333333"/>
+                </a:solidFill>
+                <a:latin typeface="Calibri"/>
+              </a:rPr>
+              <a:t>sargable</a:t>
+            </a:r>
+            <a:r>
+              <a:rPr sz="2000" b="0" i="0">
+                <a:solidFill>
+                  <a:srgbClr val="333333"/>
+                </a:solidFill>
+                <a:latin typeface="Calibri"/>
+              </a:rPr>
+              <a:t> si el motor puede resolverlo navegando un índice.</a:t>
             </a:r>
           </a:p>
           <a:p>
@@ -6374,7 +7267,25 @@
                 </a:solidFill>
                 <a:latin typeface="Calibri"/>
               </a:rPr>
-              <a:t>–   Las dos formas no sargables estan las dos en la consulta ANTES de la clase: to_char(c.fecha_hora, 'YYYY-MM-DD') = '2026-03-10' y UPPER(c.estado) =…</a:t>
+              <a:t>–   Para eso la </a:t>
+            </a:r>
+            <a:r>
+              <a:rPr sz="2000" b="1" i="0">
+                <a:solidFill>
+                  <a:srgbClr val="333333"/>
+                </a:solidFill>
+                <a:latin typeface="Calibri"/>
+              </a:rPr>
+              <a:t>columna</a:t>
+            </a:r>
+            <a:r>
+              <a:rPr sz="2000" b="0" i="0">
+                <a:solidFill>
+                  <a:srgbClr val="333333"/>
+                </a:solidFill>
+                <a:latin typeface="Calibri"/>
+              </a:rPr>
+              <a:t> tiene que quedar sola a un lado de la comparación.</a:t>
             </a:r>
           </a:p>
           <a:p>
@@ -6390,7 +7301,59 @@
                 </a:solidFill>
                 <a:latin typeface="Calibri"/>
               </a:rPr>
-              <a:t>–   Ninguna de las dos puede usar un indice sobre esa columna.</a:t>
+              <a:t>–   to_char(fecha_hora, …) o UPPER(estado) obligan a calcular la </a:t>
+            </a:r>
+            <a:r>
+              <a:rPr sz="2000" b="1" i="0">
+                <a:solidFill>
+                  <a:srgbClr val="333333"/>
+                </a:solidFill>
+                <a:latin typeface="Calibri"/>
+              </a:rPr>
+              <a:t>función</a:t>
+            </a:r>
+            <a:r>
+              <a:rPr sz="2000" b="0" i="0">
+                <a:solidFill>
+                  <a:srgbClr val="333333"/>
+                </a:solidFill>
+                <a:latin typeface="Calibri"/>
+              </a:rPr>
+              <a:t> en cada fila.</a:t>
+            </a:r>
+          </a:p>
+          <a:p>
+            <a:pPr>
+              <a:spcAft>
+                <a:spcPts val="800"/>
+              </a:spcAft>
+            </a:pPr>
+            <a:r>
+              <a:rPr sz="2000" b="0" i="0">
+                <a:solidFill>
+                  <a:srgbClr val="333333"/>
+                </a:solidFill>
+                <a:latin typeface="Calibri"/>
+              </a:rPr>
+              <a:t>–   Se reescribe como </a:t>
+            </a:r>
+            <a:r>
+              <a:rPr sz="2000" b="1" i="0">
+                <a:solidFill>
+                  <a:srgbClr val="333333"/>
+                </a:solidFill>
+                <a:latin typeface="Calibri"/>
+              </a:rPr>
+              <a:t>rango</a:t>
+            </a:r>
+            <a:r>
+              <a:rPr sz="2000" b="0" i="0">
+                <a:solidFill>
+                  <a:srgbClr val="333333"/>
+                </a:solidFill>
+                <a:latin typeface="Calibri"/>
+              </a:rPr>
+              <a:t> sobre la columna, o sin la función si el dato ya está normalizado.</a:t>
             </a:r>
           </a:p>
         </p:txBody>
@@ -6721,7 +7684,7 @@
         <p:spPr>
           <a:xfrm>
             <a:off x="457200" y="1261872"/>
-            <a:ext cx="11277295" cy="4731007"/>
+            <a:ext cx="11277295" cy="4568884"/>
           </a:xfrm>
           <a:prstGeom prst="roundRect">
             <a:avLst>
@@ -6971,7 +7934,7 @@
         <p:spPr>
           <a:xfrm>
             <a:off x="685800" y="1719072"/>
-            <a:ext cx="502920" cy="4136647"/>
+            <a:ext cx="502920" cy="3974524"/>
           </a:xfrm>
           <a:prstGeom prst="rect">
             <a:avLst/>
@@ -6986,11 +7949,11 @@
           <a:p>
             <a:pPr algn="r">
               <a:spcAft>
-                <a:spcPts val="407"/>
+                <a:spcPts val="428"/>
               </a:spcAft>
             </a:pPr>
             <a:r>
-              <a:rPr sz="1900" i="0" b="0">
+              <a:rPr sz="2000" i="0" b="0">
                 <a:solidFill>
                   <a:srgbClr val="858585"/>
                 </a:solidFill>
@@ -7002,11 +7965,11 @@
           <a:p>
             <a:pPr algn="r">
               <a:spcAft>
-                <a:spcPts val="407"/>
+                <a:spcPts val="428"/>
               </a:spcAft>
             </a:pPr>
             <a:r>
-              <a:rPr sz="1900" i="0" b="0">
+              <a:rPr sz="2000" i="0" b="0">
                 <a:solidFill>
                   <a:srgbClr val="858585"/>
                 </a:solidFill>
@@ -7018,11 +7981,11 @@
           <a:p>
             <a:pPr algn="r">
               <a:spcAft>
-                <a:spcPts val="407"/>
+                <a:spcPts val="428"/>
               </a:spcAft>
             </a:pPr>
             <a:r>
-              <a:rPr sz="1900" i="0" b="0">
+              <a:rPr sz="2000" i="0" b="0">
                 <a:solidFill>
                   <a:srgbClr val="858585"/>
                 </a:solidFill>
@@ -7034,11 +7997,11 @@
           <a:p>
             <a:pPr algn="r">
               <a:spcAft>
-                <a:spcPts val="407"/>
+                <a:spcPts val="428"/>
               </a:spcAft>
             </a:pPr>
             <a:r>
-              <a:rPr sz="1900" i="0" b="0">
+              <a:rPr sz="2000" i="0" b="0">
                 <a:solidFill>
                   <a:srgbClr val="858585"/>
                 </a:solidFill>
@@ -7050,11 +8013,11 @@
           <a:p>
             <a:pPr algn="r">
               <a:spcAft>
-                <a:spcPts val="407"/>
+                <a:spcPts val="428"/>
               </a:spcAft>
             </a:pPr>
             <a:r>
-              <a:rPr sz="1900" i="0" b="0">
+              <a:rPr sz="2000" i="0" b="0">
                 <a:solidFill>
                   <a:srgbClr val="858585"/>
                 </a:solidFill>
@@ -7066,11 +8029,11 @@
           <a:p>
             <a:pPr algn="r">
               <a:spcAft>
-                <a:spcPts val="407"/>
+                <a:spcPts val="428"/>
               </a:spcAft>
             </a:pPr>
             <a:r>
-              <a:rPr sz="1900" i="0" b="0">
+              <a:rPr sz="2000" i="0" b="0">
                 <a:solidFill>
                   <a:srgbClr val="858585"/>
                 </a:solidFill>
@@ -7082,11 +8045,11 @@
           <a:p>
             <a:pPr algn="r">
               <a:spcAft>
-                <a:spcPts val="407"/>
+                <a:spcPts val="428"/>
               </a:spcAft>
             </a:pPr>
             <a:r>
-              <a:rPr sz="1900" i="0" b="0">
+              <a:rPr sz="2000" i="0" b="0">
                 <a:solidFill>
                   <a:srgbClr val="858585"/>
                 </a:solidFill>
@@ -7098,11 +8061,11 @@
           <a:p>
             <a:pPr algn="r">
               <a:spcAft>
-                <a:spcPts val="407"/>
+                <a:spcPts val="428"/>
               </a:spcAft>
             </a:pPr>
             <a:r>
-              <a:rPr sz="1900" i="0" b="0">
+              <a:rPr sz="2000" i="0" b="0">
                 <a:solidFill>
                   <a:srgbClr val="858585"/>
                 </a:solidFill>
@@ -7114,11 +8077,11 @@
           <a:p>
             <a:pPr algn="r">
               <a:spcAft>
-                <a:spcPts val="407"/>
+                <a:spcPts val="428"/>
               </a:spcAft>
             </a:pPr>
             <a:r>
-              <a:rPr sz="1900" i="0" b="0">
+              <a:rPr sz="2000" i="0" b="0">
                 <a:solidFill>
                   <a:srgbClr val="858585"/>
                 </a:solidFill>
@@ -7130,11 +8093,11 @@
           <a:p>
             <a:pPr algn="r">
               <a:spcAft>
-                <a:spcPts val="407"/>
+                <a:spcPts val="428"/>
               </a:spcAft>
             </a:pPr>
             <a:r>
-              <a:rPr sz="1900" i="0" b="0">
+              <a:rPr sz="2000" i="0" b="0">
                 <a:solidFill>
                   <a:srgbClr val="858585"/>
                 </a:solidFill>
@@ -7146,33 +8109,17 @@
           <a:p>
             <a:pPr algn="r">
               <a:spcAft>
-                <a:spcPts val="407"/>
+                <a:spcPts val="428"/>
               </a:spcAft>
             </a:pPr>
             <a:r>
-              <a:rPr sz="1900" i="0" b="0">
+              <a:rPr sz="2000" i="0" b="0">
                 <a:solidFill>
                   <a:srgbClr val="858585"/>
                 </a:solidFill>
                 <a:latin typeface="Consolas"/>
               </a:rPr>
               <a:t>11</a:t>
-            </a:r>
-          </a:p>
-          <a:p>
-            <a:pPr algn="r">
-              <a:spcAft>
-                <a:spcPts val="407"/>
-              </a:spcAft>
-            </a:pPr>
-            <a:r>
-              <a:rPr sz="1900" i="0" b="0">
-                <a:solidFill>
-                  <a:srgbClr val="858585"/>
-                </a:solidFill>
-                <a:latin typeface="Consolas"/>
-              </a:rPr>
-              <a:t>12</a:t>
             </a:r>
           </a:p>
         </p:txBody>
@@ -7186,7 +8133,7 @@
         <p:spPr>
           <a:xfrm>
             <a:off x="1188720" y="1719072"/>
-            <a:ext cx="10271455" cy="4136647"/>
+            <a:ext cx="10271455" cy="3974524"/>
           </a:xfrm>
           <a:prstGeom prst="rect">
             <a:avLst/>
@@ -7201,11 +8148,11 @@
           <a:p>
             <a:pPr>
               <a:spcAft>
-                <a:spcPts val="407"/>
+                <a:spcPts val="428"/>
               </a:spcAft>
             </a:pPr>
             <a:r>
-              <a:rPr sz="1900" i="0" b="0">
+              <a:rPr sz="2000" i="0" b="0">
                 <a:solidFill>
                   <a:srgbClr val="D4D4D4"/>
                 </a:solidFill>
@@ -7214,7 +8161,7 @@
               <a:t>-- </a:t>
             </a:r>
             <a:r>
-              <a:rPr sz="1900" i="0" b="0">
+              <a:rPr sz="2000" i="0" b="0">
                 <a:solidFill>
                   <a:srgbClr val="D4D4D4"/>
                 </a:solidFill>
@@ -7223,7 +8170,7 @@
               <a:t>ANTES</a:t>
             </a:r>
             <a:r>
-              <a:rPr sz="1900" i="0" b="0">
+              <a:rPr sz="2000" i="0" b="0">
                 <a:solidFill>
                   <a:srgbClr val="D4D4D4"/>
                 </a:solidFill>
@@ -7232,7 +8179,7 @@
               <a:t>: </a:t>
             </a:r>
             <a:r>
-              <a:rPr sz="1900" i="0" b="0">
+              <a:rPr sz="2000" i="0" b="0">
                 <a:solidFill>
                   <a:srgbClr val="D4D4D4"/>
                 </a:solidFill>
@@ -7241,7 +8188,7 @@
               <a:t>funcion</a:t>
             </a:r>
             <a:r>
-              <a:rPr sz="1900" i="0" b="0">
+              <a:rPr sz="2000" i="0" b="0">
                 <a:solidFill>
                   <a:srgbClr val="D4D4D4"/>
                 </a:solidFill>
@@ -7250,7 +8197,7 @@
               <a:t> </a:t>
             </a:r>
             <a:r>
-              <a:rPr sz="1900" i="0" b="0">
+              <a:rPr sz="2000" i="0" b="0">
                 <a:solidFill>
                   <a:srgbClr val="D4D4D4"/>
                 </a:solidFill>
@@ -7259,7 +8206,7 @@
               <a:t>sobre</a:t>
             </a:r>
             <a:r>
-              <a:rPr sz="1900" i="0" b="0">
+              <a:rPr sz="2000" i="0" b="0">
                 <a:solidFill>
                   <a:srgbClr val="D4D4D4"/>
                 </a:solidFill>
@@ -7268,7 +8215,7 @@
               <a:t> </a:t>
             </a:r>
             <a:r>
-              <a:rPr sz="1900" i="0" b="0">
+              <a:rPr sz="2000" i="0" b="0">
                 <a:solidFill>
                   <a:srgbClr val="D4D4D4"/>
                 </a:solidFill>
@@ -7277,7 +8224,7 @@
               <a:t>la</a:t>
             </a:r>
             <a:r>
-              <a:rPr sz="1900" i="0" b="0">
+              <a:rPr sz="2000" i="0" b="0">
                 <a:solidFill>
                   <a:srgbClr val="D4D4D4"/>
                 </a:solidFill>
@@ -7286,7 +8233,7 @@
               <a:t> </a:t>
             </a:r>
             <a:r>
-              <a:rPr sz="1900" i="0" b="0">
+              <a:rPr sz="2000" i="0" b="0">
                 <a:solidFill>
                   <a:srgbClr val="D4D4D4"/>
                 </a:solidFill>
@@ -7295,7 +8242,7 @@
               <a:t>columna</a:t>
             </a:r>
             <a:r>
-              <a:rPr sz="1900" i="0" b="0">
+              <a:rPr sz="2000" i="0" b="0">
                 <a:solidFill>
                   <a:srgbClr val="D4D4D4"/>
                 </a:solidFill>
@@ -7304,7 +8251,7 @@
               <a:t> -&gt; </a:t>
             </a:r>
             <a:r>
-              <a:rPr sz="1900" i="0" b="0">
+              <a:rPr sz="2000" i="0" b="0">
                 <a:solidFill>
                   <a:srgbClr val="D4D4D4"/>
                 </a:solidFill>
@@ -7313,7 +8260,7 @@
               <a:t>el</a:t>
             </a:r>
             <a:r>
-              <a:rPr sz="1900" i="0" b="0">
+              <a:rPr sz="2000" i="0" b="0">
                 <a:solidFill>
                   <a:srgbClr val="D4D4D4"/>
                 </a:solidFill>
@@ -7322,16 +8269,16 @@
               <a:t> </a:t>
             </a:r>
             <a:r>
-              <a:rPr sz="1900" i="0" b="0">
-                <a:solidFill>
-                  <a:srgbClr val="D4D4D4"/>
-                </a:solidFill>
-                <a:latin typeface="Consolas"/>
-              </a:rPr>
-              <a:t>indice</a:t>
-            </a:r>
-            <a:r>
-              <a:rPr sz="1900" i="0" b="0">
+              <a:rPr sz="2000" i="0" b="0">
+                <a:solidFill>
+                  <a:srgbClr val="D4D4D4"/>
+                </a:solidFill>
+                <a:latin typeface="Consolas"/>
+              </a:rPr>
+              <a:t>motor</a:t>
+            </a:r>
+            <a:r>
+              <a:rPr sz="2000" i="0" b="0">
                 <a:solidFill>
                   <a:srgbClr val="D4D4D4"/>
                 </a:solidFill>
@@ -7340,16 +8287,16 @@
               <a:t> </a:t>
             </a:r>
             <a:r>
-              <a:rPr sz="1900" i="0" b="0">
-                <a:solidFill>
-                  <a:srgbClr val="D4D4D4"/>
-                </a:solidFill>
-                <a:latin typeface="Consolas"/>
-              </a:rPr>
-              <a:t>de</a:t>
-            </a:r>
-            <a:r>
-              <a:rPr sz="1900" i="0" b="0">
+              <a:rPr sz="2000" i="0" b="0">
+                <a:solidFill>
+                  <a:srgbClr val="D4D4D4"/>
+                </a:solidFill>
+                <a:latin typeface="Consolas"/>
+              </a:rPr>
+              <a:t>la</a:t>
+            </a:r>
+            <a:r>
+              <a:rPr sz="2000" i="0" b="0">
                 <a:solidFill>
                   <a:srgbClr val="D4D4D4"/>
                 </a:solidFill>
@@ -7358,16 +8305,16 @@
               <a:t> </a:t>
             </a:r>
             <a:r>
-              <a:rPr sz="1900" i="0" b="0">
-                <a:solidFill>
-                  <a:srgbClr val="D4D4D4"/>
-                </a:solidFill>
-                <a:latin typeface="Consolas"/>
-              </a:rPr>
-              <a:t>fecha_hora</a:t>
-            </a:r>
-            <a:r>
-              <a:rPr sz="1900" i="0" b="0">
+              <a:rPr sz="2000" i="0" b="0">
+                <a:solidFill>
+                  <a:srgbClr val="D4D4D4"/>
+                </a:solidFill>
+                <a:latin typeface="Consolas"/>
+              </a:rPr>
+              <a:t>calcula</a:t>
+            </a:r>
+            <a:r>
+              <a:rPr sz="2000" i="0" b="0">
                 <a:solidFill>
                   <a:srgbClr val="D4D4D4"/>
                 </a:solidFill>
@@ -7376,16 +8323,16 @@
               <a:t> </a:t>
             </a:r>
             <a:r>
-              <a:rPr sz="1900" i="0" b="0">
-                <a:solidFill>
-                  <a:srgbClr val="D4D4D4"/>
-                </a:solidFill>
-                <a:latin typeface="Consolas"/>
-              </a:rPr>
-              <a:t>no</a:t>
-            </a:r>
-            <a:r>
-              <a:rPr sz="1900" i="0" b="0">
+              <a:rPr sz="2000" i="0" b="0">
+                <a:solidFill>
+                  <a:srgbClr val="B5CEA8"/>
+                </a:solidFill>
+                <a:latin typeface="Consolas"/>
+              </a:rPr>
+              <a:t>30.010</a:t>
+            </a:r>
+            <a:r>
+              <a:rPr sz="2000" i="0" b="0">
                 <a:solidFill>
                   <a:srgbClr val="D4D4D4"/>
                 </a:solidFill>
@@ -7394,41 +8341,23 @@
               <a:t> </a:t>
             </a:r>
             <a:r>
-              <a:rPr sz="1900" i="0" b="0">
-                <a:solidFill>
-                  <a:srgbClr val="D4D4D4"/>
-                </a:solidFill>
-                <a:latin typeface="Consolas"/>
-              </a:rPr>
-              <a:t>se</a:t>
-            </a:r>
-            <a:r>
-              <a:rPr sz="1900" i="0" b="0">
-                <a:solidFill>
-                  <a:srgbClr val="D4D4D4"/>
-                </a:solidFill>
-                <a:latin typeface="Consolas"/>
-              </a:rPr>
-              <a:t> </a:t>
-            </a:r>
-            <a:r>
-              <a:rPr sz="1900" i="0" b="0">
-                <a:solidFill>
-                  <a:srgbClr val="D4D4D4"/>
-                </a:solidFill>
-                <a:latin typeface="Consolas"/>
-              </a:rPr>
-              <a:t>usa</a:t>
+              <a:rPr sz="2000" i="0" b="0">
+                <a:solidFill>
+                  <a:srgbClr val="D4D4D4"/>
+                </a:solidFill>
+                <a:latin typeface="Consolas"/>
+              </a:rPr>
+              <a:t>veces</a:t>
             </a:r>
           </a:p>
           <a:p>
             <a:pPr>
               <a:spcAft>
-                <a:spcPts val="407"/>
+                <a:spcPts val="428"/>
               </a:spcAft>
             </a:pPr>
             <a:r>
-              <a:rPr sz="1900" i="0" b="0">
+              <a:rPr sz="2000" i="0" b="0">
                 <a:solidFill>
                   <a:srgbClr val="569CD6"/>
                 </a:solidFill>
@@ -7437,16 +8366,70 @@
               <a:t>SELECT</a:t>
             </a:r>
             <a:r>
-              <a:rPr sz="1900" i="0" b="0">
-                <a:solidFill>
-                  <a:srgbClr val="D4D4D4"/>
-                </a:solidFill>
-                <a:latin typeface="Consolas"/>
-              </a:rPr>
-              <a:t> * </a:t>
-            </a:r>
-            <a:r>
-              <a:rPr sz="1900" i="0" b="0">
+              <a:rPr sz="2000" i="0" b="0">
+                <a:solidFill>
+                  <a:srgbClr val="D4D4D4"/>
+                </a:solidFill>
+                <a:latin typeface="Consolas"/>
+              </a:rPr>
+              <a:t> </a:t>
+            </a:r>
+            <a:r>
+              <a:rPr sz="2000" i="0" b="0">
+                <a:solidFill>
+                  <a:srgbClr val="D4D4D4"/>
+                </a:solidFill>
+                <a:latin typeface="Consolas"/>
+              </a:rPr>
+              <a:t>id_cita</a:t>
+            </a:r>
+            <a:r>
+              <a:rPr sz="2000" i="0" b="0">
+                <a:solidFill>
+                  <a:srgbClr val="D4D4D4"/>
+                </a:solidFill>
+                <a:latin typeface="Consolas"/>
+              </a:rPr>
+              <a:t>, </a:t>
+            </a:r>
+            <a:r>
+              <a:rPr sz="2000" i="0" b="0">
+                <a:solidFill>
+                  <a:srgbClr val="D4D4D4"/>
+                </a:solidFill>
+                <a:latin typeface="Consolas"/>
+              </a:rPr>
+              <a:t>fecha_hora</a:t>
+            </a:r>
+            <a:r>
+              <a:rPr sz="2000" i="0" b="0">
+                <a:solidFill>
+                  <a:srgbClr val="D4D4D4"/>
+                </a:solidFill>
+                <a:latin typeface="Consolas"/>
+              </a:rPr>
+              <a:t>, </a:t>
+            </a:r>
+            <a:r>
+              <a:rPr sz="2000" i="0" b="0">
+                <a:solidFill>
+                  <a:srgbClr val="D4D4D4"/>
+                </a:solidFill>
+                <a:latin typeface="Consolas"/>
+              </a:rPr>
+              <a:t>estado</a:t>
+            </a:r>
+            <a:r>
+              <a:rPr sz="2000" i="0" b="0">
+                <a:solidFill>
+                  <a:srgbClr val="D4D4D4"/>
+                </a:solidFill>
+                <a:latin typeface="Consolas"/>
+              </a:rPr>
+              <a:t> </a:t>
+            </a:r>
+            <a:r>
+              <a:rPr sz="2000" i="0" b="0">
                 <a:solidFill>
                   <a:srgbClr val="569CD6"/>
                 </a:solidFill>
@@ -7455,7 +8438,7 @@
               <a:t>FROM</a:t>
             </a:r>
             <a:r>
-              <a:rPr sz="1900" i="0" b="0">
+              <a:rPr sz="2000" i="0" b="0">
                 <a:solidFill>
                   <a:srgbClr val="D4D4D4"/>
                 </a:solidFill>
@@ -7464,7 +8447,7 @@
               <a:t> </a:t>
             </a:r>
             <a:r>
-              <a:rPr sz="1900" i="0" b="0">
+              <a:rPr sz="2000" i="0" b="0">
                 <a:solidFill>
                   <a:srgbClr val="D4D4D4"/>
                 </a:solidFill>
@@ -7476,11 +8459,11 @@
           <a:p>
             <a:pPr>
               <a:spcAft>
-                <a:spcPts val="407"/>
+                <a:spcPts val="428"/>
               </a:spcAft>
             </a:pPr>
             <a:r>
-              <a:rPr sz="1900" i="0" b="0">
+              <a:rPr sz="2000" i="0" b="0">
                 <a:solidFill>
                   <a:srgbClr val="569CD6"/>
                 </a:solidFill>
@@ -7489,7 +8472,7 @@
               <a:t>WHERE</a:t>
             </a:r>
             <a:r>
-              <a:rPr sz="1900" i="0" b="0">
+              <a:rPr sz="2000" i="0" b="0">
                 <a:solidFill>
                   <a:srgbClr val="D4D4D4"/>
                 </a:solidFill>
@@ -7498,7 +8481,7 @@
               <a:t> </a:t>
             </a:r>
             <a:r>
-              <a:rPr sz="1900" i="0" b="0">
+              <a:rPr sz="2000" i="0" b="0">
                 <a:solidFill>
                   <a:srgbClr val="DCDCAA"/>
                 </a:solidFill>
@@ -7507,7 +8490,7 @@
               <a:t>TO_CHAR</a:t>
             </a:r>
             <a:r>
-              <a:rPr sz="1900" i="0" b="0">
+              <a:rPr sz="2000" i="0" b="0">
                 <a:solidFill>
                   <a:srgbClr val="D4D4D4"/>
                 </a:solidFill>
@@ -7516,7 +8499,7 @@
               <a:t>(</a:t>
             </a:r>
             <a:r>
-              <a:rPr sz="1900" i="0" b="0">
+              <a:rPr sz="2000" i="0" b="0">
                 <a:solidFill>
                   <a:srgbClr val="D4D4D4"/>
                 </a:solidFill>
@@ -7525,7 +8508,7 @@
               <a:t>fecha_hora</a:t>
             </a:r>
             <a:r>
-              <a:rPr sz="1900" i="0" b="0">
+              <a:rPr sz="2000" i="0" b="0">
                 <a:solidFill>
                   <a:srgbClr val="D4D4D4"/>
                 </a:solidFill>
@@ -7534,7 +8517,7 @@
               <a:t>, </a:t>
             </a:r>
             <a:r>
-              <a:rPr sz="1900" i="0" b="0">
+              <a:rPr sz="2000" i="0" b="0">
                 <a:solidFill>
                   <a:srgbClr val="CE9178"/>
                 </a:solidFill>
@@ -7543,7 +8526,7 @@
               <a:t>'YYYY-MM-DD'</a:t>
             </a:r>
             <a:r>
-              <a:rPr sz="1900" i="0" b="0">
+              <a:rPr sz="2000" i="0" b="0">
                 <a:solidFill>
                   <a:srgbClr val="D4D4D4"/>
                 </a:solidFill>
@@ -7552,16 +8535,16 @@
               <a:t>) = </a:t>
             </a:r>
             <a:r>
-              <a:rPr sz="1900" i="0" b="0">
+              <a:rPr sz="2000" i="0" b="0">
                 <a:solidFill>
                   <a:srgbClr val="CE9178"/>
                 </a:solidFill>
                 <a:latin typeface="Consolas"/>
               </a:rPr>
-              <a:t>'2026-09-01'</a:t>
-            </a:r>
-            <a:r>
-              <a:rPr sz="1900" i="0" b="0">
+              <a:t>'2026-03-10'</a:t>
+            </a:r>
+            <a:r>
+              <a:rPr sz="2000" i="0" b="0">
                 <a:solidFill>
                   <a:srgbClr val="D4D4D4"/>
                 </a:solidFill>
@@ -7573,11 +8556,11 @@
           <a:p>
             <a:pPr>
               <a:spcAft>
-                <a:spcPts val="407"/>
+                <a:spcPts val="428"/>
               </a:spcAft>
             </a:pPr>
             <a:r>
-              <a:rPr sz="1900" i="0" b="0">
+              <a:rPr sz="2000" i="0" b="0">
                 <a:solidFill>
                   <a:srgbClr val="D4D4D4"/>
                 </a:solidFill>
@@ -7589,11 +8572,11 @@
           <a:p>
             <a:pPr>
               <a:spcAft>
-                <a:spcPts val="407"/>
+                <a:spcPts val="428"/>
               </a:spcAft>
             </a:pPr>
             <a:r>
-              <a:rPr sz="1900" i="0" b="0">
+              <a:rPr sz="2000" i="0" b="0">
                 <a:solidFill>
                   <a:srgbClr val="D4D4D4"/>
                 </a:solidFill>
@@ -7602,7 +8585,7 @@
               <a:t>-- </a:t>
             </a:r>
             <a:r>
-              <a:rPr sz="1900" i="0" b="0">
+              <a:rPr sz="2000" i="0" b="0">
                 <a:solidFill>
                   <a:srgbClr val="D4D4D4"/>
                 </a:solidFill>
@@ -7611,7 +8594,7 @@
               <a:t>DESPUES</a:t>
             </a:r>
             <a:r>
-              <a:rPr sz="1900" i="0" b="0">
+              <a:rPr sz="2000" i="0" b="0">
                 <a:solidFill>
                   <a:srgbClr val="D4D4D4"/>
                 </a:solidFill>
@@ -7620,7 +8603,7 @@
               <a:t>: </a:t>
             </a:r>
             <a:r>
-              <a:rPr sz="1900" i="0" b="0">
+              <a:rPr sz="2000" i="0" b="0">
                 <a:solidFill>
                   <a:srgbClr val="D4D4D4"/>
                 </a:solidFill>
@@ -7629,7 +8612,7 @@
               <a:t>rango</a:t>
             </a:r>
             <a:r>
-              <a:rPr sz="1900" i="0" b="0">
+              <a:rPr sz="2000" i="0" b="0">
                 <a:solidFill>
                   <a:srgbClr val="D4D4D4"/>
                 </a:solidFill>
@@ -7638,7 +8621,7 @@
               <a:t> </a:t>
             </a:r>
             <a:r>
-              <a:rPr sz="1900" i="0" b="0">
+              <a:rPr sz="2000" i="0" b="0">
                 <a:solidFill>
                   <a:srgbClr val="D4D4D4"/>
                 </a:solidFill>
@@ -7647,7 +8630,7 @@
               <a:t>sobre</a:t>
             </a:r>
             <a:r>
-              <a:rPr sz="1900" i="0" b="0">
+              <a:rPr sz="2000" i="0" b="0">
                 <a:solidFill>
                   <a:srgbClr val="D4D4D4"/>
                 </a:solidFill>
@@ -7656,7 +8639,7 @@
               <a:t> </a:t>
             </a:r>
             <a:r>
-              <a:rPr sz="1900" i="0" b="0">
+              <a:rPr sz="2000" i="0" b="0">
                 <a:solidFill>
                   <a:srgbClr val="D4D4D4"/>
                 </a:solidFill>
@@ -7665,7 +8648,7 @@
               <a:t>la</a:t>
             </a:r>
             <a:r>
-              <a:rPr sz="1900" i="0" b="0">
+              <a:rPr sz="2000" i="0" b="0">
                 <a:solidFill>
                   <a:srgbClr val="D4D4D4"/>
                 </a:solidFill>
@@ -7674,7 +8657,7 @@
               <a:t> </a:t>
             </a:r>
             <a:r>
-              <a:rPr sz="1900" i="0" b="0">
+              <a:rPr sz="2000" i="0" b="0">
                 <a:solidFill>
                   <a:srgbClr val="D4D4D4"/>
                 </a:solidFill>
@@ -7683,7 +8666,7 @@
               <a:t>columna</a:t>
             </a:r>
             <a:r>
-              <a:rPr sz="1900" i="0" b="0">
+              <a:rPr sz="2000" i="0" b="0">
                 <a:solidFill>
                   <a:srgbClr val="D4D4D4"/>
                 </a:solidFill>
@@ -7692,7 +8675,7 @@
               <a:t> </a:t>
             </a:r>
             <a:r>
-              <a:rPr sz="1900" i="0" b="0">
+              <a:rPr sz="2000" i="0" b="0">
                 <a:solidFill>
                   <a:srgbClr val="D4D4D4"/>
                 </a:solidFill>
@@ -7701,7 +8684,7 @@
               <a:t>desnuda</a:t>
             </a:r>
             <a:r>
-              <a:rPr sz="1900" i="0" b="0">
+              <a:rPr sz="2000" i="0" b="0">
                 <a:solidFill>
                   <a:srgbClr val="D4D4D4"/>
                 </a:solidFill>
@@ -7710,95 +8693,23 @@
               <a:t> -&gt; </a:t>
             </a:r>
             <a:r>
-              <a:rPr sz="1900" i="0" b="0">
-                <a:solidFill>
-                  <a:srgbClr val="D4D4D4"/>
-                </a:solidFill>
-                <a:latin typeface="Consolas"/>
-              </a:rPr>
-              <a:t>el</a:t>
-            </a:r>
-            <a:r>
-              <a:rPr sz="1900" i="0" b="0">
-                <a:solidFill>
-                  <a:srgbClr val="D4D4D4"/>
-                </a:solidFill>
-                <a:latin typeface="Consolas"/>
-              </a:rPr>
-              <a:t> </a:t>
-            </a:r>
-            <a:r>
-              <a:rPr sz="1900" i="0" b="0">
-                <a:solidFill>
-                  <a:srgbClr val="D4D4D4"/>
-                </a:solidFill>
-                <a:latin typeface="Consolas"/>
-              </a:rPr>
-              <a:t>indice</a:t>
-            </a:r>
-            <a:r>
-              <a:rPr sz="1900" i="0" b="0">
-                <a:solidFill>
-                  <a:srgbClr val="D4D4D4"/>
-                </a:solidFill>
-                <a:latin typeface="Consolas"/>
-              </a:rPr>
-              <a:t> </a:t>
-            </a:r>
-            <a:r>
-              <a:rPr sz="1900" i="0" b="0">
-                <a:solidFill>
-                  <a:srgbClr val="D4D4D4"/>
-                </a:solidFill>
-                <a:latin typeface="Consolas"/>
-              </a:rPr>
-              <a:t>si</a:t>
-            </a:r>
-            <a:r>
-              <a:rPr sz="1900" i="0" b="0">
-                <a:solidFill>
-                  <a:srgbClr val="D4D4D4"/>
-                </a:solidFill>
-                <a:latin typeface="Consolas"/>
-              </a:rPr>
-              <a:t> </a:t>
-            </a:r>
-            <a:r>
-              <a:rPr sz="1900" i="0" b="0">
-                <a:solidFill>
-                  <a:srgbClr val="D4D4D4"/>
-                </a:solidFill>
-                <a:latin typeface="Consolas"/>
-              </a:rPr>
-              <a:t>se</a:t>
-            </a:r>
-            <a:r>
-              <a:rPr sz="1900" i="0" b="0">
-                <a:solidFill>
-                  <a:srgbClr val="D4D4D4"/>
-                </a:solidFill>
-                <a:latin typeface="Consolas"/>
-              </a:rPr>
-              <a:t> </a:t>
-            </a:r>
-            <a:r>
-              <a:rPr sz="1900" i="0" b="0">
-                <a:solidFill>
-                  <a:srgbClr val="D4D4D4"/>
-                </a:solidFill>
-                <a:latin typeface="Consolas"/>
-              </a:rPr>
-              <a:t>usa</a:t>
+              <a:rPr sz="2000" i="0" b="0">
+                <a:solidFill>
+                  <a:srgbClr val="D4D4D4"/>
+                </a:solidFill>
+                <a:latin typeface="Consolas"/>
+              </a:rPr>
+              <a:t>sargable</a:t>
             </a:r>
           </a:p>
           <a:p>
             <a:pPr>
               <a:spcAft>
-                <a:spcPts val="407"/>
+                <a:spcPts val="428"/>
               </a:spcAft>
             </a:pPr>
             <a:r>
-              <a:rPr sz="1900" i="0" b="0">
+              <a:rPr sz="2000" i="0" b="0">
                 <a:solidFill>
                   <a:srgbClr val="569CD6"/>
                 </a:solidFill>
@@ -7807,7 +8718,7 @@
               <a:t>SELECT</a:t>
             </a:r>
             <a:r>
-              <a:rPr sz="1900" i="0" b="0">
+              <a:rPr sz="2000" i="0" b="0">
                 <a:solidFill>
                   <a:srgbClr val="D4D4D4"/>
                 </a:solidFill>
@@ -7816,25 +8727,7 @@
               <a:t> </a:t>
             </a:r>
             <a:r>
-              <a:rPr sz="1900" i="0" b="0">
-                <a:solidFill>
-                  <a:srgbClr val="D4D4D4"/>
-                </a:solidFill>
-                <a:latin typeface="Consolas"/>
-              </a:rPr>
-              <a:t>c</a:t>
-            </a:r>
-            <a:r>
-              <a:rPr sz="1900" i="0" b="0">
-                <a:solidFill>
-                  <a:srgbClr val="D4D4D4"/>
-                </a:solidFill>
-                <a:latin typeface="Consolas"/>
-              </a:rPr>
-              <a:t>.</a:t>
-            </a:r>
-            <a:r>
-              <a:rPr sz="1900" i="0" b="0">
+              <a:rPr sz="2000" i="0" b="0">
                 <a:solidFill>
                   <a:srgbClr val="D4D4D4"/>
                 </a:solidFill>
@@ -7843,7 +8736,7 @@
               <a:t>id_cita</a:t>
             </a:r>
             <a:r>
-              <a:rPr sz="1900" i="0" b="0">
+              <a:rPr sz="2000" i="0" b="0">
                 <a:solidFill>
                   <a:srgbClr val="D4D4D4"/>
                 </a:solidFill>
@@ -7852,25 +8745,7 @@
               <a:t>, </a:t>
             </a:r>
             <a:r>
-              <a:rPr sz="1900" i="0" b="0">
-                <a:solidFill>
-                  <a:srgbClr val="D4D4D4"/>
-                </a:solidFill>
-                <a:latin typeface="Consolas"/>
-              </a:rPr>
-              <a:t>c</a:t>
-            </a:r>
-            <a:r>
-              <a:rPr sz="1900" i="0" b="0">
-                <a:solidFill>
-                  <a:srgbClr val="D4D4D4"/>
-                </a:solidFill>
-                <a:latin typeface="Consolas"/>
-              </a:rPr>
-              <a:t>.</a:t>
-            </a:r>
-            <a:r>
-              <a:rPr sz="1900" i="0" b="0">
+              <a:rPr sz="2000" i="0" b="0">
                 <a:solidFill>
                   <a:srgbClr val="D4D4D4"/>
                 </a:solidFill>
@@ -7879,7 +8754,7 @@
               <a:t>fecha_hora</a:t>
             </a:r>
             <a:r>
-              <a:rPr sz="1900" i="0" b="0">
+              <a:rPr sz="2000" i="0" b="0">
                 <a:solidFill>
                   <a:srgbClr val="D4D4D4"/>
                 </a:solidFill>
@@ -7888,50 +8763,68 @@
               <a:t>, </a:t>
             </a:r>
             <a:r>
-              <a:rPr sz="1900" i="0" b="0">
-                <a:solidFill>
-                  <a:srgbClr val="D4D4D4"/>
-                </a:solidFill>
-                <a:latin typeface="Consolas"/>
-              </a:rPr>
-              <a:t>m</a:t>
-            </a:r>
-            <a:r>
-              <a:rPr sz="1900" i="0" b="0">
-                <a:solidFill>
-                  <a:srgbClr val="D4D4D4"/>
-                </a:solidFill>
-                <a:latin typeface="Consolas"/>
-              </a:rPr>
-              <a:t>.</a:t>
-            </a:r>
-            <a:r>
-              <a:rPr sz="1900" i="0" b="0">
-                <a:solidFill>
-                  <a:srgbClr val="D4D4D4"/>
-                </a:solidFill>
-                <a:latin typeface="Consolas"/>
-              </a:rPr>
-              <a:t>nombre</a:t>
+              <a:rPr sz="2000" i="0" b="0">
+                <a:solidFill>
+                  <a:srgbClr val="D4D4D4"/>
+                </a:solidFill>
+                <a:latin typeface="Consolas"/>
+              </a:rPr>
+              <a:t>estado</a:t>
+            </a:r>
+            <a:r>
+              <a:rPr sz="2000" i="0" b="0">
+                <a:solidFill>
+                  <a:srgbClr val="D4D4D4"/>
+                </a:solidFill>
+                <a:latin typeface="Consolas"/>
+              </a:rPr>
+              <a:t> </a:t>
+            </a:r>
+            <a:r>
+              <a:rPr sz="2000" i="0" b="0">
+                <a:solidFill>
+                  <a:srgbClr val="569CD6"/>
+                </a:solidFill>
+                <a:latin typeface="Consolas"/>
+              </a:rPr>
+              <a:t>FROM</a:t>
+            </a:r>
+            <a:r>
+              <a:rPr sz="2000" i="0" b="0">
+                <a:solidFill>
+                  <a:srgbClr val="D4D4D4"/>
+                </a:solidFill>
+                <a:latin typeface="Consolas"/>
+              </a:rPr>
+              <a:t> </a:t>
+            </a:r>
+            <a:r>
+              <a:rPr sz="2000" i="0" b="0">
+                <a:solidFill>
+                  <a:srgbClr val="D4D4D4"/>
+                </a:solidFill>
+                <a:latin typeface="Consolas"/>
+              </a:rPr>
+              <a:t>cita</a:t>
             </a:r>
           </a:p>
           <a:p>
             <a:pPr>
               <a:spcAft>
-                <a:spcPts val="407"/>
+                <a:spcPts val="428"/>
               </a:spcAft>
             </a:pPr>
             <a:r>
-              <a:rPr sz="1900" i="0" b="0">
+              <a:rPr sz="2000" i="0" b="0">
                 <a:solidFill>
                   <a:srgbClr val="569CD6"/>
                 </a:solidFill>
                 <a:latin typeface="Consolas"/>
               </a:rPr>
-              <a:t>FROM</a:t>
-            </a:r>
-            <a:r>
-              <a:rPr sz="1900" i="0" b="0">
+              <a:t>WHERE</a:t>
+            </a:r>
+            <a:r>
+              <a:rPr sz="2000" i="0" b="0">
                 <a:solidFill>
                   <a:srgbClr val="D4D4D4"/>
                 </a:solidFill>
@@ -7940,16 +8833,34 @@
               <a:t> </a:t>
             </a:r>
             <a:r>
-              <a:rPr sz="1900" i="0" b="0">
-                <a:solidFill>
-                  <a:srgbClr val="D4D4D4"/>
-                </a:solidFill>
-                <a:latin typeface="Consolas"/>
-              </a:rPr>
-              <a:t>cita</a:t>
-            </a:r>
-            <a:r>
-              <a:rPr sz="1900" i="0" b="0">
+              <a:rPr sz="2000" i="0" b="0">
+                <a:solidFill>
+                  <a:srgbClr val="D4D4D4"/>
+                </a:solidFill>
+                <a:latin typeface="Consolas"/>
+              </a:rPr>
+              <a:t>fecha_hora</a:t>
+            </a:r>
+            <a:r>
+              <a:rPr sz="2000" i="0" b="0">
+                <a:solidFill>
+                  <a:srgbClr val="D4D4D4"/>
+                </a:solidFill>
+                <a:latin typeface="Consolas"/>
+              </a:rPr>
+              <a:t> &gt;= </a:t>
+            </a:r>
+            <a:r>
+              <a:rPr sz="2000" i="0" b="0">
+                <a:solidFill>
+                  <a:srgbClr val="4EC9B0"/>
+                </a:solidFill>
+                <a:latin typeface="Consolas"/>
+              </a:rPr>
+              <a:t>TIMESTAMP</a:t>
+            </a:r>
+            <a:r>
+              <a:rPr sz="2000" i="0" b="0">
                 <a:solidFill>
                   <a:srgbClr val="D4D4D4"/>
                 </a:solidFill>
@@ -7958,32 +8869,41 @@
               <a:t> </a:t>
             </a:r>
             <a:r>
-              <a:rPr sz="1900" i="0" b="0">
-                <a:solidFill>
-                  <a:srgbClr val="D4D4D4"/>
-                </a:solidFill>
-                <a:latin typeface="Consolas"/>
-              </a:rPr>
-              <a:t>c</a:t>
+              <a:rPr sz="2000" i="0" b="0">
+                <a:solidFill>
+                  <a:srgbClr val="CE9178"/>
+                </a:solidFill>
+                <a:latin typeface="Consolas"/>
+              </a:rPr>
+              <a:t>'2026-03-10 00:00:00'</a:t>
             </a:r>
           </a:p>
           <a:p>
             <a:pPr>
               <a:spcAft>
-                <a:spcPts val="407"/>
+                <a:spcPts val="428"/>
               </a:spcAft>
             </a:pPr>
             <a:r>
-              <a:rPr sz="1900" i="0" b="0">
+              <a:rPr sz="2000" i="0" b="0">
+                <a:solidFill>
+                  <a:srgbClr val="D4D4D4"/>
+                </a:solidFill>
+                <a:latin typeface="Consolas"/>
+              </a:rPr>
+              <a:t>  </a:t>
+            </a:r>
+            <a:r>
+              <a:rPr sz="2000" i="0" b="0">
                 <a:solidFill>
                   <a:srgbClr val="569CD6"/>
                 </a:solidFill>
                 <a:latin typeface="Consolas"/>
               </a:rPr>
-              <a:t>JOIN</a:t>
-            </a:r>
-            <a:r>
-              <a:rPr sz="1900" i="0" b="0">
+              <a:t>AND</a:t>
+            </a:r>
+            <a:r>
+              <a:rPr sz="2000" i="0" b="0">
                 <a:solidFill>
                   <a:srgbClr val="D4D4D4"/>
                 </a:solidFill>
@@ -7992,16 +8912,34 @@
               <a:t> </a:t>
             </a:r>
             <a:r>
-              <a:rPr sz="1900" i="0" b="0">
-                <a:solidFill>
-                  <a:srgbClr val="D4D4D4"/>
-                </a:solidFill>
-                <a:latin typeface="Consolas"/>
-              </a:rPr>
-              <a:t>mascota</a:t>
-            </a:r>
-            <a:r>
-              <a:rPr sz="1900" i="0" b="0">
+              <a:rPr sz="2000" i="0" b="0">
+                <a:solidFill>
+                  <a:srgbClr val="D4D4D4"/>
+                </a:solidFill>
+                <a:latin typeface="Consolas"/>
+              </a:rPr>
+              <a:t>fecha_hora</a:t>
+            </a:r>
+            <a:r>
+              <a:rPr sz="2000" i="0" b="0">
+                <a:solidFill>
+                  <a:srgbClr val="D4D4D4"/>
+                </a:solidFill>
+                <a:latin typeface="Consolas"/>
+              </a:rPr>
+              <a:t> &lt;  </a:t>
+            </a:r>
+            <a:r>
+              <a:rPr sz="2000" i="0" b="0">
+                <a:solidFill>
+                  <a:srgbClr val="4EC9B0"/>
+                </a:solidFill>
+                <a:latin typeface="Consolas"/>
+              </a:rPr>
+              <a:t>TIMESTAMP</a:t>
+            </a:r>
+            <a:r>
+              <a:rPr sz="2000" i="0" b="0">
                 <a:solidFill>
                   <a:srgbClr val="D4D4D4"/>
                 </a:solidFill>
@@ -8010,329 +8948,70 @@
               <a:t> </a:t>
             </a:r>
             <a:r>
-              <a:rPr sz="1900" i="0" b="0">
-                <a:solidFill>
-                  <a:srgbClr val="D4D4D4"/>
-                </a:solidFill>
-                <a:latin typeface="Consolas"/>
-              </a:rPr>
-              <a:t>m</a:t>
-            </a:r>
-            <a:r>
-              <a:rPr sz="1900" i="0" b="0">
-                <a:solidFill>
-                  <a:srgbClr val="D4D4D4"/>
-                </a:solidFill>
-                <a:latin typeface="Consolas"/>
-              </a:rPr>
-              <a:t> </a:t>
-            </a:r>
-            <a:r>
-              <a:rPr sz="1900" i="0" b="0">
-                <a:solidFill>
-                  <a:srgbClr val="569CD6"/>
-                </a:solidFill>
-                <a:latin typeface="Consolas"/>
-              </a:rPr>
-              <a:t>ON</a:t>
-            </a:r>
-            <a:r>
-              <a:rPr sz="1900" i="0" b="0">
-                <a:solidFill>
-                  <a:srgbClr val="D4D4D4"/>
-                </a:solidFill>
-                <a:latin typeface="Consolas"/>
-              </a:rPr>
-              <a:t> </a:t>
-            </a:r>
-            <a:r>
-              <a:rPr sz="1900" i="0" b="0">
-                <a:solidFill>
-                  <a:srgbClr val="D4D4D4"/>
-                </a:solidFill>
-                <a:latin typeface="Consolas"/>
-              </a:rPr>
-              <a:t>m</a:t>
-            </a:r>
-            <a:r>
-              <a:rPr sz="1900" i="0" b="0">
-                <a:solidFill>
-                  <a:srgbClr val="D4D4D4"/>
-                </a:solidFill>
-                <a:latin typeface="Consolas"/>
-              </a:rPr>
-              <a:t>.</a:t>
-            </a:r>
-            <a:r>
-              <a:rPr sz="1900" i="0" b="0">
-                <a:solidFill>
-                  <a:srgbClr val="D4D4D4"/>
-                </a:solidFill>
-                <a:latin typeface="Consolas"/>
-              </a:rPr>
-              <a:t>id_mascota</a:t>
-            </a:r>
-            <a:r>
-              <a:rPr sz="1900" i="0" b="0">
-                <a:solidFill>
-                  <a:srgbClr val="D4D4D4"/>
-                </a:solidFill>
-                <a:latin typeface="Consolas"/>
-              </a:rPr>
-              <a:t> = </a:t>
-            </a:r>
-            <a:r>
-              <a:rPr sz="1900" i="0" b="0">
-                <a:solidFill>
-                  <a:srgbClr val="D4D4D4"/>
-                </a:solidFill>
-                <a:latin typeface="Consolas"/>
-              </a:rPr>
-              <a:t>c</a:t>
-            </a:r>
-            <a:r>
-              <a:rPr sz="1900" i="0" b="0">
-                <a:solidFill>
-                  <a:srgbClr val="D4D4D4"/>
-                </a:solidFill>
-                <a:latin typeface="Consolas"/>
-              </a:rPr>
-              <a:t>.</a:t>
-            </a:r>
-            <a:r>
-              <a:rPr sz="1900" i="0" b="0">
-                <a:solidFill>
-                  <a:srgbClr val="D4D4D4"/>
-                </a:solidFill>
-                <a:latin typeface="Consolas"/>
-              </a:rPr>
-              <a:t>id_mascota</a:t>
+              <a:rPr sz="2000" i="0" b="0">
+                <a:solidFill>
+                  <a:srgbClr val="CE9178"/>
+                </a:solidFill>
+                <a:latin typeface="Consolas"/>
+              </a:rPr>
+              <a:t>'2026-03-11 00:00:00'</a:t>
+            </a:r>
+            <a:r>
+              <a:rPr sz="2000" i="0" b="0">
+                <a:solidFill>
+                  <a:srgbClr val="D4D4D4"/>
+                </a:solidFill>
+                <a:latin typeface="Consolas"/>
+              </a:rPr>
+              <a:t>;</a:t>
             </a:r>
           </a:p>
           <a:p>
             <a:pPr>
               <a:spcAft>
-                <a:spcPts val="407"/>
+                <a:spcPts val="428"/>
               </a:spcAft>
             </a:pPr>
             <a:r>
-              <a:rPr sz="1900" i="0" b="0">
-                <a:solidFill>
-                  <a:srgbClr val="569CD6"/>
-                </a:solidFill>
-                <a:latin typeface="Consolas"/>
-              </a:rPr>
-              <a:t>WHERE</a:t>
-            </a:r>
-            <a:r>
-              <a:rPr sz="1900" i="0" b="0">
-                <a:solidFill>
-                  <a:srgbClr val="D4D4D4"/>
-                </a:solidFill>
-                <a:latin typeface="Consolas"/>
-              </a:rPr>
-              <a:t> </a:t>
-            </a:r>
-            <a:r>
-              <a:rPr sz="1900" i="0" b="0">
-                <a:solidFill>
-                  <a:srgbClr val="D4D4D4"/>
-                </a:solidFill>
-                <a:latin typeface="Consolas"/>
-              </a:rPr>
-              <a:t>c</a:t>
-            </a:r>
-            <a:r>
-              <a:rPr sz="1900" i="0" b="0">
-                <a:solidFill>
-                  <a:srgbClr val="D4D4D4"/>
-                </a:solidFill>
-                <a:latin typeface="Consolas"/>
-              </a:rPr>
-              <a:t>.</a:t>
-            </a:r>
-            <a:r>
-              <a:rPr sz="1900" i="0" b="0">
-                <a:solidFill>
-                  <a:srgbClr val="D4D4D4"/>
-                </a:solidFill>
-                <a:latin typeface="Consolas"/>
-              </a:rPr>
-              <a:t>fecha_hora</a:t>
-            </a:r>
-            <a:r>
-              <a:rPr sz="1900" i="0" b="0">
-                <a:solidFill>
-                  <a:srgbClr val="D4D4D4"/>
-                </a:solidFill>
-                <a:latin typeface="Consolas"/>
-              </a:rPr>
-              <a:t> &gt;= </a:t>
-            </a:r>
-            <a:r>
-              <a:rPr sz="1900" i="0" b="0">
-                <a:solidFill>
-                  <a:srgbClr val="4EC9B0"/>
-                </a:solidFill>
-                <a:latin typeface="Consolas"/>
-              </a:rPr>
-              <a:t>TIMESTAMP</a:t>
-            </a:r>
-            <a:r>
-              <a:rPr sz="1900" i="0" b="0">
-                <a:solidFill>
-                  <a:srgbClr val="D4D4D4"/>
-                </a:solidFill>
-                <a:latin typeface="Consolas"/>
-              </a:rPr>
-              <a:t> </a:t>
-            </a:r>
-            <a:r>
-              <a:rPr sz="1900" i="0" b="0">
-                <a:solidFill>
-                  <a:srgbClr val="CE9178"/>
-                </a:solidFill>
-                <a:latin typeface="Consolas"/>
-              </a:rPr>
-              <a:t>'2026-09-01 00:00:00'</a:t>
+              <a:rPr sz="2000" i="0" b="0">
+                <a:solidFill>
+                  <a:srgbClr val="D4D4D4"/>
+                </a:solidFill>
+                <a:latin typeface="Consolas"/>
+              </a:rPr>
+              <a:t/>
             </a:r>
           </a:p>
           <a:p>
             <a:pPr>
               <a:spcAft>
-                <a:spcPts val="407"/>
+                <a:spcPts val="428"/>
               </a:spcAft>
             </a:pPr>
             <a:r>
-              <a:rPr sz="1900" i="0" b="0">
-                <a:solidFill>
-                  <a:srgbClr val="D4D4D4"/>
-                </a:solidFill>
-                <a:latin typeface="Consolas"/>
-              </a:rPr>
-              <a:t>  </a:t>
-            </a:r>
-            <a:r>
-              <a:rPr sz="1900" i="0" b="0">
-                <a:solidFill>
-                  <a:srgbClr val="569CD6"/>
-                </a:solidFill>
-                <a:latin typeface="Consolas"/>
-              </a:rPr>
-              <a:t>AND</a:t>
-            </a:r>
-            <a:r>
-              <a:rPr sz="1900" i="0" b="0">
-                <a:solidFill>
-                  <a:srgbClr val="D4D4D4"/>
-                </a:solidFill>
-                <a:latin typeface="Consolas"/>
-              </a:rPr>
-              <a:t> </a:t>
-            </a:r>
-            <a:r>
-              <a:rPr sz="1900" i="0" b="0">
-                <a:solidFill>
-                  <a:srgbClr val="D4D4D4"/>
-                </a:solidFill>
-                <a:latin typeface="Consolas"/>
-              </a:rPr>
-              <a:t>c</a:t>
-            </a:r>
-            <a:r>
-              <a:rPr sz="1900" i="0" b="0">
-                <a:solidFill>
-                  <a:srgbClr val="D4D4D4"/>
-                </a:solidFill>
-                <a:latin typeface="Consolas"/>
-              </a:rPr>
-              <a:t>.</a:t>
-            </a:r>
-            <a:r>
-              <a:rPr sz="1900" i="0" b="0">
-                <a:solidFill>
-                  <a:srgbClr val="D4D4D4"/>
-                </a:solidFill>
-                <a:latin typeface="Consolas"/>
-              </a:rPr>
-              <a:t>fecha_hora</a:t>
-            </a:r>
-            <a:r>
-              <a:rPr sz="1900" i="0" b="0">
-                <a:solidFill>
-                  <a:srgbClr val="D4D4D4"/>
-                </a:solidFill>
-                <a:latin typeface="Consolas"/>
-              </a:rPr>
-              <a:t> &lt;  </a:t>
-            </a:r>
-            <a:r>
-              <a:rPr sz="1900" i="0" b="0">
-                <a:solidFill>
-                  <a:srgbClr val="4EC9B0"/>
-                </a:solidFill>
-                <a:latin typeface="Consolas"/>
-              </a:rPr>
-              <a:t>TIMESTAMP</a:t>
-            </a:r>
-            <a:r>
-              <a:rPr sz="1900" i="0" b="0">
-                <a:solidFill>
-                  <a:srgbClr val="D4D4D4"/>
-                </a:solidFill>
-                <a:latin typeface="Consolas"/>
-              </a:rPr>
-              <a:t> </a:t>
-            </a:r>
-            <a:r>
-              <a:rPr sz="1900" i="0" b="0">
-                <a:solidFill>
-                  <a:srgbClr val="CE9178"/>
-                </a:solidFill>
-                <a:latin typeface="Consolas"/>
-              </a:rPr>
-              <a:t>'2026-09-02 00:00:00'</a:t>
-            </a:r>
-            <a:r>
-              <a:rPr sz="1900" i="0" b="0">
-                <a:solidFill>
-                  <a:srgbClr val="D4D4D4"/>
-                </a:solidFill>
-                <a:latin typeface="Consolas"/>
-              </a:rPr>
-              <a:t>;</a:t>
+              <a:rPr sz="2000" i="1" b="0">
+                <a:solidFill>
+                  <a:srgbClr val="6A9955"/>
+                </a:solidFill>
+                <a:latin typeface="Consolas"/>
+              </a:rPr>
+              <a:t>-- Las dos devuelven las mismas 150 citas. Con un indice sobre</a:t>
             </a:r>
           </a:p>
           <a:p>
             <a:pPr>
               <a:spcAft>
-                <a:spcPts val="407"/>
+                <a:spcPts val="428"/>
               </a:spcAft>
             </a:pPr>
             <a:r>
-              <a:rPr sz="1900" i="0" b="0">
-                <a:solidFill>
-                  <a:srgbClr val="D4D4D4"/>
-                </a:solidFill>
-                <a:latin typeface="Consolas"/>
-              </a:rPr>
-              <a:t/>
-            </a:r>
-          </a:p>
-          <a:p>
-            <a:pPr>
-              <a:spcAft>
-                <a:spcPts val="407"/>
-              </a:spcAft>
-            </a:pPr>
-            <a:r>
-              <a:rPr sz="1900" i="1" b="0">
+              <a:rPr sz="2000" i="1" b="0">
                 <a:solidFill>
                   <a:srgbClr val="6A9955"/>
                 </a:solidFill>
                 <a:latin typeface="Consolas"/>
               </a:rPr>
-              <a:t>-- La regla: nunca envolver en una funcion la columna por la que se filtra.</a:t>
+              <a:t>-- fecha_hora (Clase 7) solo la segunda podria usarlo.</a:t>
             </a:r>
           </a:p>
         </p:txBody>
@@ -9464,7 +10143,25 @@
                 </a:solidFill>
                 <a:latin typeface="Calibri"/>
               </a:rPr>
-              <a:t>–   Una subconsulta es correlacionada cuando menciona una columna de la consulta exterior.</a:t>
+              <a:t>–   Una subconsulta es </a:t>
+            </a:r>
+            <a:r>
+              <a:rPr sz="2000" b="1" i="0">
+                <a:solidFill>
+                  <a:srgbClr val="333333"/>
+                </a:solidFill>
+                <a:latin typeface="Calibri"/>
+              </a:rPr>
+              <a:t>correlacionada</a:t>
+            </a:r>
+            <a:r>
+              <a:rPr sz="2000" b="0" i="0">
+                <a:solidFill>
+                  <a:srgbClr val="333333"/>
+                </a:solidFill>
+                <a:latin typeface="Calibri"/>
+              </a:rPr>
+              <a:t> si menciona una columna de la consulta de afuera.</a:t>
             </a:r>
           </a:p>
           <a:p>
@@ -9480,7 +10177,25 @@
                 </a:solidFill>
                 <a:latin typeface="Calibri"/>
               </a:rPr>
-              <a:t>–   Porque depende de la fila que se este mirando, asi que la ejecuta una vez por cada fila del exterior.</a:t>
+              <a:t>–   En el SELECT se ejecuta </a:t>
+            </a:r>
+            <a:r>
+              <a:rPr sz="2000" b="1" i="0">
+                <a:solidFill>
+                  <a:srgbClr val="333333"/>
+                </a:solidFill>
+                <a:latin typeface="Calibri"/>
+              </a:rPr>
+              <a:t>una vez por cada fila</a:t>
+            </a:r>
+            <a:r>
+              <a:rPr sz="2000" b="0" i="0">
+                <a:solidFill>
+                  <a:srgbClr val="333333"/>
+                </a:solidFill>
+                <a:latin typeface="Calibri"/>
+              </a:rPr>
+              <a:t> de afuera: 2.006 dueños, 2.006 veces.</a:t>
             </a:r>
           </a:p>
           <a:p>
@@ -9496,7 +10211,43 @@
                 </a:solidFill>
                 <a:latin typeface="Calibri"/>
               </a:rPr>
-              <a:t>–   El reporte de ranking de duenos de la clase la tiene.</a:t>
+              <a:t>–   El plan lo delata con un nodo </a:t>
+            </a:r>
+            <a:r>
+              <a:rPr sz="2000" b="1" i="0">
+                <a:solidFill>
+                  <a:srgbClr val="333333"/>
+                </a:solidFill>
+                <a:latin typeface="Calibri"/>
+              </a:rPr>
+              <a:t>SubPlan</a:t>
+            </a:r>
+            <a:r>
+              <a:rPr sz="2000" b="0" i="0">
+                <a:solidFill>
+                  <a:srgbClr val="333333"/>
+                </a:solidFill>
+                <a:latin typeface="Calibri"/>
+              </a:rPr>
+              <a:t> y </a:t>
+            </a:r>
+            <a:r>
+              <a:rPr sz="2000" b="1" i="0">
+                <a:solidFill>
+                  <a:srgbClr val="333333"/>
+                </a:solidFill>
+                <a:latin typeface="Calibri"/>
+              </a:rPr>
+              <a:t>loops=2006</a:t>
+            </a:r>
+            <a:r>
+              <a:rPr sz="2000" b="0" i="0">
+                <a:solidFill>
+                  <a:srgbClr val="333333"/>
+                </a:solidFill>
+                <a:latin typeface="Calibri"/>
+              </a:rPr>
+              <a:t>.</a:t>
             </a:r>
           </a:p>
           <a:p>
@@ -9512,7 +10263,25 @@
                 </a:solidFill>
                 <a:latin typeface="Calibri"/>
               </a:rPr>
-              <a:t>–   Como hay 2.006 duenos, se ejecuta 2.006 veces, y cada ejecucion recorre mascota y cita completas: del orden de 70 millones de filas procesadas para…</a:t>
+              <a:t>–   Con </a:t>
+            </a:r>
+            <a:r>
+              <a:rPr sz="2000" b="1" i="0">
+                <a:solidFill>
+                  <a:srgbClr val="333333"/>
+                </a:solidFill>
+                <a:latin typeface="Calibri"/>
+              </a:rPr>
+              <a:t>LEFT JOIN</a:t>
+            </a:r>
+            <a:r>
+              <a:rPr sz="2000" b="0" i="0">
+                <a:solidFill>
+                  <a:srgbClr val="333333"/>
+                </a:solidFill>
+                <a:latin typeface="Calibri"/>
+              </a:rPr>
+              <a:t> y GROUP BY el mismo resultado sale en una sola pasada.</a:t>
             </a:r>
           </a:p>
         </p:txBody>
@@ -9843,7 +10612,7 @@
         <p:spPr>
           <a:xfrm>
             <a:off x="457200" y="1261872"/>
-            <a:ext cx="11277295" cy="5063663"/>
+            <a:ext cx="11277295" cy="5031343"/>
           </a:xfrm>
           <a:prstGeom prst="roundRect">
             <a:avLst>
@@ -10093,7 +10862,7 @@
         <p:spPr>
           <a:xfrm>
             <a:off x="685800" y="1719072"/>
-            <a:ext cx="502920" cy="4469303"/>
+            <a:ext cx="502920" cy="4436983"/>
           </a:xfrm>
           <a:prstGeom prst="rect">
             <a:avLst/>
@@ -10108,11 +10877,11 @@
           <a:p>
             <a:pPr algn="r">
               <a:spcAft>
-                <a:spcPts val="407"/>
+                <a:spcPts val="342"/>
               </a:spcAft>
             </a:pPr>
             <a:r>
-              <a:rPr sz="1900" i="0" b="0">
+              <a:rPr sz="1600" i="0" b="0">
                 <a:solidFill>
                   <a:srgbClr val="858585"/>
                 </a:solidFill>
@@ -10124,11 +10893,11 @@
           <a:p>
             <a:pPr algn="r">
               <a:spcAft>
-                <a:spcPts val="407"/>
+                <a:spcPts val="342"/>
               </a:spcAft>
             </a:pPr>
             <a:r>
-              <a:rPr sz="1900" i="0" b="0">
+              <a:rPr sz="1600" i="0" b="0">
                 <a:solidFill>
                   <a:srgbClr val="858585"/>
                 </a:solidFill>
@@ -10140,11 +10909,11 @@
           <a:p>
             <a:pPr algn="r">
               <a:spcAft>
-                <a:spcPts val="407"/>
+                <a:spcPts val="342"/>
               </a:spcAft>
             </a:pPr>
             <a:r>
-              <a:rPr sz="1900" i="0" b="0">
+              <a:rPr sz="1600" i="0" b="0">
                 <a:solidFill>
                   <a:srgbClr val="858585"/>
                 </a:solidFill>
@@ -10156,11 +10925,11 @@
           <a:p>
             <a:pPr algn="r">
               <a:spcAft>
-                <a:spcPts val="407"/>
+                <a:spcPts val="342"/>
               </a:spcAft>
             </a:pPr>
             <a:r>
-              <a:rPr sz="1900" i="0" b="0">
+              <a:rPr sz="1600" i="0" b="0">
                 <a:solidFill>
                   <a:srgbClr val="858585"/>
                 </a:solidFill>
@@ -10172,11 +10941,11 @@
           <a:p>
             <a:pPr algn="r">
               <a:spcAft>
-                <a:spcPts val="407"/>
+                <a:spcPts val="342"/>
               </a:spcAft>
             </a:pPr>
             <a:r>
-              <a:rPr sz="1900" i="0" b="0">
+              <a:rPr sz="1600" i="0" b="0">
                 <a:solidFill>
                   <a:srgbClr val="858585"/>
                 </a:solidFill>
@@ -10188,11 +10957,11 @@
           <a:p>
             <a:pPr algn="r">
               <a:spcAft>
-                <a:spcPts val="407"/>
+                <a:spcPts val="342"/>
               </a:spcAft>
             </a:pPr>
             <a:r>
-              <a:rPr sz="1900" i="0" b="0">
+              <a:rPr sz="1600" i="0" b="0">
                 <a:solidFill>
                   <a:srgbClr val="858585"/>
                 </a:solidFill>
@@ -10204,11 +10973,11 @@
           <a:p>
             <a:pPr algn="r">
               <a:spcAft>
-                <a:spcPts val="407"/>
+                <a:spcPts val="342"/>
               </a:spcAft>
             </a:pPr>
             <a:r>
-              <a:rPr sz="1900" i="0" b="0">
+              <a:rPr sz="1600" i="0" b="0">
                 <a:solidFill>
                   <a:srgbClr val="858585"/>
                 </a:solidFill>
@@ -10220,11 +10989,11 @@
           <a:p>
             <a:pPr algn="r">
               <a:spcAft>
-                <a:spcPts val="407"/>
+                <a:spcPts val="342"/>
               </a:spcAft>
             </a:pPr>
             <a:r>
-              <a:rPr sz="1900" i="0" b="0">
+              <a:rPr sz="1600" i="0" b="0">
                 <a:solidFill>
                   <a:srgbClr val="858585"/>
                 </a:solidFill>
@@ -10236,11 +11005,11 @@
           <a:p>
             <a:pPr algn="r">
               <a:spcAft>
-                <a:spcPts val="407"/>
+                <a:spcPts val="342"/>
               </a:spcAft>
             </a:pPr>
             <a:r>
-              <a:rPr sz="1900" i="0" b="0">
+              <a:rPr sz="1600" i="0" b="0">
                 <a:solidFill>
                   <a:srgbClr val="858585"/>
                 </a:solidFill>
@@ -10252,11 +11021,11 @@
           <a:p>
             <a:pPr algn="r">
               <a:spcAft>
-                <a:spcPts val="407"/>
+                <a:spcPts val="342"/>
               </a:spcAft>
             </a:pPr>
             <a:r>
-              <a:rPr sz="1900" i="0" b="0">
+              <a:rPr sz="1600" i="0" b="0">
                 <a:solidFill>
                   <a:srgbClr val="858585"/>
                 </a:solidFill>
@@ -10268,11 +11037,11 @@
           <a:p>
             <a:pPr algn="r">
               <a:spcAft>
-                <a:spcPts val="407"/>
+                <a:spcPts val="342"/>
               </a:spcAft>
             </a:pPr>
             <a:r>
-              <a:rPr sz="1900" i="0" b="0">
+              <a:rPr sz="1600" i="0" b="0">
                 <a:solidFill>
                   <a:srgbClr val="858585"/>
                 </a:solidFill>
@@ -10284,11 +11053,11 @@
           <a:p>
             <a:pPr algn="r">
               <a:spcAft>
-                <a:spcPts val="407"/>
+                <a:spcPts val="342"/>
               </a:spcAft>
             </a:pPr>
             <a:r>
-              <a:rPr sz="1900" i="0" b="0">
+              <a:rPr sz="1600" i="0" b="0">
                 <a:solidFill>
                   <a:srgbClr val="858585"/>
                 </a:solidFill>
@@ -10300,17 +11069,49 @@
           <a:p>
             <a:pPr algn="r">
               <a:spcAft>
-                <a:spcPts val="407"/>
+                <a:spcPts val="342"/>
               </a:spcAft>
             </a:pPr>
             <a:r>
-              <a:rPr sz="1900" i="0" b="0">
+              <a:rPr sz="1600" i="0" b="0">
                 <a:solidFill>
                   <a:srgbClr val="858585"/>
                 </a:solidFill>
                 <a:latin typeface="Consolas"/>
               </a:rPr>
               <a:t>13</a:t>
+            </a:r>
+          </a:p>
+          <a:p>
+            <a:pPr algn="r">
+              <a:spcAft>
+                <a:spcPts val="342"/>
+              </a:spcAft>
+            </a:pPr>
+            <a:r>
+              <a:rPr sz="1600" i="0" b="0">
+                <a:solidFill>
+                  <a:srgbClr val="858585"/>
+                </a:solidFill>
+                <a:latin typeface="Consolas"/>
+              </a:rPr>
+              <a:t>14</a:t>
+            </a:r>
+          </a:p>
+          <a:p>
+            <a:pPr algn="r">
+              <a:spcAft>
+                <a:spcPts val="342"/>
+              </a:spcAft>
+            </a:pPr>
+            <a:r>
+              <a:rPr sz="1600" i="0" b="0">
+                <a:solidFill>
+                  <a:srgbClr val="858585"/>
+                </a:solidFill>
+                <a:latin typeface="Consolas"/>
+              </a:rPr>
+              <a:t>15</a:t>
             </a:r>
           </a:p>
         </p:txBody>
@@ -10324,7 +11125,7 @@
         <p:spPr>
           <a:xfrm>
             <a:off x="1188720" y="1719072"/>
-            <a:ext cx="10271455" cy="4469303"/>
+            <a:ext cx="10271455" cy="4436983"/>
           </a:xfrm>
           <a:prstGeom prst="rect">
             <a:avLst/>
@@ -10339,27 +11140,27 @@
           <a:p>
             <a:pPr>
               <a:spcAft>
-                <a:spcPts val="407"/>
+                <a:spcPts val="342"/>
               </a:spcAft>
             </a:pPr>
             <a:r>
-              <a:rPr sz="1900" i="1" b="0">
+              <a:rPr sz="1600" i="1" b="0">
                 <a:solidFill>
                   <a:srgbClr val="6A9955"/>
                 </a:solidFill>
                 <a:latin typeface="Consolas"/>
               </a:rPr>
-              <a:t>-- ANTES: la subconsulta se ejecuta UNA VEZ POR DUENO</a:t>
+              <a:t>-- ANTES: la subconsulta se ejecuta UNA VEZ POR DUENO (loops=2006)</a:t>
             </a:r>
           </a:p>
           <a:p>
             <a:pPr>
               <a:spcAft>
-                <a:spcPts val="407"/>
+                <a:spcPts val="342"/>
               </a:spcAft>
             </a:pPr>
             <a:r>
-              <a:rPr sz="1900" i="0" b="0">
+              <a:rPr sz="1600" i="0" b="0">
                 <a:solidFill>
                   <a:srgbClr val="569CD6"/>
                 </a:solidFill>
@@ -10368,7 +11169,7 @@
               <a:t>SELECT</a:t>
             </a:r>
             <a:r>
-              <a:rPr sz="1900" i="0" b="0">
+              <a:rPr sz="1600" i="0" b="0">
                 <a:solidFill>
                   <a:srgbClr val="D4D4D4"/>
                 </a:solidFill>
@@ -10377,7 +11178,7 @@
               <a:t> </a:t>
             </a:r>
             <a:r>
-              <a:rPr sz="1900" i="0" b="0">
+              <a:rPr sz="1600" i="0" b="0">
                 <a:solidFill>
                   <a:srgbClr val="D4D4D4"/>
                 </a:solidFill>
@@ -10386,7 +11187,7 @@
               <a:t>d</a:t>
             </a:r>
             <a:r>
-              <a:rPr sz="1900" i="0" b="0">
+              <a:rPr sz="1600" i="0" b="0">
                 <a:solidFill>
                   <a:srgbClr val="D4D4D4"/>
                 </a:solidFill>
@@ -10395,7 +11196,7 @@
               <a:t>.</a:t>
             </a:r>
             <a:r>
-              <a:rPr sz="1900" i="0" b="0">
+              <a:rPr sz="1600" i="0" b="0">
                 <a:solidFill>
                   <a:srgbClr val="D4D4D4"/>
                 </a:solidFill>
@@ -10404,7 +11205,7 @@
               <a:t>nombre</a:t>
             </a:r>
             <a:r>
-              <a:rPr sz="1900" i="0" b="0">
+              <a:rPr sz="1600" i="0" b="0">
                 <a:solidFill>
                   <a:srgbClr val="D4D4D4"/>
                 </a:solidFill>
@@ -10416,11 +11217,11 @@
           <a:p>
             <a:pPr>
               <a:spcAft>
-                <a:spcPts val="407"/>
+                <a:spcPts val="342"/>
               </a:spcAft>
             </a:pPr>
             <a:r>
-              <a:rPr sz="1900" i="0" b="0">
+              <a:rPr sz="1600" i="0" b="0">
                 <a:solidFill>
                   <a:srgbClr val="D4D4D4"/>
                 </a:solidFill>
@@ -10429,7 +11230,7 @@
               <a:t>       (</a:t>
             </a:r>
             <a:r>
-              <a:rPr sz="1900" i="0" b="0">
+              <a:rPr sz="1600" i="0" b="0">
                 <a:solidFill>
                   <a:srgbClr val="569CD6"/>
                 </a:solidFill>
@@ -10438,7 +11239,7 @@
               <a:t>SELECT</a:t>
             </a:r>
             <a:r>
-              <a:rPr sz="1900" i="0" b="0">
+              <a:rPr sz="1600" i="0" b="0">
                 <a:solidFill>
                   <a:srgbClr val="D4D4D4"/>
                 </a:solidFill>
@@ -10447,7 +11248,7 @@
               <a:t> </a:t>
             </a:r>
             <a:r>
-              <a:rPr sz="1900" i="0" b="0">
+              <a:rPr sz="1600" i="0" b="0">
                 <a:solidFill>
                   <a:srgbClr val="DCDCAA"/>
                 </a:solidFill>
@@ -10456,7 +11257,7 @@
               <a:t>COUNT</a:t>
             </a:r>
             <a:r>
-              <a:rPr sz="1900" i="0" b="0">
+              <a:rPr sz="1600" i="0" b="0">
                 <a:solidFill>
                   <a:srgbClr val="D4D4D4"/>
                 </a:solidFill>
@@ -10465,7 +11266,7 @@
               <a:t>(*) </a:t>
             </a:r>
             <a:r>
-              <a:rPr sz="1900" i="0" b="0">
+              <a:rPr sz="1600" i="0" b="0">
                 <a:solidFill>
                   <a:srgbClr val="569CD6"/>
                 </a:solidFill>
@@ -10474,7 +11275,7 @@
               <a:t>FROM</a:t>
             </a:r>
             <a:r>
-              <a:rPr sz="1900" i="0" b="0">
+              <a:rPr sz="1600" i="0" b="0">
                 <a:solidFill>
                   <a:srgbClr val="D4D4D4"/>
                 </a:solidFill>
@@ -10483,7 +11284,7 @@
               <a:t> </a:t>
             </a:r>
             <a:r>
-              <a:rPr sz="1900" i="0" b="0">
+              <a:rPr sz="1600" i="0" b="0">
                 <a:solidFill>
                   <a:srgbClr val="D4D4D4"/>
                 </a:solidFill>
@@ -10492,7 +11293,7 @@
               <a:t>mascota</a:t>
             </a:r>
             <a:r>
-              <a:rPr sz="1900" i="0" b="0">
+              <a:rPr sz="1600" i="0" b="0">
                 <a:solidFill>
                   <a:srgbClr val="D4D4D4"/>
                 </a:solidFill>
@@ -10501,7 +11302,7 @@
               <a:t> </a:t>
             </a:r>
             <a:r>
-              <a:rPr sz="1900" i="0" b="0">
+              <a:rPr sz="1600" i="0" b="0">
                 <a:solidFill>
                   <a:srgbClr val="D4D4D4"/>
                 </a:solidFill>
@@ -10510,7 +11311,7 @@
               <a:t>m</a:t>
             </a:r>
             <a:r>
-              <a:rPr sz="1900" i="0" b="0">
+              <a:rPr sz="1600" i="0" b="0">
                 <a:solidFill>
                   <a:srgbClr val="D4D4D4"/>
                 </a:solidFill>
@@ -10519,7 +11320,7 @@
               <a:t> </a:t>
             </a:r>
             <a:r>
-              <a:rPr sz="1900" i="0" b="0">
+              <a:rPr sz="1600" i="0" b="0">
                 <a:solidFill>
                   <a:srgbClr val="569CD6"/>
                 </a:solidFill>
@@ -10528,7 +11329,7 @@
               <a:t>WHERE</a:t>
             </a:r>
             <a:r>
-              <a:rPr sz="1900" i="0" b="0">
+              <a:rPr sz="1600" i="0" b="0">
                 <a:solidFill>
                   <a:srgbClr val="D4D4D4"/>
                 </a:solidFill>
@@ -10537,7 +11338,7 @@
               <a:t> </a:t>
             </a:r>
             <a:r>
-              <a:rPr sz="1900" i="0" b="0">
+              <a:rPr sz="1600" i="0" b="0">
                 <a:solidFill>
                   <a:srgbClr val="D4D4D4"/>
                 </a:solidFill>
@@ -10546,7 +11347,7 @@
               <a:t>m</a:t>
             </a:r>
             <a:r>
-              <a:rPr sz="1900" i="0" b="0">
+              <a:rPr sz="1600" i="0" b="0">
                 <a:solidFill>
                   <a:srgbClr val="D4D4D4"/>
                 </a:solidFill>
@@ -10555,7 +11356,7 @@
               <a:t>.</a:t>
             </a:r>
             <a:r>
-              <a:rPr sz="1900" i="0" b="0">
+              <a:rPr sz="1600" i="0" b="0">
                 <a:solidFill>
                   <a:srgbClr val="D4D4D4"/>
                 </a:solidFill>
@@ -10564,7 +11365,7 @@
               <a:t>id_dueno</a:t>
             </a:r>
             <a:r>
-              <a:rPr sz="1900" i="0" b="0">
+              <a:rPr sz="1600" i="0" b="0">
                 <a:solidFill>
                   <a:srgbClr val="D4D4D4"/>
                 </a:solidFill>
@@ -10573,7 +11374,7 @@
               <a:t> = </a:t>
             </a:r>
             <a:r>
-              <a:rPr sz="1900" i="0" b="0">
+              <a:rPr sz="1600" i="0" b="0">
                 <a:solidFill>
                   <a:srgbClr val="D4D4D4"/>
                 </a:solidFill>
@@ -10582,7 +11383,7 @@
               <a:t>d</a:t>
             </a:r>
             <a:r>
-              <a:rPr sz="1900" i="0" b="0">
+              <a:rPr sz="1600" i="0" b="0">
                 <a:solidFill>
                   <a:srgbClr val="D4D4D4"/>
                 </a:solidFill>
@@ -10591,7 +11392,7 @@
               <a:t>.</a:t>
             </a:r>
             <a:r>
-              <a:rPr sz="1900" i="0" b="0">
+              <a:rPr sz="1600" i="0" b="0">
                 <a:solidFill>
                   <a:srgbClr val="D4D4D4"/>
                 </a:solidFill>
@@ -10600,7 +11401,7 @@
               <a:t>id_dueno</a:t>
             </a:r>
             <a:r>
-              <a:rPr sz="1900" i="0" b="0">
+              <a:rPr sz="1600" i="0" b="0">
                 <a:solidFill>
                   <a:srgbClr val="D4D4D4"/>
                 </a:solidFill>
@@ -10609,7 +11410,7 @@
               <a:t>) </a:t>
             </a:r>
             <a:r>
-              <a:rPr sz="1900" i="0" b="0">
+              <a:rPr sz="1600" i="0" b="0">
                 <a:solidFill>
                   <a:srgbClr val="569CD6"/>
                 </a:solidFill>
@@ -10618,7 +11419,7 @@
               <a:t>AS</a:t>
             </a:r>
             <a:r>
-              <a:rPr sz="1900" i="0" b="0">
+              <a:rPr sz="1600" i="0" b="0">
                 <a:solidFill>
                   <a:srgbClr val="D4D4D4"/>
                 </a:solidFill>
@@ -10627,7 +11428,7 @@
               <a:t> </a:t>
             </a:r>
             <a:r>
-              <a:rPr sz="1900" i="0" b="0">
+              <a:rPr sz="1600" i="0" b="0">
                 <a:solidFill>
                   <a:srgbClr val="D4D4D4"/>
                 </a:solidFill>
@@ -10639,11 +11440,11 @@
           <a:p>
             <a:pPr>
               <a:spcAft>
-                <a:spcPts val="407"/>
+                <a:spcPts val="342"/>
               </a:spcAft>
             </a:pPr>
             <a:r>
-              <a:rPr sz="1900" i="0" b="0">
+              <a:rPr sz="1600" i="0" b="0">
                 <a:solidFill>
                   <a:srgbClr val="569CD6"/>
                 </a:solidFill>
@@ -10652,7 +11453,7 @@
               <a:t>FROM</a:t>
             </a:r>
             <a:r>
-              <a:rPr sz="1900" i="0" b="0">
+              <a:rPr sz="1600" i="0" b="0">
                 <a:solidFill>
                   <a:srgbClr val="D4D4D4"/>
                 </a:solidFill>
@@ -10661,7 +11462,7 @@
               <a:t> </a:t>
             </a:r>
             <a:r>
-              <a:rPr sz="1900" i="0" b="0">
+              <a:rPr sz="1600" i="0" b="0">
                 <a:solidFill>
                   <a:srgbClr val="D4D4D4"/>
                 </a:solidFill>
@@ -10670,7 +11471,7 @@
               <a:t>dueno</a:t>
             </a:r>
             <a:r>
-              <a:rPr sz="1900" i="0" b="0">
+              <a:rPr sz="1600" i="0" b="0">
                 <a:solidFill>
                   <a:srgbClr val="D4D4D4"/>
                 </a:solidFill>
@@ -10679,215 +11480,143 @@
               <a:t> </a:t>
             </a:r>
             <a:r>
-              <a:rPr sz="1900" i="0" b="0">
+              <a:rPr sz="1600" i="0" b="0">
                 <a:solidFill>
                   <a:srgbClr val="D4D4D4"/>
                 </a:solidFill>
                 <a:latin typeface="Consolas"/>
               </a:rPr>
               <a:t>d</a:t>
-            </a:r>
-            <a:r>
-              <a:rPr sz="1900" i="0" b="0">
-                <a:solidFill>
-                  <a:srgbClr val="D4D4D4"/>
-                </a:solidFill>
-                <a:latin typeface="Consolas"/>
-              </a:rPr>
-              <a:t>;</a:t>
             </a:r>
           </a:p>
           <a:p>
             <a:pPr>
               <a:spcAft>
-                <a:spcPts val="407"/>
+                <a:spcPts val="342"/>
               </a:spcAft>
             </a:pPr>
             <a:r>
-              <a:rPr sz="1900" i="0" b="0">
-                <a:solidFill>
-                  <a:srgbClr val="D4D4D4"/>
-                </a:solidFill>
-                <a:latin typeface="Consolas"/>
-              </a:rPr>
-              <a:t/>
+              <a:rPr sz="1600" i="0" b="0">
+                <a:solidFill>
+                  <a:srgbClr val="569CD6"/>
+                </a:solidFill>
+                <a:latin typeface="Consolas"/>
+              </a:rPr>
+              <a:t>ORDER</a:t>
+            </a:r>
+            <a:r>
+              <a:rPr sz="1600" i="0" b="0">
+                <a:solidFill>
+                  <a:srgbClr val="D4D4D4"/>
+                </a:solidFill>
+                <a:latin typeface="Consolas"/>
+              </a:rPr>
+              <a:t> </a:t>
+            </a:r>
+            <a:r>
+              <a:rPr sz="1600" i="0" b="0">
+                <a:solidFill>
+                  <a:srgbClr val="569CD6"/>
+                </a:solidFill>
+                <a:latin typeface="Consolas"/>
+              </a:rPr>
+              <a:t>BY</a:t>
+            </a:r>
+            <a:r>
+              <a:rPr sz="1600" i="0" b="0">
+                <a:solidFill>
+                  <a:srgbClr val="D4D4D4"/>
+                </a:solidFill>
+                <a:latin typeface="Consolas"/>
+              </a:rPr>
+              <a:t> </a:t>
+            </a:r>
+            <a:r>
+              <a:rPr sz="1600" i="0" b="0">
+                <a:solidFill>
+                  <a:srgbClr val="D4D4D4"/>
+                </a:solidFill>
+                <a:latin typeface="Consolas"/>
+              </a:rPr>
+              <a:t>n</a:t>
+            </a:r>
+            <a:r>
+              <a:rPr sz="1600" i="0" b="0">
+                <a:solidFill>
+                  <a:srgbClr val="D4D4D4"/>
+                </a:solidFill>
+                <a:latin typeface="Consolas"/>
+              </a:rPr>
+              <a:t> </a:t>
+            </a:r>
+            <a:r>
+              <a:rPr sz="1600" i="0" b="0">
+                <a:solidFill>
+                  <a:srgbClr val="569CD6"/>
+                </a:solidFill>
+                <a:latin typeface="Consolas"/>
+              </a:rPr>
+              <a:t>DESC</a:t>
+            </a:r>
+            <a:r>
+              <a:rPr sz="1600" i="0" b="0">
+                <a:solidFill>
+                  <a:srgbClr val="D4D4D4"/>
+                </a:solidFill>
+                <a:latin typeface="Consolas"/>
+              </a:rPr>
+              <a:t>;</a:t>
             </a:r>
           </a:p>
           <a:p>
             <a:pPr>
               <a:spcAft>
-                <a:spcPts val="407"/>
+                <a:spcPts val="342"/>
               </a:spcAft>
             </a:pPr>
             <a:r>
-              <a:rPr sz="1900" i="1" b="0">
-                <a:solidFill>
-                  <a:srgbClr val="6A9955"/>
-                </a:solidFill>
-                <a:latin typeface="Consolas"/>
-              </a:rPr>
-              <a:t>-- DESPUES: una sola pasada, agrupando</a:t>
+              <a:rPr sz="1600" i="0" b="0">
+                <a:solidFill>
+                  <a:srgbClr val="D4D4D4"/>
+                </a:solidFill>
+                <a:latin typeface="Consolas"/>
+              </a:rPr>
+              <a:t/>
             </a:r>
           </a:p>
           <a:p>
             <a:pPr>
               <a:spcAft>
-                <a:spcPts val="407"/>
+                <a:spcPts val="342"/>
               </a:spcAft>
             </a:pPr>
             <a:r>
-              <a:rPr sz="1900" i="0" b="0">
-                <a:solidFill>
-                  <a:srgbClr val="569CD6"/>
-                </a:solidFill>
-                <a:latin typeface="Consolas"/>
-              </a:rPr>
-              <a:t>SELECT</a:t>
-            </a:r>
-            <a:r>
-              <a:rPr sz="1900" i="0" b="0">
-                <a:solidFill>
-                  <a:srgbClr val="D4D4D4"/>
-                </a:solidFill>
-                <a:latin typeface="Consolas"/>
-              </a:rPr>
-              <a:t> </a:t>
-            </a:r>
-            <a:r>
-              <a:rPr sz="1900" i="0" b="0">
-                <a:solidFill>
-                  <a:srgbClr val="D4D4D4"/>
-                </a:solidFill>
-                <a:latin typeface="Consolas"/>
-              </a:rPr>
-              <a:t>d</a:t>
-            </a:r>
-            <a:r>
-              <a:rPr sz="1900" i="0" b="0">
-                <a:solidFill>
-                  <a:srgbClr val="D4D4D4"/>
-                </a:solidFill>
-                <a:latin typeface="Consolas"/>
-              </a:rPr>
-              <a:t>.</a:t>
-            </a:r>
-            <a:r>
-              <a:rPr sz="1900" i="0" b="0">
-                <a:solidFill>
-                  <a:srgbClr val="D4D4D4"/>
-                </a:solidFill>
-                <a:latin typeface="Consolas"/>
-              </a:rPr>
-              <a:t>nombre</a:t>
-            </a:r>
-            <a:r>
-              <a:rPr sz="1900" i="0" b="0">
-                <a:solidFill>
-                  <a:srgbClr val="D4D4D4"/>
-                </a:solidFill>
-                <a:latin typeface="Consolas"/>
-              </a:rPr>
-              <a:t>, </a:t>
-            </a:r>
-            <a:r>
-              <a:rPr sz="1900" i="0" b="0">
-                <a:solidFill>
-                  <a:srgbClr val="DCDCAA"/>
-                </a:solidFill>
-                <a:latin typeface="Consolas"/>
-              </a:rPr>
-              <a:t>COUNT</a:t>
-            </a:r>
-            <a:r>
-              <a:rPr sz="1900" i="0" b="0">
-                <a:solidFill>
-                  <a:srgbClr val="D4D4D4"/>
-                </a:solidFill>
-                <a:latin typeface="Consolas"/>
-              </a:rPr>
-              <a:t>(</a:t>
-            </a:r>
-            <a:r>
-              <a:rPr sz="1900" i="0" b="0">
-                <a:solidFill>
-                  <a:srgbClr val="D4D4D4"/>
-                </a:solidFill>
-                <a:latin typeface="Consolas"/>
-              </a:rPr>
-              <a:t>m</a:t>
-            </a:r>
-            <a:r>
-              <a:rPr sz="1900" i="0" b="0">
-                <a:solidFill>
-                  <a:srgbClr val="D4D4D4"/>
-                </a:solidFill>
-                <a:latin typeface="Consolas"/>
-              </a:rPr>
-              <a:t>.</a:t>
-            </a:r>
-            <a:r>
-              <a:rPr sz="1900" i="0" b="0">
-                <a:solidFill>
-                  <a:srgbClr val="D4D4D4"/>
-                </a:solidFill>
-                <a:latin typeface="Consolas"/>
-              </a:rPr>
-              <a:t>id_mascota</a:t>
-            </a:r>
-            <a:r>
-              <a:rPr sz="1900" i="0" b="0">
-                <a:solidFill>
-                  <a:srgbClr val="D4D4D4"/>
-                </a:solidFill>
-                <a:latin typeface="Consolas"/>
-              </a:rPr>
-              <a:t>) </a:t>
-            </a:r>
-            <a:r>
-              <a:rPr sz="1900" i="0" b="0">
-                <a:solidFill>
-                  <a:srgbClr val="569CD6"/>
-                </a:solidFill>
-                <a:latin typeface="Consolas"/>
-              </a:rPr>
-              <a:t>AS</a:t>
-            </a:r>
-            <a:r>
-              <a:rPr sz="1900" i="0" b="0">
-                <a:solidFill>
-                  <a:srgbClr val="D4D4D4"/>
-                </a:solidFill>
-                <a:latin typeface="Consolas"/>
-              </a:rPr>
-              <a:t> </a:t>
-            </a:r>
-            <a:r>
-              <a:rPr sz="1900" i="0" b="0">
-                <a:solidFill>
-                  <a:srgbClr val="D4D4D4"/>
-                </a:solidFill>
-                <a:latin typeface="Consolas"/>
-              </a:rPr>
-              <a:t>n</a:t>
+              <a:rPr sz="1600" i="1" b="0">
+                <a:solidFill>
+                  <a:srgbClr val="6A9955"/>
+                </a:solidFill>
+                <a:latin typeface="Consolas"/>
+              </a:rPr>
+              <a:t>-- DESPUES: una sola pasada, agrupando</a:t>
             </a:r>
           </a:p>
           <a:p>
             <a:pPr>
               <a:spcAft>
-                <a:spcPts val="407"/>
+                <a:spcPts val="342"/>
               </a:spcAft>
             </a:pPr>
             <a:r>
-              <a:rPr sz="1900" i="0" b="0">
+              <a:rPr sz="1600" i="0" b="0">
                 <a:solidFill>
                   <a:srgbClr val="569CD6"/>
                 </a:solidFill>
                 <a:latin typeface="Consolas"/>
               </a:rPr>
-              <a:t>FROM</a:t>
-            </a:r>
-            <a:r>
-              <a:rPr sz="1900" i="0" b="0">
+              <a:t>SELECT</a:t>
+            </a:r>
+            <a:r>
+              <a:rPr sz="1600" i="0" b="0">
                 <a:solidFill>
                   <a:srgbClr val="D4D4D4"/>
                 </a:solidFill>
@@ -10896,16 +11625,106 @@
               <a:t> </a:t>
             </a:r>
             <a:r>
-              <a:rPr sz="1900" i="0" b="0">
-                <a:solidFill>
-                  <a:srgbClr val="D4D4D4"/>
-                </a:solidFill>
-                <a:latin typeface="Consolas"/>
-              </a:rPr>
-              <a:t>dueno</a:t>
-            </a:r>
-            <a:r>
-              <a:rPr sz="1900" i="0" b="0">
+              <a:rPr sz="1600" i="0" b="0">
+                <a:solidFill>
+                  <a:srgbClr val="D4D4D4"/>
+                </a:solidFill>
+                <a:latin typeface="Consolas"/>
+              </a:rPr>
+              <a:t>d</a:t>
+            </a:r>
+            <a:r>
+              <a:rPr sz="1600" i="0" b="0">
+                <a:solidFill>
+                  <a:srgbClr val="D4D4D4"/>
+                </a:solidFill>
+                <a:latin typeface="Consolas"/>
+              </a:rPr>
+              <a:t>.</a:t>
+            </a:r>
+            <a:r>
+              <a:rPr sz="1600" i="0" b="0">
+                <a:solidFill>
+                  <a:srgbClr val="D4D4D4"/>
+                </a:solidFill>
+                <a:latin typeface="Consolas"/>
+              </a:rPr>
+              <a:t>nombre</a:t>
+            </a:r>
+            <a:r>
+              <a:rPr sz="1600" i="0" b="0">
+                <a:solidFill>
+                  <a:srgbClr val="D4D4D4"/>
+                </a:solidFill>
+                <a:latin typeface="Consolas"/>
+              </a:rPr>
+              <a:t>, </a:t>
+            </a:r>
+            <a:r>
+              <a:rPr sz="1600" i="0" b="0">
+                <a:solidFill>
+                  <a:srgbClr val="DCDCAA"/>
+                </a:solidFill>
+                <a:latin typeface="Consolas"/>
+              </a:rPr>
+              <a:t>COUNT</a:t>
+            </a:r>
+            <a:r>
+              <a:rPr sz="1600" i="0" b="0">
+                <a:solidFill>
+                  <a:srgbClr val="D4D4D4"/>
+                </a:solidFill>
+                <a:latin typeface="Consolas"/>
+              </a:rPr>
+              <a:t>(</a:t>
+            </a:r>
+            <a:r>
+              <a:rPr sz="1600" i="0" b="0">
+                <a:solidFill>
+                  <a:srgbClr val="D4D4D4"/>
+                </a:solidFill>
+                <a:latin typeface="Consolas"/>
+              </a:rPr>
+              <a:t>m</a:t>
+            </a:r>
+            <a:r>
+              <a:rPr sz="1600" i="0" b="0">
+                <a:solidFill>
+                  <a:srgbClr val="D4D4D4"/>
+                </a:solidFill>
+                <a:latin typeface="Consolas"/>
+              </a:rPr>
+              <a:t>.</a:t>
+            </a:r>
+            <a:r>
+              <a:rPr sz="1600" i="0" b="0">
+                <a:solidFill>
+                  <a:srgbClr val="D4D4D4"/>
+                </a:solidFill>
+                <a:latin typeface="Consolas"/>
+              </a:rPr>
+              <a:t>id_mascota</a:t>
+            </a:r>
+            <a:r>
+              <a:rPr sz="1600" i="0" b="0">
+                <a:solidFill>
+                  <a:srgbClr val="D4D4D4"/>
+                </a:solidFill>
+                <a:latin typeface="Consolas"/>
+              </a:rPr>
+              <a:t>) </a:t>
+            </a:r>
+            <a:r>
+              <a:rPr sz="1600" i="0" b="0">
+                <a:solidFill>
+                  <a:srgbClr val="569CD6"/>
+                </a:solidFill>
+                <a:latin typeface="Consolas"/>
+              </a:rPr>
+              <a:t>AS</a:t>
+            </a:r>
+            <a:r>
+              <a:rPr sz="1600" i="0" b="0">
                 <a:solidFill>
                   <a:srgbClr val="D4D4D4"/>
                 </a:solidFill>
@@ -10914,32 +11733,32 @@
               <a:t> </a:t>
             </a:r>
             <a:r>
-              <a:rPr sz="1900" i="0" b="0">
-                <a:solidFill>
-                  <a:srgbClr val="D4D4D4"/>
-                </a:solidFill>
-                <a:latin typeface="Consolas"/>
-              </a:rPr>
-              <a:t>d</a:t>
+              <a:rPr sz="1600" i="0" b="0">
+                <a:solidFill>
+                  <a:srgbClr val="D4D4D4"/>
+                </a:solidFill>
+                <a:latin typeface="Consolas"/>
+              </a:rPr>
+              <a:t>n</a:t>
             </a:r>
           </a:p>
           <a:p>
             <a:pPr>
               <a:spcAft>
-                <a:spcPts val="407"/>
+                <a:spcPts val="342"/>
               </a:spcAft>
             </a:pPr>
             <a:r>
-              <a:rPr sz="1900" i="0" b="0">
+              <a:rPr sz="1600" i="0" b="0">
                 <a:solidFill>
                   <a:srgbClr val="569CD6"/>
                 </a:solidFill>
                 <a:latin typeface="Consolas"/>
               </a:rPr>
-              <a:t>LEFT</a:t>
-            </a:r>
-            <a:r>
-              <a:rPr sz="1900" i="0" b="0">
+              <a:t>FROM</a:t>
+            </a:r>
+            <a:r>
+              <a:rPr sz="1600" i="0" b="0">
                 <a:solidFill>
                   <a:srgbClr val="D4D4D4"/>
                 </a:solidFill>
@@ -10948,16 +11767,16 @@
               <a:t> </a:t>
             </a:r>
             <a:r>
-              <a:rPr sz="1900" i="0" b="0">
-                <a:solidFill>
-                  <a:srgbClr val="569CD6"/>
-                </a:solidFill>
-                <a:latin typeface="Consolas"/>
-              </a:rPr>
-              <a:t>JOIN</a:t>
-            </a:r>
-            <a:r>
-              <a:rPr sz="1900" i="0" b="0">
+              <a:rPr sz="1600" i="0" b="0">
+                <a:solidFill>
+                  <a:srgbClr val="D4D4D4"/>
+                </a:solidFill>
+                <a:latin typeface="Consolas"/>
+              </a:rPr>
+              <a:t>dueno</a:t>
+            </a:r>
+            <a:r>
+              <a:rPr sz="1600" i="0" b="0">
                 <a:solidFill>
                   <a:srgbClr val="D4D4D4"/>
                 </a:solidFill>
@@ -10966,140 +11785,32 @@
               <a:t> </a:t>
             </a:r>
             <a:r>
-              <a:rPr sz="1900" i="0" b="0">
-                <a:solidFill>
-                  <a:srgbClr val="D4D4D4"/>
-                </a:solidFill>
-                <a:latin typeface="Consolas"/>
-              </a:rPr>
-              <a:t>mascota</a:t>
-            </a:r>
-            <a:r>
-              <a:rPr sz="1900" i="0" b="0">
-                <a:solidFill>
-                  <a:srgbClr val="D4D4D4"/>
-                </a:solidFill>
-                <a:latin typeface="Consolas"/>
-              </a:rPr>
-              <a:t> </a:t>
-            </a:r>
-            <a:r>
-              <a:rPr sz="1900" i="0" b="0">
-                <a:solidFill>
-                  <a:srgbClr val="D4D4D4"/>
-                </a:solidFill>
-                <a:latin typeface="Consolas"/>
-              </a:rPr>
-              <a:t>m</a:t>
-            </a:r>
-            <a:r>
-              <a:rPr sz="1900" i="0" b="0">
-                <a:solidFill>
-                  <a:srgbClr val="D4D4D4"/>
-                </a:solidFill>
-                <a:latin typeface="Consolas"/>
-              </a:rPr>
-              <a:t> </a:t>
-            </a:r>
-            <a:r>
-              <a:rPr sz="1900" i="0" b="0">
-                <a:solidFill>
-                  <a:srgbClr val="569CD6"/>
-                </a:solidFill>
-                <a:latin typeface="Consolas"/>
-              </a:rPr>
-              <a:t>ON</a:t>
-            </a:r>
-            <a:r>
-              <a:rPr sz="1900" i="0" b="0">
-                <a:solidFill>
-                  <a:srgbClr val="D4D4D4"/>
-                </a:solidFill>
-                <a:latin typeface="Consolas"/>
-              </a:rPr>
-              <a:t> </a:t>
-            </a:r>
-            <a:r>
-              <a:rPr sz="1900" i="0" b="0">
-                <a:solidFill>
-                  <a:srgbClr val="D4D4D4"/>
-                </a:solidFill>
-                <a:latin typeface="Consolas"/>
-              </a:rPr>
-              <a:t>m</a:t>
-            </a:r>
-            <a:r>
-              <a:rPr sz="1900" i="0" b="0">
-                <a:solidFill>
-                  <a:srgbClr val="D4D4D4"/>
-                </a:solidFill>
-                <a:latin typeface="Consolas"/>
-              </a:rPr>
-              <a:t>.</a:t>
-            </a:r>
-            <a:r>
-              <a:rPr sz="1900" i="0" b="0">
-                <a:solidFill>
-                  <a:srgbClr val="D4D4D4"/>
-                </a:solidFill>
-                <a:latin typeface="Consolas"/>
-              </a:rPr>
-              <a:t>id_dueno</a:t>
-            </a:r>
-            <a:r>
-              <a:rPr sz="1900" i="0" b="0">
-                <a:solidFill>
-                  <a:srgbClr val="D4D4D4"/>
-                </a:solidFill>
-                <a:latin typeface="Consolas"/>
-              </a:rPr>
-              <a:t> = </a:t>
-            </a:r>
-            <a:r>
-              <a:rPr sz="1900" i="0" b="0">
+              <a:rPr sz="1600" i="0" b="0">
                 <a:solidFill>
                   <a:srgbClr val="D4D4D4"/>
                 </a:solidFill>
                 <a:latin typeface="Consolas"/>
               </a:rPr>
               <a:t>d</a:t>
-            </a:r>
-            <a:r>
-              <a:rPr sz="1900" i="0" b="0">
-                <a:solidFill>
-                  <a:srgbClr val="D4D4D4"/>
-                </a:solidFill>
-                <a:latin typeface="Consolas"/>
-              </a:rPr>
-              <a:t>.</a:t>
-            </a:r>
-            <a:r>
-              <a:rPr sz="1900" i="0" b="0">
-                <a:solidFill>
-                  <a:srgbClr val="D4D4D4"/>
-                </a:solidFill>
-                <a:latin typeface="Consolas"/>
-              </a:rPr>
-              <a:t>id_dueno</a:t>
             </a:r>
           </a:p>
           <a:p>
             <a:pPr>
               <a:spcAft>
-                <a:spcPts val="407"/>
+                <a:spcPts val="342"/>
               </a:spcAft>
             </a:pPr>
             <a:r>
-              <a:rPr sz="1900" i="0" b="0">
+              <a:rPr sz="1600" i="0" b="0">
                 <a:solidFill>
                   <a:srgbClr val="569CD6"/>
                 </a:solidFill>
                 <a:latin typeface="Consolas"/>
               </a:rPr>
-              <a:t>GROUP</a:t>
-            </a:r>
-            <a:r>
-              <a:rPr sz="1900" i="0" b="0">
+              <a:t>LEFT</a:t>
+            </a:r>
+            <a:r>
+              <a:rPr sz="1600" i="0" b="0">
                 <a:solidFill>
                   <a:srgbClr val="D4D4D4"/>
                 </a:solidFill>
@@ -11108,16 +11819,16 @@
               <a:t> </a:t>
             </a:r>
             <a:r>
-              <a:rPr sz="1900" i="0" b="0">
+              <a:rPr sz="1600" i="0" b="0">
                 <a:solidFill>
                   <a:srgbClr val="569CD6"/>
                 </a:solidFill>
                 <a:latin typeface="Consolas"/>
               </a:rPr>
-              <a:t>BY</a:t>
-            </a:r>
-            <a:r>
-              <a:rPr sz="1900" i="0" b="0">
+              <a:t>JOIN</a:t>
+            </a:r>
+            <a:r>
+              <a:rPr sz="1600" i="0" b="0">
                 <a:solidFill>
                   <a:srgbClr val="D4D4D4"/>
                 </a:solidFill>
@@ -11126,7 +11837,97 @@
               <a:t> </a:t>
             </a:r>
             <a:r>
-              <a:rPr sz="1900" i="0" b="0">
+              <a:rPr sz="1600" i="0" b="0">
+                <a:solidFill>
+                  <a:srgbClr val="D4D4D4"/>
+                </a:solidFill>
+                <a:latin typeface="Consolas"/>
+              </a:rPr>
+              <a:t>mascota</a:t>
+            </a:r>
+            <a:r>
+              <a:rPr sz="1600" i="0" b="0">
+                <a:solidFill>
+                  <a:srgbClr val="D4D4D4"/>
+                </a:solidFill>
+                <a:latin typeface="Consolas"/>
+              </a:rPr>
+              <a:t> </a:t>
+            </a:r>
+            <a:r>
+              <a:rPr sz="1600" i="0" b="0">
+                <a:solidFill>
+                  <a:srgbClr val="D4D4D4"/>
+                </a:solidFill>
+                <a:latin typeface="Consolas"/>
+              </a:rPr>
+              <a:t>m</a:t>
+            </a:r>
+            <a:r>
+              <a:rPr sz="1600" i="0" b="0">
+                <a:solidFill>
+                  <a:srgbClr val="D4D4D4"/>
+                </a:solidFill>
+                <a:latin typeface="Consolas"/>
+              </a:rPr>
+              <a:t> </a:t>
+            </a:r>
+            <a:r>
+              <a:rPr sz="1600" i="0" b="0">
+                <a:solidFill>
+                  <a:srgbClr val="569CD6"/>
+                </a:solidFill>
+                <a:latin typeface="Consolas"/>
+              </a:rPr>
+              <a:t>ON</a:t>
+            </a:r>
+            <a:r>
+              <a:rPr sz="1600" i="0" b="0">
+                <a:solidFill>
+                  <a:srgbClr val="D4D4D4"/>
+                </a:solidFill>
+                <a:latin typeface="Consolas"/>
+              </a:rPr>
+              <a:t> </a:t>
+            </a:r>
+            <a:r>
+              <a:rPr sz="1600" i="0" b="0">
+                <a:solidFill>
+                  <a:srgbClr val="D4D4D4"/>
+                </a:solidFill>
+                <a:latin typeface="Consolas"/>
+              </a:rPr>
+              <a:t>m</a:t>
+            </a:r>
+            <a:r>
+              <a:rPr sz="1600" i="0" b="0">
+                <a:solidFill>
+                  <a:srgbClr val="D4D4D4"/>
+                </a:solidFill>
+                <a:latin typeface="Consolas"/>
+              </a:rPr>
+              <a:t>.</a:t>
+            </a:r>
+            <a:r>
+              <a:rPr sz="1600" i="0" b="0">
+                <a:solidFill>
+                  <a:srgbClr val="D4D4D4"/>
+                </a:solidFill>
+                <a:latin typeface="Consolas"/>
+              </a:rPr>
+              <a:t>id_dueno</a:t>
+            </a:r>
+            <a:r>
+              <a:rPr sz="1600" i="0" b="0">
+                <a:solidFill>
+                  <a:srgbClr val="D4D4D4"/>
+                </a:solidFill>
+                <a:latin typeface="Consolas"/>
+              </a:rPr>
+              <a:t> = </a:t>
+            </a:r>
+            <a:r>
+              <a:rPr sz="1600" i="0" b="0">
                 <a:solidFill>
                   <a:srgbClr val="D4D4D4"/>
                 </a:solidFill>
@@ -11135,7 +11936,7 @@
               <a:t>d</a:t>
             </a:r>
             <a:r>
-              <a:rPr sz="1900" i="0" b="0">
+              <a:rPr sz="1600" i="0" b="0">
                 <a:solidFill>
                   <a:srgbClr val="D4D4D4"/>
                 </a:solidFill>
@@ -11144,68 +11945,32 @@
               <a:t>.</a:t>
             </a:r>
             <a:r>
-              <a:rPr sz="1900" i="0" b="0">
+              <a:rPr sz="1600" i="0" b="0">
                 <a:solidFill>
                   <a:srgbClr val="D4D4D4"/>
                 </a:solidFill>
                 <a:latin typeface="Consolas"/>
               </a:rPr>
               <a:t>id_dueno</a:t>
-            </a:r>
-            <a:r>
-              <a:rPr sz="1900" i="0" b="0">
-                <a:solidFill>
-                  <a:srgbClr val="D4D4D4"/>
-                </a:solidFill>
-                <a:latin typeface="Consolas"/>
-              </a:rPr>
-              <a:t>, </a:t>
-            </a:r>
-            <a:r>
-              <a:rPr sz="1900" i="0" b="0">
-                <a:solidFill>
-                  <a:srgbClr val="D4D4D4"/>
-                </a:solidFill>
-                <a:latin typeface="Consolas"/>
-              </a:rPr>
-              <a:t>d</a:t>
-            </a:r>
-            <a:r>
-              <a:rPr sz="1900" i="0" b="0">
-                <a:solidFill>
-                  <a:srgbClr val="D4D4D4"/>
-                </a:solidFill>
-                <a:latin typeface="Consolas"/>
-              </a:rPr>
-              <a:t>.</a:t>
-            </a:r>
-            <a:r>
-              <a:rPr sz="1900" i="0" b="0">
-                <a:solidFill>
-                  <a:srgbClr val="D4D4D4"/>
-                </a:solidFill>
-                <a:latin typeface="Consolas"/>
-              </a:rPr>
-              <a:t>nombre</a:t>
             </a:r>
           </a:p>
           <a:p>
             <a:pPr>
               <a:spcAft>
-                <a:spcPts val="407"/>
+                <a:spcPts val="342"/>
               </a:spcAft>
             </a:pPr>
             <a:r>
-              <a:rPr sz="1900" i="0" b="0">
+              <a:rPr sz="1600" i="0" b="0">
                 <a:solidFill>
                   <a:srgbClr val="569CD6"/>
                 </a:solidFill>
                 <a:latin typeface="Consolas"/>
               </a:rPr>
-              <a:t>ORDER</a:t>
-            </a:r>
-            <a:r>
-              <a:rPr sz="1900" i="0" b="0">
+              <a:t>GROUP</a:t>
+            </a:r>
+            <a:r>
+              <a:rPr sz="1600" i="0" b="0">
                 <a:solidFill>
                   <a:srgbClr val="D4D4D4"/>
                 </a:solidFill>
@@ -11214,7 +11979,7 @@
               <a:t> </a:t>
             </a:r>
             <a:r>
-              <a:rPr sz="1900" i="0" b="0">
+              <a:rPr sz="1600" i="0" b="0">
                 <a:solidFill>
                   <a:srgbClr val="569CD6"/>
                 </a:solidFill>
@@ -11223,7 +11988,7 @@
               <a:t>BY</a:t>
             </a:r>
             <a:r>
-              <a:rPr sz="1900" i="0" b="0">
+              <a:rPr sz="1600" i="0" b="0">
                 <a:solidFill>
                   <a:srgbClr val="D4D4D4"/>
                 </a:solidFill>
@@ -11232,72 +11997,194 @@
               <a:t> </a:t>
             </a:r>
             <a:r>
-              <a:rPr sz="1900" i="0" b="0">
-                <a:solidFill>
-                  <a:srgbClr val="D4D4D4"/>
-                </a:solidFill>
-                <a:latin typeface="Consolas"/>
-              </a:rPr>
-              <a:t>n</a:t>
-            </a:r>
-            <a:r>
-              <a:rPr sz="1900" i="0" b="0">
-                <a:solidFill>
-                  <a:srgbClr val="D4D4D4"/>
-                </a:solidFill>
-                <a:latin typeface="Consolas"/>
-              </a:rPr>
-              <a:t> </a:t>
-            </a:r>
-            <a:r>
-              <a:rPr sz="1900" i="0" b="0">
-                <a:solidFill>
-                  <a:srgbClr val="569CD6"/>
-                </a:solidFill>
-                <a:latin typeface="Consolas"/>
-              </a:rPr>
-              <a:t>DESC</a:t>
-            </a:r>
-            <a:r>
-              <a:rPr sz="1900" i="0" b="0">
-                <a:solidFill>
-                  <a:srgbClr val="D4D4D4"/>
-                </a:solidFill>
-                <a:latin typeface="Consolas"/>
-              </a:rPr>
-              <a:t>;</a:t>
+              <a:rPr sz="1600" i="0" b="0">
+                <a:solidFill>
+                  <a:srgbClr val="D4D4D4"/>
+                </a:solidFill>
+                <a:latin typeface="Consolas"/>
+              </a:rPr>
+              <a:t>d</a:t>
+            </a:r>
+            <a:r>
+              <a:rPr sz="1600" i="0" b="0">
+                <a:solidFill>
+                  <a:srgbClr val="D4D4D4"/>
+                </a:solidFill>
+                <a:latin typeface="Consolas"/>
+              </a:rPr>
+              <a:t>.</a:t>
+            </a:r>
+            <a:r>
+              <a:rPr sz="1600" i="0" b="0">
+                <a:solidFill>
+                  <a:srgbClr val="D4D4D4"/>
+                </a:solidFill>
+                <a:latin typeface="Consolas"/>
+              </a:rPr>
+              <a:t>id_dueno</a:t>
+            </a:r>
+            <a:r>
+              <a:rPr sz="1600" i="0" b="0">
+                <a:solidFill>
+                  <a:srgbClr val="D4D4D4"/>
+                </a:solidFill>
+                <a:latin typeface="Consolas"/>
+              </a:rPr>
+              <a:t>, </a:t>
+            </a:r>
+            <a:r>
+              <a:rPr sz="1600" i="0" b="0">
+                <a:solidFill>
+                  <a:srgbClr val="D4D4D4"/>
+                </a:solidFill>
+                <a:latin typeface="Consolas"/>
+              </a:rPr>
+              <a:t>d</a:t>
+            </a:r>
+            <a:r>
+              <a:rPr sz="1600" i="0" b="0">
+                <a:solidFill>
+                  <a:srgbClr val="D4D4D4"/>
+                </a:solidFill>
+                <a:latin typeface="Consolas"/>
+              </a:rPr>
+              <a:t>.</a:t>
+            </a:r>
+            <a:r>
+              <a:rPr sz="1600" i="0" b="0">
+                <a:solidFill>
+                  <a:srgbClr val="D4D4D4"/>
+                </a:solidFill>
+                <a:latin typeface="Consolas"/>
+              </a:rPr>
+              <a:t>nombre</a:t>
             </a:r>
           </a:p>
           <a:p>
             <a:pPr>
               <a:spcAft>
-                <a:spcPts val="407"/>
+                <a:spcPts val="342"/>
               </a:spcAft>
             </a:pPr>
             <a:r>
-              <a:rPr sz="1900" i="0" b="0">
-                <a:solidFill>
-                  <a:srgbClr val="D4D4D4"/>
-                </a:solidFill>
-                <a:latin typeface="Consolas"/>
-              </a:rPr>
-              <a:t/>
+              <a:rPr sz="1600" i="0" b="0">
+                <a:solidFill>
+                  <a:srgbClr val="569CD6"/>
+                </a:solidFill>
+                <a:latin typeface="Consolas"/>
+              </a:rPr>
+              <a:t>ORDER</a:t>
+            </a:r>
+            <a:r>
+              <a:rPr sz="1600" i="0" b="0">
+                <a:solidFill>
+                  <a:srgbClr val="D4D4D4"/>
+                </a:solidFill>
+                <a:latin typeface="Consolas"/>
+              </a:rPr>
+              <a:t> </a:t>
+            </a:r>
+            <a:r>
+              <a:rPr sz="1600" i="0" b="0">
+                <a:solidFill>
+                  <a:srgbClr val="569CD6"/>
+                </a:solidFill>
+                <a:latin typeface="Consolas"/>
+              </a:rPr>
+              <a:t>BY</a:t>
+            </a:r>
+            <a:r>
+              <a:rPr sz="1600" i="0" b="0">
+                <a:solidFill>
+                  <a:srgbClr val="D4D4D4"/>
+                </a:solidFill>
+                <a:latin typeface="Consolas"/>
+              </a:rPr>
+              <a:t> </a:t>
+            </a:r>
+            <a:r>
+              <a:rPr sz="1600" i="0" b="0">
+                <a:solidFill>
+                  <a:srgbClr val="D4D4D4"/>
+                </a:solidFill>
+                <a:latin typeface="Consolas"/>
+              </a:rPr>
+              <a:t>n</a:t>
+            </a:r>
+            <a:r>
+              <a:rPr sz="1600" i="0" b="0">
+                <a:solidFill>
+                  <a:srgbClr val="D4D4D4"/>
+                </a:solidFill>
+                <a:latin typeface="Consolas"/>
+              </a:rPr>
+              <a:t> </a:t>
+            </a:r>
+            <a:r>
+              <a:rPr sz="1600" i="0" b="0">
+                <a:solidFill>
+                  <a:srgbClr val="569CD6"/>
+                </a:solidFill>
+                <a:latin typeface="Consolas"/>
+              </a:rPr>
+              <a:t>DESC</a:t>
+            </a:r>
+            <a:r>
+              <a:rPr sz="1600" i="0" b="0">
+                <a:solidFill>
+                  <a:srgbClr val="D4D4D4"/>
+                </a:solidFill>
+                <a:latin typeface="Consolas"/>
+              </a:rPr>
+              <a:t>;</a:t>
             </a:r>
           </a:p>
           <a:p>
             <a:pPr>
               <a:spcAft>
-                <a:spcPts val="407"/>
+                <a:spcPts val="342"/>
               </a:spcAft>
             </a:pPr>
             <a:r>
-              <a:rPr sz="1900" i="1" b="0">
+              <a:rPr sz="1600" i="0" b="0">
+                <a:solidFill>
+                  <a:srgbClr val="D4D4D4"/>
+                </a:solidFill>
+                <a:latin typeface="Consolas"/>
+              </a:rPr>
+              <a:t/>
+            </a:r>
+          </a:p>
+          <a:p>
+            <a:pPr>
+              <a:spcAft>
+                <a:spcPts val="342"/>
+              </a:spcAft>
+            </a:pPr>
+            <a:r>
+              <a:rPr sz="1600" i="1" b="0">
                 <a:solidFill>
                   <a:srgbClr val="6A9955"/>
                 </a:solidFill>
                 <a:latin typeface="Consolas"/>
               </a:rPr>
               <a:t>-- LEFT JOIN, no JOIN: con JOIN desaparecen los duenos sin mascota.</a:t>
+            </a:r>
+          </a:p>
+          <a:p>
+            <a:pPr>
+              <a:spcAft>
+                <a:spcPts val="342"/>
+              </a:spcAft>
+            </a:pPr>
+            <a:r>
+              <a:rPr sz="1600" i="1" b="0">
+                <a:solidFill>
+                  <a:srgbClr val="6A9955"/>
+                </a:solidFill>
+                <a:latin typeface="Consolas"/>
+              </a:rPr>
+              <a:t>-- COUNT(m.id_mascota), no COUNT(*): el dueno sin mascotas da 0, no 1.</a:t>
             </a:r>
           </a:p>
         </p:txBody>
@@ -11519,14 +12406,83 @@
       </p:sp>
       <p:sp>
         <p:nvSpPr>
-          <p:cNvPr id="6" name="TextBox 5"/>
+          <p:cNvPr id="6" name="Rounded Rectangle 5"/>
+          <p:cNvSpPr/>
+          <p:nvPr/>
+        </p:nvSpPr>
+        <p:spPr>
+          <a:xfrm>
+            <a:off x="5797149" y="1449082"/>
+            <a:ext cx="6010497" cy="4837658"/>
+          </a:xfrm>
+          <a:prstGeom prst="roundRect">
+            <a:avLst>
+              <a:gd name="adj" fmla="val 4000"/>
+            </a:avLst>
+          </a:prstGeom>
+          <a:solidFill>
+            <a:srgbClr val="E8EEF4"/>
+          </a:solidFill>
+          <a:ln>
+            <a:noFill/>
+          </a:ln>
+        </p:spPr>
+        <p:style>
+          <a:lnRef idx="1">
+            <a:schemeClr val="accent1"/>
+          </a:lnRef>
+          <a:fillRef idx="3">
+            <a:schemeClr val="accent1"/>
+          </a:fillRef>
+          <a:effectRef idx="2">
+            <a:schemeClr val="accent1"/>
+          </a:effectRef>
+          <a:fontRef idx="minor">
+            <a:schemeClr val="lt1"/>
+          </a:fontRef>
+        </p:style>
+        <p:txBody>
+          <a:bodyPr rtlCol="0" anchor="ctr"/>
+          <a:lstStyle/>
+          <a:p>
+            <a:pPr algn="ctr"/>
+          </a:p>
+        </p:txBody>
+      </p:sp>
+      <p:pic>
+        <p:nvPicPr>
+          <p:cNvPr id="7" name="Picture 6" descr="ilus-loops-paso1.png"/>
+          <p:cNvPicPr>
+            <a:picLocks noChangeAspect="1"/>
+          </p:cNvPicPr>
+          <p:nvPr/>
+        </p:nvPicPr>
+        <p:blipFill>
+          <a:blip r:embed="rId2"/>
+          <a:stretch>
+            <a:fillRect/>
+          </a:stretch>
+        </p:blipFill>
+        <p:spPr>
+          <a:xfrm>
+            <a:off x="5870301" y="1522234"/>
+            <a:ext cx="5864193" cy="4691354"/>
+          </a:xfrm>
+          <a:prstGeom prst="rect">
+            <a:avLst/>
+          </a:prstGeom>
+        </p:spPr>
+      </p:pic>
+      <p:sp>
+        <p:nvSpPr>
+          <p:cNvPr id="8" name="TextBox 7"/>
           <p:cNvSpPr txBox="1"/>
           <p:nvPr/>
         </p:nvSpPr>
         <p:spPr>
           <a:xfrm>
-            <a:off x="457200" y="1380744"/>
-            <a:ext cx="11277295" cy="5020056"/>
+            <a:off x="457200" y="1563624"/>
+            <a:ext cx="5093061" cy="4837176"/>
           </a:xfrm>
           <a:prstGeom prst="rect">
             <a:avLst/>
@@ -11545,67 +12501,49 @@
               </a:spcAft>
             </a:pPr>
             <a:r>
-              <a:rPr sz="1800" b="0" i="0">
+              <a:rPr sz="2000" b="0" i="0">
                 <a:solidFill>
                   <a:srgbClr val="333333"/>
                 </a:solidFill>
                 <a:latin typeface="Calibri"/>
               </a:rPr>
-              <a:t>–   </a:t>
-            </a:r>
-            <a:r>
-              <a:rPr sz="1800" b="1" i="0">
+              <a:t>–   En el plan, la subconsulta es un nodo </a:t>
+            </a:r>
+            <a:r>
+              <a:rPr sz="2000" b="1" i="0">
                 <a:solidFill>
                   <a:srgbClr val="333333"/>
                 </a:solidFill>
                 <a:latin typeface="Calibri"/>
               </a:rPr>
-              <a:t>Que la hace correlacionada.</a:t>
-            </a:r>
-            <a:r>
-              <a:rPr sz="1800" b="0" i="0">
+              <a:t>SubPlan</a:t>
+            </a:r>
+            <a:r>
+              <a:rPr sz="2000" b="0" i="0">
                 <a:solidFill>
                   <a:srgbClr val="333333"/>
                 </a:solidFill>
                 <a:latin typeface="Calibri"/>
               </a:rPr>
-              <a:t> La subconsulta esta en la </a:t>
-            </a:r>
-            <a:r>
-              <a:rPr sz="1800" b="1" i="0">
+              <a:t> con </a:t>
+            </a:r>
+            <a:r>
+              <a:rPr sz="2000" b="1" i="0">
                 <a:solidFill>
                   <a:srgbClr val="333333"/>
                 </a:solidFill>
                 <a:latin typeface="Calibri"/>
               </a:rPr>
-              <a:t>lista de columnas</a:t>
-            </a:r>
-            <a:r>
-              <a:rPr sz="1800" b="0" i="0">
+              <a:t>loops=2006</a:t>
+            </a:r>
+            <a:r>
+              <a:rPr sz="2000" b="0" i="0">
                 <a:solidFill>
                   <a:srgbClr val="333333"/>
                 </a:solidFill>
                 <a:latin typeface="Calibri"/>
               </a:rPr>
-              <a:t> y menciona una columna del exterior («WHERE m.id_dueno = d.id_dueno»). No se puede calcular una vez y reusar: depende de la fila que se este mirando, asi que el motor </a:t>
-            </a:r>
-            <a:r>
-              <a:rPr sz="1800" b="1" i="0">
-                <a:solidFill>
-                  <a:srgbClr val="333333"/>
-                </a:solidFill>
-                <a:latin typeface="Calibri"/>
-              </a:rPr>
-              <a:t>la ejecuta una vez por fila</a:t>
-            </a:r>
-            <a:r>
-              <a:rPr sz="1800" b="0" i="0">
-                <a:solidFill>
-                  <a:srgbClr val="333333"/>
-                </a:solidFill>
-                <a:latin typeface="Calibri"/>
-              </a:rPr>
-              <a:t> del exterior.</a:t>
+              <a:t>.</a:t>
             </a:r>
           </a:p>
           <a:p>
@@ -11615,49 +12553,31 @@
               </a:spcAft>
             </a:pPr>
             <a:r>
-              <a:rPr sz="1800" b="0" i="0">
+              <a:rPr sz="2000" b="0" i="0">
                 <a:solidFill>
                   <a:srgbClr val="333333"/>
                 </a:solidFill>
                 <a:latin typeface="Calibri"/>
               </a:rPr>
-              <a:t>–   </a:t>
-            </a:r>
-            <a:r>
-              <a:rPr sz="1800" b="1" i="0">
+              <a:t>–   Su </a:t>
+            </a:r>
+            <a:r>
+              <a:rPr sz="2000" b="1" i="0">
                 <a:solidFill>
                   <a:srgbClr val="333333"/>
                 </a:solidFill>
                 <a:latin typeface="Calibri"/>
               </a:rPr>
-              <a:t>El numero que lo delata en el plan.</a:t>
-            </a:r>
-            <a:r>
-              <a:rPr sz="1800" b="0" i="0">
+              <a:t>actual time</a:t>
+            </a:r>
+            <a:r>
+              <a:rPr sz="2000" b="0" i="0">
                 <a:solidFill>
                   <a:srgbClr val="333333"/>
                 </a:solidFill>
                 <a:latin typeface="Calibri"/>
               </a:rPr>
-              <a:t> «EXPLAIN ANALYZE» muestra un nodo «SubPlan» con </a:t>
-            </a:r>
-            <a:r>
-              <a:rPr sz="1800" b="1" i="0">
-                <a:solidFill>
-                  <a:srgbClr val="333333"/>
-                </a:solidFill>
-                <a:latin typeface="Calibri"/>
-              </a:rPr>
-              <a:t>«loops=2006»</a:t>
-            </a:r>
-            <a:r>
-              <a:rPr sz="1800" b="0" i="0">
-                <a:solidFill>
-                  <a:srgbClr val="333333"/>
-                </a:solidFill>
-                <a:latin typeface="Calibri"/>
-              </a:rPr>
-              <a:t> — un dueno, una ejecucion. Y cada ejecucion recorre las 30.010 citas. «loops» es el campo que hay que buscar: es el unico lugar donde el plan dice «esto se repitio».</a:t>
+              <a:t> es por vuelta: 2,3 ms × 2.006 vueltas son unos 4,6 segundos.</a:t>
             </a:r>
           </a:p>
           <a:p>
@@ -11667,49 +12587,31 @@
               </a:spcAft>
             </a:pPr>
             <a:r>
-              <a:rPr sz="1800" b="0" i="0">
+              <a:rPr sz="2000" b="0" i="0">
                 <a:solidFill>
                   <a:srgbClr val="333333"/>
                 </a:solidFill>
                 <a:latin typeface="Calibri"/>
               </a:rPr>
-              <a:t>–   </a:t>
-            </a:r>
-            <a:r>
-              <a:rPr sz="1800" b="1" i="0">
+              <a:t>–   La reescritura deja un solo </a:t>
+            </a:r>
+            <a:r>
+              <a:rPr sz="2000" b="1" i="0">
                 <a:solidFill>
                   <a:srgbClr val="333333"/>
                 </a:solidFill>
                 <a:latin typeface="Calibri"/>
               </a:rPr>
-              <a:t>La reescritura.</a:t>
-            </a:r>
-            <a:r>
-              <a:rPr sz="1800" b="0" i="0">
+              <a:t>HashAggregate</a:t>
+            </a:r>
+            <a:r>
+              <a:rPr sz="2000" b="0" i="0">
                 <a:solidFill>
                   <a:srgbClr val="333333"/>
                 </a:solidFill>
                 <a:latin typeface="Calibri"/>
               </a:rPr>
-              <a:t> «dueno LEFT JOIN mascota LEFT JOIN cita» + «GROUP BY d.id_dueno, d.nombre» + «COUNT(...)». El «SubPlan» desaparece y en su lugar queda un solo «HashAggregate»: </a:t>
-            </a:r>
-            <a:r>
-              <a:rPr sz="1800" b="1" i="0">
-                <a:solidFill>
-                  <a:srgbClr val="333333"/>
-                </a:solidFill>
-                <a:latin typeface="Calibri"/>
-              </a:rPr>
-              <a:t>una pasada</a:t>
-            </a:r>
-            <a:r>
-              <a:rPr sz="1800" b="0" i="0">
-                <a:solidFill>
-                  <a:srgbClr val="333333"/>
-                </a:solidFill>
-                <a:latin typeface="Calibri"/>
-              </a:rPr>
-              <a:t>. Es la unica mejora del dia que es de ordenes de magnitud, y no necesita ningun indice — lo que se elimino no fue un escaneo, fueron 2.005 escaneos.</a:t>
+              <a:t> y todos los nodos con loops=1.</a:t>
             </a:r>
           </a:p>
           <a:p>
@@ -11719,144 +12621,38 @@
               </a:spcAft>
             </a:pPr>
             <a:r>
-              <a:rPr sz="1800" b="0" i="0">
+              <a:rPr sz="2000" b="0" i="0">
                 <a:solidFill>
                   <a:srgbClr val="333333"/>
                 </a:solidFill>
                 <a:latin typeface="Calibri"/>
               </a:rPr>
-              <a:t>–   </a:t>
-            </a:r>
-            <a:r>
-              <a:rPr sz="1800" b="1" i="0">
+              <a:t>–   Va </a:t>
+            </a:r>
+            <a:r>
+              <a:rPr sz="2000" b="1" i="0">
                 <a:solidFill>
                   <a:srgbClr val="333333"/>
                 </a:solidFill>
                 <a:latin typeface="Calibri"/>
               </a:rPr>
-              <a:t>«COUNT(c.id_cita)», nunca «COUNT(*)».</a:t>
-            </a:r>
-            <a:r>
-              <a:rPr sz="1800" b="0" i="0">
+              <a:t>LEFT JOIN</a:t>
+            </a:r>
+            <a:r>
+              <a:rPr sz="2000" b="0" i="0">
                 <a:solidFill>
                   <a:srgbClr val="333333"/>
                 </a:solidFill>
                 <a:latin typeface="Calibri"/>
               </a:rPr>
-              <a:t> El «LEFT JOIN» fabrica </a:t>
-            </a:r>
-            <a:r>
-              <a:rPr sz="1800" b="1" i="0">
-                <a:solidFill>
-                  <a:srgbClr val="333333"/>
-                </a:solidFill>
-                <a:latin typeface="Calibri"/>
-              </a:rPr>
-              <a:t>una fila llena de «NULL»</a:t>
-            </a:r>
-            <a:r>
-              <a:rPr sz="1800" b="0" i="0">
-                <a:solidFill>
-                  <a:srgbClr val="333333"/>
-                </a:solidFill>
-                <a:latin typeface="Calibri"/>
-              </a:rPr>
-              <a:t> por cada dueno sin citas. «COUNT(*)» cuenta filas y reporta </a:t>
-            </a:r>
-            <a:r>
-              <a:rPr sz="1800" b="1" i="0">
-                <a:solidFill>
-                  <a:srgbClr val="333333"/>
-                </a:solidFill>
-                <a:latin typeface="Calibri"/>
-              </a:rPr>
-              <a:t>1</a:t>
-            </a:r>
-            <a:r>
-              <a:rPr sz="1800" b="0" i="0">
-                <a:solidFill>
-                  <a:srgbClr val="333333"/>
-                </a:solidFill>
-                <a:latin typeface="Calibri"/>
-              </a:rPr>
-              <a:t>; «COUNT» de una columna ignora los «NULL» y reporta </a:t>
-            </a:r>
-            <a:r>
-              <a:rPr sz="1800" b="1" i="0">
-                <a:solidFill>
-                  <a:srgbClr val="333333"/>
-                </a:solidFill>
-                <a:latin typeface="Calibri"/>
-              </a:rPr>
-              <a:t>0</a:t>
-            </a:r>
-            <a:r>
-              <a:rPr sz="1800" b="0" i="0">
-                <a:solidFill>
-                  <a:srgbClr val="333333"/>
-                </a:solidFill>
-                <a:latin typeface="Calibri"/>
-              </a:rPr>
-              <a:t>. El sintoma es exacto: los duenos sin citas dicen 1 en vez de 0.</a:t>
-            </a:r>
-          </a:p>
-          <a:p>
-            <a:pPr>
-              <a:spcAft>
-                <a:spcPts val="800"/>
-              </a:spcAft>
-            </a:pPr>
-            <a:r>
-              <a:rPr sz="1800" b="0" i="0">
-                <a:solidFill>
-                  <a:srgbClr val="333333"/>
-                </a:solidFill>
-                <a:latin typeface="Calibri"/>
-              </a:rPr>
-              <a:t>–   </a:t>
-            </a:r>
-            <a:r>
-              <a:rPr sz="1800" b="1" i="0">
-                <a:solidFill>
-                  <a:srgbClr val="333333"/>
-                </a:solidFill>
-                <a:latin typeface="Calibri"/>
-              </a:rPr>
-              <a:t>Y «LEFT», no «INNER».</a:t>
-            </a:r>
-            <a:r>
-              <a:rPr sz="1800" b="0" i="0">
-                <a:solidFill>
-                  <a:srgbClr val="333333"/>
-                </a:solidFill>
-                <a:latin typeface="Calibri"/>
-              </a:rPr>
-              <a:t> Un «INNER JOIN» es mas rapido y esta </a:t>
-            </a:r>
-            <a:r>
-              <a:rPr sz="1800" b="1" i="0">
-                <a:solidFill>
-                  <a:srgbClr val="333333"/>
-                </a:solidFill>
-                <a:latin typeface="Calibri"/>
-              </a:rPr>
-              <a:t>mal</a:t>
-            </a:r>
-            <a:r>
-              <a:rPr sz="1800" b="0" i="0">
-                <a:solidFill>
-                  <a:srgbClr val="333333"/>
-                </a:solidFill>
-                <a:latin typeface="Calibri"/>
-              </a:rPr>
-              <a:t>: borra del reporte a los duenos sin mascotas, y el ranking deja de cuadrar con el total de clientes de la clinica. Mas rapido devolviendo otra cosa no es optimizar.</a:t>
-            </a:r>
-          </a:p>
-        </p:txBody>
-      </p:sp>
-      <p:sp>
-        <p:nvSpPr>
-          <p:cNvPr id="7" name="TextBox 6"/>
+              <a:t> para no perder a los dueños sin mascotas, y COUNT de la columna para que den 0.</a:t>
+            </a:r>
+          </a:p>
+        </p:txBody>
+      </p:sp>
+      <p:sp>
+        <p:nvSpPr>
+          <p:cNvPr id="9" name="TextBox 8"/>
           <p:cNvSpPr txBox="1"/>
           <p:nvPr/>
         </p:nvSpPr>
@@ -12221,7 +13017,25 @@
                 </a:solidFill>
                 <a:latin typeface="Calibri"/>
               </a:rPr>
-              <a:t>–   Correccion y tiempo son ejes independientes, y la consecuencia practica es que una version «optimizada» que devuelve algo distinto no es una…</a:t>
+              <a:t>–   Corrección y tiempo son </a:t>
+            </a:r>
+            <a:r>
+              <a:rPr sz="2000" b="1" i="0">
+                <a:solidFill>
+                  <a:srgbClr val="333333"/>
+                </a:solidFill>
+                <a:latin typeface="Calibri"/>
+              </a:rPr>
+              <a:t>independientes</a:t>
+            </a:r>
+            <a:r>
+              <a:rPr sz="2000" b="0" i="0">
+                <a:solidFill>
+                  <a:srgbClr val="333333"/>
+                </a:solidFill>
+                <a:latin typeface="Calibri"/>
+              </a:rPr>
+              <a:t>: más rápido devolviendo otra cosa no es optimizar.</a:t>
             </a:r>
           </a:p>
           <a:p>
@@ -12237,7 +13051,25 @@
                 </a:solidFill>
                 <a:latin typeface="Calibri"/>
               </a:rPr>
-              <a:t>–   Para una consulta con filtro sirve el conteo: se envuelve cada version en un SELECT COUNT(*) y se comparan los dos numeros en la misma corrida.</a:t>
+              <a:t>–   Ningún motor avisa de ese error: la consulta </a:t>
+            </a:r>
+            <a:r>
+              <a:rPr sz="2000" b="1" i="0">
+                <a:solidFill>
+                  <a:srgbClr val="333333"/>
+                </a:solidFill>
+                <a:latin typeface="Calibri"/>
+              </a:rPr>
+              <a:t>corre sin fallar</a:t>
+            </a:r>
+            <a:r>
+              <a:rPr sz="2000" b="0" i="0">
+                <a:solidFill>
+                  <a:srgbClr val="333333"/>
+                </a:solidFill>
+                <a:latin typeface="Calibri"/>
+              </a:rPr>
+              <a:t> y entrega otra respuesta.</a:t>
             </a:r>
           </a:p>
           <a:p>
@@ -12253,7 +13085,59 @@
                 </a:solidFill>
                 <a:latin typeface="Calibri"/>
               </a:rPr>
-              <a:t>–   Un conteo distinto no es una version mas rapida, es la respuesta equivocada.</a:t>
+              <a:t>–   Con un filtro se prueba con dos </a:t>
+            </a:r>
+            <a:r>
+              <a:rPr sz="2000" b="1" i="0">
+                <a:solidFill>
+                  <a:srgbClr val="333333"/>
+                </a:solidFill>
+                <a:latin typeface="Calibri"/>
+              </a:rPr>
+              <a:t>COUNT(*)</a:t>
+            </a:r>
+            <a:r>
+              <a:rPr sz="2000" b="0" i="0">
+                <a:solidFill>
+                  <a:srgbClr val="333333"/>
+                </a:solidFill>
+                <a:latin typeface="Calibri"/>
+              </a:rPr>
+              <a:t> en la misma corrida: 91 y 91.</a:t>
+            </a:r>
+          </a:p>
+          <a:p>
+            <a:pPr>
+              <a:spcAft>
+                <a:spcPts val="800"/>
+              </a:spcAft>
+            </a:pPr>
+            <a:r>
+              <a:rPr sz="2000" b="0" i="0">
+                <a:solidFill>
+                  <a:srgbClr val="333333"/>
+                </a:solidFill>
+                <a:latin typeface="Calibri"/>
+              </a:rPr>
+              <a:t>–   Si la versión nueva da 150, perdió un filtro: es la </a:t>
+            </a:r>
+            <a:r>
+              <a:rPr sz="2000" b="1" i="0">
+                <a:solidFill>
+                  <a:srgbClr val="333333"/>
+                </a:solidFill>
+                <a:latin typeface="Calibri"/>
+              </a:rPr>
+              <a:t>respuesta equivocada</a:t>
+            </a:r>
+            <a:r>
+              <a:rPr sz="2000" b="0" i="0">
+                <a:solidFill>
+                  <a:srgbClr val="333333"/>
+                </a:solidFill>
+                <a:latin typeface="Calibri"/>
+              </a:rPr>
+              <a:t>.</a:t>
             </a:r>
           </a:p>
         </p:txBody>
@@ -12611,14 +13495,83 @@
       </p:sp>
       <p:sp>
         <p:nvSpPr>
-          <p:cNvPr id="6" name="TextBox 5"/>
+          <p:cNvPr id="6" name="Rounded Rectangle 5"/>
+          <p:cNvSpPr/>
+          <p:nvPr/>
+        </p:nvSpPr>
+        <p:spPr>
+          <a:xfrm>
+            <a:off x="5797149" y="1449082"/>
+            <a:ext cx="6010497" cy="4837658"/>
+          </a:xfrm>
+          <a:prstGeom prst="roundRect">
+            <a:avLst>
+              <a:gd name="adj" fmla="val 4000"/>
+            </a:avLst>
+          </a:prstGeom>
+          <a:solidFill>
+            <a:srgbClr val="E8EEF4"/>
+          </a:solidFill>
+          <a:ln>
+            <a:noFill/>
+          </a:ln>
+        </p:spPr>
+        <p:style>
+          <a:lnRef idx="1">
+            <a:schemeClr val="accent1"/>
+          </a:lnRef>
+          <a:fillRef idx="3">
+            <a:schemeClr val="accent1"/>
+          </a:fillRef>
+          <a:effectRef idx="2">
+            <a:schemeClr val="accent1"/>
+          </a:effectRef>
+          <a:fontRef idx="minor">
+            <a:schemeClr val="lt1"/>
+          </a:fontRef>
+        </p:style>
+        <p:txBody>
+          <a:bodyPr rtlCol="0" anchor="ctr"/>
+          <a:lstStyle/>
+          <a:p>
+            <a:pPr algn="ctr"/>
+          </a:p>
+        </p:txBody>
+      </p:sp>
+      <p:pic>
+        <p:nvPicPr>
+          <p:cNvPr id="7" name="Picture 6" descr="ilus-prueba-equivalencia-paso1.png"/>
+          <p:cNvPicPr>
+            <a:picLocks noChangeAspect="1"/>
+          </p:cNvPicPr>
+          <p:nvPr/>
+        </p:nvPicPr>
+        <p:blipFill>
+          <a:blip r:embed="rId2"/>
+          <a:stretch>
+            <a:fillRect/>
+          </a:stretch>
+        </p:blipFill>
+        <p:spPr>
+          <a:xfrm>
+            <a:off x="5870301" y="1522234"/>
+            <a:ext cx="5864193" cy="4691354"/>
+          </a:xfrm>
+          <a:prstGeom prst="rect">
+            <a:avLst/>
+          </a:prstGeom>
+        </p:spPr>
+      </p:pic>
+      <p:sp>
+        <p:nvSpPr>
+          <p:cNvPr id="8" name="TextBox 7"/>
           <p:cNvSpPr txBox="1"/>
           <p:nvPr/>
         </p:nvSpPr>
         <p:spPr>
           <a:xfrm>
-            <a:off x="457200" y="1380744"/>
-            <a:ext cx="11277295" cy="5020056"/>
+            <a:off x="457200" y="1563624"/>
+            <a:ext cx="5093061" cy="4837176"/>
           </a:xfrm>
           <a:prstGeom prst="rect">
             <a:avLst/>
@@ -12643,7 +13596,7 @@
                 </a:solidFill>
                 <a:latin typeface="Calibri"/>
               </a:rPr>
-              <a:t>–   </a:t>
+              <a:t>–   Con un filtro bastan dos </a:t>
             </a:r>
             <a:r>
               <a:rPr sz="2000" b="1" i="0">
@@ -12652,7 +13605,7 @@
                 </a:solidFill>
                 <a:latin typeface="Calibri"/>
               </a:rPr>
-              <a:t>La regla.</a:t>
+              <a:t>COUNT(*)</a:t>
             </a:r>
             <a:r>
               <a:rPr sz="2000" b="0" i="0">
@@ -12661,43 +13614,7 @@
                 </a:solidFill>
                 <a:latin typeface="Calibri"/>
               </a:rPr>
-              <a:t> Correccion y tiempo son ejes </a:t>
-            </a:r>
-            <a:r>
-              <a:rPr sz="2000" b="1" i="0">
-                <a:solidFill>
-                  <a:srgbClr val="333333"/>
-                </a:solidFill>
-                <a:latin typeface="Calibri"/>
-              </a:rPr>
-              <a:t>independientes</a:t>
-            </a:r>
-            <a:r>
-              <a:rPr sz="2000" b="0" i="0">
-                <a:solidFill>
-                  <a:srgbClr val="333333"/>
-                </a:solidFill>
-                <a:latin typeface="Calibri"/>
-              </a:rPr>
-              <a:t>. Si la version DESPUES devuelve algo distinto, no se optimizo nada: se rompio la consulta, y se rompio </a:t>
-            </a:r>
-            <a:r>
-              <a:rPr sz="2000" b="1" i="0">
-                <a:solidFill>
-                  <a:srgbClr val="333333"/>
-                </a:solidFill>
-                <a:latin typeface="Calibri"/>
-              </a:rPr>
-              <a:t>sin avisar</a:t>
-            </a:r>
-            <a:r>
-              <a:rPr sz="2000" b="0" i="0">
-                <a:solidFill>
-                  <a:srgbClr val="333333"/>
-                </a:solidFill>
-                <a:latin typeface="Calibri"/>
-              </a:rPr>
-              <a:t>, porque ningun motor va a lanzar un error por eso.</a:t>
+              <a:t> en la misma corrida: los dos deben dar 91.</a:t>
             </a:r>
           </a:p>
           <a:p>
@@ -12713,7 +13630,7 @@
                 </a:solidFill>
                 <a:latin typeface="Calibri"/>
               </a:rPr>
-              <a:t>–   </a:t>
+              <a:t>–   Para un conjunto completo se usa </a:t>
             </a:r>
             <a:r>
               <a:rPr sz="2000" b="1" i="0">
@@ -12722,7 +13639,7 @@
                 </a:solidFill>
                 <a:latin typeface="Calibri"/>
               </a:rPr>
-              <a:t>Prueba 1, para una consulta con filtro: los dos «COUNT(*)».</a:t>
+              <a:t>EXCEPT</a:t>
             </a:r>
             <a:r>
               <a:rPr sz="2000" b="0" i="0">
@@ -12731,43 +13648,7 @@
                 </a:solidFill>
                 <a:latin typeface="Calibri"/>
               </a:rPr>
-              <a:t> Se envuelve cada version y se comparan los conteos en la </a:t>
-            </a:r>
-            <a:r>
-              <a:rPr sz="2000" b="1" i="0">
-                <a:solidFill>
-                  <a:srgbClr val="333333"/>
-                </a:solidFill>
-                <a:latin typeface="Calibri"/>
-              </a:rPr>
-              <a:t>misma corrida</a:t>
-            </a:r>
-            <a:r>
-              <a:rPr sz="2000" b="0" i="0">
-                <a:solidFill>
-                  <a:srgbClr val="333333"/>
-                </a:solidFill>
-                <a:latin typeface="Calibri"/>
-              </a:rPr>
-              <a:t>. En la agenda del 2026-03-10 las dos tienen que decir </a:t>
-            </a:r>
-            <a:r>
-              <a:rPr sz="2000" b="1" i="0">
-                <a:solidFill>
-                  <a:srgbClr val="333333"/>
-                </a:solidFill>
-                <a:latin typeface="Calibri"/>
-              </a:rPr>
-              <a:t>91</a:t>
-            </a:r>
-            <a:r>
-              <a:rPr sz="2000" b="0" i="0">
-                <a:solidFill>
-                  <a:srgbClr val="333333"/>
-                </a:solidFill>
-                <a:latin typeface="Calibri"/>
-              </a:rPr>
-              <a:t>. Un conteo distinto es la respuesta equivocada, no una version mas rapida.</a:t>
+              <a:t> en los dos sentidos y se exige cero filas.</a:t>
             </a:r>
           </a:p>
           <a:p>
@@ -12783,7 +13664,7 @@
                 </a:solidFill>
                 <a:latin typeface="Calibri"/>
               </a:rPr>
-              <a:t>–   </a:t>
+              <a:t>–   Un solo sentido no prueba nada: la otra versión puede traer </a:t>
             </a:r>
             <a:r>
               <a:rPr sz="2000" b="1" i="0">
@@ -12792,43 +13673,7 @@
                 </a:solidFill>
                 <a:latin typeface="Calibri"/>
               </a:rPr>
-              <a:t>Prueba 2, para conjuntos completos: «EXCEPT» en los DOS sentidos.</a:t>
-            </a:r>
-            <a:r>
-              <a:rPr sz="2000" b="0" i="0">
-                <a:solidFill>
-                  <a:srgbClr val="333333"/>
-                </a:solidFill>
-                <a:latin typeface="Calibri"/>
-              </a:rPr>
-              <a:t> «A EXCEPT B» devuelve lo que esta en A y no en B. Que salga vacio </a:t>
-            </a:r>
-            <a:r>
-              <a:rPr sz="2000" b="1" i="0">
-                <a:solidFill>
-                  <a:srgbClr val="333333"/>
-                </a:solidFill>
-                <a:latin typeface="Calibri"/>
-              </a:rPr>
-              <a:t>no</a:t>
-            </a:r>
-            <a:r>
-              <a:rPr sz="2000" b="0" i="0">
-                <a:solidFill>
-                  <a:srgbClr val="333333"/>
-                </a:solidFill>
-                <a:latin typeface="Calibri"/>
-              </a:rPr>
-              <a:t> prueba la igualdad: B puede tener filas de mas. Se corren las dos direcciones unidas con «UNION ALL» y se exige </a:t>
-            </a:r>
-            <a:r>
-              <a:rPr sz="2000" b="1" i="0">
-                <a:solidFill>
-                  <a:srgbClr val="333333"/>
-                </a:solidFill>
-                <a:latin typeface="Calibri"/>
-              </a:rPr>
-              <a:t>cero filas</a:t>
+              <a:t>filas de más</a:t>
             </a:r>
             <a:r>
               <a:rPr sz="2000" b="0" i="0">
@@ -12853,7 +13698,7 @@
                 </a:solidFill>
                 <a:latin typeface="Calibri"/>
               </a:rPr>
-              <a:t>–   </a:t>
+              <a:t>–   La prueba va </a:t>
             </a:r>
             <a:r>
               <a:rPr sz="2000" b="1" i="0">
@@ -12862,7 +13707,7 @@
                 </a:solidFill>
                 <a:latin typeface="Calibri"/>
               </a:rPr>
-              <a:t>Sin «LIMIT» en la prueba.</a:t>
+              <a:t>sin LIMIT</a:t>
             </a:r>
             <a:r>
               <a:rPr sz="2000" b="0" i="0">
@@ -12871,66 +13716,14 @@
                 </a:solidFill>
                 <a:latin typeface="Calibri"/>
               </a:rPr>
-              <a:t> Comparar solo las primeras 20 filas deja fuera justamente las que fallan — las de los duenos con cero citas, que es donde «COUNT(*)» miente.</a:t>
-            </a:r>
-          </a:p>
-          <a:p>
-            <a:pPr>
-              <a:spcAft>
-                <a:spcPts val="800"/>
-              </a:spcAft>
-            </a:pPr>
-            <a:r>
-              <a:rPr sz="2000" b="0" i="0">
-                <a:solidFill>
-                  <a:srgbClr val="333333"/>
-                </a:solidFill>
-                <a:latin typeface="Calibri"/>
-              </a:rPr>
-              <a:t>–   </a:t>
-            </a:r>
-            <a:r>
-              <a:rPr sz="2000" b="1" i="0">
-                <a:solidFill>
-                  <a:srgbClr val="333333"/>
-                </a:solidFill>
-                <a:latin typeface="Calibri"/>
-              </a:rPr>
-              <a:t>Que NO sirve como prueba.</a:t>
-            </a:r>
-            <a:r>
-              <a:rPr sz="2000" b="0" i="0">
-                <a:solidFill>
-                  <a:srgbClr val="333333"/>
-                </a:solidFill>
-                <a:latin typeface="Calibri"/>
-              </a:rPr>
-              <a:t> «Se ve igual», «trae mas o menos lo mismo» o mirar la primera pantalla de resultados. La equivalencia se afirma con una consulta cuyo resultado </a:t>
-            </a:r>
-            <a:r>
-              <a:rPr sz="2000" b="1" i="0">
-                <a:solidFill>
-                  <a:srgbClr val="333333"/>
-                </a:solidFill>
-                <a:latin typeface="Calibri"/>
-              </a:rPr>
-              <a:t>se conoce de antemano</a:t>
-            </a:r>
-            <a:r>
-              <a:rPr sz="2000" b="0" i="0">
-                <a:solidFill>
-                  <a:srgbClr val="333333"/>
-                </a:solidFill>
-                <a:latin typeface="Calibri"/>
-              </a:rPr>
-              <a:t>: un numero que coincide o un conjunto vacio.</a:t>
-            </a:r>
-          </a:p>
-        </p:txBody>
-      </p:sp>
-      <p:sp>
-        <p:nvSpPr>
-          <p:cNvPr id="7" name="TextBox 6"/>
+              <a:t>: las filas que fallan suelen quedar fuera de las primeras.</a:t>
+            </a:r>
+          </a:p>
+        </p:txBody>
+      </p:sp>
+      <p:sp>
+        <p:nvSpPr>
+          <p:cNvPr id="9" name="TextBox 8"/>
           <p:cNvSpPr txBox="1"/>
           <p:nvPr/>
         </p:nvSpPr>
@@ -13111,14 +13904,83 @@
       </p:sp>
       <p:sp>
         <p:nvSpPr>
-          <p:cNvPr id="5" name="TextBox 4"/>
+          <p:cNvPr id="5" name="Rounded Rectangle 4"/>
+          <p:cNvSpPr/>
+          <p:nvPr/>
+        </p:nvSpPr>
+        <p:spPr>
+          <a:xfrm>
+            <a:off x="5797149" y="1343926"/>
+            <a:ext cx="6010497" cy="4837658"/>
+          </a:xfrm>
+          <a:prstGeom prst="roundRect">
+            <a:avLst>
+              <a:gd name="adj" fmla="val 4000"/>
+            </a:avLst>
+          </a:prstGeom>
+          <a:solidFill>
+            <a:srgbClr val="E8EEF4"/>
+          </a:solidFill>
+          <a:ln>
+            <a:noFill/>
+          </a:ln>
+        </p:spPr>
+        <p:style>
+          <a:lnRef idx="1">
+            <a:schemeClr val="accent1"/>
+          </a:lnRef>
+          <a:fillRef idx="3">
+            <a:schemeClr val="accent1"/>
+          </a:fillRef>
+          <a:effectRef idx="2">
+            <a:schemeClr val="accent1"/>
+          </a:effectRef>
+          <a:fontRef idx="minor">
+            <a:schemeClr val="lt1"/>
+          </a:fontRef>
+        </p:style>
+        <p:txBody>
+          <a:bodyPr rtlCol="0" anchor="ctr"/>
+          <a:lstStyle/>
+          <a:p>
+            <a:pPr algn="ctr"/>
+          </a:p>
+        </p:txBody>
+      </p:sp>
+      <p:pic>
+        <p:nvPicPr>
+          <p:cNvPr id="6" name="Picture 5" descr="ilus-script-coma-paso1.png"/>
+          <p:cNvPicPr>
+            <a:picLocks noChangeAspect="1"/>
+          </p:cNvPicPr>
+          <p:nvPr/>
+        </p:nvPicPr>
+        <p:blipFill>
+          <a:blip r:embed="rId2"/>
+          <a:stretch>
+            <a:fillRect/>
+          </a:stretch>
+        </p:blipFill>
+        <p:spPr>
+          <a:xfrm>
+            <a:off x="5870301" y="1417078"/>
+            <a:ext cx="5864193" cy="4691354"/>
+          </a:xfrm>
+          <a:prstGeom prst="rect">
+            <a:avLst/>
+          </a:prstGeom>
+        </p:spPr>
+      </p:pic>
+      <p:sp>
+        <p:nvSpPr>
+          <p:cNvPr id="7" name="TextBox 6"/>
           <p:cNvSpPr txBox="1"/>
           <p:nvPr/>
         </p:nvSpPr>
         <p:spPr>
           <a:xfrm>
-            <a:off x="457200" y="1170432"/>
-            <a:ext cx="11277295" cy="5230368"/>
+            <a:off x="457200" y="1353312"/>
+            <a:ext cx="5093061" cy="5047488"/>
           </a:xfrm>
           <a:prstGeom prst="rect">
             <a:avLst/>
@@ -13143,7 +14005,25 @@
                 </a:solidFill>
                 <a:latin typeface="Calibri"/>
               </a:rPr>
-              <a:t>–   El script Codigo/06_opt_consultas.sql es autocontenido y siembra el mismo volumen que PostgreSQL en el navegador.</a:t>
+              <a:t>–   Antes de medir se proyectan los </a:t>
+            </a:r>
+            <a:r>
+              <a:rPr sz="2000" b="1" i="0">
+                <a:solidFill>
+                  <a:srgbClr val="333333"/>
+                </a:solidFill>
+                <a:latin typeface="Calibri"/>
+              </a:rPr>
+              <a:t>conteos de control</a:t>
+            </a:r>
+            <a:r>
+              <a:rPr sz="2000" b="0" i="0">
+                <a:solidFill>
+                  <a:srgbClr val="333333"/>
+                </a:solidFill>
+                <a:latin typeface="Calibri"/>
+              </a:rPr>
+              <a:t>: 30.010 citas y 91 programadas el 2026-03-10.</a:t>
             </a:r>
           </a:p>
           <a:p>
@@ -13159,7 +14039,25 @@
                 </a:solidFill>
                 <a:latin typeface="Calibri"/>
               </a:rPr>
-              <a:t>–   Empieza con dos conteos de control que conviene proyectar antes de tocar nada.</a:t>
+              <a:t>–   Con comas, una condición olvidada no da error: produce un </a:t>
+            </a:r>
+            <a:r>
+              <a:rPr sz="2000" b="1" i="0">
+                <a:solidFill>
+                  <a:srgbClr val="333333"/>
+                </a:solidFill>
+                <a:latin typeface="Calibri"/>
+              </a:rPr>
+              <a:t>producto cartesiano</a:t>
+            </a:r>
+            <a:r>
+              <a:rPr sz="2000" b="0" i="0">
+                <a:solidFill>
+                  <a:srgbClr val="333333"/>
+                </a:solidFill>
+                <a:latin typeface="Calibri"/>
+              </a:rPr>
+              <a:t>.</a:t>
             </a:r>
           </a:p>
           <a:p>
@@ -13175,14 +14073,66 @@
                 </a:solidFill>
                 <a:latin typeface="Calibri"/>
               </a:rPr>
-              <a:t>–   Y el cruce implicito con comas es peligroso por aritmetica, no por estilo: si alguien olvida una de las tres condiciones de union</a:t>
-            </a:r>
-          </a:p>
-        </p:txBody>
-      </p:sp>
-      <p:sp>
-        <p:nvSpPr>
-          <p:cNvPr id="6" name="TextBox 5"/>
+              <a:t>–   </a:t>
+            </a:r>
+            <a:r>
+              <a:rPr sz="2000" b="1" i="0">
+                <a:solidFill>
+                  <a:srgbClr val="333333"/>
+                </a:solidFill>
+                <a:latin typeface="Calibri"/>
+              </a:rPr>
+              <a:t>JOIN … ON</a:t>
+            </a:r>
+            <a:r>
+              <a:rPr sz="2000" b="0" i="0">
+                <a:solidFill>
+                  <a:srgbClr val="333333"/>
+                </a:solidFill>
+                <a:latin typeface="Calibri"/>
+              </a:rPr>
+              <a:t> no acelera nada, pero convierte un ON olvidado en un error de sintaxis.</a:t>
+            </a:r>
+          </a:p>
+          <a:p>
+            <a:pPr>
+              <a:spcAft>
+                <a:spcPts val="800"/>
+              </a:spcAft>
+            </a:pPr>
+            <a:r>
+              <a:rPr sz="2000" b="0" i="0">
+                <a:solidFill>
+                  <a:srgbClr val="333333"/>
+                </a:solidFill>
+                <a:latin typeface="Calibri"/>
+              </a:rPr>
+              <a:t>–   Con ORDER BY y sin índice, un </a:t>
+            </a:r>
+            <a:r>
+              <a:rPr sz="2000" b="1" i="0">
+                <a:solidFill>
+                  <a:srgbClr val="333333"/>
+                </a:solidFill>
+                <a:latin typeface="Calibri"/>
+              </a:rPr>
+              <a:t>LIMIT 50</a:t>
+            </a:r>
+            <a:r>
+              <a:rPr sz="2000" b="0" i="0">
+                <a:solidFill>
+                  <a:srgbClr val="333333"/>
+                </a:solidFill>
+                <a:latin typeface="Calibri"/>
+              </a:rPr>
+              <a:t> igual lee la tabla y ordena las 91.</a:t>
+            </a:r>
+          </a:p>
+        </p:txBody>
+      </p:sp>
+      <p:sp>
+        <p:nvSpPr>
+          <p:cNvPr id="8" name="TextBox 7"/>
           <p:cNvSpPr txBox="1"/>
           <p:nvPr/>
         </p:nvSpPr>
@@ -13726,14 +14676,83 @@
       </p:sp>
       <p:sp>
         <p:nvSpPr>
-          <p:cNvPr id="5" name="TextBox 4"/>
+          <p:cNvPr id="5" name="Rounded Rectangle 4"/>
+          <p:cNvSpPr/>
+          <p:nvPr/>
+        </p:nvSpPr>
+        <p:spPr>
+          <a:xfrm>
+            <a:off x="5797149" y="1343926"/>
+            <a:ext cx="6010497" cy="4837658"/>
+          </a:xfrm>
+          <a:prstGeom prst="roundRect">
+            <a:avLst>
+              <a:gd name="adj" fmla="val 4000"/>
+            </a:avLst>
+          </a:prstGeom>
+          <a:solidFill>
+            <a:srgbClr val="E8EEF4"/>
+          </a:solidFill>
+          <a:ln>
+            <a:noFill/>
+          </a:ln>
+        </p:spPr>
+        <p:style>
+          <a:lnRef idx="1">
+            <a:schemeClr val="accent1"/>
+          </a:lnRef>
+          <a:fillRef idx="3">
+            <a:schemeClr val="accent1"/>
+          </a:fillRef>
+          <a:effectRef idx="2">
+            <a:schemeClr val="accent1"/>
+          </a:effectRef>
+          <a:fontRef idx="minor">
+            <a:schemeClr val="lt1"/>
+          </a:fontRef>
+        </p:style>
+        <p:txBody>
+          <a:bodyPr rtlCol="0" anchor="ctr"/>
+          <a:lstStyle/>
+          <a:p>
+            <a:pPr algn="ctr"/>
+          </a:p>
+        </p:txBody>
+      </p:sp>
+      <p:pic>
+        <p:nvPicPr>
+          <p:cNvPr id="6" name="Picture 5" descr="ilus-donde-medir-paso1.png"/>
+          <p:cNvPicPr>
+            <a:picLocks noChangeAspect="1"/>
+          </p:cNvPicPr>
+          <p:nvPr/>
+        </p:nvPicPr>
+        <p:blipFill>
+          <a:blip r:embed="rId2"/>
+          <a:stretch>
+            <a:fillRect/>
+          </a:stretch>
+        </p:blipFill>
+        <p:spPr>
+          <a:xfrm>
+            <a:off x="5870301" y="1417078"/>
+            <a:ext cx="5864193" cy="4691354"/>
+          </a:xfrm>
+          <a:prstGeom prst="rect">
+            <a:avLst/>
+          </a:prstGeom>
+        </p:spPr>
+      </p:pic>
+      <p:sp>
+        <p:nvSpPr>
+          <p:cNvPr id="7" name="TextBox 6"/>
           <p:cNvSpPr txBox="1"/>
           <p:nvPr/>
         </p:nvSpPr>
         <p:spPr>
           <a:xfrm>
-            <a:off x="457200" y="1170432"/>
-            <a:ext cx="11277295" cy="5230368"/>
+            <a:off x="457200" y="1353312"/>
+            <a:ext cx="5093061" cy="5047488"/>
           </a:xfrm>
           <a:prstGeom prst="rect">
             <a:avLst/>
@@ -13758,7 +14777,25 @@
                 </a:solidFill>
                 <a:latin typeface="Calibri"/>
               </a:rPr>
-              <a:t>–   La herramienta del dia es PostgreSQL compilado para el navegador.</a:t>
+              <a:t>–   Todo lo de hoy corre en </a:t>
+            </a:r>
+            <a:r>
+              <a:rPr sz="2000" b="1" i="0">
+                <a:solidFill>
+                  <a:srgbClr val="333333"/>
+                </a:solidFill>
+                <a:latin typeface="Calibri"/>
+              </a:rPr>
+              <a:t>PostgreSQL dentro del navegador</a:t>
+            </a:r>
+            <a:r>
+              <a:rPr sz="2000" b="0" i="0">
+                <a:solidFill>
+                  <a:srgbClr val="333333"/>
+                </a:solidFill>
+                <a:latin typeface="Calibri"/>
+              </a:rPr>
+              <a:t>, con las 30.010 citas sembradas.</a:t>
             </a:r>
           </a:p>
           <a:p>
@@ -13774,7 +14811,25 @@
                 </a:solidFill>
                 <a:latin typeface="Calibri"/>
               </a:rPr>
-              <a:t>–   La justificacion de media pagina y la matriz de cambios se escriben en Google Docs.</a:t>
+              <a:t>–   Ahí se miden planes, filas estimadas y reales, </a:t>
+            </a:r>
+            <a:r>
+              <a:rPr sz="2000" b="1" i="0">
+                <a:solidFill>
+                  <a:srgbClr val="333333"/>
+                </a:solidFill>
+                <a:latin typeface="Calibri"/>
+              </a:rPr>
+              <a:t>páginas leídas</a:t>
+            </a:r>
+            <a:r>
+              <a:rPr sz="2000" b="0" i="0">
+                <a:solidFill>
+                  <a:srgbClr val="333333"/>
+                </a:solidFill>
+                <a:latin typeface="Calibri"/>
+              </a:rPr>
+              <a:t> y loops.</a:t>
             </a:r>
           </a:p>
           <a:p>
@@ -13790,7 +14845,25 @@
                 </a:solidFill>
                 <a:latin typeface="Calibri"/>
               </a:rPr>
-              <a:t>–   Hoy no se ofrece ningun playground externo como alterno, y conviene que lo digas asi de claro.</a:t>
+              <a:t>–   No se miden la memoria vacía, </a:t>
+            </a:r>
+            <a:r>
+              <a:rPr sz="2000" b="1" i="0">
+                <a:solidFill>
+                  <a:srgbClr val="333333"/>
+                </a:solidFill>
+                <a:latin typeface="Calibri"/>
+              </a:rPr>
+              <a:t>varias sesiones</a:t>
+            </a:r>
+            <a:r>
+              <a:rPr sz="2000" b="0" i="0">
+                <a:solidFill>
+                  <a:srgbClr val="333333"/>
+                </a:solidFill>
+                <a:latin typeface="Calibri"/>
+              </a:rPr>
+              <a:t> a la vez ni volúmenes mucho mayores.</a:t>
             </a:r>
           </a:p>
           <a:p>
@@ -13806,14 +14879,32 @@
                 </a:solidFill>
                 <a:latin typeface="Calibri"/>
               </a:rPr>
-              <a:t>–   Tampoco tiene sentido hoy un comparador de motores, porque el motor de hoy es uno solo.</a:t>
-            </a:r>
-          </a:p>
-        </p:txBody>
-      </p:sp>
-      <p:sp>
-        <p:nvSpPr>
-          <p:cNvPr id="6" name="TextBox 5"/>
+              <a:t>–   Los </a:t>
+            </a:r>
+            <a:r>
+              <a:rPr sz="2000" b="1" i="0">
+                <a:solidFill>
+                  <a:srgbClr val="333333"/>
+                </a:solidFill>
+                <a:latin typeface="Calibri"/>
+              </a:rPr>
+              <a:t>conteos</a:t>
+            </a:r>
+            <a:r>
+              <a:rPr sz="2000" b="0" i="0">
+                <a:solidFill>
+                  <a:srgbClr val="333333"/>
+                </a:solidFill>
+                <a:latin typeface="Calibri"/>
+              </a:rPr>
+              <a:t> no cambian entre corridas; los milisegundos sí.</a:t>
+            </a:r>
+          </a:p>
+        </p:txBody>
+      </p:sp>
+      <p:sp>
+        <p:nvSpPr>
+          <p:cNvPr id="8" name="TextBox 7"/>
           <p:cNvSpPr txBox="1"/>
           <p:nvPr/>
         </p:nvSpPr>
@@ -13994,14 +15085,83 @@
       </p:sp>
       <p:sp>
         <p:nvSpPr>
-          <p:cNvPr id="5" name="TextBox 4"/>
+          <p:cNvPr id="5" name="Rounded Rectangle 4"/>
+          <p:cNvSpPr/>
+          <p:nvPr/>
+        </p:nvSpPr>
+        <p:spPr>
+          <a:xfrm>
+            <a:off x="5797149" y="1343926"/>
+            <a:ext cx="6010497" cy="4837658"/>
+          </a:xfrm>
+          <a:prstGeom prst="roundRect">
+            <a:avLst>
+              <a:gd name="adj" fmla="val 4000"/>
+            </a:avLst>
+          </a:prstGeom>
+          <a:solidFill>
+            <a:srgbClr val="E8EEF4"/>
+          </a:solidFill>
+          <a:ln>
+            <a:noFill/>
+          </a:ln>
+        </p:spPr>
+        <p:style>
+          <a:lnRef idx="1">
+            <a:schemeClr val="accent1"/>
+          </a:lnRef>
+          <a:fillRef idx="3">
+            <a:schemeClr val="accent1"/>
+          </a:fillRef>
+          <a:effectRef idx="2">
+            <a:schemeClr val="accent1"/>
+          </a:effectRef>
+          <a:fontRef idx="minor">
+            <a:schemeClr val="lt1"/>
+          </a:fontRef>
+        </p:style>
+        <p:txBody>
+          <a:bodyPr rtlCol="0" anchor="ctr"/>
+          <a:lstStyle/>
+          <a:p>
+            <a:pPr algn="ctr"/>
+          </a:p>
+        </p:txBody>
+      </p:sp>
+      <p:pic>
+        <p:nvPicPr>
+          <p:cNvPr id="6" name="Picture 5" descr="ilus-demo-paso1.png"/>
+          <p:cNvPicPr>
+            <a:picLocks noChangeAspect="1"/>
+          </p:cNvPicPr>
+          <p:nvPr/>
+        </p:nvPicPr>
+        <p:blipFill>
+          <a:blip r:embed="rId2"/>
+          <a:stretch>
+            <a:fillRect/>
+          </a:stretch>
+        </p:blipFill>
+        <p:spPr>
+          <a:xfrm>
+            <a:off x="5870301" y="1417078"/>
+            <a:ext cx="5864193" cy="4691354"/>
+          </a:xfrm>
+          <a:prstGeom prst="rect">
+            <a:avLst/>
+          </a:prstGeom>
+        </p:spPr>
+      </p:pic>
+      <p:sp>
+        <p:nvSpPr>
+          <p:cNvPr id="7" name="TextBox 6"/>
           <p:cNvSpPr txBox="1"/>
           <p:nvPr/>
         </p:nvSpPr>
         <p:spPr>
           <a:xfrm>
-            <a:off x="457200" y="1170432"/>
-            <a:ext cx="11277295" cy="5230368"/>
+            <a:off x="457200" y="1353312"/>
+            <a:ext cx="5093061" cy="5047488"/>
           </a:xfrm>
           <a:prstGeom prst="rect">
             <a:avLst/>
@@ -14026,7 +15186,7 @@
                 </a:solidFill>
                 <a:latin typeface="Calibri"/>
               </a:rPr>
-              <a:t>–   </a:t>
+              <a:t>–   La agenda del día ANTES y DESPUÉS: las mismas </a:t>
             </a:r>
             <a:r>
               <a:rPr sz="2000" b="1" i="0">
@@ -14035,7 +15195,7 @@
                 </a:solidFill>
                 <a:latin typeface="Calibri"/>
               </a:rPr>
-              <a:t>Herramienta:</a:t>
+              <a:t>91 filas</a:t>
             </a:r>
             <a:r>
               <a:rPr sz="2000" b="0" i="0">
@@ -14044,7 +15204,7 @@
                 </a:solidFill>
                 <a:latin typeface="Calibri"/>
               </a:rPr>
-              <a:t> PostgreSQL + Google Docs</a:t>
+              <a:t>, con su plan.</a:t>
             </a:r>
           </a:p>
           <a:p>
@@ -14060,7 +15220,7 @@
                 </a:solidFill>
                 <a:latin typeface="Calibri"/>
               </a:rPr>
-              <a:t>–   </a:t>
+              <a:t>–   El ranking de dueños: de un SubPlan con </a:t>
             </a:r>
             <a:r>
               <a:rPr sz="2000" b="1" i="0">
@@ -14069,7 +15229,7 @@
                 </a:solidFill>
                 <a:latin typeface="Calibri"/>
               </a:rPr>
-              <a:t>Demo:</a:t>
+              <a:t>loops=2006</a:t>
             </a:r>
             <a:r>
               <a:rPr sz="2000" b="0" i="0">
@@ -14078,7 +15238,7 @@
                 </a:solidFill>
                 <a:latin typeface="Calibri"/>
               </a:rPr>
-              <a:t> Consulta pesada citas+mascotas+duenos -&gt; version filtrada y proyectada, con EXPLAIN ANALYZE antes y despues.</a:t>
+              <a:t> a una sola pasada.</a:t>
             </a:r>
           </a:p>
           <a:p>
@@ -14094,15 +15254,17 @@
                 </a:solidFill>
                 <a:latin typeface="Calibri"/>
               </a:rPr>
-              <a:t>–   Sigan el mismo dominio de la clínica (no inventen otro caso).</a:t>
-            </a:r>
-          </a:p>
-          <a:p>
-            <a:pPr>
-              <a:spcAft>
-                <a:spcPts val="800"/>
-              </a:spcAft>
-            </a:pPr>
+              <a:t>–   La </a:t>
+            </a:r>
+            <a:r>
+              <a:rPr sz="2000" b="1" i="0">
+                <a:solidFill>
+                  <a:srgbClr val="333333"/>
+                </a:solidFill>
+                <a:latin typeface="Calibri"/>
+              </a:rPr>
+              <a:t>prueba de equivalencia</a:t>
+            </a:r>
             <a:r>
               <a:rPr sz="2000" b="0" i="0">
                 <a:solidFill>
@@ -14110,66 +15272,14 @@
                 </a:solidFill>
                 <a:latin typeface="Calibri"/>
               </a:rPr>
-              <a:t>–   </a:t>
-            </a:r>
-            <a:r>
-              <a:rPr sz="2000" b="1" i="0">
-                <a:solidFill>
-                  <a:srgbClr val="333333"/>
-                </a:solidFill>
-                <a:latin typeface="Calibri"/>
-              </a:rPr>
-              <a:t>Qué observar:</a:t>
-            </a:r>
-            <a:r>
-              <a:rPr sz="2000" b="0" i="0">
-                <a:solidFill>
-                  <a:srgbClr val="333333"/>
-                </a:solidFill>
-                <a:latin typeface="Calibri"/>
-              </a:rPr>
-              <a:t> las dos versiones devuelven las mismas 91 filas, pero el plan de la primera muestra loops=2006 y el de la segunda una sola pasada.</a:t>
-            </a:r>
-          </a:p>
-          <a:p>
-            <a:pPr>
-              <a:spcAft>
-                <a:spcPts val="800"/>
-              </a:spcAft>
-            </a:pPr>
-            <a:r>
-              <a:rPr sz="2000" b="0" i="0">
-                <a:solidFill>
-                  <a:srgbClr val="333333"/>
-                </a:solidFill>
-                <a:latin typeface="Calibri"/>
-              </a:rPr>
-              <a:t>–   </a:t>
-            </a:r>
-            <a:r>
-              <a:rPr sz="2000" b="1" i="0">
-                <a:solidFill>
-                  <a:srgbClr val="333333"/>
-                </a:solidFill>
-                <a:latin typeface="Calibri"/>
-              </a:rPr>
-              <a:t>Qué observar:</a:t>
-            </a:r>
-            <a:r>
-              <a:rPr sz="2000" b="0" i="0">
-                <a:solidFill>
-                  <a:srgbClr val="333333"/>
-                </a:solidFill>
-                <a:latin typeface="Calibri"/>
-              </a:rPr>
-              <a:t> el nodo mas costoso, las filas estimadas contra las reales y el tiempo total, leidos en ese orden en cada plan.</a:t>
-            </a:r>
-          </a:p>
-        </p:txBody>
-      </p:sp>
-      <p:sp>
-        <p:nvSpPr>
-          <p:cNvPr id="6" name="TextBox 5"/>
+              <a:t>: 91 = 91, y EXCEPT en los dos sentidos con cero filas.</a:t>
+            </a:r>
+          </a:p>
+        </p:txBody>
+      </p:sp>
+      <p:sp>
+        <p:nvSpPr>
+          <p:cNvPr id="8" name="TextBox 7"/>
           <p:cNvSpPr txBox="1"/>
           <p:nvPr/>
         </p:nvSpPr>
@@ -15618,7 +16728,25 @@
                 </a:solidFill>
                 <a:latin typeface="Calibri"/>
               </a:rPr>
-              <a:t>–   SQL es un lenguaje declarativo: la consulta describe QUE datos se quieren y nunca COMO obtenerlos.</a:t>
+              <a:t>–   SQL es </a:t>
+            </a:r>
+            <a:r>
+              <a:rPr sz="2000" b="1" i="0">
+                <a:solidFill>
+                  <a:srgbClr val="333333"/>
+                </a:solidFill>
+                <a:latin typeface="Calibri"/>
+              </a:rPr>
+              <a:t>declarativo</a:t>
+            </a:r>
+            <a:r>
+              <a:rPr sz="2000" b="0" i="0">
+                <a:solidFill>
+                  <a:srgbClr val="333333"/>
+                </a:solidFill>
+                <a:latin typeface="Calibri"/>
+              </a:rPr>
+              <a:t>: la consulta dice qué datos quiere y nunca cómo obtenerlos.</a:t>
             </a:r>
           </a:p>
           <a:p>
@@ -15634,7 +16762,25 @@
                 </a:solidFill>
                 <a:latin typeface="Calibri"/>
               </a:rPr>
-              <a:t>–   Quien decide el como es el optimizador, un componente del motor que convierte la sentencia en un plan de ejecucion</a:t>
+              <a:t>–   El </a:t>
+            </a:r>
+            <a:r>
+              <a:rPr sz="2000" b="1" i="0">
+                <a:solidFill>
+                  <a:srgbClr val="333333"/>
+                </a:solidFill>
+                <a:latin typeface="Calibri"/>
+              </a:rPr>
+              <a:t>optimizador</a:t>
+            </a:r>
+            <a:r>
+              <a:rPr sz="2000" b="0" i="0">
+                <a:solidFill>
+                  <a:srgbClr val="333333"/>
+                </a:solidFill>
+                <a:latin typeface="Calibri"/>
+              </a:rPr>
+              <a:t> arma varios planes posibles, estima el costo de cada uno y elige el más barato.</a:t>
             </a:r>
           </a:p>
           <a:p>
@@ -15650,7 +16796,25 @@
                 </a:solidFill>
                 <a:latin typeface="Calibri"/>
               </a:rPr>
-              <a:t>–   Es decir el arbol de operaciones fisicas que se ejecutara de verdad.</a:t>
+              <a:t>–   Un </a:t>
+            </a:r>
+            <a:r>
+              <a:rPr sz="2000" b="1" i="0">
+                <a:solidFill>
+                  <a:srgbClr val="333333"/>
+                </a:solidFill>
+                <a:latin typeface="Calibri"/>
+              </a:rPr>
+              <a:t>plan de ejecución</a:t>
+            </a:r>
+            <a:r>
+              <a:rPr sz="2000" b="0" i="0">
+                <a:solidFill>
+                  <a:srgbClr val="333333"/>
+                </a:solidFill>
+                <a:latin typeface="Calibri"/>
+              </a:rPr>
+              <a:t> es el árbol de operaciones que de verdad corre: qué tabla leer, cómo y en qué orden.</a:t>
             </a:r>
           </a:p>
           <a:p>
@@ -15666,7 +16830,25 @@
                 </a:solidFill>
                 <a:latin typeface="Calibri"/>
               </a:rPr>
-              <a:t>–   Son tres etapas: el analizador verifica sintaxis y existencia de tablas y columnas.</a:t>
+              <a:t>–   Todos los planes devuelven </a:t>
+            </a:r>
+            <a:r>
+              <a:rPr sz="2000" b="1" i="0">
+                <a:solidFill>
+                  <a:srgbClr val="333333"/>
+                </a:solidFill>
+                <a:latin typeface="Calibri"/>
+              </a:rPr>
+              <a:t>el mismo resultado</a:t>
+            </a:r>
+            <a:r>
+              <a:rPr sz="2000" b="0" i="0">
+                <a:solidFill>
+                  <a:srgbClr val="333333"/>
+                </a:solidFill>
+                <a:latin typeface="Calibri"/>
+              </a:rPr>
+              <a:t>; cambia el tiempo, a veces cien o mil veces.</a:t>
             </a:r>
           </a:p>
         </p:txBody>
@@ -16174,7 +17356,25 @@
                 </a:solidFill>
                 <a:latin typeface="Calibri"/>
               </a:rPr>
-              <a:t>–   De cada plan se leen tres cosas concretas: el nodo mas costoso, las filas estimadas frente a las reales y el tiempo total.</a:t>
+              <a:t>–   EXPLAIN muestra el </a:t>
+            </a:r>
+            <a:r>
+              <a:rPr sz="2000" b="1" i="0">
+                <a:solidFill>
+                  <a:srgbClr val="333333"/>
+                </a:solidFill>
+                <a:latin typeface="Calibri"/>
+              </a:rPr>
+              <a:t>plan</a:t>
+            </a:r>
+            <a:r>
+              <a:rPr sz="2000" b="0" i="0">
+                <a:solidFill>
+                  <a:srgbClr val="333333"/>
+                </a:solidFill>
+                <a:latin typeface="Calibri"/>
+              </a:rPr>
+              <a:t> que el motor eligió, sin ejecutar la consulta.</a:t>
             </a:r>
           </a:p>
           <a:p>
@@ -16190,7 +17390,25 @@
                 </a:solidFill>
                 <a:latin typeface="Calibri"/>
               </a:rPr>
-              <a:t>–   Leer un plan tiene una regla de orden que casi nadie explica.</a:t>
+              <a:t>–   El plan es un </a:t>
+            </a:r>
+            <a:r>
+              <a:rPr sz="2000" b="1" i="0">
+                <a:solidFill>
+                  <a:srgbClr val="333333"/>
+                </a:solidFill>
+                <a:latin typeface="Calibri"/>
+              </a:rPr>
+              <a:t>árbol</a:t>
+            </a:r>
+            <a:r>
+              <a:rPr sz="2000" b="0" i="0">
+                <a:solidFill>
+                  <a:srgbClr val="333333"/>
+                </a:solidFill>
+                <a:latin typeface="Calibri"/>
+              </a:rPr>
+              <a:t>: las líneas más indentadas son las hojas y se ejecutan primero.</a:t>
             </a:r>
           </a:p>
           <a:p>
@@ -16206,7 +17424,25 @@
                 </a:solidFill>
                 <a:latin typeface="Calibri"/>
               </a:rPr>
-              <a:t>–   En PostgreSQL se escribe EXPLAIN antes de la consulta, y para la agenda de la clase aparece algo de esta forma.</a:t>
+              <a:t>–   Cada nodo recibe las filas de sus hijos; la </a:t>
+            </a:r>
+            <a:r>
+              <a:rPr sz="2000" b="1" i="0">
+                <a:solidFill>
+                  <a:srgbClr val="333333"/>
+                </a:solidFill>
+                <a:latin typeface="Calibri"/>
+              </a:rPr>
+              <a:t>primera línea</a:t>
+            </a:r>
+            <a:r>
+              <a:rPr sz="2000" b="0" i="0">
+                <a:solidFill>
+                  <a:srgbClr val="333333"/>
+                </a:solidFill>
+                <a:latin typeface="Calibri"/>
+              </a:rPr>
+              <a:t> impresa es la última operación.</a:t>
             </a:r>
           </a:p>
           <a:p>
@@ -16222,7 +17458,25 @@
                 </a:solidFill>
                 <a:latin typeface="Calibri"/>
               </a:rPr>
-              <a:t>–   Y debajo, mas indentado, un Seq Scan on cita c con el filtro del dia y un Hash construido sobre un Seq Scan on mascota m.</a:t>
+              <a:t>–   De un plan se leen el </a:t>
+            </a:r>
+            <a:r>
+              <a:rPr sz="2000" b="1" i="0">
+                <a:solidFill>
+                  <a:srgbClr val="333333"/>
+                </a:solidFill>
+                <a:latin typeface="Calibri"/>
+              </a:rPr>
+              <a:t>nodo más costoso</a:t>
+            </a:r>
+            <a:r>
+              <a:rPr sz="2000" b="0" i="0">
+                <a:solidFill>
+                  <a:srgbClr val="333333"/>
+                </a:solidFill>
+                <a:latin typeface="Calibri"/>
+              </a:rPr>
+              <a:t>, las filas estimadas contra las reales y el tiempo total.</a:t>
             </a:r>
           </a:p>
         </p:txBody>
@@ -16553,7 +17807,7 @@
         <p:spPr>
           <a:xfrm>
             <a:off x="457200" y="1261872"/>
-            <a:ext cx="11277295" cy="4568884"/>
+            <a:ext cx="11277295" cy="4917043"/>
           </a:xfrm>
           <a:prstGeom prst="roundRect">
             <a:avLst>
@@ -16803,7 +18057,7 @@
         <p:spPr>
           <a:xfrm>
             <a:off x="685800" y="1719072"/>
-            <a:ext cx="502920" cy="3974524"/>
+            <a:ext cx="502920" cy="4322683"/>
           </a:xfrm>
           <a:prstGeom prst="rect">
             <a:avLst/>
@@ -16991,6 +18245,22 @@
               <a:t>11</a:t>
             </a:r>
           </a:p>
+          <a:p>
+            <a:pPr algn="r">
+              <a:spcAft>
+                <a:spcPts val="428"/>
+              </a:spcAft>
+            </a:pPr>
+            <a:r>
+              <a:rPr sz="2000" i="0" b="0">
+                <a:solidFill>
+                  <a:srgbClr val="858585"/>
+                </a:solidFill>
+                <a:latin typeface="Consolas"/>
+              </a:rPr>
+              <a:t>12</a:t>
+            </a:r>
+          </a:p>
         </p:txBody>
       </p:sp>
       <p:sp>
@@ -17002,7 +18272,7 @@
         <p:spPr>
           <a:xfrm>
             <a:off x="1188720" y="1719072"/>
-            <a:ext cx="10271455" cy="3974524"/>
+            <a:ext cx="10271455" cy="4322683"/>
           </a:xfrm>
           <a:prstGeom prst="rect">
             <a:avLst/>
@@ -17480,7 +18750,7 @@
                 </a:solidFill>
                 <a:latin typeface="Consolas"/>
               </a:rPr>
-              <a:t>'2026-09-01 00:00:00'</a:t>
+              <a:t>'2026-03-10 00:00:00'</a:t>
             </a:r>
           </a:p>
           <a:p>
@@ -17577,7 +18847,7 @@
                 </a:solidFill>
                 <a:latin typeface="Consolas"/>
               </a:rPr>
-              <a:t>'2026-09-02 00:00:00'</a:t>
+              <a:t>'2026-03-11 00:00:00'</a:t>
             </a:r>
             <a:r>
               <a:rPr sz="2000" i="0" b="0">
@@ -17618,7 +18888,7 @@
                 </a:solidFill>
                 <a:latin typeface="Consolas"/>
               </a:rPr>
-              <a:t>-- Lo que se lee, en este orden:</a:t>
+              <a:t>-- Lo que se lee, en este orden (base de la clase, sin indices):</a:t>
             </a:r>
           </a:p>
           <a:p>
@@ -17643,6 +18913,42 @@
                 </a:solidFill>
                 <a:latin typeface="Consolas"/>
               </a:rPr>
+              <a:t>el</a:t>
+            </a:r>
+            <a:r>
+              <a:rPr sz="2000" i="0" b="0">
+                <a:solidFill>
+                  <a:srgbClr val="D4D4D4"/>
+                </a:solidFill>
+                <a:latin typeface="Consolas"/>
+              </a:rPr>
+              <a:t> </a:t>
+            </a:r>
+            <a:r>
+              <a:rPr sz="2000" i="0" b="0">
+                <a:solidFill>
+                  <a:srgbClr val="D4D4D4"/>
+                </a:solidFill>
+                <a:latin typeface="Consolas"/>
+              </a:rPr>
+              <a:t>nodo</a:t>
+            </a:r>
+            <a:r>
+              <a:rPr sz="2000" i="0" b="0">
+                <a:solidFill>
+                  <a:srgbClr val="D4D4D4"/>
+                </a:solidFill>
+                <a:latin typeface="Consolas"/>
+              </a:rPr>
+              <a:t>:    </a:t>
+            </a:r>
+            <a:r>
+              <a:rPr sz="2000" i="0" b="0">
+                <a:solidFill>
+                  <a:srgbClr val="D4D4D4"/>
+                </a:solidFill>
+                <a:latin typeface="Consolas"/>
+              </a:rPr>
               <a:t>Seq</a:t>
             </a:r>
             <a:r>
@@ -17662,6 +18968,60 @@
                 <a:latin typeface="Consolas"/>
               </a:rPr>
               <a:t>Scan</a:t>
+            </a:r>
+            <a:r>
+              <a:rPr sz="2000" i="0" b="0">
+                <a:solidFill>
+                  <a:srgbClr val="D4D4D4"/>
+                </a:solidFill>
+                <a:latin typeface="Consolas"/>
+              </a:rPr>
+              <a:t> </a:t>
+            </a:r>
+            <a:r>
+              <a:rPr sz="2000" i="0" b="0">
+                <a:solidFill>
+                  <a:srgbClr val="569CD6"/>
+                </a:solidFill>
+                <a:latin typeface="Consolas"/>
+              </a:rPr>
+              <a:t>on</a:t>
+            </a:r>
+            <a:r>
+              <a:rPr sz="2000" i="0" b="0">
+                <a:solidFill>
+                  <a:srgbClr val="D4D4D4"/>
+                </a:solidFill>
+                <a:latin typeface="Consolas"/>
+              </a:rPr>
+              <a:t> </a:t>
+            </a:r>
+            <a:r>
+              <a:rPr sz="2000" i="0" b="0">
+                <a:solidFill>
+                  <a:srgbClr val="D4D4D4"/>
+                </a:solidFill>
+                <a:latin typeface="Consolas"/>
+              </a:rPr>
+              <a:t>cita</a:t>
+            </a:r>
+            <a:r>
+              <a:rPr sz="2000" i="0" b="0">
+                <a:solidFill>
+                  <a:srgbClr val="D4D4D4"/>
+                </a:solidFill>
+                <a:latin typeface="Consolas"/>
+              </a:rPr>
+              <a:t> </a:t>
+            </a:r>
+            <a:r>
+              <a:rPr sz="2000" i="0" b="0">
+                <a:solidFill>
+                  <a:srgbClr val="D4D4D4"/>
+                </a:solidFill>
+                <a:latin typeface="Consolas"/>
+              </a:rPr>
+              <a:t>c</a:t>
             </a:r>
             <a:r>
               <a:rPr sz="2000" i="0" b="0">
@@ -17743,148 +19103,13 @@
               </a:spcAft>
             </a:pPr>
             <a:r>
-              <a:rPr sz="2000" i="0" b="0">
-                <a:solidFill>
-                  <a:srgbClr val="D4D4D4"/>
-                </a:solidFill>
-                <a:latin typeface="Consolas"/>
-              </a:rPr>
-              <a:t>--   </a:t>
-            </a:r>
-            <a:r>
-              <a:rPr sz="2000" i="0" b="0">
-                <a:solidFill>
-                  <a:srgbClr val="569CD6"/>
-                </a:solidFill>
-                <a:latin typeface="Consolas"/>
-              </a:rPr>
-              <a:t>Index</a:t>
-            </a:r>
-            <a:r>
-              <a:rPr sz="2000" i="0" b="0">
-                <a:solidFill>
-                  <a:srgbClr val="D4D4D4"/>
-                </a:solidFill>
-                <a:latin typeface="Consolas"/>
-              </a:rPr>
-              <a:t> </a:t>
-            </a:r>
-            <a:r>
-              <a:rPr sz="2000" i="0" b="0">
-                <a:solidFill>
-                  <a:srgbClr val="D4D4D4"/>
-                </a:solidFill>
-                <a:latin typeface="Consolas"/>
-              </a:rPr>
-              <a:t>Scan</a:t>
-            </a:r>
-            <a:r>
-              <a:rPr sz="2000" i="0" b="0">
-                <a:solidFill>
-                  <a:srgbClr val="D4D4D4"/>
-                </a:solidFill>
-                <a:latin typeface="Consolas"/>
-              </a:rPr>
-              <a:t> / </a:t>
-            </a:r>
-            <a:r>
-              <a:rPr sz="2000" i="0" b="0">
-                <a:solidFill>
-                  <a:srgbClr val="D4D4D4"/>
-                </a:solidFill>
-                <a:latin typeface="Consolas"/>
-              </a:rPr>
-              <a:t>Bitmap</a:t>
-            </a:r>
-            <a:r>
-              <a:rPr sz="2000" i="0" b="0">
-                <a:solidFill>
-                  <a:srgbClr val="D4D4D4"/>
-                </a:solidFill>
-                <a:latin typeface="Consolas"/>
-              </a:rPr>
-              <a:t> </a:t>
-            </a:r>
-            <a:r>
-              <a:rPr sz="2000" i="0" b="0">
-                <a:solidFill>
-                  <a:srgbClr val="D4D4D4"/>
-                </a:solidFill>
-                <a:latin typeface="Consolas"/>
-              </a:rPr>
-              <a:t>Heap</a:t>
-            </a:r>
-            <a:r>
-              <a:rPr sz="2000" i="0" b="0">
-                <a:solidFill>
-                  <a:srgbClr val="D4D4D4"/>
-                </a:solidFill>
-                <a:latin typeface="Consolas"/>
-              </a:rPr>
-              <a:t> </a:t>
-            </a:r>
-            <a:r>
-              <a:rPr sz="2000" i="0" b="0">
-                <a:solidFill>
-                  <a:srgbClr val="D4D4D4"/>
-                </a:solidFill>
-                <a:latin typeface="Consolas"/>
-              </a:rPr>
-              <a:t>Scan</a:t>
-            </a:r>
-            <a:r>
-              <a:rPr sz="2000" i="0" b="0">
-                <a:solidFill>
-                  <a:srgbClr val="D4D4D4"/>
-                </a:solidFill>
-                <a:latin typeface="Consolas"/>
-              </a:rPr>
-              <a:t> -&gt; </a:t>
-            </a:r>
-            <a:r>
-              <a:rPr sz="2000" i="0" b="0">
-                <a:solidFill>
-                  <a:srgbClr val="D4D4D4"/>
-                </a:solidFill>
-                <a:latin typeface="Consolas"/>
-              </a:rPr>
-              <a:t>usa</a:t>
-            </a:r>
-            <a:r>
-              <a:rPr sz="2000" i="0" b="0">
-                <a:solidFill>
-                  <a:srgbClr val="D4D4D4"/>
-                </a:solidFill>
-                <a:latin typeface="Consolas"/>
-              </a:rPr>
-              <a:t> </a:t>
-            </a:r>
-            <a:r>
-              <a:rPr sz="2000" i="0" b="0">
-                <a:solidFill>
-                  <a:srgbClr val="D4D4D4"/>
-                </a:solidFill>
-                <a:latin typeface="Consolas"/>
-              </a:rPr>
-              <a:t>el</a:t>
-            </a:r>
-            <a:r>
-              <a:rPr sz="2000" i="0" b="0">
-                <a:solidFill>
-                  <a:srgbClr val="D4D4D4"/>
-                </a:solidFill>
-                <a:latin typeface="Consolas"/>
-              </a:rPr>
-              <a:t> </a:t>
-            </a:r>
-            <a:r>
-              <a:rPr sz="2000" i="0" b="0">
-                <a:solidFill>
-                  <a:srgbClr val="D4D4D4"/>
-                </a:solidFill>
-                <a:latin typeface="Consolas"/>
-              </a:rPr>
-              <a:t>indice</a:t>
+              <a:rPr sz="2000" i="1" b="0">
+                <a:solidFill>
+                  <a:srgbClr val="6A9955"/>
+                </a:solidFill>
+                <a:latin typeface="Consolas"/>
+              </a:rPr>
+              <a:t>--   las filas:  rows=150 estimadas contra actual rows=150 reales</a:t>
             </a:r>
           </a:p>
           <a:p>
@@ -17900,7 +19125,7 @@
                 </a:solidFill>
                 <a:latin typeface="Consolas"/>
               </a:rPr>
-              <a:t>--   actual time=...  el tiempo REAL (EXPLAIN solo estima; ANALYZE ejecuta)</a:t>
+              <a:t>--   el filtro:  Rows Removed by Filter: 29860</a:t>
             </a:r>
           </a:p>
           <a:p>
@@ -17916,7 +19141,23 @@
                 </a:solidFill>
                 <a:latin typeface="Consolas"/>
               </a:rPr>
-              <a:t>--   rows=...  comparar con las filas estimadas: si difieren mucho, ANALYZE</a:t>
+              <a:t>--   la lectura: Buffers: shared hit=251  (paginas de 8 KB)</a:t>
+            </a:r>
+          </a:p>
+          <a:p>
+            <a:pPr>
+              <a:spcAft>
+                <a:spcPts val="428"/>
+              </a:spcAft>
+            </a:pPr>
+            <a:r>
+              <a:rPr sz="2000" i="1" b="0">
+                <a:solidFill>
+                  <a:srgbClr val="6A9955"/>
+                </a:solidFill>
+                <a:latin typeface="Consolas"/>
+              </a:rPr>
+              <a:t>--   el total:   Execution Time: ... ms  (cambia entre corridas)</a:t>
             </a:r>
           </a:p>
         </p:txBody>
@@ -18138,14 +19379,83 @@
       </p:sp>
       <p:sp>
         <p:nvSpPr>
-          <p:cNvPr id="6" name="TextBox 5"/>
+          <p:cNvPr id="6" name="Rounded Rectangle 5"/>
+          <p:cNvSpPr/>
+          <p:nvPr/>
+        </p:nvSpPr>
+        <p:spPr>
+          <a:xfrm>
+            <a:off x="5797149" y="1449082"/>
+            <a:ext cx="6010497" cy="4837658"/>
+          </a:xfrm>
+          <a:prstGeom prst="roundRect">
+            <a:avLst>
+              <a:gd name="adj" fmla="val 4000"/>
+            </a:avLst>
+          </a:prstGeom>
+          <a:solidFill>
+            <a:srgbClr val="E8EEF4"/>
+          </a:solidFill>
+          <a:ln>
+            <a:noFill/>
+          </a:ln>
+        </p:spPr>
+        <p:style>
+          <a:lnRef idx="1">
+            <a:schemeClr val="accent1"/>
+          </a:lnRef>
+          <a:fillRef idx="3">
+            <a:schemeClr val="accent1"/>
+          </a:fillRef>
+          <a:effectRef idx="2">
+            <a:schemeClr val="accent1"/>
+          </a:effectRef>
+          <a:fontRef idx="minor">
+            <a:schemeClr val="lt1"/>
+          </a:fontRef>
+        </p:style>
+        <p:txBody>
+          <a:bodyPr rtlCol="0" anchor="ctr"/>
+          <a:lstStyle/>
+          <a:p>
+            <a:pPr algn="ctr"/>
+          </a:p>
+        </p:txBody>
+      </p:sp>
+      <p:pic>
+        <p:nvPicPr>
+          <p:cNvPr id="7" name="Picture 6" descr="ilus-plan-campos-paso1.png"/>
+          <p:cNvPicPr>
+            <a:picLocks noChangeAspect="1"/>
+          </p:cNvPicPr>
+          <p:nvPr/>
+        </p:nvPicPr>
+        <p:blipFill>
+          <a:blip r:embed="rId2"/>
+          <a:stretch>
+            <a:fillRect/>
+          </a:stretch>
+        </p:blipFill>
+        <p:spPr>
+          <a:xfrm>
+            <a:off x="5870301" y="1522234"/>
+            <a:ext cx="5864193" cy="4691354"/>
+          </a:xfrm>
+          <a:prstGeom prst="rect">
+            <a:avLst/>
+          </a:prstGeom>
+        </p:spPr>
+      </p:pic>
+      <p:sp>
+        <p:nvSpPr>
+          <p:cNvPr id="8" name="TextBox 7"/>
           <p:cNvSpPr txBox="1"/>
           <p:nvPr/>
         </p:nvSpPr>
         <p:spPr>
           <a:xfrm>
-            <a:off x="457200" y="1380744"/>
-            <a:ext cx="11277295" cy="5020056"/>
+            <a:off x="457200" y="1563624"/>
+            <a:ext cx="5093061" cy="4837176"/>
           </a:xfrm>
           <a:prstGeom prst="rect">
             <a:avLst/>
@@ -18170,7 +19480,7 @@
                 </a:solidFill>
                 <a:latin typeface="Calibri"/>
               </a:rPr>
-              <a:t>–   </a:t>
+              <a:t>–   El campo </a:t>
             </a:r>
             <a:r>
               <a:rPr sz="2000" b="1" i="0">
@@ -18179,7 +19489,7 @@
                 </a:solidFill>
                 <a:latin typeface="Calibri"/>
               </a:rPr>
-              <a:t>El orden de lectura.</a:t>
+              <a:t>cost</a:t>
             </a:r>
             <a:r>
               <a:rPr sz="2000" b="0" i="0">
@@ -18188,61 +19498,7 @@
                 </a:solidFill>
                 <a:latin typeface="Calibri"/>
               </a:rPr>
-              <a:t> El plan </a:t>
-            </a:r>
-            <a:r>
-              <a:rPr sz="2000" b="1" i="0">
-                <a:solidFill>
-                  <a:srgbClr val="333333"/>
-                </a:solidFill>
-                <a:latin typeface="Calibri"/>
-              </a:rPr>
-              <a:t>no</a:t>
-            </a:r>
-            <a:r>
-              <a:rPr sz="2000" b="0" i="0">
-                <a:solidFill>
-                  <a:srgbClr val="333333"/>
-                </a:solidFill>
-                <a:latin typeface="Calibri"/>
-              </a:rPr>
-              <a:t> es una lista de pasos de arriba hacia abajo: es un arbol. Los nodos </a:t>
-            </a:r>
-            <a:r>
-              <a:rPr sz="2000" b="1" i="0">
-                <a:solidFill>
-                  <a:srgbClr val="333333"/>
-                </a:solidFill>
-                <a:latin typeface="Calibri"/>
-              </a:rPr>
-              <a:t>mas indentados son las hojas</a:t>
-            </a:r>
-            <a:r>
-              <a:rPr sz="2000" b="0" i="0">
-                <a:solidFill>
-                  <a:srgbClr val="333333"/>
-                </a:solidFill>
-                <a:latin typeface="Calibri"/>
-              </a:rPr>
-              <a:t> y se ejecutan primero; cada nodo consume las filas de sus hijos. La </a:t>
-            </a:r>
-            <a:r>
-              <a:rPr sz="2000" b="1" i="0">
-                <a:solidFill>
-                  <a:srgbClr val="333333"/>
-                </a:solidFill>
-                <a:latin typeface="Calibri"/>
-              </a:rPr>
-              <a:t>primera linea impresa es la ULTIMA operacion</a:t>
-            </a:r>
-            <a:r>
-              <a:rPr sz="2000" b="0" i="0">
-                <a:solidFill>
-                  <a:srgbClr val="333333"/>
-                </a:solidFill>
-                <a:latin typeface="Calibri"/>
-              </a:rPr>
-              <a:t>.</a:t>
+              <a:t> está en una unidad relativa del motor, no en milisegundos.</a:t>
             </a:r>
           </a:p>
           <a:p>
@@ -18258,7 +19514,7 @@
                 </a:solidFill>
                 <a:latin typeface="Calibri"/>
               </a:rPr>
-              <a:t>–   </a:t>
+              <a:t>–   Las filas estimadas (</a:t>
             </a:r>
             <a:r>
               <a:rPr sz="2000" b="1" i="0">
@@ -18267,7 +19523,7 @@
                 </a:solidFill>
                 <a:latin typeface="Calibri"/>
               </a:rPr>
-              <a:t>Los cuatro campos.</a:t>
+              <a:t>rows</a:t>
             </a:r>
             <a:r>
               <a:rPr sz="2000" b="0" i="0">
@@ -18276,7 +19532,7 @@
                 </a:solidFill>
                 <a:latin typeface="Calibri"/>
               </a:rPr>
-              <a:t> «cost=270.00..4821.50» son arranque y total en una unidad </a:t>
+              <a:t>) se comparan con las reales (</a:t>
             </a:r>
             <a:r>
               <a:rPr sz="2000" b="1" i="0">
@@ -18285,7 +19541,7 @@
                 </a:solidFill>
                 <a:latin typeface="Calibri"/>
               </a:rPr>
-              <a:t>relativa</a:t>
+              <a:t>actual rows</a:t>
             </a:r>
             <a:r>
               <a:rPr sz="2000" b="0" i="0">
@@ -18294,61 +19550,7 @@
                 </a:solidFill>
                 <a:latin typeface="Calibri"/>
               </a:rPr>
-              <a:t> (1.0 = leer una pagina de 8 KB), </a:t>
-            </a:r>
-            <a:r>
-              <a:rPr sz="2000" b="1" i="0">
-                <a:solidFill>
-                  <a:srgbClr val="333333"/>
-                </a:solidFill>
-                <a:latin typeface="Calibri"/>
-              </a:rPr>
-              <a:t>no</a:t>
-            </a:r>
-            <a:r>
-              <a:rPr sz="2000" b="0" i="0">
-                <a:solidFill>
-                  <a:srgbClr val="333333"/>
-                </a:solidFill>
-                <a:latin typeface="Calibri"/>
-              </a:rPr>
-              <a:t> milisegundos; «rows=» son las filas que el motor </a:t>
-            </a:r>
-            <a:r>
-              <a:rPr sz="2000" b="1" i="0">
-                <a:solidFill>
-                  <a:srgbClr val="333333"/>
-                </a:solidFill>
-                <a:latin typeface="Calibri"/>
-              </a:rPr>
-              <a:t>estima</a:t>
-            </a:r>
-            <a:r>
-              <a:rPr sz="2000" b="0" i="0">
-                <a:solidFill>
-                  <a:srgbClr val="333333"/>
-                </a:solidFill>
-                <a:latin typeface="Calibri"/>
-              </a:rPr>
-              <a:t>; «width=» el ancho de la fila en bytes; «loops=» cuantas </a:t>
-            </a:r>
-            <a:r>
-              <a:rPr sz="2000" b="1" i="0">
-                <a:solidFill>
-                  <a:srgbClr val="333333"/>
-                </a:solidFill>
-                <a:latin typeface="Calibri"/>
-              </a:rPr>
-              <a:t>veces se repitio</a:t>
-            </a:r>
-            <a:r>
-              <a:rPr sz="2000" b="0" i="0">
-                <a:solidFill>
-                  <a:srgbClr val="333333"/>
-                </a:solidFill>
-                <a:latin typeface="Calibri"/>
-              </a:rPr>
-              <a:t> ese nodo.</a:t>
+              <a:t>).</a:t>
             </a:r>
           </a:p>
           <a:p>
@@ -18364,7 +19566,7 @@
                 </a:solidFill>
                 <a:latin typeface="Calibri"/>
               </a:rPr>
-              <a:t>–   </a:t>
+              <a:t>–   El tiempo real (</a:t>
             </a:r>
             <a:r>
               <a:rPr sz="2000" b="1" i="0">
@@ -18373,7 +19575,7 @@
                 </a:solidFill>
                 <a:latin typeface="Calibri"/>
               </a:rPr>
-              <a:t>«EXPLAIN» estima, «EXPLAIN ANALYZE» ejecuta.</a:t>
+              <a:t>actual time</a:t>
             </a:r>
             <a:r>
               <a:rPr sz="2000" b="0" i="0">
@@ -18382,7 +19584,7 @@
                 </a:solidFill>
                 <a:latin typeface="Calibri"/>
               </a:rPr>
-              <a:t> El segundo agrega «actual time=», «actual rows=» y el «Execution Time» final. Y ejecuta </a:t>
+              <a:t>) es por vuelta: se multiplica por </a:t>
             </a:r>
             <a:r>
               <a:rPr sz="2000" b="1" i="0">
@@ -18391,7 +19593,7 @@
                 </a:solidFill>
                 <a:latin typeface="Calibri"/>
               </a:rPr>
-              <a:t>de verdad</a:t>
+              <a:t>loops</a:t>
             </a:r>
             <a:r>
               <a:rPr sz="2000" b="0" i="0">
@@ -18400,7 +19602,7 @@
                 </a:solidFill>
                 <a:latin typeface="Calibri"/>
               </a:rPr>
-              <a:t>: sobre un «UPDATE» o «DELETE» hay que envolverlo en «BEGIN» … «ROLLBACK» (eso es la Clase 8). Con «SELECT» no hay riesgo.</a:t>
+              <a:t>.</a:t>
             </a:r>
           </a:p>
           <a:p>
@@ -18416,7 +19618,7 @@
                 </a:solidFill>
                 <a:latin typeface="Calibri"/>
               </a:rPr>
-              <a:t>–   </a:t>
+              <a:t>–   Diez veces o más entre estimado y real delata </a:t>
             </a:r>
             <a:r>
               <a:rPr sz="2000" b="1" i="0">
@@ -18425,7 +19627,7 @@
                 </a:solidFill>
                 <a:latin typeface="Calibri"/>
               </a:rPr>
-              <a:t>Estimado contra real: la senal.</a:t>
+              <a:t>estadísticas</a:t>
             </a:r>
             <a:r>
               <a:rPr sz="2000" b="0" i="0">
@@ -18434,102 +19636,14 @@
                 </a:solidFill>
                 <a:latin typeface="Calibri"/>
               </a:rPr>
-              <a:t> Una divergencia de 2 veces es normal; de </a:t>
-            </a:r>
-            <a:r>
-              <a:rPr sz="2000" b="1" i="0">
-                <a:solidFill>
-                  <a:srgbClr val="333333"/>
-                </a:solidFill>
-                <a:latin typeface="Calibri"/>
-              </a:rPr>
-              <a:t>10 veces o mas</a:t>
-            </a:r>
-            <a:r>
-              <a:rPr sz="2000" b="0" i="0">
-                <a:solidFill>
-                  <a:srgbClr val="333333"/>
-                </a:solidFill>
-                <a:latin typeface="Calibri"/>
-              </a:rPr>
-              <a:t> delata estadisticas viejas o predicados que el motor cree independientes y no lo son.</a:t>
-            </a:r>
-          </a:p>
-          <a:p>
-            <a:pPr>
-              <a:spcAft>
-                <a:spcPts val="800"/>
-              </a:spcAft>
-            </a:pPr>
-            <a:r>
-              <a:rPr sz="2000" b="0" i="0">
-                <a:solidFill>
-                  <a:srgbClr val="333333"/>
-                </a:solidFill>
-                <a:latin typeface="Calibri"/>
-              </a:rPr>
-              <a:t>–   </a:t>
-            </a:r>
-            <a:r>
-              <a:rPr sz="2000" b="1" i="0">
-                <a:solidFill>
-                  <a:srgbClr val="333333"/>
-                </a:solidFill>
-                <a:latin typeface="Calibri"/>
-              </a:rPr>
-              <a:t>El nodo mas costoso, sin trampa.</a:t>
-            </a:r>
-            <a:r>
-              <a:rPr sz="2000" b="0" i="0">
-                <a:solidFill>
-                  <a:srgbClr val="333333"/>
-                </a:solidFill>
-                <a:latin typeface="Calibri"/>
-              </a:rPr>
-              <a:t> El tiempo de un nodo </a:t>
-            </a:r>
-            <a:r>
-              <a:rPr sz="2000" b="1" i="0">
-                <a:solidFill>
-                  <a:srgbClr val="333333"/>
-                </a:solidFill>
-                <a:latin typeface="Calibri"/>
-              </a:rPr>
-              <a:t>incluye el de sus hijos</a:t>
-            </a:r>
-            <a:r>
-              <a:rPr sz="2000" b="0" i="0">
-                <a:solidFill>
-                  <a:srgbClr val="333333"/>
-                </a:solidFill>
-                <a:latin typeface="Calibri"/>
-              </a:rPr>
-              <a:t>, y «actual time» es </a:t>
-            </a:r>
-            <a:r>
-              <a:rPr sz="2000" b="1" i="0">
-                <a:solidFill>
-                  <a:srgbClr val="333333"/>
-                </a:solidFill>
-                <a:latin typeface="Calibri"/>
-              </a:rPr>
-              <a:t>por vuelta</a:t>
-            </a:r>
-            <a:r>
-              <a:rPr sz="2000" b="0" i="0">
-                <a:solidFill>
-                  <a:srgbClr val="333333"/>
-                </a:solidFill>
-                <a:latin typeface="Calibri"/>
-              </a:rPr>
-              <a:t>: hay que multiplicarlo por «loops». Un nodo de 0,5 ms con «loops=2006» cuesta un segundo — mas que el «Seq Scan» de arriba que parece el culpable.</a:t>
-            </a:r>
-          </a:p>
-        </p:txBody>
-      </p:sp>
-      <p:sp>
-        <p:nvSpPr>
-          <p:cNvPr id="7" name="TextBox 6"/>
+              <a:t> viejas o filtros que dependen entre sí.</a:t>
+            </a:r>
+          </a:p>
+        </p:txBody>
+      </p:sp>
+      <p:sp>
+        <p:nvSpPr>
+          <p:cNvPr id="9" name="TextBox 8"/>
           <p:cNvSpPr txBox="1"/>
           <p:nvPr/>
         </p:nvSpPr>
@@ -18894,7 +20008,25 @@
                 </a:solidFill>
                 <a:latin typeface="Calibri"/>
               </a:rPr>
-              <a:t>–   Las estadisticas del optimizador son los metadatos que describen los datos sin leerlos: filas de la tabla, bloques que ocupa</a:t>
+              <a:t>–   Las </a:t>
+            </a:r>
+            <a:r>
+              <a:rPr sz="2000" b="1" i="0">
+                <a:solidFill>
+                  <a:srgbClr val="333333"/>
+                </a:solidFill>
+                <a:latin typeface="Calibri"/>
+              </a:rPr>
+              <a:t>estadísticas</a:t>
+            </a:r>
+            <a:r>
+              <a:rPr sz="2000" b="0" i="0">
+                <a:solidFill>
+                  <a:srgbClr val="333333"/>
+                </a:solidFill>
+                <a:latin typeface="Calibri"/>
+              </a:rPr>
+              <a:t> describen los datos sin leerlos: filas, páginas, valores distintos y nulos.</a:t>
             </a:r>
           </a:p>
           <a:p>
@@ -18910,7 +20042,25 @@
                 </a:solidFill>
                 <a:latin typeface="Calibri"/>
               </a:rPr>
-              <a:t>–   Valores distintos por columna, fraccion de nulos y un histograma que reparte los valores en cubos para saber si estan parejos o concentrados.</a:t>
+              <a:t>–   Se recolectan con </a:t>
+            </a:r>
+            <a:r>
+              <a:rPr sz="2000" b="1" i="0">
+                <a:solidFill>
+                  <a:srgbClr val="333333"/>
+                </a:solidFill>
+                <a:latin typeface="Calibri"/>
+              </a:rPr>
+              <a:t>ANALYZE</a:t>
+            </a:r>
+            <a:r>
+              <a:rPr sz="2000" b="0" i="0">
+                <a:solidFill>
+                  <a:srgbClr val="333333"/>
+                </a:solidFill>
+                <a:latin typeface="Calibri"/>
+              </a:rPr>
+              <a:t>; en la base de hoy ya están al día.</a:t>
             </a:r>
           </a:p>
           <a:p>
@@ -18926,7 +20076,25 @@
                 </a:solidFill>
                 <a:latin typeface="Calibri"/>
               </a:rPr>
-              <a:t>–   PostgreSQL las recolecta con ANALYZE cita, con 100 cubos por columna por omision</a:t>
+              <a:t>–   También guardan cómo se </a:t>
+            </a:r>
+            <a:r>
+              <a:rPr sz="2000" b="1" i="0">
+                <a:solidFill>
+                  <a:srgbClr val="333333"/>
+                </a:solidFill>
+                <a:latin typeface="Calibri"/>
+              </a:rPr>
+              <a:t>reparten</a:t>
+            </a:r>
+            <a:r>
+              <a:rPr sz="2000" b="0" i="0">
+                <a:solidFill>
+                  <a:srgbClr val="333333"/>
+                </a:solidFill>
+                <a:latin typeface="Calibri"/>
+              </a:rPr>
+              <a:t> los valores: estado concentrado, fecha_hora pareja.</a:t>
             </a:r>
           </a:p>
           <a:p>
@@ -18942,7 +20110,25 @@
                 </a:solidFill>
                 <a:latin typeface="Calibri"/>
               </a:rPr>
-              <a:t>–   Oracle usa DBMS_STATS.GATHER_TABLE_STATS(USER, 'CITA') y las expone en USER_TABLES.NUM_ROWS.</a:t>
+              <a:t>–   Por eso el </a:t>
+            </a:r>
+            <a:r>
+              <a:rPr sz="2000" b="1" i="0">
+                <a:solidFill>
+                  <a:srgbClr val="333333"/>
+                </a:solidFill>
+                <a:latin typeface="Calibri"/>
+              </a:rPr>
+              <a:t>plan</a:t>
+            </a:r>
+            <a:r>
+              <a:rPr sz="2000" b="0" i="0">
+                <a:solidFill>
+                  <a:srgbClr val="333333"/>
+                </a:solidFill>
+                <a:latin typeface="Calibri"/>
+              </a:rPr>
+              <a:t> puede cambiar sin tocar la consulta: cambiaron los datos o sus estadísticas.</a:t>
             </a:r>
           </a:p>
         </p:txBody>
@@ -19450,7 +20636,25 @@
                 </a:solidFill>
                 <a:latin typeface="Calibri"/>
               </a:rPr>
-              <a:t>–   La cardinalidad de una columna es la cantidad de valores distintos que contiene.</a:t>
+              <a:t>–   La </a:t>
+            </a:r>
+            <a:r>
+              <a:rPr sz="2000" b="1" i="0">
+                <a:solidFill>
+                  <a:srgbClr val="333333"/>
+                </a:solidFill>
+                <a:latin typeface="Calibri"/>
+              </a:rPr>
+              <a:t>cardinalidad</a:t>
+            </a:r>
+            <a:r>
+              <a:rPr sz="2000" b="0" i="0">
+                <a:solidFill>
+                  <a:srgbClr val="333333"/>
+                </a:solidFill>
+                <a:latin typeface="Calibri"/>
+              </a:rPr>
+              <a:t> de una columna es cuántos valores distintos tiene: estado tiene 3.</a:t>
             </a:r>
           </a:p>
           <a:p>
@@ -19466,7 +20670,25 @@
                 </a:solidFill>
                 <a:latin typeface="Calibri"/>
               </a:rPr>
-              <a:t>–   La selectividad de un predicado es la fraccion de filas que sobreviven al filtro, entre 0 y 1, y es lo que el optimizador calcula con las…</a:t>
+              <a:t>–   La </a:t>
+            </a:r>
+            <a:r>
+              <a:rPr sz="2000" b="1" i="0">
+                <a:solidFill>
+                  <a:srgbClr val="333333"/>
+                </a:solidFill>
+                <a:latin typeface="Calibri"/>
+              </a:rPr>
+              <a:t>selectividad</a:t>
+            </a:r>
+            <a:r>
+              <a:rPr sz="2000" b="0" i="0">
+                <a:solidFill>
+                  <a:srgbClr val="333333"/>
+                </a:solidFill>
+                <a:latin typeface="Calibri"/>
+              </a:rPr>
+              <a:t> de un filtro es la fracción de filas que deja pasar, entre 0 y 1.</a:t>
             </a:r>
           </a:p>
           <a:p>
@@ -19482,7 +20704,25 @@
                 </a:solidFill>
                 <a:latin typeface="Calibri"/>
               </a:rPr>
-              <a:t>–   Las cifras que hay que usar son las de la base de la clase, no unas inventadas</a:t>
+              <a:t>–   El filtro </a:t>
+            </a:r>
+            <a:r>
+              <a:rPr sz="2000" b="1" i="0">
+                <a:solidFill>
+                  <a:srgbClr val="333333"/>
+                </a:solidFill>
+                <a:latin typeface="Calibri"/>
+              </a:rPr>
+              <a:t>estado = 'PROGRAMADA'</a:t>
+            </a:r>
+            <a:r>
+              <a:rPr sz="2000" b="0" i="0">
+                <a:solidFill>
+                  <a:srgbClr val="333333"/>
+                </a:solidFill>
+                <a:latin typeface="Calibri"/>
+              </a:rPr>
+              <a:t> deja pasar el 61 %, y la fecha del 2026-03-10 apenas el 0,5 %.</a:t>
             </a:r>
           </a:p>
           <a:p>
@@ -19498,7 +20738,43 @@
                 </a:solidFill>
                 <a:latin typeface="Calibri"/>
               </a:rPr>
-              <a:t>–   Porque el estudiante las va a ver en su pantalla: 2.006 duenos.</a:t>
+              <a:t>–   Pocas filas favorecen un </a:t>
+            </a:r>
+            <a:r>
+              <a:rPr sz="2000" b="1" i="0">
+                <a:solidFill>
+                  <a:srgbClr val="333333"/>
+                </a:solidFill>
+                <a:latin typeface="Calibri"/>
+              </a:rPr>
+              <a:t>índice</a:t>
+            </a:r>
+            <a:r>
+              <a:rPr sz="2000" b="0" i="0">
+                <a:solidFill>
+                  <a:srgbClr val="333333"/>
+                </a:solidFill>
+                <a:latin typeface="Calibri"/>
+              </a:rPr>
+              <a:t>; muchas, leer la </a:t>
+            </a:r>
+            <a:r>
+              <a:rPr sz="2000" b="1" i="0">
+                <a:solidFill>
+                  <a:srgbClr val="333333"/>
+                </a:solidFill>
+                <a:latin typeface="Calibri"/>
+              </a:rPr>
+              <a:t>tabla entera</a:t>
+            </a:r>
+            <a:r>
+              <a:rPr sz="2000" b="0" i="0">
+                <a:solidFill>
+                  <a:srgbClr val="333333"/>
+                </a:solidFill>
+                <a:latin typeface="Calibri"/>
+              </a:rPr>
+              <a:t>.</a:t>
             </a:r>
           </a:p>
         </p:txBody>
